--- a/ppt/ETL_Incident_Diagnosis_Deck.pptx
+++ b/ppt/ETL_Incident_Diagnosis_Deck.pptx
@@ -4,20 +4,18 @@
   <p:sldMasterIdLst>
     <p:sldMasterId id="2147483648" r:id="rId1"/>
   </p:sldMasterIdLst>
+  <p:notesMasterIdLst>
+    <p:notesMasterId r:id="rId10"/>
+  </p:notesMasterIdLst>
   <p:sldIdLst>
     <p:sldId id="256" r:id="rId2"/>
     <p:sldId id="257" r:id="rId3"/>
     <p:sldId id="258" r:id="rId4"/>
     <p:sldId id="259" r:id="rId5"/>
+    <p:sldId id="264" r:id="rId15"/>
     <p:sldId id="260" r:id="rId6"/>
-    <p:sldId id="261" r:id="rId7"/>
-    <p:sldId id="262" r:id="rId8"/>
     <p:sldId id="263" r:id="rId9"/>
-    <p:sldId id="264" r:id="rId10"/>
   </p:sldIdLst>
-  <p:notesMasterIdLst>
-    <p:notesMasterId r:id="rId11"/>
-  </p:notesMasterIdLst>
   <p:sldSz cx="12192000" cy="6858000"/>
   <p:notesSz cx="6858000" cy="12192000"/>
   <p:defaultTextStyle>
@@ -112,6 +110,11 @@
       </a:defRPr>
     </a:lvl9pPr>
   </p:defaultTextStyle>
+  <p:extLst>
+    <p:ext uri="{EFAFB233-063F-42B5-8137-9DF3F51BA10A}">
+      <p15:sldGuideLst xmlns:p15="http://schemas.microsoft.com/office/powerpoint/2012/main"/>
+    </p:ext>
+  </p:extLst>
 </p:presentation>
 </file>
 
@@ -137,234 +140,10 @@
           <a:chExt cx="0" cy="0"/>
         </a:xfrm>
       </p:grpSpPr>
-      <p:sp>
-        <p:nvSpPr>
-          <p:cNvPr id="2" name="Header Placeholder 1"/>
-          <p:cNvSpPr>
-            <a:spLocks noGrp="1"/>
-          </p:cNvSpPr>
-          <p:nvPr>
-            <p:ph type="hdr" sz="quarter"/>
-          </p:nvPr>
-        </p:nvSpPr>
-        <p:spPr>
-          <a:xfrm>
-            <a:off x="0" y="0"/>
-            <a:ext cx="2971800" cy="458788"/>
-          </a:xfrm>
-          <a:prstGeom prst="rect">
-            <a:avLst/>
-          </a:prstGeom>
-        </p:spPr>
-        <p:txBody>
-          <a:bodyPr vert="horz" lIns="91440" tIns="45720" rIns="91440" bIns="45720" rtlCol="0"/>
-          <a:lstStyle>
-            <a:lvl1pPr algn="l">
-              <a:defRPr sz="1200"/>
-            </a:lvl1pPr>
-          </a:lstStyle>
-          <a:p>
-            <a:endParaRPr lang="en-US"/>
-          </a:p>
-        </p:txBody>
-      </p:sp>
-      <p:sp>
-        <p:nvSpPr>
-          <p:cNvPr id="3" name="Date Placeholder 2"/>
-          <p:cNvSpPr>
-            <a:spLocks noGrp="1"/>
-          </p:cNvSpPr>
-          <p:nvPr>
-            <p:ph type="dt" idx="1"/>
-          </p:nvPr>
-        </p:nvSpPr>
-        <p:spPr>
-          <a:xfrm>
-            <a:off x="3884613" y="0"/>
-            <a:ext cx="2971800" cy="458788"/>
-          </a:xfrm>
-          <a:prstGeom prst="rect">
-            <a:avLst/>
-          </a:prstGeom>
-        </p:spPr>
-        <p:txBody>
-          <a:bodyPr vert="horz" lIns="91440" tIns="45720" rIns="91440" bIns="45720" rtlCol="0"/>
-          <a:lstStyle>
-            <a:lvl1pPr algn="r">
-              <a:defRPr sz="1200"/>
-            </a:lvl1pPr>
-          </a:lstStyle>
-          <a:p>
-            <a:fld id="{5282F153-3F37-0F45-9E97-73ACFA13230C}" type="datetimeFigureOut">
-              <a:rPr lang="en-US"/>
-              <a:t>7/23/19</a:t>
-            </a:fld>
-            <a:endParaRPr lang="en-US"/>
-          </a:p>
-        </p:txBody>
-      </p:sp>
-      <p:sp>
-        <p:nvSpPr>
-          <p:cNvPr id="4" name="Slide Image Placeholder 3"/>
-          <p:cNvSpPr>
-            <a:spLocks noGrp="1" noRot="1" noChangeAspect="1"/>
-          </p:cNvSpPr>
-          <p:nvPr>
-            <p:ph type="sldImg" idx="2"/>
-          </p:nvPr>
-        </p:nvSpPr>
-        <p:spPr>
-          <a:xfrm>
-            <a:off x="685800" y="1143000"/>
-            <a:ext cx="5486400" cy="3086100"/>
-          </a:xfrm>
-          <a:prstGeom prst="rect">
-            <a:avLst/>
-          </a:prstGeom>
-          <a:noFill/>
-          <a:ln w="12700">
-            <a:solidFill>
-              <a:prstClr val="black"/>
-            </a:solidFill>
-          </a:ln>
-        </p:spPr>
-        <p:txBody>
-          <a:bodyPr vert="horz" lIns="91440" tIns="45720" rIns="91440" bIns="45720" rtlCol="0" anchor="ctr"/>
-          <a:lstStyle/>
-          <a:p>
-            <a:endParaRPr lang="en-US"/>
-          </a:p>
-        </p:txBody>
-      </p:sp>
-      <p:sp>
-        <p:nvSpPr>
-          <p:cNvPr id="5" name="Notes Placeholder 4"/>
-          <p:cNvSpPr>
-            <a:spLocks noGrp="1"/>
-          </p:cNvSpPr>
-          <p:nvPr>
-            <p:ph type="body" sz="quarter" idx="3"/>
-          </p:nvPr>
-        </p:nvSpPr>
-        <p:spPr>
-          <a:xfrm>
-            <a:off x="685800" y="4400550"/>
-            <a:ext cx="5486400" cy="3600450"/>
-          </a:xfrm>
-          <a:prstGeom prst="rect">
-            <a:avLst/>
-          </a:prstGeom>
-        </p:spPr>
-        <p:txBody>
-          <a:bodyPr vert="horz" lIns="91440" tIns="45720" rIns="91440" bIns="45720" rtlCol="0"/>
-          <a:lstStyle/>
-          <a:p>
-            <a:pPr lvl="0"/>
-            <a:r>
-              <a:rPr lang="en-US"/>
-              <a:t>Click to edit Master text styles</a:t>
-            </a:r>
-          </a:p>
-          <a:p>
-            <a:pPr lvl="1"/>
-            <a:r>
-              <a:rPr lang="en-US"/>
-              <a:t>Second level</a:t>
-            </a:r>
-          </a:p>
-          <a:p>
-            <a:pPr lvl="2"/>
-            <a:r>
-              <a:rPr lang="en-US"/>
-              <a:t>Third level</a:t>
-            </a:r>
-          </a:p>
-          <a:p>
-            <a:pPr lvl="3"/>
-            <a:r>
-              <a:rPr lang="en-US"/>
-              <a:t>Fourth level</a:t>
-            </a:r>
-          </a:p>
-          <a:p>
-            <a:pPr lvl="4"/>
-            <a:r>
-              <a:rPr lang="en-US"/>
-              <a:t>Fifth level</a:t>
-            </a:r>
-          </a:p>
-        </p:txBody>
-      </p:sp>
-      <p:sp>
-        <p:nvSpPr>
-          <p:cNvPr id="6" name="Footer Placeholder 5"/>
-          <p:cNvSpPr>
-            <a:spLocks noGrp="1"/>
-          </p:cNvSpPr>
-          <p:nvPr>
-            <p:ph type="ftr" sz="quarter" idx="4"/>
-          </p:nvPr>
-        </p:nvSpPr>
-        <p:spPr>
-          <a:xfrm>
-            <a:off x="0" y="8685213"/>
-            <a:ext cx="2971800" cy="458787"/>
-          </a:xfrm>
-          <a:prstGeom prst="rect">
-            <a:avLst/>
-          </a:prstGeom>
-        </p:spPr>
-        <p:txBody>
-          <a:bodyPr vert="horz" lIns="91440" tIns="45720" rIns="91440" bIns="45720" rtlCol="0" anchor="b"/>
-          <a:lstStyle>
-            <a:lvl1pPr algn="l">
-              <a:defRPr sz="1200"/>
-            </a:lvl1pPr>
-          </a:lstStyle>
-          <a:p>
-            <a:endParaRPr lang="en-US"/>
-          </a:p>
-        </p:txBody>
-      </p:sp>
-      <p:sp>
-        <p:nvSpPr>
-          <p:cNvPr id="7" name="Slide Number Placeholder 6"/>
-          <p:cNvSpPr>
-            <a:spLocks noGrp="1"/>
-          </p:cNvSpPr>
-          <p:nvPr>
-            <p:ph type="sldNum" sz="quarter" idx="5"/>
-          </p:nvPr>
-        </p:nvSpPr>
-        <p:spPr>
-          <a:xfrm>
-            <a:off x="3884613" y="8685213"/>
-            <a:ext cx="2971800" cy="458787"/>
-          </a:xfrm>
-          <a:prstGeom prst="rect">
-            <a:avLst/>
-          </a:prstGeom>
-        </p:spPr>
-        <p:txBody>
-          <a:bodyPr vert="horz" lIns="91440" tIns="45720" rIns="91440" bIns="45720" rtlCol="0" anchor="b"/>
-          <a:lstStyle>
-            <a:lvl1pPr algn="r">
-              <a:defRPr sz="1200"/>
-            </a:lvl1pPr>
-          </a:lstStyle>
-          <a:p>
-            <a:fld id="{CE5E9CC1-C706-0F49-92D6-E571CC5EEA8F}" type="slidenum">
-              <a:rPr lang="en-US"/>
-              <a:t>‹#›</a:t>
-            </a:fld>
-            <a:endParaRPr lang="en-US"/>
-          </a:p>
-        </p:txBody>
-      </p:sp>
     </p:spTree>
     <p:extLst>
       <p:ext uri="{BB962C8B-B14F-4D97-AF65-F5344CB8AC3E}">
-        <p14:creationId xmlns:p14="http://schemas.microsoft.com/office/powerpoint/2010/main" val="1024086991"/>
+        <p14:creationId xmlns:p14="http://schemas.microsoft.com/office/powerpoint/2010/main" val="1978694895"/>
       </p:ext>
     </p:extLst>
   </p:cSld>
@@ -508,10 +287,6 @@
           <a:bodyPr/>
           <a:lstStyle/>
           <a:p>
-            <a:r>
-              <a:rPr lang="en-US" dirty="0"/>
-              <a:t/>
-            </a:r>
             <a:endParaRPr lang="en-US" dirty="0"/>
           </a:p>
         </p:txBody>
@@ -596,10 +371,6 @@
           <a:bodyPr/>
           <a:lstStyle/>
           <a:p>
-            <a:r>
-              <a:rPr lang="en-US" dirty="0"/>
-              <a:t/>
-            </a:r>
             <a:endParaRPr lang="en-US" dirty="0"/>
           </a:p>
         </p:txBody>
@@ -684,10 +455,6 @@
           <a:bodyPr/>
           <a:lstStyle/>
           <a:p>
-            <a:r>
-              <a:rPr lang="en-US" dirty="0"/>
-              <a:t/>
-            </a:r>
             <a:endParaRPr lang="en-US" dirty="0"/>
           </a:p>
         </p:txBody>
@@ -772,10 +539,6 @@
           <a:bodyPr/>
           <a:lstStyle/>
           <a:p>
-            <a:r>
-              <a:rPr lang="en-US" dirty="0"/>
-              <a:t/>
-            </a:r>
             <a:endParaRPr lang="en-US" dirty="0"/>
           </a:p>
         </p:txBody>
@@ -860,10 +623,6 @@
           <a:bodyPr/>
           <a:lstStyle/>
           <a:p>
-            <a:r>
-              <a:rPr lang="en-US" dirty="0"/>
-              <a:t/>
-            </a:r>
             <a:endParaRPr lang="en-US" dirty="0"/>
           </a:p>
         </p:txBody>
@@ -886,182 +645,6 @@
             <a:fld id="{F7021451-1387-4CA6-816F-3879F97B5CBC}" type="slidenum">
               <a:rPr lang="en-US"/>
               <a:t>5</a:t>
-            </a:fld>
-            <a:endParaRPr lang="en-US"/>
-          </a:p>
-        </p:txBody>
-      </p:sp>
-    </p:spTree>
-    <p:extLst>
-      <p:ext uri="{BB962C8B-B14F-4D97-AF65-F5344CB8AC3E}">
-        <p14:creationId xmlns:p14="http://schemas.microsoft.com/office/powerpoint/2010/main" val="1024086991"/>
-      </p:ext>
-    </p:extLst>
-  </p:cSld>
-  <p:clrMapOvr>
-    <a:masterClrMapping/>
-  </p:clrMapOvr>
-</p:notes>
-</file>
-
-<file path=ppt/notesSlides/notesSlide6.xml><?xml version="1.0" encoding="utf-8"?>
-<p:notes xmlns:a="http://schemas.openxmlformats.org/drawingml/2006/main" xmlns:r="http://schemas.openxmlformats.org/officeDocument/2006/relationships" xmlns:p="http://schemas.openxmlformats.org/presentationml/2006/main">
-  <p:cSld>
-    <p:spTree>
-      <p:nvGrpSpPr>
-        <p:cNvPr id="1" name=""/>
-        <p:cNvGrpSpPr/>
-        <p:nvPr/>
-      </p:nvGrpSpPr>
-      <p:grpSpPr>
-        <a:xfrm>
-          <a:off x="0" y="0"/>
-          <a:ext cx="0" cy="0"/>
-          <a:chOff x="0" y="0"/>
-          <a:chExt cx="0" cy="0"/>
-        </a:xfrm>
-      </p:grpSpPr>
-      <p:sp>
-        <p:nvSpPr>
-          <p:cNvPr id="2" name="Slide Image Placeholder 1"/>
-          <p:cNvSpPr>
-            <a:spLocks noGrp="1" noRot="1" noChangeAspect="1"/>
-          </p:cNvSpPr>
-          <p:nvPr>
-            <p:ph type="sldImg"/>
-          </p:nvPr>
-        </p:nvSpPr>
-        <p:spPr/>
-      </p:sp>
-      <p:sp>
-        <p:nvSpPr>
-          <p:cNvPr id="3" name="Notes Placeholder 2"/>
-          <p:cNvSpPr>
-            <a:spLocks noGrp="1"/>
-          </p:cNvSpPr>
-          <p:nvPr>
-            <p:ph type="body" idx="1"/>
-          </p:nvPr>
-        </p:nvSpPr>
-        <p:spPr/>
-        <p:txBody>
-          <a:bodyPr/>
-          <a:lstStyle/>
-          <a:p>
-            <a:r>
-              <a:rPr lang="en-US" dirty="0"/>
-              <a:t/>
-            </a:r>
-            <a:endParaRPr lang="en-US" dirty="0"/>
-          </a:p>
-        </p:txBody>
-      </p:sp>
-      <p:sp>
-        <p:nvSpPr>
-          <p:cNvPr id="4" name="Slide Number Placeholder 3"/>
-          <p:cNvSpPr>
-            <a:spLocks noGrp="1"/>
-          </p:cNvSpPr>
-          <p:nvPr>
-            <p:ph type="sldNum" sz="quarter" idx="10"/>
-          </p:nvPr>
-        </p:nvSpPr>
-        <p:spPr/>
-        <p:txBody>
-          <a:bodyPr/>
-          <a:lstStyle/>
-          <a:p>
-            <a:fld id="{F7021451-1387-4CA6-816F-3879F97B5CBC}" type="slidenum">
-              <a:rPr lang="en-US"/>
-              <a:t>6</a:t>
-            </a:fld>
-            <a:endParaRPr lang="en-US"/>
-          </a:p>
-        </p:txBody>
-      </p:sp>
-    </p:spTree>
-    <p:extLst>
-      <p:ext uri="{BB962C8B-B14F-4D97-AF65-F5344CB8AC3E}">
-        <p14:creationId xmlns:p14="http://schemas.microsoft.com/office/powerpoint/2010/main" val="1024086991"/>
-      </p:ext>
-    </p:extLst>
-  </p:cSld>
-  <p:clrMapOvr>
-    <a:masterClrMapping/>
-  </p:clrMapOvr>
-</p:notes>
-</file>
-
-<file path=ppt/notesSlides/notesSlide7.xml><?xml version="1.0" encoding="utf-8"?>
-<p:notes xmlns:a="http://schemas.openxmlformats.org/drawingml/2006/main" xmlns:r="http://schemas.openxmlformats.org/officeDocument/2006/relationships" xmlns:p="http://schemas.openxmlformats.org/presentationml/2006/main">
-  <p:cSld>
-    <p:spTree>
-      <p:nvGrpSpPr>
-        <p:cNvPr id="1" name=""/>
-        <p:cNvGrpSpPr/>
-        <p:nvPr/>
-      </p:nvGrpSpPr>
-      <p:grpSpPr>
-        <a:xfrm>
-          <a:off x="0" y="0"/>
-          <a:ext cx="0" cy="0"/>
-          <a:chOff x="0" y="0"/>
-          <a:chExt cx="0" cy="0"/>
-        </a:xfrm>
-      </p:grpSpPr>
-      <p:sp>
-        <p:nvSpPr>
-          <p:cNvPr id="2" name="Slide Image Placeholder 1"/>
-          <p:cNvSpPr>
-            <a:spLocks noGrp="1" noRot="1" noChangeAspect="1"/>
-          </p:cNvSpPr>
-          <p:nvPr>
-            <p:ph type="sldImg"/>
-          </p:nvPr>
-        </p:nvSpPr>
-        <p:spPr/>
-      </p:sp>
-      <p:sp>
-        <p:nvSpPr>
-          <p:cNvPr id="3" name="Notes Placeholder 2"/>
-          <p:cNvSpPr>
-            <a:spLocks noGrp="1"/>
-          </p:cNvSpPr>
-          <p:nvPr>
-            <p:ph type="body" idx="1"/>
-          </p:nvPr>
-        </p:nvSpPr>
-        <p:spPr/>
-        <p:txBody>
-          <a:bodyPr/>
-          <a:lstStyle/>
-          <a:p>
-            <a:r>
-              <a:rPr lang="en-US" dirty="0"/>
-              <a:t/>
-            </a:r>
-            <a:endParaRPr lang="en-US" dirty="0"/>
-          </a:p>
-        </p:txBody>
-      </p:sp>
-      <p:sp>
-        <p:nvSpPr>
-          <p:cNvPr id="4" name="Slide Number Placeholder 3"/>
-          <p:cNvSpPr>
-            <a:spLocks noGrp="1"/>
-          </p:cNvSpPr>
-          <p:nvPr>
-            <p:ph type="sldNum" sz="quarter" idx="10"/>
-          </p:nvPr>
-        </p:nvSpPr>
-        <p:spPr/>
-        <p:txBody>
-          <a:bodyPr/>
-          <a:lstStyle/>
-          <a:p>
-            <a:fld id="{F7021451-1387-4CA6-816F-3879F97B5CBC}" type="slidenum">
-              <a:rPr lang="en-US"/>
-              <a:t>7</a:t>
             </a:fld>
             <a:endParaRPr lang="en-US"/>
           </a:p>
@@ -1124,10 +707,6 @@
           <a:bodyPr/>
           <a:lstStyle/>
           <a:p>
-            <a:r>
-              <a:rPr lang="en-US" dirty="0"/>
-              <a:t/>
-            </a:r>
             <a:endParaRPr lang="en-US" dirty="0"/>
           </a:p>
         </p:txBody>
@@ -1150,94 +729,6 @@
             <a:fld id="{F7021451-1387-4CA6-816F-3879F97B5CBC}" type="slidenum">
               <a:rPr lang="en-US"/>
               <a:t>8</a:t>
-            </a:fld>
-            <a:endParaRPr lang="en-US"/>
-          </a:p>
-        </p:txBody>
-      </p:sp>
-    </p:spTree>
-    <p:extLst>
-      <p:ext uri="{BB962C8B-B14F-4D97-AF65-F5344CB8AC3E}">
-        <p14:creationId xmlns:p14="http://schemas.microsoft.com/office/powerpoint/2010/main" val="1024086991"/>
-      </p:ext>
-    </p:extLst>
-  </p:cSld>
-  <p:clrMapOvr>
-    <a:masterClrMapping/>
-  </p:clrMapOvr>
-</p:notes>
-</file>
-
-<file path=ppt/notesSlides/notesSlide9.xml><?xml version="1.0" encoding="utf-8"?>
-<p:notes xmlns:a="http://schemas.openxmlformats.org/drawingml/2006/main" xmlns:r="http://schemas.openxmlformats.org/officeDocument/2006/relationships" xmlns:p="http://schemas.openxmlformats.org/presentationml/2006/main">
-  <p:cSld>
-    <p:spTree>
-      <p:nvGrpSpPr>
-        <p:cNvPr id="1" name=""/>
-        <p:cNvGrpSpPr/>
-        <p:nvPr/>
-      </p:nvGrpSpPr>
-      <p:grpSpPr>
-        <a:xfrm>
-          <a:off x="0" y="0"/>
-          <a:ext cx="0" cy="0"/>
-          <a:chOff x="0" y="0"/>
-          <a:chExt cx="0" cy="0"/>
-        </a:xfrm>
-      </p:grpSpPr>
-      <p:sp>
-        <p:nvSpPr>
-          <p:cNvPr id="2" name="Slide Image Placeholder 1"/>
-          <p:cNvSpPr>
-            <a:spLocks noGrp="1" noRot="1" noChangeAspect="1"/>
-          </p:cNvSpPr>
-          <p:nvPr>
-            <p:ph type="sldImg"/>
-          </p:nvPr>
-        </p:nvSpPr>
-        <p:spPr/>
-      </p:sp>
-      <p:sp>
-        <p:nvSpPr>
-          <p:cNvPr id="3" name="Notes Placeholder 2"/>
-          <p:cNvSpPr>
-            <a:spLocks noGrp="1"/>
-          </p:cNvSpPr>
-          <p:nvPr>
-            <p:ph type="body" idx="1"/>
-          </p:nvPr>
-        </p:nvSpPr>
-        <p:spPr/>
-        <p:txBody>
-          <a:bodyPr/>
-          <a:lstStyle/>
-          <a:p>
-            <a:r>
-              <a:rPr lang="en-US" dirty="0"/>
-              <a:t/>
-            </a:r>
-            <a:endParaRPr lang="en-US" dirty="0"/>
-          </a:p>
-        </p:txBody>
-      </p:sp>
-      <p:sp>
-        <p:nvSpPr>
-          <p:cNvPr id="4" name="Slide Number Placeholder 3"/>
-          <p:cNvSpPr>
-            <a:spLocks noGrp="1"/>
-          </p:cNvSpPr>
-          <p:nvPr>
-            <p:ph type="sldNum" sz="quarter" idx="10"/>
-          </p:nvPr>
-        </p:nvSpPr>
-        <p:spPr/>
-        <p:txBody>
-          <a:bodyPr/>
-          <a:lstStyle/>
-          <a:p>
-            <a:fld id="{F7021451-1387-4CA6-816F-3879F97B5CBC}" type="slidenum">
-              <a:rPr lang="en-US"/>
-              <a:t>9</a:t>
             </a:fld>
             <a:endParaRPr lang="en-US"/>
           </a:p>
@@ -1289,6 +780,11 @@
 <file path=ppt/slideMasters/slideMaster1.xml><?xml version="1.0" encoding="utf-8"?>
 <p:sldMaster xmlns:a="http://schemas.openxmlformats.org/drawingml/2006/main" xmlns:r="http://schemas.openxmlformats.org/officeDocument/2006/relationships" xmlns:p="http://schemas.openxmlformats.org/presentationml/2006/main">
   <p:cSld>
+    <p:bg>
+      <p:bgRef idx="1001">
+        <a:schemeClr val="bg1"/>
+      </p:bgRef>
+    </p:bg>
     <p:spTree>
       <p:nvGrpSpPr>
         <p:cNvPr id="1" name=""/>
@@ -1571,6 +1067,7 @@
         <a:solidFill>
           <a:srgbClr val="D71E28"/>
         </a:solidFill>
+        <a:effectLst/>
       </p:bgPr>
     </p:bg>
     <p:spTree>
@@ -1633,11 +1130,11 @@
           <a:bodyPr wrap="square" lIns="0" tIns="0" rIns="0" bIns="0" rtlCol="0" anchor="ctr"/>
           <a:lstStyle/>
           <a:p>
-            <a:pPr indent="0" marL="0">
-              <a:buNone/>
-            </a:pPr>
-            <a:r>
-              <a:rPr lang="en-US" sz="1400" b="1" spc="800" kern="0" dirty="0">
+            <a:pPr marL="0" indent="0">
+              <a:buNone/>
+            </a:pPr>
+            <a:r>
+              <a:rPr lang="en-US" sz="1400" b="1" kern="0" spc="800" dirty="0">
                 <a:solidFill>
                   <a:srgbClr val="FFCD41"/>
                 </a:solidFill>
@@ -1672,7 +1169,7 @@
           <a:bodyPr wrap="square" lIns="0" tIns="0" rIns="0" bIns="0" rtlCol="0" anchor="ctr"/>
           <a:lstStyle/>
           <a:p>
-            <a:pPr indent="0" marL="0">
+            <a:pPr marL="0" indent="0">
               <a:buNone/>
             </a:pPr>
             <a:r>
@@ -1711,7 +1208,7 @@
           <a:bodyPr wrap="square" lIns="0" tIns="0" rIns="0" bIns="0" rtlCol="0" anchor="ctr"/>
           <a:lstStyle/>
           <a:p>
-            <a:pPr indent="0" marL="0">
+            <a:pPr marL="0" indent="0">
               <a:buNone/>
             </a:pPr>
             <a:r>
@@ -1745,6 +1242,7 @@
         <a:solidFill>
           <a:srgbClr val="FFFFFF"/>
         </a:solidFill>
+        <a:effectLst/>
       </p:bgPr>
     </p:bg>
     <p:spTree>
@@ -1807,11 +1305,11 @@
           <a:bodyPr wrap="square" lIns="0" tIns="0" rIns="0" bIns="0" rtlCol="0" anchor="ctr"/>
           <a:lstStyle/>
           <a:p>
-            <a:pPr indent="0" marL="0">
-              <a:buNone/>
-            </a:pPr>
-            <a:r>
-              <a:rPr lang="en-US" sz="1100" b="1" spc="600" kern="0" dirty="0">
+            <a:pPr marL="0" indent="0">
+              <a:buNone/>
+            </a:pPr>
+            <a:r>
+              <a:rPr lang="en-US" sz="1100" b="1" kern="0" spc="600" dirty="0">
                 <a:solidFill>
                   <a:srgbClr val="D71E28"/>
                 </a:solidFill>
@@ -1846,7 +1344,7 @@
           <a:bodyPr wrap="square" lIns="0" tIns="0" rIns="0" bIns="0" rtlCol="0" anchor="ctr"/>
           <a:lstStyle/>
           <a:p>
-            <a:pPr indent="0" marL="0">
+            <a:pPr marL="0" indent="0">
               <a:buNone/>
             </a:pPr>
             <a:r>
@@ -1885,7 +1383,7 @@
           <a:bodyPr wrap="square" lIns="0" tIns="0" rIns="0" bIns="0" rtlCol="0" anchor="ctr"/>
           <a:lstStyle/>
           <a:p>
-            <a:pPr algn="r" indent="0" marL="0">
+            <a:pPr marL="0" indent="0" algn="r">
               <a:buNone/>
             </a:pPr>
             <a:r>
@@ -1897,7 +1395,7 @@
                 <a:ea typeface="Calibri" pitchFamily="34" charset="-122"/>
                 <a:cs typeface="Calibri" pitchFamily="34" charset="-120"/>
               </a:rPr>
-              <a:t>2 / 9</a:t>
+              <a:t>2 / 7</a:t>
             </a:r>
             <a:endParaRPr lang="en-US" sz="900" dirty="0"/>
           </a:p>
@@ -1924,7 +1422,7 @@
           <a:bodyPr wrap="square" lIns="0" tIns="0" rIns="0" bIns="0" rtlCol="0" anchor="ctr"/>
           <a:lstStyle/>
           <a:p>
-            <a:pPr indent="0" marL="0">
+            <a:pPr marL="0" indent="0">
               <a:buNone/>
             </a:pPr>
             <a:r>
@@ -1963,7 +1461,7 @@
           <a:bodyPr wrap="square" lIns="0" tIns="0" rIns="0" bIns="0" rtlCol="0" anchor="ctr"/>
           <a:lstStyle/>
           <a:p>
-            <a:pPr indent="0" marL="0">
+            <a:pPr marL="0" indent="0">
               <a:spcAft>
                 <a:spcPts val="1000"/>
               </a:spcAft>
@@ -1978,12 +1476,12 @@
                 <a:ea typeface="Calibri" pitchFamily="34" charset="-122"/>
                 <a:cs typeface="Calibri" pitchFamily="34" charset="-120"/>
               </a:rPr>
-              <a:t>Offshore EGS DBAs in India are the first responders.</a:t>
+              <a:t>EGS L2 production support teams in India are the first responders.</a:t>
             </a:r>
             <a:endParaRPr lang="en-US" sz="1400" dirty="0"/>
           </a:p>
           <a:p>
-            <a:pPr indent="0" marL="0">
+            <a:pPr marL="0" indent="0">
               <a:spcAft>
                 <a:spcPts val="1000"/>
               </a:spcAft>
@@ -1998,12 +1496,12 @@
                 <a:ea typeface="Calibri" pitchFamily="34" charset="-122"/>
                 <a:cs typeface="Calibri" pitchFamily="34" charset="-120"/>
               </a:rPr>
-              <a:t>But many of our databases sit on SAR-restricted servers  —  accessible only from inside the US.</a:t>
+              <a:t>Most of our databases reside on SAR-restricted servers  —  accessible only from inside the US.</a:t>
             </a:r>
             <a:endParaRPr lang="en-US" sz="1400" dirty="0"/>
           </a:p>
           <a:p>
-            <a:pPr indent="0" marL="0">
+            <a:pPr marL="0" indent="0">
               <a:spcAft>
                 <a:spcPts val="1000"/>
               </a:spcAft>
@@ -2018,12 +1516,12 @@
                 <a:ea typeface="Calibri" pitchFamily="34" charset="-122"/>
                 <a:cs typeface="Calibri" pitchFamily="34" charset="-120"/>
               </a:rPr>
-              <a:t>Investigation stalls until US DBAs come online  —  hours later.</a:t>
+              <a:t>Investigation stalls until US teams come online  —  hours later.</a:t>
             </a:r>
             <a:endParaRPr lang="en-US" sz="1400" dirty="0"/>
           </a:p>
           <a:p>
-            <a:pPr indent="0" marL="0">
+            <a:pPr marL="0" indent="0">
               <a:spcAft>
                 <a:spcPts val="1000"/>
               </a:spcAft>
@@ -2038,7 +1536,7 @@
                 <a:ea typeface="Calibri" pitchFamily="34" charset="-122"/>
                 <a:cs typeface="Calibri" pitchFamily="34" charset="-120"/>
               </a:rPr>
-              <a:t>Multiple engineers get pulled in to coordinate the wait.</a:t>
+              <a:t>Multiple engineers and various teams get pulled in to coordinate the wait.</a:t>
             </a:r>
             <a:endParaRPr lang="en-US" sz="1400" dirty="0"/>
           </a:p>
@@ -2065,7 +1563,7 @@
           <a:bodyPr wrap="square" lIns="0" tIns="0" rIns="0" bIns="0" rtlCol="0" anchor="ctr"/>
           <a:lstStyle/>
           <a:p>
-            <a:pPr indent="0" marL="0">
+            <a:pPr marL="0" indent="0">
               <a:buNone/>
             </a:pPr>
             <a:r>
@@ -2104,7 +1602,7 @@
           <a:bodyPr wrap="square" lIns="0" tIns="0" rIns="0" bIns="0" rtlCol="0" anchor="ctr"/>
           <a:lstStyle/>
           <a:p>
-            <a:pPr indent="0" marL="0">
+            <a:pPr marL="0" indent="0">
               <a:buNone/>
             </a:pPr>
             <a:r>
@@ -2143,7 +1641,7 @@
           <a:bodyPr wrap="square" lIns="0" tIns="0" rIns="0" bIns="0" rtlCol="0" anchor="ctr"/>
           <a:lstStyle/>
           <a:p>
-            <a:pPr indent="0" marL="0">
+            <a:pPr marL="0" indent="0">
               <a:buNone/>
             </a:pPr>
             <a:r>
@@ -2182,11 +1680,11 @@
           <a:bodyPr wrap="square" lIns="0" tIns="0" rIns="0" bIns="0" rtlCol="0" anchor="ctr"/>
           <a:lstStyle/>
           <a:p>
-            <a:pPr indent="0" marL="0">
-              <a:buNone/>
-            </a:pPr>
-            <a:r>
-              <a:rPr lang="en-US" sz="1000" b="1" spc="500" kern="0" dirty="0">
+            <a:pPr marL="0" indent="0">
+              <a:buNone/>
+            </a:pPr>
+            <a:r>
+              <a:rPr lang="en-US" sz="1000" b="1" kern="0" spc="500" dirty="0">
                 <a:solidFill>
                   <a:srgbClr val="8A8A8A"/>
                 </a:solidFill>
@@ -2269,7 +1767,7 @@
           <a:bodyPr wrap="square" lIns="0" tIns="0" rIns="0" bIns="0" rtlCol="0" anchor="ctr"/>
           <a:lstStyle/>
           <a:p>
-            <a:pPr indent="0" marL="0">
+            <a:pPr marL="0" indent="0">
               <a:buNone/>
             </a:pPr>
             <a:r>
@@ -2281,7 +1779,7 @@
                 <a:ea typeface="Calibri" pitchFamily="34" charset="-122"/>
                 <a:cs typeface="Calibri" pitchFamily="34" charset="-120"/>
               </a:rPr>
-              <a:t>2:00 AM PT</a:t>
+              <a:t>2:00 AM ET</a:t>
             </a:r>
             <a:endParaRPr lang="en-US" sz="1100" dirty="0"/>
           </a:p>
@@ -2308,7 +1806,7 @@
           <a:bodyPr wrap="square" lIns="0" tIns="0" rIns="0" bIns="0" rtlCol="0" anchor="ctr"/>
           <a:lstStyle/>
           <a:p>
-            <a:pPr indent="0" marL="0">
+            <a:pPr marL="0" indent="0">
               <a:buNone/>
             </a:pPr>
             <a:r>
@@ -2320,7 +1818,7 @@
                 <a:ea typeface="Calibri" pitchFamily="34" charset="-122"/>
                 <a:cs typeface="Calibri" pitchFamily="34" charset="-120"/>
               </a:rPr>
-              <a:t>Job fails</a:t>
+              <a:t>Job fails/ INC Generated</a:t>
             </a:r>
             <a:endParaRPr lang="en-US" sz="1400" dirty="0"/>
           </a:p>
@@ -2372,7 +1870,7 @@
           <a:bodyPr wrap="square" lIns="0" tIns="0" rIns="0" bIns="0" rtlCol="0" anchor="ctr"/>
           <a:lstStyle/>
           <a:p>
-            <a:pPr indent="0" marL="0">
+            <a:pPr marL="0" indent="0">
               <a:buNone/>
             </a:pPr>
             <a:r>
@@ -2384,7 +1882,7 @@
                 <a:ea typeface="Calibri" pitchFamily="34" charset="-122"/>
                 <a:cs typeface="Calibri" pitchFamily="34" charset="-120"/>
               </a:rPr>
-              <a:t>2:05 AM PT</a:t>
+              <a:t>2:05 AM ET</a:t>
             </a:r>
             <a:endParaRPr lang="en-US" sz="1100" dirty="0"/>
           </a:p>
@@ -2411,7 +1909,7 @@
           <a:bodyPr wrap="square" lIns="0" tIns="0" rIns="0" bIns="0" rtlCol="0" anchor="ctr"/>
           <a:lstStyle/>
           <a:p>
-            <a:pPr indent="0" marL="0">
+            <a:pPr marL="0" indent="0">
               <a:buNone/>
             </a:pPr>
             <a:r>
@@ -2423,7 +1921,7 @@
                 <a:ea typeface="Calibri" pitchFamily="34" charset="-122"/>
                 <a:cs typeface="Calibri" pitchFamily="34" charset="-120"/>
               </a:rPr>
-              <a:t>Offshore EGS engaged</a:t>
+              <a:t>Offshore EGS teams engaged</a:t>
             </a:r>
             <a:endParaRPr lang="en-US" sz="1400" dirty="0"/>
           </a:p>
@@ -2475,7 +1973,7 @@
           <a:bodyPr wrap="square" lIns="0" tIns="0" rIns="0" bIns="0" rtlCol="0" anchor="ctr"/>
           <a:lstStyle/>
           <a:p>
-            <a:pPr indent="0" marL="0">
+            <a:pPr marL="0" indent="0">
               <a:buNone/>
             </a:pPr>
             <a:r>
@@ -2487,7 +1985,7 @@
                 <a:ea typeface="Calibri" pitchFamily="34" charset="-122"/>
                 <a:cs typeface="Calibri" pitchFamily="34" charset="-120"/>
               </a:rPr>
-              <a:t>2:15 AM PT</a:t>
+              <a:t>2:15 AM ET</a:t>
             </a:r>
             <a:endParaRPr lang="en-US" sz="1100" dirty="0"/>
           </a:p>
@@ -2514,7 +2012,7 @@
           <a:bodyPr wrap="square" lIns="0" tIns="0" rIns="0" bIns="0" rtlCol="0" anchor="ctr"/>
           <a:lstStyle/>
           <a:p>
-            <a:pPr indent="0" marL="0">
+            <a:pPr marL="0" indent="0">
               <a:buNone/>
             </a:pPr>
             <a:r>
@@ -2578,7 +2076,7 @@
           <a:bodyPr wrap="square" lIns="0" tIns="0" rIns="0" bIns="0" rtlCol="0" anchor="ctr"/>
           <a:lstStyle/>
           <a:p>
-            <a:pPr indent="0" marL="0">
+            <a:pPr marL="0" indent="0">
               <a:buNone/>
             </a:pPr>
             <a:r>
@@ -2590,7 +2088,7 @@
                 <a:ea typeface="Calibri" pitchFamily="34" charset="-122"/>
                 <a:cs typeface="Calibri" pitchFamily="34" charset="-120"/>
               </a:rPr>
-              <a:t>9:00 AM PT</a:t>
+              <a:t>9:00 AM ET</a:t>
             </a:r>
             <a:endParaRPr lang="en-US" sz="1100" dirty="0"/>
           </a:p>
@@ -2617,7 +2115,7 @@
           <a:bodyPr wrap="square" lIns="0" tIns="0" rIns="0" bIns="0" rtlCol="0" anchor="ctr"/>
           <a:lstStyle/>
           <a:p>
-            <a:pPr indent="0" marL="0">
+            <a:pPr marL="0" indent="0">
               <a:buNone/>
             </a:pPr>
             <a:r>
@@ -2629,7 +2127,7 @@
                 <a:ea typeface="Calibri" pitchFamily="34" charset="-122"/>
                 <a:cs typeface="Calibri" pitchFamily="34" charset="-120"/>
               </a:rPr>
-              <a:t>US DBAs come online</a:t>
+              <a:t>US teams come online</a:t>
             </a:r>
             <a:endParaRPr lang="en-US" sz="1400" dirty="0"/>
           </a:p>
@@ -2681,7 +2179,7 @@
           <a:bodyPr wrap="square" lIns="0" tIns="0" rIns="0" bIns="0" rtlCol="0" anchor="ctr"/>
           <a:lstStyle/>
           <a:p>
-            <a:pPr indent="0" marL="0">
+            <a:pPr marL="0" indent="0">
               <a:buNone/>
             </a:pPr>
             <a:r>
@@ -2693,7 +2191,7 @@
                 <a:ea typeface="Calibri" pitchFamily="34" charset="-122"/>
                 <a:cs typeface="Calibri" pitchFamily="34" charset="-120"/>
               </a:rPr>
-              <a:t>11:00 AM PT</a:t>
+              <a:t>11:00 AM ET</a:t>
             </a:r>
             <a:endParaRPr lang="en-US" sz="1100" dirty="0"/>
           </a:p>
@@ -2720,7 +2218,7 @@
           <a:bodyPr wrap="square" lIns="0" tIns="0" rIns="0" bIns="0" rtlCol="0" anchor="ctr"/>
           <a:lstStyle/>
           <a:p>
-            <a:pPr indent="0" marL="0">
+            <a:pPr marL="0" indent="0">
               <a:buNone/>
             </a:pPr>
             <a:r>
@@ -2732,7 +2230,7 @@
                 <a:ea typeface="Calibri" pitchFamily="34" charset="-122"/>
                 <a:cs typeface="Calibri" pitchFamily="34" charset="-120"/>
               </a:rPr>
-              <a:t>Investigation begins</a:t>
+              <a:t>Investigation begins/support teams engaged</a:t>
             </a:r>
             <a:endParaRPr lang="en-US" sz="1400" dirty="0"/>
           </a:p>
@@ -2784,7 +2282,7 @@
           <a:bodyPr wrap="square" lIns="0" tIns="0" rIns="0" bIns="0" rtlCol="0" anchor="ctr"/>
           <a:lstStyle/>
           <a:p>
-            <a:pPr indent="0" marL="0">
+            <a:pPr marL="0" indent="0">
               <a:buNone/>
             </a:pPr>
             <a:r>
@@ -2796,7 +2294,7 @@
                 <a:ea typeface="Calibri" pitchFamily="34" charset="-122"/>
                 <a:cs typeface="Calibri" pitchFamily="34" charset="-120"/>
               </a:rPr>
-              <a:t>12:00 PM PT</a:t>
+              <a:t>12:00 PM ET</a:t>
             </a:r>
             <a:endParaRPr lang="en-US" sz="1100" dirty="0"/>
           </a:p>
@@ -2823,7 +2321,7 @@
           <a:bodyPr wrap="square" lIns="0" tIns="0" rIns="0" bIns="0" rtlCol="0" anchor="ctr"/>
           <a:lstStyle/>
           <a:p>
-            <a:pPr indent="0" marL="0">
+            <a:pPr marL="0" indent="0">
               <a:buNone/>
             </a:pPr>
             <a:r>
@@ -2857,6 +2355,7 @@
         <a:solidFill>
           <a:srgbClr val="FFFFFF"/>
         </a:solidFill>
+        <a:effectLst/>
       </p:bgPr>
     </p:bg>
     <p:spTree>
@@ -2919,11 +2418,11 @@
           <a:bodyPr wrap="square" lIns="0" tIns="0" rIns="0" bIns="0" rtlCol="0" anchor="ctr"/>
           <a:lstStyle/>
           <a:p>
-            <a:pPr indent="0" marL="0">
-              <a:buNone/>
-            </a:pPr>
-            <a:r>
-              <a:rPr lang="en-US" sz="1100" b="1" spc="600" kern="0" dirty="0">
+            <a:pPr marL="0" indent="0">
+              <a:buNone/>
+            </a:pPr>
+            <a:r>
+              <a:rPr lang="en-US" sz="1100" b="1" kern="0" spc="600" dirty="0">
                 <a:solidFill>
                   <a:srgbClr val="D71E28"/>
                 </a:solidFill>
@@ -2958,7 +2457,7 @@
           <a:bodyPr wrap="square" lIns="0" tIns="0" rIns="0" bIns="0" rtlCol="0" anchor="ctr"/>
           <a:lstStyle/>
           <a:p>
-            <a:pPr indent="0" marL="0">
+            <a:pPr marL="0" indent="0">
               <a:buNone/>
             </a:pPr>
             <a:r>
@@ -2997,7 +2496,7 @@
           <a:bodyPr wrap="square" lIns="0" tIns="0" rIns="0" bIns="0" rtlCol="0" anchor="ctr"/>
           <a:lstStyle/>
           <a:p>
-            <a:pPr algn="r" indent="0" marL="0">
+            <a:pPr marL="0" indent="0" algn="r">
               <a:buNone/>
             </a:pPr>
             <a:r>
@@ -3009,7 +2508,7 @@
                 <a:ea typeface="Calibri" pitchFamily="34" charset="-122"/>
                 <a:cs typeface="Calibri" pitchFamily="34" charset="-120"/>
               </a:rPr>
-              <a:t>3 / 9</a:t>
+              <a:t>3 / 7</a:t>
             </a:r>
             <a:endParaRPr lang="en-US" sz="900" dirty="0"/>
           </a:p>
@@ -3111,7 +2610,7 @@
           <a:bodyPr wrap="square" lIns="0" tIns="0" rIns="0" bIns="0" rtlCol="0" anchor="ctr"/>
           <a:lstStyle/>
           <a:p>
-            <a:pPr algn="ctr" indent="0" marL="0">
+            <a:pPr marL="0" indent="0" algn="ctr">
               <a:buNone/>
             </a:pPr>
             <a:r>
@@ -3150,7 +2649,7 @@
           <a:bodyPr wrap="square" lIns="0" tIns="0" rIns="0" bIns="0" rtlCol="0" anchor="ctr"/>
           <a:lstStyle/>
           <a:p>
-            <a:pPr indent="0" marL="0">
+            <a:pPr marL="0" indent="0">
               <a:buNone/>
             </a:pPr>
             <a:r>
@@ -3189,7 +2688,7 @@
           <a:bodyPr wrap="square" lIns="0" tIns="0" rIns="0" bIns="0" rtlCol="0" anchor="ctr"/>
           <a:lstStyle/>
           <a:p>
-            <a:pPr indent="0" marL="0">
+            <a:pPr marL="0" indent="0">
               <a:buNone/>
             </a:pPr>
             <a:r>
@@ -3303,7 +2802,7 @@
           <a:bodyPr wrap="square" lIns="0" tIns="0" rIns="0" bIns="0" rtlCol="0" anchor="ctr"/>
           <a:lstStyle/>
           <a:p>
-            <a:pPr algn="ctr" indent="0" marL="0">
+            <a:pPr marL="0" indent="0" algn="ctr">
               <a:buNone/>
             </a:pPr>
             <a:r>
@@ -3342,7 +2841,7 @@
           <a:bodyPr wrap="square" lIns="0" tIns="0" rIns="0" bIns="0" rtlCol="0" anchor="ctr"/>
           <a:lstStyle/>
           <a:p>
-            <a:pPr indent="0" marL="0">
+            <a:pPr marL="0" indent="0">
               <a:buNone/>
             </a:pPr>
             <a:r>
@@ -3381,7 +2880,7 @@
           <a:bodyPr wrap="square" lIns="0" tIns="0" rIns="0" bIns="0" rtlCol="0" anchor="ctr"/>
           <a:lstStyle/>
           <a:p>
-            <a:pPr indent="0" marL="0">
+            <a:pPr marL="0" indent="0">
               <a:buNone/>
             </a:pPr>
             <a:r>
@@ -3495,7 +2994,7 @@
           <a:bodyPr wrap="square" lIns="0" tIns="0" rIns="0" bIns="0" rtlCol="0" anchor="ctr"/>
           <a:lstStyle/>
           <a:p>
-            <a:pPr algn="ctr" indent="0" marL="0">
+            <a:pPr marL="0" indent="0" algn="ctr">
               <a:buNone/>
             </a:pPr>
             <a:r>
@@ -3534,7 +3033,7 @@
           <a:bodyPr wrap="square" lIns="0" tIns="0" rIns="0" bIns="0" rtlCol="0" anchor="ctr"/>
           <a:lstStyle/>
           <a:p>
-            <a:pPr indent="0" marL="0">
+            <a:pPr marL="0" indent="0">
               <a:buNone/>
             </a:pPr>
             <a:r>
@@ -3573,7 +3072,7 @@
           <a:bodyPr wrap="square" lIns="0" tIns="0" rIns="0" bIns="0" rtlCol="0" anchor="ctr"/>
           <a:lstStyle/>
           <a:p>
-            <a:pPr indent="0" marL="0">
+            <a:pPr marL="0" indent="0">
               <a:buNone/>
             </a:pPr>
             <a:r>
@@ -3687,7 +3186,7 @@
           <a:bodyPr wrap="square" lIns="0" tIns="0" rIns="0" bIns="0" rtlCol="0" anchor="ctr"/>
           <a:lstStyle/>
           <a:p>
-            <a:pPr algn="ctr" indent="0" marL="0">
+            <a:pPr marL="0" indent="0" algn="ctr">
               <a:buNone/>
             </a:pPr>
             <a:r>
@@ -3726,7 +3225,7 @@
           <a:bodyPr wrap="square" lIns="0" tIns="0" rIns="0" bIns="0" rtlCol="0" anchor="ctr"/>
           <a:lstStyle/>
           <a:p>
-            <a:pPr indent="0" marL="0">
+            <a:pPr marL="0" indent="0">
               <a:buNone/>
             </a:pPr>
             <a:r>
@@ -3765,7 +3264,7 @@
           <a:bodyPr wrap="square" lIns="0" tIns="0" rIns="0" bIns="0" rtlCol="0" anchor="ctr"/>
           <a:lstStyle/>
           <a:p>
-            <a:pPr indent="0" marL="0">
+            <a:pPr marL="0" indent="0">
               <a:buNone/>
             </a:pPr>
             <a:r>
@@ -3879,7 +3378,7 @@
           <a:bodyPr wrap="square" lIns="0" tIns="0" rIns="0" bIns="0" rtlCol="0" anchor="ctr"/>
           <a:lstStyle/>
           <a:p>
-            <a:pPr algn="ctr" indent="0" marL="0">
+            <a:pPr marL="0" indent="0" algn="ctr">
               <a:buNone/>
             </a:pPr>
             <a:r>
@@ -3918,7 +3417,7 @@
           <a:bodyPr wrap="square" lIns="0" tIns="0" rIns="0" bIns="0" rtlCol="0" anchor="ctr"/>
           <a:lstStyle/>
           <a:p>
-            <a:pPr indent="0" marL="0">
+            <a:pPr marL="0" indent="0">
               <a:buNone/>
             </a:pPr>
             <a:r>
@@ -3957,7 +3456,7 @@
           <a:bodyPr wrap="square" lIns="0" tIns="0" rIns="0" bIns="0" rtlCol="0" anchor="ctr"/>
           <a:lstStyle/>
           <a:p>
-            <a:pPr indent="0" marL="0">
+            <a:pPr marL="0" indent="0">
               <a:buNone/>
             </a:pPr>
             <a:r>
@@ -4071,7 +3570,7 @@
           <a:bodyPr wrap="square" lIns="0" tIns="0" rIns="0" bIns="0" rtlCol="0" anchor="ctr"/>
           <a:lstStyle/>
           <a:p>
-            <a:pPr algn="ctr" indent="0" marL="0">
+            <a:pPr marL="0" indent="0" algn="ctr">
               <a:buNone/>
             </a:pPr>
             <a:r>
@@ -4110,7 +3609,7 @@
           <a:bodyPr wrap="square" lIns="0" tIns="0" rIns="0" bIns="0" rtlCol="0" anchor="ctr"/>
           <a:lstStyle/>
           <a:p>
-            <a:pPr indent="0" marL="0">
+            <a:pPr marL="0" indent="0">
               <a:buNone/>
             </a:pPr>
             <a:r>
@@ -4149,7 +3648,7 @@
           <a:bodyPr wrap="square" lIns="0" tIns="0" rIns="0" bIns="0" rtlCol="0" anchor="ctr"/>
           <a:lstStyle/>
           <a:p>
-            <a:pPr indent="0" marL="0">
+            <a:pPr marL="0" indent="0">
               <a:buNone/>
             </a:pPr>
             <a:r>
@@ -4213,7 +3712,7 @@
           <a:bodyPr wrap="square" lIns="0" tIns="0" rIns="0" bIns="0" rtlCol="0" anchor="ctr"/>
           <a:lstStyle/>
           <a:p>
-            <a:pPr algn="ctr" indent="0" marL="0">
+            <a:pPr marL="0" indent="0" algn="ctr">
               <a:buNone/>
             </a:pPr>
             <a:r>
@@ -4247,6 +3746,7 @@
         <a:solidFill>
           <a:srgbClr val="FFFFFF"/>
         </a:solidFill>
+        <a:effectLst/>
       </p:bgPr>
     </p:bg>
     <p:spTree>
@@ -4309,11 +3809,11 @@
           <a:bodyPr wrap="square" lIns="0" tIns="0" rIns="0" bIns="0" rtlCol="0" anchor="ctr"/>
           <a:lstStyle/>
           <a:p>
-            <a:pPr indent="0" marL="0">
-              <a:buNone/>
-            </a:pPr>
-            <a:r>
-              <a:rPr lang="en-US" sz="1100" b="1" spc="600" kern="0" dirty="0">
+            <a:pPr marL="0" indent="0">
+              <a:buNone/>
+            </a:pPr>
+            <a:r>
+              <a:rPr lang="en-US" sz="1100" b="1" kern="0" spc="600" dirty="0">
                 <a:solidFill>
                   <a:srgbClr val="D71E28"/>
                 </a:solidFill>
@@ -4348,7 +3848,7 @@
           <a:bodyPr wrap="square" lIns="0" tIns="0" rIns="0" bIns="0" rtlCol="0" anchor="ctr"/>
           <a:lstStyle/>
           <a:p>
-            <a:pPr indent="0" marL="0">
+            <a:pPr marL="0" indent="0">
               <a:buNone/>
             </a:pPr>
             <a:r>
@@ -4387,7 +3887,7 @@
           <a:bodyPr wrap="square" lIns="0" tIns="0" rIns="0" bIns="0" rtlCol="0" anchor="ctr"/>
           <a:lstStyle/>
           <a:p>
-            <a:pPr algn="r" indent="0" marL="0">
+            <a:pPr marL="0" indent="0" algn="r">
               <a:buNone/>
             </a:pPr>
             <a:r>
@@ -4399,7 +3899,7 @@
                 <a:ea typeface="Calibri" pitchFamily="34" charset="-122"/>
                 <a:cs typeface="Calibri" pitchFamily="34" charset="-120"/>
               </a:rPr>
-              <a:t>4 / 9</a:t>
+              <a:t>4 / 7</a:t>
             </a:r>
             <a:endParaRPr lang="en-US" sz="900" dirty="0"/>
           </a:p>
@@ -4429,7 +3929,7 @@
             <a:prstDash val="solid"/>
           </a:ln>
           <a:effectLst>
-            <a:outerShdw sx="100000" sy="100000" kx="0" ky="0" algn="bl" rotWithShape="0" blurRad="152400" dist="38100" dir="5400000">
+            <a:outerShdw blurRad="152400" dist="38100" dir="5400000" algn="bl" rotWithShape="0">
               <a:srgbClr val="000000">
                 <a:alpha val="8000"/>
               </a:srgbClr>
@@ -4458,11 +3958,11 @@
           <a:bodyPr wrap="square" lIns="0" tIns="0" rIns="0" bIns="0" rtlCol="0" anchor="ctr"/>
           <a:lstStyle/>
           <a:p>
-            <a:pPr indent="0" marL="0">
-              <a:buNone/>
-            </a:pPr>
-            <a:r>
-              <a:rPr lang="en-US" sz="1200" b="1" spc="400" kern="0" dirty="0">
+            <a:pPr marL="0" indent="0">
+              <a:buNone/>
+            </a:pPr>
+            <a:r>
+              <a:rPr lang="en-US" sz="1200" b="1" kern="0" spc="400" dirty="0">
                 <a:solidFill>
                   <a:srgbClr val="8A8A8A"/>
                 </a:solidFill>
@@ -4470,7 +3970,7 @@
                 <a:ea typeface="Calibri" pitchFamily="34" charset="-122"/>
                 <a:cs typeface="Calibri" pitchFamily="34" charset="-120"/>
               </a:rPr>
-              <a:t>2:00 AM PT</a:t>
+              <a:t>2:00 AM ET</a:t>
             </a:r>
             <a:endParaRPr lang="en-US" sz="1200" dirty="0"/>
           </a:p>
@@ -4497,7 +3997,7 @@
           <a:bodyPr wrap="square" lIns="0" tIns="0" rIns="0" bIns="0" rtlCol="0" anchor="ctr"/>
           <a:lstStyle/>
           <a:p>
-            <a:pPr indent="0" marL="0">
+            <a:pPr marL="0" indent="0">
               <a:buNone/>
             </a:pPr>
             <a:r>
@@ -4563,7 +4063,7 @@
             <a:prstDash val="solid"/>
           </a:ln>
           <a:effectLst>
-            <a:outerShdw sx="100000" sy="100000" kx="0" ky="0" algn="bl" rotWithShape="0" blurRad="152400" dist="38100" dir="5400000">
+            <a:outerShdw blurRad="152400" dist="38100" dir="5400000" algn="bl" rotWithShape="0">
               <a:srgbClr val="000000">
                 <a:alpha val="8000"/>
               </a:srgbClr>
@@ -4592,11 +4092,11 @@
           <a:bodyPr wrap="square" lIns="0" tIns="0" rIns="0" bIns="0" rtlCol="0" anchor="ctr"/>
           <a:lstStyle/>
           <a:p>
-            <a:pPr indent="0" marL="0">
-              <a:buNone/>
-            </a:pPr>
-            <a:r>
-              <a:rPr lang="en-US" sz="1200" b="1" spc="400" kern="0" dirty="0">
+            <a:pPr marL="0" indent="0">
+              <a:buNone/>
+            </a:pPr>
+            <a:r>
+              <a:rPr lang="en-US" sz="1200" b="1" kern="0" spc="400" dirty="0">
                 <a:solidFill>
                   <a:srgbClr val="FFCD41"/>
                 </a:solidFill>
@@ -4604,7 +4104,7 @@
                 <a:ea typeface="Calibri" pitchFamily="34" charset="-122"/>
                 <a:cs typeface="Calibri" pitchFamily="34" charset="-120"/>
               </a:rPr>
-              <a:t>~ 5 minutes</a:t>
+              <a:t>~ 15 minutes</a:t>
             </a:r>
             <a:endParaRPr lang="en-US" sz="1200" dirty="0"/>
           </a:p>
@@ -4631,7 +4131,7 @@
           <a:bodyPr wrap="square" lIns="0" tIns="0" rIns="0" bIns="0" rtlCol="0" anchor="ctr"/>
           <a:lstStyle/>
           <a:p>
-            <a:pPr indent="0" marL="0">
+            <a:pPr marL="0" indent="0">
               <a:buNone/>
             </a:pPr>
             <a:r>
@@ -4670,7 +4170,7 @@
           <a:bodyPr wrap="square" lIns="0" tIns="0" rIns="0" bIns="0" rtlCol="0" anchor="ctr"/>
           <a:lstStyle/>
           <a:p>
-            <a:pPr indent="0" marL="0">
+            <a:pPr marL="0" indent="0">
               <a:buNone/>
             </a:pPr>
             <a:r>
@@ -4736,7 +4236,7 @@
             <a:prstDash val="solid"/>
           </a:ln>
           <a:effectLst>
-            <a:outerShdw sx="100000" sy="100000" kx="0" ky="0" algn="bl" rotWithShape="0" blurRad="152400" dist="38100" dir="5400000">
+            <a:outerShdw blurRad="152400" dist="38100" dir="5400000" algn="bl" rotWithShape="0">
               <a:srgbClr val="000000">
                 <a:alpha val="8000"/>
               </a:srgbClr>
@@ -4765,11 +4265,11 @@
           <a:bodyPr wrap="square" lIns="0" tIns="0" rIns="0" bIns="0" rtlCol="0" anchor="ctr"/>
           <a:lstStyle/>
           <a:p>
-            <a:pPr indent="0" marL="0">
-              <a:buNone/>
-            </a:pPr>
-            <a:r>
-              <a:rPr lang="en-US" sz="1200" b="1" spc="400" kern="0" dirty="0">
+            <a:pPr marL="0" indent="0">
+              <a:buNone/>
+            </a:pPr>
+            <a:r>
+              <a:rPr lang="en-US" sz="1200" b="1" kern="0" spc="400" dirty="0">
                 <a:solidFill>
                   <a:srgbClr val="8A8A8A"/>
                 </a:solidFill>
@@ -4777,7 +4277,7 @@
                 <a:ea typeface="Calibri" pitchFamily="34" charset="-122"/>
                 <a:cs typeface="Calibri" pitchFamily="34" charset="-120"/>
               </a:rPr>
-              <a:t>2:05 AM PT</a:t>
+              <a:t>2:15 AM ET</a:t>
             </a:r>
             <a:endParaRPr lang="en-US" sz="1200" dirty="0"/>
           </a:p>
@@ -4804,7 +4304,7 @@
           <a:bodyPr wrap="square" lIns="0" tIns="0" rIns="0" bIns="0" rtlCol="0" anchor="ctr"/>
           <a:lstStyle/>
           <a:p>
-            <a:pPr indent="0" marL="0">
+            <a:pPr marL="0" indent="0">
               <a:buNone/>
             </a:pPr>
             <a:r>
@@ -4843,7 +4343,7 @@
           <a:bodyPr wrap="square" lIns="0" tIns="0" rIns="0" bIns="0" rtlCol="0" anchor="ctr"/>
           <a:lstStyle/>
           <a:p>
-            <a:pPr indent="0" marL="0">
+            <a:pPr marL="0" indent="0">
               <a:buNone/>
             </a:pPr>
             <a:r>
@@ -4855,7 +4355,7 @@
                 <a:ea typeface="Calibri" pitchFamily="34" charset="-122"/>
                 <a:cs typeface="Calibri" pitchFamily="34" charset="-120"/>
               </a:rPr>
-              <a:t>L2  ·  Offshore  ·  US</a:t>
+              <a:t>L2 Production Support  ·  Application Team</a:t>
             </a:r>
             <a:endParaRPr lang="en-US" sz="1200" dirty="0"/>
           </a:p>
@@ -4932,7 +4432,7 @@
           <a:bodyPr wrap="square" lIns="0" tIns="0" rIns="0" bIns="0" rtlCol="0" anchor="ctr"/>
           <a:lstStyle/>
           <a:p>
-            <a:pPr indent="0" marL="0">
+            <a:pPr marL="0" indent="0">
               <a:buNone/>
             </a:pPr>
             <a:r>
@@ -4971,7 +4471,7 @@
           <a:bodyPr wrap="square" lIns="0" tIns="0" rIns="0" bIns="0" rtlCol="0" anchor="t"/>
           <a:lstStyle/>
           <a:p>
-            <a:pPr indent="0" marL="0">
+            <a:pPr marL="0" indent="0">
               <a:buNone/>
             </a:pPr>
             <a:r>
@@ -5060,7 +4560,7 @@
           <a:bodyPr wrap="square" lIns="0" tIns="0" rIns="0" bIns="0" rtlCol="0" anchor="ctr"/>
           <a:lstStyle/>
           <a:p>
-            <a:pPr indent="0" marL="0">
+            <a:pPr marL="0" indent="0">
               <a:buNone/>
             </a:pPr>
             <a:r>
@@ -5099,7 +4599,7 @@
           <a:bodyPr wrap="square" lIns="0" tIns="0" rIns="0" bIns="0" rtlCol="0" anchor="t"/>
           <a:lstStyle/>
           <a:p>
-            <a:pPr indent="0" marL="0">
+            <a:pPr marL="0" indent="0">
               <a:buNone/>
             </a:pPr>
             <a:r>
@@ -5188,7 +4688,7 @@
           <a:bodyPr wrap="square" lIns="0" tIns="0" rIns="0" bIns="0" rtlCol="0" anchor="ctr"/>
           <a:lstStyle/>
           <a:p>
-            <a:pPr indent="0" marL="0">
+            <a:pPr marL="0" indent="0">
               <a:buNone/>
             </a:pPr>
             <a:r>
@@ -5227,7 +4727,7 @@
           <a:bodyPr wrap="square" lIns="0" tIns="0" rIns="0" bIns="0" rtlCol="0" anchor="t"/>
           <a:lstStyle/>
           <a:p>
-            <a:pPr indent="0" marL="0">
+            <a:pPr marL="0" indent="0">
               <a:buNone/>
             </a:pPr>
             <a:r>
@@ -5239,7 +4739,7 @@
                 <a:ea typeface="Calibri" pitchFamily="34" charset="-122"/>
                 <a:cs typeface="Calibri" pitchFamily="34" charset="-120"/>
               </a:rPr>
-              <a:t>US DBAs engaged only when SAR-restricted access is truly needed.</a:t>
+              <a:t>US DBAs engaged only when SAR-restricted server access is truly needed.</a:t>
             </a:r>
             <a:endParaRPr lang="en-US" sz="1200" dirty="0"/>
           </a:p>
@@ -5316,7 +4816,7 @@
           <a:bodyPr wrap="square" lIns="0" tIns="0" rIns="0" bIns="0" rtlCol="0" anchor="ctr"/>
           <a:lstStyle/>
           <a:p>
-            <a:pPr indent="0" marL="0">
+            <a:pPr marL="0" indent="0">
               <a:buNone/>
             </a:pPr>
             <a:r>
@@ -5355,7 +4855,7 @@
           <a:bodyPr wrap="square" lIns="0" tIns="0" rIns="0" bIns="0" rtlCol="0" anchor="t"/>
           <a:lstStyle/>
           <a:p>
-            <a:pPr indent="0" marL="0">
+            <a:pPr marL="0" indent="0">
               <a:buNone/>
             </a:pPr>
             <a:r>
@@ -5383,12 +4883,13 @@
 
 <file path=ppt/slides/slide5.xml><?xml version="1.0" encoding="utf-8"?>
 <p:sld xmlns:a="http://schemas.openxmlformats.org/drawingml/2006/main" xmlns:r="http://schemas.openxmlformats.org/officeDocument/2006/relationships" xmlns:p="http://schemas.openxmlformats.org/presentationml/2006/main">
-  <p:cSld name="Slide 5">
+  <p:cSld name="Slide 6">
     <p:bg>
       <p:bgPr>
         <a:solidFill>
           <a:srgbClr val="FFFFFF"/>
         </a:solidFill>
+        <a:effectLst/>
       </p:bgPr>
     </p:bg>
     <p:spTree>
@@ -5407,7 +4908,7 @@
       </p:grpSpPr>
       <p:sp>
         <p:nvSpPr>
-          <p:cNvPr id="2" name="Shape 0"/>
+          <p:cNvPr id="2" name="TopBar"/>
           <p:cNvSpPr/>
           <p:nvPr/>
         </p:nvSpPr>
@@ -5432,7 +4933,7 @@
       </p:sp>
       <p:sp>
         <p:nvSpPr>
-          <p:cNvPr id="3" name="Text 1"/>
+          <p:cNvPr id="3" name="Eyebrow"/>
           <p:cNvSpPr/>
           <p:nvPr/>
         </p:nvSpPr>
@@ -5451,66 +4952,96 @@
           <a:bodyPr wrap="square" lIns="0" tIns="0" rIns="0" bIns="0" rtlCol="0" anchor="ctr"/>
           <a:lstStyle/>
           <a:p>
-            <a:pPr indent="0" marL="0">
-              <a:buNone/>
-            </a:pPr>
-            <a:r>
-              <a:rPr lang="en-US" sz="1100" b="1" spc="600" kern="0" dirty="0">
+            <a:pPr marL="0" indent="0">
+              <a:buNone/>
+            </a:pPr>
+            <a:r>
+              <a:rPr lang="en-US" sz="1100" b="1" kern="0" spc="600" dirty="0">
                 <a:solidFill>
                   <a:srgbClr val="D71E28"/>
                 </a:solidFill>
                 <a:latin typeface="Calibri" pitchFamily="34" charset="0"/>
-                <a:ea typeface="Calibri" pitchFamily="34" charset="-122"/>
-                <a:cs typeface="Calibri" pitchFamily="34" charset="-120"/>
-              </a:rPr>
-              <a:t>WHY THIS MATTERS</a:t>
-            </a:r>
-            <a:endParaRPr lang="en-US" sz="1100" dirty="0"/>
-          </a:p>
-        </p:txBody>
-      </p:sp>
-      <p:sp>
-        <p:nvSpPr>
-          <p:cNvPr id="4" name="Text 2"/>
-          <p:cNvSpPr/>
-          <p:nvPr/>
-        </p:nvSpPr>
-        <p:spPr>
-          <a:xfrm>
-            <a:off x="731520" y="914400"/>
-            <a:ext cx="10698480" cy="914400"/>
-          </a:xfrm>
-          <a:prstGeom prst="rect">
-            <a:avLst/>
-          </a:prstGeom>
-          <a:noFill/>
-          <a:ln/>
-        </p:spPr>
-        <p:txBody>
-          <a:bodyPr wrap="square" lIns="0" tIns="0" rIns="0" bIns="0" rtlCol="0" anchor="ctr"/>
-          <a:lstStyle/>
-          <a:p>
-            <a:pPr indent="0" marL="0">
-              <a:buNone/>
-            </a:pPr>
-            <a:r>
-              <a:rPr lang="en-US" sz="3600" b="1" dirty="0">
+              </a:rPr>
+              <a:t>IMPACT</a:t>
+            </a:r>
+          </a:p>
+        </p:txBody>
+      </p:sp>
+      <p:sp>
+        <p:nvSpPr>
+          <p:cNvPr id="4" name="Title"/>
+          <p:cNvSpPr/>
+          <p:nvPr/>
+        </p:nvSpPr>
+        <p:spPr>
+          <a:xfrm>
+            <a:off x="731520" y="900000"/>
+            <a:ext cx="10698480" cy="500000"/>
+          </a:xfrm>
+          <a:prstGeom prst="rect">
+            <a:avLst/>
+          </a:prstGeom>
+          <a:noFill/>
+          <a:ln/>
+        </p:spPr>
+        <p:txBody>
+          <a:bodyPr wrap="square" lIns="0" tIns="0" rIns="0" bIns="0" rtlCol="0" anchor="ctr"/>
+          <a:lstStyle/>
+          <a:p>
+            <a:pPr marL="0" indent="0">
+              <a:buNone/>
+            </a:pPr>
+            <a:r>
+              <a:rPr lang="en-US" sz="3200" b="1" dirty="0">
                 <a:solidFill>
                   <a:srgbClr val="1B1B1B"/>
                 </a:solidFill>
                 <a:latin typeface="Calibri" pitchFamily="34" charset="0"/>
-                <a:ea typeface="Calibri" pitchFamily="34" charset="-122"/>
-                <a:cs typeface="Calibri" pitchFamily="34" charset="-120"/>
-              </a:rPr>
-              <a:t>Same diagnosis. Wherever you sit.</a:t>
-            </a:r>
-            <a:endParaRPr lang="en-US" sz="3600" dirty="0"/>
-          </a:p>
-        </p:txBody>
-      </p:sp>
-      <p:sp>
-        <p:nvSpPr>
-          <p:cNvPr id="5" name="Text 3"/>
+              </a:rPr>
+              <a:t>Same diagnosis. Real impact. Read-only by design.</a:t>
+            </a:r>
+          </a:p>
+        </p:txBody>
+      </p:sp>
+      <p:sp>
+        <p:nvSpPr>
+          <p:cNvPr id="5" name="Subtitle"/>
+          <p:cNvSpPr/>
+          <p:nvPr/>
+        </p:nvSpPr>
+        <p:spPr>
+          <a:xfrm>
+            <a:off x="731520" y="1450000"/>
+            <a:ext cx="10698480" cy="320000"/>
+          </a:xfrm>
+          <a:prstGeom prst="rect">
+            <a:avLst/>
+          </a:prstGeom>
+          <a:noFill/>
+          <a:ln/>
+        </p:spPr>
+        <p:txBody>
+          <a:bodyPr wrap="square" lIns="0" tIns="0" rIns="0" bIns="0" rtlCol="0" anchor="ctr"/>
+          <a:lstStyle/>
+          <a:p>
+            <a:pPr marL="0" indent="0">
+              <a:buNone/>
+            </a:pPr>
+            <a:r>
+              <a:rPr lang="en-US" sz="1400" dirty="0">
+                <a:solidFill>
+                  <a:srgbClr val="4A4A4A"/>
+                </a:solidFill>
+                <a:latin typeface="Calibri" pitchFamily="34" charset="0"/>
+              </a:rPr>
+              <a:t>The system reads logs, code, and incidents  —  it cannot modify production data or restart jobs.</a:t>
+            </a:r>
+          </a:p>
+        </p:txBody>
+      </p:sp>
+      <p:sp>
+        <p:nvSpPr>
+          <p:cNvPr id="6" name="PageNum"/>
           <p:cNvSpPr/>
           <p:nvPr/>
         </p:nvSpPr>
@@ -5529,7 +5060,7 @@
           <a:bodyPr wrap="square" lIns="0" tIns="0" rIns="0" bIns="0" rtlCol="0" anchor="ctr"/>
           <a:lstStyle/>
           <a:p>
-            <a:pPr algn="r" indent="0" marL="0">
+            <a:pPr marL="0" indent="0" algn="r">
               <a:buNone/>
             </a:pPr>
             <a:r>
@@ -5538,25 +5069,510 @@
                   <a:srgbClr val="8A8A8A"/>
                 </a:solidFill>
                 <a:latin typeface="Calibri" pitchFamily="34" charset="0"/>
-                <a:ea typeface="Calibri" pitchFamily="34" charset="-122"/>
-                <a:cs typeface="Calibri" pitchFamily="34" charset="-120"/>
-              </a:rPr>
-              <a:t>5 / 9</a:t>
-            </a:r>
-            <a:endParaRPr lang="en-US" sz="900" dirty="0"/>
-          </a:p>
-        </p:txBody>
-      </p:sp>
-      <p:sp>
-        <p:nvSpPr>
-          <p:cNvPr id="6" name="Shape 4"/>
-          <p:cNvSpPr/>
-          <p:nvPr/>
-        </p:nvSpPr>
-        <p:spPr>
-          <a:xfrm>
-            <a:off x="502920" y="2103120"/>
-            <a:ext cx="5440680" cy="4069080"/>
+              </a:rPr>
+              <a:t>6 / 7</a:t>
+            </a:r>
+          </a:p>
+        </p:txBody>
+      </p:sp>
+      <p:sp>
+        <p:nvSpPr>
+          <p:cNvPr id="10" name="S1Card"/>
+          <p:cNvSpPr/>
+          <p:nvPr/>
+        </p:nvSpPr>
+        <p:spPr>
+          <a:xfrm>
+            <a:off x="571500" y="2000000"/>
+            <a:ext cx="2640000" cy="1300000"/>
+          </a:xfrm>
+          <a:prstGeom prst="rect">
+            <a:avLst/>
+          </a:prstGeom>
+          <a:solidFill>
+            <a:srgbClr val="FFFDF7"/>
+          </a:solidFill>
+          <a:ln w="12700">
+            <a:solidFill>
+              <a:srgbClr val="E5E0D5"/>
+            </a:solidFill>
+            <a:prstDash val="solid"/>
+          </a:ln>
+        </p:spPr>
+      </p:sp>
+      <p:sp>
+        <p:nvSpPr>
+          <p:cNvPr id="11" name="S1Stripe"/>
+          <p:cNvSpPr/>
+          <p:nvPr/>
+        </p:nvSpPr>
+        <p:spPr>
+          <a:xfrm>
+            <a:off x="571500" y="2000000"/>
+            <a:ext cx="91440" cy="1300000"/>
+          </a:xfrm>
+          <a:prstGeom prst="rect">
+            <a:avLst/>
+          </a:prstGeom>
+          <a:solidFill>
+            <a:srgbClr val="FFCD41"/>
+          </a:solidFill>
+          <a:ln w="12700">
+            <a:solidFill>
+              <a:srgbClr val="FFCD41"/>
+            </a:solidFill>
+            <a:prstDash val="solid"/>
+          </a:ln>
+        </p:spPr>
+      </p:sp>
+      <p:sp>
+        <p:nvSpPr>
+          <p:cNvPr id="12" name="S1Num"/>
+          <p:cNvSpPr/>
+          <p:nvPr/>
+        </p:nvSpPr>
+        <p:spPr>
+          <a:xfrm>
+            <a:off x="845820" y="2150000"/>
+            <a:ext cx="2200000" cy="600000"/>
+          </a:xfrm>
+          <a:prstGeom prst="rect">
+            <a:avLst/>
+          </a:prstGeom>
+          <a:noFill/>
+          <a:ln/>
+        </p:spPr>
+        <p:txBody>
+          <a:bodyPr wrap="square" lIns="0" tIns="0" rIns="0" bIns="0" rtlCol="0" anchor="ctr"/>
+          <a:lstStyle/>
+          <a:p>
+            <a:pPr marL="0" indent="0">
+              <a:buNone/>
+            </a:pPr>
+            <a:r>
+              <a:rPr lang="en-US" sz="3600" b="1" dirty="0">
+                <a:solidFill>
+                  <a:srgbClr val="1B1B1B"/>
+                </a:solidFill>
+                <a:latin typeface="Calibri" pitchFamily="34" charset="0"/>
+              </a:rPr>
+              <a:t>10 hours</a:t>
+            </a:r>
+          </a:p>
+        </p:txBody>
+      </p:sp>
+      <p:sp>
+        <p:nvSpPr>
+          <p:cNvPr id="13" name="S1Desc"/>
+          <p:cNvSpPr/>
+          <p:nvPr/>
+        </p:nvSpPr>
+        <p:spPr>
+          <a:xfrm>
+            <a:off x="845820" y="2780000"/>
+            <a:ext cx="2200000" cy="450000"/>
+          </a:xfrm>
+          <a:prstGeom prst="rect">
+            <a:avLst/>
+          </a:prstGeom>
+          <a:noFill/>
+          <a:ln/>
+        </p:spPr>
+        <p:txBody>
+          <a:bodyPr wrap="square" lIns="0" tIns="0" rIns="0" bIns="0" rtlCol="0" anchor="t"/>
+          <a:lstStyle/>
+          <a:p>
+            <a:pPr marL="0" indent="0">
+              <a:buNone/>
+            </a:pPr>
+            <a:r>
+              <a:rPr lang="en-US" sz="1100" dirty="0">
+                <a:solidFill>
+                  <a:srgbClr val="4A4A4A"/>
+                </a:solidFill>
+                <a:latin typeface="Calibri" pitchFamily="34" charset="0"/>
+              </a:rPr>
+              <a:t>saved on worst-case incidents</a:t>
+            </a:r>
+          </a:p>
+        </p:txBody>
+      </p:sp>
+      <p:sp>
+        <p:nvSpPr>
+          <p:cNvPr id="20" name="S2Card"/>
+          <p:cNvSpPr/>
+          <p:nvPr/>
+        </p:nvSpPr>
+        <p:spPr>
+          <a:xfrm>
+            <a:off x="3356500" y="2000000"/>
+            <a:ext cx="2640000" cy="1300000"/>
+          </a:xfrm>
+          <a:prstGeom prst="rect">
+            <a:avLst/>
+          </a:prstGeom>
+          <a:solidFill>
+            <a:srgbClr val="FFFDF7"/>
+          </a:solidFill>
+          <a:ln w="12700">
+            <a:solidFill>
+              <a:srgbClr val="E5E0D5"/>
+            </a:solidFill>
+            <a:prstDash val="solid"/>
+          </a:ln>
+        </p:spPr>
+      </p:sp>
+      <p:sp>
+        <p:nvSpPr>
+          <p:cNvPr id="21" name="S2Stripe"/>
+          <p:cNvSpPr/>
+          <p:nvPr/>
+        </p:nvSpPr>
+        <p:spPr>
+          <a:xfrm>
+            <a:off x="3356500" y="2000000"/>
+            <a:ext cx="91440" cy="1300000"/>
+          </a:xfrm>
+          <a:prstGeom prst="rect">
+            <a:avLst/>
+          </a:prstGeom>
+          <a:solidFill>
+            <a:srgbClr val="FFCD41"/>
+          </a:solidFill>
+          <a:ln w="12700">
+            <a:solidFill>
+              <a:srgbClr val="FFCD41"/>
+            </a:solidFill>
+            <a:prstDash val="solid"/>
+          </a:ln>
+        </p:spPr>
+      </p:sp>
+      <p:sp>
+        <p:nvSpPr>
+          <p:cNvPr id="22" name="S2Num"/>
+          <p:cNvSpPr/>
+          <p:nvPr/>
+        </p:nvSpPr>
+        <p:spPr>
+          <a:xfrm>
+            <a:off x="3630820" y="2150000"/>
+            <a:ext cx="2200000" cy="600000"/>
+          </a:xfrm>
+          <a:prstGeom prst="rect">
+            <a:avLst/>
+          </a:prstGeom>
+          <a:noFill/>
+          <a:ln/>
+        </p:spPr>
+        <p:txBody>
+          <a:bodyPr wrap="square" lIns="0" tIns="0" rIns="0" bIns="0" rtlCol="0" anchor="ctr"/>
+          <a:lstStyle/>
+          <a:p>
+            <a:pPr marL="0" indent="0">
+              <a:buNone/>
+            </a:pPr>
+            <a:r>
+              <a:rPr lang="en-US" sz="3600" b="1" dirty="0">
+                <a:solidFill>
+                  <a:srgbClr val="1B1B1B"/>
+                </a:solidFill>
+                <a:latin typeface="Calibri" pitchFamily="34" charset="0"/>
+              </a:rPr>
+              <a:t>15 min</a:t>
+            </a:r>
+          </a:p>
+        </p:txBody>
+      </p:sp>
+      <p:sp>
+        <p:nvSpPr>
+          <p:cNvPr id="23" name="S2Desc"/>
+          <p:cNvSpPr/>
+          <p:nvPr/>
+        </p:nvSpPr>
+        <p:spPr>
+          <a:xfrm>
+            <a:off x="3630820" y="2780000"/>
+            <a:ext cx="2200000" cy="450000"/>
+          </a:xfrm>
+          <a:prstGeom prst="rect">
+            <a:avLst/>
+          </a:prstGeom>
+          <a:noFill/>
+          <a:ln/>
+        </p:spPr>
+        <p:txBody>
+          <a:bodyPr wrap="square" lIns="0" tIns="0" rIns="0" bIns="0" rtlCol="0" anchor="t"/>
+          <a:lstStyle/>
+          <a:p>
+            <a:pPr marL="0" indent="0">
+              <a:buNone/>
+            </a:pPr>
+            <a:r>
+              <a:rPr lang="en-US" sz="1100" dirty="0">
+                <a:solidFill>
+                  <a:srgbClr val="4A4A4A"/>
+                </a:solidFill>
+                <a:latin typeface="Calibri" pitchFamily="34" charset="0"/>
+              </a:rPr>
+              <a:t>alert to diagnosis</a:t>
+            </a:r>
+          </a:p>
+        </p:txBody>
+      </p:sp>
+      <p:sp>
+        <p:nvSpPr>
+          <p:cNvPr id="30" name="S3Card"/>
+          <p:cNvSpPr/>
+          <p:nvPr/>
+        </p:nvSpPr>
+        <p:spPr>
+          <a:xfrm>
+            <a:off x="6141500" y="2000000"/>
+            <a:ext cx="2640000" cy="1300000"/>
+          </a:xfrm>
+          <a:prstGeom prst="rect">
+            <a:avLst/>
+          </a:prstGeom>
+          <a:solidFill>
+            <a:srgbClr val="FFFDF7"/>
+          </a:solidFill>
+          <a:ln w="12700">
+            <a:solidFill>
+              <a:srgbClr val="E5E0D5"/>
+            </a:solidFill>
+            <a:prstDash val="solid"/>
+          </a:ln>
+        </p:spPr>
+      </p:sp>
+      <p:sp>
+        <p:nvSpPr>
+          <p:cNvPr id="31" name="S3Stripe"/>
+          <p:cNvSpPr/>
+          <p:nvPr/>
+        </p:nvSpPr>
+        <p:spPr>
+          <a:xfrm>
+            <a:off x="6141500" y="2000000"/>
+            <a:ext cx="91440" cy="1300000"/>
+          </a:xfrm>
+          <a:prstGeom prst="rect">
+            <a:avLst/>
+          </a:prstGeom>
+          <a:solidFill>
+            <a:srgbClr val="FFCD41"/>
+          </a:solidFill>
+          <a:ln w="12700">
+            <a:solidFill>
+              <a:srgbClr val="FFCD41"/>
+            </a:solidFill>
+            <a:prstDash val="solid"/>
+          </a:ln>
+        </p:spPr>
+      </p:sp>
+      <p:sp>
+        <p:nvSpPr>
+          <p:cNvPr id="32" name="S3Num"/>
+          <p:cNvSpPr/>
+          <p:nvPr/>
+        </p:nvSpPr>
+        <p:spPr>
+          <a:xfrm>
+            <a:off x="6415820" y="2150000"/>
+            <a:ext cx="2200000" cy="600000"/>
+          </a:xfrm>
+          <a:prstGeom prst="rect">
+            <a:avLst/>
+          </a:prstGeom>
+          <a:noFill/>
+          <a:ln/>
+        </p:spPr>
+        <p:txBody>
+          <a:bodyPr wrap="square" lIns="0" tIns="0" rIns="0" bIns="0" rtlCol="0" anchor="ctr"/>
+          <a:lstStyle/>
+          <a:p>
+            <a:pPr marL="0" indent="0">
+              <a:buNone/>
+            </a:pPr>
+            <a:r>
+              <a:rPr lang="en-US" sz="3600" b="1" dirty="0">
+                <a:solidFill>
+                  <a:srgbClr val="1B1B1B"/>
+                </a:solidFill>
+                <a:latin typeface="Calibri" pitchFamily="34" charset="0"/>
+              </a:rPr>
+              <a:t>24 / 7</a:t>
+            </a:r>
+          </a:p>
+        </p:txBody>
+      </p:sp>
+      <p:sp>
+        <p:nvSpPr>
+          <p:cNvPr id="33" name="S3Desc"/>
+          <p:cNvSpPr/>
+          <p:nvPr/>
+        </p:nvSpPr>
+        <p:spPr>
+          <a:xfrm>
+            <a:off x="6415820" y="2780000"/>
+            <a:ext cx="2200000" cy="450000"/>
+          </a:xfrm>
+          <a:prstGeom prst="rect">
+            <a:avLst/>
+          </a:prstGeom>
+          <a:noFill/>
+          <a:ln/>
+        </p:spPr>
+        <p:txBody>
+          <a:bodyPr wrap="square" lIns="0" tIns="0" rIns="0" bIns="0" rtlCol="0" anchor="t"/>
+          <a:lstStyle/>
+          <a:p>
+            <a:pPr marL="0" indent="0">
+              <a:buNone/>
+            </a:pPr>
+            <a:r>
+              <a:rPr lang="en-US" sz="1100" dirty="0">
+                <a:solidFill>
+                  <a:srgbClr val="4A4A4A"/>
+                </a:solidFill>
+                <a:latin typeface="Calibri" pitchFamily="34" charset="0"/>
+              </a:rPr>
+              <a:t>diagnosis availability</a:t>
+            </a:r>
+          </a:p>
+        </p:txBody>
+      </p:sp>
+      <p:sp>
+        <p:nvSpPr>
+          <p:cNvPr id="40" name="S4Card"/>
+          <p:cNvSpPr/>
+          <p:nvPr/>
+        </p:nvSpPr>
+        <p:spPr>
+          <a:xfrm>
+            <a:off x="8926500" y="2000000"/>
+            <a:ext cx="2640000" cy="1300000"/>
+          </a:xfrm>
+          <a:prstGeom prst="rect">
+            <a:avLst/>
+          </a:prstGeom>
+          <a:solidFill>
+            <a:srgbClr val="FFFDF7"/>
+          </a:solidFill>
+          <a:ln w="12700">
+            <a:solidFill>
+              <a:srgbClr val="E5E0D5"/>
+            </a:solidFill>
+            <a:prstDash val="solid"/>
+          </a:ln>
+        </p:spPr>
+      </p:sp>
+      <p:sp>
+        <p:nvSpPr>
+          <p:cNvPr id="41" name="S4Stripe"/>
+          <p:cNvSpPr/>
+          <p:nvPr/>
+        </p:nvSpPr>
+        <p:spPr>
+          <a:xfrm>
+            <a:off x="8926500" y="2000000"/>
+            <a:ext cx="91440" cy="1300000"/>
+          </a:xfrm>
+          <a:prstGeom prst="rect">
+            <a:avLst/>
+          </a:prstGeom>
+          <a:solidFill>
+            <a:srgbClr val="FFCD41"/>
+          </a:solidFill>
+          <a:ln w="12700">
+            <a:solidFill>
+              <a:srgbClr val="FFCD41"/>
+            </a:solidFill>
+            <a:prstDash val="solid"/>
+          </a:ln>
+        </p:spPr>
+      </p:sp>
+      <p:sp>
+        <p:nvSpPr>
+          <p:cNvPr id="42" name="S4Num"/>
+          <p:cNvSpPr/>
+          <p:nvPr/>
+        </p:nvSpPr>
+        <p:spPr>
+          <a:xfrm>
+            <a:off x="9200820" y="2150000"/>
+            <a:ext cx="2200000" cy="600000"/>
+          </a:xfrm>
+          <a:prstGeom prst="rect">
+            <a:avLst/>
+          </a:prstGeom>
+          <a:noFill/>
+          <a:ln/>
+        </p:spPr>
+        <p:txBody>
+          <a:bodyPr wrap="square" lIns="0" tIns="0" rIns="0" bIns="0" rtlCol="0" anchor="ctr"/>
+          <a:lstStyle/>
+          <a:p>
+            <a:pPr marL="0" indent="0">
+              <a:buNone/>
+            </a:pPr>
+            <a:r>
+              <a:rPr lang="en-US" sz="3600" b="1" dirty="0">
+                <a:solidFill>
+                  <a:srgbClr val="1B1B1B"/>
+                </a:solidFill>
+                <a:latin typeface="Calibri" pitchFamily="34" charset="0"/>
+              </a:rPr>
+              <a:t>Surgical</a:t>
+            </a:r>
+          </a:p>
+        </p:txBody>
+      </p:sp>
+      <p:sp>
+        <p:nvSpPr>
+          <p:cNvPr id="43" name="S4Desc"/>
+          <p:cNvSpPr/>
+          <p:nvPr/>
+        </p:nvSpPr>
+        <p:spPr>
+          <a:xfrm>
+            <a:off x="9200820" y="2780000"/>
+            <a:ext cx="2200000" cy="450000"/>
+          </a:xfrm>
+          <a:prstGeom prst="rect">
+            <a:avLst/>
+          </a:prstGeom>
+          <a:noFill/>
+          <a:ln/>
+        </p:spPr>
+        <p:txBody>
+          <a:bodyPr wrap="square" lIns="0" tIns="0" rIns="0" bIns="0" rtlCol="0" anchor="t"/>
+          <a:lstStyle/>
+          <a:p>
+            <a:pPr marL="0" indent="0">
+              <a:buNone/>
+            </a:pPr>
+            <a:r>
+              <a:rPr lang="en-US" sz="1100" dirty="0">
+                <a:solidFill>
+                  <a:srgbClr val="4A4A4A"/>
+                </a:solidFill>
+                <a:latin typeface="Calibri" pitchFamily="34" charset="0"/>
+              </a:rPr>
+              <a:t>escalation, not blanket triage</a:t>
+            </a:r>
+          </a:p>
+        </p:txBody>
+      </p:sp>
+      <p:sp>
+        <p:nvSpPr>
+          <p:cNvPr id="50" name="OffCard"/>
+          <p:cNvSpPr/>
+          <p:nvPr/>
+        </p:nvSpPr>
+        <p:spPr>
+          <a:xfrm>
+            <a:off x="571500" y="3550000"/>
+            <a:ext cx="5450000" cy="2350000"/>
           </a:xfrm>
           <a:prstGeom prst="rect">
             <a:avLst/>
@@ -5571,7 +5587,7 @@
             <a:prstDash val="solid"/>
           </a:ln>
           <a:effectLst>
-            <a:outerShdw sx="100000" sy="100000" kx="0" ky="0" algn="bl" rotWithShape="0" blurRad="152400" dist="38100" dir="5400000">
+            <a:outerShdw blurRad="152400" dist="38100" dir="5400000" algn="bl" rotWithShape="0">
               <a:srgbClr val="000000">
                 <a:alpha val="8000"/>
               </a:srgbClr>
@@ -5581,273 +5597,122 @@
       </p:sp>
       <p:sp>
         <p:nvSpPr>
-          <p:cNvPr id="7" name="Shape 5"/>
-          <p:cNvSpPr/>
-          <p:nvPr/>
-        </p:nvSpPr>
-        <p:spPr>
-          <a:xfrm>
-            <a:off x="502920" y="2103120"/>
-            <a:ext cx="5440680" cy="164592"/>
-          </a:xfrm>
-          <a:prstGeom prst="rect">
-            <a:avLst/>
-          </a:prstGeom>
-          <a:solidFill>
-            <a:srgbClr val="D71E28"/>
-          </a:solidFill>
-          <a:ln w="12700">
-            <a:solidFill>
-              <a:srgbClr val="D71E28"/>
-            </a:solidFill>
-            <a:prstDash val="solid"/>
-          </a:ln>
-        </p:spPr>
-      </p:sp>
-      <p:sp>
-        <p:nvSpPr>
-          <p:cNvPr id="8" name="Text 6"/>
-          <p:cNvSpPr/>
-          <p:nvPr/>
-        </p:nvSpPr>
-        <p:spPr>
-          <a:xfrm>
-            <a:off x="868680" y="2468880"/>
-            <a:ext cx="4709160" cy="320040"/>
-          </a:xfrm>
-          <a:prstGeom prst="rect">
-            <a:avLst/>
-          </a:prstGeom>
-          <a:noFill/>
-          <a:ln/>
-        </p:spPr>
-        <p:txBody>
-          <a:bodyPr wrap="square" lIns="0" tIns="0" rIns="0" bIns="0" rtlCol="0" anchor="ctr"/>
-          <a:lstStyle/>
-          <a:p>
-            <a:pPr indent="0" marL="0">
-              <a:buNone/>
-            </a:pPr>
-            <a:r>
-              <a:rPr lang="en-US" sz="1200" b="1" spc="600" kern="0" dirty="0">
-                <a:solidFill>
-                  <a:srgbClr val="8A8A8A"/>
-                </a:solidFill>
-                <a:latin typeface="Calibri" pitchFamily="34" charset="0"/>
-                <a:ea typeface="Calibri" pitchFamily="34" charset="-122"/>
-                <a:cs typeface="Calibri" pitchFamily="34" charset="-120"/>
+          <p:cNvPr id="51" name="OffLabel"/>
+          <p:cNvSpPr/>
+          <p:nvPr/>
+        </p:nvSpPr>
+        <p:spPr>
+          <a:xfrm>
+            <a:off x="845820" y="3700000"/>
+            <a:ext cx="4900000" cy="280000"/>
+          </a:xfrm>
+          <a:prstGeom prst="rect">
+            <a:avLst/>
+          </a:prstGeom>
+          <a:noFill/>
+          <a:ln/>
+        </p:spPr>
+        <p:txBody>
+          <a:bodyPr wrap="square" lIns="0" tIns="0" rIns="0" bIns="0" rtlCol="0" anchor="ctr"/>
+          <a:lstStyle/>
+          <a:p>
+            <a:pPr marL="0" indent="0">
+              <a:buNone/>
+            </a:pPr>
+            <a:r>
+              <a:rPr lang="en-US" sz="1000" b="1" kern="0" spc="500" dirty="0">
+                <a:solidFill>
+                  <a:srgbClr val="D71E28"/>
+                </a:solidFill>
+                <a:latin typeface="Calibri" pitchFamily="34" charset="0"/>
               </a:rPr>
               <a:t>OFFSHORE EGS</a:t>
             </a:r>
-            <a:endParaRPr lang="en-US" sz="1200" dirty="0"/>
-          </a:p>
-        </p:txBody>
-      </p:sp>
-      <p:sp>
-        <p:nvSpPr>
-          <p:cNvPr id="9" name="Text 7"/>
-          <p:cNvSpPr/>
-          <p:nvPr/>
-        </p:nvSpPr>
-        <p:spPr>
-          <a:xfrm>
-            <a:off x="868680" y="2834640"/>
-            <a:ext cx="4709160" cy="548640"/>
-          </a:xfrm>
-          <a:prstGeom prst="rect">
-            <a:avLst/>
-          </a:prstGeom>
-          <a:noFill/>
-          <a:ln/>
-        </p:spPr>
-        <p:txBody>
-          <a:bodyPr wrap="square" lIns="0" tIns="0" rIns="0" bIns="0" rtlCol="0" anchor="ctr"/>
-          <a:lstStyle/>
-          <a:p>
-            <a:pPr indent="0" marL="0">
-              <a:buNone/>
-            </a:pPr>
-            <a:r>
-              <a:rPr lang="en-US" sz="2200" b="1" dirty="0">
+          </a:p>
+        </p:txBody>
+      </p:sp>
+      <p:sp>
+        <p:nvSpPr>
+          <p:cNvPr id="52" name="OffHead"/>
+          <p:cNvSpPr/>
+          <p:nvPr/>
+        </p:nvSpPr>
+        <p:spPr>
+          <a:xfrm>
+            <a:off x="845820" y="4000000"/>
+            <a:ext cx="4900000" cy="380000"/>
+          </a:xfrm>
+          <a:prstGeom prst="rect">
+            <a:avLst/>
+          </a:prstGeom>
+          <a:noFill/>
+          <a:ln/>
+        </p:spPr>
+        <p:txBody>
+          <a:bodyPr wrap="square" lIns="0" tIns="0" rIns="0" bIns="0" rtlCol="0" anchor="ctr"/>
+          <a:lstStyle/>
+          <a:p>
+            <a:pPr marL="0" indent="0">
+              <a:buNone/>
+            </a:pPr>
+            <a:r>
+              <a:rPr lang="en-US" sz="1800" b="1" dirty="0">
                 <a:solidFill>
                   <a:srgbClr val="1B1B1B"/>
                 </a:solidFill>
                 <a:latin typeface="Calibri" pitchFamily="34" charset="0"/>
-                <a:ea typeface="Calibri" pitchFamily="34" charset="-122"/>
-                <a:cs typeface="Calibri" pitchFamily="34" charset="-120"/>
               </a:rPr>
               <a:t>Frontline coverage 24/7</a:t>
             </a:r>
-            <a:endParaRPr lang="en-US" sz="2200" dirty="0"/>
-          </a:p>
-        </p:txBody>
-      </p:sp>
-      <p:sp>
-        <p:nvSpPr>
-          <p:cNvPr id="10" name="Text 8"/>
-          <p:cNvSpPr/>
-          <p:nvPr/>
-        </p:nvSpPr>
-        <p:spPr>
-          <a:xfrm>
-            <a:off x="868680" y="3611880"/>
-            <a:ext cx="4709160" cy="274320"/>
-          </a:xfrm>
-          <a:prstGeom prst="rect">
-            <a:avLst/>
-          </a:prstGeom>
-          <a:noFill/>
-          <a:ln/>
-        </p:spPr>
-        <p:txBody>
-          <a:bodyPr wrap="square" lIns="0" tIns="0" rIns="0" bIns="0" rtlCol="0" anchor="ctr"/>
-          <a:lstStyle/>
-          <a:p>
-            <a:pPr indent="0" marL="0">
-              <a:buNone/>
-            </a:pPr>
-            <a:r>
-              <a:rPr lang="en-US" sz="1000" b="1" spc="500" kern="0" dirty="0">
-                <a:solidFill>
-                  <a:srgbClr val="D71E28"/>
-                </a:solidFill>
-                <a:latin typeface="Calibri" pitchFamily="34" charset="0"/>
-                <a:ea typeface="Calibri" pitchFamily="34" charset="-122"/>
-                <a:cs typeface="Calibri" pitchFamily="34" charset="-120"/>
-              </a:rPr>
-              <a:t>TODAY</a:t>
-            </a:r>
-            <a:endParaRPr lang="en-US" sz="1000" dirty="0"/>
-          </a:p>
-        </p:txBody>
-      </p:sp>
-      <p:sp>
-        <p:nvSpPr>
-          <p:cNvPr id="11" name="Text 9"/>
-          <p:cNvSpPr/>
-          <p:nvPr/>
-        </p:nvSpPr>
-        <p:spPr>
-          <a:xfrm>
-            <a:off x="868680" y="3886200"/>
-            <a:ext cx="4709160" cy="777240"/>
-          </a:xfrm>
-          <a:prstGeom prst="rect">
-            <a:avLst/>
-          </a:prstGeom>
-          <a:noFill/>
-          <a:ln/>
-        </p:spPr>
-        <p:txBody>
-          <a:bodyPr wrap="square" lIns="0" tIns="0" rIns="0" bIns="0" rtlCol="0" anchor="ctr"/>
-          <a:lstStyle/>
-          <a:p>
-            <a:pPr indent="0" marL="0">
+          </a:p>
+        </p:txBody>
+      </p:sp>
+      <p:sp>
+        <p:nvSpPr>
+          <p:cNvPr id="53" name="OffBody"/>
+          <p:cNvSpPr/>
+          <p:nvPr/>
+        </p:nvSpPr>
+        <p:spPr>
+          <a:xfrm>
+            <a:off x="845820" y="4470000"/>
+            <a:ext cx="4900000" cy="1350000"/>
+          </a:xfrm>
+          <a:prstGeom prst="rect">
+            <a:avLst/>
+          </a:prstGeom>
+          <a:noFill/>
+          <a:ln/>
+        </p:spPr>
+        <p:txBody>
+          <a:bodyPr wrap="square" lIns="0" tIns="0" rIns="0" bIns="0" rtlCol="0" anchor="t"/>
+          <a:lstStyle/>
+          <a:p>
+            <a:pPr marL="0" indent="0">
               <a:buNone/>
             </a:pPr>
             <a:r>
               <a:rPr lang="en-US" sz="1300" dirty="0">
                 <a:solidFill>
-                  <a:srgbClr val="1B1B1B"/>
-                </a:solidFill>
-                <a:latin typeface="Calibri" pitchFamily="34" charset="0"/>
-                <a:ea typeface="Calibri" pitchFamily="34" charset="-122"/>
-                <a:cs typeface="Calibri" pitchFamily="34" charset="-120"/>
-              </a:rPr>
-              <a:t>Blocked by SAR access. Wait until US morning to make progress.</a:t>
-            </a:r>
-            <a:endParaRPr lang="en-US" sz="1300" dirty="0"/>
-          </a:p>
-        </p:txBody>
-      </p:sp>
-      <p:sp>
-        <p:nvSpPr>
-          <p:cNvPr id="12" name="Text 10"/>
-          <p:cNvSpPr/>
-          <p:nvPr/>
-        </p:nvSpPr>
-        <p:spPr>
-          <a:xfrm>
-            <a:off x="868680" y="4800600"/>
-            <a:ext cx="4709160" cy="274320"/>
-          </a:xfrm>
-          <a:prstGeom prst="rect">
-            <a:avLst/>
-          </a:prstGeom>
-          <a:noFill/>
-          <a:ln/>
-        </p:spPr>
-        <p:txBody>
-          <a:bodyPr wrap="square" lIns="0" tIns="0" rIns="0" bIns="0" rtlCol="0" anchor="ctr"/>
-          <a:lstStyle/>
-          <a:p>
-            <a:pPr indent="0" marL="0">
-              <a:buNone/>
-            </a:pPr>
-            <a:r>
-              <a:rPr lang="en-US" sz="1000" b="1" spc="500" kern="0" dirty="0">
-                <a:solidFill>
-                  <a:srgbClr val="8A8A8A"/>
-                </a:solidFill>
-                <a:latin typeface="Calibri" pitchFamily="34" charset="0"/>
-                <a:ea typeface="Calibri" pitchFamily="34" charset="-122"/>
-                <a:cs typeface="Calibri" pitchFamily="34" charset="-120"/>
-              </a:rPr>
-              <a:t>WITH AUTOMATION</a:t>
-            </a:r>
-            <a:endParaRPr lang="en-US" sz="1000" dirty="0"/>
-          </a:p>
-        </p:txBody>
-      </p:sp>
-      <p:sp>
-        <p:nvSpPr>
-          <p:cNvPr id="13" name="Text 11"/>
-          <p:cNvSpPr/>
-          <p:nvPr/>
-        </p:nvSpPr>
-        <p:spPr>
-          <a:xfrm>
-            <a:off x="868680" y="5074920"/>
-            <a:ext cx="4709160" cy="1005840"/>
-          </a:xfrm>
-          <a:prstGeom prst="rect">
-            <a:avLst/>
-          </a:prstGeom>
-          <a:noFill/>
-          <a:ln/>
-        </p:spPr>
-        <p:txBody>
-          <a:bodyPr wrap="square" lIns="0" tIns="0" rIns="0" bIns="0" rtlCol="0" anchor="ctr"/>
-          <a:lstStyle/>
-          <a:p>
-            <a:pPr indent="0" marL="0">
-              <a:buNone/>
-            </a:pPr>
-            <a:r>
-              <a:rPr lang="en-US" sz="1300" dirty="0">
-                <a:solidFill>
                   <a:srgbClr val="4A4A4A"/>
                 </a:solidFill>
                 <a:latin typeface="Calibri" pitchFamily="34" charset="0"/>
-                <a:ea typeface="Calibri" pitchFamily="34" charset="-122"/>
-                <a:cs typeface="Calibri" pitchFamily="34" charset="-120"/>
-              </a:rPr>
-              <a:t>Receives a usable diagnosis at 2:05 AM. Confirms scope, preps the fix, escalates only what truly requires US access.</a:t>
-            </a:r>
-            <a:endParaRPr lang="en-US" sz="1300" dirty="0"/>
-          </a:p>
-        </p:txBody>
-      </p:sp>
-      <p:sp>
-        <p:nvSpPr>
-          <p:cNvPr id="14" name="Shape 12"/>
-          <p:cNvSpPr/>
-          <p:nvPr/>
-        </p:nvSpPr>
-        <p:spPr>
-          <a:xfrm>
-            <a:off x="6217920" y="2103120"/>
-            <a:ext cx="5440680" cy="4069080"/>
+              </a:rPr>
+              <a:t>Receives a usable diagnosis at 2:15 AM. Confirms scope, preps the fix, and escalates only what truly requires US access  —  no more waiting until US morning hours.</a:t>
+            </a:r>
+          </a:p>
+        </p:txBody>
+      </p:sp>
+      <p:sp>
+        <p:nvSpPr>
+          <p:cNvPr id="60" name="DbaCard"/>
+          <p:cNvSpPr/>
+          <p:nvPr/>
+        </p:nvSpPr>
+        <p:spPr>
+          <a:xfrm>
+            <a:off x="6172000" y="3550000"/>
+            <a:ext cx="5450000" cy="2350000"/>
           </a:xfrm>
           <a:prstGeom prst="rect">
             <a:avLst/>
@@ -5862,7 +5727,7 @@
             <a:prstDash val="solid"/>
           </a:ln>
           <a:effectLst>
-            <a:outerShdw sx="100000" sy="100000" kx="0" ky="0" algn="bl" rotWithShape="0" blurRad="152400" dist="38100" dir="5400000">
+            <a:outerShdw blurRad="152400" dist="38100" dir="5400000" algn="bl" rotWithShape="0">
               <a:srgbClr val="000000">
                 <a:alpha val="8000"/>
               </a:srgbClr>
@@ -5872,260 +5737,109 @@
       </p:sp>
       <p:sp>
         <p:nvSpPr>
-          <p:cNvPr id="15" name="Shape 13"/>
-          <p:cNvSpPr/>
-          <p:nvPr/>
-        </p:nvSpPr>
-        <p:spPr>
-          <a:xfrm>
-            <a:off x="6217920" y="2103120"/>
-            <a:ext cx="5440680" cy="164592"/>
-          </a:xfrm>
-          <a:prstGeom prst="rect">
-            <a:avLst/>
-          </a:prstGeom>
-          <a:solidFill>
-            <a:srgbClr val="FFCD41"/>
-          </a:solidFill>
-          <a:ln w="12700">
-            <a:solidFill>
-              <a:srgbClr val="FFCD41"/>
-            </a:solidFill>
-            <a:prstDash val="solid"/>
-          </a:ln>
-        </p:spPr>
-      </p:sp>
-      <p:sp>
-        <p:nvSpPr>
-          <p:cNvPr id="16" name="Text 14"/>
-          <p:cNvSpPr/>
-          <p:nvPr/>
-        </p:nvSpPr>
-        <p:spPr>
-          <a:xfrm>
-            <a:off x="6583680" y="2468880"/>
-            <a:ext cx="4709160" cy="320040"/>
-          </a:xfrm>
-          <a:prstGeom prst="rect">
-            <a:avLst/>
-          </a:prstGeom>
-          <a:noFill/>
-          <a:ln/>
-        </p:spPr>
-        <p:txBody>
-          <a:bodyPr wrap="square" lIns="0" tIns="0" rIns="0" bIns="0" rtlCol="0" anchor="ctr"/>
-          <a:lstStyle/>
-          <a:p>
-            <a:pPr indent="0" marL="0">
-              <a:buNone/>
-            </a:pPr>
-            <a:r>
-              <a:rPr lang="en-US" sz="1200" b="1" spc="600" kern="0" dirty="0">
-                <a:solidFill>
-                  <a:srgbClr val="8A8A8A"/>
-                </a:solidFill>
-                <a:latin typeface="Calibri" pitchFamily="34" charset="0"/>
-                <a:ea typeface="Calibri" pitchFamily="34" charset="-122"/>
-                <a:cs typeface="Calibri" pitchFamily="34" charset="-120"/>
+          <p:cNvPr id="61" name="DbaLabel"/>
+          <p:cNvSpPr/>
+          <p:nvPr/>
+        </p:nvSpPr>
+        <p:spPr>
+          <a:xfrm>
+            <a:off x="6446320" y="3700000"/>
+            <a:ext cx="4900000" cy="280000"/>
+          </a:xfrm>
+          <a:prstGeom prst="rect">
+            <a:avLst/>
+          </a:prstGeom>
+          <a:noFill/>
+          <a:ln/>
+        </p:spPr>
+        <p:txBody>
+          <a:bodyPr wrap="square" lIns="0" tIns="0" rIns="0" bIns="0" rtlCol="0" anchor="ctr"/>
+          <a:lstStyle/>
+          <a:p>
+            <a:pPr marL="0" indent="0">
+              <a:buNone/>
+            </a:pPr>
+            <a:r>
+              <a:rPr lang="en-US" sz="1000" b="1" kern="0" spc="500" dirty="0">
+                <a:solidFill>
+                  <a:srgbClr val="D71E28"/>
+                </a:solidFill>
+                <a:latin typeface="Calibri" pitchFamily="34" charset="0"/>
               </a:rPr>
               <a:t>US DBAs</a:t>
             </a:r>
-            <a:endParaRPr lang="en-US" sz="1200" dirty="0"/>
-          </a:p>
-        </p:txBody>
-      </p:sp>
-      <p:sp>
-        <p:nvSpPr>
-          <p:cNvPr id="17" name="Text 15"/>
-          <p:cNvSpPr/>
-          <p:nvPr/>
-        </p:nvSpPr>
-        <p:spPr>
-          <a:xfrm>
-            <a:off x="6583680" y="2834640"/>
-            <a:ext cx="4709160" cy="548640"/>
-          </a:xfrm>
-          <a:prstGeom prst="rect">
-            <a:avLst/>
-          </a:prstGeom>
-          <a:noFill/>
-          <a:ln/>
-        </p:spPr>
-        <p:txBody>
-          <a:bodyPr wrap="square" lIns="0" tIns="0" rIns="0" bIns="0" rtlCol="0" anchor="ctr"/>
-          <a:lstStyle/>
-          <a:p>
-            <a:pPr indent="0" marL="0">
-              <a:buNone/>
-            </a:pPr>
-            <a:r>
-              <a:rPr lang="en-US" sz="2200" b="1" dirty="0">
+          </a:p>
+        </p:txBody>
+      </p:sp>
+      <p:sp>
+        <p:nvSpPr>
+          <p:cNvPr id="62" name="DbaHead"/>
+          <p:cNvSpPr/>
+          <p:nvPr/>
+        </p:nvSpPr>
+        <p:spPr>
+          <a:xfrm>
+            <a:off x="6446320" y="4000000"/>
+            <a:ext cx="4900000" cy="380000"/>
+          </a:xfrm>
+          <a:prstGeom prst="rect">
+            <a:avLst/>
+          </a:prstGeom>
+          <a:noFill/>
+          <a:ln/>
+        </p:spPr>
+        <p:txBody>
+          <a:bodyPr wrap="square" lIns="0" tIns="0" rIns="0" bIns="0" rtlCol="0" anchor="ctr"/>
+          <a:lstStyle/>
+          <a:p>
+            <a:pPr marL="0" indent="0">
+              <a:buNone/>
+            </a:pPr>
+            <a:r>
+              <a:rPr lang="en-US" sz="1800" b="1" dirty="0">
                 <a:solidFill>
                   <a:srgbClr val="1B1B1B"/>
                 </a:solidFill>
                 <a:latin typeface="Calibri" pitchFamily="34" charset="0"/>
-                <a:ea typeface="Calibri" pitchFamily="34" charset="-122"/>
-                <a:cs typeface="Calibri" pitchFamily="34" charset="-120"/>
               </a:rPr>
               <a:t>Engaged surgically</a:t>
             </a:r>
-            <a:endParaRPr lang="en-US" sz="2200" dirty="0"/>
-          </a:p>
-        </p:txBody>
-      </p:sp>
-      <p:sp>
-        <p:nvSpPr>
-          <p:cNvPr id="18" name="Text 16"/>
-          <p:cNvSpPr/>
-          <p:nvPr/>
-        </p:nvSpPr>
-        <p:spPr>
-          <a:xfrm>
-            <a:off x="6583680" y="3611880"/>
-            <a:ext cx="4709160" cy="274320"/>
-          </a:xfrm>
-          <a:prstGeom prst="rect">
-            <a:avLst/>
-          </a:prstGeom>
-          <a:noFill/>
-          <a:ln/>
-        </p:spPr>
-        <p:txBody>
-          <a:bodyPr wrap="square" lIns="0" tIns="0" rIns="0" bIns="0" rtlCol="0" anchor="ctr"/>
-          <a:lstStyle/>
-          <a:p>
-            <a:pPr indent="0" marL="0">
-              <a:buNone/>
-            </a:pPr>
-            <a:r>
-              <a:rPr lang="en-US" sz="1000" b="1" spc="500" kern="0" dirty="0">
-                <a:solidFill>
-                  <a:srgbClr val="D71E28"/>
-                </a:solidFill>
-                <a:latin typeface="Calibri" pitchFamily="34" charset="0"/>
-                <a:ea typeface="Calibri" pitchFamily="34" charset="-122"/>
-                <a:cs typeface="Calibri" pitchFamily="34" charset="-120"/>
-              </a:rPr>
-              <a:t>TODAY</a:t>
-            </a:r>
-            <a:endParaRPr lang="en-US" sz="1000" dirty="0"/>
-          </a:p>
-        </p:txBody>
-      </p:sp>
-      <p:sp>
-        <p:nvSpPr>
-          <p:cNvPr id="19" name="Text 17"/>
-          <p:cNvSpPr/>
-          <p:nvPr/>
-        </p:nvSpPr>
-        <p:spPr>
-          <a:xfrm>
-            <a:off x="6583680" y="3886200"/>
-            <a:ext cx="4709160" cy="777240"/>
-          </a:xfrm>
-          <a:prstGeom prst="rect">
-            <a:avLst/>
-          </a:prstGeom>
-          <a:noFill/>
-          <a:ln/>
-        </p:spPr>
-        <p:txBody>
-          <a:bodyPr wrap="square" lIns="0" tIns="0" rIns="0" bIns="0" rtlCol="0" anchor="ctr"/>
-          <a:lstStyle/>
-          <a:p>
-            <a:pPr indent="0" marL="0">
+          </a:p>
+        </p:txBody>
+      </p:sp>
+      <p:sp>
+        <p:nvSpPr>
+          <p:cNvPr id="63" name="DbaBody"/>
+          <p:cNvSpPr/>
+          <p:nvPr/>
+        </p:nvSpPr>
+        <p:spPr>
+          <a:xfrm>
+            <a:off x="6446320" y="4470000"/>
+            <a:ext cx="4900000" cy="1350000"/>
+          </a:xfrm>
+          <a:prstGeom prst="rect">
+            <a:avLst/>
+          </a:prstGeom>
+          <a:noFill/>
+          <a:ln/>
+        </p:spPr>
+        <p:txBody>
+          <a:bodyPr wrap="square" lIns="0" tIns="0" rIns="0" bIns="0" rtlCol="0" anchor="t"/>
+          <a:lstStyle/>
+          <a:p>
+            <a:pPr marL="0" indent="0">
               <a:buNone/>
             </a:pPr>
             <a:r>
               <a:rPr lang="en-US" sz="1300" dirty="0">
                 <a:solidFill>
-                  <a:srgbClr val="1B1B1B"/>
-                </a:solidFill>
-                <a:latin typeface="Calibri" pitchFamily="34" charset="0"/>
-                <a:ea typeface="Calibri" pitchFamily="34" charset="-122"/>
-                <a:cs typeface="Calibri" pitchFamily="34" charset="-120"/>
-              </a:rPr>
-              <a:t>Pulled into routine first-pass triage that often could have been done elsewhere.</a:t>
-            </a:r>
-            <a:endParaRPr lang="en-US" sz="1300" dirty="0"/>
-          </a:p>
-        </p:txBody>
-      </p:sp>
-      <p:sp>
-        <p:nvSpPr>
-          <p:cNvPr id="20" name="Text 18"/>
-          <p:cNvSpPr/>
-          <p:nvPr/>
-        </p:nvSpPr>
-        <p:spPr>
-          <a:xfrm>
-            <a:off x="6583680" y="4800600"/>
-            <a:ext cx="4709160" cy="274320"/>
-          </a:xfrm>
-          <a:prstGeom prst="rect">
-            <a:avLst/>
-          </a:prstGeom>
-          <a:noFill/>
-          <a:ln/>
-        </p:spPr>
-        <p:txBody>
-          <a:bodyPr wrap="square" lIns="0" tIns="0" rIns="0" bIns="0" rtlCol="0" anchor="ctr"/>
-          <a:lstStyle/>
-          <a:p>
-            <a:pPr indent="0" marL="0">
-              <a:buNone/>
-            </a:pPr>
-            <a:r>
-              <a:rPr lang="en-US" sz="1000" b="1" spc="500" kern="0" dirty="0">
-                <a:solidFill>
-                  <a:srgbClr val="8A8A8A"/>
-                </a:solidFill>
-                <a:latin typeface="Calibri" pitchFamily="34" charset="0"/>
-                <a:ea typeface="Calibri" pitchFamily="34" charset="-122"/>
-                <a:cs typeface="Calibri" pitchFamily="34" charset="-120"/>
-              </a:rPr>
-              <a:t>WITH AUTOMATION</a:t>
-            </a:r>
-            <a:endParaRPr lang="en-US" sz="1000" dirty="0"/>
-          </a:p>
-        </p:txBody>
-      </p:sp>
-      <p:sp>
-        <p:nvSpPr>
-          <p:cNvPr id="21" name="Text 19"/>
-          <p:cNvSpPr/>
-          <p:nvPr/>
-        </p:nvSpPr>
-        <p:spPr>
-          <a:xfrm>
-            <a:off x="6583680" y="5074920"/>
-            <a:ext cx="4709160" cy="1005840"/>
-          </a:xfrm>
-          <a:prstGeom prst="rect">
-            <a:avLst/>
-          </a:prstGeom>
-          <a:noFill/>
-          <a:ln/>
-        </p:spPr>
-        <p:txBody>
-          <a:bodyPr wrap="square" lIns="0" tIns="0" rIns="0" bIns="0" rtlCol="0" anchor="ctr"/>
-          <a:lstStyle/>
-          <a:p>
-            <a:pPr indent="0" marL="0">
-              <a:buNone/>
-            </a:pPr>
-            <a:r>
-              <a:rPr lang="en-US" sz="1300" dirty="0">
-                <a:solidFill>
                   <a:srgbClr val="4A4A4A"/>
                 </a:solidFill>
                 <a:latin typeface="Calibri" pitchFamily="34" charset="0"/>
-                <a:ea typeface="Calibri" pitchFamily="34" charset="-122"/>
-                <a:cs typeface="Calibri" pitchFamily="34" charset="-120"/>
-              </a:rPr>
-              <a:t>Engaged only for tasks that genuinely require SAR-restricted access. No more 5 AM wake-ups for routine triage.</a:t>
-            </a:r>
-            <a:endParaRPr lang="en-US" sz="1300" dirty="0"/>
+              </a:rPr>
+              <a:t>Engaged only for tasks that genuinely require SAR-restricted access  —  no more 5 AM wake-ups for routine first-pass triage that could have been handled elsewhere.</a:t>
+            </a:r>
           </a:p>
         </p:txBody>
       </p:sp>
@@ -6137,14 +5851,15 @@
 </p:sld>
 </file>
 
-<file path=ppt/slides/slide6.xml><?xml version="1.0" encoding="utf-8"?>
+<file path=ppt/slides/slide8.xml><?xml version="1.0" encoding="utf-8"?>
 <p:sld xmlns:a="http://schemas.openxmlformats.org/drawingml/2006/main" xmlns:r="http://schemas.openxmlformats.org/officeDocument/2006/relationships" xmlns:p="http://schemas.openxmlformats.org/presentationml/2006/main">
-  <p:cSld name="Slide 6">
+  <p:cSld name="Slide 8">
     <p:bg>
       <p:bgPr>
         <a:solidFill>
           <a:srgbClr val="FFFFFF"/>
         </a:solidFill>
+        <a:effectLst/>
       </p:bgPr>
     </p:bg>
     <p:spTree>
@@ -6207,11 +5922,11 @@
           <a:bodyPr wrap="square" lIns="0" tIns="0" rIns="0" bIns="0" rtlCol="0" anchor="ctr"/>
           <a:lstStyle/>
           <a:p>
-            <a:pPr indent="0" marL="0">
-              <a:buNone/>
-            </a:pPr>
-            <a:r>
-              <a:rPr lang="en-US" sz="1100" b="1" spc="600" kern="0" dirty="0">
+            <a:pPr marL="0" indent="0">
+              <a:buNone/>
+            </a:pPr>
+            <a:r>
+              <a:rPr lang="en-US" sz="1100" b="1" kern="0" spc="600" dirty="0">
                 <a:solidFill>
                   <a:srgbClr val="D71E28"/>
                 </a:solidFill>
@@ -6219,7 +5934,7 @@
                 <a:ea typeface="Calibri" pitchFamily="34" charset="-122"/>
                 <a:cs typeface="Calibri" pitchFamily="34" charset="-120"/>
               </a:rPr>
-              <a:t>IMPACT</a:t>
+              <a:t>ROADMAP</a:t>
             </a:r>
             <a:endParaRPr lang="en-US" sz="1100" dirty="0"/>
           </a:p>
@@ -6246,7 +5961,7 @@
           <a:bodyPr wrap="square" lIns="0" tIns="0" rIns="0" bIns="0" rtlCol="0" anchor="ctr"/>
           <a:lstStyle/>
           <a:p>
-            <a:pPr indent="0" marL="0">
+            <a:pPr marL="0" indent="0">
               <a:buNone/>
             </a:pPr>
             <a:r>
@@ -6258,7 +5973,7 @@
                 <a:ea typeface="Calibri" pitchFamily="34" charset="-122"/>
                 <a:cs typeface="Calibri" pitchFamily="34" charset="-120"/>
               </a:rPr>
-              <a:t>What this means in practice.</a:t>
+              <a:t>Start small. Prove value. Expand.</a:t>
             </a:r>
             <a:endParaRPr lang="en-US" sz="3600" dirty="0"/>
           </a:p>
@@ -6285,7 +6000,7 @@
           <a:bodyPr wrap="square" lIns="0" tIns="0" rIns="0" bIns="0" rtlCol="0" anchor="ctr"/>
           <a:lstStyle/>
           <a:p>
-            <a:pPr algn="r" indent="0" marL="0">
+            <a:pPr marL="0" indent="0" algn="r">
               <a:buNone/>
             </a:pPr>
             <a:r>
@@ -6297,7 +6012,7 @@
                 <a:ea typeface="Calibri" pitchFamily="34" charset="-122"/>
                 <a:cs typeface="Calibri" pitchFamily="34" charset="-120"/>
               </a:rPr>
-              <a:t>6 / 9</a:t>
+              <a:t>7 / 7</a:t>
             </a:r>
             <a:endParaRPr lang="en-US" sz="900" dirty="0"/>
           </a:p>
@@ -6311,8 +6026,8 @@
         </p:nvSpPr>
         <p:spPr>
           <a:xfrm>
-            <a:off x="548640" y="2194560"/>
-            <a:ext cx="5440680" cy="1783080"/>
+            <a:off x="365760" y="2194560"/>
+            <a:ext cx="3657600" cy="3657600"/>
           </a:xfrm>
           <a:prstGeom prst="rect">
             <a:avLst/>
@@ -6327,7 +6042,7 @@
             <a:prstDash val="solid"/>
           </a:ln>
           <a:effectLst>
-            <a:outerShdw sx="100000" sy="100000" kx="0" ky="0" algn="bl" rotWithShape="0" blurRad="152400" dist="38100" dir="5400000">
+            <a:outerShdw blurRad="152400" dist="38100" dir="5400000" algn="bl" rotWithShape="0">
               <a:srgbClr val="000000">
                 <a:alpha val="8000"/>
               </a:srgbClr>
@@ -6343,8 +6058,8 @@
         </p:nvSpPr>
         <p:spPr>
           <a:xfrm>
-            <a:off x="548640" y="2194560"/>
-            <a:ext cx="164592" cy="1783080"/>
+            <a:off x="640080" y="2514600"/>
+            <a:ext cx="1463040" cy="365760"/>
           </a:xfrm>
           <a:prstGeom prst="rect">
             <a:avLst/>
@@ -6368,63 +6083,63 @@
         </p:nvSpPr>
         <p:spPr>
           <a:xfrm>
-            <a:off x="914400" y="2377440"/>
-            <a:ext cx="4892040" cy="868680"/>
-          </a:xfrm>
-          <a:prstGeom prst="rect">
-            <a:avLst/>
-          </a:prstGeom>
-          <a:noFill/>
-          <a:ln/>
-        </p:spPr>
-        <p:txBody>
-          <a:bodyPr wrap="square" lIns="0" tIns="0" rIns="0" bIns="0" rtlCol="0" anchor="ctr"/>
-          <a:lstStyle/>
-          <a:p>
-            <a:pPr indent="0" marL="0">
-              <a:buNone/>
-            </a:pPr>
-            <a:r>
-              <a:rPr lang="en-US" sz="4400" b="1" dirty="0">
-                <a:solidFill>
-                  <a:srgbClr val="1B1B1B"/>
+            <a:off x="640080" y="2514600"/>
+            <a:ext cx="1463040" cy="365760"/>
+          </a:xfrm>
+          <a:prstGeom prst="rect">
+            <a:avLst/>
+          </a:prstGeom>
+          <a:noFill/>
+          <a:ln/>
+        </p:spPr>
+        <p:txBody>
+          <a:bodyPr wrap="square" lIns="0" tIns="0" rIns="0" bIns="0" rtlCol="0" anchor="ctr"/>
+          <a:lstStyle/>
+          <a:p>
+            <a:pPr marL="0" indent="0" algn="ctr">
+              <a:buNone/>
+            </a:pPr>
+            <a:r>
+              <a:rPr lang="en-US" sz="1100" b="1" kern="0" spc="400" dirty="0">
+                <a:solidFill>
+                  <a:srgbClr val="FFFFFF"/>
                 </a:solidFill>
                 <a:latin typeface="Calibri" pitchFamily="34" charset="0"/>
                 <a:ea typeface="Calibri" pitchFamily="34" charset="-122"/>
                 <a:cs typeface="Calibri" pitchFamily="34" charset="-120"/>
               </a:rPr>
-              <a:t>10 hours</a:t>
-            </a:r>
-            <a:endParaRPr lang="en-US" sz="4400" dirty="0"/>
-          </a:p>
-        </p:txBody>
-      </p:sp>
-      <p:sp>
-        <p:nvSpPr>
-          <p:cNvPr id="9" name="Text 7"/>
-          <p:cNvSpPr/>
-          <p:nvPr/>
-        </p:nvSpPr>
-        <p:spPr>
-          <a:xfrm>
-            <a:off x="914400" y="3246120"/>
-            <a:ext cx="4892040" cy="365760"/>
-          </a:xfrm>
-          <a:prstGeom prst="rect">
-            <a:avLst/>
-          </a:prstGeom>
-          <a:noFill/>
-          <a:ln/>
-        </p:spPr>
-        <p:txBody>
-          <a:bodyPr wrap="square" lIns="0" tIns="0" rIns="0" bIns="0" rtlCol="0" anchor="ctr"/>
-          <a:lstStyle/>
-          <a:p>
-            <a:pPr indent="0" marL="0">
-              <a:buNone/>
-            </a:pPr>
-            <a:r>
-              <a:rPr lang="en-US" sz="1500" b="1" dirty="0">
+              <a:t>PHASE 1</a:t>
+            </a:r>
+            <a:endParaRPr lang="en-US" sz="1100" dirty="0"/>
+          </a:p>
+        </p:txBody>
+      </p:sp>
+      <p:sp>
+        <p:nvSpPr>
+          <p:cNvPr id="10" name="Text 8"/>
+          <p:cNvSpPr/>
+          <p:nvPr/>
+        </p:nvSpPr>
+        <p:spPr>
+          <a:xfrm>
+            <a:off x="640080" y="3108960"/>
+            <a:ext cx="3108960" cy="731520"/>
+          </a:xfrm>
+          <a:prstGeom prst="rect">
+            <a:avLst/>
+          </a:prstGeom>
+          <a:noFill/>
+          <a:ln/>
+        </p:spPr>
+        <p:txBody>
+          <a:bodyPr wrap="square" lIns="0" tIns="0" rIns="0" bIns="0" rtlCol="0" anchor="ctr"/>
+          <a:lstStyle/>
+          <a:p>
+            <a:pPr marL="0" indent="0">
+              <a:buNone/>
+            </a:pPr>
+            <a:r>
+              <a:rPr lang="en-US" sz="3000" b="1" dirty="0">
                 <a:solidFill>
                   <a:srgbClr val="1B1B1B"/>
                 </a:solidFill>
@@ -6432,38 +6147,38 @@
                 <a:ea typeface="Calibri" pitchFamily="34" charset="-122"/>
                 <a:cs typeface="Calibri" pitchFamily="34" charset="-120"/>
               </a:rPr>
-              <a:t>saved on worst-case incidents</a:t>
-            </a:r>
-            <a:endParaRPr lang="en-US" sz="1500" dirty="0"/>
-          </a:p>
-        </p:txBody>
-      </p:sp>
-      <p:sp>
-        <p:nvSpPr>
-          <p:cNvPr id="10" name="Text 8"/>
-          <p:cNvSpPr/>
-          <p:nvPr/>
-        </p:nvSpPr>
-        <p:spPr>
-          <a:xfrm>
-            <a:off x="914400" y="3566160"/>
-            <a:ext cx="4892040" cy="320040"/>
-          </a:xfrm>
-          <a:prstGeom prst="rect">
-            <a:avLst/>
-          </a:prstGeom>
-          <a:noFill/>
-          <a:ln/>
-        </p:spPr>
-        <p:txBody>
-          <a:bodyPr wrap="square" lIns="0" tIns="0" rIns="0" bIns="0" rtlCol="0" anchor="ctr"/>
-          <a:lstStyle/>
-          <a:p>
-            <a:pPr indent="0" marL="0">
-              <a:buNone/>
-            </a:pPr>
-            <a:r>
-              <a:rPr lang="en-US" sz="1200" i="1" dirty="0">
+              <a:t>Diagnose</a:t>
+            </a:r>
+            <a:endParaRPr lang="en-US" sz="3000" dirty="0"/>
+          </a:p>
+        </p:txBody>
+      </p:sp>
+      <p:sp>
+        <p:nvSpPr>
+          <p:cNvPr id="11" name="Text 9"/>
+          <p:cNvSpPr/>
+          <p:nvPr/>
+        </p:nvSpPr>
+        <p:spPr>
+          <a:xfrm>
+            <a:off x="640080" y="3977640"/>
+            <a:ext cx="3108960" cy="1737360"/>
+          </a:xfrm>
+          <a:prstGeom prst="rect">
+            <a:avLst/>
+          </a:prstGeom>
+          <a:noFill/>
+          <a:ln/>
+        </p:spPr>
+        <p:txBody>
+          <a:bodyPr wrap="square" lIns="0" tIns="0" rIns="0" bIns="0" rtlCol="0" anchor="ctr"/>
+          <a:lstStyle/>
+          <a:p>
+            <a:pPr marL="0" indent="0">
+              <a:buNone/>
+            </a:pPr>
+            <a:r>
+              <a:rPr lang="en-US" sz="1400" dirty="0">
                 <a:solidFill>
                   <a:srgbClr val="4A4A4A"/>
                 </a:solidFill>
@@ -6471,28 +6186,52 @@
                 <a:ea typeface="Calibri" pitchFamily="34" charset="-122"/>
                 <a:cs typeface="Calibri" pitchFamily="34" charset="-120"/>
               </a:rPr>
-              <a:t>before debugging today even begins</a:t>
-            </a:r>
-            <a:endParaRPr lang="en-US" sz="1200" dirty="0"/>
-          </a:p>
-        </p:txBody>
-      </p:sp>
-      <p:sp>
-        <p:nvSpPr>
-          <p:cNvPr id="11" name="Shape 9"/>
-          <p:cNvSpPr/>
-          <p:nvPr/>
-        </p:nvSpPr>
-        <p:spPr>
-          <a:xfrm>
-            <a:off x="6172200" y="2194560"/>
-            <a:ext cx="5440680" cy="1783080"/>
-          </a:xfrm>
-          <a:prstGeom prst="rect">
-            <a:avLst/>
-          </a:prstGeom>
-          <a:solidFill>
-            <a:srgbClr val="FFFDF7"/>
+              <a:t>Automated diagnosis emailed to engineers within 15 minutes. No automated changes to production.</a:t>
+            </a:r>
+            <a:endParaRPr lang="en-US" sz="1400" dirty="0"/>
+          </a:p>
+        </p:txBody>
+      </p:sp>
+      <p:sp>
+        <p:nvSpPr>
+          <p:cNvPr id="12" name="Shape 10"/>
+          <p:cNvSpPr/>
+          <p:nvPr/>
+        </p:nvSpPr>
+        <p:spPr>
+          <a:xfrm>
+            <a:off x="4069080" y="4023360"/>
+            <a:ext cx="137160" cy="0"/>
+          </a:xfrm>
+          <a:prstGeom prst="line">
+            <a:avLst/>
+          </a:prstGeom>
+          <a:noFill/>
+          <a:ln w="31750">
+            <a:solidFill>
+              <a:srgbClr val="D71E28"/>
+            </a:solidFill>
+            <a:prstDash val="solid"/>
+            <a:tailEnd type="triangle"/>
+          </a:ln>
+        </p:spPr>
+      </p:sp>
+      <p:sp>
+        <p:nvSpPr>
+          <p:cNvPr id="13" name="Shape 11"/>
+          <p:cNvSpPr/>
+          <p:nvPr/>
+        </p:nvSpPr>
+        <p:spPr>
+          <a:xfrm>
+            <a:off x="4251960" y="2194560"/>
+            <a:ext cx="3657600" cy="3657600"/>
+          </a:xfrm>
+          <a:prstGeom prst="rect">
+            <a:avLst/>
+          </a:prstGeom>
+          <a:solidFill>
+            <a:srgbClr val="FFFFFF"/>
           </a:solidFill>
           <a:ln w="12700">
             <a:solidFill>
@@ -6501,7 +6240,7 @@
             <a:prstDash val="solid"/>
           </a:ln>
           <a:effectLst>
-            <a:outerShdw sx="100000" sy="100000" kx="0" ky="0" algn="bl" rotWithShape="0" blurRad="152400" dist="38100" dir="5400000">
+            <a:outerShdw blurRad="152400" dist="38100" dir="5400000" algn="bl" rotWithShape="0">
               <a:srgbClr val="000000">
                 <a:alpha val="8000"/>
               </a:srgbClr>
@@ -6511,162 +6250,186 @@
       </p:sp>
       <p:sp>
         <p:nvSpPr>
-          <p:cNvPr id="12" name="Shape 10"/>
-          <p:cNvSpPr/>
-          <p:nvPr/>
-        </p:nvSpPr>
-        <p:spPr>
-          <a:xfrm>
-            <a:off x="6172200" y="2194560"/>
-            <a:ext cx="164592" cy="1783080"/>
-          </a:xfrm>
-          <a:prstGeom prst="rect">
-            <a:avLst/>
-          </a:prstGeom>
-          <a:solidFill>
-            <a:srgbClr val="D71E28"/>
+          <p:cNvPr id="14" name="Shape 12"/>
+          <p:cNvSpPr/>
+          <p:nvPr/>
+        </p:nvSpPr>
+        <p:spPr>
+          <a:xfrm>
+            <a:off x="4526280" y="2514600"/>
+            <a:ext cx="1463040" cy="365760"/>
+          </a:xfrm>
+          <a:prstGeom prst="rect">
+            <a:avLst/>
+          </a:prstGeom>
+          <a:solidFill>
+            <a:srgbClr val="8A8A8A"/>
           </a:solidFill>
           <a:ln w="12700">
+            <a:solidFill>
+              <a:srgbClr val="8A8A8A"/>
+            </a:solidFill>
+            <a:prstDash val="solid"/>
+          </a:ln>
+        </p:spPr>
+      </p:sp>
+      <p:sp>
+        <p:nvSpPr>
+          <p:cNvPr id="15" name="Text 13"/>
+          <p:cNvSpPr/>
+          <p:nvPr/>
+        </p:nvSpPr>
+        <p:spPr>
+          <a:xfrm>
+            <a:off x="4526280" y="2514600"/>
+            <a:ext cx="1463040" cy="365760"/>
+          </a:xfrm>
+          <a:prstGeom prst="rect">
+            <a:avLst/>
+          </a:prstGeom>
+          <a:noFill/>
+          <a:ln/>
+        </p:spPr>
+        <p:txBody>
+          <a:bodyPr wrap="square" lIns="0" tIns="0" rIns="0" bIns="0" rtlCol="0" anchor="ctr"/>
+          <a:lstStyle/>
+          <a:p>
+            <a:pPr marL="0" indent="0" algn="ctr">
+              <a:buNone/>
+            </a:pPr>
+            <a:r>
+              <a:rPr lang="en-US" sz="1100" b="1" kern="0" spc="400" dirty="0">
+                <a:solidFill>
+                  <a:srgbClr val="FFFFFF"/>
+                </a:solidFill>
+                <a:latin typeface="Calibri" pitchFamily="34" charset="0"/>
+                <a:ea typeface="Calibri" pitchFamily="34" charset="-122"/>
+                <a:cs typeface="Calibri" pitchFamily="34" charset="-120"/>
+              </a:rPr>
+              <a:t>PHASE 2</a:t>
+            </a:r>
+            <a:endParaRPr lang="en-US" sz="1100" dirty="0"/>
+          </a:p>
+        </p:txBody>
+      </p:sp>
+      <p:sp>
+        <p:nvSpPr>
+          <p:cNvPr id="17" name="Text 15"/>
+          <p:cNvSpPr/>
+          <p:nvPr/>
+        </p:nvSpPr>
+        <p:spPr>
+          <a:xfrm>
+            <a:off x="4526280" y="3108960"/>
+            <a:ext cx="3108960" cy="731520"/>
+          </a:xfrm>
+          <a:prstGeom prst="rect">
+            <a:avLst/>
+          </a:prstGeom>
+          <a:noFill/>
+          <a:ln/>
+        </p:spPr>
+        <p:txBody>
+          <a:bodyPr wrap="square" lIns="0" tIns="0" rIns="0" bIns="0" rtlCol="0" anchor="ctr"/>
+          <a:lstStyle/>
+          <a:p>
+            <a:pPr marL="0" indent="0">
+              <a:buNone/>
+            </a:pPr>
+            <a:r>
+              <a:rPr lang="en-US" sz="3000" b="1" dirty="0">
+                <a:solidFill>
+                  <a:srgbClr val="1B1B1B"/>
+                </a:solidFill>
+                <a:latin typeface="Calibri" pitchFamily="34" charset="0"/>
+                <a:ea typeface="Calibri" pitchFamily="34" charset="-122"/>
+                <a:cs typeface="Calibri" pitchFamily="34" charset="-120"/>
+              </a:rPr>
+              <a:t>Learn</a:t>
+            </a:r>
+            <a:endParaRPr lang="en-US" sz="3000" dirty="0"/>
+          </a:p>
+        </p:txBody>
+      </p:sp>
+      <p:sp>
+        <p:nvSpPr>
+          <p:cNvPr id="18" name="Text 16"/>
+          <p:cNvSpPr/>
+          <p:nvPr/>
+        </p:nvSpPr>
+        <p:spPr>
+          <a:xfrm>
+            <a:off x="4526280" y="3977640"/>
+            <a:ext cx="3108960" cy="1737360"/>
+          </a:xfrm>
+          <a:prstGeom prst="rect">
+            <a:avLst/>
+          </a:prstGeom>
+          <a:noFill/>
+          <a:ln/>
+        </p:spPr>
+        <p:txBody>
+          <a:bodyPr wrap="square" lIns="0" tIns="0" rIns="0" bIns="0" rtlCol="0" anchor="ctr"/>
+          <a:lstStyle/>
+          <a:p>
+            <a:pPr marL="0" indent="0">
+              <a:buNone/>
+            </a:pPr>
+            <a:r>
+              <a:rPr lang="en-US" sz="1400" dirty="0">
+                <a:solidFill>
+                  <a:srgbClr val="4A4A4A"/>
+                </a:solidFill>
+                <a:latin typeface="Calibri" pitchFamily="34" charset="0"/>
+                <a:ea typeface="Calibri" pitchFamily="34" charset="-122"/>
+                <a:cs typeface="Calibri" pitchFamily="34" charset="-120"/>
+              </a:rPr>
+              <a:t>Capture engineer feedback to keep improving accuracy. Expand coverage to additional job types.</a:t>
+            </a:r>
+            <a:endParaRPr lang="en-US" sz="1400" dirty="0"/>
+          </a:p>
+        </p:txBody>
+      </p:sp>
+      <p:sp>
+        <p:nvSpPr>
+          <p:cNvPr id="19" name="Shape 17"/>
+          <p:cNvSpPr/>
+          <p:nvPr/>
+        </p:nvSpPr>
+        <p:spPr>
+          <a:xfrm>
+            <a:off x="7955280" y="4023360"/>
+            <a:ext cx="137160" cy="0"/>
+          </a:xfrm>
+          <a:prstGeom prst="line">
+            <a:avLst/>
+          </a:prstGeom>
+          <a:noFill/>
+          <a:ln w="31750">
             <a:solidFill>
               <a:srgbClr val="D71E28"/>
             </a:solidFill>
             <a:prstDash val="solid"/>
+            <a:tailEnd type="triangle"/>
           </a:ln>
         </p:spPr>
       </p:sp>
       <p:sp>
         <p:nvSpPr>
-          <p:cNvPr id="13" name="Text 11"/>
-          <p:cNvSpPr/>
-          <p:nvPr/>
-        </p:nvSpPr>
-        <p:spPr>
-          <a:xfrm>
-            <a:off x="6537960" y="2377440"/>
-            <a:ext cx="4892040" cy="868680"/>
-          </a:xfrm>
-          <a:prstGeom prst="rect">
-            <a:avLst/>
-          </a:prstGeom>
-          <a:noFill/>
-          <a:ln/>
-        </p:spPr>
-        <p:txBody>
-          <a:bodyPr wrap="square" lIns="0" tIns="0" rIns="0" bIns="0" rtlCol="0" anchor="ctr"/>
-          <a:lstStyle/>
-          <a:p>
-            <a:pPr indent="0" marL="0">
-              <a:buNone/>
-            </a:pPr>
-            <a:r>
-              <a:rPr lang="en-US" sz="4400" b="1" dirty="0">
-                <a:solidFill>
-                  <a:srgbClr val="1B1B1B"/>
-                </a:solidFill>
-                <a:latin typeface="Calibri" pitchFamily="34" charset="0"/>
-                <a:ea typeface="Calibri" pitchFamily="34" charset="-122"/>
-                <a:cs typeface="Calibri" pitchFamily="34" charset="-120"/>
-              </a:rPr>
-              <a:t>5 min</a:t>
-            </a:r>
-            <a:endParaRPr lang="en-US" sz="4400" dirty="0"/>
-          </a:p>
-        </p:txBody>
-      </p:sp>
-      <p:sp>
-        <p:nvSpPr>
-          <p:cNvPr id="14" name="Text 12"/>
-          <p:cNvSpPr/>
-          <p:nvPr/>
-        </p:nvSpPr>
-        <p:spPr>
-          <a:xfrm>
-            <a:off x="6537960" y="3246120"/>
-            <a:ext cx="4892040" cy="365760"/>
-          </a:xfrm>
-          <a:prstGeom prst="rect">
-            <a:avLst/>
-          </a:prstGeom>
-          <a:noFill/>
-          <a:ln/>
-        </p:spPr>
-        <p:txBody>
-          <a:bodyPr wrap="square" lIns="0" tIns="0" rIns="0" bIns="0" rtlCol="0" anchor="ctr"/>
-          <a:lstStyle/>
-          <a:p>
-            <a:pPr indent="0" marL="0">
-              <a:buNone/>
-            </a:pPr>
-            <a:r>
-              <a:rPr lang="en-US" sz="1500" b="1" dirty="0">
-                <a:solidFill>
-                  <a:srgbClr val="1B1B1B"/>
-                </a:solidFill>
-                <a:latin typeface="Calibri" pitchFamily="34" charset="0"/>
-                <a:ea typeface="Calibri" pitchFamily="34" charset="-122"/>
-                <a:cs typeface="Calibri" pitchFamily="34" charset="-120"/>
-              </a:rPr>
-              <a:t>alert to diagnosis</a:t>
-            </a:r>
-            <a:endParaRPr lang="en-US" sz="1500" dirty="0"/>
-          </a:p>
-        </p:txBody>
-      </p:sp>
-      <p:sp>
-        <p:nvSpPr>
-          <p:cNvPr id="15" name="Text 13"/>
-          <p:cNvSpPr/>
-          <p:nvPr/>
-        </p:nvSpPr>
-        <p:spPr>
-          <a:xfrm>
-            <a:off x="6537960" y="3566160"/>
-            <a:ext cx="4892040" cy="320040"/>
-          </a:xfrm>
-          <a:prstGeom prst="rect">
-            <a:avLst/>
-          </a:prstGeom>
-          <a:noFill/>
-          <a:ln/>
-        </p:spPr>
-        <p:txBody>
-          <a:bodyPr wrap="square" lIns="0" tIns="0" rIns="0" bIns="0" rtlCol="0" anchor="ctr"/>
-          <a:lstStyle/>
-          <a:p>
-            <a:pPr indent="0" marL="0">
-              <a:buNone/>
-            </a:pPr>
-            <a:r>
-              <a:rPr lang="en-US" sz="1200" i="1" dirty="0">
-                <a:solidFill>
-                  <a:srgbClr val="4A4A4A"/>
-                </a:solidFill>
-                <a:latin typeface="Calibri" pitchFamily="34" charset="0"/>
-                <a:ea typeface="Calibri" pitchFamily="34" charset="-122"/>
-                <a:cs typeface="Calibri" pitchFamily="34" charset="-120"/>
-              </a:rPr>
-              <a:t>vs hours of cross-region waits</a:t>
-            </a:r>
-            <a:endParaRPr lang="en-US" sz="1200" dirty="0"/>
-          </a:p>
-        </p:txBody>
-      </p:sp>
-      <p:sp>
-        <p:nvSpPr>
-          <p:cNvPr id="16" name="Shape 14"/>
-          <p:cNvSpPr/>
-          <p:nvPr/>
-        </p:nvSpPr>
-        <p:spPr>
-          <a:xfrm>
-            <a:off x="548640" y="4160520"/>
-            <a:ext cx="5440680" cy="1783080"/>
-          </a:xfrm>
-          <a:prstGeom prst="rect">
-            <a:avLst/>
-          </a:prstGeom>
-          <a:solidFill>
-            <a:srgbClr val="FFFDF7"/>
+          <p:cNvPr id="20" name="Shape 18"/>
+          <p:cNvSpPr/>
+          <p:nvPr/>
+        </p:nvSpPr>
+        <p:spPr>
+          <a:xfrm>
+            <a:off x="8138160" y="2194560"/>
+            <a:ext cx="3657600" cy="3657600"/>
+          </a:xfrm>
+          <a:prstGeom prst="rect">
+            <a:avLst/>
+          </a:prstGeom>
+          <a:solidFill>
+            <a:srgbClr val="FFFFFF"/>
           </a:solidFill>
           <a:ln w="12700">
             <a:solidFill>
@@ -6675,7 +6438,7 @@
             <a:prstDash val="solid"/>
           </a:ln>
           <a:effectLst>
-            <a:outerShdw sx="100000" sy="100000" kx="0" ky="0" algn="bl" rotWithShape="0" blurRad="152400" dist="38100" dir="5400000">
+            <a:outerShdw blurRad="152400" dist="38100" dir="5400000" algn="bl" rotWithShape="0">
               <a:srgbClr val="000000">
                 <a:alpha val="8000"/>
               </a:srgbClr>
@@ -6685,24 +6448,24 @@
       </p:sp>
       <p:sp>
         <p:nvSpPr>
-          <p:cNvPr id="17" name="Shape 15"/>
-          <p:cNvSpPr/>
-          <p:nvPr/>
-        </p:nvSpPr>
-        <p:spPr>
-          <a:xfrm>
-            <a:off x="548640" y="4160520"/>
-            <a:ext cx="164592" cy="1783080"/>
-          </a:xfrm>
-          <a:prstGeom prst="rect">
-            <a:avLst/>
-          </a:prstGeom>
-          <a:solidFill>
-            <a:srgbClr val="D71E28"/>
+          <p:cNvPr id="21" name="Shape 19"/>
+          <p:cNvSpPr/>
+          <p:nvPr/>
+        </p:nvSpPr>
+        <p:spPr>
+          <a:xfrm>
+            <a:off x="8412480" y="2514600"/>
+            <a:ext cx="1463040" cy="365760"/>
+          </a:xfrm>
+          <a:prstGeom prst="rect">
+            <a:avLst/>
+          </a:prstGeom>
+          <a:solidFill>
+            <a:srgbClr val="8A8A8A"/>
           </a:solidFill>
           <a:ln w="12700">
             <a:solidFill>
-              <a:srgbClr val="D71E28"/>
+              <a:srgbClr val="8A8A8A"/>
             </a:solidFill>
             <a:prstDash val="solid"/>
           </a:ln>
@@ -6710,69 +6473,69 @@
       </p:sp>
       <p:sp>
         <p:nvSpPr>
-          <p:cNvPr id="18" name="Text 16"/>
-          <p:cNvSpPr/>
-          <p:nvPr/>
-        </p:nvSpPr>
-        <p:spPr>
-          <a:xfrm>
-            <a:off x="914400" y="4343400"/>
-            <a:ext cx="4892040" cy="868680"/>
-          </a:xfrm>
-          <a:prstGeom prst="rect">
-            <a:avLst/>
-          </a:prstGeom>
-          <a:noFill/>
-          <a:ln/>
-        </p:spPr>
-        <p:txBody>
-          <a:bodyPr wrap="square" lIns="0" tIns="0" rIns="0" bIns="0" rtlCol="0" anchor="ctr"/>
-          <a:lstStyle/>
-          <a:p>
-            <a:pPr indent="0" marL="0">
-              <a:buNone/>
-            </a:pPr>
-            <a:r>
-              <a:rPr lang="en-US" sz="4400" b="1" dirty="0">
-                <a:solidFill>
-                  <a:srgbClr val="1B1B1B"/>
+          <p:cNvPr id="22" name="Text 20"/>
+          <p:cNvSpPr/>
+          <p:nvPr/>
+        </p:nvSpPr>
+        <p:spPr>
+          <a:xfrm>
+            <a:off x="8412480" y="2514600"/>
+            <a:ext cx="1463040" cy="365760"/>
+          </a:xfrm>
+          <a:prstGeom prst="rect">
+            <a:avLst/>
+          </a:prstGeom>
+          <a:noFill/>
+          <a:ln/>
+        </p:spPr>
+        <p:txBody>
+          <a:bodyPr wrap="square" lIns="0" tIns="0" rIns="0" bIns="0" rtlCol="0" anchor="ctr"/>
+          <a:lstStyle/>
+          <a:p>
+            <a:pPr marL="0" indent="0" algn="ctr">
+              <a:buNone/>
+            </a:pPr>
+            <a:r>
+              <a:rPr lang="en-US" sz="1100" b="1" kern="0" spc="400" dirty="0">
+                <a:solidFill>
+                  <a:srgbClr val="FFFFFF"/>
                 </a:solidFill>
                 <a:latin typeface="Calibri" pitchFamily="34" charset="0"/>
                 <a:ea typeface="Calibri" pitchFamily="34" charset="-122"/>
                 <a:cs typeface="Calibri" pitchFamily="34" charset="-120"/>
               </a:rPr>
-              <a:t>24 / 7</a:t>
-            </a:r>
-            <a:endParaRPr lang="en-US" sz="4400" dirty="0"/>
-          </a:p>
-        </p:txBody>
-      </p:sp>
-      <p:sp>
-        <p:nvSpPr>
-          <p:cNvPr id="19" name="Text 17"/>
-          <p:cNvSpPr/>
-          <p:nvPr/>
-        </p:nvSpPr>
-        <p:spPr>
-          <a:xfrm>
-            <a:off x="914400" y="5212080"/>
-            <a:ext cx="4892040" cy="365760"/>
-          </a:xfrm>
-          <a:prstGeom prst="rect">
-            <a:avLst/>
-          </a:prstGeom>
-          <a:noFill/>
-          <a:ln/>
-        </p:spPr>
-        <p:txBody>
-          <a:bodyPr wrap="square" lIns="0" tIns="0" rIns="0" bIns="0" rtlCol="0" anchor="ctr"/>
-          <a:lstStyle/>
-          <a:p>
-            <a:pPr indent="0" marL="0">
-              <a:buNone/>
-            </a:pPr>
-            <a:r>
-              <a:rPr lang="en-US" sz="1500" b="1" dirty="0">
+              <a:t>PHASE 3</a:t>
+            </a:r>
+            <a:endParaRPr lang="en-US" sz="1100" dirty="0"/>
+          </a:p>
+        </p:txBody>
+      </p:sp>
+      <p:sp>
+        <p:nvSpPr>
+          <p:cNvPr id="24" name="Text 22"/>
+          <p:cNvSpPr/>
+          <p:nvPr/>
+        </p:nvSpPr>
+        <p:spPr>
+          <a:xfrm>
+            <a:off x="8412480" y="3108960"/>
+            <a:ext cx="3108960" cy="731520"/>
+          </a:xfrm>
+          <a:prstGeom prst="rect">
+            <a:avLst/>
+          </a:prstGeom>
+          <a:noFill/>
+          <a:ln/>
+        </p:spPr>
+        <p:txBody>
+          <a:bodyPr wrap="square" lIns="0" tIns="0" rIns="0" bIns="0" rtlCol="0" anchor="ctr"/>
+          <a:lstStyle/>
+          <a:p>
+            <a:pPr marL="0" indent="0">
+              <a:buNone/>
+            </a:pPr>
+            <a:r>
+              <a:rPr lang="en-US" sz="3000" b="1" dirty="0">
                 <a:solidFill>
                   <a:srgbClr val="1B1B1B"/>
                 </a:solidFill>
@@ -6780,38 +6543,38 @@
                 <a:ea typeface="Calibri" pitchFamily="34" charset="-122"/>
                 <a:cs typeface="Calibri" pitchFamily="34" charset="-120"/>
               </a:rPr>
-              <a:t>diagnosis availability</a:t>
-            </a:r>
-            <a:endParaRPr lang="en-US" sz="1500" dirty="0"/>
-          </a:p>
-        </p:txBody>
-      </p:sp>
-      <p:sp>
-        <p:nvSpPr>
-          <p:cNvPr id="20" name="Text 18"/>
-          <p:cNvSpPr/>
-          <p:nvPr/>
-        </p:nvSpPr>
-        <p:spPr>
-          <a:xfrm>
-            <a:off x="914400" y="5532120"/>
-            <a:ext cx="4892040" cy="320040"/>
-          </a:xfrm>
-          <a:prstGeom prst="rect">
-            <a:avLst/>
-          </a:prstGeom>
-          <a:noFill/>
-          <a:ln/>
-        </p:spPr>
-        <p:txBody>
-          <a:bodyPr wrap="square" lIns="0" tIns="0" rIns="0" bIns="0" rtlCol="0" anchor="ctr"/>
-          <a:lstStyle/>
-          <a:p>
-            <a:pPr indent="0" marL="0">
-              <a:buNone/>
-            </a:pPr>
-            <a:r>
-              <a:rPr lang="en-US" sz="1200" i="1" dirty="0">
+              <a:t>Recommend Fixes</a:t>
+            </a:r>
+            <a:endParaRPr lang="en-US" sz="3000" dirty="0"/>
+          </a:p>
+        </p:txBody>
+      </p:sp>
+      <p:sp>
+        <p:nvSpPr>
+          <p:cNvPr id="25" name="Text 23"/>
+          <p:cNvSpPr/>
+          <p:nvPr/>
+        </p:nvSpPr>
+        <p:spPr>
+          <a:xfrm>
+            <a:off x="8412480" y="3977640"/>
+            <a:ext cx="3108960" cy="1737360"/>
+          </a:xfrm>
+          <a:prstGeom prst="rect">
+            <a:avLst/>
+          </a:prstGeom>
+          <a:noFill/>
+          <a:ln/>
+        </p:spPr>
+        <p:txBody>
+          <a:bodyPr wrap="square" lIns="0" tIns="0" rIns="0" bIns="0" rtlCol="0" anchor="ctr"/>
+          <a:lstStyle/>
+          <a:p>
+            <a:pPr marL="0" indent="0">
+              <a:buNone/>
+            </a:pPr>
+            <a:r>
+              <a:rPr lang="en-US" sz="1400" dirty="0">
                 <a:solidFill>
                   <a:srgbClr val="4A4A4A"/>
                 </a:solidFill>
@@ -6819,183 +6582,9 @@
                 <a:ea typeface="Calibri" pitchFamily="34" charset="-122"/>
                 <a:cs typeface="Calibri" pitchFamily="34" charset="-120"/>
               </a:rPr>
-              <a:t>regardless of region or shift</a:t>
-            </a:r>
-            <a:endParaRPr lang="en-US" sz="1200" dirty="0"/>
-          </a:p>
-        </p:txBody>
-      </p:sp>
-      <p:sp>
-        <p:nvSpPr>
-          <p:cNvPr id="21" name="Shape 19"/>
-          <p:cNvSpPr/>
-          <p:nvPr/>
-        </p:nvSpPr>
-        <p:spPr>
-          <a:xfrm>
-            <a:off x="6172200" y="4160520"/>
-            <a:ext cx="5440680" cy="1783080"/>
-          </a:xfrm>
-          <a:prstGeom prst="rect">
-            <a:avLst/>
-          </a:prstGeom>
-          <a:solidFill>
-            <a:srgbClr val="FFFDF7"/>
-          </a:solidFill>
-          <a:ln w="12700">
-            <a:solidFill>
-              <a:srgbClr val="E5E0D5"/>
-            </a:solidFill>
-            <a:prstDash val="solid"/>
-          </a:ln>
-          <a:effectLst>
-            <a:outerShdw sx="100000" sy="100000" kx="0" ky="0" algn="bl" rotWithShape="0" blurRad="152400" dist="38100" dir="5400000">
-              <a:srgbClr val="000000">
-                <a:alpha val="8000"/>
-              </a:srgbClr>
-            </a:outerShdw>
-          </a:effectLst>
-        </p:spPr>
-      </p:sp>
-      <p:sp>
-        <p:nvSpPr>
-          <p:cNvPr id="22" name="Shape 20"/>
-          <p:cNvSpPr/>
-          <p:nvPr/>
-        </p:nvSpPr>
-        <p:spPr>
-          <a:xfrm>
-            <a:off x="6172200" y="4160520"/>
-            <a:ext cx="164592" cy="1783080"/>
-          </a:xfrm>
-          <a:prstGeom prst="rect">
-            <a:avLst/>
-          </a:prstGeom>
-          <a:solidFill>
-            <a:srgbClr val="D71E28"/>
-          </a:solidFill>
-          <a:ln w="12700">
-            <a:solidFill>
-              <a:srgbClr val="D71E28"/>
-            </a:solidFill>
-            <a:prstDash val="solid"/>
-          </a:ln>
-        </p:spPr>
-      </p:sp>
-      <p:sp>
-        <p:nvSpPr>
-          <p:cNvPr id="23" name="Text 21"/>
-          <p:cNvSpPr/>
-          <p:nvPr/>
-        </p:nvSpPr>
-        <p:spPr>
-          <a:xfrm>
-            <a:off x="6537960" y="4343400"/>
-            <a:ext cx="4892040" cy="868680"/>
-          </a:xfrm>
-          <a:prstGeom prst="rect">
-            <a:avLst/>
-          </a:prstGeom>
-          <a:noFill/>
-          <a:ln/>
-        </p:spPr>
-        <p:txBody>
-          <a:bodyPr wrap="square" lIns="0" tIns="0" rIns="0" bIns="0" rtlCol="0" anchor="ctr"/>
-          <a:lstStyle/>
-          <a:p>
-            <a:pPr indent="0" marL="0">
-              <a:buNone/>
-            </a:pPr>
-            <a:r>
-              <a:rPr lang="en-US" sz="4400" b="1" dirty="0">
-                <a:solidFill>
-                  <a:srgbClr val="1B1B1B"/>
-                </a:solidFill>
-                <a:latin typeface="Calibri" pitchFamily="34" charset="0"/>
-                <a:ea typeface="Calibri" pitchFamily="34" charset="-122"/>
-                <a:cs typeface="Calibri" pitchFamily="34" charset="-120"/>
-              </a:rPr>
-              <a:t>Surgical</a:t>
-            </a:r>
-            <a:endParaRPr lang="en-US" sz="4400" dirty="0"/>
-          </a:p>
-        </p:txBody>
-      </p:sp>
-      <p:sp>
-        <p:nvSpPr>
-          <p:cNvPr id="24" name="Text 22"/>
-          <p:cNvSpPr/>
-          <p:nvPr/>
-        </p:nvSpPr>
-        <p:spPr>
-          <a:xfrm>
-            <a:off x="6537960" y="5212080"/>
-            <a:ext cx="4892040" cy="365760"/>
-          </a:xfrm>
-          <a:prstGeom prst="rect">
-            <a:avLst/>
-          </a:prstGeom>
-          <a:noFill/>
-          <a:ln/>
-        </p:spPr>
-        <p:txBody>
-          <a:bodyPr wrap="square" lIns="0" tIns="0" rIns="0" bIns="0" rtlCol="0" anchor="ctr"/>
-          <a:lstStyle/>
-          <a:p>
-            <a:pPr indent="0" marL="0">
-              <a:buNone/>
-            </a:pPr>
-            <a:r>
-              <a:rPr lang="en-US" sz="1500" b="1" dirty="0">
-                <a:solidFill>
-                  <a:srgbClr val="1B1B1B"/>
-                </a:solidFill>
-                <a:latin typeface="Calibri" pitchFamily="34" charset="0"/>
-                <a:ea typeface="Calibri" pitchFamily="34" charset="-122"/>
-                <a:cs typeface="Calibri" pitchFamily="34" charset="-120"/>
-              </a:rPr>
-              <a:t>escalation, not blanket triage</a:t>
-            </a:r>
-            <a:endParaRPr lang="en-US" sz="1500" dirty="0"/>
-          </a:p>
-        </p:txBody>
-      </p:sp>
-      <p:sp>
-        <p:nvSpPr>
-          <p:cNvPr id="25" name="Text 23"/>
-          <p:cNvSpPr/>
-          <p:nvPr/>
-        </p:nvSpPr>
-        <p:spPr>
-          <a:xfrm>
-            <a:off x="6537960" y="5532120"/>
-            <a:ext cx="4892040" cy="320040"/>
-          </a:xfrm>
-          <a:prstGeom prst="rect">
-            <a:avLst/>
-          </a:prstGeom>
-          <a:noFill/>
-          <a:ln/>
-        </p:spPr>
-        <p:txBody>
-          <a:bodyPr wrap="square" lIns="0" tIns="0" rIns="0" bIns="0" rtlCol="0" anchor="ctr"/>
-          <a:lstStyle/>
-          <a:p>
-            <a:pPr indent="0" marL="0">
-              <a:buNone/>
-            </a:pPr>
-            <a:r>
-              <a:rPr lang="en-US" sz="1200" i="1" dirty="0">
-                <a:solidFill>
-                  <a:srgbClr val="4A4A4A"/>
-                </a:solidFill>
-                <a:latin typeface="Calibri" pitchFamily="34" charset="0"/>
-                <a:ea typeface="Calibri" pitchFamily="34" charset="-122"/>
-                <a:cs typeface="Calibri" pitchFamily="34" charset="-120"/>
-              </a:rPr>
-              <a:t>US DBAs engaged only when truly needed</a:t>
-            </a:r>
-            <a:endParaRPr lang="en-US" sz="1200" dirty="0"/>
+              <a:t>Where confidence is high, suggest the actual code change. Engineer still approves and merges.</a:t>
+            </a:r>
+            <a:endParaRPr lang="en-US" sz="1400" dirty="0"/>
           </a:p>
         </p:txBody>
       </p:sp>
@@ -7007,14 +6596,15 @@
 </p:sld>
 </file>
 
-<file path=ppt/slides/slide7.xml><?xml version="1.0" encoding="utf-8"?>
+<file path=ppt/slides/slide9.xml><?xml version="1.0" encoding="utf-8"?>
 <p:sld xmlns:a="http://schemas.openxmlformats.org/drawingml/2006/main" xmlns:r="http://schemas.openxmlformats.org/officeDocument/2006/relationships" xmlns:p="http://schemas.openxmlformats.org/presentationml/2006/main">
-  <p:cSld name="Slide 7">
+  <p:cSld name="Slide 5">
     <p:bg>
       <p:bgPr>
         <a:solidFill>
           <a:srgbClr val="FFFFFF"/>
         </a:solidFill>
+        <a:effectLst/>
       </p:bgPr>
     </p:bg>
     <p:spTree>
@@ -7033,7 +6623,7 @@
       </p:grpSpPr>
       <p:sp>
         <p:nvSpPr>
-          <p:cNvPr id="2" name="Shape 0"/>
+          <p:cNvPr id="2" name="TopBar"/>
           <p:cNvSpPr/>
           <p:nvPr/>
         </p:nvSpPr>
@@ -7058,7 +6648,7 @@
       </p:sp>
       <p:sp>
         <p:nvSpPr>
-          <p:cNvPr id="3" name="Text 1"/>
+          <p:cNvPr id="3" name="Eyebrow"/>
           <p:cNvSpPr/>
           <p:nvPr/>
         </p:nvSpPr>
@@ -7077,66 +6667,60 @@
           <a:bodyPr wrap="square" lIns="0" tIns="0" rIns="0" bIns="0" rtlCol="0" anchor="ctr"/>
           <a:lstStyle/>
           <a:p>
-            <a:pPr indent="0" marL="0">
-              <a:buNone/>
-            </a:pPr>
-            <a:r>
-              <a:rPr lang="en-US" sz="1100" b="1" spc="600" kern="0" dirty="0">
+            <a:pPr marL="0" indent="0">
+              <a:buNone/>
+            </a:pPr>
+            <a:r>
+              <a:rPr lang="en-US" sz="1100" b="1" kern="0" spc="600" dirty="0">
                 <a:solidFill>
                   <a:srgbClr val="D71E28"/>
                 </a:solidFill>
                 <a:latin typeface="Calibri" pitchFamily="34" charset="0"/>
-                <a:ea typeface="Calibri" pitchFamily="34" charset="-122"/>
-                <a:cs typeface="Calibri" pitchFamily="34" charset="-120"/>
-              </a:rPr>
-              <a:t>SAFEGUARDS</a:t>
-            </a:r>
-            <a:endParaRPr lang="en-US" sz="1100" dirty="0"/>
-          </a:p>
-        </p:txBody>
-      </p:sp>
-      <p:sp>
-        <p:nvSpPr>
-          <p:cNvPr id="4" name="Text 2"/>
-          <p:cNvSpPr/>
-          <p:nvPr/>
-        </p:nvSpPr>
-        <p:spPr>
-          <a:xfrm>
-            <a:off x="731520" y="914400"/>
-            <a:ext cx="10698480" cy="914400"/>
-          </a:xfrm>
-          <a:prstGeom prst="rect">
-            <a:avLst/>
-          </a:prstGeom>
-          <a:noFill/>
-          <a:ln/>
-        </p:spPr>
-        <p:txBody>
-          <a:bodyPr wrap="square" lIns="0" tIns="0" rIns="0" bIns="0" rtlCol="0" anchor="ctr"/>
-          <a:lstStyle/>
-          <a:p>
-            <a:pPr indent="0" marL="0">
-              <a:buNone/>
-            </a:pPr>
-            <a:r>
-              <a:rPr lang="en-US" sz="3600" b="1" dirty="0">
+              </a:rPr>
+              <a:t>PROCESS COMPARISON</a:t>
+            </a:r>
+          </a:p>
+        </p:txBody>
+      </p:sp>
+      <p:sp>
+        <p:nvSpPr>
+          <p:cNvPr id="4" name="Title"/>
+          <p:cNvSpPr/>
+          <p:nvPr/>
+        </p:nvSpPr>
+        <p:spPr>
+          <a:xfrm>
+            <a:off x="731520" y="900000"/>
+            <a:ext cx="10698480" cy="600000"/>
+          </a:xfrm>
+          <a:prstGeom prst="rect">
+            <a:avLst/>
+          </a:prstGeom>
+          <a:noFill/>
+          <a:ln/>
+        </p:spPr>
+        <p:txBody>
+          <a:bodyPr wrap="square" lIns="0" tIns="0" rIns="0" bIns="0" rtlCol="0" anchor="ctr"/>
+          <a:lstStyle/>
+          <a:p>
+            <a:pPr marL="0" indent="0">
+              <a:buNone/>
+            </a:pPr>
+            <a:r>
+              <a:rPr lang="en-US" sz="3200" b="1" dirty="0">
                 <a:solidFill>
                   <a:srgbClr val="1B1B1B"/>
                 </a:solidFill>
                 <a:latin typeface="Calibri" pitchFamily="34" charset="0"/>
-                <a:ea typeface="Calibri" pitchFamily="34" charset="-122"/>
-                <a:cs typeface="Calibri" pitchFamily="34" charset="-120"/>
-              </a:rPr>
-              <a:t>Built for a regulated environment.</a:t>
-            </a:r>
-            <a:endParaRPr lang="en-US" sz="3600" dirty="0"/>
-          </a:p>
-        </p:txBody>
-      </p:sp>
-      <p:sp>
-        <p:nvSpPr>
-          <p:cNvPr id="5" name="Text 3"/>
+              </a:rPr>
+              <a:t>From a multi-team relay to a single automated diagnosis.</a:t>
+            </a:r>
+          </a:p>
+        </p:txBody>
+      </p:sp>
+      <p:sp>
+        <p:nvSpPr>
+          <p:cNvPr id="5" name="PageNum"/>
           <p:cNvSpPr/>
           <p:nvPr/>
         </p:nvSpPr>
@@ -7155,7 +6739,7 @@
           <a:bodyPr wrap="square" lIns="0" tIns="0" rIns="0" bIns="0" rtlCol="0" anchor="ctr"/>
           <a:lstStyle/>
           <a:p>
-            <a:pPr algn="r" indent="0" marL="0">
+            <a:pPr marL="0" indent="0" algn="r">
               <a:buNone/>
             </a:pPr>
             <a:r>
@@ -7164,31 +6748,100 @@
                   <a:srgbClr val="8A8A8A"/>
                 </a:solidFill>
                 <a:latin typeface="Calibri" pitchFamily="34" charset="0"/>
-                <a:ea typeface="Calibri" pitchFamily="34" charset="-122"/>
-                <a:cs typeface="Calibri" pitchFamily="34" charset="-120"/>
-              </a:rPr>
-              <a:t>7 / 9</a:t>
-            </a:r>
-            <a:endParaRPr lang="en-US" sz="900" dirty="0"/>
-          </a:p>
-        </p:txBody>
-      </p:sp>
-      <p:sp>
-        <p:nvSpPr>
-          <p:cNvPr id="6" name="Shape 4"/>
-          <p:cNvSpPr/>
-          <p:nvPr/>
-        </p:nvSpPr>
-        <p:spPr>
-          <a:xfrm>
-            <a:off x="525780" y="2194560"/>
-            <a:ext cx="5440680" cy="1828800"/>
-          </a:xfrm>
-          <a:prstGeom prst="rect">
-            <a:avLst/>
-          </a:prstGeom>
-          <a:solidFill>
-            <a:srgbClr val="FFFFFF"/>
+              </a:rPr>
+              <a:t>5 / 7</a:t>
+            </a:r>
+          </a:p>
+        </p:txBody>
+      </p:sp>
+      <p:sp>
+        <p:nvSpPr>
+          <p:cNvPr id="10" name="LeftLabel"/>
+          <p:cNvSpPr/>
+          <p:nvPr/>
+        </p:nvSpPr>
+        <p:spPr>
+          <a:xfrm>
+            <a:off x="571500" y="1750000"/>
+            <a:ext cx="5440680" cy="280000"/>
+          </a:xfrm>
+          <a:prstGeom prst="rect">
+            <a:avLst/>
+          </a:prstGeom>
+          <a:noFill/>
+          <a:ln/>
+        </p:spPr>
+        <p:txBody>
+          <a:bodyPr wrap="square" lIns="0" tIns="0" rIns="0" bIns="0" rtlCol="0" anchor="ctr"/>
+          <a:lstStyle/>
+          <a:p>
+            <a:pPr marL="0" indent="0">
+              <a:buNone/>
+            </a:pPr>
+            <a:r>
+              <a:rPr lang="en-US" sz="1000" b="1" kern="0" spc="500" dirty="0">
+                <a:solidFill>
+                  <a:srgbClr val="D71E28"/>
+                </a:solidFill>
+                <a:latin typeface="Calibri" pitchFamily="34" charset="0"/>
+              </a:rPr>
+              <a:t>TODAY  ·  MANUAL RELAY</a:t>
+            </a:r>
+          </a:p>
+        </p:txBody>
+      </p:sp>
+      <p:sp>
+        <p:nvSpPr>
+          <p:cNvPr id="11" name="LeftHeading"/>
+          <p:cNvSpPr/>
+          <p:nvPr/>
+        </p:nvSpPr>
+        <p:spPr>
+          <a:xfrm>
+            <a:off x="571500" y="2050000"/>
+            <a:ext cx="5440680" cy="380000"/>
+          </a:xfrm>
+          <a:prstGeom prst="rect">
+            <a:avLst/>
+          </a:prstGeom>
+          <a:noFill/>
+          <a:ln/>
+        </p:spPr>
+        <p:txBody>
+          <a:bodyPr wrap="square" lIns="0" tIns="0" rIns="0" bIns="0" rtlCol="0" anchor="ctr"/>
+          <a:lstStyle/>
+          <a:p>
+            <a:pPr marL="0" indent="0">
+              <a:buNone/>
+            </a:pPr>
+            <a:r>
+              <a:rPr lang="en-US" sz="1800" b="1" dirty="0">
+                <a:solidFill>
+                  <a:srgbClr val="1B1B1B"/>
+                </a:solidFill>
+                <a:latin typeface="Calibri" pitchFamily="34" charset="0"/>
+              </a:rPr>
+              <a:t>Up to 10 hours, six handoffs.</a:t>
+            </a:r>
+          </a:p>
+        </p:txBody>
+      </p:sp>
+      <p:sp>
+        <p:nvSpPr>
+          <p:cNvPr id="12" name="LeftRail"/>
+          <p:cNvSpPr/>
+          <p:nvPr/>
+        </p:nvSpPr>
+        <p:spPr>
+          <a:xfrm>
+            <a:off x="811000" y="2570000"/>
+            <a:ext cx="22860" cy="3640000"/>
+          </a:xfrm>
+          <a:prstGeom prst="rect">
+            <a:avLst/>
+          </a:prstGeom>
+          <a:solidFill>
+            <a:srgbClr val="E5E0D5"/>
           </a:solidFill>
           <a:ln w="12700">
             <a:solidFill>
@@ -7196,25 +6849,722 @@
             </a:solidFill>
             <a:prstDash val="solid"/>
           </a:ln>
-          <a:effectLst>
-            <a:outerShdw sx="100000" sy="100000" kx="0" ky="0" algn="bl" rotWithShape="0" blurRad="152400" dist="38100" dir="5400000">
-              <a:srgbClr val="000000">
-                <a:alpha val="8000"/>
-              </a:srgbClr>
-            </a:outerShdw>
-          </a:effectLst>
-        </p:spPr>
-      </p:sp>
-      <p:sp>
-        <p:nvSpPr>
-          <p:cNvPr id="7" name="Shape 5"/>
-          <p:cNvSpPr/>
-          <p:nvPr/>
-        </p:nvSpPr>
-        <p:spPr>
-          <a:xfrm>
-            <a:off x="845820" y="2514600"/>
-            <a:ext cx="502920" cy="502920"/>
+        </p:spPr>
+      </p:sp>
+      <p:sp>
+        <p:nvSpPr>
+          <p:cNvPr id="20" name="L1Dot"/>
+          <p:cNvSpPr/>
+          <p:nvPr/>
+        </p:nvSpPr>
+        <p:spPr>
+          <a:xfrm>
+            <a:off x="731520" y="2570000"/>
+            <a:ext cx="182880" cy="182880"/>
+          </a:xfrm>
+          <a:prstGeom prst="ellipse">
+            <a:avLst/>
+          </a:prstGeom>
+          <a:solidFill>
+            <a:srgbClr val="D71E28"/>
+          </a:solidFill>
+          <a:ln w="12700">
+            <a:solidFill>
+              <a:srgbClr val="D71E28"/>
+            </a:solidFill>
+            <a:prstDash val="solid"/>
+          </a:ln>
+        </p:spPr>
+      </p:sp>
+      <p:sp>
+        <p:nvSpPr>
+          <p:cNvPr id="21" name="L1Time"/>
+          <p:cNvSpPr/>
+          <p:nvPr/>
+        </p:nvSpPr>
+        <p:spPr>
+          <a:xfrm>
+            <a:off x="1050000" y="2515000"/>
+            <a:ext cx="1100000" cy="260000"/>
+          </a:xfrm>
+          <a:prstGeom prst="rect">
+            <a:avLst/>
+          </a:prstGeom>
+          <a:noFill/>
+          <a:ln/>
+        </p:spPr>
+        <p:txBody>
+          <a:bodyPr wrap="square" lIns="0" tIns="0" rIns="0" bIns="0" rtlCol="0" anchor="ctr"/>
+          <a:lstStyle/>
+          <a:p>
+            <a:pPr marL="0" indent="0">
+              <a:buNone/>
+            </a:pPr>
+            <a:r>
+              <a:rPr lang="en-US" sz="1000" b="1" kern="0" spc="300" dirty="0">
+                <a:solidFill>
+                  <a:srgbClr val="8A8A8A"/>
+                </a:solidFill>
+                <a:latin typeface="Calibri" pitchFamily="34" charset="0"/>
+              </a:rPr>
+              <a:t>2:00 AM ET</a:t>
+            </a:r>
+          </a:p>
+        </p:txBody>
+      </p:sp>
+      <p:sp>
+        <p:nvSpPr>
+          <p:cNvPr id="22" name="L1Text"/>
+          <p:cNvSpPr/>
+          <p:nvPr/>
+        </p:nvSpPr>
+        <p:spPr>
+          <a:xfrm>
+            <a:off x="1050000" y="2755000"/>
+            <a:ext cx="4900000" cy="430000"/>
+          </a:xfrm>
+          <a:prstGeom prst="rect">
+            <a:avLst/>
+          </a:prstGeom>
+          <a:noFill/>
+          <a:ln/>
+        </p:spPr>
+        <p:txBody>
+          <a:bodyPr wrap="square" lIns="0" tIns="0" rIns="0" bIns="0" rtlCol="0" anchor="t"/>
+          <a:lstStyle/>
+          <a:p>
+            <a:pPr marL="0" indent="0">
+              <a:buNone/>
+            </a:pPr>
+            <a:r>
+              <a:rPr lang="en-US" sz="1200" dirty="0">
+                <a:solidFill>
+                  <a:srgbClr val="1B1B1B"/>
+                </a:solidFill>
+                <a:latin typeface="Calibri" pitchFamily="34" charset="0"/>
+              </a:rPr>
+              <a:t>Job fails. ServiceNow incident auto-generated.</a:t>
+            </a:r>
+          </a:p>
+        </p:txBody>
+      </p:sp>
+      <p:sp>
+        <p:nvSpPr>
+          <p:cNvPr id="23" name="L2Dot"/>
+          <p:cNvSpPr/>
+          <p:nvPr/>
+        </p:nvSpPr>
+        <p:spPr>
+          <a:xfrm>
+            <a:off x="731520" y="3170000"/>
+            <a:ext cx="182880" cy="182880"/>
+          </a:xfrm>
+          <a:prstGeom prst="ellipse">
+            <a:avLst/>
+          </a:prstGeom>
+          <a:solidFill>
+            <a:srgbClr val="D71E28"/>
+          </a:solidFill>
+          <a:ln w="12700">
+            <a:solidFill>
+              <a:srgbClr val="D71E28"/>
+            </a:solidFill>
+            <a:prstDash val="solid"/>
+          </a:ln>
+        </p:spPr>
+      </p:sp>
+      <p:sp>
+        <p:nvSpPr>
+          <p:cNvPr id="24" name="L2Time"/>
+          <p:cNvSpPr/>
+          <p:nvPr/>
+        </p:nvSpPr>
+        <p:spPr>
+          <a:xfrm>
+            <a:off x="1050000" y="3115000"/>
+            <a:ext cx="1100000" cy="260000"/>
+          </a:xfrm>
+          <a:prstGeom prst="rect">
+            <a:avLst/>
+          </a:prstGeom>
+          <a:noFill/>
+          <a:ln/>
+        </p:spPr>
+        <p:txBody>
+          <a:bodyPr wrap="square" lIns="0" tIns="0" rIns="0" bIns="0" rtlCol="0" anchor="ctr"/>
+          <a:lstStyle/>
+          <a:p>
+            <a:pPr marL="0" indent="0">
+              <a:buNone/>
+            </a:pPr>
+            <a:r>
+              <a:rPr lang="en-US" sz="1000" b="1" kern="0" spc="300" dirty="0">
+                <a:solidFill>
+                  <a:srgbClr val="8A8A8A"/>
+                </a:solidFill>
+                <a:latin typeface="Calibri" pitchFamily="34" charset="0"/>
+              </a:rPr>
+              <a:t>2:05 AM ET</a:t>
+            </a:r>
+          </a:p>
+        </p:txBody>
+      </p:sp>
+      <p:sp>
+        <p:nvSpPr>
+          <p:cNvPr id="25" name="L2Text"/>
+          <p:cNvSpPr/>
+          <p:nvPr/>
+        </p:nvSpPr>
+        <p:spPr>
+          <a:xfrm>
+            <a:off x="1050000" y="3355000"/>
+            <a:ext cx="4900000" cy="430000"/>
+          </a:xfrm>
+          <a:prstGeom prst="rect">
+            <a:avLst/>
+          </a:prstGeom>
+          <a:noFill/>
+          <a:ln/>
+        </p:spPr>
+        <p:txBody>
+          <a:bodyPr wrap="square" lIns="0" tIns="0" rIns="0" bIns="0" rtlCol="0" anchor="t"/>
+          <a:lstStyle/>
+          <a:p>
+            <a:pPr marL="0" indent="0">
+              <a:buNone/>
+            </a:pPr>
+            <a:r>
+              <a:rPr lang="en-US" sz="1200" dirty="0">
+                <a:solidFill>
+                  <a:srgbClr val="1B1B1B"/>
+                </a:solidFill>
+                <a:latin typeface="Calibri" pitchFamily="34" charset="0"/>
+              </a:rPr>
+              <a:t>Offshore EGS L2 picks up the ticket and starts to investigate.</a:t>
+            </a:r>
+          </a:p>
+        </p:txBody>
+      </p:sp>
+      <p:sp>
+        <p:nvSpPr>
+          <p:cNvPr id="26" name="L3Dot"/>
+          <p:cNvSpPr/>
+          <p:nvPr/>
+        </p:nvSpPr>
+        <p:spPr>
+          <a:xfrm>
+            <a:off x="731520" y="3770000"/>
+            <a:ext cx="182880" cy="182880"/>
+          </a:xfrm>
+          <a:prstGeom prst="ellipse">
+            <a:avLst/>
+          </a:prstGeom>
+          <a:solidFill>
+            <a:srgbClr val="D71E28"/>
+          </a:solidFill>
+          <a:ln w="12700">
+            <a:solidFill>
+              <a:srgbClr val="D71E28"/>
+            </a:solidFill>
+            <a:prstDash val="solid"/>
+          </a:ln>
+        </p:spPr>
+      </p:sp>
+      <p:sp>
+        <p:nvSpPr>
+          <p:cNvPr id="27" name="L3Time"/>
+          <p:cNvSpPr/>
+          <p:nvPr/>
+        </p:nvSpPr>
+        <p:spPr>
+          <a:xfrm>
+            <a:off x="1050000" y="3715000"/>
+            <a:ext cx="1100000" cy="260000"/>
+          </a:xfrm>
+          <a:prstGeom prst="rect">
+            <a:avLst/>
+          </a:prstGeom>
+          <a:noFill/>
+          <a:ln/>
+        </p:spPr>
+        <p:txBody>
+          <a:bodyPr wrap="square" lIns="0" tIns="0" rIns="0" bIns="0" rtlCol="0" anchor="ctr"/>
+          <a:lstStyle/>
+          <a:p>
+            <a:pPr marL="0" indent="0">
+              <a:buNone/>
+            </a:pPr>
+            <a:r>
+              <a:rPr lang="en-US" sz="1000" b="1" kern="0" spc="300" dirty="0">
+                <a:solidFill>
+                  <a:srgbClr val="8A8A8A"/>
+                </a:solidFill>
+                <a:latin typeface="Calibri" pitchFamily="34" charset="0"/>
+              </a:rPr>
+              <a:t>2:30 AM ET</a:t>
+            </a:r>
+          </a:p>
+        </p:txBody>
+      </p:sp>
+      <p:sp>
+        <p:nvSpPr>
+          <p:cNvPr id="28" name="L3Text"/>
+          <p:cNvSpPr/>
+          <p:nvPr/>
+        </p:nvSpPr>
+        <p:spPr>
+          <a:xfrm>
+            <a:off x="1050000" y="3955000"/>
+            <a:ext cx="4900000" cy="430000"/>
+          </a:xfrm>
+          <a:prstGeom prst="rect">
+            <a:avLst/>
+          </a:prstGeom>
+          <a:noFill/>
+          <a:ln/>
+        </p:spPr>
+        <p:txBody>
+          <a:bodyPr wrap="square" lIns="0" tIns="0" rIns="0" bIns="0" rtlCol="0" anchor="t"/>
+          <a:lstStyle/>
+          <a:p>
+            <a:pPr marL="0" indent="0">
+              <a:buNone/>
+            </a:pPr>
+            <a:r>
+              <a:rPr lang="en-US" sz="1200" dirty="0">
+                <a:solidFill>
+                  <a:srgbClr val="1B1B1B"/>
+                </a:solidFill>
+                <a:latin typeface="Calibri" pitchFamily="34" charset="0"/>
+              </a:rPr>
+              <a:t>L2 engages EGS DBAs offshore. DBAs spend time identifying the issue.</a:t>
+            </a:r>
+          </a:p>
+        </p:txBody>
+      </p:sp>
+      <p:sp>
+        <p:nvSpPr>
+          <p:cNvPr id="29" name="L4Dot"/>
+          <p:cNvSpPr/>
+          <p:nvPr/>
+        </p:nvSpPr>
+        <p:spPr>
+          <a:xfrm>
+            <a:off x="731520" y="4370000"/>
+            <a:ext cx="182880" cy="182880"/>
+          </a:xfrm>
+          <a:prstGeom prst="ellipse">
+            <a:avLst/>
+          </a:prstGeom>
+          <a:solidFill>
+            <a:srgbClr val="D71E28"/>
+          </a:solidFill>
+          <a:ln w="12700">
+            <a:solidFill>
+              <a:srgbClr val="D71E28"/>
+            </a:solidFill>
+            <a:prstDash val="solid"/>
+          </a:ln>
+        </p:spPr>
+      </p:sp>
+      <p:sp>
+        <p:nvSpPr>
+          <p:cNvPr id="30" name="L4Time"/>
+          <p:cNvSpPr/>
+          <p:nvPr/>
+        </p:nvSpPr>
+        <p:spPr>
+          <a:xfrm>
+            <a:off x="1050000" y="4315000"/>
+            <a:ext cx="1100000" cy="260000"/>
+          </a:xfrm>
+          <a:prstGeom prst="rect">
+            <a:avLst/>
+          </a:prstGeom>
+          <a:noFill/>
+          <a:ln/>
+        </p:spPr>
+        <p:txBody>
+          <a:bodyPr wrap="square" lIns="0" tIns="0" rIns="0" bIns="0" rtlCol="0" anchor="ctr"/>
+          <a:lstStyle/>
+          <a:p>
+            <a:pPr marL="0" indent="0">
+              <a:buNone/>
+            </a:pPr>
+            <a:r>
+              <a:rPr lang="en-US" sz="1000" b="1" kern="0" spc="300" dirty="0">
+                <a:solidFill>
+                  <a:srgbClr val="8A8A8A"/>
+                </a:solidFill>
+                <a:latin typeface="Calibri" pitchFamily="34" charset="0"/>
+              </a:rPr>
+              <a:t>3:00 AM ET</a:t>
+            </a:r>
+          </a:p>
+        </p:txBody>
+      </p:sp>
+      <p:sp>
+        <p:nvSpPr>
+          <p:cNvPr id="31" name="L4Text"/>
+          <p:cNvSpPr/>
+          <p:nvPr/>
+        </p:nvSpPr>
+        <p:spPr>
+          <a:xfrm>
+            <a:off x="1050000" y="4555000"/>
+            <a:ext cx="4900000" cy="600000"/>
+          </a:xfrm>
+          <a:prstGeom prst="rect">
+            <a:avLst/>
+          </a:prstGeom>
+          <a:noFill/>
+          <a:ln/>
+        </p:spPr>
+        <p:txBody>
+          <a:bodyPr wrap="square" lIns="0" tIns="0" rIns="0" bIns="0" rtlCol="0" anchor="t"/>
+          <a:lstStyle/>
+          <a:p>
+            <a:pPr marL="0" indent="0">
+              <a:buNone/>
+            </a:pPr>
+            <a:r>
+              <a:rPr lang="en-US" sz="1200" dirty="0">
+                <a:solidFill>
+                  <a:srgbClr val="1B1B1B"/>
+                </a:solidFill>
+                <a:latin typeface="Calibri" pitchFamily="34" charset="0"/>
+              </a:rPr>
+              <a:t>Branch by issue type:  SAR server → page US DBAs (may not answer).  Server / permissions → DBAs resolve.  Otherwise → punt to developers.</a:t>
+            </a:r>
+          </a:p>
+        </p:txBody>
+      </p:sp>
+      <p:sp>
+        <p:nvSpPr>
+          <p:cNvPr id="32" name="L5Dot"/>
+          <p:cNvSpPr/>
+          <p:nvPr/>
+        </p:nvSpPr>
+        <p:spPr>
+          <a:xfrm>
+            <a:off x="731520" y="5180000"/>
+            <a:ext cx="182880" cy="182880"/>
+          </a:xfrm>
+          <a:prstGeom prst="ellipse">
+            <a:avLst/>
+          </a:prstGeom>
+          <a:solidFill>
+            <a:srgbClr val="D71E28"/>
+          </a:solidFill>
+          <a:ln w="12700">
+            <a:solidFill>
+              <a:srgbClr val="D71E28"/>
+            </a:solidFill>
+            <a:prstDash val="solid"/>
+          </a:ln>
+        </p:spPr>
+      </p:sp>
+      <p:sp>
+        <p:nvSpPr>
+          <p:cNvPr id="33" name="L5Time"/>
+          <p:cNvSpPr/>
+          <p:nvPr/>
+        </p:nvSpPr>
+        <p:spPr>
+          <a:xfrm>
+            <a:off x="1050000" y="5125000"/>
+            <a:ext cx="1800000" cy="260000"/>
+          </a:xfrm>
+          <a:prstGeom prst="rect">
+            <a:avLst/>
+          </a:prstGeom>
+          <a:noFill/>
+          <a:ln/>
+        </p:spPr>
+        <p:txBody>
+          <a:bodyPr wrap="square" lIns="0" tIns="0" rIns="0" bIns="0" rtlCol="0" anchor="ctr"/>
+          <a:lstStyle/>
+          <a:p>
+            <a:pPr marL="0" indent="0">
+              <a:buNone/>
+            </a:pPr>
+            <a:r>
+              <a:rPr lang="en-US" sz="1000" b="1" kern="0" spc="300" dirty="0">
+                <a:solidFill>
+                  <a:srgbClr val="8A8A8A"/>
+                </a:solidFill>
+                <a:latin typeface="Calibri" pitchFamily="34" charset="0"/>
+              </a:rPr>
+              <a:t>9:00 - 11:00 AM ET</a:t>
+            </a:r>
+          </a:p>
+        </p:txBody>
+      </p:sp>
+      <p:sp>
+        <p:nvSpPr>
+          <p:cNvPr id="34" name="L5Text"/>
+          <p:cNvSpPr/>
+          <p:nvPr/>
+        </p:nvSpPr>
+        <p:spPr>
+          <a:xfrm>
+            <a:off x="1050000" y="5365000"/>
+            <a:ext cx="4900000" cy="600000"/>
+          </a:xfrm>
+          <a:prstGeom prst="rect">
+            <a:avLst/>
+          </a:prstGeom>
+          <a:noFill/>
+          <a:ln/>
+        </p:spPr>
+        <p:txBody>
+          <a:bodyPr wrap="square" lIns="0" tIns="0" rIns="0" bIns="0" rtlCol="0" anchor="t"/>
+          <a:lstStyle/>
+          <a:p>
+            <a:pPr marL="0" indent="0">
+              <a:buNone/>
+            </a:pPr>
+            <a:r>
+              <a:rPr lang="en-US" sz="1200" dirty="0">
+                <a:solidFill>
+                  <a:srgbClr val="1B1B1B"/>
+                </a:solidFill>
+                <a:latin typeface="Calibri" pitchFamily="34" charset="0"/>
+              </a:rPr>
+              <a:t>US DBAs come online, review jobs and execution reports, then ask app developers to inspect the SSIS packages.</a:t>
+            </a:r>
+          </a:p>
+        </p:txBody>
+      </p:sp>
+      <p:sp>
+        <p:nvSpPr>
+          <p:cNvPr id="35" name="L6Dot"/>
+          <p:cNvSpPr/>
+          <p:nvPr/>
+        </p:nvSpPr>
+        <p:spPr>
+          <a:xfrm>
+            <a:off x="731520" y="5990000"/>
+            <a:ext cx="182880" cy="182880"/>
+          </a:xfrm>
+          <a:prstGeom prst="ellipse">
+            <a:avLst/>
+          </a:prstGeom>
+          <a:solidFill>
+            <a:srgbClr val="D71E28"/>
+          </a:solidFill>
+          <a:ln w="12700">
+            <a:solidFill>
+              <a:srgbClr val="D71E28"/>
+            </a:solidFill>
+            <a:prstDash val="solid"/>
+          </a:ln>
+        </p:spPr>
+      </p:sp>
+      <p:sp>
+        <p:nvSpPr>
+          <p:cNvPr id="36" name="L6Time"/>
+          <p:cNvSpPr/>
+          <p:nvPr/>
+        </p:nvSpPr>
+        <p:spPr>
+          <a:xfrm>
+            <a:off x="1050000" y="5935000"/>
+            <a:ext cx="1300000" cy="260000"/>
+          </a:xfrm>
+          <a:prstGeom prst="rect">
+            <a:avLst/>
+          </a:prstGeom>
+          <a:noFill/>
+          <a:ln/>
+        </p:spPr>
+        <p:txBody>
+          <a:bodyPr wrap="square" lIns="0" tIns="0" rIns="0" bIns="0" rtlCol="0" anchor="ctr"/>
+          <a:lstStyle/>
+          <a:p>
+            <a:pPr marL="0" indent="0">
+              <a:buNone/>
+            </a:pPr>
+            <a:r>
+              <a:rPr lang="en-US" sz="1000" b="1" kern="0" spc="300" dirty="0">
+                <a:solidFill>
+                  <a:srgbClr val="D71E28"/>
+                </a:solidFill>
+                <a:latin typeface="Calibri" pitchFamily="34" charset="0"/>
+              </a:rPr>
+              <a:t>12:00 PM ET</a:t>
+            </a:r>
+          </a:p>
+        </p:txBody>
+      </p:sp>
+      <p:sp>
+        <p:nvSpPr>
+          <p:cNvPr id="37" name="L6Text"/>
+          <p:cNvSpPr/>
+          <p:nvPr/>
+        </p:nvSpPr>
+        <p:spPr>
+          <a:xfrm>
+            <a:off x="1050000" y="6175000"/>
+            <a:ext cx="4900000" cy="280000"/>
+          </a:xfrm>
+          <a:prstGeom prst="rect">
+            <a:avLst/>
+          </a:prstGeom>
+          <a:noFill/>
+          <a:ln/>
+        </p:spPr>
+        <p:txBody>
+          <a:bodyPr wrap="square" lIns="0" tIns="0" rIns="0" bIns="0" rtlCol="0" anchor="t"/>
+          <a:lstStyle/>
+          <a:p>
+            <a:pPr marL="0" indent="0">
+              <a:buNone/>
+            </a:pPr>
+            <a:r>
+              <a:rPr lang="en-US" sz="1200" b="1" dirty="0">
+                <a:solidFill>
+                  <a:srgbClr val="D71E28"/>
+                </a:solidFill>
+                <a:latin typeface="Calibri" pitchFamily="34" charset="0"/>
+              </a:rPr>
+              <a:t>L2 finally updates users  —  10 hours later.</a:t>
+            </a:r>
+          </a:p>
+        </p:txBody>
+      </p:sp>
+      <p:sp>
+        <p:nvSpPr>
+          <p:cNvPr id="40" name="Divider"/>
+          <p:cNvSpPr/>
+          <p:nvPr/>
+        </p:nvSpPr>
+        <p:spPr>
+          <a:xfrm>
+            <a:off x="6096000" y="2050000"/>
+            <a:ext cx="12700" cy="4400000"/>
+          </a:xfrm>
+          <a:prstGeom prst="rect">
+            <a:avLst/>
+          </a:prstGeom>
+          <a:solidFill>
+            <a:srgbClr val="EAEAEA"/>
+          </a:solidFill>
+          <a:ln w="6350">
+            <a:solidFill>
+              <a:srgbClr val="EAEAEA"/>
+            </a:solidFill>
+            <a:prstDash val="solid"/>
+          </a:ln>
+        </p:spPr>
+      </p:sp>
+      <p:sp>
+        <p:nvSpPr>
+          <p:cNvPr id="50" name="RightLabel"/>
+          <p:cNvSpPr/>
+          <p:nvPr/>
+        </p:nvSpPr>
+        <p:spPr>
+          <a:xfrm>
+            <a:off x="6300000" y="1750000"/>
+            <a:ext cx="5440680" cy="280000"/>
+          </a:xfrm>
+          <a:prstGeom prst="rect">
+            <a:avLst/>
+          </a:prstGeom>
+          <a:noFill/>
+          <a:ln/>
+        </p:spPr>
+        <p:txBody>
+          <a:bodyPr wrap="square" lIns="0" tIns="0" rIns="0" bIns="0" rtlCol="0" anchor="ctr"/>
+          <a:lstStyle/>
+          <a:p>
+            <a:pPr marL="0" indent="0">
+              <a:buNone/>
+            </a:pPr>
+            <a:r>
+              <a:rPr lang="en-US" sz="1000" b="1" kern="0" spc="500" dirty="0">
+                <a:solidFill>
+                  <a:srgbClr val="B89000"/>
+                </a:solidFill>
+                <a:latin typeface="Calibri" pitchFamily="34" charset="0"/>
+              </a:rPr>
+              <a:t>WITH AUTOMATION  ·  AI DIAGNOSIS</a:t>
+            </a:r>
+          </a:p>
+        </p:txBody>
+      </p:sp>
+      <p:sp>
+        <p:nvSpPr>
+          <p:cNvPr id="51" name="RightHeading"/>
+          <p:cNvSpPr/>
+          <p:nvPr/>
+        </p:nvSpPr>
+        <p:spPr>
+          <a:xfrm>
+            <a:off x="6300000" y="2050000"/>
+            <a:ext cx="5440680" cy="380000"/>
+          </a:xfrm>
+          <a:prstGeom prst="rect">
+            <a:avLst/>
+          </a:prstGeom>
+          <a:noFill/>
+          <a:ln/>
+        </p:spPr>
+        <p:txBody>
+          <a:bodyPr wrap="square" lIns="0" tIns="0" rIns="0" bIns="0" rtlCol="0" anchor="ctr"/>
+          <a:lstStyle/>
+          <a:p>
+            <a:pPr marL="0" indent="0">
+              <a:buNone/>
+            </a:pPr>
+            <a:r>
+              <a:rPr lang="en-US" sz="1800" b="1" dirty="0">
+                <a:solidFill>
+                  <a:srgbClr val="1B1B1B"/>
+                </a:solidFill>
+                <a:latin typeface="Calibri" pitchFamily="34" charset="0"/>
+              </a:rPr>
+              <a:t>15 minutes, no relay.</a:t>
+            </a:r>
+          </a:p>
+        </p:txBody>
+      </p:sp>
+      <p:sp>
+        <p:nvSpPr>
+          <p:cNvPr id="52" name="RightRail"/>
+          <p:cNvSpPr/>
+          <p:nvPr/>
+        </p:nvSpPr>
+        <p:spPr>
+          <a:xfrm>
+            <a:off x="6539480" y="2570000"/>
+            <a:ext cx="22860" cy="3640000"/>
+          </a:xfrm>
+          <a:prstGeom prst="rect">
+            <a:avLst/>
+          </a:prstGeom>
+          <a:solidFill>
+            <a:srgbClr val="E5E0D5"/>
+          </a:solidFill>
+          <a:ln w="12700">
+            <a:solidFill>
+              <a:srgbClr val="E5E0D5"/>
+            </a:solidFill>
+            <a:prstDash val="solid"/>
+          </a:ln>
+        </p:spPr>
+      </p:sp>
+      <p:sp>
+        <p:nvSpPr>
+          <p:cNvPr id="60" name="R1Dot"/>
+          <p:cNvSpPr/>
+          <p:nvPr/>
+        </p:nvSpPr>
+        <p:spPr>
+          <a:xfrm>
+            <a:off x="6460000" y="2570000"/>
+            <a:ext cx="182880" cy="182880"/>
           </a:xfrm>
           <a:prstGeom prst="ellipse">
             <a:avLst/>
@@ -7232,163 +7582,86 @@
       </p:sp>
       <p:sp>
         <p:nvSpPr>
-          <p:cNvPr id="8" name="Text 6"/>
-          <p:cNvSpPr/>
-          <p:nvPr/>
-        </p:nvSpPr>
-        <p:spPr>
-          <a:xfrm>
-            <a:off x="845820" y="2514600"/>
-            <a:ext cx="502920" cy="502920"/>
-          </a:xfrm>
-          <a:prstGeom prst="rect">
-            <a:avLst/>
-          </a:prstGeom>
-          <a:noFill/>
-          <a:ln/>
-        </p:spPr>
-        <p:txBody>
-          <a:bodyPr wrap="square" lIns="0" tIns="0" rIns="0" bIns="0" rtlCol="0" anchor="ctr"/>
-          <a:lstStyle/>
-          <a:p>
-            <a:pPr algn="ctr" indent="0" marL="0">
-              <a:buNone/>
-            </a:pPr>
-            <a:r>
-              <a:rPr lang="en-US" sz="2200" b="1" dirty="0">
+          <p:cNvPr id="61" name="R1Time"/>
+          <p:cNvSpPr/>
+          <p:nvPr/>
+        </p:nvSpPr>
+        <p:spPr>
+          <a:xfrm>
+            <a:off x="6780000" y="2515000"/>
+            <a:ext cx="1100000" cy="260000"/>
+          </a:xfrm>
+          <a:prstGeom prst="rect">
+            <a:avLst/>
+          </a:prstGeom>
+          <a:noFill/>
+          <a:ln/>
+        </p:spPr>
+        <p:txBody>
+          <a:bodyPr wrap="square" lIns="0" tIns="0" rIns="0" bIns="0" rtlCol="0" anchor="ctr"/>
+          <a:lstStyle/>
+          <a:p>
+            <a:pPr marL="0" indent="0">
+              <a:buNone/>
+            </a:pPr>
+            <a:r>
+              <a:rPr lang="en-US" sz="1000" b="1" kern="0" spc="300" dirty="0">
+                <a:solidFill>
+                  <a:srgbClr val="8A8A8A"/>
+                </a:solidFill>
+                <a:latin typeface="Calibri" pitchFamily="34" charset="0"/>
+              </a:rPr>
+              <a:t>2:00 AM ET</a:t>
+            </a:r>
+          </a:p>
+        </p:txBody>
+      </p:sp>
+      <p:sp>
+        <p:nvSpPr>
+          <p:cNvPr id="62" name="R1Text"/>
+          <p:cNvSpPr/>
+          <p:nvPr/>
+        </p:nvSpPr>
+        <p:spPr>
+          <a:xfrm>
+            <a:off x="6780000" y="2755000"/>
+            <a:ext cx="4750000" cy="430000"/>
+          </a:xfrm>
+          <a:prstGeom prst="rect">
+            <a:avLst/>
+          </a:prstGeom>
+          <a:noFill/>
+          <a:ln/>
+        </p:spPr>
+        <p:txBody>
+          <a:bodyPr wrap="square" lIns="0" tIns="0" rIns="0" bIns="0" rtlCol="0" anchor="t"/>
+          <a:lstStyle/>
+          <a:p>
+            <a:pPr marL="0" indent="0">
+              <a:buNone/>
+            </a:pPr>
+            <a:r>
+              <a:rPr lang="en-US" sz="1200" dirty="0">
                 <a:solidFill>
                   <a:srgbClr val="1B1B1B"/>
                 </a:solidFill>
                 <a:latin typeface="Calibri" pitchFamily="34" charset="0"/>
-                <a:ea typeface="Calibri" pitchFamily="34" charset="-122"/>
-                <a:cs typeface="Calibri" pitchFamily="34" charset="-120"/>
-              </a:rPr>
-              <a:t>✓</a:t>
-            </a:r>
-            <a:endParaRPr lang="en-US" sz="2200" dirty="0"/>
-          </a:p>
-        </p:txBody>
-      </p:sp>
-      <p:sp>
-        <p:nvSpPr>
-          <p:cNvPr id="9" name="Text 7"/>
-          <p:cNvSpPr/>
-          <p:nvPr/>
-        </p:nvSpPr>
-        <p:spPr>
-          <a:xfrm>
-            <a:off x="1485900" y="2514600"/>
-            <a:ext cx="4297680" cy="502920"/>
-          </a:xfrm>
-          <a:prstGeom prst="rect">
-            <a:avLst/>
-          </a:prstGeom>
-          <a:noFill/>
-          <a:ln/>
-        </p:spPr>
-        <p:txBody>
-          <a:bodyPr wrap="square" lIns="0" tIns="0" rIns="0" bIns="0" rtlCol="0" anchor="ctr"/>
-          <a:lstStyle/>
-          <a:p>
-            <a:pPr indent="0" marL="0">
-              <a:buNone/>
-            </a:pPr>
-            <a:r>
-              <a:rPr lang="en-US" sz="1800" b="1" dirty="0">
-                <a:solidFill>
-                  <a:srgbClr val="1B1B1B"/>
-                </a:solidFill>
-                <a:latin typeface="Calibri" pitchFamily="34" charset="0"/>
-                <a:ea typeface="Calibri" pitchFamily="34" charset="-122"/>
-                <a:cs typeface="Calibri" pitchFamily="34" charset="-120"/>
-              </a:rPr>
-              <a:t>Human in the loop</a:t>
-            </a:r>
-            <a:endParaRPr lang="en-US" sz="1800" dirty="0"/>
-          </a:p>
-        </p:txBody>
-      </p:sp>
-      <p:sp>
-        <p:nvSpPr>
-          <p:cNvPr id="10" name="Text 8"/>
-          <p:cNvSpPr/>
-          <p:nvPr/>
-        </p:nvSpPr>
-        <p:spPr>
-          <a:xfrm>
-            <a:off x="1485900" y="3063240"/>
-            <a:ext cx="4297680" cy="822960"/>
-          </a:xfrm>
-          <a:prstGeom prst="rect">
-            <a:avLst/>
-          </a:prstGeom>
-          <a:noFill/>
-          <a:ln/>
-        </p:spPr>
-        <p:txBody>
-          <a:bodyPr wrap="square" lIns="0" tIns="0" rIns="0" bIns="0" rtlCol="0" anchor="t"/>
-          <a:lstStyle/>
-          <a:p>
-            <a:pPr indent="0" marL="0">
-              <a:buNone/>
-            </a:pPr>
-            <a:r>
-              <a:rPr lang="en-US" sz="1300" dirty="0">
-                <a:solidFill>
-                  <a:srgbClr val="4A4A4A"/>
-                </a:solidFill>
-                <a:latin typeface="Calibri" pitchFamily="34" charset="0"/>
-                <a:ea typeface="Calibri" pitchFamily="34" charset="-122"/>
-                <a:cs typeface="Calibri" pitchFamily="34" charset="-120"/>
-              </a:rPr>
-              <a:t>AI recommends. Engineers verify and act. No automated remediation in production.</a:t>
-            </a:r>
-            <a:endParaRPr lang="en-US" sz="1300" dirty="0"/>
-          </a:p>
-        </p:txBody>
-      </p:sp>
-      <p:sp>
-        <p:nvSpPr>
-          <p:cNvPr id="11" name="Shape 9"/>
-          <p:cNvSpPr/>
-          <p:nvPr/>
-        </p:nvSpPr>
-        <p:spPr>
-          <a:xfrm>
-            <a:off x="6195060" y="2194560"/>
-            <a:ext cx="5440680" cy="1828800"/>
-          </a:xfrm>
-          <a:prstGeom prst="rect">
-            <a:avLst/>
-          </a:prstGeom>
-          <a:solidFill>
-            <a:srgbClr val="FFFFFF"/>
-          </a:solidFill>
-          <a:ln w="12700">
-            <a:solidFill>
-              <a:srgbClr val="E5E0D5"/>
-            </a:solidFill>
-            <a:prstDash val="solid"/>
-          </a:ln>
-          <a:effectLst>
-            <a:outerShdw sx="100000" sy="100000" kx="0" ky="0" algn="bl" rotWithShape="0" blurRad="152400" dist="38100" dir="5400000">
-              <a:srgbClr val="000000">
-                <a:alpha val="8000"/>
-              </a:srgbClr>
-            </a:outerShdw>
-          </a:effectLst>
-        </p:spPr>
-      </p:sp>
-      <p:sp>
-        <p:nvSpPr>
-          <p:cNvPr id="12" name="Shape 10"/>
-          <p:cNvSpPr/>
-          <p:nvPr/>
-        </p:nvSpPr>
-        <p:spPr>
-          <a:xfrm>
-            <a:off x="6515100" y="2514600"/>
-            <a:ext cx="502920" cy="502920"/>
+              </a:rPr>
+              <a:t>Job fails. ServiceNow incident auto-generated.</a:t>
+            </a:r>
+          </a:p>
+        </p:txBody>
+      </p:sp>
+      <p:sp>
+        <p:nvSpPr>
+          <p:cNvPr id="63" name="R2Dot"/>
+          <p:cNvSpPr/>
+          <p:nvPr/>
+        </p:nvSpPr>
+        <p:spPr>
+          <a:xfrm>
+            <a:off x="6460000" y="3170000"/>
+            <a:ext cx="182880" cy="182880"/>
           </a:xfrm>
           <a:prstGeom prst="ellipse">
             <a:avLst/>
@@ -7406,163 +7679,86 @@
       </p:sp>
       <p:sp>
         <p:nvSpPr>
-          <p:cNvPr id="13" name="Text 11"/>
-          <p:cNvSpPr/>
-          <p:nvPr/>
-        </p:nvSpPr>
-        <p:spPr>
-          <a:xfrm>
-            <a:off x="6515100" y="2514600"/>
-            <a:ext cx="502920" cy="502920"/>
-          </a:xfrm>
-          <a:prstGeom prst="rect">
-            <a:avLst/>
-          </a:prstGeom>
-          <a:noFill/>
-          <a:ln/>
-        </p:spPr>
-        <p:txBody>
-          <a:bodyPr wrap="square" lIns="0" tIns="0" rIns="0" bIns="0" rtlCol="0" anchor="ctr"/>
-          <a:lstStyle/>
-          <a:p>
-            <a:pPr algn="ctr" indent="0" marL="0">
-              <a:buNone/>
-            </a:pPr>
-            <a:r>
-              <a:rPr lang="en-US" sz="2200" b="1" dirty="0">
+          <p:cNvPr id="64" name="R2Time"/>
+          <p:cNvSpPr/>
+          <p:nvPr/>
+        </p:nvSpPr>
+        <p:spPr>
+          <a:xfrm>
+            <a:off x="6780000" y="3115000"/>
+            <a:ext cx="1100000" cy="260000"/>
+          </a:xfrm>
+          <a:prstGeom prst="rect">
+            <a:avLst/>
+          </a:prstGeom>
+          <a:noFill/>
+          <a:ln/>
+        </p:spPr>
+        <p:txBody>
+          <a:bodyPr wrap="square" lIns="0" tIns="0" rIns="0" bIns="0" rtlCol="0" anchor="ctr"/>
+          <a:lstStyle/>
+          <a:p>
+            <a:pPr marL="0" indent="0">
+              <a:buNone/>
+            </a:pPr>
+            <a:r>
+              <a:rPr lang="en-US" sz="1000" b="1" kern="0" spc="300" dirty="0">
+                <a:solidFill>
+                  <a:srgbClr val="8A8A8A"/>
+                </a:solidFill>
+                <a:latin typeface="Calibri" pitchFamily="34" charset="0"/>
+              </a:rPr>
+              <a:t>2:00 AM ET</a:t>
+            </a:r>
+          </a:p>
+        </p:txBody>
+      </p:sp>
+      <p:sp>
+        <p:nvSpPr>
+          <p:cNvPr id="65" name="R2Text"/>
+          <p:cNvSpPr/>
+          <p:nvPr/>
+        </p:nvSpPr>
+        <p:spPr>
+          <a:xfrm>
+            <a:off x="6780000" y="3355000"/>
+            <a:ext cx="4750000" cy="430000"/>
+          </a:xfrm>
+          <a:prstGeom prst="rect">
+            <a:avLst/>
+          </a:prstGeom>
+          <a:noFill/>
+          <a:ln/>
+        </p:spPr>
+        <p:txBody>
+          <a:bodyPr wrap="square" lIns="0" tIns="0" rIns="0" bIns="0" rtlCol="0" anchor="t"/>
+          <a:lstStyle/>
+          <a:p>
+            <a:pPr marL="0" indent="0">
+              <a:buNone/>
+            </a:pPr>
+            <a:r>
+              <a:rPr lang="en-US" sz="1200" dirty="0">
                 <a:solidFill>
                   <a:srgbClr val="1B1B1B"/>
                 </a:solidFill>
                 <a:latin typeface="Calibri" pitchFamily="34" charset="0"/>
-                <a:ea typeface="Calibri" pitchFamily="34" charset="-122"/>
-                <a:cs typeface="Calibri" pitchFamily="34" charset="-120"/>
-              </a:rPr>
-              <a:t>✓</a:t>
-            </a:r>
-            <a:endParaRPr lang="en-US" sz="2200" dirty="0"/>
-          </a:p>
-        </p:txBody>
-      </p:sp>
-      <p:sp>
-        <p:nvSpPr>
-          <p:cNvPr id="14" name="Text 12"/>
-          <p:cNvSpPr/>
-          <p:nvPr/>
-        </p:nvSpPr>
-        <p:spPr>
-          <a:xfrm>
-            <a:off x="7155180" y="2514600"/>
-            <a:ext cx="4297680" cy="502920"/>
-          </a:xfrm>
-          <a:prstGeom prst="rect">
-            <a:avLst/>
-          </a:prstGeom>
-          <a:noFill/>
-          <a:ln/>
-        </p:spPr>
-        <p:txBody>
-          <a:bodyPr wrap="square" lIns="0" tIns="0" rIns="0" bIns="0" rtlCol="0" anchor="ctr"/>
-          <a:lstStyle/>
-          <a:p>
-            <a:pPr indent="0" marL="0">
-              <a:buNone/>
-            </a:pPr>
-            <a:r>
-              <a:rPr lang="en-US" sz="1800" b="1" dirty="0">
-                <a:solidFill>
-                  <a:srgbClr val="1B1B1B"/>
-                </a:solidFill>
-                <a:latin typeface="Calibri" pitchFamily="34" charset="0"/>
-                <a:ea typeface="Calibri" pitchFamily="34" charset="-122"/>
-                <a:cs typeface="Calibri" pitchFamily="34" charset="-120"/>
-              </a:rPr>
-              <a:t>Read-only access</a:t>
-            </a:r>
-            <a:endParaRPr lang="en-US" sz="1800" dirty="0"/>
-          </a:p>
-        </p:txBody>
-      </p:sp>
-      <p:sp>
-        <p:nvSpPr>
-          <p:cNvPr id="15" name="Text 13"/>
-          <p:cNvSpPr/>
-          <p:nvPr/>
-        </p:nvSpPr>
-        <p:spPr>
-          <a:xfrm>
-            <a:off x="7155180" y="3063240"/>
-            <a:ext cx="4297680" cy="822960"/>
-          </a:xfrm>
-          <a:prstGeom prst="rect">
-            <a:avLst/>
-          </a:prstGeom>
-          <a:noFill/>
-          <a:ln/>
-        </p:spPr>
-        <p:txBody>
-          <a:bodyPr wrap="square" lIns="0" tIns="0" rIns="0" bIns="0" rtlCol="0" anchor="t"/>
-          <a:lstStyle/>
-          <a:p>
-            <a:pPr indent="0" marL="0">
-              <a:buNone/>
-            </a:pPr>
-            <a:r>
-              <a:rPr lang="en-US" sz="1300" dirty="0">
-                <a:solidFill>
-                  <a:srgbClr val="4A4A4A"/>
-                </a:solidFill>
-                <a:latin typeface="Calibri" pitchFamily="34" charset="0"/>
-                <a:ea typeface="Calibri" pitchFamily="34" charset="-122"/>
-                <a:cs typeface="Calibri" pitchFamily="34" charset="-120"/>
-              </a:rPr>
-              <a:t>The system can examine logs, code, and incidents  —  but cannot modify production data or restart jobs.</a:t>
-            </a:r>
-            <a:endParaRPr lang="en-US" sz="1300" dirty="0"/>
-          </a:p>
-        </p:txBody>
-      </p:sp>
-      <p:sp>
-        <p:nvSpPr>
-          <p:cNvPr id="16" name="Shape 14"/>
-          <p:cNvSpPr/>
-          <p:nvPr/>
-        </p:nvSpPr>
-        <p:spPr>
-          <a:xfrm>
-            <a:off x="525780" y="4251960"/>
-            <a:ext cx="5440680" cy="1828800"/>
-          </a:xfrm>
-          <a:prstGeom prst="rect">
-            <a:avLst/>
-          </a:prstGeom>
-          <a:solidFill>
-            <a:srgbClr val="FFFFFF"/>
-          </a:solidFill>
-          <a:ln w="12700">
-            <a:solidFill>
-              <a:srgbClr val="E5E0D5"/>
-            </a:solidFill>
-            <a:prstDash val="solid"/>
-          </a:ln>
-          <a:effectLst>
-            <a:outerShdw sx="100000" sy="100000" kx="0" ky="0" algn="bl" rotWithShape="0" blurRad="152400" dist="38100" dir="5400000">
-              <a:srgbClr val="000000">
-                <a:alpha val="8000"/>
-              </a:srgbClr>
-            </a:outerShdw>
-          </a:effectLst>
-        </p:spPr>
-      </p:sp>
-      <p:sp>
-        <p:nvSpPr>
-          <p:cNvPr id="17" name="Shape 15"/>
-          <p:cNvSpPr/>
-          <p:nvPr/>
-        </p:nvSpPr>
-        <p:spPr>
-          <a:xfrm>
-            <a:off x="845820" y="4572000"/>
-            <a:ext cx="502920" cy="502920"/>
+              </a:rPr>
+              <a:t>AI investigation kicks off automatically  —  no human triage needed.</a:t>
+            </a:r>
+          </a:p>
+        </p:txBody>
+      </p:sp>
+      <p:sp>
+        <p:nvSpPr>
+          <p:cNvPr id="66" name="R3Dot"/>
+          <p:cNvSpPr/>
+          <p:nvPr/>
+        </p:nvSpPr>
+        <p:spPr>
+          <a:xfrm>
+            <a:off x="6460000" y="3770000"/>
+            <a:ext cx="182880" cy="182880"/>
           </a:xfrm>
           <a:prstGeom prst="ellipse">
             <a:avLst/>
@@ -7580,163 +7776,86 @@
       </p:sp>
       <p:sp>
         <p:nvSpPr>
-          <p:cNvPr id="18" name="Text 16"/>
-          <p:cNvSpPr/>
-          <p:nvPr/>
-        </p:nvSpPr>
-        <p:spPr>
-          <a:xfrm>
-            <a:off x="845820" y="4572000"/>
-            <a:ext cx="502920" cy="502920"/>
-          </a:xfrm>
-          <a:prstGeom prst="rect">
-            <a:avLst/>
-          </a:prstGeom>
-          <a:noFill/>
-          <a:ln/>
-        </p:spPr>
-        <p:txBody>
-          <a:bodyPr wrap="square" lIns="0" tIns="0" rIns="0" bIns="0" rtlCol="0" anchor="ctr"/>
-          <a:lstStyle/>
-          <a:p>
-            <a:pPr algn="ctr" indent="0" marL="0">
-              <a:buNone/>
-            </a:pPr>
-            <a:r>
-              <a:rPr lang="en-US" sz="2200" b="1" dirty="0">
+          <p:cNvPr id="67" name="R3Time"/>
+          <p:cNvSpPr/>
+          <p:nvPr/>
+        </p:nvSpPr>
+        <p:spPr>
+          <a:xfrm>
+            <a:off x="6780000" y="3715000"/>
+            <a:ext cx="1800000" cy="260000"/>
+          </a:xfrm>
+          <a:prstGeom prst="rect">
+            <a:avLst/>
+          </a:prstGeom>
+          <a:noFill/>
+          <a:ln/>
+        </p:spPr>
+        <p:txBody>
+          <a:bodyPr wrap="square" lIns="0" tIns="0" rIns="0" bIns="0" rtlCol="0" anchor="ctr"/>
+          <a:lstStyle/>
+          <a:p>
+            <a:pPr marL="0" indent="0">
+              <a:buNone/>
+            </a:pPr>
+            <a:r>
+              <a:rPr lang="en-US" sz="1000" b="1" kern="0" spc="300" dirty="0">
+                <a:solidFill>
+                  <a:srgbClr val="8A8A8A"/>
+                </a:solidFill>
+                <a:latin typeface="Calibri" pitchFamily="34" charset="0"/>
+              </a:rPr>
+              <a:t>2:00 - 2:10 AM ET</a:t>
+            </a:r>
+          </a:p>
+        </p:txBody>
+      </p:sp>
+      <p:sp>
+        <p:nvSpPr>
+          <p:cNvPr id="68" name="R3Text"/>
+          <p:cNvSpPr/>
+          <p:nvPr/>
+        </p:nvSpPr>
+        <p:spPr>
+          <a:xfrm>
+            <a:off x="6780000" y="3955000"/>
+            <a:ext cx="4750000" cy="430000"/>
+          </a:xfrm>
+          <a:prstGeom prst="rect">
+            <a:avLst/>
+          </a:prstGeom>
+          <a:noFill/>
+          <a:ln/>
+        </p:spPr>
+        <p:txBody>
+          <a:bodyPr wrap="square" lIns="0" tIns="0" rIns="0" bIns="0" rtlCol="0" anchor="t"/>
+          <a:lstStyle/>
+          <a:p>
+            <a:pPr marL="0" indent="0">
+              <a:buNone/>
+            </a:pPr>
+            <a:r>
+              <a:rPr lang="en-US" sz="1200" dirty="0">
                 <a:solidFill>
                   <a:srgbClr val="1B1B1B"/>
                 </a:solidFill>
                 <a:latin typeface="Calibri" pitchFamily="34" charset="0"/>
-                <a:ea typeface="Calibri" pitchFamily="34" charset="-122"/>
-                <a:cs typeface="Calibri" pitchFamily="34" charset="-120"/>
-              </a:rPr>
-              <a:t>✓</a:t>
-            </a:r>
-            <a:endParaRPr lang="en-US" sz="2200" dirty="0"/>
-          </a:p>
-        </p:txBody>
-      </p:sp>
-      <p:sp>
-        <p:nvSpPr>
-          <p:cNvPr id="19" name="Text 17"/>
-          <p:cNvSpPr/>
-          <p:nvPr/>
-        </p:nvSpPr>
-        <p:spPr>
-          <a:xfrm>
-            <a:off x="1485900" y="4572000"/>
-            <a:ext cx="4297680" cy="502920"/>
-          </a:xfrm>
-          <a:prstGeom prst="rect">
-            <a:avLst/>
-          </a:prstGeom>
-          <a:noFill/>
-          <a:ln/>
-        </p:spPr>
-        <p:txBody>
-          <a:bodyPr wrap="square" lIns="0" tIns="0" rIns="0" bIns="0" rtlCol="0" anchor="ctr"/>
-          <a:lstStyle/>
-          <a:p>
-            <a:pPr indent="0" marL="0">
-              <a:buNone/>
-            </a:pPr>
-            <a:r>
-              <a:rPr lang="en-US" sz="1800" b="1" dirty="0">
-                <a:solidFill>
-                  <a:srgbClr val="1B1B1B"/>
-                </a:solidFill>
-                <a:latin typeface="Calibri" pitchFamily="34" charset="0"/>
-                <a:ea typeface="Calibri" pitchFamily="34" charset="-122"/>
-                <a:cs typeface="Calibri" pitchFamily="34" charset="-120"/>
-              </a:rPr>
-              <a:t>Confidence on every call</a:t>
-            </a:r>
-            <a:endParaRPr lang="en-US" sz="1800" dirty="0"/>
-          </a:p>
-        </p:txBody>
-      </p:sp>
-      <p:sp>
-        <p:nvSpPr>
-          <p:cNvPr id="20" name="Text 18"/>
-          <p:cNvSpPr/>
-          <p:nvPr/>
-        </p:nvSpPr>
-        <p:spPr>
-          <a:xfrm>
-            <a:off x="1485900" y="5120640"/>
-            <a:ext cx="4297680" cy="822960"/>
-          </a:xfrm>
-          <a:prstGeom prst="rect">
-            <a:avLst/>
-          </a:prstGeom>
-          <a:noFill/>
-          <a:ln/>
-        </p:spPr>
-        <p:txBody>
-          <a:bodyPr wrap="square" lIns="0" tIns="0" rIns="0" bIns="0" rtlCol="0" anchor="t"/>
-          <a:lstStyle/>
-          <a:p>
-            <a:pPr indent="0" marL="0">
-              <a:buNone/>
-            </a:pPr>
-            <a:r>
-              <a:rPr lang="en-US" sz="1300" dirty="0">
-                <a:solidFill>
-                  <a:srgbClr val="4A4A4A"/>
-                </a:solidFill>
-                <a:latin typeface="Calibri" pitchFamily="34" charset="0"/>
-                <a:ea typeface="Calibri" pitchFamily="34" charset="-122"/>
-                <a:cs typeface="Calibri" pitchFamily="34" charset="-120"/>
-              </a:rPr>
-              <a:t>Each diagnosis carries a confidence score. Low-confidence cases are visibly flagged for closer review.</a:t>
-            </a:r>
-            <a:endParaRPr lang="en-US" sz="1300" dirty="0"/>
-          </a:p>
-        </p:txBody>
-      </p:sp>
-      <p:sp>
-        <p:nvSpPr>
-          <p:cNvPr id="21" name="Shape 19"/>
-          <p:cNvSpPr/>
-          <p:nvPr/>
-        </p:nvSpPr>
-        <p:spPr>
-          <a:xfrm>
-            <a:off x="6195060" y="4251960"/>
-            <a:ext cx="5440680" cy="1828800"/>
-          </a:xfrm>
-          <a:prstGeom prst="rect">
-            <a:avLst/>
-          </a:prstGeom>
-          <a:solidFill>
-            <a:srgbClr val="FFFFFF"/>
-          </a:solidFill>
-          <a:ln w="12700">
-            <a:solidFill>
-              <a:srgbClr val="E5E0D5"/>
-            </a:solidFill>
-            <a:prstDash val="solid"/>
-          </a:ln>
-          <a:effectLst>
-            <a:outerShdw sx="100000" sy="100000" kx="0" ky="0" algn="bl" rotWithShape="0" blurRad="152400" dist="38100" dir="5400000">
-              <a:srgbClr val="000000">
-                <a:alpha val="8000"/>
-              </a:srgbClr>
-            </a:outerShdw>
-          </a:effectLst>
-        </p:spPr>
-      </p:sp>
-      <p:sp>
-        <p:nvSpPr>
-          <p:cNvPr id="22" name="Shape 20"/>
-          <p:cNvSpPr/>
-          <p:nvPr/>
-        </p:nvSpPr>
-        <p:spPr>
-          <a:xfrm>
-            <a:off x="6515100" y="4572000"/>
-            <a:ext cx="502920" cy="502920"/>
+              </a:rPr>
+              <a:t>Reads ServiceNow, Autosys, SSISDB and SSIS package source in parallel.</a:t>
+            </a:r>
+          </a:p>
+        </p:txBody>
+      </p:sp>
+      <p:sp>
+        <p:nvSpPr>
+          <p:cNvPr id="69" name="R4Dot"/>
+          <p:cNvSpPr/>
+          <p:nvPr/>
+        </p:nvSpPr>
+        <p:spPr>
+          <a:xfrm>
+            <a:off x="6460000" y="4370000"/>
+            <a:ext cx="182880" cy="182880"/>
           </a:xfrm>
           <a:prstGeom prst="ellipse">
             <a:avLst/>
@@ -7754,1026 +7873,88 @@
       </p:sp>
       <p:sp>
         <p:nvSpPr>
-          <p:cNvPr id="23" name="Text 21"/>
-          <p:cNvSpPr/>
-          <p:nvPr/>
-        </p:nvSpPr>
-        <p:spPr>
-          <a:xfrm>
-            <a:off x="6515100" y="4572000"/>
-            <a:ext cx="502920" cy="502920"/>
-          </a:xfrm>
-          <a:prstGeom prst="rect">
-            <a:avLst/>
-          </a:prstGeom>
-          <a:noFill/>
-          <a:ln/>
-        </p:spPr>
-        <p:txBody>
-          <a:bodyPr wrap="square" lIns="0" tIns="0" rIns="0" bIns="0" rtlCol="0" anchor="ctr"/>
-          <a:lstStyle/>
-          <a:p>
-            <a:pPr algn="ctr" indent="0" marL="0">
-              <a:buNone/>
-            </a:pPr>
-            <a:r>
-              <a:rPr lang="en-US" sz="2200" b="1" dirty="0">
+          <p:cNvPr id="70" name="R4Time"/>
+          <p:cNvSpPr/>
+          <p:nvPr/>
+        </p:nvSpPr>
+        <p:spPr>
+          <a:xfrm>
+            <a:off x="6780000" y="4315000"/>
+            <a:ext cx="1100000" cy="260000"/>
+          </a:xfrm>
+          <a:prstGeom prst="rect">
+            <a:avLst/>
+          </a:prstGeom>
+          <a:noFill/>
+          <a:ln/>
+        </p:spPr>
+        <p:txBody>
+          <a:bodyPr wrap="square" lIns="0" tIns="0" rIns="0" bIns="0" rtlCol="0" anchor="ctr"/>
+          <a:lstStyle/>
+          <a:p>
+            <a:pPr marL="0" indent="0">
+              <a:buNone/>
+            </a:pPr>
+            <a:r>
+              <a:rPr lang="en-US" sz="1000" b="1" kern="0" spc="300" dirty="0">
+                <a:solidFill>
+                  <a:srgbClr val="8A8A8A"/>
+                </a:solidFill>
+                <a:latin typeface="Calibri" pitchFamily="34" charset="0"/>
+              </a:rPr>
+              <a:t>2:13 AM ET</a:t>
+            </a:r>
+          </a:p>
+        </p:txBody>
+      </p:sp>
+      <p:sp>
+        <p:nvSpPr>
+          <p:cNvPr id="71" name="R4Text"/>
+          <p:cNvSpPr/>
+          <p:nvPr/>
+        </p:nvSpPr>
+        <p:spPr>
+          <a:xfrm>
+            <a:off x="6780000" y="4555000"/>
+            <a:ext cx="4750000" cy="600000"/>
+          </a:xfrm>
+          <a:prstGeom prst="rect">
+            <a:avLst/>
+          </a:prstGeom>
+          <a:noFill/>
+          <a:ln/>
+        </p:spPr>
+        <p:txBody>
+          <a:bodyPr wrap="square" lIns="0" tIns="0" rIns="0" bIns="0" rtlCol="0" anchor="t"/>
+          <a:lstStyle/>
+          <a:p>
+            <a:pPr marL="0" indent="0">
+              <a:buNone/>
+            </a:pPr>
+            <a:r>
+              <a:rPr lang="en-US" sz="1200" dirty="0">
                 <a:solidFill>
                   <a:srgbClr val="1B1B1B"/>
                 </a:solidFill>
                 <a:latin typeface="Calibri" pitchFamily="34" charset="0"/>
-                <a:ea typeface="Calibri" pitchFamily="34" charset="-122"/>
-                <a:cs typeface="Calibri" pitchFamily="34" charset="-120"/>
-              </a:rPr>
-              <a:t>✓</a:t>
-            </a:r>
-            <a:endParaRPr lang="en-US" sz="2200" dirty="0"/>
-          </a:p>
-        </p:txBody>
-      </p:sp>
-      <p:sp>
-        <p:nvSpPr>
-          <p:cNvPr id="24" name="Text 22"/>
-          <p:cNvSpPr/>
-          <p:nvPr/>
-        </p:nvSpPr>
-        <p:spPr>
-          <a:xfrm>
-            <a:off x="7155180" y="4572000"/>
-            <a:ext cx="4297680" cy="502920"/>
-          </a:xfrm>
-          <a:prstGeom prst="rect">
-            <a:avLst/>
-          </a:prstGeom>
-          <a:noFill/>
-          <a:ln/>
-        </p:spPr>
-        <p:txBody>
-          <a:bodyPr wrap="square" lIns="0" tIns="0" rIns="0" bIns="0" rtlCol="0" anchor="ctr"/>
-          <a:lstStyle/>
-          <a:p>
-            <a:pPr indent="0" marL="0">
-              <a:buNone/>
-            </a:pPr>
-            <a:r>
-              <a:rPr lang="en-US" sz="1800" b="1" dirty="0">
-                <a:solidFill>
-                  <a:srgbClr val="1B1B1B"/>
-                </a:solidFill>
-                <a:latin typeface="Calibri" pitchFamily="34" charset="0"/>
-                <a:ea typeface="Calibri" pitchFamily="34" charset="-122"/>
-                <a:cs typeface="Calibri" pitchFamily="34" charset="-120"/>
-              </a:rPr>
-              <a:t>Tested before promoted</a:t>
-            </a:r>
-            <a:endParaRPr lang="en-US" sz="1800" dirty="0"/>
-          </a:p>
-        </p:txBody>
-      </p:sp>
-      <p:sp>
-        <p:nvSpPr>
-          <p:cNvPr id="25" name="Text 23"/>
-          <p:cNvSpPr/>
-          <p:nvPr/>
-        </p:nvSpPr>
-        <p:spPr>
-          <a:xfrm>
-            <a:off x="7155180" y="5120640"/>
-            <a:ext cx="4297680" cy="822960"/>
-          </a:xfrm>
-          <a:prstGeom prst="rect">
-            <a:avLst/>
-          </a:prstGeom>
-          <a:noFill/>
-          <a:ln/>
-        </p:spPr>
-        <p:txBody>
-          <a:bodyPr wrap="square" lIns="0" tIns="0" rIns="0" bIns="0" rtlCol="0" anchor="t"/>
-          <a:lstStyle/>
-          <a:p>
-            <a:pPr indent="0" marL="0">
-              <a:buNone/>
-            </a:pPr>
-            <a:r>
-              <a:rPr lang="en-US" sz="1300" dirty="0">
-                <a:solidFill>
-                  <a:srgbClr val="4A4A4A"/>
-                </a:solidFill>
-                <a:latin typeface="Calibri" pitchFamily="34" charset="0"/>
-                <a:ea typeface="Calibri" pitchFamily="34" charset="-122"/>
-                <a:cs typeface="Calibri" pitchFamily="34" charset="-120"/>
-              </a:rPr>
-              <a:t>New versions run silently against real traffic and are scored before any change is made live.</a:t>
-            </a:r>
-            <a:endParaRPr lang="en-US" sz="1300" dirty="0"/>
-          </a:p>
-        </p:txBody>
-      </p:sp>
-    </p:spTree>
-  </p:cSld>
-  <p:clrMapOvr>
-    <a:masterClrMapping/>
-  </p:clrMapOvr>
-</p:sld>
-</file>
-
-<file path=ppt/slides/slide8.xml><?xml version="1.0" encoding="utf-8"?>
-<p:sld xmlns:a="http://schemas.openxmlformats.org/drawingml/2006/main" xmlns:r="http://schemas.openxmlformats.org/officeDocument/2006/relationships" xmlns:p="http://schemas.openxmlformats.org/presentationml/2006/main">
-  <p:cSld name="Slide 8">
-    <p:bg>
-      <p:bgPr>
-        <a:solidFill>
-          <a:srgbClr val="FFFFFF"/>
-        </a:solidFill>
-      </p:bgPr>
-    </p:bg>
-    <p:spTree>
-      <p:nvGrpSpPr>
-        <p:cNvPr id="1" name=""/>
-        <p:cNvGrpSpPr/>
-        <p:nvPr/>
-      </p:nvGrpSpPr>
-      <p:grpSpPr>
-        <a:xfrm>
-          <a:off x="0" y="0"/>
-          <a:ext cx="0" cy="0"/>
-          <a:chOff x="0" y="0"/>
-          <a:chExt cx="0" cy="0"/>
-        </a:xfrm>
-      </p:grpSpPr>
-      <p:sp>
-        <p:nvSpPr>
-          <p:cNvPr id="2" name="Shape 0"/>
-          <p:cNvSpPr/>
-          <p:nvPr/>
-        </p:nvSpPr>
-        <p:spPr>
-          <a:xfrm>
-            <a:off x="0" y="0"/>
-            <a:ext cx="12161520" cy="164592"/>
-          </a:xfrm>
-          <a:prstGeom prst="rect">
-            <a:avLst/>
-          </a:prstGeom>
-          <a:solidFill>
-            <a:srgbClr val="D71E28"/>
-          </a:solidFill>
-          <a:ln w="12700">
-            <a:solidFill>
-              <a:srgbClr val="D71E28"/>
-            </a:solidFill>
-            <a:prstDash val="solid"/>
-          </a:ln>
-        </p:spPr>
-      </p:sp>
-      <p:sp>
-        <p:nvSpPr>
-          <p:cNvPr id="3" name="Text 1"/>
-          <p:cNvSpPr/>
-          <p:nvPr/>
-        </p:nvSpPr>
-        <p:spPr>
-          <a:xfrm>
-            <a:off x="731520" y="502920"/>
-            <a:ext cx="10058400" cy="320040"/>
-          </a:xfrm>
-          <a:prstGeom prst="rect">
-            <a:avLst/>
-          </a:prstGeom>
-          <a:noFill/>
-          <a:ln/>
-        </p:spPr>
-        <p:txBody>
-          <a:bodyPr wrap="square" lIns="0" tIns="0" rIns="0" bIns="0" rtlCol="0" anchor="ctr"/>
-          <a:lstStyle/>
-          <a:p>
-            <a:pPr indent="0" marL="0">
-              <a:buNone/>
-            </a:pPr>
-            <a:r>
-              <a:rPr lang="en-US" sz="1100" b="1" spc="600" kern="0" dirty="0">
-                <a:solidFill>
-                  <a:srgbClr val="D71E28"/>
-                </a:solidFill>
-                <a:latin typeface="Calibri" pitchFamily="34" charset="0"/>
-                <a:ea typeface="Calibri" pitchFamily="34" charset="-122"/>
-                <a:cs typeface="Calibri" pitchFamily="34" charset="-120"/>
-              </a:rPr>
-              <a:t>ROADMAP</a:t>
-            </a:r>
-            <a:endParaRPr lang="en-US" sz="1100" dirty="0"/>
-          </a:p>
-        </p:txBody>
-      </p:sp>
-      <p:sp>
-        <p:nvSpPr>
-          <p:cNvPr id="4" name="Text 2"/>
-          <p:cNvSpPr/>
-          <p:nvPr/>
-        </p:nvSpPr>
-        <p:spPr>
-          <a:xfrm>
-            <a:off x="731520" y="914400"/>
-            <a:ext cx="10698480" cy="914400"/>
-          </a:xfrm>
-          <a:prstGeom prst="rect">
-            <a:avLst/>
-          </a:prstGeom>
-          <a:noFill/>
-          <a:ln/>
-        </p:spPr>
-        <p:txBody>
-          <a:bodyPr wrap="square" lIns="0" tIns="0" rIns="0" bIns="0" rtlCol="0" anchor="ctr"/>
-          <a:lstStyle/>
-          <a:p>
-            <a:pPr indent="0" marL="0">
-              <a:buNone/>
-            </a:pPr>
-            <a:r>
-              <a:rPr lang="en-US" sz="3600" b="1" dirty="0">
-                <a:solidFill>
-                  <a:srgbClr val="1B1B1B"/>
-                </a:solidFill>
-                <a:latin typeface="Calibri" pitchFamily="34" charset="0"/>
-                <a:ea typeface="Calibri" pitchFamily="34" charset="-122"/>
-                <a:cs typeface="Calibri" pitchFamily="34" charset="-120"/>
-              </a:rPr>
-              <a:t>Start small. Prove value. Expand.</a:t>
-            </a:r>
-            <a:endParaRPr lang="en-US" sz="3600" dirty="0"/>
-          </a:p>
-        </p:txBody>
-      </p:sp>
-      <p:sp>
-        <p:nvSpPr>
-          <p:cNvPr id="5" name="Text 3"/>
-          <p:cNvSpPr/>
-          <p:nvPr/>
-        </p:nvSpPr>
-        <p:spPr>
-          <a:xfrm>
-            <a:off x="10789920" y="6400800"/>
-            <a:ext cx="822960" cy="274320"/>
-          </a:xfrm>
-          <a:prstGeom prst="rect">
-            <a:avLst/>
-          </a:prstGeom>
-          <a:noFill/>
-          <a:ln/>
-        </p:spPr>
-        <p:txBody>
-          <a:bodyPr wrap="square" lIns="0" tIns="0" rIns="0" bIns="0" rtlCol="0" anchor="ctr"/>
-          <a:lstStyle/>
-          <a:p>
-            <a:pPr algn="r" indent="0" marL="0">
-              <a:buNone/>
-            </a:pPr>
-            <a:r>
-              <a:rPr lang="en-US" sz="900" dirty="0">
-                <a:solidFill>
-                  <a:srgbClr val="8A8A8A"/>
-                </a:solidFill>
-                <a:latin typeface="Calibri" pitchFamily="34" charset="0"/>
-                <a:ea typeface="Calibri" pitchFamily="34" charset="-122"/>
-                <a:cs typeface="Calibri" pitchFamily="34" charset="-120"/>
-              </a:rPr>
-              <a:t>8 / 9</a:t>
-            </a:r>
-            <a:endParaRPr lang="en-US" sz="900" dirty="0"/>
-          </a:p>
-        </p:txBody>
-      </p:sp>
-      <p:sp>
-        <p:nvSpPr>
-          <p:cNvPr id="6" name="Shape 4"/>
-          <p:cNvSpPr/>
-          <p:nvPr/>
-        </p:nvSpPr>
-        <p:spPr>
-          <a:xfrm>
-            <a:off x="365760" y="2194560"/>
-            <a:ext cx="3657600" cy="3657600"/>
-          </a:xfrm>
-          <a:prstGeom prst="rect">
-            <a:avLst/>
-          </a:prstGeom>
-          <a:solidFill>
-            <a:srgbClr val="FFFDF7"/>
-          </a:solidFill>
-          <a:ln w="12700">
-            <a:solidFill>
-              <a:srgbClr val="E5E0D5"/>
-            </a:solidFill>
-            <a:prstDash val="solid"/>
-          </a:ln>
-          <a:effectLst>
-            <a:outerShdw sx="100000" sy="100000" kx="0" ky="0" algn="bl" rotWithShape="0" blurRad="152400" dist="38100" dir="5400000">
-              <a:srgbClr val="000000">
-                <a:alpha val="8000"/>
-              </a:srgbClr>
-            </a:outerShdw>
-          </a:effectLst>
-        </p:spPr>
-      </p:sp>
-      <p:sp>
-        <p:nvSpPr>
-          <p:cNvPr id="7" name="Shape 5"/>
-          <p:cNvSpPr/>
-          <p:nvPr/>
-        </p:nvSpPr>
-        <p:spPr>
-          <a:xfrm>
-            <a:off x="640080" y="2514600"/>
-            <a:ext cx="1463040" cy="365760"/>
-          </a:xfrm>
-          <a:prstGeom prst="rect">
-            <a:avLst/>
-          </a:prstGeom>
-          <a:solidFill>
-            <a:srgbClr val="D71E28"/>
-          </a:solidFill>
-          <a:ln w="12700">
-            <a:solidFill>
-              <a:srgbClr val="D71E28"/>
-            </a:solidFill>
-            <a:prstDash val="solid"/>
-          </a:ln>
-        </p:spPr>
-      </p:sp>
-      <p:sp>
-        <p:nvSpPr>
-          <p:cNvPr id="8" name="Text 6"/>
-          <p:cNvSpPr/>
-          <p:nvPr/>
-        </p:nvSpPr>
-        <p:spPr>
-          <a:xfrm>
-            <a:off x="640080" y="2514600"/>
-            <a:ext cx="1463040" cy="365760"/>
-          </a:xfrm>
-          <a:prstGeom prst="rect">
-            <a:avLst/>
-          </a:prstGeom>
-          <a:noFill/>
-          <a:ln/>
-        </p:spPr>
-        <p:txBody>
-          <a:bodyPr wrap="square" lIns="0" tIns="0" rIns="0" bIns="0" rtlCol="0" anchor="ctr"/>
-          <a:lstStyle/>
-          <a:p>
-            <a:pPr algn="ctr" indent="0" marL="0">
-              <a:buNone/>
-            </a:pPr>
-            <a:r>
-              <a:rPr lang="en-US" sz="1100" b="1" spc="400" kern="0" dirty="0">
-                <a:solidFill>
-                  <a:srgbClr val="FFFFFF"/>
-                </a:solidFill>
-                <a:latin typeface="Calibri" pitchFamily="34" charset="0"/>
-                <a:ea typeface="Calibri" pitchFamily="34" charset="-122"/>
-                <a:cs typeface="Calibri" pitchFamily="34" charset="-120"/>
-              </a:rPr>
-              <a:t>PHASE 1</a:t>
-            </a:r>
-            <a:endParaRPr lang="en-US" sz="1100" dirty="0"/>
-          </a:p>
-        </p:txBody>
-      </p:sp>
-      <p:sp>
-        <p:nvSpPr>
-          <p:cNvPr id="9" name="Text 7"/>
-          <p:cNvSpPr/>
-          <p:nvPr/>
-        </p:nvSpPr>
-        <p:spPr>
-          <a:xfrm>
-            <a:off x="2194560" y="2514600"/>
-            <a:ext cx="1645920" cy="365760"/>
-          </a:xfrm>
-          <a:prstGeom prst="rect">
-            <a:avLst/>
-          </a:prstGeom>
-          <a:noFill/>
-          <a:ln/>
-        </p:spPr>
-        <p:txBody>
-          <a:bodyPr wrap="square" lIns="0" tIns="0" rIns="0" bIns="0" rtlCol="0" anchor="ctr"/>
-          <a:lstStyle/>
-          <a:p>
-            <a:pPr indent="0" marL="0">
-              <a:buNone/>
-            </a:pPr>
-            <a:r>
-              <a:rPr lang="en-US" sz="1200" i="1" dirty="0">
-                <a:solidFill>
-                  <a:srgbClr val="8A8A8A"/>
-                </a:solidFill>
-                <a:latin typeface="Calibri" pitchFamily="34" charset="0"/>
-                <a:ea typeface="Calibri" pitchFamily="34" charset="-122"/>
-                <a:cs typeface="Calibri" pitchFamily="34" charset="-120"/>
-              </a:rPr>
-              <a:t>Now → Q3</a:t>
-            </a:r>
-            <a:endParaRPr lang="en-US" sz="1200" dirty="0"/>
-          </a:p>
-        </p:txBody>
-      </p:sp>
-      <p:sp>
-        <p:nvSpPr>
-          <p:cNvPr id="10" name="Text 8"/>
-          <p:cNvSpPr/>
-          <p:nvPr/>
-        </p:nvSpPr>
-        <p:spPr>
-          <a:xfrm>
-            <a:off x="640080" y="3108960"/>
-            <a:ext cx="3108960" cy="731520"/>
-          </a:xfrm>
-          <a:prstGeom prst="rect">
-            <a:avLst/>
-          </a:prstGeom>
-          <a:noFill/>
-          <a:ln/>
-        </p:spPr>
-        <p:txBody>
-          <a:bodyPr wrap="square" lIns="0" tIns="0" rIns="0" bIns="0" rtlCol="0" anchor="ctr"/>
-          <a:lstStyle/>
-          <a:p>
-            <a:pPr indent="0" marL="0">
-              <a:buNone/>
-            </a:pPr>
-            <a:r>
-              <a:rPr lang="en-US" sz="3000" b="1" dirty="0">
-                <a:solidFill>
-                  <a:srgbClr val="1B1B1B"/>
-                </a:solidFill>
-                <a:latin typeface="Calibri" pitchFamily="34" charset="0"/>
-                <a:ea typeface="Calibri" pitchFamily="34" charset="-122"/>
-                <a:cs typeface="Calibri" pitchFamily="34" charset="-120"/>
-              </a:rPr>
-              <a:t>Diagnose</a:t>
-            </a:r>
-            <a:endParaRPr lang="en-US" sz="3000" dirty="0"/>
-          </a:p>
-        </p:txBody>
-      </p:sp>
-      <p:sp>
-        <p:nvSpPr>
-          <p:cNvPr id="11" name="Text 9"/>
-          <p:cNvSpPr/>
-          <p:nvPr/>
-        </p:nvSpPr>
-        <p:spPr>
-          <a:xfrm>
-            <a:off x="640080" y="3977640"/>
-            <a:ext cx="3108960" cy="1737360"/>
-          </a:xfrm>
-          <a:prstGeom prst="rect">
-            <a:avLst/>
-          </a:prstGeom>
-          <a:noFill/>
-          <a:ln/>
-        </p:spPr>
-        <p:txBody>
-          <a:bodyPr wrap="square" lIns="0" tIns="0" rIns="0" bIns="0" rtlCol="0" anchor="ctr"/>
-          <a:lstStyle/>
-          <a:p>
-            <a:pPr indent="0" marL="0">
-              <a:buNone/>
-            </a:pPr>
-            <a:r>
-              <a:rPr lang="en-US" sz="1400" dirty="0">
-                <a:solidFill>
-                  <a:srgbClr val="4A4A4A"/>
-                </a:solidFill>
-                <a:latin typeface="Calibri" pitchFamily="34" charset="0"/>
-                <a:ea typeface="Calibri" pitchFamily="34" charset="-122"/>
-                <a:cs typeface="Calibri" pitchFamily="34" charset="-120"/>
-              </a:rPr>
-              <a:t>Automated diagnosis emailed to engineers within 10 minutes. No automated changes to production.</a:t>
-            </a:r>
-            <a:endParaRPr lang="en-US" sz="1400" dirty="0"/>
-          </a:p>
-        </p:txBody>
-      </p:sp>
-      <p:sp>
-        <p:nvSpPr>
-          <p:cNvPr id="12" name="Shape 10"/>
-          <p:cNvSpPr/>
-          <p:nvPr/>
-        </p:nvSpPr>
-        <p:spPr>
-          <a:xfrm>
-            <a:off x="4069080" y="4023360"/>
-            <a:ext cx="137160" cy="0"/>
-          </a:xfrm>
-          <a:prstGeom prst="line">
-            <a:avLst/>
-          </a:prstGeom>
-          <a:noFill/>
-          <a:ln w="31750">
-            <a:solidFill>
-              <a:srgbClr val="D71E28"/>
-            </a:solidFill>
-            <a:prstDash val="solid"/>
-            <a:tailEnd type="triangle"/>
-          </a:ln>
-        </p:spPr>
-      </p:sp>
-      <p:sp>
-        <p:nvSpPr>
-          <p:cNvPr id="13" name="Shape 11"/>
-          <p:cNvSpPr/>
-          <p:nvPr/>
-        </p:nvSpPr>
-        <p:spPr>
-          <a:xfrm>
-            <a:off x="4251960" y="2194560"/>
-            <a:ext cx="3657600" cy="3657600"/>
-          </a:xfrm>
-          <a:prstGeom prst="rect">
-            <a:avLst/>
-          </a:prstGeom>
-          <a:solidFill>
-            <a:srgbClr val="FFFFFF"/>
-          </a:solidFill>
-          <a:ln w="12700">
-            <a:solidFill>
-              <a:srgbClr val="E5E0D5"/>
-            </a:solidFill>
-            <a:prstDash val="solid"/>
-          </a:ln>
-          <a:effectLst>
-            <a:outerShdw sx="100000" sy="100000" kx="0" ky="0" algn="bl" rotWithShape="0" blurRad="152400" dist="38100" dir="5400000">
-              <a:srgbClr val="000000">
-                <a:alpha val="8000"/>
-              </a:srgbClr>
-            </a:outerShdw>
-          </a:effectLst>
-        </p:spPr>
-      </p:sp>
-      <p:sp>
-        <p:nvSpPr>
-          <p:cNvPr id="14" name="Shape 12"/>
-          <p:cNvSpPr/>
-          <p:nvPr/>
-        </p:nvSpPr>
-        <p:spPr>
-          <a:xfrm>
-            <a:off x="4526280" y="2514600"/>
-            <a:ext cx="1463040" cy="365760"/>
-          </a:xfrm>
-          <a:prstGeom prst="rect">
-            <a:avLst/>
-          </a:prstGeom>
-          <a:solidFill>
-            <a:srgbClr val="8A8A8A"/>
-          </a:solidFill>
-          <a:ln w="12700">
-            <a:solidFill>
-              <a:srgbClr val="8A8A8A"/>
-            </a:solidFill>
-            <a:prstDash val="solid"/>
-          </a:ln>
-        </p:spPr>
-      </p:sp>
-      <p:sp>
-        <p:nvSpPr>
-          <p:cNvPr id="15" name="Text 13"/>
-          <p:cNvSpPr/>
-          <p:nvPr/>
-        </p:nvSpPr>
-        <p:spPr>
-          <a:xfrm>
-            <a:off x="4526280" y="2514600"/>
-            <a:ext cx="1463040" cy="365760"/>
-          </a:xfrm>
-          <a:prstGeom prst="rect">
-            <a:avLst/>
-          </a:prstGeom>
-          <a:noFill/>
-          <a:ln/>
-        </p:spPr>
-        <p:txBody>
-          <a:bodyPr wrap="square" lIns="0" tIns="0" rIns="0" bIns="0" rtlCol="0" anchor="ctr"/>
-          <a:lstStyle/>
-          <a:p>
-            <a:pPr algn="ctr" indent="0" marL="0">
-              <a:buNone/>
-            </a:pPr>
-            <a:r>
-              <a:rPr lang="en-US" sz="1100" b="1" spc="400" kern="0" dirty="0">
-                <a:solidFill>
-                  <a:srgbClr val="FFFFFF"/>
-                </a:solidFill>
-                <a:latin typeface="Calibri" pitchFamily="34" charset="0"/>
-                <a:ea typeface="Calibri" pitchFamily="34" charset="-122"/>
-                <a:cs typeface="Calibri" pitchFamily="34" charset="-120"/>
-              </a:rPr>
-              <a:t>PHASE 2</a:t>
-            </a:r>
-            <a:endParaRPr lang="en-US" sz="1100" dirty="0"/>
-          </a:p>
-        </p:txBody>
-      </p:sp>
-      <p:sp>
-        <p:nvSpPr>
-          <p:cNvPr id="16" name="Text 14"/>
-          <p:cNvSpPr/>
-          <p:nvPr/>
-        </p:nvSpPr>
-        <p:spPr>
-          <a:xfrm>
-            <a:off x="6080760" y="2514600"/>
-            <a:ext cx="1645920" cy="365760"/>
-          </a:xfrm>
-          <a:prstGeom prst="rect">
-            <a:avLst/>
-          </a:prstGeom>
-          <a:noFill/>
-          <a:ln/>
-        </p:spPr>
-        <p:txBody>
-          <a:bodyPr wrap="square" lIns="0" tIns="0" rIns="0" bIns="0" rtlCol="0" anchor="ctr"/>
-          <a:lstStyle/>
-          <a:p>
-            <a:pPr indent="0" marL="0">
-              <a:buNone/>
-            </a:pPr>
-            <a:r>
-              <a:rPr lang="en-US" sz="1200" i="1" dirty="0">
-                <a:solidFill>
-                  <a:srgbClr val="8A8A8A"/>
-                </a:solidFill>
-                <a:latin typeface="Calibri" pitchFamily="34" charset="0"/>
-                <a:ea typeface="Calibri" pitchFamily="34" charset="-122"/>
-                <a:cs typeface="Calibri" pitchFamily="34" charset="-120"/>
-              </a:rPr>
-              <a:t>Q4</a:t>
-            </a:r>
-            <a:endParaRPr lang="en-US" sz="1200" dirty="0"/>
-          </a:p>
-        </p:txBody>
-      </p:sp>
-      <p:sp>
-        <p:nvSpPr>
-          <p:cNvPr id="17" name="Text 15"/>
-          <p:cNvSpPr/>
-          <p:nvPr/>
-        </p:nvSpPr>
-        <p:spPr>
-          <a:xfrm>
-            <a:off x="4526280" y="3108960"/>
-            <a:ext cx="3108960" cy="731520"/>
-          </a:xfrm>
-          <a:prstGeom prst="rect">
-            <a:avLst/>
-          </a:prstGeom>
-          <a:noFill/>
-          <a:ln/>
-        </p:spPr>
-        <p:txBody>
-          <a:bodyPr wrap="square" lIns="0" tIns="0" rIns="0" bIns="0" rtlCol="0" anchor="ctr"/>
-          <a:lstStyle/>
-          <a:p>
-            <a:pPr indent="0" marL="0">
-              <a:buNone/>
-            </a:pPr>
-            <a:r>
-              <a:rPr lang="en-US" sz="3000" b="1" dirty="0">
-                <a:solidFill>
-                  <a:srgbClr val="1B1B1B"/>
-                </a:solidFill>
-                <a:latin typeface="Calibri" pitchFamily="34" charset="0"/>
-                <a:ea typeface="Calibri" pitchFamily="34" charset="-122"/>
-                <a:cs typeface="Calibri" pitchFamily="34" charset="-120"/>
-              </a:rPr>
-              <a:t>Learn</a:t>
-            </a:r>
-            <a:endParaRPr lang="en-US" sz="3000" dirty="0"/>
-          </a:p>
-        </p:txBody>
-      </p:sp>
-      <p:sp>
-        <p:nvSpPr>
-          <p:cNvPr id="18" name="Text 16"/>
-          <p:cNvSpPr/>
-          <p:nvPr/>
-        </p:nvSpPr>
-        <p:spPr>
-          <a:xfrm>
-            <a:off x="4526280" y="3977640"/>
-            <a:ext cx="3108960" cy="1737360"/>
-          </a:xfrm>
-          <a:prstGeom prst="rect">
-            <a:avLst/>
-          </a:prstGeom>
-          <a:noFill/>
-          <a:ln/>
-        </p:spPr>
-        <p:txBody>
-          <a:bodyPr wrap="square" lIns="0" tIns="0" rIns="0" bIns="0" rtlCol="0" anchor="ctr"/>
-          <a:lstStyle/>
-          <a:p>
-            <a:pPr indent="0" marL="0">
-              <a:buNone/>
-            </a:pPr>
-            <a:r>
-              <a:rPr lang="en-US" sz="1400" dirty="0">
-                <a:solidFill>
-                  <a:srgbClr val="4A4A4A"/>
-                </a:solidFill>
-                <a:latin typeface="Calibri" pitchFamily="34" charset="0"/>
-                <a:ea typeface="Calibri" pitchFamily="34" charset="-122"/>
-                <a:cs typeface="Calibri" pitchFamily="34" charset="-120"/>
-              </a:rPr>
-              <a:t>Capture engineer feedback to keep improving accuracy. Expand coverage to additional job types.</a:t>
-            </a:r>
-            <a:endParaRPr lang="en-US" sz="1400" dirty="0"/>
-          </a:p>
-        </p:txBody>
-      </p:sp>
-      <p:sp>
-        <p:nvSpPr>
-          <p:cNvPr id="19" name="Shape 17"/>
-          <p:cNvSpPr/>
-          <p:nvPr/>
-        </p:nvSpPr>
-        <p:spPr>
-          <a:xfrm>
-            <a:off x="7955280" y="4023360"/>
-            <a:ext cx="137160" cy="0"/>
-          </a:xfrm>
-          <a:prstGeom prst="line">
-            <a:avLst/>
-          </a:prstGeom>
-          <a:noFill/>
-          <a:ln w="31750">
-            <a:solidFill>
-              <a:srgbClr val="D71E28"/>
-            </a:solidFill>
-            <a:prstDash val="solid"/>
-            <a:tailEnd type="triangle"/>
-          </a:ln>
-        </p:spPr>
-      </p:sp>
-      <p:sp>
-        <p:nvSpPr>
-          <p:cNvPr id="20" name="Shape 18"/>
-          <p:cNvSpPr/>
-          <p:nvPr/>
-        </p:nvSpPr>
-        <p:spPr>
-          <a:xfrm>
-            <a:off x="8138160" y="2194560"/>
-            <a:ext cx="3657600" cy="3657600"/>
-          </a:xfrm>
-          <a:prstGeom prst="rect">
-            <a:avLst/>
-          </a:prstGeom>
-          <a:solidFill>
-            <a:srgbClr val="FFFFFF"/>
-          </a:solidFill>
-          <a:ln w="12700">
-            <a:solidFill>
-              <a:srgbClr val="E5E0D5"/>
-            </a:solidFill>
-            <a:prstDash val="solid"/>
-          </a:ln>
-          <a:effectLst>
-            <a:outerShdw sx="100000" sy="100000" kx="0" ky="0" algn="bl" rotWithShape="0" blurRad="152400" dist="38100" dir="5400000">
-              <a:srgbClr val="000000">
-                <a:alpha val="8000"/>
-              </a:srgbClr>
-            </a:outerShdw>
-          </a:effectLst>
-        </p:spPr>
-      </p:sp>
-      <p:sp>
-        <p:nvSpPr>
-          <p:cNvPr id="21" name="Shape 19"/>
-          <p:cNvSpPr/>
-          <p:nvPr/>
-        </p:nvSpPr>
-        <p:spPr>
-          <a:xfrm>
-            <a:off x="8412480" y="2514600"/>
-            <a:ext cx="1463040" cy="365760"/>
-          </a:xfrm>
-          <a:prstGeom prst="rect">
-            <a:avLst/>
-          </a:prstGeom>
-          <a:solidFill>
-            <a:srgbClr val="8A8A8A"/>
-          </a:solidFill>
-          <a:ln w="12700">
-            <a:solidFill>
-              <a:srgbClr val="8A8A8A"/>
-            </a:solidFill>
-            <a:prstDash val="solid"/>
-          </a:ln>
-        </p:spPr>
-      </p:sp>
-      <p:sp>
-        <p:nvSpPr>
-          <p:cNvPr id="22" name="Text 20"/>
-          <p:cNvSpPr/>
-          <p:nvPr/>
-        </p:nvSpPr>
-        <p:spPr>
-          <a:xfrm>
-            <a:off x="8412480" y="2514600"/>
-            <a:ext cx="1463040" cy="365760"/>
-          </a:xfrm>
-          <a:prstGeom prst="rect">
-            <a:avLst/>
-          </a:prstGeom>
-          <a:noFill/>
-          <a:ln/>
-        </p:spPr>
-        <p:txBody>
-          <a:bodyPr wrap="square" lIns="0" tIns="0" rIns="0" bIns="0" rtlCol="0" anchor="ctr"/>
-          <a:lstStyle/>
-          <a:p>
-            <a:pPr algn="ctr" indent="0" marL="0">
-              <a:buNone/>
-            </a:pPr>
-            <a:r>
-              <a:rPr lang="en-US" sz="1100" b="1" spc="400" kern="0" dirty="0">
-                <a:solidFill>
-                  <a:srgbClr val="FFFFFF"/>
-                </a:solidFill>
-                <a:latin typeface="Calibri" pitchFamily="34" charset="0"/>
-                <a:ea typeface="Calibri" pitchFamily="34" charset="-122"/>
-                <a:cs typeface="Calibri" pitchFamily="34" charset="-120"/>
-              </a:rPr>
-              <a:t>PHASE 3</a:t>
-            </a:r>
-            <a:endParaRPr lang="en-US" sz="1100" dirty="0"/>
-          </a:p>
-        </p:txBody>
-      </p:sp>
-      <p:sp>
-        <p:nvSpPr>
-          <p:cNvPr id="23" name="Text 21"/>
-          <p:cNvSpPr/>
-          <p:nvPr/>
-        </p:nvSpPr>
-        <p:spPr>
-          <a:xfrm>
-            <a:off x="9966960" y="2514600"/>
-            <a:ext cx="1645920" cy="365760"/>
-          </a:xfrm>
-          <a:prstGeom prst="rect">
-            <a:avLst/>
-          </a:prstGeom>
-          <a:noFill/>
-          <a:ln/>
-        </p:spPr>
-        <p:txBody>
-          <a:bodyPr wrap="square" lIns="0" tIns="0" rIns="0" bIns="0" rtlCol="0" anchor="ctr"/>
-          <a:lstStyle/>
-          <a:p>
-            <a:pPr indent="0" marL="0">
-              <a:buNone/>
-            </a:pPr>
-            <a:r>
-              <a:rPr lang="en-US" sz="1200" i="1" dirty="0">
-                <a:solidFill>
-                  <a:srgbClr val="8A8A8A"/>
-                </a:solidFill>
-                <a:latin typeface="Calibri" pitchFamily="34" charset="0"/>
-                <a:ea typeface="Calibri" pitchFamily="34" charset="-122"/>
-                <a:cs typeface="Calibri" pitchFamily="34" charset="-120"/>
-              </a:rPr>
-              <a:t>Next year</a:t>
-            </a:r>
-            <a:endParaRPr lang="en-US" sz="1200" dirty="0"/>
-          </a:p>
-        </p:txBody>
-      </p:sp>
-      <p:sp>
-        <p:nvSpPr>
-          <p:cNvPr id="24" name="Text 22"/>
-          <p:cNvSpPr/>
-          <p:nvPr/>
-        </p:nvSpPr>
-        <p:spPr>
-          <a:xfrm>
-            <a:off x="8412480" y="3108960"/>
-            <a:ext cx="3108960" cy="731520"/>
-          </a:xfrm>
-          <a:prstGeom prst="rect">
-            <a:avLst/>
-          </a:prstGeom>
-          <a:noFill/>
-          <a:ln/>
-        </p:spPr>
-        <p:txBody>
-          <a:bodyPr wrap="square" lIns="0" tIns="0" rIns="0" bIns="0" rtlCol="0" anchor="ctr"/>
-          <a:lstStyle/>
-          <a:p>
-            <a:pPr indent="0" marL="0">
-              <a:buNone/>
-            </a:pPr>
-            <a:r>
-              <a:rPr lang="en-US" sz="3000" b="1" dirty="0">
-                <a:solidFill>
-                  <a:srgbClr val="1B1B1B"/>
-                </a:solidFill>
-                <a:latin typeface="Calibri" pitchFamily="34" charset="0"/>
-                <a:ea typeface="Calibri" pitchFamily="34" charset="-122"/>
-                <a:cs typeface="Calibri" pitchFamily="34" charset="-120"/>
-              </a:rPr>
-              <a:t>Recommend Fixes</a:t>
-            </a:r>
-            <a:endParaRPr lang="en-US" sz="3000" dirty="0"/>
-          </a:p>
-        </p:txBody>
-      </p:sp>
-      <p:sp>
-        <p:nvSpPr>
-          <p:cNvPr id="25" name="Text 23"/>
-          <p:cNvSpPr/>
-          <p:nvPr/>
-        </p:nvSpPr>
-        <p:spPr>
-          <a:xfrm>
-            <a:off x="8412480" y="3977640"/>
-            <a:ext cx="3108960" cy="1737360"/>
-          </a:xfrm>
-          <a:prstGeom prst="rect">
-            <a:avLst/>
-          </a:prstGeom>
-          <a:noFill/>
-          <a:ln/>
-        </p:spPr>
-        <p:txBody>
-          <a:bodyPr wrap="square" lIns="0" tIns="0" rIns="0" bIns="0" rtlCol="0" anchor="ctr"/>
-          <a:lstStyle/>
-          <a:p>
-            <a:pPr indent="0" marL="0">
-              <a:buNone/>
-            </a:pPr>
-            <a:r>
-              <a:rPr lang="en-US" sz="1400" dirty="0">
-                <a:solidFill>
-                  <a:srgbClr val="4A4A4A"/>
-                </a:solidFill>
-                <a:latin typeface="Calibri" pitchFamily="34" charset="0"/>
-                <a:ea typeface="Calibri" pitchFamily="34" charset="-122"/>
-                <a:cs typeface="Calibri" pitchFamily="34" charset="-120"/>
-              </a:rPr>
-              <a:t>Where confidence is high, suggest the actual code change. Engineer still approves and merges.</a:t>
-            </a:r>
-            <a:endParaRPr lang="en-US" sz="1400" dirty="0"/>
-          </a:p>
-        </p:txBody>
-      </p:sp>
-    </p:spTree>
-  </p:cSld>
-  <p:clrMapOvr>
-    <a:masterClrMapping/>
-  </p:clrMapOvr>
-</p:sld>
-</file>
-
-<file path=ppt/slides/slide9.xml><?xml version="1.0" encoding="utf-8"?>
-<p:sld xmlns:a="http://schemas.openxmlformats.org/drawingml/2006/main" xmlns:r="http://schemas.openxmlformats.org/officeDocument/2006/relationships" xmlns:p="http://schemas.openxmlformats.org/presentationml/2006/main">
-  <p:cSld name="Slide 9">
-    <p:bg>
-      <p:bgPr>
-        <a:solidFill>
-          <a:srgbClr val="D71E28"/>
-        </a:solidFill>
-      </p:bgPr>
-    </p:bg>
-    <p:spTree>
-      <p:nvGrpSpPr>
-        <p:cNvPr id="1" name=""/>
-        <p:cNvGrpSpPr/>
-        <p:nvPr/>
-      </p:nvGrpSpPr>
-      <p:grpSpPr>
-        <a:xfrm>
-          <a:off x="0" y="0"/>
-          <a:ext cx="0" cy="0"/>
-          <a:chOff x="0" y="0"/>
-          <a:chExt cx="0" cy="0"/>
-        </a:xfrm>
-      </p:grpSpPr>
-      <p:sp>
-        <p:nvSpPr>
-          <p:cNvPr id="2" name="Shape 0"/>
-          <p:cNvSpPr/>
-          <p:nvPr/>
-        </p:nvSpPr>
-        <p:spPr>
-          <a:xfrm>
-            <a:off x="0" y="0"/>
-            <a:ext cx="274320" cy="6858000"/>
-          </a:xfrm>
-          <a:prstGeom prst="rect">
+              </a:rPr>
+              <a:t>Diagnosis with confidence score emailed to L2, offshore EGS, and US teams simultaneously.</a:t>
+            </a:r>
+          </a:p>
+        </p:txBody>
+      </p:sp>
+      <p:sp>
+        <p:nvSpPr>
+          <p:cNvPr id="72" name="R5Dot"/>
+          <p:cNvSpPr/>
+          <p:nvPr/>
+        </p:nvSpPr>
+        <p:spPr>
+          <a:xfrm>
+            <a:off x="6460000" y="5180000"/>
+            <a:ext cx="182880" cy="182880"/>
+          </a:xfrm>
+          <a:prstGeom prst="ellipse">
             <a:avLst/>
           </a:prstGeom>
           <a:solidFill>
@@ -8789,92 +7970,86 @@
       </p:sp>
       <p:sp>
         <p:nvSpPr>
-          <p:cNvPr id="3" name="Text 1"/>
-          <p:cNvSpPr/>
-          <p:nvPr/>
-        </p:nvSpPr>
-        <p:spPr>
-          <a:xfrm>
-            <a:off x="822960" y="914400"/>
-            <a:ext cx="10058400" cy="365760"/>
-          </a:xfrm>
-          <a:prstGeom prst="rect">
-            <a:avLst/>
-          </a:prstGeom>
-          <a:noFill/>
-          <a:ln/>
-        </p:spPr>
-        <p:txBody>
-          <a:bodyPr wrap="square" lIns="0" tIns="0" rIns="0" bIns="0" rtlCol="0" anchor="ctr"/>
-          <a:lstStyle/>
-          <a:p>
-            <a:pPr indent="0" marL="0">
-              <a:buNone/>
-            </a:pPr>
-            <a:r>
-              <a:rPr lang="en-US" sz="1400" b="1" spc="800" kern="0" dirty="0">
-                <a:solidFill>
-                  <a:srgbClr val="FFCD41"/>
-                </a:solidFill>
-                <a:latin typeface="Calibri" pitchFamily="34" charset="0"/>
-                <a:ea typeface="Calibri" pitchFamily="34" charset="-122"/>
-                <a:cs typeface="Calibri" pitchFamily="34" charset="-120"/>
-              </a:rPr>
-              <a:t>WHAT WE NEED</a:t>
-            </a:r>
-            <a:endParaRPr lang="en-US" sz="1400" dirty="0"/>
-          </a:p>
-        </p:txBody>
-      </p:sp>
-      <p:sp>
-        <p:nvSpPr>
-          <p:cNvPr id="4" name="Text 2"/>
-          <p:cNvSpPr/>
-          <p:nvPr/>
-        </p:nvSpPr>
-        <p:spPr>
-          <a:xfrm>
-            <a:off x="822960" y="1371600"/>
-            <a:ext cx="10515600" cy="914400"/>
-          </a:xfrm>
-          <a:prstGeom prst="rect">
-            <a:avLst/>
-          </a:prstGeom>
-          <a:noFill/>
-          <a:ln/>
-        </p:spPr>
-        <p:txBody>
-          <a:bodyPr wrap="square" lIns="0" tIns="0" rIns="0" bIns="0" rtlCol="0" anchor="ctr"/>
-          <a:lstStyle/>
-          <a:p>
-            <a:pPr indent="0" marL="0">
-              <a:buNone/>
-            </a:pPr>
-            <a:r>
-              <a:rPr lang="en-US" sz="3800" b="1" dirty="0">
-                <a:solidFill>
-                  <a:srgbClr val="FFFFFF"/>
-                </a:solidFill>
-                <a:latin typeface="Calibri" pitchFamily="34" charset="0"/>
-                <a:ea typeface="Calibri" pitchFamily="34" charset="-122"/>
-                <a:cs typeface="Calibri" pitchFamily="34" charset="-120"/>
-              </a:rPr>
-              <a:t>Three approvals to start the pilot.</a:t>
-            </a:r>
-            <a:endParaRPr lang="en-US" sz="3800" dirty="0"/>
-          </a:p>
-        </p:txBody>
-      </p:sp>
-      <p:sp>
-        <p:nvSpPr>
-          <p:cNvPr id="5" name="Shape 3"/>
-          <p:cNvSpPr/>
-          <p:nvPr/>
-        </p:nvSpPr>
-        <p:spPr>
-          <a:xfrm>
-            <a:off x="822960" y="3200400"/>
-            <a:ext cx="594360" cy="594360"/>
+          <p:cNvPr id="73" name="R5Time"/>
+          <p:cNvSpPr/>
+          <p:nvPr/>
+        </p:nvSpPr>
+        <p:spPr>
+          <a:xfrm>
+            <a:off x="6780000" y="5125000"/>
+            <a:ext cx="1100000" cy="260000"/>
+          </a:xfrm>
+          <a:prstGeom prst="rect">
+            <a:avLst/>
+          </a:prstGeom>
+          <a:noFill/>
+          <a:ln/>
+        </p:spPr>
+        <p:txBody>
+          <a:bodyPr wrap="square" lIns="0" tIns="0" rIns="0" bIns="0" rtlCol="0" anchor="ctr"/>
+          <a:lstStyle/>
+          <a:p>
+            <a:pPr marL="0" indent="0">
+              <a:buNone/>
+            </a:pPr>
+            <a:r>
+              <a:rPr lang="en-US" sz="1000" b="1" kern="0" spc="300" dirty="0">
+                <a:solidFill>
+                  <a:srgbClr val="8A8A8A"/>
+                </a:solidFill>
+                <a:latin typeface="Calibri" pitchFamily="34" charset="0"/>
+              </a:rPr>
+              <a:t>2:13 AM ET</a:t>
+            </a:r>
+          </a:p>
+        </p:txBody>
+      </p:sp>
+      <p:sp>
+        <p:nvSpPr>
+          <p:cNvPr id="74" name="R5Text"/>
+          <p:cNvSpPr/>
+          <p:nvPr/>
+        </p:nvSpPr>
+        <p:spPr>
+          <a:xfrm>
+            <a:off x="6780000" y="5365000"/>
+            <a:ext cx="4750000" cy="600000"/>
+          </a:xfrm>
+          <a:prstGeom prst="rect">
+            <a:avLst/>
+          </a:prstGeom>
+          <a:noFill/>
+          <a:ln/>
+        </p:spPr>
+        <p:txBody>
+          <a:bodyPr wrap="square" lIns="0" tIns="0" rIns="0" bIns="0" rtlCol="0" anchor="t"/>
+          <a:lstStyle/>
+          <a:p>
+            <a:pPr marL="0" indent="0">
+              <a:buNone/>
+            </a:pPr>
+            <a:r>
+              <a:rPr lang="en-US" sz="1200" dirty="0">
+                <a:solidFill>
+                  <a:srgbClr val="1B1B1B"/>
+                </a:solidFill>
+                <a:latin typeface="Calibri" pitchFamily="34" charset="0"/>
+              </a:rPr>
+              <a:t>Offshore EGS acts on the diagnosis. Escalates to US DBAs only when SAR access is truly required.</a:t>
+            </a:r>
+          </a:p>
+        </p:txBody>
+      </p:sp>
+      <p:sp>
+        <p:nvSpPr>
+          <p:cNvPr id="75" name="R6Dot"/>
+          <p:cNvSpPr/>
+          <p:nvPr/>
+        </p:nvSpPr>
+        <p:spPr>
+          <a:xfrm>
+            <a:off x="6460000" y="5990000"/>
+            <a:ext cx="182880" cy="182880"/>
           </a:xfrm>
           <a:prstGeom prst="ellipse">
             <a:avLst/>
@@ -8892,441 +8067,73 @@
       </p:sp>
       <p:sp>
         <p:nvSpPr>
-          <p:cNvPr id="6" name="Text 4"/>
-          <p:cNvSpPr/>
-          <p:nvPr/>
-        </p:nvSpPr>
-        <p:spPr>
-          <a:xfrm>
-            <a:off x="822960" y="3200400"/>
-            <a:ext cx="594360" cy="594360"/>
-          </a:xfrm>
-          <a:prstGeom prst="rect">
-            <a:avLst/>
-          </a:prstGeom>
-          <a:noFill/>
-          <a:ln/>
-        </p:spPr>
-        <p:txBody>
-          <a:bodyPr wrap="square" lIns="0" tIns="0" rIns="0" bIns="0" rtlCol="0" anchor="ctr"/>
-          <a:lstStyle/>
-          <a:p>
-            <a:pPr algn="ctr" indent="0" marL="0">
-              <a:buNone/>
-            </a:pPr>
-            <a:r>
-              <a:rPr lang="en-US" sz="2200" b="1" dirty="0">
+          <p:cNvPr id="76" name="R6Time"/>
+          <p:cNvSpPr/>
+          <p:nvPr/>
+        </p:nvSpPr>
+        <p:spPr>
+          <a:xfrm>
+            <a:off x="6780000" y="5935000"/>
+            <a:ext cx="1300000" cy="260000"/>
+          </a:xfrm>
+          <a:prstGeom prst="rect">
+            <a:avLst/>
+          </a:prstGeom>
+          <a:noFill/>
+          <a:ln/>
+        </p:spPr>
+        <p:txBody>
+          <a:bodyPr wrap="square" lIns="0" tIns="0" rIns="0" bIns="0" rtlCol="0" anchor="ctr"/>
+          <a:lstStyle/>
+          <a:p>
+            <a:pPr marL="0" indent="0">
+              <a:buNone/>
+            </a:pPr>
+            <a:r>
+              <a:rPr lang="en-US" sz="1000" b="1" kern="0" spc="300" dirty="0">
+                <a:solidFill>
+                  <a:srgbClr val="B89000"/>
+                </a:solidFill>
+                <a:latin typeface="Calibri" pitchFamily="34" charset="0"/>
+              </a:rPr>
+              <a:t>2:15 AM ET</a:t>
+            </a:r>
+          </a:p>
+        </p:txBody>
+      </p:sp>
+      <p:sp>
+        <p:nvSpPr>
+          <p:cNvPr id="77" name="R6Text"/>
+          <p:cNvSpPr/>
+          <p:nvPr/>
+        </p:nvSpPr>
+        <p:spPr>
+          <a:xfrm>
+            <a:off x="6780000" y="6175000"/>
+            <a:ext cx="4750000" cy="280000"/>
+          </a:xfrm>
+          <a:prstGeom prst="rect">
+            <a:avLst/>
+          </a:prstGeom>
+          <a:noFill/>
+          <a:ln/>
+        </p:spPr>
+        <p:txBody>
+          <a:bodyPr wrap="square" lIns="0" tIns="0" rIns="0" bIns="0" rtlCol="0" anchor="t"/>
+          <a:lstStyle/>
+          <a:p>
+            <a:pPr marL="0" indent="0">
+              <a:buNone/>
+            </a:pPr>
+            <a:r>
+              <a:rPr lang="en-US" sz="1200" b="1" dirty="0">
                 <a:solidFill>
                   <a:srgbClr val="1B1B1B"/>
                 </a:solidFill>
                 <a:latin typeface="Calibri" pitchFamily="34" charset="0"/>
-                <a:ea typeface="Calibri" pitchFamily="34" charset="-122"/>
-                <a:cs typeface="Calibri" pitchFamily="34" charset="-120"/>
-              </a:rPr>
-              <a:t>1</a:t>
-            </a:r>
-            <a:endParaRPr lang="en-US" sz="2200" dirty="0"/>
-          </a:p>
-        </p:txBody>
-      </p:sp>
-      <p:sp>
-        <p:nvSpPr>
-          <p:cNvPr id="7" name="Text 5"/>
-          <p:cNvSpPr/>
-          <p:nvPr/>
-        </p:nvSpPr>
-        <p:spPr>
-          <a:xfrm>
-            <a:off x="1645920" y="3154680"/>
-            <a:ext cx="10058400" cy="411480"/>
-          </a:xfrm>
-          <a:prstGeom prst="rect">
-            <a:avLst/>
-          </a:prstGeom>
-          <a:noFill/>
-          <a:ln/>
-        </p:spPr>
-        <p:txBody>
-          <a:bodyPr wrap="square" lIns="0" tIns="0" rIns="0" bIns="0" rtlCol="0" anchor="ctr"/>
-          <a:lstStyle/>
-          <a:p>
-            <a:pPr indent="0" marL="0">
-              <a:buNone/>
-            </a:pPr>
-            <a:r>
-              <a:rPr lang="en-US" sz="1900" b="1" dirty="0">
-                <a:solidFill>
-                  <a:srgbClr val="FFFFFF"/>
-                </a:solidFill>
-                <a:latin typeface="Calibri" pitchFamily="34" charset="0"/>
-                <a:ea typeface="Calibri" pitchFamily="34" charset="-122"/>
-                <a:cs typeface="Calibri" pitchFamily="34" charset="-120"/>
-              </a:rPr>
-              <a:t>Approval to proceed with the pilot</a:t>
-            </a:r>
-            <a:endParaRPr lang="en-US" sz="1900" dirty="0"/>
-          </a:p>
-        </p:txBody>
-      </p:sp>
-      <p:sp>
-        <p:nvSpPr>
-          <p:cNvPr id="8" name="Text 6"/>
-          <p:cNvSpPr/>
-          <p:nvPr/>
-        </p:nvSpPr>
-        <p:spPr>
-          <a:xfrm>
-            <a:off x="1645920" y="3566160"/>
-            <a:ext cx="10058400" cy="365760"/>
-          </a:xfrm>
-          <a:prstGeom prst="rect">
-            <a:avLst/>
-          </a:prstGeom>
-          <a:noFill/>
-          <a:ln/>
-        </p:spPr>
-        <p:txBody>
-          <a:bodyPr wrap="square" lIns="0" tIns="0" rIns="0" bIns="0" rtlCol="0" anchor="t"/>
-          <a:lstStyle/>
-          <a:p>
-            <a:pPr indent="0" marL="0">
-              <a:buNone/>
-            </a:pPr>
-            <a:r>
-              <a:rPr lang="en-US" sz="1300" i="1" dirty="0">
-                <a:solidFill>
-                  <a:srgbClr val="FFFFFF"/>
-                </a:solidFill>
-                <a:latin typeface="Calibri" pitchFamily="34" charset="0"/>
-                <a:ea typeface="Calibri" pitchFamily="34" charset="-122"/>
-                <a:cs typeface="Calibri" pitchFamily="34" charset="-120"/>
-              </a:rPr>
-              <a:t>8–12 week build, then shadow operation before any emails go to engineers.</a:t>
-            </a:r>
-            <a:endParaRPr lang="en-US" sz="1300" dirty="0"/>
-          </a:p>
-        </p:txBody>
-      </p:sp>
-      <p:sp>
-        <p:nvSpPr>
-          <p:cNvPr id="9" name="Shape 7"/>
-          <p:cNvSpPr/>
-          <p:nvPr/>
-        </p:nvSpPr>
-        <p:spPr>
-          <a:xfrm>
-            <a:off x="822960" y="4114800"/>
-            <a:ext cx="594360" cy="594360"/>
-          </a:xfrm>
-          <a:prstGeom prst="ellipse">
-            <a:avLst/>
-          </a:prstGeom>
-          <a:solidFill>
-            <a:srgbClr val="FFCD41"/>
-          </a:solidFill>
-          <a:ln w="12700">
-            <a:solidFill>
-              <a:srgbClr val="FFCD41"/>
-            </a:solidFill>
-            <a:prstDash val="solid"/>
-          </a:ln>
-        </p:spPr>
-      </p:sp>
-      <p:sp>
-        <p:nvSpPr>
-          <p:cNvPr id="10" name="Text 8"/>
-          <p:cNvSpPr/>
-          <p:nvPr/>
-        </p:nvSpPr>
-        <p:spPr>
-          <a:xfrm>
-            <a:off x="822960" y="4114800"/>
-            <a:ext cx="594360" cy="594360"/>
-          </a:xfrm>
-          <a:prstGeom prst="rect">
-            <a:avLst/>
-          </a:prstGeom>
-          <a:noFill/>
-          <a:ln/>
-        </p:spPr>
-        <p:txBody>
-          <a:bodyPr wrap="square" lIns="0" tIns="0" rIns="0" bIns="0" rtlCol="0" anchor="ctr"/>
-          <a:lstStyle/>
-          <a:p>
-            <a:pPr algn="ctr" indent="0" marL="0">
-              <a:buNone/>
-            </a:pPr>
-            <a:r>
-              <a:rPr lang="en-US" sz="2200" b="1" dirty="0">
-                <a:solidFill>
-                  <a:srgbClr val="1B1B1B"/>
-                </a:solidFill>
-                <a:latin typeface="Calibri" pitchFamily="34" charset="0"/>
-                <a:ea typeface="Calibri" pitchFamily="34" charset="-122"/>
-                <a:cs typeface="Calibri" pitchFamily="34" charset="-120"/>
-              </a:rPr>
-              <a:t>2</a:t>
-            </a:r>
-            <a:endParaRPr lang="en-US" sz="2200" dirty="0"/>
-          </a:p>
-        </p:txBody>
-      </p:sp>
-      <p:sp>
-        <p:nvSpPr>
-          <p:cNvPr id="11" name="Text 9"/>
-          <p:cNvSpPr/>
-          <p:nvPr/>
-        </p:nvSpPr>
-        <p:spPr>
-          <a:xfrm>
-            <a:off x="1645920" y="4069080"/>
-            <a:ext cx="10058400" cy="411480"/>
-          </a:xfrm>
-          <a:prstGeom prst="rect">
-            <a:avLst/>
-          </a:prstGeom>
-          <a:noFill/>
-          <a:ln/>
-        </p:spPr>
-        <p:txBody>
-          <a:bodyPr wrap="square" lIns="0" tIns="0" rIns="0" bIns="0" rtlCol="0" anchor="ctr"/>
-          <a:lstStyle/>
-          <a:p>
-            <a:pPr indent="0" marL="0">
-              <a:buNone/>
-            </a:pPr>
-            <a:r>
-              <a:rPr lang="en-US" sz="1900" b="1" dirty="0">
-                <a:solidFill>
-                  <a:srgbClr val="FFFFFF"/>
-                </a:solidFill>
-                <a:latin typeface="Calibri" pitchFamily="34" charset="0"/>
-                <a:ea typeface="Calibri" pitchFamily="34" charset="-122"/>
-                <a:cs typeface="Calibri" pitchFamily="34" charset="-120"/>
-              </a:rPr>
-              <a:t>Model Risk Management engagement</a:t>
-            </a:r>
-            <a:endParaRPr lang="en-US" sz="1900" dirty="0"/>
-          </a:p>
-        </p:txBody>
-      </p:sp>
-      <p:sp>
-        <p:nvSpPr>
-          <p:cNvPr id="12" name="Text 10"/>
-          <p:cNvSpPr/>
-          <p:nvPr/>
-        </p:nvSpPr>
-        <p:spPr>
-          <a:xfrm>
-            <a:off x="1645920" y="4480560"/>
-            <a:ext cx="10058400" cy="365760"/>
-          </a:xfrm>
-          <a:prstGeom prst="rect">
-            <a:avLst/>
-          </a:prstGeom>
-          <a:noFill/>
-          <a:ln/>
-        </p:spPr>
-        <p:txBody>
-          <a:bodyPr wrap="square" lIns="0" tIns="0" rIns="0" bIns="0" rtlCol="0" anchor="t"/>
-          <a:lstStyle/>
-          <a:p>
-            <a:pPr indent="0" marL="0">
-              <a:buNone/>
-            </a:pPr>
-            <a:r>
-              <a:rPr lang="en-US" sz="1300" i="1" dirty="0">
-                <a:solidFill>
-                  <a:srgbClr val="FFFFFF"/>
-                </a:solidFill>
-                <a:latin typeface="Calibri" pitchFamily="34" charset="0"/>
-                <a:ea typeface="Calibri" pitchFamily="34" charset="-122"/>
-                <a:cs typeface="Calibri" pitchFamily="34" charset="-120"/>
-              </a:rPr>
-              <a:t>Early review so we land on agreed safeguards before launch.</a:t>
-            </a:r>
-            <a:endParaRPr lang="en-US" sz="1300" dirty="0"/>
-          </a:p>
-        </p:txBody>
-      </p:sp>
-      <p:sp>
-        <p:nvSpPr>
-          <p:cNvPr id="13" name="Shape 11"/>
-          <p:cNvSpPr/>
-          <p:nvPr/>
-        </p:nvSpPr>
-        <p:spPr>
-          <a:xfrm>
-            <a:off x="822960" y="5029200"/>
-            <a:ext cx="594360" cy="594360"/>
-          </a:xfrm>
-          <a:prstGeom prst="ellipse">
-            <a:avLst/>
-          </a:prstGeom>
-          <a:solidFill>
-            <a:srgbClr val="FFCD41"/>
-          </a:solidFill>
-          <a:ln w="12700">
-            <a:solidFill>
-              <a:srgbClr val="FFCD41"/>
-            </a:solidFill>
-            <a:prstDash val="solid"/>
-          </a:ln>
-        </p:spPr>
-      </p:sp>
-      <p:sp>
-        <p:nvSpPr>
-          <p:cNvPr id="14" name="Text 12"/>
-          <p:cNvSpPr/>
-          <p:nvPr/>
-        </p:nvSpPr>
-        <p:spPr>
-          <a:xfrm>
-            <a:off x="822960" y="5029200"/>
-            <a:ext cx="594360" cy="594360"/>
-          </a:xfrm>
-          <a:prstGeom prst="rect">
-            <a:avLst/>
-          </a:prstGeom>
-          <a:noFill/>
-          <a:ln/>
-        </p:spPr>
-        <p:txBody>
-          <a:bodyPr wrap="square" lIns="0" tIns="0" rIns="0" bIns="0" rtlCol="0" anchor="ctr"/>
-          <a:lstStyle/>
-          <a:p>
-            <a:pPr algn="ctr" indent="0" marL="0">
-              <a:buNone/>
-            </a:pPr>
-            <a:r>
-              <a:rPr lang="en-US" sz="2200" b="1" dirty="0">
-                <a:solidFill>
-                  <a:srgbClr val="1B1B1B"/>
-                </a:solidFill>
-                <a:latin typeface="Calibri" pitchFamily="34" charset="0"/>
-                <a:ea typeface="Calibri" pitchFamily="34" charset="-122"/>
-                <a:cs typeface="Calibri" pitchFamily="34" charset="-120"/>
-              </a:rPr>
-              <a:t>3</a:t>
-            </a:r>
-            <a:endParaRPr lang="en-US" sz="2200" dirty="0"/>
-          </a:p>
-        </p:txBody>
-      </p:sp>
-      <p:sp>
-        <p:nvSpPr>
-          <p:cNvPr id="15" name="Text 13"/>
-          <p:cNvSpPr/>
-          <p:nvPr/>
-        </p:nvSpPr>
-        <p:spPr>
-          <a:xfrm>
-            <a:off x="1645920" y="4983480"/>
-            <a:ext cx="10058400" cy="411480"/>
-          </a:xfrm>
-          <a:prstGeom prst="rect">
-            <a:avLst/>
-          </a:prstGeom>
-          <a:noFill/>
-          <a:ln/>
-        </p:spPr>
-        <p:txBody>
-          <a:bodyPr wrap="square" lIns="0" tIns="0" rIns="0" bIns="0" rtlCol="0" anchor="ctr"/>
-          <a:lstStyle/>
-          <a:p>
-            <a:pPr indent="0" marL="0">
-              <a:buNone/>
-            </a:pPr>
-            <a:r>
-              <a:rPr lang="en-US" sz="1900" b="1" dirty="0">
-                <a:solidFill>
-                  <a:srgbClr val="FFFFFF"/>
-                </a:solidFill>
-                <a:latin typeface="Calibri" pitchFamily="34" charset="0"/>
-                <a:ea typeface="Calibri" pitchFamily="34" charset="-122"/>
-                <a:cs typeface="Calibri" pitchFamily="34" charset="-120"/>
-              </a:rPr>
-              <a:t>Read-only database access</a:t>
-            </a:r>
-            <a:endParaRPr lang="en-US" sz="1900" dirty="0"/>
-          </a:p>
-        </p:txBody>
-      </p:sp>
-      <p:sp>
-        <p:nvSpPr>
-          <p:cNvPr id="16" name="Text 14"/>
-          <p:cNvSpPr/>
-          <p:nvPr/>
-        </p:nvSpPr>
-        <p:spPr>
-          <a:xfrm>
-            <a:off x="1645920" y="5394960"/>
-            <a:ext cx="10058400" cy="365760"/>
-          </a:xfrm>
-          <a:prstGeom prst="rect">
-            <a:avLst/>
-          </a:prstGeom>
-          <a:noFill/>
-          <a:ln/>
-        </p:spPr>
-        <p:txBody>
-          <a:bodyPr wrap="square" lIns="0" tIns="0" rIns="0" bIns="0" rtlCol="0" anchor="t"/>
-          <a:lstStyle/>
-          <a:p>
-            <a:pPr indent="0" marL="0">
-              <a:buNone/>
-            </a:pPr>
-            <a:r>
-              <a:rPr lang="en-US" sz="1300" i="1" dirty="0">
-                <a:solidFill>
-                  <a:srgbClr val="FFFFFF"/>
-                </a:solidFill>
-                <a:latin typeface="Calibri" pitchFamily="34" charset="0"/>
-                <a:ea typeface="Calibri" pitchFamily="34" charset="-122"/>
-                <a:cs typeface="Calibri" pitchFamily="34" charset="-120"/>
-              </a:rPr>
-              <a:t>A scoped, read-only service account so the system can examine execution logs.</a:t>
-            </a:r>
-            <a:endParaRPr lang="en-US" sz="1300" dirty="0"/>
-          </a:p>
-        </p:txBody>
-      </p:sp>
-      <p:sp>
-        <p:nvSpPr>
-          <p:cNvPr id="17" name="Text 15"/>
-          <p:cNvSpPr/>
-          <p:nvPr/>
-        </p:nvSpPr>
-        <p:spPr>
-          <a:xfrm>
-            <a:off x="822960" y="6309360"/>
-            <a:ext cx="10058400" cy="274320"/>
-          </a:xfrm>
-          <a:prstGeom prst="rect">
-            <a:avLst/>
-          </a:prstGeom>
-          <a:noFill/>
-          <a:ln/>
-        </p:spPr>
-        <p:txBody>
-          <a:bodyPr wrap="square" lIns="0" tIns="0" rIns="0" bIns="0" rtlCol="0" anchor="ctr"/>
-          <a:lstStyle/>
-          <a:p>
-            <a:pPr indent="0" marL="0">
-              <a:buNone/>
-            </a:pPr>
-            <a:r>
-              <a:rPr lang="en-US" sz="1100" spc="400" kern="0" dirty="0">
-                <a:solidFill>
-                  <a:srgbClr val="FFCD41"/>
-                </a:solidFill>
-                <a:latin typeface="Calibri" pitchFamily="34" charset="0"/>
-                <a:ea typeface="Calibri" pitchFamily="34" charset="-122"/>
-                <a:cs typeface="Calibri" pitchFamily="34" charset="-120"/>
-              </a:rPr>
-              <a:t>Wells Fargo  ·  L2 Support Automation</a:t>
-            </a:r>
-            <a:endParaRPr lang="en-US" sz="1100" dirty="0"/>
+              </a:rPr>
+              <a:t>Users updated within 15 minutes  —  any time, any region.</a:t>
+            </a:r>
           </a:p>
         </p:txBody>
       </p:sp>
@@ -9631,4 +8438,299 @@
     </a:ext>
   </a:extLst>
 </a:theme>
+</file>
+
+<file path=ppt/theme/theme2.xml><?xml version="1.0" encoding="utf-8"?>
+<a:theme xmlns:a="http://schemas.openxmlformats.org/drawingml/2006/main" name="Office Theme">
+  <a:themeElements>
+    <a:clrScheme name="Office">
+      <a:dk1>
+        <a:sysClr val="windowText" lastClr="000000"/>
+      </a:dk1>
+      <a:lt1>
+        <a:sysClr val="window" lastClr="FFFFFF"/>
+      </a:lt1>
+      <a:dk2>
+        <a:srgbClr val="44546A"/>
+      </a:dk2>
+      <a:lt2>
+        <a:srgbClr val="E7E6E6"/>
+      </a:lt2>
+      <a:accent1>
+        <a:srgbClr val="4472C4"/>
+      </a:accent1>
+      <a:accent2>
+        <a:srgbClr val="ED7D31"/>
+      </a:accent2>
+      <a:accent3>
+        <a:srgbClr val="A5A5A5"/>
+      </a:accent3>
+      <a:accent4>
+        <a:srgbClr val="FFC000"/>
+      </a:accent4>
+      <a:accent5>
+        <a:srgbClr val="5B9BD5"/>
+      </a:accent5>
+      <a:accent6>
+        <a:srgbClr val="70AD47"/>
+      </a:accent6>
+      <a:hlink>
+        <a:srgbClr val="0563C1"/>
+      </a:hlink>
+      <a:folHlink>
+        <a:srgbClr val="954F72"/>
+      </a:folHlink>
+    </a:clrScheme>
+    <a:fontScheme name="Office">
+      <a:majorFont>
+        <a:latin typeface="Calibri Light" panose="020F0302020204030204"/>
+        <a:ea typeface=""/>
+        <a:cs typeface=""/>
+        <a:font script="Jpan" typeface="游ゴシック Light"/>
+        <a:font script="Hang" typeface="맑은 고딕"/>
+        <a:font script="Hans" typeface="等线 Light"/>
+        <a:font script="Hant" typeface="新細明體"/>
+        <a:font script="Arab" typeface="Times New Roman"/>
+        <a:font script="Hebr" typeface="Times New Roman"/>
+        <a:font script="Thai" typeface="Angsana New"/>
+        <a:font script="Ethi" typeface="Nyala"/>
+        <a:font script="Beng" typeface="Vrinda"/>
+        <a:font script="Gujr" typeface="Shruti"/>
+        <a:font script="Khmr" typeface="MoolBoran"/>
+        <a:font script="Knda" typeface="Tunga"/>
+        <a:font script="Guru" typeface="Raavi"/>
+        <a:font script="Cans" typeface="Euphemia"/>
+        <a:font script="Cher" typeface="Plantagenet Cherokee"/>
+        <a:font script="Yiii" typeface="Microsoft Yi Baiti"/>
+        <a:font script="Tibt" typeface="Microsoft Himalaya"/>
+        <a:font script="Thaa" typeface="MV Boli"/>
+        <a:font script="Deva" typeface="Mangal"/>
+        <a:font script="Telu" typeface="Gautami"/>
+        <a:font script="Taml" typeface="Latha"/>
+        <a:font script="Syrc" typeface="Estrangelo Edessa"/>
+        <a:font script="Orya" typeface="Kalinga"/>
+        <a:font script="Mlym" typeface="Kartika"/>
+        <a:font script="Laoo" typeface="DokChampa"/>
+        <a:font script="Sinh" typeface="Iskoola Pota"/>
+        <a:font script="Mong" typeface="Mongolian Baiti"/>
+        <a:font script="Viet" typeface="Times New Roman"/>
+        <a:font script="Uigh" typeface="Microsoft Uighur"/>
+        <a:font script="Geor" typeface="Sylfaen"/>
+        <a:font script="Armn" typeface="Arial"/>
+        <a:font script="Bugi" typeface="Leelawadee UI"/>
+        <a:font script="Bopo" typeface="Microsoft JhengHei"/>
+        <a:font script="Java" typeface="Javanese Text"/>
+        <a:font script="Lisu" typeface="Segoe UI"/>
+        <a:font script="Mymr" typeface="Myanmar Text"/>
+        <a:font script="Nkoo" typeface="Ebrima"/>
+        <a:font script="Olck" typeface="Nirmala UI"/>
+        <a:font script="Osma" typeface="Ebrima"/>
+        <a:font script="Phag" typeface="Phagspa"/>
+        <a:font script="Syrn" typeface="Estrangelo Edessa"/>
+        <a:font script="Syrj" typeface="Estrangelo Edessa"/>
+        <a:font script="Syre" typeface="Estrangelo Edessa"/>
+        <a:font script="Sora" typeface="Nirmala UI"/>
+        <a:font script="Tale" typeface="Microsoft Tai Le"/>
+        <a:font script="Talu" typeface="Microsoft New Tai Lue"/>
+        <a:font script="Tfng" typeface="Ebrima"/>
+      </a:majorFont>
+      <a:minorFont>
+        <a:latin typeface="Calibri" panose="020F0502020204030204"/>
+        <a:ea typeface=""/>
+        <a:cs typeface=""/>
+        <a:font script="Jpan" typeface="游ゴシック"/>
+        <a:font script="Hang" typeface="맑은 고딕"/>
+        <a:font script="Hans" typeface="等线"/>
+        <a:font script="Hant" typeface="新細明體"/>
+        <a:font script="Arab" typeface="Arial"/>
+        <a:font script="Hebr" typeface="Arial"/>
+        <a:font script="Thai" typeface="Cordia New"/>
+        <a:font script="Ethi" typeface="Nyala"/>
+        <a:font script="Beng" typeface="Vrinda"/>
+        <a:font script="Gujr" typeface="Shruti"/>
+        <a:font script="Khmr" typeface="DaunPenh"/>
+        <a:font script="Knda" typeface="Tunga"/>
+        <a:font script="Guru" typeface="Raavi"/>
+        <a:font script="Cans" typeface="Euphemia"/>
+        <a:font script="Cher" typeface="Plantagenet Cherokee"/>
+        <a:font script="Yiii" typeface="Microsoft Yi Baiti"/>
+        <a:font script="Tibt" typeface="Microsoft Himalaya"/>
+        <a:font script="Thaa" typeface="MV Boli"/>
+        <a:font script="Deva" typeface="Mangal"/>
+        <a:font script="Telu" typeface="Gautami"/>
+        <a:font script="Taml" typeface="Latha"/>
+        <a:font script="Syrc" typeface="Estrangelo Edessa"/>
+        <a:font script="Orya" typeface="Kalinga"/>
+        <a:font script="Mlym" typeface="Kartika"/>
+        <a:font script="Laoo" typeface="DokChampa"/>
+        <a:font script="Sinh" typeface="Iskoola Pota"/>
+        <a:font script="Mong" typeface="Mongolian Baiti"/>
+        <a:font script="Viet" typeface="Arial"/>
+        <a:font script="Uigh" typeface="Microsoft Uighur"/>
+        <a:font script="Geor" typeface="Sylfaen"/>
+        <a:font script="Armn" typeface="Arial"/>
+        <a:font script="Bugi" typeface="Leelawadee UI"/>
+        <a:font script="Bopo" typeface="Microsoft JhengHei"/>
+        <a:font script="Java" typeface="Javanese Text"/>
+        <a:font script="Lisu" typeface="Segoe UI"/>
+        <a:font script="Mymr" typeface="Myanmar Text"/>
+        <a:font script="Nkoo" typeface="Ebrima"/>
+        <a:font script="Olck" typeface="Nirmala UI"/>
+        <a:font script="Osma" typeface="Ebrima"/>
+        <a:font script="Phag" typeface="Phagspa"/>
+        <a:font script="Syrn" typeface="Estrangelo Edessa"/>
+        <a:font script="Syrj" typeface="Estrangelo Edessa"/>
+        <a:font script="Syre" typeface="Estrangelo Edessa"/>
+        <a:font script="Sora" typeface="Nirmala UI"/>
+        <a:font script="Tale" typeface="Microsoft Tai Le"/>
+        <a:font script="Talu" typeface="Microsoft New Tai Lue"/>
+        <a:font script="Tfng" typeface="Ebrima"/>
+      </a:minorFont>
+    </a:fontScheme>
+    <a:fmtScheme name="Office">
+      <a:fillStyleLst>
+        <a:solidFill>
+          <a:schemeClr val="phClr"/>
+        </a:solidFill>
+        <a:gradFill rotWithShape="1">
+          <a:gsLst>
+            <a:gs pos="0">
+              <a:schemeClr val="phClr">
+                <a:lumMod val="110000"/>
+                <a:satMod val="105000"/>
+                <a:tint val="67000"/>
+              </a:schemeClr>
+            </a:gs>
+            <a:gs pos="50000">
+              <a:schemeClr val="phClr">
+                <a:lumMod val="105000"/>
+                <a:satMod val="103000"/>
+                <a:tint val="73000"/>
+              </a:schemeClr>
+            </a:gs>
+            <a:gs pos="100000">
+              <a:schemeClr val="phClr">
+                <a:lumMod val="105000"/>
+                <a:satMod val="109000"/>
+                <a:tint val="81000"/>
+              </a:schemeClr>
+            </a:gs>
+          </a:gsLst>
+          <a:lin ang="5400000" scaled="0"/>
+        </a:gradFill>
+        <a:gradFill rotWithShape="1">
+          <a:gsLst>
+            <a:gs pos="0">
+              <a:schemeClr val="phClr">
+                <a:satMod val="103000"/>
+                <a:lumMod val="102000"/>
+                <a:tint val="94000"/>
+              </a:schemeClr>
+            </a:gs>
+            <a:gs pos="50000">
+              <a:schemeClr val="phClr">
+                <a:satMod val="110000"/>
+                <a:lumMod val="100000"/>
+                <a:shade val="100000"/>
+              </a:schemeClr>
+            </a:gs>
+            <a:gs pos="100000">
+              <a:schemeClr val="phClr">
+                <a:lumMod val="99000"/>
+                <a:satMod val="120000"/>
+                <a:shade val="78000"/>
+              </a:schemeClr>
+            </a:gs>
+          </a:gsLst>
+          <a:lin ang="5400000" scaled="0"/>
+        </a:gradFill>
+      </a:fillStyleLst>
+      <a:lnStyleLst>
+        <a:ln w="6350" cap="flat" cmpd="sng" algn="ctr">
+          <a:solidFill>
+            <a:schemeClr val="phClr"/>
+          </a:solidFill>
+          <a:prstDash val="solid"/>
+          <a:miter lim="800000"/>
+        </a:ln>
+        <a:ln w="12700" cap="flat" cmpd="sng" algn="ctr">
+          <a:solidFill>
+            <a:schemeClr val="phClr"/>
+          </a:solidFill>
+          <a:prstDash val="solid"/>
+          <a:miter lim="800000"/>
+        </a:ln>
+        <a:ln w="19050" cap="flat" cmpd="sng" algn="ctr">
+          <a:solidFill>
+            <a:schemeClr val="phClr"/>
+          </a:solidFill>
+          <a:prstDash val="solid"/>
+          <a:miter lim="800000"/>
+        </a:ln>
+      </a:lnStyleLst>
+      <a:effectStyleLst>
+        <a:effectStyle>
+          <a:effectLst/>
+        </a:effectStyle>
+        <a:effectStyle>
+          <a:effectLst/>
+        </a:effectStyle>
+        <a:effectStyle>
+          <a:effectLst>
+            <a:outerShdw blurRad="57150" dist="19050" dir="5400000" algn="ctr" rotWithShape="0">
+              <a:srgbClr val="000000">
+                <a:alpha val="63000"/>
+              </a:srgbClr>
+            </a:outerShdw>
+          </a:effectLst>
+        </a:effectStyle>
+      </a:effectStyleLst>
+      <a:bgFillStyleLst>
+        <a:solidFill>
+          <a:schemeClr val="phClr"/>
+        </a:solidFill>
+        <a:solidFill>
+          <a:schemeClr val="phClr">
+            <a:tint val="95000"/>
+            <a:satMod val="170000"/>
+          </a:schemeClr>
+        </a:solidFill>
+        <a:gradFill rotWithShape="1">
+          <a:gsLst>
+            <a:gs pos="0">
+              <a:schemeClr val="phClr">
+                <a:tint val="93000"/>
+                <a:satMod val="150000"/>
+                <a:shade val="98000"/>
+                <a:lumMod val="102000"/>
+              </a:schemeClr>
+            </a:gs>
+            <a:gs pos="50000">
+              <a:schemeClr val="phClr">
+                <a:tint val="98000"/>
+                <a:satMod val="130000"/>
+                <a:shade val="90000"/>
+                <a:lumMod val="103000"/>
+              </a:schemeClr>
+            </a:gs>
+            <a:gs pos="100000">
+              <a:schemeClr val="phClr">
+                <a:shade val="63000"/>
+                <a:satMod val="120000"/>
+              </a:schemeClr>
+            </a:gs>
+          </a:gsLst>
+          <a:lin ang="5400000" scaled="0"/>
+        </a:gradFill>
+      </a:bgFillStyleLst>
+    </a:fmtScheme>
+  </a:themeElements>
+  <a:objectDefaults/>
+  <a:extraClrSchemeLst/>
+  <a:extLst>
+    <a:ext uri="{05A4C25C-085E-4340-85A3-A5531E510DB2}">
+      <thm15:themeFamily xmlns:thm15="http://schemas.microsoft.com/office/thememl/2012/main" name="Office Theme" id="{62F939B6-93AF-4DB8-9C6B-D6C7DFDC589F}" vid="{4A3C46E8-61CC-4603-A589-7422A47A8E4A}"/>
+    </a:ext>
+  </a:extLst>
+</a:theme>
 </file>
--- a/ppt/ETL_Incident_Diagnosis_Deck.pptx
+++ b/ppt/ETL_Incident_Diagnosis_Deck.pptx
@@ -9,11 +9,12 @@
   </p:notesMasterIdLst>
   <p:sldIdLst>
     <p:sldId id="256" r:id="rId2"/>
-    <p:sldId id="257" r:id="rId3"/>
-    <p:sldId id="258" r:id="rId4"/>
-    <p:sldId id="259" r:id="rId5"/>
-    <p:sldId id="264" r:id="rId15"/>
-    <p:sldId id="260" r:id="rId6"/>
+    <p:sldId id="265" r:id="rId3"/>
+    <p:sldId id="257" r:id="rId4"/>
+    <p:sldId id="258" r:id="rId5"/>
+    <p:sldId id="259" r:id="rId6"/>
+    <p:sldId id="264" r:id="rId7"/>
+    <p:sldId id="260" r:id="rId8"/>
     <p:sldId id="263" r:id="rId9"/>
   </p:sldIdLst>
   <p:sldSz cx="12192000" cy="6858000"/>
@@ -392,7 +393,7 @@
           <a:p>
             <a:fld id="{F7021451-1387-4CA6-816F-3879F97B5CBC}" type="slidenum">
               <a:rPr lang="en-US"/>
-              <a:t>2</a:t>
+              <a:t>3</a:t>
             </a:fld>
             <a:endParaRPr lang="en-US"/>
           </a:p>
@@ -476,7 +477,7 @@
           <a:p>
             <a:fld id="{F7021451-1387-4CA6-816F-3879F97B5CBC}" type="slidenum">
               <a:rPr lang="en-US"/>
-              <a:t>3</a:t>
+              <a:t>4</a:t>
             </a:fld>
             <a:endParaRPr lang="en-US"/>
           </a:p>
@@ -560,7 +561,7 @@
           <a:p>
             <a:fld id="{F7021451-1387-4CA6-816F-3879F97B5CBC}" type="slidenum">
               <a:rPr lang="en-US"/>
-              <a:t>4</a:t>
+              <a:t>5</a:t>
             </a:fld>
             <a:endParaRPr lang="en-US"/>
           </a:p>
@@ -644,7 +645,7 @@
           <a:p>
             <a:fld id="{F7021451-1387-4CA6-816F-3879F97B5CBC}" type="slidenum">
               <a:rPr lang="en-US"/>
-              <a:t>5</a:t>
+              <a:t>7</a:t>
             </a:fld>
             <a:endParaRPr lang="en-US"/>
           </a:p>
@@ -663,7 +664,7 @@
 </p:notes>
 </file>
 
-<file path=ppt/notesSlides/notesSlide8.xml><?xml version="1.0" encoding="utf-8"?>
+<file path=ppt/notesSlides/notesSlide6.xml><?xml version="1.0" encoding="utf-8"?>
 <p:notes xmlns:a="http://schemas.openxmlformats.org/drawingml/2006/main" xmlns:r="http://schemas.openxmlformats.org/officeDocument/2006/relationships" xmlns:p="http://schemas.openxmlformats.org/presentationml/2006/main">
   <p:cSld>
     <p:spTree>
@@ -1142,7 +1143,7 @@
                 <a:ea typeface="Calibri" pitchFamily="34" charset="-122"/>
                 <a:cs typeface="Calibri" pitchFamily="34" charset="-120"/>
               </a:rPr>
-              <a:t>WELLS FARGO  ·  L2 SUPPORT AUTOMATION</a:t>
+              <a:t>ENGINEERING REIMAGINED  ·  PRODUCTION MONITORING</a:t>
             </a:r>
             <a:endParaRPr lang="en-US" sz="1400" dirty="0"/>
           </a:p>
@@ -1261,7 +1262,7 @@
       </p:grpSpPr>
       <p:sp>
         <p:nvSpPr>
-          <p:cNvPr id="2" name="Shape 0"/>
+          <p:cNvPr id="2" name="TopBar"/>
           <p:cNvSpPr/>
           <p:nvPr/>
         </p:nvSpPr>
@@ -1286,7 +1287,7 @@
       </p:sp>
       <p:sp>
         <p:nvSpPr>
-          <p:cNvPr id="3" name="Text 1"/>
+          <p:cNvPr id="3" name="Eyebrow"/>
           <p:cNvSpPr/>
           <p:nvPr/>
         </p:nvSpPr>
@@ -1314,57 +1315,87 @@
                   <a:srgbClr val="D71E28"/>
                 </a:solidFill>
                 <a:latin typeface="Calibri" pitchFamily="34" charset="0"/>
-                <a:ea typeface="Calibri" pitchFamily="34" charset="-122"/>
-                <a:cs typeface="Calibri" pitchFamily="34" charset="-120"/>
-              </a:rPr>
-              <a:t>THE PROBLEM</a:t>
-            </a:r>
-            <a:endParaRPr lang="en-US" sz="1100" dirty="0"/>
-          </a:p>
-        </p:txBody>
-      </p:sp>
-      <p:sp>
-        <p:nvSpPr>
-          <p:cNvPr id="4" name="Text 2"/>
-          <p:cNvSpPr/>
-          <p:nvPr/>
-        </p:nvSpPr>
-        <p:spPr>
-          <a:xfrm>
-            <a:off x="731520" y="914400"/>
-            <a:ext cx="10698480" cy="914400"/>
-          </a:xfrm>
-          <a:prstGeom prst="rect">
-            <a:avLst/>
-          </a:prstGeom>
-          <a:noFill/>
-          <a:ln/>
-        </p:spPr>
-        <p:txBody>
-          <a:bodyPr wrap="square" lIns="0" tIns="0" rIns="0" bIns="0" rtlCol="0" anchor="ctr"/>
-          <a:lstStyle/>
-          <a:p>
-            <a:pPr marL="0" indent="0">
-              <a:buNone/>
-            </a:pPr>
-            <a:r>
-              <a:rPr lang="en-US" sz="3600" b="1" dirty="0">
+              </a:rPr>
+              <a:t>WHERE THIS FITS</a:t>
+            </a:r>
+          </a:p>
+        </p:txBody>
+      </p:sp>
+      <p:sp>
+        <p:nvSpPr>
+          <p:cNvPr id="4" name="Title"/>
+          <p:cNvSpPr/>
+          <p:nvPr/>
+        </p:nvSpPr>
+        <p:spPr>
+          <a:xfrm>
+            <a:off x="731520" y="900000"/>
+            <a:ext cx="10698480" cy="500000"/>
+          </a:xfrm>
+          <a:prstGeom prst="rect">
+            <a:avLst/>
+          </a:prstGeom>
+          <a:noFill/>
+          <a:ln/>
+        </p:spPr>
+        <p:txBody>
+          <a:bodyPr wrap="square" lIns="0" tIns="0" rIns="0" bIns="0" rtlCol="0" anchor="ctr"/>
+          <a:lstStyle/>
+          <a:p>
+            <a:pPr marL="0" indent="0">
+              <a:buNone/>
+            </a:pPr>
+            <a:r>
+              <a:rPr lang="en-US" sz="3200" b="1" dirty="0">
                 <a:solidFill>
                   <a:srgbClr val="1B1B1B"/>
                 </a:solidFill>
                 <a:latin typeface="Calibri" pitchFamily="34" charset="0"/>
-                <a:ea typeface="Calibri" pitchFamily="34" charset="-122"/>
-                <a:cs typeface="Calibri" pitchFamily="34" charset="-120"/>
-              </a:rPr>
-              <a:t>Nightly job failures hit hardest at 2 AM.</a:t>
-            </a:r>
-            <a:endParaRPr lang="en-US" sz="3600" dirty="0"/>
-          </a:p>
-        </p:txBody>
-      </p:sp>
-      <p:sp>
-        <p:nvSpPr>
-          <p:cNvPr id="5" name="Text 3"/>
+              </a:rPr>
+              <a:t>Production Monitoring</a:t>
+            </a:r>
+          </a:p>
+        </p:txBody>
+      </p:sp>
+      <p:sp>
+        <p:nvSpPr>
+          <p:cNvPr id="5" name="Subtitle"/>
+          <p:cNvSpPr/>
+          <p:nvPr/>
+        </p:nvSpPr>
+        <p:spPr>
+          <a:xfrm>
+            <a:off x="731520" y="1450000"/>
+            <a:ext cx="10698480" cy="320000"/>
+          </a:xfrm>
+          <a:prstGeom prst="rect">
+            <a:avLst/>
+          </a:prstGeom>
+          <a:noFill/>
+          <a:ln/>
+        </p:spPr>
+        <p:txBody>
+          <a:bodyPr wrap="square" lIns="0" tIns="0" rIns="0" bIns="0" rtlCol="0" anchor="ctr"/>
+          <a:lstStyle/>
+          <a:p>
+            <a:pPr marL="0" indent="0">
+              <a:buNone/>
+            </a:pPr>
+            <a:r>
+              <a:rPr lang="en-US" sz="1400" dirty="0">
+                <a:solidFill>
+                  <a:srgbClr val="4A4A4A"/>
+                </a:solidFill>
+                <a:latin typeface="Calibri" pitchFamily="34" charset="0"/>
+              </a:rPr>
+              <a:t>Production Monitoring is one of five focus areas in the Engineering Reimagined initiative. </a:t>
+            </a:r>
+          </a:p>
+        </p:txBody>
+      </p:sp>
+      <p:sp>
+        <p:nvSpPr>
+          <p:cNvPr id="6" name="PageNum"/>
           <p:cNvSpPr/>
           <p:nvPr/>
         </p:nvSpPr>
@@ -1392,347 +1423,56 @@
                   <a:srgbClr val="8A8A8A"/>
                 </a:solidFill>
                 <a:latin typeface="Calibri" pitchFamily="34" charset="0"/>
-                <a:ea typeface="Calibri" pitchFamily="34" charset="-122"/>
-                <a:cs typeface="Calibri" pitchFamily="34" charset="-120"/>
-              </a:rPr>
-              <a:t>2 / 7</a:t>
-            </a:r>
-            <a:endParaRPr lang="en-US" sz="900" dirty="0"/>
-          </a:p>
-        </p:txBody>
-      </p:sp>
-      <p:sp>
-        <p:nvSpPr>
-          <p:cNvPr id="6" name="Text 4"/>
-          <p:cNvSpPr/>
-          <p:nvPr/>
-        </p:nvSpPr>
-        <p:spPr>
-          <a:xfrm>
-            <a:off x="731520" y="2011680"/>
-            <a:ext cx="5212080" cy="457200"/>
-          </a:xfrm>
-          <a:prstGeom prst="rect">
-            <a:avLst/>
-          </a:prstGeom>
-          <a:noFill/>
-          <a:ln/>
-        </p:spPr>
-        <p:txBody>
-          <a:bodyPr wrap="square" lIns="0" tIns="0" rIns="0" bIns="0" rtlCol="0" anchor="ctr"/>
-          <a:lstStyle/>
-          <a:p>
-            <a:pPr marL="0" indent="0">
-              <a:buNone/>
-            </a:pPr>
-            <a:r>
-              <a:rPr lang="en-US" sz="1900" b="1" dirty="0">
-                <a:solidFill>
-                  <a:srgbClr val="1B1B1B"/>
-                </a:solidFill>
-                <a:latin typeface="Calibri" pitchFamily="34" charset="0"/>
-                <a:ea typeface="Calibri" pitchFamily="34" charset="-122"/>
-                <a:cs typeface="Calibri" pitchFamily="34" charset="-120"/>
-              </a:rPr>
-              <a:t>Jobs run nightly. They fail nightly.</a:t>
-            </a:r>
-            <a:endParaRPr lang="en-US" sz="1900" dirty="0"/>
-          </a:p>
-        </p:txBody>
-      </p:sp>
-      <p:sp>
-        <p:nvSpPr>
-          <p:cNvPr id="7" name="Text 5"/>
-          <p:cNvSpPr/>
-          <p:nvPr/>
-        </p:nvSpPr>
-        <p:spPr>
-          <a:xfrm>
-            <a:off x="731520" y="2606040"/>
-            <a:ext cx="5212080" cy="2286000"/>
-          </a:xfrm>
-          <a:prstGeom prst="rect">
-            <a:avLst/>
-          </a:prstGeom>
-          <a:noFill/>
-          <a:ln/>
-        </p:spPr>
-        <p:txBody>
-          <a:bodyPr wrap="square" lIns="0" tIns="0" rIns="0" bIns="0" rtlCol="0" anchor="ctr"/>
-          <a:lstStyle/>
-          <a:p>
-            <a:pPr marL="0" indent="0">
-              <a:spcAft>
-                <a:spcPts val="1000"/>
-              </a:spcAft>
-              <a:buNone/>
-            </a:pPr>
-            <a:r>
-              <a:rPr lang="en-US" sz="1400" dirty="0">
-                <a:solidFill>
-                  <a:srgbClr val="4A4A4A"/>
-                </a:solidFill>
-                <a:latin typeface="Calibri" pitchFamily="34" charset="0"/>
-                <a:ea typeface="Calibri" pitchFamily="34" charset="-122"/>
-                <a:cs typeface="Calibri" pitchFamily="34" charset="-120"/>
-              </a:rPr>
-              <a:t>EGS L2 production support teams in India are the first responders.</a:t>
-            </a:r>
-            <a:endParaRPr lang="en-US" sz="1400" dirty="0"/>
-          </a:p>
-          <a:p>
-            <a:pPr marL="0" indent="0">
-              <a:spcAft>
-                <a:spcPts val="1000"/>
-              </a:spcAft>
-              <a:buNone/>
-            </a:pPr>
-            <a:r>
-              <a:rPr lang="en-US" sz="1400" dirty="0">
-                <a:solidFill>
-                  <a:srgbClr val="4A4A4A"/>
-                </a:solidFill>
-                <a:latin typeface="Calibri" pitchFamily="34" charset="0"/>
-                <a:ea typeface="Calibri" pitchFamily="34" charset="-122"/>
-                <a:cs typeface="Calibri" pitchFamily="34" charset="-120"/>
-              </a:rPr>
-              <a:t>Most of our databases reside on SAR-restricted servers  —  accessible only from inside the US.</a:t>
-            </a:r>
-            <a:endParaRPr lang="en-US" sz="1400" dirty="0"/>
-          </a:p>
-          <a:p>
-            <a:pPr marL="0" indent="0">
-              <a:spcAft>
-                <a:spcPts val="1000"/>
-              </a:spcAft>
-              <a:buNone/>
-            </a:pPr>
-            <a:r>
-              <a:rPr lang="en-US" sz="1400" dirty="0">
-                <a:solidFill>
-                  <a:srgbClr val="4A4A4A"/>
-                </a:solidFill>
-                <a:latin typeface="Calibri" pitchFamily="34" charset="0"/>
-                <a:ea typeface="Calibri" pitchFamily="34" charset="-122"/>
-                <a:cs typeface="Calibri" pitchFamily="34" charset="-120"/>
-              </a:rPr>
-              <a:t>Investigation stalls until US teams come online  —  hours later.</a:t>
-            </a:r>
-            <a:endParaRPr lang="en-US" sz="1400" dirty="0"/>
-          </a:p>
-          <a:p>
-            <a:pPr marL="0" indent="0">
-              <a:spcAft>
-                <a:spcPts val="1000"/>
-              </a:spcAft>
-              <a:buNone/>
-            </a:pPr>
-            <a:r>
-              <a:rPr lang="en-US" sz="1400" dirty="0">
-                <a:solidFill>
-                  <a:srgbClr val="4A4A4A"/>
-                </a:solidFill>
-                <a:latin typeface="Calibri" pitchFamily="34" charset="0"/>
-                <a:ea typeface="Calibri" pitchFamily="34" charset="-122"/>
-                <a:cs typeface="Calibri" pitchFamily="34" charset="-120"/>
-              </a:rPr>
-              <a:t>Multiple engineers and various teams get pulled in to coordinate the wait.</a:t>
-            </a:r>
-            <a:endParaRPr lang="en-US" sz="1400" dirty="0"/>
-          </a:p>
-        </p:txBody>
-      </p:sp>
-      <p:sp>
-        <p:nvSpPr>
-          <p:cNvPr id="8" name="Text 6"/>
-          <p:cNvSpPr/>
-          <p:nvPr/>
-        </p:nvSpPr>
-        <p:spPr>
-          <a:xfrm>
-            <a:off x="731520" y="5029200"/>
-            <a:ext cx="5212080" cy="320040"/>
-          </a:xfrm>
-          <a:prstGeom prst="rect">
-            <a:avLst/>
-          </a:prstGeom>
-          <a:noFill/>
-          <a:ln/>
-        </p:spPr>
-        <p:txBody>
-          <a:bodyPr wrap="square" lIns="0" tIns="0" rIns="0" bIns="0" rtlCol="0" anchor="ctr"/>
-          <a:lstStyle/>
-          <a:p>
-            <a:pPr marL="0" indent="0">
-              <a:buNone/>
-            </a:pPr>
-            <a:r>
-              <a:rPr lang="en-US" sz="1400" i="1" dirty="0">
-                <a:solidFill>
-                  <a:srgbClr val="8A8A8A"/>
-                </a:solidFill>
-                <a:latin typeface="Calibri" pitchFamily="34" charset="0"/>
-                <a:ea typeface="Calibri" pitchFamily="34" charset="-122"/>
-                <a:cs typeface="Calibri" pitchFamily="34" charset="-120"/>
-              </a:rPr>
-              <a:t>Up to</a:t>
-            </a:r>
-            <a:endParaRPr lang="en-US" sz="1400" dirty="0"/>
-          </a:p>
-        </p:txBody>
-      </p:sp>
-      <p:sp>
-        <p:nvSpPr>
-          <p:cNvPr id="9" name="Text 7"/>
-          <p:cNvSpPr/>
-          <p:nvPr/>
-        </p:nvSpPr>
-        <p:spPr>
-          <a:xfrm>
-            <a:off x="731520" y="5349240"/>
-            <a:ext cx="5212080" cy="868680"/>
-          </a:xfrm>
-          <a:prstGeom prst="rect">
-            <a:avLst/>
-          </a:prstGeom>
-          <a:noFill/>
-          <a:ln/>
-        </p:spPr>
-        <p:txBody>
-          <a:bodyPr wrap="square" lIns="0" tIns="0" rIns="0" bIns="0" rtlCol="0" anchor="ctr"/>
-          <a:lstStyle/>
-          <a:p>
-            <a:pPr marL="0" indent="0">
-              <a:buNone/>
-            </a:pPr>
-            <a:r>
-              <a:rPr lang="en-US" sz="5600" b="1" dirty="0">
-                <a:solidFill>
-                  <a:srgbClr val="D71E28"/>
-                </a:solidFill>
-                <a:latin typeface="Calibri" pitchFamily="34" charset="0"/>
-                <a:ea typeface="Calibri" pitchFamily="34" charset="-122"/>
-                <a:cs typeface="Calibri" pitchFamily="34" charset="-120"/>
-              </a:rPr>
-              <a:t>10 hours</a:t>
-            </a:r>
-            <a:endParaRPr lang="en-US" sz="5600" dirty="0"/>
-          </a:p>
-        </p:txBody>
-      </p:sp>
-      <p:sp>
-        <p:nvSpPr>
-          <p:cNvPr id="10" name="Text 8"/>
-          <p:cNvSpPr/>
-          <p:nvPr/>
-        </p:nvSpPr>
-        <p:spPr>
-          <a:xfrm>
-            <a:off x="731520" y="6080760"/>
-            <a:ext cx="5212080" cy="320040"/>
-          </a:xfrm>
-          <a:prstGeom prst="rect">
-            <a:avLst/>
-          </a:prstGeom>
-          <a:noFill/>
-          <a:ln/>
-        </p:spPr>
-        <p:txBody>
-          <a:bodyPr wrap="square" lIns="0" tIns="0" rIns="0" bIns="0" rtlCol="0" anchor="ctr"/>
-          <a:lstStyle/>
-          <a:p>
-            <a:pPr marL="0" indent="0">
-              <a:buNone/>
-            </a:pPr>
-            <a:r>
-              <a:rPr lang="en-US" sz="1200" i="1" dirty="0">
-                <a:solidFill>
-                  <a:srgbClr val="1B1B1B"/>
-                </a:solidFill>
-                <a:latin typeface="Calibri" pitchFamily="34" charset="0"/>
-                <a:ea typeface="Calibri" pitchFamily="34" charset="-122"/>
-                <a:cs typeface="Calibri" pitchFamily="34" charset="-120"/>
-              </a:rPr>
-              <a:t>on the worst incidents  —  before real debugging even begins.</a:t>
-            </a:r>
-            <a:endParaRPr lang="en-US" sz="1200" dirty="0"/>
-          </a:p>
-        </p:txBody>
-      </p:sp>
-      <p:sp>
-        <p:nvSpPr>
-          <p:cNvPr id="11" name="Text 9"/>
-          <p:cNvSpPr/>
-          <p:nvPr/>
-        </p:nvSpPr>
-        <p:spPr>
-          <a:xfrm>
-            <a:off x="6675120" y="2011680"/>
-            <a:ext cx="5029200" cy="274320"/>
-          </a:xfrm>
-          <a:prstGeom prst="rect">
-            <a:avLst/>
-          </a:prstGeom>
-          <a:noFill/>
-          <a:ln/>
-        </p:spPr>
-        <p:txBody>
-          <a:bodyPr wrap="square" lIns="0" tIns="0" rIns="0" bIns="0" rtlCol="0" anchor="ctr"/>
-          <a:lstStyle/>
-          <a:p>
-            <a:pPr marL="0" indent="0">
-              <a:buNone/>
-            </a:pPr>
-            <a:r>
-              <a:rPr lang="en-US" sz="1000" b="1" kern="0" spc="500" dirty="0">
-                <a:solidFill>
-                  <a:srgbClr val="8A8A8A"/>
-                </a:solidFill>
-                <a:latin typeface="Calibri" pitchFamily="34" charset="0"/>
-                <a:ea typeface="Calibri" pitchFamily="34" charset="-122"/>
-                <a:cs typeface="Calibri" pitchFamily="34" charset="-120"/>
-              </a:rPr>
-              <a:t>ANATOMY OF A NIGHTLY FAILURE</a:t>
-            </a:r>
-            <a:endParaRPr lang="en-US" sz="1000" dirty="0"/>
-          </a:p>
-        </p:txBody>
-      </p:sp>
-      <p:sp>
-        <p:nvSpPr>
-          <p:cNvPr id="12" name="Shape 10"/>
-          <p:cNvSpPr/>
-          <p:nvPr/>
-        </p:nvSpPr>
-        <p:spPr>
-          <a:xfrm>
-            <a:off x="6812280" y="2606040"/>
-            <a:ext cx="0" cy="3200400"/>
-          </a:xfrm>
-          <a:prstGeom prst="line">
-            <a:avLst/>
-          </a:prstGeom>
-          <a:noFill/>
-          <a:ln w="25400">
+              </a:rPr>
+              <a:t>2 / 8</a:t>
+            </a:r>
+          </a:p>
+        </p:txBody>
+      </p:sp>
+      <p:sp>
+        <p:nvSpPr>
+          <p:cNvPr id="10" name="LeftCard"/>
+          <p:cNvSpPr/>
+          <p:nvPr/>
+        </p:nvSpPr>
+        <p:spPr>
+          <a:xfrm>
+            <a:off x="571500" y="2050000"/>
+            <a:ext cx="5450000" cy="3950000"/>
+          </a:xfrm>
+          <a:prstGeom prst="rect">
+            <a:avLst/>
+          </a:prstGeom>
+          <a:solidFill>
+            <a:srgbClr val="FFFDF7"/>
+          </a:solidFill>
+          <a:ln w="12700">
             <a:solidFill>
               <a:srgbClr val="E5E0D5"/>
             </a:solidFill>
             <a:prstDash val="solid"/>
           </a:ln>
         </p:spPr>
-      </p:sp>
-      <p:sp>
-        <p:nvSpPr>
-          <p:cNvPr id="13" name="Shape 11"/>
-          <p:cNvSpPr/>
-          <p:nvPr/>
-        </p:nvSpPr>
-        <p:spPr>
-          <a:xfrm>
-            <a:off x="6675120" y="2468880"/>
-            <a:ext cx="274320" cy="274320"/>
-          </a:xfrm>
-          <a:prstGeom prst="ellipse">
+        <p:txBody>
+          <a:bodyPr/>
+          <a:lstStyle/>
+          <a:p>
+            <a:endParaRPr lang="en-US" dirty="0"/>
+          </a:p>
+        </p:txBody>
+      </p:sp>
+      <p:sp>
+        <p:nvSpPr>
+          <p:cNvPr id="11" name="LeftStripe"/>
+          <p:cNvSpPr/>
+          <p:nvPr/>
+        </p:nvSpPr>
+        <p:spPr>
+          <a:xfrm>
+            <a:off x="571500" y="2050000"/>
+            <a:ext cx="91440" cy="3950000"/>
+          </a:xfrm>
+          <a:prstGeom prst="rect">
             <a:avLst/>
           </a:prstGeom>
           <a:solidFill>
@@ -1748,14 +1488,86 @@
       </p:sp>
       <p:sp>
         <p:nvSpPr>
-          <p:cNvPr id="14" name="Text 12"/>
-          <p:cNvSpPr/>
-          <p:nvPr/>
-        </p:nvSpPr>
-        <p:spPr>
-          <a:xfrm>
-            <a:off x="7178040" y="2468880"/>
-            <a:ext cx="1371600" cy="274320"/>
+          <p:cNvPr id="12" name="LeftLabel"/>
+          <p:cNvSpPr/>
+          <p:nvPr/>
+        </p:nvSpPr>
+        <p:spPr>
+          <a:xfrm>
+            <a:off x="845820" y="2200000"/>
+            <a:ext cx="4900000" cy="280000"/>
+          </a:xfrm>
+          <a:prstGeom prst="rect">
+            <a:avLst/>
+          </a:prstGeom>
+          <a:noFill/>
+          <a:ln/>
+        </p:spPr>
+        <p:txBody>
+          <a:bodyPr wrap="square" lIns="0" tIns="0" rIns="0" bIns="0" rtlCol="0" anchor="ctr"/>
+          <a:lstStyle/>
+          <a:p>
+            <a:pPr marL="0" indent="0">
+              <a:buNone/>
+            </a:pPr>
+            <a:r>
+              <a:rPr lang="en-US" sz="1000" b="1" kern="0" spc="500" dirty="0">
+                <a:solidFill>
+                  <a:srgbClr val="D71E28"/>
+                </a:solidFill>
+                <a:latin typeface="Calibri" pitchFamily="34" charset="0"/>
+              </a:rPr>
+              <a:t>FOCUS AREA  ·  PRODUCTION MONITORING</a:t>
+            </a:r>
+          </a:p>
+        </p:txBody>
+      </p:sp>
+      <p:sp>
+        <p:nvSpPr>
+          <p:cNvPr id="13" name="LeftHead"/>
+          <p:cNvSpPr/>
+          <p:nvPr/>
+        </p:nvSpPr>
+        <p:spPr>
+          <a:xfrm>
+            <a:off x="845820" y="2500000"/>
+            <a:ext cx="4900000" cy="380000"/>
+          </a:xfrm>
+          <a:prstGeom prst="rect">
+            <a:avLst/>
+          </a:prstGeom>
+          <a:noFill/>
+          <a:ln/>
+        </p:spPr>
+        <p:txBody>
+          <a:bodyPr wrap="square" lIns="0" tIns="0" rIns="0" bIns="0" rtlCol="0" anchor="ctr"/>
+          <a:lstStyle/>
+          <a:p>
+            <a:pPr marL="0" indent="0">
+              <a:buNone/>
+            </a:pPr>
+            <a:r>
+              <a:rPr lang="en-US" sz="1800" b="1" dirty="0">
+                <a:solidFill>
+                  <a:srgbClr val="1B1B1B"/>
+                </a:solidFill>
+                <a:latin typeface="Calibri" pitchFamily="34" charset="0"/>
+              </a:rPr>
+              <a:t>From reactive alerts to intelligent data reliability.</a:t>
+            </a:r>
+          </a:p>
+        </p:txBody>
+      </p:sp>
+      <p:sp>
+        <p:nvSpPr>
+          <p:cNvPr id="14" name="LeftGapLabel"/>
+          <p:cNvSpPr/>
+          <p:nvPr/>
+        </p:nvSpPr>
+        <p:spPr>
+          <a:xfrm>
+            <a:off x="845820" y="3000000"/>
+            <a:ext cx="4900000" cy="260000"/>
           </a:xfrm>
           <a:prstGeom prst="rect">
             <a:avLst/>
@@ -1773,172 +1585,213 @@
             <a:r>
               <a:rPr lang="en-US" sz="1100" b="1" dirty="0">
                 <a:solidFill>
-                  <a:srgbClr val="8A8A8A"/>
-                </a:solidFill>
-                <a:latin typeface="Calibri" pitchFamily="34" charset="0"/>
-                <a:ea typeface="Calibri" pitchFamily="34" charset="-122"/>
-                <a:cs typeface="Calibri" pitchFamily="34" charset="-120"/>
-              </a:rPr>
-              <a:t>2:00 AM ET</a:t>
-            </a:r>
-            <a:endParaRPr lang="en-US" sz="1100" dirty="0"/>
-          </a:p>
-        </p:txBody>
-      </p:sp>
-      <p:sp>
-        <p:nvSpPr>
-          <p:cNvPr id="15" name="Text 13"/>
-          <p:cNvSpPr/>
-          <p:nvPr/>
-        </p:nvSpPr>
-        <p:spPr>
-          <a:xfrm>
-            <a:off x="8595360" y="2468880"/>
-            <a:ext cx="3474720" cy="274320"/>
-          </a:xfrm>
-          <a:prstGeom prst="rect">
-            <a:avLst/>
-          </a:prstGeom>
-          <a:noFill/>
-          <a:ln/>
-        </p:spPr>
-        <p:txBody>
-          <a:bodyPr wrap="square" lIns="0" tIns="0" rIns="0" bIns="0" rtlCol="0" anchor="ctr"/>
-          <a:lstStyle/>
-          <a:p>
-            <a:pPr marL="0" indent="0">
-              <a:buNone/>
-            </a:pPr>
-            <a:r>
-              <a:rPr lang="en-US" sz="1400" dirty="0">
-                <a:solidFill>
                   <a:srgbClr val="1B1B1B"/>
                 </a:solidFill>
                 <a:latin typeface="Calibri" pitchFamily="34" charset="0"/>
-                <a:ea typeface="Calibri" pitchFamily="34" charset="-122"/>
-                <a:cs typeface="Calibri" pitchFamily="34" charset="-120"/>
-              </a:rPr>
-              <a:t>Job fails/ INC Generated</a:t>
-            </a:r>
-            <a:endParaRPr lang="en-US" sz="1400" dirty="0"/>
-          </a:p>
-        </p:txBody>
-      </p:sp>
-      <p:sp>
-        <p:nvSpPr>
-          <p:cNvPr id="16" name="Shape 14"/>
-          <p:cNvSpPr/>
-          <p:nvPr/>
-        </p:nvSpPr>
-        <p:spPr>
-          <a:xfrm>
-            <a:off x="6675120" y="3108960"/>
-            <a:ext cx="274320" cy="274320"/>
-          </a:xfrm>
-          <a:prstGeom prst="ellipse">
-            <a:avLst/>
-          </a:prstGeom>
-          <a:solidFill>
-            <a:srgbClr val="FFCD41"/>
+              </a:rPr>
+              <a:t>Current Gap</a:t>
+            </a:r>
+          </a:p>
+        </p:txBody>
+      </p:sp>
+      <p:sp>
+        <p:nvSpPr>
+          <p:cNvPr id="15" name="LeftGapBody"/>
+          <p:cNvSpPr/>
+          <p:nvPr/>
+        </p:nvSpPr>
+        <p:spPr>
+          <a:xfrm>
+            <a:off x="845820" y="3260000"/>
+            <a:ext cx="4900000" cy="500000"/>
+          </a:xfrm>
+          <a:prstGeom prst="rect">
+            <a:avLst/>
+          </a:prstGeom>
+          <a:noFill/>
+          <a:ln/>
+        </p:spPr>
+        <p:txBody>
+          <a:bodyPr wrap="square" lIns="0" tIns="0" rIns="0" bIns="0" rtlCol="0" anchor="t"/>
+          <a:lstStyle/>
+          <a:p>
+            <a:pPr marL="0" indent="0">
+              <a:buNone/>
+            </a:pPr>
+            <a:r>
+              <a:rPr lang="en-US" sz="1200" dirty="0">
+                <a:solidFill>
+                  <a:srgbClr val="4A4A4A"/>
+                </a:solidFill>
+                <a:latin typeface="Calibri" pitchFamily="34" charset="0"/>
+              </a:rPr>
+              <a:t>Production monitoring today is reactive and metric-centric, not data-centric or intent-aware.</a:t>
+            </a:r>
+          </a:p>
+        </p:txBody>
+      </p:sp>
+      <p:sp>
+        <p:nvSpPr>
+          <p:cNvPr id="16" name="LeftNeedsLabel"/>
+          <p:cNvSpPr/>
+          <p:nvPr/>
+        </p:nvSpPr>
+        <p:spPr>
+          <a:xfrm>
+            <a:off x="845820" y="3850000"/>
+            <a:ext cx="4900000" cy="260000"/>
+          </a:xfrm>
+          <a:prstGeom prst="rect">
+            <a:avLst/>
+          </a:prstGeom>
+          <a:noFill/>
+          <a:ln/>
+        </p:spPr>
+        <p:txBody>
+          <a:bodyPr wrap="square" lIns="0" tIns="0" rIns="0" bIns="0" rtlCol="0" anchor="ctr"/>
+          <a:lstStyle/>
+          <a:p>
+            <a:pPr marL="0" indent="0">
+              <a:buNone/>
+            </a:pPr>
+            <a:r>
+              <a:rPr lang="en-US" sz="1100" b="1" dirty="0">
+                <a:solidFill>
+                  <a:srgbClr val="1B1B1B"/>
+                </a:solidFill>
+                <a:latin typeface="Calibri" pitchFamily="34" charset="0"/>
+              </a:rPr>
+              <a:t>Unmet needs called out</a:t>
+            </a:r>
+          </a:p>
+        </p:txBody>
+      </p:sp>
+      <p:sp>
+        <p:nvSpPr>
+          <p:cNvPr id="17" name="LeftNeedsBody"/>
+          <p:cNvSpPr/>
+          <p:nvPr/>
+        </p:nvSpPr>
+        <p:spPr>
+          <a:xfrm>
+            <a:off x="845820" y="4110000"/>
+            <a:ext cx="4900000" cy="1850000"/>
+          </a:xfrm>
+          <a:prstGeom prst="rect">
+            <a:avLst/>
+          </a:prstGeom>
+          <a:noFill/>
+          <a:ln/>
+        </p:spPr>
+        <p:txBody>
+          <a:bodyPr wrap="square" lIns="0" tIns="0" rIns="0" bIns="0" rtlCol="0" anchor="t"/>
+          <a:lstStyle/>
+          <a:p>
+            <a:pPr marL="160020" indent="-160020">
+              <a:buFont typeface="Arial" panose="020B0604020202020204" pitchFamily="34" charset="0"/>
+              <a:buChar char="–"/>
+            </a:pPr>
+            <a:r>
+              <a:rPr lang="en-US" sz="1200" dirty="0">
+                <a:solidFill>
+                  <a:srgbClr val="4A4A4A"/>
+                </a:solidFill>
+                <a:latin typeface="Calibri" pitchFamily="34" charset="0"/>
+              </a:rPr>
+              <a:t>Early detection of data quality drift before downstream impact</a:t>
+            </a:r>
+          </a:p>
+          <a:p>
+            <a:pPr marL="160020" indent="-160020">
+              <a:buFont typeface="Arial" panose="020B0604020202020204" pitchFamily="34" charset="0"/>
+              <a:buChar char="–"/>
+            </a:pPr>
+            <a:r>
+              <a:rPr lang="en-US" sz="1200" dirty="0">
+                <a:solidFill>
+                  <a:srgbClr val="4A4A4A"/>
+                </a:solidFill>
+                <a:latin typeface="Calibri" pitchFamily="34" charset="0"/>
+              </a:rPr>
+              <a:t>Correlation between failures, lineage, and consumers</a:t>
+            </a:r>
+          </a:p>
+          <a:p>
+            <a:pPr marL="160020" indent="-160020">
+              <a:buFont typeface="Arial" panose="020B0604020202020204" pitchFamily="34" charset="0"/>
+              <a:buChar char="–"/>
+            </a:pPr>
+            <a:r>
+              <a:rPr lang="en-US" sz="1200" dirty="0">
+                <a:solidFill>
+                  <a:srgbClr val="4A4A4A"/>
+                </a:solidFill>
+                <a:latin typeface="Calibri" pitchFamily="34" charset="0"/>
+              </a:rPr>
+              <a:t>Monitoring that understands expected behavior, not just thresholds</a:t>
+            </a:r>
+          </a:p>
+          <a:p>
+            <a:pPr marL="160020" indent="-160020">
+              <a:buFont typeface="Arial" panose="020B0604020202020204" pitchFamily="34" charset="0"/>
+              <a:buChar char="–"/>
+            </a:pPr>
+            <a:r>
+              <a:rPr lang="en-US" sz="1200" dirty="0">
+                <a:solidFill>
+                  <a:srgbClr val="4A4A4A"/>
+                </a:solidFill>
+                <a:latin typeface="Calibri" pitchFamily="34" charset="0"/>
+              </a:rPr>
+              <a:t>Automated diagnosis rather than alert flooding</a:t>
+            </a:r>
+          </a:p>
+        </p:txBody>
+      </p:sp>
+      <p:sp>
+        <p:nvSpPr>
+          <p:cNvPr id="20" name="RightCard"/>
+          <p:cNvSpPr/>
+          <p:nvPr/>
+        </p:nvSpPr>
+        <p:spPr>
+          <a:xfrm>
+            <a:off x="6172000" y="2050000"/>
+            <a:ext cx="5450000" cy="3950000"/>
+          </a:xfrm>
+          <a:prstGeom prst="rect">
+            <a:avLst/>
+          </a:prstGeom>
+          <a:solidFill>
+            <a:srgbClr val="FFFFFF"/>
           </a:solidFill>
           <a:ln w="12700">
             <a:solidFill>
-              <a:srgbClr val="FFCD41"/>
+              <a:srgbClr val="E5E0D5"/>
             </a:solidFill>
             <a:prstDash val="solid"/>
           </a:ln>
-        </p:spPr>
-      </p:sp>
-      <p:sp>
-        <p:nvSpPr>
-          <p:cNvPr id="17" name="Text 15"/>
-          <p:cNvSpPr/>
-          <p:nvPr/>
-        </p:nvSpPr>
-        <p:spPr>
-          <a:xfrm>
-            <a:off x="7178040" y="3108960"/>
-            <a:ext cx="1371600" cy="274320"/>
-          </a:xfrm>
-          <a:prstGeom prst="rect">
-            <a:avLst/>
-          </a:prstGeom>
-          <a:noFill/>
-          <a:ln/>
-        </p:spPr>
-        <p:txBody>
-          <a:bodyPr wrap="square" lIns="0" tIns="0" rIns="0" bIns="0" rtlCol="0" anchor="ctr"/>
-          <a:lstStyle/>
-          <a:p>
-            <a:pPr marL="0" indent="0">
-              <a:buNone/>
-            </a:pPr>
-            <a:r>
-              <a:rPr lang="en-US" sz="1100" b="1" dirty="0">
-                <a:solidFill>
-                  <a:srgbClr val="8A8A8A"/>
-                </a:solidFill>
-                <a:latin typeface="Calibri" pitchFamily="34" charset="0"/>
-                <a:ea typeface="Calibri" pitchFamily="34" charset="-122"/>
-                <a:cs typeface="Calibri" pitchFamily="34" charset="-120"/>
-              </a:rPr>
-              <a:t>2:05 AM ET</a:t>
-            </a:r>
-            <a:endParaRPr lang="en-US" sz="1100" dirty="0"/>
-          </a:p>
-        </p:txBody>
-      </p:sp>
-      <p:sp>
-        <p:nvSpPr>
-          <p:cNvPr id="18" name="Text 16"/>
-          <p:cNvSpPr/>
-          <p:nvPr/>
-        </p:nvSpPr>
-        <p:spPr>
-          <a:xfrm>
-            <a:off x="8595360" y="3108960"/>
-            <a:ext cx="3474720" cy="274320"/>
-          </a:xfrm>
-          <a:prstGeom prst="rect">
-            <a:avLst/>
-          </a:prstGeom>
-          <a:noFill/>
-          <a:ln/>
-        </p:spPr>
-        <p:txBody>
-          <a:bodyPr wrap="square" lIns="0" tIns="0" rIns="0" bIns="0" rtlCol="0" anchor="ctr"/>
-          <a:lstStyle/>
-          <a:p>
-            <a:pPr marL="0" indent="0">
-              <a:buNone/>
-            </a:pPr>
-            <a:r>
-              <a:rPr lang="en-US" sz="1400" dirty="0">
-                <a:solidFill>
-                  <a:srgbClr val="1B1B1B"/>
-                </a:solidFill>
-                <a:latin typeface="Calibri" pitchFamily="34" charset="0"/>
-                <a:ea typeface="Calibri" pitchFamily="34" charset="-122"/>
-                <a:cs typeface="Calibri" pitchFamily="34" charset="-120"/>
-              </a:rPr>
-              <a:t>Offshore EGS teams engaged</a:t>
-            </a:r>
-            <a:endParaRPr lang="en-US" sz="1400" dirty="0"/>
-          </a:p>
-        </p:txBody>
-      </p:sp>
-      <p:sp>
-        <p:nvSpPr>
-          <p:cNvPr id="19" name="Shape 17"/>
-          <p:cNvSpPr/>
-          <p:nvPr/>
-        </p:nvSpPr>
-        <p:spPr>
-          <a:xfrm>
-            <a:off x="6675120" y="3749040"/>
-            <a:ext cx="274320" cy="274320"/>
-          </a:xfrm>
-          <a:prstGeom prst="ellipse">
+          <a:effectLst>
+            <a:outerShdw blurRad="152400" dist="38100" dir="5400000" algn="bl" rotWithShape="0">
+              <a:srgbClr val="000000">
+                <a:alpha val="8000"/>
+              </a:srgbClr>
+            </a:outerShdw>
+          </a:effectLst>
+        </p:spPr>
+      </p:sp>
+      <p:sp>
+        <p:nvSpPr>
+          <p:cNvPr id="21" name="RightStripe"/>
+          <p:cNvSpPr/>
+          <p:nvPr/>
+        </p:nvSpPr>
+        <p:spPr>
+          <a:xfrm>
+            <a:off x="6172000" y="2050000"/>
+            <a:ext cx="91440" cy="3950000"/>
+          </a:xfrm>
+          <a:prstGeom prst="rect">
             <a:avLst/>
           </a:prstGeom>
           <a:solidFill>
@@ -1954,14 +1807,86 @@
       </p:sp>
       <p:sp>
         <p:nvSpPr>
-          <p:cNvPr id="20" name="Text 18"/>
-          <p:cNvSpPr/>
-          <p:nvPr/>
-        </p:nvSpPr>
-        <p:spPr>
-          <a:xfrm>
-            <a:off x="7178040" y="3749040"/>
-            <a:ext cx="1371600" cy="274320"/>
+          <p:cNvPr id="22" name="RightLabel"/>
+          <p:cNvSpPr/>
+          <p:nvPr/>
+        </p:nvSpPr>
+        <p:spPr>
+          <a:xfrm>
+            <a:off x="6446320" y="2200000"/>
+            <a:ext cx="4900000" cy="280000"/>
+          </a:xfrm>
+          <a:prstGeom prst="rect">
+            <a:avLst/>
+          </a:prstGeom>
+          <a:noFill/>
+          <a:ln/>
+        </p:spPr>
+        <p:txBody>
+          <a:bodyPr wrap="square" lIns="0" tIns="0" rIns="0" bIns="0" rtlCol="0" anchor="ctr"/>
+          <a:lstStyle/>
+          <a:p>
+            <a:pPr marL="0" indent="0">
+              <a:buNone/>
+            </a:pPr>
+            <a:r>
+              <a:rPr lang="en-US" sz="1000" b="1" kern="0" spc="500" dirty="0">
+                <a:solidFill>
+                  <a:srgbClr val="D71E28"/>
+                </a:solidFill>
+                <a:latin typeface="Calibri" pitchFamily="34" charset="0"/>
+              </a:rPr>
+              <a:t>THIS PILOT  ·  ETL INCIDENT DIAGNOSIS</a:t>
+            </a:r>
+          </a:p>
+        </p:txBody>
+      </p:sp>
+      <p:sp>
+        <p:nvSpPr>
+          <p:cNvPr id="23" name="RightHead"/>
+          <p:cNvSpPr/>
+          <p:nvPr/>
+        </p:nvSpPr>
+        <p:spPr>
+          <a:xfrm>
+            <a:off x="6446320" y="2500000"/>
+            <a:ext cx="4900000" cy="380000"/>
+          </a:xfrm>
+          <a:prstGeom prst="rect">
+            <a:avLst/>
+          </a:prstGeom>
+          <a:noFill/>
+          <a:ln/>
+        </p:spPr>
+        <p:txBody>
+          <a:bodyPr wrap="square" lIns="0" tIns="0" rIns="0" bIns="0" rtlCol="0" anchor="ctr"/>
+          <a:lstStyle/>
+          <a:p>
+            <a:pPr marL="0" indent="0">
+              <a:buNone/>
+            </a:pPr>
+            <a:r>
+              <a:rPr lang="en-US" sz="1800" b="1" dirty="0">
+                <a:solidFill>
+                  <a:srgbClr val="1B1B1B"/>
+                </a:solidFill>
+                <a:latin typeface="Calibri" pitchFamily="34" charset="0"/>
+              </a:rPr>
+              <a:t>A concrete production-monitoring starting point.</a:t>
+            </a:r>
+          </a:p>
+        </p:txBody>
+      </p:sp>
+      <p:sp>
+        <p:nvSpPr>
+          <p:cNvPr id="24" name="RightAddrLabel"/>
+          <p:cNvSpPr/>
+          <p:nvPr/>
+        </p:nvSpPr>
+        <p:spPr>
+          <a:xfrm>
+            <a:off x="6446320" y="3000000"/>
+            <a:ext cx="4900000" cy="260000"/>
           </a:xfrm>
           <a:prstGeom prst="rect">
             <a:avLst/>
@@ -1979,92 +1904,119 @@
             <a:r>
               <a:rPr lang="en-US" sz="1100" b="1" dirty="0">
                 <a:solidFill>
-                  <a:srgbClr val="8A8A8A"/>
-                </a:solidFill>
-                <a:latin typeface="Calibri" pitchFamily="34" charset="0"/>
-                <a:ea typeface="Calibri" pitchFamily="34" charset="-122"/>
-                <a:cs typeface="Calibri" pitchFamily="34" charset="-120"/>
-              </a:rPr>
-              <a:t>2:15 AM ET</a:t>
-            </a:r>
-            <a:endParaRPr lang="en-US" sz="1100" dirty="0"/>
-          </a:p>
-        </p:txBody>
-      </p:sp>
-      <p:sp>
-        <p:nvSpPr>
-          <p:cNvPr id="21" name="Text 19"/>
-          <p:cNvSpPr/>
-          <p:nvPr/>
-        </p:nvSpPr>
-        <p:spPr>
-          <a:xfrm>
-            <a:off x="8595360" y="3749040"/>
-            <a:ext cx="3474720" cy="274320"/>
-          </a:xfrm>
-          <a:prstGeom prst="rect">
-            <a:avLst/>
-          </a:prstGeom>
-          <a:noFill/>
-          <a:ln/>
-        </p:spPr>
-        <p:txBody>
-          <a:bodyPr wrap="square" lIns="0" tIns="0" rIns="0" bIns="0" rtlCol="0" anchor="ctr"/>
-          <a:lstStyle/>
-          <a:p>
-            <a:pPr marL="0" indent="0">
-              <a:buNone/>
-            </a:pPr>
-            <a:r>
-              <a:rPr lang="en-US" sz="1400" b="1" dirty="0">
-                <a:solidFill>
-                  <a:srgbClr val="D71E28"/>
-                </a:solidFill>
-                <a:latin typeface="Calibri" pitchFamily="34" charset="0"/>
-                <a:ea typeface="Calibri" pitchFamily="34" charset="-122"/>
-                <a:cs typeface="Calibri" pitchFamily="34" charset="-120"/>
-              </a:rPr>
-              <a:t>Blocked by SAR access</a:t>
-            </a:r>
-            <a:endParaRPr lang="en-US" sz="1400" dirty="0"/>
-          </a:p>
-        </p:txBody>
-      </p:sp>
-      <p:sp>
-        <p:nvSpPr>
-          <p:cNvPr id="22" name="Shape 20"/>
-          <p:cNvSpPr/>
-          <p:nvPr/>
-        </p:nvSpPr>
-        <p:spPr>
-          <a:xfrm>
-            <a:off x="6675120" y="4389120"/>
-            <a:ext cx="274320" cy="274320"/>
-          </a:xfrm>
-          <a:prstGeom prst="ellipse">
-            <a:avLst/>
-          </a:prstGeom>
-          <a:solidFill>
-            <a:srgbClr val="D71E28"/>
-          </a:solidFill>
-          <a:ln w="12700">
-            <a:solidFill>
-              <a:srgbClr val="D71E28"/>
-            </a:solidFill>
-            <a:prstDash val="solid"/>
-          </a:ln>
-        </p:spPr>
-      </p:sp>
-      <p:sp>
-        <p:nvSpPr>
-          <p:cNvPr id="23" name="Text 21"/>
-          <p:cNvSpPr/>
-          <p:nvPr/>
-        </p:nvSpPr>
-        <p:spPr>
-          <a:xfrm>
-            <a:off x="7178040" y="4389120"/>
-            <a:ext cx="1371600" cy="274320"/>
+                  <a:srgbClr val="1B1B1B"/>
+                </a:solidFill>
+                <a:latin typeface="Calibri" pitchFamily="34" charset="0"/>
+              </a:rPr>
+              <a:t>What this pilot directly addresses</a:t>
+            </a:r>
+          </a:p>
+        </p:txBody>
+      </p:sp>
+      <p:sp>
+        <p:nvSpPr>
+          <p:cNvPr id="25" name="RightAddrBody"/>
+          <p:cNvSpPr/>
+          <p:nvPr/>
+        </p:nvSpPr>
+        <p:spPr>
+          <a:xfrm>
+            <a:off x="6446320" y="3260000"/>
+            <a:ext cx="4900000" cy="1300000"/>
+          </a:xfrm>
+          <a:prstGeom prst="rect">
+            <a:avLst/>
+          </a:prstGeom>
+          <a:noFill/>
+          <a:ln/>
+        </p:spPr>
+        <p:txBody>
+          <a:bodyPr wrap="square" lIns="0" tIns="0" rIns="0" bIns="0" rtlCol="0" anchor="t"/>
+          <a:lstStyle/>
+          <a:p>
+            <a:pPr marL="160020" indent="-160020">
+              <a:buFont typeface="Arial" panose="020B0604020202020204" pitchFamily="34" charset="0"/>
+              <a:buChar char="•"/>
+            </a:pPr>
+            <a:r>
+              <a:rPr lang="en-US" sz="1200" b="1" dirty="0">
+                <a:solidFill>
+                  <a:srgbClr val="1B1B1B"/>
+                </a:solidFill>
+                <a:latin typeface="Calibri" pitchFamily="34" charset="0"/>
+              </a:rPr>
+              <a:t>Automated diagnosis </a:t>
+            </a:r>
+            <a:r>
+              <a:rPr lang="en-US" sz="1200" dirty="0">
+                <a:solidFill>
+                  <a:srgbClr val="4A4A4A"/>
+                </a:solidFill>
+                <a:latin typeface="Calibri" pitchFamily="34" charset="0"/>
+              </a:rPr>
+              <a:t>instead of alert flooding for ETL job failures.</a:t>
+            </a:r>
+          </a:p>
+          <a:p>
+            <a:pPr marL="160020" indent="-160020">
+              <a:buFont typeface="Arial" panose="020B0604020202020204" pitchFamily="34" charset="0"/>
+              <a:buChar char="•"/>
+            </a:pPr>
+            <a:r>
+              <a:rPr lang="en-US" sz="1200" b="1" dirty="0">
+                <a:solidFill>
+                  <a:srgbClr val="1B1B1B"/>
+                </a:solidFill>
+                <a:latin typeface="Calibri" pitchFamily="34" charset="0"/>
+              </a:rPr>
+              <a:t>Correlation across lineage </a:t>
+            </a:r>
+            <a:r>
+              <a:rPr lang="en-US" sz="1200" dirty="0">
+                <a:solidFill>
+                  <a:srgbClr val="4A4A4A"/>
+                </a:solidFill>
+                <a:latin typeface="Calibri" pitchFamily="34" charset="0"/>
+              </a:rPr>
+              <a:t>by reading ServiceNow, Autosys, SSISDB, and SSIS source together.</a:t>
+            </a:r>
+          </a:p>
+          <a:p>
+            <a:pPr marL="160020" indent="-160020">
+              <a:buFont typeface="Arial" panose="020B0604020202020204" pitchFamily="34" charset="0"/>
+              <a:buChar char="•"/>
+            </a:pPr>
+            <a:r>
+              <a:rPr lang="en-US" sz="1200" b="1" dirty="0">
+                <a:solidFill>
+                  <a:srgbClr val="1B1B1B"/>
+                </a:solidFill>
+                <a:latin typeface="Calibri" pitchFamily="34" charset="0"/>
+              </a:rPr>
+              <a:t>Reduced MTTD and MTTR </a:t>
+            </a:r>
+            <a:r>
+              <a:rPr lang="en-US" sz="1200" dirty="0">
+                <a:solidFill>
+                  <a:srgbClr val="4A4A4A"/>
+                </a:solidFill>
+                <a:latin typeface="Calibri" pitchFamily="34" charset="0"/>
+              </a:rPr>
+              <a:t>— from up to 10 hours of cross-region waits to 15 minutes of automated diagnosis.</a:t>
+            </a:r>
+          </a:p>
+        </p:txBody>
+      </p:sp>
+      <p:sp>
+        <p:nvSpPr>
+          <p:cNvPr id="26" name="RightProveLabel"/>
+          <p:cNvSpPr/>
+          <p:nvPr/>
+        </p:nvSpPr>
+        <p:spPr>
+          <a:xfrm>
+            <a:off x="6446320" y="4750000"/>
+            <a:ext cx="4900000" cy="260000"/>
           </a:xfrm>
           <a:prstGeom prst="rect">
             <a:avLst/>
@@ -2082,260 +2034,48 @@
             <a:r>
               <a:rPr lang="en-US" sz="1100" b="1" dirty="0">
                 <a:solidFill>
-                  <a:srgbClr val="8A8A8A"/>
-                </a:solidFill>
-                <a:latin typeface="Calibri" pitchFamily="34" charset="0"/>
-                <a:ea typeface="Calibri" pitchFamily="34" charset="-122"/>
-                <a:cs typeface="Calibri" pitchFamily="34" charset="-120"/>
-              </a:rPr>
-              <a:t>9:00 AM ET</a:t>
-            </a:r>
-            <a:endParaRPr lang="en-US" sz="1100" dirty="0"/>
-          </a:p>
-        </p:txBody>
-      </p:sp>
-      <p:sp>
-        <p:nvSpPr>
-          <p:cNvPr id="24" name="Text 22"/>
-          <p:cNvSpPr/>
-          <p:nvPr/>
-        </p:nvSpPr>
-        <p:spPr>
-          <a:xfrm>
-            <a:off x="8595360" y="4389120"/>
-            <a:ext cx="3474720" cy="274320"/>
-          </a:xfrm>
-          <a:prstGeom prst="rect">
-            <a:avLst/>
-          </a:prstGeom>
-          <a:noFill/>
-          <a:ln/>
-        </p:spPr>
-        <p:txBody>
-          <a:bodyPr wrap="square" lIns="0" tIns="0" rIns="0" bIns="0" rtlCol="0" anchor="ctr"/>
-          <a:lstStyle/>
-          <a:p>
-            <a:pPr marL="0" indent="0">
-              <a:buNone/>
-            </a:pPr>
-            <a:r>
-              <a:rPr lang="en-US" sz="1400" b="1" dirty="0">
-                <a:solidFill>
-                  <a:srgbClr val="D71E28"/>
-                </a:solidFill>
-                <a:latin typeface="Calibri" pitchFamily="34" charset="0"/>
-                <a:ea typeface="Calibri" pitchFamily="34" charset="-122"/>
-                <a:cs typeface="Calibri" pitchFamily="34" charset="-120"/>
-              </a:rPr>
-              <a:t>US teams come online</a:t>
-            </a:r>
-            <a:endParaRPr lang="en-US" sz="1400" dirty="0"/>
-          </a:p>
-        </p:txBody>
-      </p:sp>
-      <p:sp>
-        <p:nvSpPr>
-          <p:cNvPr id="25" name="Shape 23"/>
-          <p:cNvSpPr/>
-          <p:nvPr/>
-        </p:nvSpPr>
-        <p:spPr>
-          <a:xfrm>
-            <a:off x="6675120" y="5029200"/>
-            <a:ext cx="274320" cy="274320"/>
-          </a:xfrm>
-          <a:prstGeom prst="ellipse">
-            <a:avLst/>
-          </a:prstGeom>
-          <a:solidFill>
-            <a:srgbClr val="FFCD41"/>
-          </a:solidFill>
-          <a:ln w="12700">
-            <a:solidFill>
-              <a:srgbClr val="FFCD41"/>
-            </a:solidFill>
-            <a:prstDash val="solid"/>
-          </a:ln>
-        </p:spPr>
-      </p:sp>
-      <p:sp>
-        <p:nvSpPr>
-          <p:cNvPr id="26" name="Text 24"/>
-          <p:cNvSpPr/>
-          <p:nvPr/>
-        </p:nvSpPr>
-        <p:spPr>
-          <a:xfrm>
-            <a:off x="7178040" y="5029200"/>
-            <a:ext cx="1371600" cy="274320"/>
-          </a:xfrm>
-          <a:prstGeom prst="rect">
-            <a:avLst/>
-          </a:prstGeom>
-          <a:noFill/>
-          <a:ln/>
-        </p:spPr>
-        <p:txBody>
-          <a:bodyPr wrap="square" lIns="0" tIns="0" rIns="0" bIns="0" rtlCol="0" anchor="ctr"/>
-          <a:lstStyle/>
-          <a:p>
-            <a:pPr marL="0" indent="0">
-              <a:buNone/>
-            </a:pPr>
-            <a:r>
-              <a:rPr lang="en-US" sz="1100" b="1" dirty="0">
-                <a:solidFill>
-                  <a:srgbClr val="8A8A8A"/>
-                </a:solidFill>
-                <a:latin typeface="Calibri" pitchFamily="34" charset="0"/>
-                <a:ea typeface="Calibri" pitchFamily="34" charset="-122"/>
-                <a:cs typeface="Calibri" pitchFamily="34" charset="-120"/>
-              </a:rPr>
-              <a:t>11:00 AM ET</a:t>
-            </a:r>
-            <a:endParaRPr lang="en-US" sz="1100" dirty="0"/>
-          </a:p>
-        </p:txBody>
-      </p:sp>
-      <p:sp>
-        <p:nvSpPr>
-          <p:cNvPr id="27" name="Text 25"/>
-          <p:cNvSpPr/>
-          <p:nvPr/>
-        </p:nvSpPr>
-        <p:spPr>
-          <a:xfrm>
-            <a:off x="8595360" y="5029200"/>
-            <a:ext cx="3474720" cy="274320"/>
-          </a:xfrm>
-          <a:prstGeom prst="rect">
-            <a:avLst/>
-          </a:prstGeom>
-          <a:noFill/>
-          <a:ln/>
-        </p:spPr>
-        <p:txBody>
-          <a:bodyPr wrap="square" lIns="0" tIns="0" rIns="0" bIns="0" rtlCol="0" anchor="ctr"/>
-          <a:lstStyle/>
-          <a:p>
-            <a:pPr marL="0" indent="0">
-              <a:buNone/>
-            </a:pPr>
-            <a:r>
-              <a:rPr lang="en-US" sz="1400" dirty="0">
-                <a:solidFill>
                   <a:srgbClr val="1B1B1B"/>
                 </a:solidFill>
                 <a:latin typeface="Calibri" pitchFamily="34" charset="0"/>
-                <a:ea typeface="Calibri" pitchFamily="34" charset="-122"/>
-                <a:cs typeface="Calibri" pitchFamily="34" charset="-120"/>
-              </a:rPr>
-              <a:t>Investigation begins/support teams engaged</a:t>
-            </a:r>
-            <a:endParaRPr lang="en-US" sz="1400" dirty="0"/>
-          </a:p>
-        </p:txBody>
-      </p:sp>
-      <p:sp>
-        <p:nvSpPr>
-          <p:cNvPr id="28" name="Shape 26"/>
-          <p:cNvSpPr/>
-          <p:nvPr/>
-        </p:nvSpPr>
-        <p:spPr>
-          <a:xfrm>
-            <a:off x="6675120" y="5669280"/>
-            <a:ext cx="274320" cy="274320"/>
-          </a:xfrm>
-          <a:prstGeom prst="ellipse">
-            <a:avLst/>
-          </a:prstGeom>
-          <a:solidFill>
-            <a:srgbClr val="FFCD41"/>
-          </a:solidFill>
-          <a:ln w="12700">
-            <a:solidFill>
-              <a:srgbClr val="FFCD41"/>
-            </a:solidFill>
-            <a:prstDash val="solid"/>
-          </a:ln>
-        </p:spPr>
-      </p:sp>
-      <p:sp>
-        <p:nvSpPr>
-          <p:cNvPr id="29" name="Text 27"/>
-          <p:cNvSpPr/>
-          <p:nvPr/>
-        </p:nvSpPr>
-        <p:spPr>
-          <a:xfrm>
-            <a:off x="7178040" y="5669280"/>
-            <a:ext cx="1371600" cy="274320"/>
-          </a:xfrm>
-          <a:prstGeom prst="rect">
-            <a:avLst/>
-          </a:prstGeom>
-          <a:noFill/>
-          <a:ln/>
-        </p:spPr>
-        <p:txBody>
-          <a:bodyPr wrap="square" lIns="0" tIns="0" rIns="0" bIns="0" rtlCol="0" anchor="ctr"/>
-          <a:lstStyle/>
-          <a:p>
-            <a:pPr marL="0" indent="0">
-              <a:buNone/>
-            </a:pPr>
-            <a:r>
-              <a:rPr lang="en-US" sz="1100" b="1" dirty="0">
-                <a:solidFill>
-                  <a:srgbClr val="8A8A8A"/>
-                </a:solidFill>
-                <a:latin typeface="Calibri" pitchFamily="34" charset="0"/>
-                <a:ea typeface="Calibri" pitchFamily="34" charset="-122"/>
-                <a:cs typeface="Calibri" pitchFamily="34" charset="-120"/>
-              </a:rPr>
-              <a:t>12:00 PM ET</a:t>
-            </a:r>
-            <a:endParaRPr lang="en-US" sz="1100" dirty="0"/>
-          </a:p>
-        </p:txBody>
-      </p:sp>
-      <p:sp>
-        <p:nvSpPr>
-          <p:cNvPr id="30" name="Text 28"/>
-          <p:cNvSpPr/>
-          <p:nvPr/>
-        </p:nvSpPr>
-        <p:spPr>
-          <a:xfrm>
-            <a:off x="8595360" y="5669280"/>
-            <a:ext cx="3474720" cy="274320"/>
-          </a:xfrm>
-          <a:prstGeom prst="rect">
-            <a:avLst/>
-          </a:prstGeom>
-          <a:noFill/>
-          <a:ln/>
-        </p:spPr>
-        <p:txBody>
-          <a:bodyPr wrap="square" lIns="0" tIns="0" rIns="0" bIns="0" rtlCol="0" anchor="ctr"/>
-          <a:lstStyle/>
-          <a:p>
-            <a:pPr marL="0" indent="0">
-              <a:buNone/>
-            </a:pPr>
-            <a:r>
-              <a:rPr lang="en-US" sz="1400" dirty="0">
-                <a:solidFill>
-                  <a:srgbClr val="1B1B1B"/>
-                </a:solidFill>
-                <a:latin typeface="Calibri" pitchFamily="34" charset="0"/>
-                <a:ea typeface="Calibri" pitchFamily="34" charset="-122"/>
-                <a:cs typeface="Calibri" pitchFamily="34" charset="-120"/>
-              </a:rPr>
-              <a:t>Diagnosis complete</a:t>
-            </a:r>
-            <a:endParaRPr lang="en-US" sz="1400" dirty="0"/>
+              </a:rPr>
+              <a:t>Why start here</a:t>
+            </a:r>
+          </a:p>
+        </p:txBody>
+      </p:sp>
+      <p:sp>
+        <p:nvSpPr>
+          <p:cNvPr id="27" name="RightProveBody"/>
+          <p:cNvSpPr/>
+          <p:nvPr/>
+        </p:nvSpPr>
+        <p:spPr>
+          <a:xfrm>
+            <a:off x="6446320" y="5010000"/>
+            <a:ext cx="4900000" cy="900000"/>
+          </a:xfrm>
+          <a:prstGeom prst="rect">
+            <a:avLst/>
+          </a:prstGeom>
+          <a:noFill/>
+          <a:ln/>
+        </p:spPr>
+        <p:txBody>
+          <a:bodyPr wrap="square" lIns="0" tIns="0" rIns="0" bIns="0" rtlCol="0" anchor="t"/>
+          <a:lstStyle/>
+          <a:p>
+            <a:pPr marL="0" indent="0">
+              <a:buNone/>
+            </a:pPr>
+            <a:r>
+              <a:rPr lang="en-US" sz="1200" dirty="0">
+                <a:solidFill>
+                  <a:srgbClr val="4A4A4A"/>
+                </a:solidFill>
+                <a:latin typeface="Calibri" pitchFamily="34" charset="0"/>
+              </a:rPr>
+              <a:t>Nightly ETL failures are a high-frequency, high-pain pattern with clear MTTD/MTTR baselines  —  the ideal proving ground for context-aware, lineage-driven monitoring before expanding scope.</a:t>
+            </a:r>
           </a:p>
         </p:txBody>
       </p:sp>
@@ -2348,6 +2088,1119 @@
 </file>
 
 <file path=ppt/slides/slide3.xml><?xml version="1.0" encoding="utf-8"?>
+<p:sld xmlns:a="http://schemas.openxmlformats.org/drawingml/2006/main" xmlns:r="http://schemas.openxmlformats.org/officeDocument/2006/relationships" xmlns:p="http://schemas.openxmlformats.org/presentationml/2006/main">
+  <p:cSld name="Slide 2">
+    <p:bg>
+      <p:bgPr>
+        <a:solidFill>
+          <a:srgbClr val="FFFFFF"/>
+        </a:solidFill>
+        <a:effectLst/>
+      </p:bgPr>
+    </p:bg>
+    <p:spTree>
+      <p:nvGrpSpPr>
+        <p:cNvPr id="1" name=""/>
+        <p:cNvGrpSpPr/>
+        <p:nvPr/>
+      </p:nvGrpSpPr>
+      <p:grpSpPr>
+        <a:xfrm>
+          <a:off x="0" y="0"/>
+          <a:ext cx="0" cy="0"/>
+          <a:chOff x="0" y="0"/>
+          <a:chExt cx="0" cy="0"/>
+        </a:xfrm>
+      </p:grpSpPr>
+      <p:sp>
+        <p:nvSpPr>
+          <p:cNvPr id="2" name="Shape 0"/>
+          <p:cNvSpPr/>
+          <p:nvPr/>
+        </p:nvSpPr>
+        <p:spPr>
+          <a:xfrm>
+            <a:off x="0" y="0"/>
+            <a:ext cx="12161520" cy="164592"/>
+          </a:xfrm>
+          <a:prstGeom prst="rect">
+            <a:avLst/>
+          </a:prstGeom>
+          <a:solidFill>
+            <a:srgbClr val="D71E28"/>
+          </a:solidFill>
+          <a:ln w="12700">
+            <a:solidFill>
+              <a:srgbClr val="D71E28"/>
+            </a:solidFill>
+            <a:prstDash val="solid"/>
+          </a:ln>
+        </p:spPr>
+      </p:sp>
+      <p:sp>
+        <p:nvSpPr>
+          <p:cNvPr id="3" name="Text 1"/>
+          <p:cNvSpPr/>
+          <p:nvPr/>
+        </p:nvSpPr>
+        <p:spPr>
+          <a:xfrm>
+            <a:off x="731520" y="502920"/>
+            <a:ext cx="10058400" cy="320040"/>
+          </a:xfrm>
+          <a:prstGeom prst="rect">
+            <a:avLst/>
+          </a:prstGeom>
+          <a:noFill/>
+          <a:ln/>
+        </p:spPr>
+        <p:txBody>
+          <a:bodyPr wrap="square" lIns="0" tIns="0" rIns="0" bIns="0" rtlCol="0" anchor="ctr"/>
+          <a:lstStyle/>
+          <a:p>
+            <a:pPr marL="0" indent="0">
+              <a:buNone/>
+            </a:pPr>
+            <a:r>
+              <a:rPr lang="en-US" sz="1100" b="1" kern="0" spc="600" dirty="0">
+                <a:solidFill>
+                  <a:srgbClr val="D71E28"/>
+                </a:solidFill>
+                <a:latin typeface="Calibri" pitchFamily="34" charset="0"/>
+                <a:ea typeface="Calibri" pitchFamily="34" charset="-122"/>
+                <a:cs typeface="Calibri" pitchFamily="34" charset="-120"/>
+              </a:rPr>
+              <a:t>THE PROBLEM</a:t>
+            </a:r>
+            <a:endParaRPr lang="en-US" sz="1100" dirty="0"/>
+          </a:p>
+        </p:txBody>
+      </p:sp>
+      <p:sp>
+        <p:nvSpPr>
+          <p:cNvPr id="4" name="Text 2"/>
+          <p:cNvSpPr/>
+          <p:nvPr/>
+        </p:nvSpPr>
+        <p:spPr>
+          <a:xfrm>
+            <a:off x="731520" y="914400"/>
+            <a:ext cx="10698480" cy="914400"/>
+          </a:xfrm>
+          <a:prstGeom prst="rect">
+            <a:avLst/>
+          </a:prstGeom>
+          <a:noFill/>
+          <a:ln/>
+        </p:spPr>
+        <p:txBody>
+          <a:bodyPr wrap="square" lIns="0" tIns="0" rIns="0" bIns="0" rtlCol="0" anchor="ctr"/>
+          <a:lstStyle/>
+          <a:p>
+            <a:pPr marL="0" indent="0">
+              <a:buNone/>
+            </a:pPr>
+            <a:r>
+              <a:rPr lang="en-US" sz="3600" b="1" dirty="0">
+                <a:solidFill>
+                  <a:srgbClr val="1B1B1B"/>
+                </a:solidFill>
+                <a:latin typeface="Calibri" pitchFamily="34" charset="0"/>
+                <a:ea typeface="Calibri" pitchFamily="34" charset="-122"/>
+                <a:cs typeface="Calibri" pitchFamily="34" charset="-120"/>
+              </a:rPr>
+              <a:t>Nightly job failures hit hardest at 2 AM.</a:t>
+            </a:r>
+            <a:endParaRPr lang="en-US" sz="3600" dirty="0"/>
+          </a:p>
+        </p:txBody>
+      </p:sp>
+      <p:sp>
+        <p:nvSpPr>
+          <p:cNvPr id="5" name="Text 3"/>
+          <p:cNvSpPr/>
+          <p:nvPr/>
+        </p:nvSpPr>
+        <p:spPr>
+          <a:xfrm>
+            <a:off x="10789920" y="6400800"/>
+            <a:ext cx="822960" cy="274320"/>
+          </a:xfrm>
+          <a:prstGeom prst="rect">
+            <a:avLst/>
+          </a:prstGeom>
+          <a:noFill/>
+          <a:ln/>
+        </p:spPr>
+        <p:txBody>
+          <a:bodyPr wrap="square" lIns="0" tIns="0" rIns="0" bIns="0" rtlCol="0" anchor="ctr"/>
+          <a:lstStyle/>
+          <a:p>
+            <a:pPr marL="0" indent="0" algn="r">
+              <a:buNone/>
+            </a:pPr>
+            <a:r>
+              <a:rPr lang="en-US" sz="900" dirty="0">
+                <a:solidFill>
+                  <a:srgbClr val="8A8A8A"/>
+                </a:solidFill>
+                <a:latin typeface="Calibri" pitchFamily="34" charset="0"/>
+                <a:ea typeface="Calibri" pitchFamily="34" charset="-122"/>
+                <a:cs typeface="Calibri" pitchFamily="34" charset="-120"/>
+              </a:rPr>
+              <a:t>3 / 8</a:t>
+            </a:r>
+            <a:endParaRPr lang="en-US" sz="900" dirty="0"/>
+          </a:p>
+        </p:txBody>
+      </p:sp>
+      <p:sp>
+        <p:nvSpPr>
+          <p:cNvPr id="6" name="Text 4"/>
+          <p:cNvSpPr/>
+          <p:nvPr/>
+        </p:nvSpPr>
+        <p:spPr>
+          <a:xfrm>
+            <a:off x="731520" y="2011680"/>
+            <a:ext cx="5212080" cy="457200"/>
+          </a:xfrm>
+          <a:prstGeom prst="rect">
+            <a:avLst/>
+          </a:prstGeom>
+          <a:noFill/>
+          <a:ln/>
+        </p:spPr>
+        <p:txBody>
+          <a:bodyPr wrap="square" lIns="0" tIns="0" rIns="0" bIns="0" rtlCol="0" anchor="ctr"/>
+          <a:lstStyle/>
+          <a:p>
+            <a:pPr marL="0" indent="0">
+              <a:buNone/>
+            </a:pPr>
+            <a:r>
+              <a:rPr lang="en-US" sz="1900" b="1" dirty="0">
+                <a:solidFill>
+                  <a:srgbClr val="1B1B1B"/>
+                </a:solidFill>
+                <a:latin typeface="Calibri" pitchFamily="34" charset="0"/>
+                <a:ea typeface="Calibri" pitchFamily="34" charset="-122"/>
+                <a:cs typeface="Calibri" pitchFamily="34" charset="-120"/>
+              </a:rPr>
+              <a:t>Jobs run nightly. They fail nightly.</a:t>
+            </a:r>
+            <a:endParaRPr lang="en-US" sz="1900" dirty="0"/>
+          </a:p>
+        </p:txBody>
+      </p:sp>
+      <p:sp>
+        <p:nvSpPr>
+          <p:cNvPr id="7" name="Text 5"/>
+          <p:cNvSpPr/>
+          <p:nvPr/>
+        </p:nvSpPr>
+        <p:spPr>
+          <a:xfrm>
+            <a:off x="731520" y="2606040"/>
+            <a:ext cx="5212080" cy="2286000"/>
+          </a:xfrm>
+          <a:prstGeom prst="rect">
+            <a:avLst/>
+          </a:prstGeom>
+          <a:noFill/>
+          <a:ln/>
+        </p:spPr>
+        <p:txBody>
+          <a:bodyPr wrap="square" lIns="0" tIns="0" rIns="0" bIns="0" rtlCol="0" anchor="ctr"/>
+          <a:lstStyle/>
+          <a:p>
+            <a:pPr marL="0" indent="0">
+              <a:spcAft>
+                <a:spcPts val="1000"/>
+              </a:spcAft>
+              <a:buNone/>
+            </a:pPr>
+            <a:r>
+              <a:rPr lang="en-US" sz="1400" dirty="0">
+                <a:solidFill>
+                  <a:srgbClr val="4A4A4A"/>
+                </a:solidFill>
+                <a:latin typeface="Calibri" pitchFamily="34" charset="0"/>
+                <a:ea typeface="Calibri" pitchFamily="34" charset="-122"/>
+                <a:cs typeface="Calibri" pitchFamily="34" charset="-120"/>
+              </a:rPr>
+              <a:t>EGS L2 production support teams in India are the first responders.</a:t>
+            </a:r>
+            <a:endParaRPr lang="en-US" sz="1400" dirty="0"/>
+          </a:p>
+          <a:p>
+            <a:pPr marL="0" indent="0">
+              <a:spcAft>
+                <a:spcPts val="1000"/>
+              </a:spcAft>
+              <a:buNone/>
+            </a:pPr>
+            <a:r>
+              <a:rPr lang="en-US" sz="1400" dirty="0">
+                <a:solidFill>
+                  <a:srgbClr val="4A4A4A"/>
+                </a:solidFill>
+                <a:latin typeface="Calibri" pitchFamily="34" charset="0"/>
+                <a:ea typeface="Calibri" pitchFamily="34" charset="-122"/>
+                <a:cs typeface="Calibri" pitchFamily="34" charset="-120"/>
+              </a:rPr>
+              <a:t>Most of our databases reside on SAR-restricted servers  —  accessible only from inside the US.</a:t>
+            </a:r>
+            <a:endParaRPr lang="en-US" sz="1400" dirty="0"/>
+          </a:p>
+          <a:p>
+            <a:pPr marL="0" indent="0">
+              <a:spcAft>
+                <a:spcPts val="1000"/>
+              </a:spcAft>
+              <a:buNone/>
+            </a:pPr>
+            <a:r>
+              <a:rPr lang="en-US" sz="1400" dirty="0">
+                <a:solidFill>
+                  <a:srgbClr val="4A4A4A"/>
+                </a:solidFill>
+                <a:latin typeface="Calibri" pitchFamily="34" charset="0"/>
+                <a:ea typeface="Calibri" pitchFamily="34" charset="-122"/>
+                <a:cs typeface="Calibri" pitchFamily="34" charset="-120"/>
+              </a:rPr>
+              <a:t>Investigation stalls until US teams come online  —  hours later.</a:t>
+            </a:r>
+            <a:endParaRPr lang="en-US" sz="1400" dirty="0"/>
+          </a:p>
+          <a:p>
+            <a:pPr marL="0" indent="0">
+              <a:spcAft>
+                <a:spcPts val="1000"/>
+              </a:spcAft>
+              <a:buNone/>
+            </a:pPr>
+            <a:r>
+              <a:rPr lang="en-US" sz="1400" dirty="0">
+                <a:solidFill>
+                  <a:srgbClr val="4A4A4A"/>
+                </a:solidFill>
+                <a:latin typeface="Calibri" pitchFamily="34" charset="0"/>
+                <a:ea typeface="Calibri" pitchFamily="34" charset="-122"/>
+                <a:cs typeface="Calibri" pitchFamily="34" charset="-120"/>
+              </a:rPr>
+              <a:t>Multiple engineers and various teams get pulled in to coordinate the resolution.</a:t>
+            </a:r>
+            <a:endParaRPr lang="en-US" sz="1400" dirty="0"/>
+          </a:p>
+        </p:txBody>
+      </p:sp>
+      <p:sp>
+        <p:nvSpPr>
+          <p:cNvPr id="8" name="Text 6"/>
+          <p:cNvSpPr/>
+          <p:nvPr/>
+        </p:nvSpPr>
+        <p:spPr>
+          <a:xfrm>
+            <a:off x="731520" y="5029200"/>
+            <a:ext cx="5212080" cy="320040"/>
+          </a:xfrm>
+          <a:prstGeom prst="rect">
+            <a:avLst/>
+          </a:prstGeom>
+          <a:noFill/>
+          <a:ln/>
+        </p:spPr>
+        <p:txBody>
+          <a:bodyPr wrap="square" lIns="0" tIns="0" rIns="0" bIns="0" rtlCol="0" anchor="ctr"/>
+          <a:lstStyle/>
+          <a:p>
+            <a:pPr marL="0" indent="0">
+              <a:buNone/>
+            </a:pPr>
+            <a:r>
+              <a:rPr lang="en-US" sz="1400" i="1" dirty="0">
+                <a:solidFill>
+                  <a:srgbClr val="8A8A8A"/>
+                </a:solidFill>
+                <a:latin typeface="Calibri" pitchFamily="34" charset="0"/>
+                <a:ea typeface="Calibri" pitchFamily="34" charset="-122"/>
+                <a:cs typeface="Calibri" pitchFamily="34" charset="-120"/>
+              </a:rPr>
+              <a:t>Up to</a:t>
+            </a:r>
+            <a:endParaRPr lang="en-US" sz="1400" dirty="0"/>
+          </a:p>
+        </p:txBody>
+      </p:sp>
+      <p:sp>
+        <p:nvSpPr>
+          <p:cNvPr id="9" name="Text 7"/>
+          <p:cNvSpPr/>
+          <p:nvPr/>
+        </p:nvSpPr>
+        <p:spPr>
+          <a:xfrm>
+            <a:off x="731520" y="5349240"/>
+            <a:ext cx="5212080" cy="868680"/>
+          </a:xfrm>
+          <a:prstGeom prst="rect">
+            <a:avLst/>
+          </a:prstGeom>
+          <a:noFill/>
+          <a:ln/>
+        </p:spPr>
+        <p:txBody>
+          <a:bodyPr wrap="square" lIns="0" tIns="0" rIns="0" bIns="0" rtlCol="0" anchor="ctr"/>
+          <a:lstStyle/>
+          <a:p>
+            <a:pPr marL="0" indent="0">
+              <a:buNone/>
+            </a:pPr>
+            <a:r>
+              <a:rPr lang="en-US" sz="5600" b="1" dirty="0">
+                <a:solidFill>
+                  <a:srgbClr val="D71E28"/>
+                </a:solidFill>
+                <a:latin typeface="Calibri" pitchFamily="34" charset="0"/>
+                <a:ea typeface="Calibri" pitchFamily="34" charset="-122"/>
+                <a:cs typeface="Calibri" pitchFamily="34" charset="-120"/>
+              </a:rPr>
+              <a:t>10 hours</a:t>
+            </a:r>
+            <a:endParaRPr lang="en-US" sz="5600" dirty="0"/>
+          </a:p>
+        </p:txBody>
+      </p:sp>
+      <p:sp>
+        <p:nvSpPr>
+          <p:cNvPr id="10" name="Text 8"/>
+          <p:cNvSpPr/>
+          <p:nvPr/>
+        </p:nvSpPr>
+        <p:spPr>
+          <a:xfrm>
+            <a:off x="731520" y="6080760"/>
+            <a:ext cx="5212080" cy="320040"/>
+          </a:xfrm>
+          <a:prstGeom prst="rect">
+            <a:avLst/>
+          </a:prstGeom>
+          <a:noFill/>
+          <a:ln/>
+        </p:spPr>
+        <p:txBody>
+          <a:bodyPr wrap="square" lIns="0" tIns="0" rIns="0" bIns="0" rtlCol="0" anchor="ctr"/>
+          <a:lstStyle/>
+          <a:p>
+            <a:pPr marL="0" indent="0">
+              <a:buNone/>
+            </a:pPr>
+            <a:r>
+              <a:rPr lang="en-US" sz="1200" i="1" dirty="0">
+                <a:solidFill>
+                  <a:srgbClr val="1B1B1B"/>
+                </a:solidFill>
+                <a:latin typeface="Calibri" pitchFamily="34" charset="0"/>
+                <a:ea typeface="Calibri" pitchFamily="34" charset="-122"/>
+                <a:cs typeface="Calibri" pitchFamily="34" charset="-120"/>
+              </a:rPr>
+              <a:t>on the worst incidents  —  before real debugging even begins.</a:t>
+            </a:r>
+            <a:endParaRPr lang="en-US" sz="1200" dirty="0"/>
+          </a:p>
+        </p:txBody>
+      </p:sp>
+      <p:sp>
+        <p:nvSpPr>
+          <p:cNvPr id="11" name="Text 9"/>
+          <p:cNvSpPr/>
+          <p:nvPr/>
+        </p:nvSpPr>
+        <p:spPr>
+          <a:xfrm>
+            <a:off x="6675120" y="2011680"/>
+            <a:ext cx="5029200" cy="274320"/>
+          </a:xfrm>
+          <a:prstGeom prst="rect">
+            <a:avLst/>
+          </a:prstGeom>
+          <a:noFill/>
+          <a:ln/>
+        </p:spPr>
+        <p:txBody>
+          <a:bodyPr wrap="square" lIns="0" tIns="0" rIns="0" bIns="0" rtlCol="0" anchor="ctr"/>
+          <a:lstStyle/>
+          <a:p>
+            <a:pPr marL="0" indent="0">
+              <a:buNone/>
+            </a:pPr>
+            <a:r>
+              <a:rPr lang="en-US" sz="1000" b="1" kern="0" spc="500" dirty="0">
+                <a:solidFill>
+                  <a:srgbClr val="8A8A8A"/>
+                </a:solidFill>
+                <a:latin typeface="Calibri" pitchFamily="34" charset="0"/>
+                <a:ea typeface="Calibri" pitchFamily="34" charset="-122"/>
+                <a:cs typeface="Calibri" pitchFamily="34" charset="-120"/>
+              </a:rPr>
+              <a:t>ANATOMY OF A NIGHTLY FAILURE</a:t>
+            </a:r>
+            <a:endParaRPr lang="en-US" sz="1000" dirty="0"/>
+          </a:p>
+        </p:txBody>
+      </p:sp>
+      <p:sp>
+        <p:nvSpPr>
+          <p:cNvPr id="12" name="Shape 10"/>
+          <p:cNvSpPr/>
+          <p:nvPr/>
+        </p:nvSpPr>
+        <p:spPr>
+          <a:xfrm>
+            <a:off x="6812280" y="2606040"/>
+            <a:ext cx="0" cy="3200400"/>
+          </a:xfrm>
+          <a:prstGeom prst="line">
+            <a:avLst/>
+          </a:prstGeom>
+          <a:noFill/>
+          <a:ln w="25400">
+            <a:solidFill>
+              <a:srgbClr val="E5E0D5"/>
+            </a:solidFill>
+            <a:prstDash val="solid"/>
+          </a:ln>
+        </p:spPr>
+      </p:sp>
+      <p:sp>
+        <p:nvSpPr>
+          <p:cNvPr id="13" name="Shape 11"/>
+          <p:cNvSpPr/>
+          <p:nvPr/>
+        </p:nvSpPr>
+        <p:spPr>
+          <a:xfrm>
+            <a:off x="6675120" y="2468880"/>
+            <a:ext cx="274320" cy="274320"/>
+          </a:xfrm>
+          <a:prstGeom prst="ellipse">
+            <a:avLst/>
+          </a:prstGeom>
+          <a:solidFill>
+            <a:srgbClr val="FFCD41"/>
+          </a:solidFill>
+          <a:ln w="12700">
+            <a:solidFill>
+              <a:srgbClr val="FFCD41"/>
+            </a:solidFill>
+            <a:prstDash val="solid"/>
+          </a:ln>
+        </p:spPr>
+      </p:sp>
+      <p:sp>
+        <p:nvSpPr>
+          <p:cNvPr id="14" name="Text 12"/>
+          <p:cNvSpPr/>
+          <p:nvPr/>
+        </p:nvSpPr>
+        <p:spPr>
+          <a:xfrm>
+            <a:off x="7178040" y="2468880"/>
+            <a:ext cx="1371600" cy="274320"/>
+          </a:xfrm>
+          <a:prstGeom prst="rect">
+            <a:avLst/>
+          </a:prstGeom>
+          <a:noFill/>
+          <a:ln/>
+        </p:spPr>
+        <p:txBody>
+          <a:bodyPr wrap="square" lIns="0" tIns="0" rIns="0" bIns="0" rtlCol="0" anchor="ctr"/>
+          <a:lstStyle/>
+          <a:p>
+            <a:pPr marL="0" indent="0">
+              <a:buNone/>
+            </a:pPr>
+            <a:r>
+              <a:rPr lang="en-US" sz="1100" b="1" dirty="0">
+                <a:solidFill>
+                  <a:srgbClr val="8A8A8A"/>
+                </a:solidFill>
+                <a:latin typeface="Calibri" pitchFamily="34" charset="0"/>
+                <a:ea typeface="Calibri" pitchFamily="34" charset="-122"/>
+                <a:cs typeface="Calibri" pitchFamily="34" charset="-120"/>
+              </a:rPr>
+              <a:t>2:00 AM ET</a:t>
+            </a:r>
+            <a:endParaRPr lang="en-US" sz="1100" dirty="0"/>
+          </a:p>
+        </p:txBody>
+      </p:sp>
+      <p:sp>
+        <p:nvSpPr>
+          <p:cNvPr id="15" name="Text 13"/>
+          <p:cNvSpPr/>
+          <p:nvPr/>
+        </p:nvSpPr>
+        <p:spPr>
+          <a:xfrm>
+            <a:off x="8595360" y="2468880"/>
+            <a:ext cx="3474720" cy="274320"/>
+          </a:xfrm>
+          <a:prstGeom prst="rect">
+            <a:avLst/>
+          </a:prstGeom>
+          <a:noFill/>
+          <a:ln/>
+        </p:spPr>
+        <p:txBody>
+          <a:bodyPr wrap="square" lIns="0" tIns="0" rIns="0" bIns="0" rtlCol="0" anchor="ctr"/>
+          <a:lstStyle/>
+          <a:p>
+            <a:pPr marL="0" indent="0">
+              <a:buNone/>
+            </a:pPr>
+            <a:r>
+              <a:rPr lang="en-US" sz="1400" dirty="0">
+                <a:solidFill>
+                  <a:srgbClr val="1B1B1B"/>
+                </a:solidFill>
+                <a:latin typeface="Calibri" pitchFamily="34" charset="0"/>
+                <a:ea typeface="Calibri" pitchFamily="34" charset="-122"/>
+                <a:cs typeface="Calibri" pitchFamily="34" charset="-120"/>
+              </a:rPr>
+              <a:t>Job fails/ INC Generated</a:t>
+            </a:r>
+            <a:endParaRPr lang="en-US" sz="1400" dirty="0"/>
+          </a:p>
+        </p:txBody>
+      </p:sp>
+      <p:sp>
+        <p:nvSpPr>
+          <p:cNvPr id="16" name="Shape 14"/>
+          <p:cNvSpPr/>
+          <p:nvPr/>
+        </p:nvSpPr>
+        <p:spPr>
+          <a:xfrm>
+            <a:off x="6675120" y="3108960"/>
+            <a:ext cx="274320" cy="274320"/>
+          </a:xfrm>
+          <a:prstGeom prst="ellipse">
+            <a:avLst/>
+          </a:prstGeom>
+          <a:solidFill>
+            <a:srgbClr val="FFCD41"/>
+          </a:solidFill>
+          <a:ln w="12700">
+            <a:solidFill>
+              <a:srgbClr val="FFCD41"/>
+            </a:solidFill>
+            <a:prstDash val="solid"/>
+          </a:ln>
+        </p:spPr>
+      </p:sp>
+      <p:sp>
+        <p:nvSpPr>
+          <p:cNvPr id="17" name="Text 15"/>
+          <p:cNvSpPr/>
+          <p:nvPr/>
+        </p:nvSpPr>
+        <p:spPr>
+          <a:xfrm>
+            <a:off x="7178040" y="3108960"/>
+            <a:ext cx="1371600" cy="274320"/>
+          </a:xfrm>
+          <a:prstGeom prst="rect">
+            <a:avLst/>
+          </a:prstGeom>
+          <a:noFill/>
+          <a:ln/>
+        </p:spPr>
+        <p:txBody>
+          <a:bodyPr wrap="square" lIns="0" tIns="0" rIns="0" bIns="0" rtlCol="0" anchor="ctr"/>
+          <a:lstStyle/>
+          <a:p>
+            <a:pPr marL="0" indent="0">
+              <a:buNone/>
+            </a:pPr>
+            <a:r>
+              <a:rPr lang="en-US" sz="1100" b="1" dirty="0">
+                <a:solidFill>
+                  <a:srgbClr val="8A8A8A"/>
+                </a:solidFill>
+                <a:latin typeface="Calibri" pitchFamily="34" charset="0"/>
+                <a:ea typeface="Calibri" pitchFamily="34" charset="-122"/>
+                <a:cs typeface="Calibri" pitchFamily="34" charset="-120"/>
+              </a:rPr>
+              <a:t>2:05 AM ET</a:t>
+            </a:r>
+            <a:endParaRPr lang="en-US" sz="1100" dirty="0"/>
+          </a:p>
+        </p:txBody>
+      </p:sp>
+      <p:sp>
+        <p:nvSpPr>
+          <p:cNvPr id="18" name="Text 16"/>
+          <p:cNvSpPr/>
+          <p:nvPr/>
+        </p:nvSpPr>
+        <p:spPr>
+          <a:xfrm>
+            <a:off x="8595360" y="3108960"/>
+            <a:ext cx="3474720" cy="274320"/>
+          </a:xfrm>
+          <a:prstGeom prst="rect">
+            <a:avLst/>
+          </a:prstGeom>
+          <a:noFill/>
+          <a:ln/>
+        </p:spPr>
+        <p:txBody>
+          <a:bodyPr wrap="square" lIns="0" tIns="0" rIns="0" bIns="0" rtlCol="0" anchor="ctr"/>
+          <a:lstStyle/>
+          <a:p>
+            <a:pPr marL="0" indent="0">
+              <a:buNone/>
+            </a:pPr>
+            <a:r>
+              <a:rPr lang="en-US" sz="1400" dirty="0">
+                <a:solidFill>
+                  <a:srgbClr val="1B1B1B"/>
+                </a:solidFill>
+                <a:latin typeface="Calibri" pitchFamily="34" charset="0"/>
+                <a:ea typeface="Calibri" pitchFamily="34" charset="-122"/>
+                <a:cs typeface="Calibri" pitchFamily="34" charset="-120"/>
+              </a:rPr>
+              <a:t>Offshore EGS teams engaged</a:t>
+            </a:r>
+            <a:endParaRPr lang="en-US" sz="1400" dirty="0"/>
+          </a:p>
+        </p:txBody>
+      </p:sp>
+      <p:sp>
+        <p:nvSpPr>
+          <p:cNvPr id="19" name="Shape 17"/>
+          <p:cNvSpPr/>
+          <p:nvPr/>
+        </p:nvSpPr>
+        <p:spPr>
+          <a:xfrm>
+            <a:off x="6675120" y="3749040"/>
+            <a:ext cx="274320" cy="274320"/>
+          </a:xfrm>
+          <a:prstGeom prst="ellipse">
+            <a:avLst/>
+          </a:prstGeom>
+          <a:solidFill>
+            <a:srgbClr val="D71E28"/>
+          </a:solidFill>
+          <a:ln w="12700">
+            <a:solidFill>
+              <a:srgbClr val="D71E28"/>
+            </a:solidFill>
+            <a:prstDash val="solid"/>
+          </a:ln>
+        </p:spPr>
+      </p:sp>
+      <p:sp>
+        <p:nvSpPr>
+          <p:cNvPr id="20" name="Text 18"/>
+          <p:cNvSpPr/>
+          <p:nvPr/>
+        </p:nvSpPr>
+        <p:spPr>
+          <a:xfrm>
+            <a:off x="7178040" y="3749040"/>
+            <a:ext cx="1371600" cy="274320"/>
+          </a:xfrm>
+          <a:prstGeom prst="rect">
+            <a:avLst/>
+          </a:prstGeom>
+          <a:noFill/>
+          <a:ln/>
+        </p:spPr>
+        <p:txBody>
+          <a:bodyPr wrap="square" lIns="0" tIns="0" rIns="0" bIns="0" rtlCol="0" anchor="ctr"/>
+          <a:lstStyle/>
+          <a:p>
+            <a:pPr marL="0" indent="0">
+              <a:buNone/>
+            </a:pPr>
+            <a:r>
+              <a:rPr lang="en-US" sz="1100" b="1" dirty="0">
+                <a:solidFill>
+                  <a:srgbClr val="8A8A8A"/>
+                </a:solidFill>
+                <a:latin typeface="Calibri" pitchFamily="34" charset="0"/>
+                <a:ea typeface="Calibri" pitchFamily="34" charset="-122"/>
+                <a:cs typeface="Calibri" pitchFamily="34" charset="-120"/>
+              </a:rPr>
+              <a:t>2:15 AM ET</a:t>
+            </a:r>
+            <a:endParaRPr lang="en-US" sz="1100" dirty="0"/>
+          </a:p>
+        </p:txBody>
+      </p:sp>
+      <p:sp>
+        <p:nvSpPr>
+          <p:cNvPr id="21" name="Text 19"/>
+          <p:cNvSpPr/>
+          <p:nvPr/>
+        </p:nvSpPr>
+        <p:spPr>
+          <a:xfrm>
+            <a:off x="8595360" y="3749040"/>
+            <a:ext cx="3474720" cy="274320"/>
+          </a:xfrm>
+          <a:prstGeom prst="rect">
+            <a:avLst/>
+          </a:prstGeom>
+          <a:noFill/>
+          <a:ln/>
+        </p:spPr>
+        <p:txBody>
+          <a:bodyPr wrap="square" lIns="0" tIns="0" rIns="0" bIns="0" rtlCol="0" anchor="ctr"/>
+          <a:lstStyle/>
+          <a:p>
+            <a:pPr marL="0" indent="0">
+              <a:buNone/>
+            </a:pPr>
+            <a:r>
+              <a:rPr lang="en-US" sz="1400" b="1" dirty="0">
+                <a:solidFill>
+                  <a:srgbClr val="D71E28"/>
+                </a:solidFill>
+                <a:latin typeface="Calibri" pitchFamily="34" charset="0"/>
+                <a:ea typeface="Calibri" pitchFamily="34" charset="-122"/>
+                <a:cs typeface="Calibri" pitchFamily="34" charset="-120"/>
+              </a:rPr>
+              <a:t>Blocked by SAR access</a:t>
+            </a:r>
+            <a:endParaRPr lang="en-US" sz="1400" dirty="0"/>
+          </a:p>
+        </p:txBody>
+      </p:sp>
+      <p:sp>
+        <p:nvSpPr>
+          <p:cNvPr id="22" name="Shape 20"/>
+          <p:cNvSpPr/>
+          <p:nvPr/>
+        </p:nvSpPr>
+        <p:spPr>
+          <a:xfrm>
+            <a:off x="6675120" y="4389120"/>
+            <a:ext cx="274320" cy="274320"/>
+          </a:xfrm>
+          <a:prstGeom prst="ellipse">
+            <a:avLst/>
+          </a:prstGeom>
+          <a:solidFill>
+            <a:srgbClr val="D71E28"/>
+          </a:solidFill>
+          <a:ln w="12700">
+            <a:solidFill>
+              <a:srgbClr val="D71E28"/>
+            </a:solidFill>
+            <a:prstDash val="solid"/>
+          </a:ln>
+        </p:spPr>
+      </p:sp>
+      <p:sp>
+        <p:nvSpPr>
+          <p:cNvPr id="23" name="Text 21"/>
+          <p:cNvSpPr/>
+          <p:nvPr/>
+        </p:nvSpPr>
+        <p:spPr>
+          <a:xfrm>
+            <a:off x="7178040" y="4389120"/>
+            <a:ext cx="1371600" cy="274320"/>
+          </a:xfrm>
+          <a:prstGeom prst="rect">
+            <a:avLst/>
+          </a:prstGeom>
+          <a:noFill/>
+          <a:ln/>
+        </p:spPr>
+        <p:txBody>
+          <a:bodyPr wrap="square" lIns="0" tIns="0" rIns="0" bIns="0" rtlCol="0" anchor="ctr"/>
+          <a:lstStyle/>
+          <a:p>
+            <a:pPr marL="0" indent="0">
+              <a:buNone/>
+            </a:pPr>
+            <a:r>
+              <a:rPr lang="en-US" sz="1100" b="1" dirty="0">
+                <a:solidFill>
+                  <a:srgbClr val="8A8A8A"/>
+                </a:solidFill>
+                <a:latin typeface="Calibri" pitchFamily="34" charset="0"/>
+                <a:ea typeface="Calibri" pitchFamily="34" charset="-122"/>
+                <a:cs typeface="Calibri" pitchFamily="34" charset="-120"/>
+              </a:rPr>
+              <a:t>9:00 AM ET</a:t>
+            </a:r>
+            <a:endParaRPr lang="en-US" sz="1100" dirty="0"/>
+          </a:p>
+        </p:txBody>
+      </p:sp>
+      <p:sp>
+        <p:nvSpPr>
+          <p:cNvPr id="24" name="Text 22"/>
+          <p:cNvSpPr/>
+          <p:nvPr/>
+        </p:nvSpPr>
+        <p:spPr>
+          <a:xfrm>
+            <a:off x="8595360" y="4389120"/>
+            <a:ext cx="3474720" cy="274320"/>
+          </a:xfrm>
+          <a:prstGeom prst="rect">
+            <a:avLst/>
+          </a:prstGeom>
+          <a:noFill/>
+          <a:ln/>
+        </p:spPr>
+        <p:txBody>
+          <a:bodyPr wrap="square" lIns="0" tIns="0" rIns="0" bIns="0" rtlCol="0" anchor="ctr"/>
+          <a:lstStyle/>
+          <a:p>
+            <a:pPr marL="0" indent="0">
+              <a:buNone/>
+            </a:pPr>
+            <a:r>
+              <a:rPr lang="en-US" sz="1400" b="1" dirty="0">
+                <a:solidFill>
+                  <a:srgbClr val="D71E28"/>
+                </a:solidFill>
+                <a:latin typeface="Calibri" pitchFamily="34" charset="0"/>
+                <a:ea typeface="Calibri" pitchFamily="34" charset="-122"/>
+                <a:cs typeface="Calibri" pitchFamily="34" charset="-120"/>
+              </a:rPr>
+              <a:t>US teams come online</a:t>
+            </a:r>
+            <a:endParaRPr lang="en-US" sz="1400" dirty="0"/>
+          </a:p>
+        </p:txBody>
+      </p:sp>
+      <p:sp>
+        <p:nvSpPr>
+          <p:cNvPr id="25" name="Shape 23"/>
+          <p:cNvSpPr/>
+          <p:nvPr/>
+        </p:nvSpPr>
+        <p:spPr>
+          <a:xfrm>
+            <a:off x="6675120" y="5029200"/>
+            <a:ext cx="274320" cy="274320"/>
+          </a:xfrm>
+          <a:prstGeom prst="ellipse">
+            <a:avLst/>
+          </a:prstGeom>
+          <a:solidFill>
+            <a:srgbClr val="FFCD41"/>
+          </a:solidFill>
+          <a:ln w="12700">
+            <a:solidFill>
+              <a:srgbClr val="FFCD41"/>
+            </a:solidFill>
+            <a:prstDash val="solid"/>
+          </a:ln>
+        </p:spPr>
+      </p:sp>
+      <p:sp>
+        <p:nvSpPr>
+          <p:cNvPr id="26" name="Text 24"/>
+          <p:cNvSpPr/>
+          <p:nvPr/>
+        </p:nvSpPr>
+        <p:spPr>
+          <a:xfrm>
+            <a:off x="7178040" y="5029200"/>
+            <a:ext cx="1371600" cy="274320"/>
+          </a:xfrm>
+          <a:prstGeom prst="rect">
+            <a:avLst/>
+          </a:prstGeom>
+          <a:noFill/>
+          <a:ln/>
+        </p:spPr>
+        <p:txBody>
+          <a:bodyPr wrap="square" lIns="0" tIns="0" rIns="0" bIns="0" rtlCol="0" anchor="ctr"/>
+          <a:lstStyle/>
+          <a:p>
+            <a:pPr marL="0" indent="0">
+              <a:buNone/>
+            </a:pPr>
+            <a:r>
+              <a:rPr lang="en-US" sz="1100" b="1" dirty="0">
+                <a:solidFill>
+                  <a:srgbClr val="8A8A8A"/>
+                </a:solidFill>
+                <a:latin typeface="Calibri" pitchFamily="34" charset="0"/>
+                <a:ea typeface="Calibri" pitchFamily="34" charset="-122"/>
+                <a:cs typeface="Calibri" pitchFamily="34" charset="-120"/>
+              </a:rPr>
+              <a:t>11:00 AM ET</a:t>
+            </a:r>
+            <a:endParaRPr lang="en-US" sz="1100" dirty="0"/>
+          </a:p>
+        </p:txBody>
+      </p:sp>
+      <p:sp>
+        <p:nvSpPr>
+          <p:cNvPr id="27" name="Text 25"/>
+          <p:cNvSpPr/>
+          <p:nvPr/>
+        </p:nvSpPr>
+        <p:spPr>
+          <a:xfrm>
+            <a:off x="8595360" y="5029200"/>
+            <a:ext cx="3474720" cy="274320"/>
+          </a:xfrm>
+          <a:prstGeom prst="rect">
+            <a:avLst/>
+          </a:prstGeom>
+          <a:noFill/>
+          <a:ln/>
+        </p:spPr>
+        <p:txBody>
+          <a:bodyPr wrap="square" lIns="0" tIns="0" rIns="0" bIns="0" rtlCol="0" anchor="ctr"/>
+          <a:lstStyle/>
+          <a:p>
+            <a:pPr marL="0" indent="0">
+              <a:buNone/>
+            </a:pPr>
+            <a:r>
+              <a:rPr lang="en-US" sz="1400" dirty="0">
+                <a:solidFill>
+                  <a:srgbClr val="1B1B1B"/>
+                </a:solidFill>
+                <a:latin typeface="Calibri" pitchFamily="34" charset="0"/>
+                <a:ea typeface="Calibri" pitchFamily="34" charset="-122"/>
+                <a:cs typeface="Calibri" pitchFamily="34" charset="-120"/>
+              </a:rPr>
+              <a:t>Investigation begins/support teams engaged</a:t>
+            </a:r>
+            <a:endParaRPr lang="en-US" sz="1400" dirty="0"/>
+          </a:p>
+        </p:txBody>
+      </p:sp>
+      <p:sp>
+        <p:nvSpPr>
+          <p:cNvPr id="28" name="Shape 26"/>
+          <p:cNvSpPr/>
+          <p:nvPr/>
+        </p:nvSpPr>
+        <p:spPr>
+          <a:xfrm>
+            <a:off x="6675120" y="5669280"/>
+            <a:ext cx="274320" cy="274320"/>
+          </a:xfrm>
+          <a:prstGeom prst="ellipse">
+            <a:avLst/>
+          </a:prstGeom>
+          <a:solidFill>
+            <a:srgbClr val="FFCD41"/>
+          </a:solidFill>
+          <a:ln w="12700">
+            <a:solidFill>
+              <a:srgbClr val="FFCD41"/>
+            </a:solidFill>
+            <a:prstDash val="solid"/>
+          </a:ln>
+        </p:spPr>
+      </p:sp>
+      <p:sp>
+        <p:nvSpPr>
+          <p:cNvPr id="29" name="Text 27"/>
+          <p:cNvSpPr/>
+          <p:nvPr/>
+        </p:nvSpPr>
+        <p:spPr>
+          <a:xfrm>
+            <a:off x="7178040" y="5669280"/>
+            <a:ext cx="1371600" cy="274320"/>
+          </a:xfrm>
+          <a:prstGeom prst="rect">
+            <a:avLst/>
+          </a:prstGeom>
+          <a:noFill/>
+          <a:ln/>
+        </p:spPr>
+        <p:txBody>
+          <a:bodyPr wrap="square" lIns="0" tIns="0" rIns="0" bIns="0" rtlCol="0" anchor="ctr"/>
+          <a:lstStyle/>
+          <a:p>
+            <a:pPr marL="0" indent="0">
+              <a:buNone/>
+            </a:pPr>
+            <a:r>
+              <a:rPr lang="en-US" sz="1100" b="1" dirty="0">
+                <a:solidFill>
+                  <a:srgbClr val="8A8A8A"/>
+                </a:solidFill>
+                <a:latin typeface="Calibri" pitchFamily="34" charset="0"/>
+                <a:ea typeface="Calibri" pitchFamily="34" charset="-122"/>
+                <a:cs typeface="Calibri" pitchFamily="34" charset="-120"/>
+              </a:rPr>
+              <a:t>12:00 PM ET</a:t>
+            </a:r>
+            <a:endParaRPr lang="en-US" sz="1100" dirty="0"/>
+          </a:p>
+        </p:txBody>
+      </p:sp>
+      <p:sp>
+        <p:nvSpPr>
+          <p:cNvPr id="30" name="Text 28"/>
+          <p:cNvSpPr/>
+          <p:nvPr/>
+        </p:nvSpPr>
+        <p:spPr>
+          <a:xfrm>
+            <a:off x="8595360" y="5669280"/>
+            <a:ext cx="3474720" cy="274320"/>
+          </a:xfrm>
+          <a:prstGeom prst="rect">
+            <a:avLst/>
+          </a:prstGeom>
+          <a:noFill/>
+          <a:ln/>
+        </p:spPr>
+        <p:txBody>
+          <a:bodyPr wrap="square" lIns="0" tIns="0" rIns="0" bIns="0" rtlCol="0" anchor="ctr"/>
+          <a:lstStyle/>
+          <a:p>
+            <a:pPr marL="0" indent="0">
+              <a:buNone/>
+            </a:pPr>
+            <a:r>
+              <a:rPr lang="en-US" sz="1400" dirty="0">
+                <a:solidFill>
+                  <a:srgbClr val="1B1B1B"/>
+                </a:solidFill>
+                <a:latin typeface="Calibri" pitchFamily="34" charset="0"/>
+                <a:ea typeface="Calibri" pitchFamily="34" charset="-122"/>
+                <a:cs typeface="Calibri" pitchFamily="34" charset="-120"/>
+              </a:rPr>
+              <a:t>Diagnosis complete</a:t>
+            </a:r>
+            <a:endParaRPr lang="en-US" sz="1400" dirty="0"/>
+          </a:p>
+        </p:txBody>
+      </p:sp>
+    </p:spTree>
+  </p:cSld>
+  <p:clrMapOvr>
+    <a:masterClrMapping/>
+  </p:clrMapOvr>
+</p:sld>
+</file>
+
+<file path=ppt/slides/slide4.xml><?xml version="1.0" encoding="utf-8"?>
 <p:sld xmlns:a="http://schemas.openxmlformats.org/drawingml/2006/main" xmlns:r="http://schemas.openxmlformats.org/officeDocument/2006/relationships" xmlns:p="http://schemas.openxmlformats.org/presentationml/2006/main">
   <p:cSld name="Slide 3">
     <p:bg>
@@ -2508,7 +3361,7 @@
                 <a:ea typeface="Calibri" pitchFamily="34" charset="-122"/>
                 <a:cs typeface="Calibri" pitchFamily="34" charset="-120"/>
               </a:rPr>
-              <a:t>3 / 7</a:t>
+              <a:t>4 / 8</a:t>
             </a:r>
             <a:endParaRPr lang="en-US" sz="900" dirty="0"/>
           </a:p>
@@ -3724,7 +4577,7 @@
                 <a:ea typeface="Calibri" pitchFamily="34" charset="-122"/>
                 <a:cs typeface="Calibri" pitchFamily="34" charset="-120"/>
               </a:rPr>
-              <a:t>And every step waits for whoever has access  —  often the US DBAs, hours away.</a:t>
+              <a:t>And every step waits for whoever has access  —  often the US DBAs and US Developers, hours away.</a:t>
             </a:r>
             <a:endParaRPr lang="en-US" sz="1300" dirty="0"/>
           </a:p>
@@ -3738,7 +4591,7 @@
 </p:sld>
 </file>
 
-<file path=ppt/slides/slide4.xml><?xml version="1.0" encoding="utf-8"?>
+<file path=ppt/slides/slide5.xml><?xml version="1.0" encoding="utf-8"?>
 <p:sld xmlns:a="http://schemas.openxmlformats.org/drawingml/2006/main" xmlns:r="http://schemas.openxmlformats.org/officeDocument/2006/relationships" xmlns:p="http://schemas.openxmlformats.org/presentationml/2006/main">
   <p:cSld name="Slide 4">
     <p:bg>
@@ -3899,7 +4752,7 @@
                 <a:ea typeface="Calibri" pitchFamily="34" charset="-122"/>
                 <a:cs typeface="Calibri" pitchFamily="34" charset="-120"/>
               </a:rPr>
-              <a:t>4 / 7</a:t>
+              <a:t>5 / 8</a:t>
             </a:r>
             <a:endParaRPr lang="en-US" sz="900" dirty="0"/>
           </a:p>
@@ -4739,7 +5592,7 @@
                 <a:ea typeface="Calibri" pitchFamily="34" charset="-122"/>
                 <a:cs typeface="Calibri" pitchFamily="34" charset="-120"/>
               </a:rPr>
-              <a:t>US DBAs engaged only when SAR-restricted server access is truly needed.</a:t>
+              <a:t>US DBAs engaged only when SAR-restricted server access is truly needed. US Developers engaged when there is an identified code/package issue.</a:t>
             </a:r>
             <a:endParaRPr lang="en-US" sz="1200" dirty="0"/>
           </a:p>
@@ -4881,7 +5734,1556 @@
 </p:sld>
 </file>
 
-<file path=ppt/slides/slide5.xml><?xml version="1.0" encoding="utf-8"?>
+<file path=ppt/slides/slide6.xml><?xml version="1.0" encoding="utf-8"?>
+<p:sld xmlns:a="http://schemas.openxmlformats.org/drawingml/2006/main" xmlns:r="http://schemas.openxmlformats.org/officeDocument/2006/relationships" xmlns:p="http://schemas.openxmlformats.org/presentationml/2006/main">
+  <p:cSld name="Slide 5">
+    <p:bg>
+      <p:bgPr>
+        <a:solidFill>
+          <a:srgbClr val="FFFFFF"/>
+        </a:solidFill>
+        <a:effectLst/>
+      </p:bgPr>
+    </p:bg>
+    <p:spTree>
+      <p:nvGrpSpPr>
+        <p:cNvPr id="1" name=""/>
+        <p:cNvGrpSpPr/>
+        <p:nvPr/>
+      </p:nvGrpSpPr>
+      <p:grpSpPr>
+        <a:xfrm>
+          <a:off x="0" y="0"/>
+          <a:ext cx="0" cy="0"/>
+          <a:chOff x="0" y="0"/>
+          <a:chExt cx="0" cy="0"/>
+        </a:xfrm>
+      </p:grpSpPr>
+      <p:sp>
+        <p:nvSpPr>
+          <p:cNvPr id="2" name="TopBar"/>
+          <p:cNvSpPr/>
+          <p:nvPr/>
+        </p:nvSpPr>
+        <p:spPr>
+          <a:xfrm>
+            <a:off x="0" y="0"/>
+            <a:ext cx="12161520" cy="164592"/>
+          </a:xfrm>
+          <a:prstGeom prst="rect">
+            <a:avLst/>
+          </a:prstGeom>
+          <a:solidFill>
+            <a:srgbClr val="D71E28"/>
+          </a:solidFill>
+          <a:ln w="12700">
+            <a:solidFill>
+              <a:srgbClr val="D71E28"/>
+            </a:solidFill>
+            <a:prstDash val="solid"/>
+          </a:ln>
+        </p:spPr>
+      </p:sp>
+      <p:sp>
+        <p:nvSpPr>
+          <p:cNvPr id="3" name="Eyebrow"/>
+          <p:cNvSpPr/>
+          <p:nvPr/>
+        </p:nvSpPr>
+        <p:spPr>
+          <a:xfrm>
+            <a:off x="731520" y="502920"/>
+            <a:ext cx="10058400" cy="320040"/>
+          </a:xfrm>
+          <a:prstGeom prst="rect">
+            <a:avLst/>
+          </a:prstGeom>
+          <a:noFill/>
+          <a:ln/>
+        </p:spPr>
+        <p:txBody>
+          <a:bodyPr wrap="square" lIns="0" tIns="0" rIns="0" bIns="0" rtlCol="0" anchor="ctr"/>
+          <a:lstStyle/>
+          <a:p>
+            <a:pPr marL="0" indent="0">
+              <a:buNone/>
+            </a:pPr>
+            <a:r>
+              <a:rPr lang="en-US" sz="1100" b="1" kern="0" spc="600" dirty="0">
+                <a:solidFill>
+                  <a:srgbClr val="D71E28"/>
+                </a:solidFill>
+                <a:latin typeface="Calibri" pitchFamily="34" charset="0"/>
+              </a:rPr>
+              <a:t>PROCESS COMPARISON</a:t>
+            </a:r>
+          </a:p>
+        </p:txBody>
+      </p:sp>
+      <p:sp>
+        <p:nvSpPr>
+          <p:cNvPr id="4" name="Title"/>
+          <p:cNvSpPr/>
+          <p:nvPr/>
+        </p:nvSpPr>
+        <p:spPr>
+          <a:xfrm>
+            <a:off x="731520" y="900000"/>
+            <a:ext cx="10698480" cy="600000"/>
+          </a:xfrm>
+          <a:prstGeom prst="rect">
+            <a:avLst/>
+          </a:prstGeom>
+          <a:noFill/>
+          <a:ln/>
+        </p:spPr>
+        <p:txBody>
+          <a:bodyPr wrap="square" lIns="0" tIns="0" rIns="0" bIns="0" rtlCol="0" anchor="ctr"/>
+          <a:lstStyle/>
+          <a:p>
+            <a:pPr marL="0" indent="0">
+              <a:buNone/>
+            </a:pPr>
+            <a:r>
+              <a:rPr lang="en-US" sz="3200" b="1" dirty="0">
+                <a:solidFill>
+                  <a:srgbClr val="1B1B1B"/>
+                </a:solidFill>
+                <a:latin typeface="Calibri" pitchFamily="34" charset="0"/>
+              </a:rPr>
+              <a:t>From a multi-team relay to a single automated diagnosis.</a:t>
+            </a:r>
+          </a:p>
+        </p:txBody>
+      </p:sp>
+      <p:sp>
+        <p:nvSpPr>
+          <p:cNvPr id="5" name="PageNum"/>
+          <p:cNvSpPr/>
+          <p:nvPr/>
+        </p:nvSpPr>
+        <p:spPr>
+          <a:xfrm>
+            <a:off x="10789920" y="6400800"/>
+            <a:ext cx="822960" cy="274320"/>
+          </a:xfrm>
+          <a:prstGeom prst="rect">
+            <a:avLst/>
+          </a:prstGeom>
+          <a:noFill/>
+          <a:ln/>
+        </p:spPr>
+        <p:txBody>
+          <a:bodyPr wrap="square" lIns="0" tIns="0" rIns="0" bIns="0" rtlCol="0" anchor="ctr"/>
+          <a:lstStyle/>
+          <a:p>
+            <a:pPr marL="0" indent="0" algn="r">
+              <a:buNone/>
+            </a:pPr>
+            <a:r>
+              <a:rPr lang="en-US" sz="900" dirty="0">
+                <a:solidFill>
+                  <a:srgbClr val="8A8A8A"/>
+                </a:solidFill>
+                <a:latin typeface="Calibri" pitchFamily="34" charset="0"/>
+              </a:rPr>
+              <a:t>6 / 8</a:t>
+            </a:r>
+          </a:p>
+        </p:txBody>
+      </p:sp>
+      <p:sp>
+        <p:nvSpPr>
+          <p:cNvPr id="10" name="LeftLabel"/>
+          <p:cNvSpPr/>
+          <p:nvPr/>
+        </p:nvSpPr>
+        <p:spPr>
+          <a:xfrm>
+            <a:off x="571500" y="1750000"/>
+            <a:ext cx="5440680" cy="280000"/>
+          </a:xfrm>
+          <a:prstGeom prst="rect">
+            <a:avLst/>
+          </a:prstGeom>
+          <a:noFill/>
+          <a:ln/>
+        </p:spPr>
+        <p:txBody>
+          <a:bodyPr wrap="square" lIns="0" tIns="0" rIns="0" bIns="0" rtlCol="0" anchor="ctr"/>
+          <a:lstStyle/>
+          <a:p>
+            <a:pPr marL="0" indent="0">
+              <a:buNone/>
+            </a:pPr>
+            <a:r>
+              <a:rPr lang="en-US" sz="1000" b="1" kern="0" spc="500" dirty="0">
+                <a:solidFill>
+                  <a:srgbClr val="D71E28"/>
+                </a:solidFill>
+                <a:latin typeface="Calibri" pitchFamily="34" charset="0"/>
+              </a:rPr>
+              <a:t>TODAY  ·  MANUAL RELAY</a:t>
+            </a:r>
+          </a:p>
+        </p:txBody>
+      </p:sp>
+      <p:sp>
+        <p:nvSpPr>
+          <p:cNvPr id="11" name="LeftHeading"/>
+          <p:cNvSpPr/>
+          <p:nvPr/>
+        </p:nvSpPr>
+        <p:spPr>
+          <a:xfrm>
+            <a:off x="571500" y="2050000"/>
+            <a:ext cx="5440680" cy="380000"/>
+          </a:xfrm>
+          <a:prstGeom prst="rect">
+            <a:avLst/>
+          </a:prstGeom>
+          <a:noFill/>
+          <a:ln/>
+        </p:spPr>
+        <p:txBody>
+          <a:bodyPr wrap="square" lIns="0" tIns="0" rIns="0" bIns="0" rtlCol="0" anchor="ctr"/>
+          <a:lstStyle/>
+          <a:p>
+            <a:pPr marL="0" indent="0">
+              <a:buNone/>
+            </a:pPr>
+            <a:r>
+              <a:rPr lang="en-US" sz="1800" b="1" dirty="0">
+                <a:solidFill>
+                  <a:srgbClr val="1B1B1B"/>
+                </a:solidFill>
+                <a:latin typeface="Calibri" pitchFamily="34" charset="0"/>
+              </a:rPr>
+              <a:t>Up to 10 hours, six handoffs.</a:t>
+            </a:r>
+          </a:p>
+        </p:txBody>
+      </p:sp>
+      <p:sp>
+        <p:nvSpPr>
+          <p:cNvPr id="12" name="LeftRail"/>
+          <p:cNvSpPr/>
+          <p:nvPr/>
+        </p:nvSpPr>
+        <p:spPr>
+          <a:xfrm>
+            <a:off x="811000" y="2570000"/>
+            <a:ext cx="22860" cy="3640000"/>
+          </a:xfrm>
+          <a:prstGeom prst="rect">
+            <a:avLst/>
+          </a:prstGeom>
+          <a:solidFill>
+            <a:srgbClr val="E5E0D5"/>
+          </a:solidFill>
+          <a:ln w="12700">
+            <a:solidFill>
+              <a:srgbClr val="E5E0D5"/>
+            </a:solidFill>
+            <a:prstDash val="solid"/>
+          </a:ln>
+        </p:spPr>
+      </p:sp>
+      <p:sp>
+        <p:nvSpPr>
+          <p:cNvPr id="20" name="L1Dot"/>
+          <p:cNvSpPr/>
+          <p:nvPr/>
+        </p:nvSpPr>
+        <p:spPr>
+          <a:xfrm>
+            <a:off x="731520" y="2570000"/>
+            <a:ext cx="182880" cy="182880"/>
+          </a:xfrm>
+          <a:prstGeom prst="ellipse">
+            <a:avLst/>
+          </a:prstGeom>
+          <a:solidFill>
+            <a:srgbClr val="D71E28"/>
+          </a:solidFill>
+          <a:ln w="12700">
+            <a:solidFill>
+              <a:srgbClr val="D71E28"/>
+            </a:solidFill>
+            <a:prstDash val="solid"/>
+          </a:ln>
+        </p:spPr>
+      </p:sp>
+      <p:sp>
+        <p:nvSpPr>
+          <p:cNvPr id="21" name="L1Time"/>
+          <p:cNvSpPr/>
+          <p:nvPr/>
+        </p:nvSpPr>
+        <p:spPr>
+          <a:xfrm>
+            <a:off x="1050000" y="2515000"/>
+            <a:ext cx="1100000" cy="260000"/>
+          </a:xfrm>
+          <a:prstGeom prst="rect">
+            <a:avLst/>
+          </a:prstGeom>
+          <a:noFill/>
+          <a:ln/>
+        </p:spPr>
+        <p:txBody>
+          <a:bodyPr wrap="square" lIns="0" tIns="0" rIns="0" bIns="0" rtlCol="0" anchor="ctr"/>
+          <a:lstStyle/>
+          <a:p>
+            <a:pPr marL="0" indent="0">
+              <a:buNone/>
+            </a:pPr>
+            <a:r>
+              <a:rPr lang="en-US" sz="1000" b="1" kern="0" spc="300" dirty="0">
+                <a:solidFill>
+                  <a:srgbClr val="8A8A8A"/>
+                </a:solidFill>
+                <a:latin typeface="Calibri" pitchFamily="34" charset="0"/>
+              </a:rPr>
+              <a:t>2:00 AM ET</a:t>
+            </a:r>
+          </a:p>
+        </p:txBody>
+      </p:sp>
+      <p:sp>
+        <p:nvSpPr>
+          <p:cNvPr id="22" name="L1Text"/>
+          <p:cNvSpPr/>
+          <p:nvPr/>
+        </p:nvSpPr>
+        <p:spPr>
+          <a:xfrm>
+            <a:off x="1050000" y="2755000"/>
+            <a:ext cx="4900000" cy="430000"/>
+          </a:xfrm>
+          <a:prstGeom prst="rect">
+            <a:avLst/>
+          </a:prstGeom>
+          <a:noFill/>
+          <a:ln/>
+        </p:spPr>
+        <p:txBody>
+          <a:bodyPr wrap="square" lIns="0" tIns="0" rIns="0" bIns="0" rtlCol="0" anchor="t"/>
+          <a:lstStyle/>
+          <a:p>
+            <a:pPr marL="0" indent="0">
+              <a:buNone/>
+            </a:pPr>
+            <a:r>
+              <a:rPr lang="en-US" sz="1200" dirty="0">
+                <a:solidFill>
+                  <a:srgbClr val="1B1B1B"/>
+                </a:solidFill>
+                <a:latin typeface="Calibri" pitchFamily="34" charset="0"/>
+              </a:rPr>
+              <a:t>Job fails. ServiceNow incident auto-generated.</a:t>
+            </a:r>
+          </a:p>
+        </p:txBody>
+      </p:sp>
+      <p:sp>
+        <p:nvSpPr>
+          <p:cNvPr id="23" name="L2Dot"/>
+          <p:cNvSpPr/>
+          <p:nvPr/>
+        </p:nvSpPr>
+        <p:spPr>
+          <a:xfrm>
+            <a:off x="731520" y="3170000"/>
+            <a:ext cx="182880" cy="182880"/>
+          </a:xfrm>
+          <a:prstGeom prst="ellipse">
+            <a:avLst/>
+          </a:prstGeom>
+          <a:solidFill>
+            <a:srgbClr val="D71E28"/>
+          </a:solidFill>
+          <a:ln w="12700">
+            <a:solidFill>
+              <a:srgbClr val="D71E28"/>
+            </a:solidFill>
+            <a:prstDash val="solid"/>
+          </a:ln>
+        </p:spPr>
+      </p:sp>
+      <p:sp>
+        <p:nvSpPr>
+          <p:cNvPr id="24" name="L2Time"/>
+          <p:cNvSpPr/>
+          <p:nvPr/>
+        </p:nvSpPr>
+        <p:spPr>
+          <a:xfrm>
+            <a:off x="1050000" y="3115000"/>
+            <a:ext cx="1100000" cy="260000"/>
+          </a:xfrm>
+          <a:prstGeom prst="rect">
+            <a:avLst/>
+          </a:prstGeom>
+          <a:noFill/>
+          <a:ln/>
+        </p:spPr>
+        <p:txBody>
+          <a:bodyPr wrap="square" lIns="0" tIns="0" rIns="0" bIns="0" rtlCol="0" anchor="ctr"/>
+          <a:lstStyle/>
+          <a:p>
+            <a:pPr marL="0" indent="0">
+              <a:buNone/>
+            </a:pPr>
+            <a:r>
+              <a:rPr lang="en-US" sz="1000" b="1" kern="0" spc="300" dirty="0">
+                <a:solidFill>
+                  <a:srgbClr val="8A8A8A"/>
+                </a:solidFill>
+                <a:latin typeface="Calibri" pitchFamily="34" charset="0"/>
+              </a:rPr>
+              <a:t>2:05 AM ET</a:t>
+            </a:r>
+          </a:p>
+        </p:txBody>
+      </p:sp>
+      <p:sp>
+        <p:nvSpPr>
+          <p:cNvPr id="25" name="L2Text"/>
+          <p:cNvSpPr/>
+          <p:nvPr/>
+        </p:nvSpPr>
+        <p:spPr>
+          <a:xfrm>
+            <a:off x="1050000" y="3355000"/>
+            <a:ext cx="4900000" cy="430000"/>
+          </a:xfrm>
+          <a:prstGeom prst="rect">
+            <a:avLst/>
+          </a:prstGeom>
+          <a:noFill/>
+          <a:ln/>
+        </p:spPr>
+        <p:txBody>
+          <a:bodyPr wrap="square" lIns="0" tIns="0" rIns="0" bIns="0" rtlCol="0" anchor="t"/>
+          <a:lstStyle/>
+          <a:p>
+            <a:pPr marL="0" indent="0">
+              <a:buNone/>
+            </a:pPr>
+            <a:r>
+              <a:rPr lang="en-US" sz="1200" dirty="0">
+                <a:solidFill>
+                  <a:srgbClr val="1B1B1B"/>
+                </a:solidFill>
+                <a:latin typeface="Calibri" pitchFamily="34" charset="0"/>
+              </a:rPr>
+              <a:t>Offshore EGS L2 picks up the ticket and starts to investigate.</a:t>
+            </a:r>
+          </a:p>
+        </p:txBody>
+      </p:sp>
+      <p:sp>
+        <p:nvSpPr>
+          <p:cNvPr id="26" name="L3Dot"/>
+          <p:cNvSpPr/>
+          <p:nvPr/>
+        </p:nvSpPr>
+        <p:spPr>
+          <a:xfrm>
+            <a:off x="731520" y="3770000"/>
+            <a:ext cx="182880" cy="182880"/>
+          </a:xfrm>
+          <a:prstGeom prst="ellipse">
+            <a:avLst/>
+          </a:prstGeom>
+          <a:solidFill>
+            <a:srgbClr val="D71E28"/>
+          </a:solidFill>
+          <a:ln w="12700">
+            <a:solidFill>
+              <a:srgbClr val="D71E28"/>
+            </a:solidFill>
+            <a:prstDash val="solid"/>
+          </a:ln>
+        </p:spPr>
+      </p:sp>
+      <p:sp>
+        <p:nvSpPr>
+          <p:cNvPr id="27" name="L3Time"/>
+          <p:cNvSpPr/>
+          <p:nvPr/>
+        </p:nvSpPr>
+        <p:spPr>
+          <a:xfrm>
+            <a:off x="1050000" y="3715000"/>
+            <a:ext cx="1100000" cy="260000"/>
+          </a:xfrm>
+          <a:prstGeom prst="rect">
+            <a:avLst/>
+          </a:prstGeom>
+          <a:noFill/>
+          <a:ln/>
+        </p:spPr>
+        <p:txBody>
+          <a:bodyPr wrap="square" lIns="0" tIns="0" rIns="0" bIns="0" rtlCol="0" anchor="ctr"/>
+          <a:lstStyle/>
+          <a:p>
+            <a:pPr marL="0" indent="0">
+              <a:buNone/>
+            </a:pPr>
+            <a:r>
+              <a:rPr lang="en-US" sz="1000" b="1" kern="0" spc="300" dirty="0">
+                <a:solidFill>
+                  <a:srgbClr val="8A8A8A"/>
+                </a:solidFill>
+                <a:latin typeface="Calibri" pitchFamily="34" charset="0"/>
+              </a:rPr>
+              <a:t>2:30 AM ET</a:t>
+            </a:r>
+          </a:p>
+        </p:txBody>
+      </p:sp>
+      <p:sp>
+        <p:nvSpPr>
+          <p:cNvPr id="28" name="L3Text"/>
+          <p:cNvSpPr/>
+          <p:nvPr/>
+        </p:nvSpPr>
+        <p:spPr>
+          <a:xfrm>
+            <a:off x="1050000" y="3955000"/>
+            <a:ext cx="4900000" cy="430000"/>
+          </a:xfrm>
+          <a:prstGeom prst="rect">
+            <a:avLst/>
+          </a:prstGeom>
+          <a:noFill/>
+          <a:ln/>
+        </p:spPr>
+        <p:txBody>
+          <a:bodyPr wrap="square" lIns="0" tIns="0" rIns="0" bIns="0" rtlCol="0" anchor="t"/>
+          <a:lstStyle/>
+          <a:p>
+            <a:pPr marL="0" indent="0">
+              <a:buNone/>
+            </a:pPr>
+            <a:r>
+              <a:rPr lang="en-US" sz="1200" dirty="0">
+                <a:solidFill>
+                  <a:srgbClr val="1B1B1B"/>
+                </a:solidFill>
+                <a:latin typeface="Calibri" pitchFamily="34" charset="0"/>
+              </a:rPr>
+              <a:t>L2 engages EGS DBAs offshore. DBAs spend time identifying the issue.</a:t>
+            </a:r>
+          </a:p>
+        </p:txBody>
+      </p:sp>
+      <p:sp>
+        <p:nvSpPr>
+          <p:cNvPr id="29" name="L4Dot"/>
+          <p:cNvSpPr/>
+          <p:nvPr/>
+        </p:nvSpPr>
+        <p:spPr>
+          <a:xfrm>
+            <a:off x="731520" y="4370000"/>
+            <a:ext cx="182880" cy="182880"/>
+          </a:xfrm>
+          <a:prstGeom prst="ellipse">
+            <a:avLst/>
+          </a:prstGeom>
+          <a:solidFill>
+            <a:srgbClr val="D71E28"/>
+          </a:solidFill>
+          <a:ln w="12700">
+            <a:solidFill>
+              <a:srgbClr val="D71E28"/>
+            </a:solidFill>
+            <a:prstDash val="solid"/>
+          </a:ln>
+        </p:spPr>
+      </p:sp>
+      <p:sp>
+        <p:nvSpPr>
+          <p:cNvPr id="30" name="L4Time"/>
+          <p:cNvSpPr/>
+          <p:nvPr/>
+        </p:nvSpPr>
+        <p:spPr>
+          <a:xfrm>
+            <a:off x="1050000" y="4315000"/>
+            <a:ext cx="1100000" cy="260000"/>
+          </a:xfrm>
+          <a:prstGeom prst="rect">
+            <a:avLst/>
+          </a:prstGeom>
+          <a:noFill/>
+          <a:ln/>
+        </p:spPr>
+        <p:txBody>
+          <a:bodyPr wrap="square" lIns="0" tIns="0" rIns="0" bIns="0" rtlCol="0" anchor="ctr"/>
+          <a:lstStyle/>
+          <a:p>
+            <a:pPr marL="0" indent="0">
+              <a:buNone/>
+            </a:pPr>
+            <a:r>
+              <a:rPr lang="en-US" sz="1000" b="1" kern="0" spc="300" dirty="0">
+                <a:solidFill>
+                  <a:srgbClr val="8A8A8A"/>
+                </a:solidFill>
+                <a:latin typeface="Calibri" pitchFamily="34" charset="0"/>
+              </a:rPr>
+              <a:t>3:00 AM ET</a:t>
+            </a:r>
+          </a:p>
+        </p:txBody>
+      </p:sp>
+      <p:sp>
+        <p:nvSpPr>
+          <p:cNvPr id="31" name="L4Text"/>
+          <p:cNvSpPr/>
+          <p:nvPr/>
+        </p:nvSpPr>
+        <p:spPr>
+          <a:xfrm>
+            <a:off x="1050000" y="4555000"/>
+            <a:ext cx="4900000" cy="600000"/>
+          </a:xfrm>
+          <a:prstGeom prst="rect">
+            <a:avLst/>
+          </a:prstGeom>
+          <a:noFill/>
+          <a:ln/>
+        </p:spPr>
+        <p:txBody>
+          <a:bodyPr wrap="square" lIns="0" tIns="0" rIns="0" bIns="0" rtlCol="0" anchor="t"/>
+          <a:lstStyle/>
+          <a:p>
+            <a:pPr marL="0" indent="0">
+              <a:buNone/>
+            </a:pPr>
+            <a:r>
+              <a:rPr lang="en-US" sz="1200" dirty="0">
+                <a:solidFill>
+                  <a:srgbClr val="1B1B1B"/>
+                </a:solidFill>
+                <a:latin typeface="Calibri" pitchFamily="34" charset="0"/>
+              </a:rPr>
+              <a:t>Branch by issue type:  SAR server → page US DBAs (may not answer).  Server / permissions → DBAs resolve.  Otherwise → punt to developers.</a:t>
+            </a:r>
+          </a:p>
+        </p:txBody>
+      </p:sp>
+      <p:sp>
+        <p:nvSpPr>
+          <p:cNvPr id="32" name="L5Dot"/>
+          <p:cNvSpPr/>
+          <p:nvPr/>
+        </p:nvSpPr>
+        <p:spPr>
+          <a:xfrm>
+            <a:off x="731520" y="5180000"/>
+            <a:ext cx="182880" cy="182880"/>
+          </a:xfrm>
+          <a:prstGeom prst="ellipse">
+            <a:avLst/>
+          </a:prstGeom>
+          <a:solidFill>
+            <a:srgbClr val="D71E28"/>
+          </a:solidFill>
+          <a:ln w="12700">
+            <a:solidFill>
+              <a:srgbClr val="D71E28"/>
+            </a:solidFill>
+            <a:prstDash val="solid"/>
+          </a:ln>
+        </p:spPr>
+      </p:sp>
+      <p:sp>
+        <p:nvSpPr>
+          <p:cNvPr id="33" name="L5Time"/>
+          <p:cNvSpPr/>
+          <p:nvPr/>
+        </p:nvSpPr>
+        <p:spPr>
+          <a:xfrm>
+            <a:off x="1050000" y="5125000"/>
+            <a:ext cx="1800000" cy="260000"/>
+          </a:xfrm>
+          <a:prstGeom prst="rect">
+            <a:avLst/>
+          </a:prstGeom>
+          <a:noFill/>
+          <a:ln/>
+        </p:spPr>
+        <p:txBody>
+          <a:bodyPr wrap="square" lIns="0" tIns="0" rIns="0" bIns="0" rtlCol="0" anchor="ctr"/>
+          <a:lstStyle/>
+          <a:p>
+            <a:pPr marL="0" indent="0">
+              <a:buNone/>
+            </a:pPr>
+            <a:r>
+              <a:rPr lang="en-US" sz="1000" b="1" kern="0" spc="300" dirty="0">
+                <a:solidFill>
+                  <a:srgbClr val="8A8A8A"/>
+                </a:solidFill>
+                <a:latin typeface="Calibri" pitchFamily="34" charset="0"/>
+              </a:rPr>
+              <a:t>9:00 - 11:00 AM ET</a:t>
+            </a:r>
+          </a:p>
+        </p:txBody>
+      </p:sp>
+      <p:sp>
+        <p:nvSpPr>
+          <p:cNvPr id="34" name="L5Text"/>
+          <p:cNvSpPr/>
+          <p:nvPr/>
+        </p:nvSpPr>
+        <p:spPr>
+          <a:xfrm>
+            <a:off x="1050000" y="5365000"/>
+            <a:ext cx="4900000" cy="600000"/>
+          </a:xfrm>
+          <a:prstGeom prst="rect">
+            <a:avLst/>
+          </a:prstGeom>
+          <a:noFill/>
+          <a:ln/>
+        </p:spPr>
+        <p:txBody>
+          <a:bodyPr wrap="square" lIns="0" tIns="0" rIns="0" bIns="0" rtlCol="0" anchor="t"/>
+          <a:lstStyle/>
+          <a:p>
+            <a:pPr marL="0" indent="0">
+              <a:buNone/>
+            </a:pPr>
+            <a:r>
+              <a:rPr lang="en-US" sz="1200" dirty="0">
+                <a:solidFill>
+                  <a:srgbClr val="1B1B1B"/>
+                </a:solidFill>
+                <a:latin typeface="Calibri" pitchFamily="34" charset="0"/>
+              </a:rPr>
+              <a:t>US DBAs come online, review jobs and execution reports, then ask app developers to inspect the SSIS packages.</a:t>
+            </a:r>
+          </a:p>
+        </p:txBody>
+      </p:sp>
+      <p:sp>
+        <p:nvSpPr>
+          <p:cNvPr id="35" name="L6Dot"/>
+          <p:cNvSpPr/>
+          <p:nvPr/>
+        </p:nvSpPr>
+        <p:spPr>
+          <a:xfrm>
+            <a:off x="731520" y="5990000"/>
+            <a:ext cx="182880" cy="182880"/>
+          </a:xfrm>
+          <a:prstGeom prst="ellipse">
+            <a:avLst/>
+          </a:prstGeom>
+          <a:solidFill>
+            <a:srgbClr val="D71E28"/>
+          </a:solidFill>
+          <a:ln w="12700">
+            <a:solidFill>
+              <a:srgbClr val="D71E28"/>
+            </a:solidFill>
+            <a:prstDash val="solid"/>
+          </a:ln>
+        </p:spPr>
+      </p:sp>
+      <p:sp>
+        <p:nvSpPr>
+          <p:cNvPr id="36" name="L6Time"/>
+          <p:cNvSpPr/>
+          <p:nvPr/>
+        </p:nvSpPr>
+        <p:spPr>
+          <a:xfrm>
+            <a:off x="1050000" y="5935000"/>
+            <a:ext cx="1300000" cy="260000"/>
+          </a:xfrm>
+          <a:prstGeom prst="rect">
+            <a:avLst/>
+          </a:prstGeom>
+          <a:noFill/>
+          <a:ln/>
+        </p:spPr>
+        <p:txBody>
+          <a:bodyPr wrap="square" lIns="0" tIns="0" rIns="0" bIns="0" rtlCol="0" anchor="ctr"/>
+          <a:lstStyle/>
+          <a:p>
+            <a:pPr marL="0" indent="0">
+              <a:buNone/>
+            </a:pPr>
+            <a:r>
+              <a:rPr lang="en-US" sz="1000" b="1" kern="0" spc="300" dirty="0">
+                <a:solidFill>
+                  <a:srgbClr val="D71E28"/>
+                </a:solidFill>
+                <a:latin typeface="Calibri" pitchFamily="34" charset="0"/>
+              </a:rPr>
+              <a:t>12:00 PM ET</a:t>
+            </a:r>
+          </a:p>
+        </p:txBody>
+      </p:sp>
+      <p:sp>
+        <p:nvSpPr>
+          <p:cNvPr id="37" name="L6Text"/>
+          <p:cNvSpPr/>
+          <p:nvPr/>
+        </p:nvSpPr>
+        <p:spPr>
+          <a:xfrm>
+            <a:off x="1050000" y="6175000"/>
+            <a:ext cx="4900000" cy="280000"/>
+          </a:xfrm>
+          <a:prstGeom prst="rect">
+            <a:avLst/>
+          </a:prstGeom>
+          <a:noFill/>
+          <a:ln/>
+        </p:spPr>
+        <p:txBody>
+          <a:bodyPr wrap="square" lIns="0" tIns="0" rIns="0" bIns="0" rtlCol="0" anchor="t"/>
+          <a:lstStyle/>
+          <a:p>
+            <a:pPr marL="0" indent="0">
+              <a:buNone/>
+            </a:pPr>
+            <a:r>
+              <a:rPr lang="en-US" sz="1200" b="1" dirty="0">
+                <a:solidFill>
+                  <a:srgbClr val="D71E28"/>
+                </a:solidFill>
+                <a:latin typeface="Calibri" pitchFamily="34" charset="0"/>
+              </a:rPr>
+              <a:t>L2 finally updates users  —  10 hours later.</a:t>
+            </a:r>
+          </a:p>
+        </p:txBody>
+      </p:sp>
+      <p:sp>
+        <p:nvSpPr>
+          <p:cNvPr id="40" name="Divider"/>
+          <p:cNvSpPr/>
+          <p:nvPr/>
+        </p:nvSpPr>
+        <p:spPr>
+          <a:xfrm>
+            <a:off x="6096000" y="2050000"/>
+            <a:ext cx="12700" cy="4400000"/>
+          </a:xfrm>
+          <a:prstGeom prst="rect">
+            <a:avLst/>
+          </a:prstGeom>
+          <a:solidFill>
+            <a:srgbClr val="EAEAEA"/>
+          </a:solidFill>
+          <a:ln w="6350">
+            <a:solidFill>
+              <a:srgbClr val="EAEAEA"/>
+            </a:solidFill>
+            <a:prstDash val="solid"/>
+          </a:ln>
+        </p:spPr>
+      </p:sp>
+      <p:sp>
+        <p:nvSpPr>
+          <p:cNvPr id="50" name="RightLabel"/>
+          <p:cNvSpPr/>
+          <p:nvPr/>
+        </p:nvSpPr>
+        <p:spPr>
+          <a:xfrm>
+            <a:off x="6300000" y="1750000"/>
+            <a:ext cx="5440680" cy="280000"/>
+          </a:xfrm>
+          <a:prstGeom prst="rect">
+            <a:avLst/>
+          </a:prstGeom>
+          <a:noFill/>
+          <a:ln/>
+        </p:spPr>
+        <p:txBody>
+          <a:bodyPr wrap="square" lIns="0" tIns="0" rIns="0" bIns="0" rtlCol="0" anchor="ctr"/>
+          <a:lstStyle/>
+          <a:p>
+            <a:pPr marL="0" indent="0">
+              <a:buNone/>
+            </a:pPr>
+            <a:r>
+              <a:rPr lang="en-US" sz="1000" b="1" kern="0" spc="500" dirty="0">
+                <a:solidFill>
+                  <a:srgbClr val="B89000"/>
+                </a:solidFill>
+                <a:latin typeface="Calibri" pitchFamily="34" charset="0"/>
+              </a:rPr>
+              <a:t>WITH AUTOMATION  ·  AI DIAGNOSIS</a:t>
+            </a:r>
+          </a:p>
+        </p:txBody>
+      </p:sp>
+      <p:sp>
+        <p:nvSpPr>
+          <p:cNvPr id="51" name="RightHeading"/>
+          <p:cNvSpPr/>
+          <p:nvPr/>
+        </p:nvSpPr>
+        <p:spPr>
+          <a:xfrm>
+            <a:off x="6300000" y="2050000"/>
+            <a:ext cx="5440680" cy="380000"/>
+          </a:xfrm>
+          <a:prstGeom prst="rect">
+            <a:avLst/>
+          </a:prstGeom>
+          <a:noFill/>
+          <a:ln/>
+        </p:spPr>
+        <p:txBody>
+          <a:bodyPr wrap="square" lIns="0" tIns="0" rIns="0" bIns="0" rtlCol="0" anchor="ctr"/>
+          <a:lstStyle/>
+          <a:p>
+            <a:pPr marL="0" indent="0">
+              <a:buNone/>
+            </a:pPr>
+            <a:r>
+              <a:rPr lang="en-US" sz="1800" b="1" dirty="0">
+                <a:solidFill>
+                  <a:srgbClr val="1B1B1B"/>
+                </a:solidFill>
+                <a:latin typeface="Calibri" pitchFamily="34" charset="0"/>
+              </a:rPr>
+              <a:t>15 minutes, no relay.</a:t>
+            </a:r>
+          </a:p>
+        </p:txBody>
+      </p:sp>
+      <p:sp>
+        <p:nvSpPr>
+          <p:cNvPr id="52" name="RightRail"/>
+          <p:cNvSpPr/>
+          <p:nvPr/>
+        </p:nvSpPr>
+        <p:spPr>
+          <a:xfrm>
+            <a:off x="6539480" y="2570000"/>
+            <a:ext cx="22860" cy="3640000"/>
+          </a:xfrm>
+          <a:prstGeom prst="rect">
+            <a:avLst/>
+          </a:prstGeom>
+          <a:solidFill>
+            <a:srgbClr val="E5E0D5"/>
+          </a:solidFill>
+          <a:ln w="12700">
+            <a:solidFill>
+              <a:srgbClr val="E5E0D5"/>
+            </a:solidFill>
+            <a:prstDash val="solid"/>
+          </a:ln>
+        </p:spPr>
+      </p:sp>
+      <p:sp>
+        <p:nvSpPr>
+          <p:cNvPr id="60" name="R1Dot"/>
+          <p:cNvSpPr/>
+          <p:nvPr/>
+        </p:nvSpPr>
+        <p:spPr>
+          <a:xfrm>
+            <a:off x="6460000" y="2570000"/>
+            <a:ext cx="182880" cy="182880"/>
+          </a:xfrm>
+          <a:prstGeom prst="ellipse">
+            <a:avLst/>
+          </a:prstGeom>
+          <a:solidFill>
+            <a:srgbClr val="FFCD41"/>
+          </a:solidFill>
+          <a:ln w="12700">
+            <a:solidFill>
+              <a:srgbClr val="FFCD41"/>
+            </a:solidFill>
+            <a:prstDash val="solid"/>
+          </a:ln>
+        </p:spPr>
+      </p:sp>
+      <p:sp>
+        <p:nvSpPr>
+          <p:cNvPr id="61" name="R1Time"/>
+          <p:cNvSpPr/>
+          <p:nvPr/>
+        </p:nvSpPr>
+        <p:spPr>
+          <a:xfrm>
+            <a:off x="6780000" y="2515000"/>
+            <a:ext cx="1100000" cy="260000"/>
+          </a:xfrm>
+          <a:prstGeom prst="rect">
+            <a:avLst/>
+          </a:prstGeom>
+          <a:noFill/>
+          <a:ln/>
+        </p:spPr>
+        <p:txBody>
+          <a:bodyPr wrap="square" lIns="0" tIns="0" rIns="0" bIns="0" rtlCol="0" anchor="ctr"/>
+          <a:lstStyle/>
+          <a:p>
+            <a:pPr marL="0" indent="0">
+              <a:buNone/>
+            </a:pPr>
+            <a:r>
+              <a:rPr lang="en-US" sz="1000" b="1" kern="0" spc="300" dirty="0">
+                <a:solidFill>
+                  <a:srgbClr val="8A8A8A"/>
+                </a:solidFill>
+                <a:latin typeface="Calibri" pitchFamily="34" charset="0"/>
+              </a:rPr>
+              <a:t>2:00 AM ET</a:t>
+            </a:r>
+          </a:p>
+        </p:txBody>
+      </p:sp>
+      <p:sp>
+        <p:nvSpPr>
+          <p:cNvPr id="62" name="R1Text"/>
+          <p:cNvSpPr/>
+          <p:nvPr/>
+        </p:nvSpPr>
+        <p:spPr>
+          <a:xfrm>
+            <a:off x="6780000" y="2755000"/>
+            <a:ext cx="4750000" cy="430000"/>
+          </a:xfrm>
+          <a:prstGeom prst="rect">
+            <a:avLst/>
+          </a:prstGeom>
+          <a:noFill/>
+          <a:ln/>
+        </p:spPr>
+        <p:txBody>
+          <a:bodyPr wrap="square" lIns="0" tIns="0" rIns="0" bIns="0" rtlCol="0" anchor="t"/>
+          <a:lstStyle/>
+          <a:p>
+            <a:pPr marL="0" indent="0">
+              <a:buNone/>
+            </a:pPr>
+            <a:r>
+              <a:rPr lang="en-US" sz="1200" dirty="0">
+                <a:solidFill>
+                  <a:srgbClr val="1B1B1B"/>
+                </a:solidFill>
+                <a:latin typeface="Calibri" pitchFamily="34" charset="0"/>
+              </a:rPr>
+              <a:t>Job fails. ServiceNow incident auto-generated.</a:t>
+            </a:r>
+          </a:p>
+        </p:txBody>
+      </p:sp>
+      <p:sp>
+        <p:nvSpPr>
+          <p:cNvPr id="63" name="R2Dot"/>
+          <p:cNvSpPr/>
+          <p:nvPr/>
+        </p:nvSpPr>
+        <p:spPr>
+          <a:xfrm>
+            <a:off x="6460000" y="3170000"/>
+            <a:ext cx="182880" cy="182880"/>
+          </a:xfrm>
+          <a:prstGeom prst="ellipse">
+            <a:avLst/>
+          </a:prstGeom>
+          <a:solidFill>
+            <a:srgbClr val="FFCD41"/>
+          </a:solidFill>
+          <a:ln w="12700">
+            <a:solidFill>
+              <a:srgbClr val="FFCD41"/>
+            </a:solidFill>
+            <a:prstDash val="solid"/>
+          </a:ln>
+        </p:spPr>
+      </p:sp>
+      <p:sp>
+        <p:nvSpPr>
+          <p:cNvPr id="64" name="R2Time"/>
+          <p:cNvSpPr/>
+          <p:nvPr/>
+        </p:nvSpPr>
+        <p:spPr>
+          <a:xfrm>
+            <a:off x="6780000" y="3115000"/>
+            <a:ext cx="1100000" cy="260000"/>
+          </a:xfrm>
+          <a:prstGeom prst="rect">
+            <a:avLst/>
+          </a:prstGeom>
+          <a:noFill/>
+          <a:ln/>
+        </p:spPr>
+        <p:txBody>
+          <a:bodyPr wrap="square" lIns="0" tIns="0" rIns="0" bIns="0" rtlCol="0" anchor="ctr"/>
+          <a:lstStyle/>
+          <a:p>
+            <a:pPr marL="0" indent="0">
+              <a:buNone/>
+            </a:pPr>
+            <a:r>
+              <a:rPr lang="en-US" sz="1000" b="1" kern="0" spc="300" dirty="0">
+                <a:solidFill>
+                  <a:srgbClr val="8A8A8A"/>
+                </a:solidFill>
+                <a:latin typeface="Calibri" pitchFamily="34" charset="0"/>
+              </a:rPr>
+              <a:t>2:00 AM ET</a:t>
+            </a:r>
+          </a:p>
+        </p:txBody>
+      </p:sp>
+      <p:sp>
+        <p:nvSpPr>
+          <p:cNvPr id="65" name="R2Text"/>
+          <p:cNvSpPr/>
+          <p:nvPr/>
+        </p:nvSpPr>
+        <p:spPr>
+          <a:xfrm>
+            <a:off x="6780000" y="3355000"/>
+            <a:ext cx="4750000" cy="430000"/>
+          </a:xfrm>
+          <a:prstGeom prst="rect">
+            <a:avLst/>
+          </a:prstGeom>
+          <a:noFill/>
+          <a:ln/>
+        </p:spPr>
+        <p:txBody>
+          <a:bodyPr wrap="square" lIns="0" tIns="0" rIns="0" bIns="0" rtlCol="0" anchor="t"/>
+          <a:lstStyle/>
+          <a:p>
+            <a:pPr marL="0" indent="0">
+              <a:buNone/>
+            </a:pPr>
+            <a:r>
+              <a:rPr lang="en-US" sz="1200" dirty="0">
+                <a:solidFill>
+                  <a:srgbClr val="1B1B1B"/>
+                </a:solidFill>
+                <a:latin typeface="Calibri" pitchFamily="34" charset="0"/>
+              </a:rPr>
+              <a:t>AI investigation kicks off automatically  —  no human triage needed.</a:t>
+            </a:r>
+          </a:p>
+        </p:txBody>
+      </p:sp>
+      <p:sp>
+        <p:nvSpPr>
+          <p:cNvPr id="66" name="R3Dot"/>
+          <p:cNvSpPr/>
+          <p:nvPr/>
+        </p:nvSpPr>
+        <p:spPr>
+          <a:xfrm>
+            <a:off x="6460000" y="3770000"/>
+            <a:ext cx="182880" cy="182880"/>
+          </a:xfrm>
+          <a:prstGeom prst="ellipse">
+            <a:avLst/>
+          </a:prstGeom>
+          <a:solidFill>
+            <a:srgbClr val="FFCD41"/>
+          </a:solidFill>
+          <a:ln w="12700">
+            <a:solidFill>
+              <a:srgbClr val="FFCD41"/>
+            </a:solidFill>
+            <a:prstDash val="solid"/>
+          </a:ln>
+        </p:spPr>
+      </p:sp>
+      <p:sp>
+        <p:nvSpPr>
+          <p:cNvPr id="67" name="R3Time"/>
+          <p:cNvSpPr/>
+          <p:nvPr/>
+        </p:nvSpPr>
+        <p:spPr>
+          <a:xfrm>
+            <a:off x="6780000" y="3715000"/>
+            <a:ext cx="1800000" cy="260000"/>
+          </a:xfrm>
+          <a:prstGeom prst="rect">
+            <a:avLst/>
+          </a:prstGeom>
+          <a:noFill/>
+          <a:ln/>
+        </p:spPr>
+        <p:txBody>
+          <a:bodyPr wrap="square" lIns="0" tIns="0" rIns="0" bIns="0" rtlCol="0" anchor="ctr"/>
+          <a:lstStyle/>
+          <a:p>
+            <a:pPr marL="0" indent="0">
+              <a:buNone/>
+            </a:pPr>
+            <a:r>
+              <a:rPr lang="en-US" sz="1000" b="1" kern="0" spc="300" dirty="0">
+                <a:solidFill>
+                  <a:srgbClr val="8A8A8A"/>
+                </a:solidFill>
+                <a:latin typeface="Calibri" pitchFamily="34" charset="0"/>
+              </a:rPr>
+              <a:t>2:00 - 2:10 AM ET</a:t>
+            </a:r>
+          </a:p>
+        </p:txBody>
+      </p:sp>
+      <p:sp>
+        <p:nvSpPr>
+          <p:cNvPr id="68" name="R3Text"/>
+          <p:cNvSpPr/>
+          <p:nvPr/>
+        </p:nvSpPr>
+        <p:spPr>
+          <a:xfrm>
+            <a:off x="6780000" y="3955000"/>
+            <a:ext cx="4750000" cy="430000"/>
+          </a:xfrm>
+          <a:prstGeom prst="rect">
+            <a:avLst/>
+          </a:prstGeom>
+          <a:noFill/>
+          <a:ln/>
+        </p:spPr>
+        <p:txBody>
+          <a:bodyPr wrap="square" lIns="0" tIns="0" rIns="0" bIns="0" rtlCol="0" anchor="t"/>
+          <a:lstStyle/>
+          <a:p>
+            <a:pPr marL="0" indent="0">
+              <a:buNone/>
+            </a:pPr>
+            <a:r>
+              <a:rPr lang="en-US" sz="1200" dirty="0">
+                <a:solidFill>
+                  <a:srgbClr val="1B1B1B"/>
+                </a:solidFill>
+                <a:latin typeface="Calibri" pitchFamily="34" charset="0"/>
+              </a:rPr>
+              <a:t>Reads ServiceNow, Autosys, SSISDB and SSIS package source in parallel.</a:t>
+            </a:r>
+          </a:p>
+        </p:txBody>
+      </p:sp>
+      <p:sp>
+        <p:nvSpPr>
+          <p:cNvPr id="69" name="R4Dot"/>
+          <p:cNvSpPr/>
+          <p:nvPr/>
+        </p:nvSpPr>
+        <p:spPr>
+          <a:xfrm>
+            <a:off x="6460000" y="4370000"/>
+            <a:ext cx="182880" cy="182880"/>
+          </a:xfrm>
+          <a:prstGeom prst="ellipse">
+            <a:avLst/>
+          </a:prstGeom>
+          <a:solidFill>
+            <a:srgbClr val="FFCD41"/>
+          </a:solidFill>
+          <a:ln w="12700">
+            <a:solidFill>
+              <a:srgbClr val="FFCD41"/>
+            </a:solidFill>
+            <a:prstDash val="solid"/>
+          </a:ln>
+        </p:spPr>
+      </p:sp>
+      <p:sp>
+        <p:nvSpPr>
+          <p:cNvPr id="70" name="R4Time"/>
+          <p:cNvSpPr/>
+          <p:nvPr/>
+        </p:nvSpPr>
+        <p:spPr>
+          <a:xfrm>
+            <a:off x="6780000" y="4315000"/>
+            <a:ext cx="1100000" cy="260000"/>
+          </a:xfrm>
+          <a:prstGeom prst="rect">
+            <a:avLst/>
+          </a:prstGeom>
+          <a:noFill/>
+          <a:ln/>
+        </p:spPr>
+        <p:txBody>
+          <a:bodyPr wrap="square" lIns="0" tIns="0" rIns="0" bIns="0" rtlCol="0" anchor="ctr"/>
+          <a:lstStyle/>
+          <a:p>
+            <a:pPr marL="0" indent="0">
+              <a:buNone/>
+            </a:pPr>
+            <a:r>
+              <a:rPr lang="en-US" sz="1000" b="1" kern="0" spc="300" dirty="0">
+                <a:solidFill>
+                  <a:srgbClr val="8A8A8A"/>
+                </a:solidFill>
+                <a:latin typeface="Calibri" pitchFamily="34" charset="0"/>
+              </a:rPr>
+              <a:t>2:13 AM ET</a:t>
+            </a:r>
+          </a:p>
+        </p:txBody>
+      </p:sp>
+      <p:sp>
+        <p:nvSpPr>
+          <p:cNvPr id="71" name="R4Text"/>
+          <p:cNvSpPr/>
+          <p:nvPr/>
+        </p:nvSpPr>
+        <p:spPr>
+          <a:xfrm>
+            <a:off x="6780000" y="4555000"/>
+            <a:ext cx="4750000" cy="600000"/>
+          </a:xfrm>
+          <a:prstGeom prst="rect">
+            <a:avLst/>
+          </a:prstGeom>
+          <a:noFill/>
+          <a:ln/>
+        </p:spPr>
+        <p:txBody>
+          <a:bodyPr wrap="square" lIns="0" tIns="0" rIns="0" bIns="0" rtlCol="0" anchor="t"/>
+          <a:lstStyle/>
+          <a:p>
+            <a:pPr marL="0" indent="0">
+              <a:buNone/>
+            </a:pPr>
+            <a:r>
+              <a:rPr lang="en-US" sz="1200" dirty="0">
+                <a:solidFill>
+                  <a:srgbClr val="1B1B1B"/>
+                </a:solidFill>
+                <a:latin typeface="Calibri" pitchFamily="34" charset="0"/>
+              </a:rPr>
+              <a:t>Diagnosis with confidence score emailed to L2, offshore EGS, and US teams simultaneously.</a:t>
+            </a:r>
+          </a:p>
+        </p:txBody>
+      </p:sp>
+      <p:sp>
+        <p:nvSpPr>
+          <p:cNvPr id="72" name="R5Dot"/>
+          <p:cNvSpPr/>
+          <p:nvPr/>
+        </p:nvSpPr>
+        <p:spPr>
+          <a:xfrm>
+            <a:off x="6460000" y="5180000"/>
+            <a:ext cx="182880" cy="182880"/>
+          </a:xfrm>
+          <a:prstGeom prst="ellipse">
+            <a:avLst/>
+          </a:prstGeom>
+          <a:solidFill>
+            <a:srgbClr val="FFCD41"/>
+          </a:solidFill>
+          <a:ln w="12700">
+            <a:solidFill>
+              <a:srgbClr val="FFCD41"/>
+            </a:solidFill>
+            <a:prstDash val="solid"/>
+          </a:ln>
+        </p:spPr>
+      </p:sp>
+      <p:sp>
+        <p:nvSpPr>
+          <p:cNvPr id="73" name="R5Time"/>
+          <p:cNvSpPr/>
+          <p:nvPr/>
+        </p:nvSpPr>
+        <p:spPr>
+          <a:xfrm>
+            <a:off x="6780000" y="5125000"/>
+            <a:ext cx="1100000" cy="260000"/>
+          </a:xfrm>
+          <a:prstGeom prst="rect">
+            <a:avLst/>
+          </a:prstGeom>
+          <a:noFill/>
+          <a:ln/>
+        </p:spPr>
+        <p:txBody>
+          <a:bodyPr wrap="square" lIns="0" tIns="0" rIns="0" bIns="0" rtlCol="0" anchor="ctr"/>
+          <a:lstStyle/>
+          <a:p>
+            <a:pPr marL="0" indent="0">
+              <a:buNone/>
+            </a:pPr>
+            <a:r>
+              <a:rPr lang="en-US" sz="1000" b="1" kern="0" spc="300" dirty="0">
+                <a:solidFill>
+                  <a:srgbClr val="8A8A8A"/>
+                </a:solidFill>
+                <a:latin typeface="Calibri" pitchFamily="34" charset="0"/>
+              </a:rPr>
+              <a:t>2:13 AM ET</a:t>
+            </a:r>
+          </a:p>
+        </p:txBody>
+      </p:sp>
+      <p:sp>
+        <p:nvSpPr>
+          <p:cNvPr id="74" name="R5Text"/>
+          <p:cNvSpPr/>
+          <p:nvPr/>
+        </p:nvSpPr>
+        <p:spPr>
+          <a:xfrm>
+            <a:off x="6780000" y="5365000"/>
+            <a:ext cx="4750000" cy="600000"/>
+          </a:xfrm>
+          <a:prstGeom prst="rect">
+            <a:avLst/>
+          </a:prstGeom>
+          <a:noFill/>
+          <a:ln/>
+        </p:spPr>
+        <p:txBody>
+          <a:bodyPr wrap="square" lIns="0" tIns="0" rIns="0" bIns="0" rtlCol="0" anchor="t"/>
+          <a:lstStyle/>
+          <a:p>
+            <a:pPr marL="0" indent="0">
+              <a:buNone/>
+            </a:pPr>
+            <a:r>
+              <a:rPr lang="en-US" sz="1200" dirty="0">
+                <a:solidFill>
+                  <a:srgbClr val="1B1B1B"/>
+                </a:solidFill>
+                <a:latin typeface="Calibri" pitchFamily="34" charset="0"/>
+              </a:rPr>
+              <a:t>Offshore EGS acts on the diagnosis. Escalates to US DBAs only when SAR access is truly required.</a:t>
+            </a:r>
+          </a:p>
+        </p:txBody>
+      </p:sp>
+      <p:sp>
+        <p:nvSpPr>
+          <p:cNvPr id="75" name="R6Dot"/>
+          <p:cNvSpPr/>
+          <p:nvPr/>
+        </p:nvSpPr>
+        <p:spPr>
+          <a:xfrm>
+            <a:off x="6460000" y="5990000"/>
+            <a:ext cx="182880" cy="182880"/>
+          </a:xfrm>
+          <a:prstGeom prst="ellipse">
+            <a:avLst/>
+          </a:prstGeom>
+          <a:solidFill>
+            <a:srgbClr val="FFCD41"/>
+          </a:solidFill>
+          <a:ln w="12700">
+            <a:solidFill>
+              <a:srgbClr val="FFCD41"/>
+            </a:solidFill>
+            <a:prstDash val="solid"/>
+          </a:ln>
+        </p:spPr>
+      </p:sp>
+      <p:sp>
+        <p:nvSpPr>
+          <p:cNvPr id="76" name="R6Time"/>
+          <p:cNvSpPr/>
+          <p:nvPr/>
+        </p:nvSpPr>
+        <p:spPr>
+          <a:xfrm>
+            <a:off x="6780000" y="5935000"/>
+            <a:ext cx="1300000" cy="260000"/>
+          </a:xfrm>
+          <a:prstGeom prst="rect">
+            <a:avLst/>
+          </a:prstGeom>
+          <a:noFill/>
+          <a:ln/>
+        </p:spPr>
+        <p:txBody>
+          <a:bodyPr wrap="square" lIns="0" tIns="0" rIns="0" bIns="0" rtlCol="0" anchor="ctr"/>
+          <a:lstStyle/>
+          <a:p>
+            <a:pPr marL="0" indent="0">
+              <a:buNone/>
+            </a:pPr>
+            <a:r>
+              <a:rPr lang="en-US" sz="1000" b="1" kern="0" spc="300" dirty="0">
+                <a:solidFill>
+                  <a:srgbClr val="B89000"/>
+                </a:solidFill>
+                <a:latin typeface="Calibri" pitchFamily="34" charset="0"/>
+              </a:rPr>
+              <a:t>2:15 AM ET</a:t>
+            </a:r>
+          </a:p>
+        </p:txBody>
+      </p:sp>
+      <p:sp>
+        <p:nvSpPr>
+          <p:cNvPr id="77" name="R6Text"/>
+          <p:cNvSpPr/>
+          <p:nvPr/>
+        </p:nvSpPr>
+        <p:spPr>
+          <a:xfrm>
+            <a:off x="6780000" y="6175000"/>
+            <a:ext cx="4750000" cy="280000"/>
+          </a:xfrm>
+          <a:prstGeom prst="rect">
+            <a:avLst/>
+          </a:prstGeom>
+          <a:noFill/>
+          <a:ln/>
+        </p:spPr>
+        <p:txBody>
+          <a:bodyPr wrap="square" lIns="0" tIns="0" rIns="0" bIns="0" rtlCol="0" anchor="t"/>
+          <a:lstStyle/>
+          <a:p>
+            <a:pPr marL="0" indent="0">
+              <a:buNone/>
+            </a:pPr>
+            <a:r>
+              <a:rPr lang="en-US" sz="1200" b="1" dirty="0">
+                <a:solidFill>
+                  <a:srgbClr val="1B1B1B"/>
+                </a:solidFill>
+                <a:latin typeface="Calibri" pitchFamily="34" charset="0"/>
+              </a:rPr>
+              <a:t>Users updated within 15 minutes  —  any time, any region.</a:t>
+            </a:r>
+          </a:p>
+        </p:txBody>
+      </p:sp>
+    </p:spTree>
+  </p:cSld>
+  <p:clrMapOvr>
+    <a:masterClrMapping/>
+  </p:clrMapOvr>
+</p:sld>
+</file>
+
+<file path=ppt/slides/slide7.xml><?xml version="1.0" encoding="utf-8"?>
 <p:sld xmlns:a="http://schemas.openxmlformats.org/drawingml/2006/main" xmlns:r="http://schemas.openxmlformats.org/officeDocument/2006/relationships" xmlns:p="http://schemas.openxmlformats.org/presentationml/2006/main">
   <p:cSld name="Slide 6">
     <p:bg>
@@ -5070,7 +7472,7 @@
                 </a:solidFill>
                 <a:latin typeface="Calibri" pitchFamily="34" charset="0"/>
               </a:rPr>
-              <a:t>6 / 7</a:t>
+              <a:t>7 / 8</a:t>
             </a:r>
           </a:p>
         </p:txBody>
@@ -6012,7 +8414,7 @@
                 <a:ea typeface="Calibri" pitchFamily="34" charset="-122"/>
                 <a:cs typeface="Calibri" pitchFamily="34" charset="-120"/>
               </a:rPr>
-              <a:t>7 / 7</a:t>
+              <a:t>8 / 8</a:t>
             </a:r>
             <a:endParaRPr lang="en-US" sz="900" dirty="0"/>
           </a:p>
@@ -6585,1555 +8987,6 @@
               <a:t>Where confidence is high, suggest the actual code change. Engineer still approves and merges.</a:t>
             </a:r>
             <a:endParaRPr lang="en-US" sz="1400" dirty="0"/>
-          </a:p>
-        </p:txBody>
-      </p:sp>
-    </p:spTree>
-  </p:cSld>
-  <p:clrMapOvr>
-    <a:masterClrMapping/>
-  </p:clrMapOvr>
-</p:sld>
-</file>
-
-<file path=ppt/slides/slide9.xml><?xml version="1.0" encoding="utf-8"?>
-<p:sld xmlns:a="http://schemas.openxmlformats.org/drawingml/2006/main" xmlns:r="http://schemas.openxmlformats.org/officeDocument/2006/relationships" xmlns:p="http://schemas.openxmlformats.org/presentationml/2006/main">
-  <p:cSld name="Slide 5">
-    <p:bg>
-      <p:bgPr>
-        <a:solidFill>
-          <a:srgbClr val="FFFFFF"/>
-        </a:solidFill>
-        <a:effectLst/>
-      </p:bgPr>
-    </p:bg>
-    <p:spTree>
-      <p:nvGrpSpPr>
-        <p:cNvPr id="1" name=""/>
-        <p:cNvGrpSpPr/>
-        <p:nvPr/>
-      </p:nvGrpSpPr>
-      <p:grpSpPr>
-        <a:xfrm>
-          <a:off x="0" y="0"/>
-          <a:ext cx="0" cy="0"/>
-          <a:chOff x="0" y="0"/>
-          <a:chExt cx="0" cy="0"/>
-        </a:xfrm>
-      </p:grpSpPr>
-      <p:sp>
-        <p:nvSpPr>
-          <p:cNvPr id="2" name="TopBar"/>
-          <p:cNvSpPr/>
-          <p:nvPr/>
-        </p:nvSpPr>
-        <p:spPr>
-          <a:xfrm>
-            <a:off x="0" y="0"/>
-            <a:ext cx="12161520" cy="164592"/>
-          </a:xfrm>
-          <a:prstGeom prst="rect">
-            <a:avLst/>
-          </a:prstGeom>
-          <a:solidFill>
-            <a:srgbClr val="D71E28"/>
-          </a:solidFill>
-          <a:ln w="12700">
-            <a:solidFill>
-              <a:srgbClr val="D71E28"/>
-            </a:solidFill>
-            <a:prstDash val="solid"/>
-          </a:ln>
-        </p:spPr>
-      </p:sp>
-      <p:sp>
-        <p:nvSpPr>
-          <p:cNvPr id="3" name="Eyebrow"/>
-          <p:cNvSpPr/>
-          <p:nvPr/>
-        </p:nvSpPr>
-        <p:spPr>
-          <a:xfrm>
-            <a:off x="731520" y="502920"/>
-            <a:ext cx="10058400" cy="320040"/>
-          </a:xfrm>
-          <a:prstGeom prst="rect">
-            <a:avLst/>
-          </a:prstGeom>
-          <a:noFill/>
-          <a:ln/>
-        </p:spPr>
-        <p:txBody>
-          <a:bodyPr wrap="square" lIns="0" tIns="0" rIns="0" bIns="0" rtlCol="0" anchor="ctr"/>
-          <a:lstStyle/>
-          <a:p>
-            <a:pPr marL="0" indent="0">
-              <a:buNone/>
-            </a:pPr>
-            <a:r>
-              <a:rPr lang="en-US" sz="1100" b="1" kern="0" spc="600" dirty="0">
-                <a:solidFill>
-                  <a:srgbClr val="D71E28"/>
-                </a:solidFill>
-                <a:latin typeface="Calibri" pitchFamily="34" charset="0"/>
-              </a:rPr>
-              <a:t>PROCESS COMPARISON</a:t>
-            </a:r>
-          </a:p>
-        </p:txBody>
-      </p:sp>
-      <p:sp>
-        <p:nvSpPr>
-          <p:cNvPr id="4" name="Title"/>
-          <p:cNvSpPr/>
-          <p:nvPr/>
-        </p:nvSpPr>
-        <p:spPr>
-          <a:xfrm>
-            <a:off x="731520" y="900000"/>
-            <a:ext cx="10698480" cy="600000"/>
-          </a:xfrm>
-          <a:prstGeom prst="rect">
-            <a:avLst/>
-          </a:prstGeom>
-          <a:noFill/>
-          <a:ln/>
-        </p:spPr>
-        <p:txBody>
-          <a:bodyPr wrap="square" lIns="0" tIns="0" rIns="0" bIns="0" rtlCol="0" anchor="ctr"/>
-          <a:lstStyle/>
-          <a:p>
-            <a:pPr marL="0" indent="0">
-              <a:buNone/>
-            </a:pPr>
-            <a:r>
-              <a:rPr lang="en-US" sz="3200" b="1" dirty="0">
-                <a:solidFill>
-                  <a:srgbClr val="1B1B1B"/>
-                </a:solidFill>
-                <a:latin typeface="Calibri" pitchFamily="34" charset="0"/>
-              </a:rPr>
-              <a:t>From a multi-team relay to a single automated diagnosis.</a:t>
-            </a:r>
-          </a:p>
-        </p:txBody>
-      </p:sp>
-      <p:sp>
-        <p:nvSpPr>
-          <p:cNvPr id="5" name="PageNum"/>
-          <p:cNvSpPr/>
-          <p:nvPr/>
-        </p:nvSpPr>
-        <p:spPr>
-          <a:xfrm>
-            <a:off x="10789920" y="6400800"/>
-            <a:ext cx="822960" cy="274320"/>
-          </a:xfrm>
-          <a:prstGeom prst="rect">
-            <a:avLst/>
-          </a:prstGeom>
-          <a:noFill/>
-          <a:ln/>
-        </p:spPr>
-        <p:txBody>
-          <a:bodyPr wrap="square" lIns="0" tIns="0" rIns="0" bIns="0" rtlCol="0" anchor="ctr"/>
-          <a:lstStyle/>
-          <a:p>
-            <a:pPr marL="0" indent="0" algn="r">
-              <a:buNone/>
-            </a:pPr>
-            <a:r>
-              <a:rPr lang="en-US" sz="900" dirty="0">
-                <a:solidFill>
-                  <a:srgbClr val="8A8A8A"/>
-                </a:solidFill>
-                <a:latin typeface="Calibri" pitchFamily="34" charset="0"/>
-              </a:rPr>
-              <a:t>5 / 7</a:t>
-            </a:r>
-          </a:p>
-        </p:txBody>
-      </p:sp>
-      <p:sp>
-        <p:nvSpPr>
-          <p:cNvPr id="10" name="LeftLabel"/>
-          <p:cNvSpPr/>
-          <p:nvPr/>
-        </p:nvSpPr>
-        <p:spPr>
-          <a:xfrm>
-            <a:off x="571500" y="1750000"/>
-            <a:ext cx="5440680" cy="280000"/>
-          </a:xfrm>
-          <a:prstGeom prst="rect">
-            <a:avLst/>
-          </a:prstGeom>
-          <a:noFill/>
-          <a:ln/>
-        </p:spPr>
-        <p:txBody>
-          <a:bodyPr wrap="square" lIns="0" tIns="0" rIns="0" bIns="0" rtlCol="0" anchor="ctr"/>
-          <a:lstStyle/>
-          <a:p>
-            <a:pPr marL="0" indent="0">
-              <a:buNone/>
-            </a:pPr>
-            <a:r>
-              <a:rPr lang="en-US" sz="1000" b="1" kern="0" spc="500" dirty="0">
-                <a:solidFill>
-                  <a:srgbClr val="D71E28"/>
-                </a:solidFill>
-                <a:latin typeface="Calibri" pitchFamily="34" charset="0"/>
-              </a:rPr>
-              <a:t>TODAY  ·  MANUAL RELAY</a:t>
-            </a:r>
-          </a:p>
-        </p:txBody>
-      </p:sp>
-      <p:sp>
-        <p:nvSpPr>
-          <p:cNvPr id="11" name="LeftHeading"/>
-          <p:cNvSpPr/>
-          <p:nvPr/>
-        </p:nvSpPr>
-        <p:spPr>
-          <a:xfrm>
-            <a:off x="571500" y="2050000"/>
-            <a:ext cx="5440680" cy="380000"/>
-          </a:xfrm>
-          <a:prstGeom prst="rect">
-            <a:avLst/>
-          </a:prstGeom>
-          <a:noFill/>
-          <a:ln/>
-        </p:spPr>
-        <p:txBody>
-          <a:bodyPr wrap="square" lIns="0" tIns="0" rIns="0" bIns="0" rtlCol="0" anchor="ctr"/>
-          <a:lstStyle/>
-          <a:p>
-            <a:pPr marL="0" indent="0">
-              <a:buNone/>
-            </a:pPr>
-            <a:r>
-              <a:rPr lang="en-US" sz="1800" b="1" dirty="0">
-                <a:solidFill>
-                  <a:srgbClr val="1B1B1B"/>
-                </a:solidFill>
-                <a:latin typeface="Calibri" pitchFamily="34" charset="0"/>
-              </a:rPr>
-              <a:t>Up to 10 hours, six handoffs.</a:t>
-            </a:r>
-          </a:p>
-        </p:txBody>
-      </p:sp>
-      <p:sp>
-        <p:nvSpPr>
-          <p:cNvPr id="12" name="LeftRail"/>
-          <p:cNvSpPr/>
-          <p:nvPr/>
-        </p:nvSpPr>
-        <p:spPr>
-          <a:xfrm>
-            <a:off x="811000" y="2570000"/>
-            <a:ext cx="22860" cy="3640000"/>
-          </a:xfrm>
-          <a:prstGeom prst="rect">
-            <a:avLst/>
-          </a:prstGeom>
-          <a:solidFill>
-            <a:srgbClr val="E5E0D5"/>
-          </a:solidFill>
-          <a:ln w="12700">
-            <a:solidFill>
-              <a:srgbClr val="E5E0D5"/>
-            </a:solidFill>
-            <a:prstDash val="solid"/>
-          </a:ln>
-        </p:spPr>
-      </p:sp>
-      <p:sp>
-        <p:nvSpPr>
-          <p:cNvPr id="20" name="L1Dot"/>
-          <p:cNvSpPr/>
-          <p:nvPr/>
-        </p:nvSpPr>
-        <p:spPr>
-          <a:xfrm>
-            <a:off x="731520" y="2570000"/>
-            <a:ext cx="182880" cy="182880"/>
-          </a:xfrm>
-          <a:prstGeom prst="ellipse">
-            <a:avLst/>
-          </a:prstGeom>
-          <a:solidFill>
-            <a:srgbClr val="D71E28"/>
-          </a:solidFill>
-          <a:ln w="12700">
-            <a:solidFill>
-              <a:srgbClr val="D71E28"/>
-            </a:solidFill>
-            <a:prstDash val="solid"/>
-          </a:ln>
-        </p:spPr>
-      </p:sp>
-      <p:sp>
-        <p:nvSpPr>
-          <p:cNvPr id="21" name="L1Time"/>
-          <p:cNvSpPr/>
-          <p:nvPr/>
-        </p:nvSpPr>
-        <p:spPr>
-          <a:xfrm>
-            <a:off x="1050000" y="2515000"/>
-            <a:ext cx="1100000" cy="260000"/>
-          </a:xfrm>
-          <a:prstGeom prst="rect">
-            <a:avLst/>
-          </a:prstGeom>
-          <a:noFill/>
-          <a:ln/>
-        </p:spPr>
-        <p:txBody>
-          <a:bodyPr wrap="square" lIns="0" tIns="0" rIns="0" bIns="0" rtlCol="0" anchor="ctr"/>
-          <a:lstStyle/>
-          <a:p>
-            <a:pPr marL="0" indent="0">
-              <a:buNone/>
-            </a:pPr>
-            <a:r>
-              <a:rPr lang="en-US" sz="1000" b="1" kern="0" spc="300" dirty="0">
-                <a:solidFill>
-                  <a:srgbClr val="8A8A8A"/>
-                </a:solidFill>
-                <a:latin typeface="Calibri" pitchFamily="34" charset="0"/>
-              </a:rPr>
-              <a:t>2:00 AM ET</a:t>
-            </a:r>
-          </a:p>
-        </p:txBody>
-      </p:sp>
-      <p:sp>
-        <p:nvSpPr>
-          <p:cNvPr id="22" name="L1Text"/>
-          <p:cNvSpPr/>
-          <p:nvPr/>
-        </p:nvSpPr>
-        <p:spPr>
-          <a:xfrm>
-            <a:off x="1050000" y="2755000"/>
-            <a:ext cx="4900000" cy="430000"/>
-          </a:xfrm>
-          <a:prstGeom prst="rect">
-            <a:avLst/>
-          </a:prstGeom>
-          <a:noFill/>
-          <a:ln/>
-        </p:spPr>
-        <p:txBody>
-          <a:bodyPr wrap="square" lIns="0" tIns="0" rIns="0" bIns="0" rtlCol="0" anchor="t"/>
-          <a:lstStyle/>
-          <a:p>
-            <a:pPr marL="0" indent="0">
-              <a:buNone/>
-            </a:pPr>
-            <a:r>
-              <a:rPr lang="en-US" sz="1200" dirty="0">
-                <a:solidFill>
-                  <a:srgbClr val="1B1B1B"/>
-                </a:solidFill>
-                <a:latin typeface="Calibri" pitchFamily="34" charset="0"/>
-              </a:rPr>
-              <a:t>Job fails. ServiceNow incident auto-generated.</a:t>
-            </a:r>
-          </a:p>
-        </p:txBody>
-      </p:sp>
-      <p:sp>
-        <p:nvSpPr>
-          <p:cNvPr id="23" name="L2Dot"/>
-          <p:cNvSpPr/>
-          <p:nvPr/>
-        </p:nvSpPr>
-        <p:spPr>
-          <a:xfrm>
-            <a:off x="731520" y="3170000"/>
-            <a:ext cx="182880" cy="182880"/>
-          </a:xfrm>
-          <a:prstGeom prst="ellipse">
-            <a:avLst/>
-          </a:prstGeom>
-          <a:solidFill>
-            <a:srgbClr val="D71E28"/>
-          </a:solidFill>
-          <a:ln w="12700">
-            <a:solidFill>
-              <a:srgbClr val="D71E28"/>
-            </a:solidFill>
-            <a:prstDash val="solid"/>
-          </a:ln>
-        </p:spPr>
-      </p:sp>
-      <p:sp>
-        <p:nvSpPr>
-          <p:cNvPr id="24" name="L2Time"/>
-          <p:cNvSpPr/>
-          <p:nvPr/>
-        </p:nvSpPr>
-        <p:spPr>
-          <a:xfrm>
-            <a:off x="1050000" y="3115000"/>
-            <a:ext cx="1100000" cy="260000"/>
-          </a:xfrm>
-          <a:prstGeom prst="rect">
-            <a:avLst/>
-          </a:prstGeom>
-          <a:noFill/>
-          <a:ln/>
-        </p:spPr>
-        <p:txBody>
-          <a:bodyPr wrap="square" lIns="0" tIns="0" rIns="0" bIns="0" rtlCol="0" anchor="ctr"/>
-          <a:lstStyle/>
-          <a:p>
-            <a:pPr marL="0" indent="0">
-              <a:buNone/>
-            </a:pPr>
-            <a:r>
-              <a:rPr lang="en-US" sz="1000" b="1" kern="0" spc="300" dirty="0">
-                <a:solidFill>
-                  <a:srgbClr val="8A8A8A"/>
-                </a:solidFill>
-                <a:latin typeface="Calibri" pitchFamily="34" charset="0"/>
-              </a:rPr>
-              <a:t>2:05 AM ET</a:t>
-            </a:r>
-          </a:p>
-        </p:txBody>
-      </p:sp>
-      <p:sp>
-        <p:nvSpPr>
-          <p:cNvPr id="25" name="L2Text"/>
-          <p:cNvSpPr/>
-          <p:nvPr/>
-        </p:nvSpPr>
-        <p:spPr>
-          <a:xfrm>
-            <a:off x="1050000" y="3355000"/>
-            <a:ext cx="4900000" cy="430000"/>
-          </a:xfrm>
-          <a:prstGeom prst="rect">
-            <a:avLst/>
-          </a:prstGeom>
-          <a:noFill/>
-          <a:ln/>
-        </p:spPr>
-        <p:txBody>
-          <a:bodyPr wrap="square" lIns="0" tIns="0" rIns="0" bIns="0" rtlCol="0" anchor="t"/>
-          <a:lstStyle/>
-          <a:p>
-            <a:pPr marL="0" indent="0">
-              <a:buNone/>
-            </a:pPr>
-            <a:r>
-              <a:rPr lang="en-US" sz="1200" dirty="0">
-                <a:solidFill>
-                  <a:srgbClr val="1B1B1B"/>
-                </a:solidFill>
-                <a:latin typeface="Calibri" pitchFamily="34" charset="0"/>
-              </a:rPr>
-              <a:t>Offshore EGS L2 picks up the ticket and starts to investigate.</a:t>
-            </a:r>
-          </a:p>
-        </p:txBody>
-      </p:sp>
-      <p:sp>
-        <p:nvSpPr>
-          <p:cNvPr id="26" name="L3Dot"/>
-          <p:cNvSpPr/>
-          <p:nvPr/>
-        </p:nvSpPr>
-        <p:spPr>
-          <a:xfrm>
-            <a:off x="731520" y="3770000"/>
-            <a:ext cx="182880" cy="182880"/>
-          </a:xfrm>
-          <a:prstGeom prst="ellipse">
-            <a:avLst/>
-          </a:prstGeom>
-          <a:solidFill>
-            <a:srgbClr val="D71E28"/>
-          </a:solidFill>
-          <a:ln w="12700">
-            <a:solidFill>
-              <a:srgbClr val="D71E28"/>
-            </a:solidFill>
-            <a:prstDash val="solid"/>
-          </a:ln>
-        </p:spPr>
-      </p:sp>
-      <p:sp>
-        <p:nvSpPr>
-          <p:cNvPr id="27" name="L3Time"/>
-          <p:cNvSpPr/>
-          <p:nvPr/>
-        </p:nvSpPr>
-        <p:spPr>
-          <a:xfrm>
-            <a:off x="1050000" y="3715000"/>
-            <a:ext cx="1100000" cy="260000"/>
-          </a:xfrm>
-          <a:prstGeom prst="rect">
-            <a:avLst/>
-          </a:prstGeom>
-          <a:noFill/>
-          <a:ln/>
-        </p:spPr>
-        <p:txBody>
-          <a:bodyPr wrap="square" lIns="0" tIns="0" rIns="0" bIns="0" rtlCol="0" anchor="ctr"/>
-          <a:lstStyle/>
-          <a:p>
-            <a:pPr marL="0" indent="0">
-              <a:buNone/>
-            </a:pPr>
-            <a:r>
-              <a:rPr lang="en-US" sz="1000" b="1" kern="0" spc="300" dirty="0">
-                <a:solidFill>
-                  <a:srgbClr val="8A8A8A"/>
-                </a:solidFill>
-                <a:latin typeface="Calibri" pitchFamily="34" charset="0"/>
-              </a:rPr>
-              <a:t>2:30 AM ET</a:t>
-            </a:r>
-          </a:p>
-        </p:txBody>
-      </p:sp>
-      <p:sp>
-        <p:nvSpPr>
-          <p:cNvPr id="28" name="L3Text"/>
-          <p:cNvSpPr/>
-          <p:nvPr/>
-        </p:nvSpPr>
-        <p:spPr>
-          <a:xfrm>
-            <a:off x="1050000" y="3955000"/>
-            <a:ext cx="4900000" cy="430000"/>
-          </a:xfrm>
-          <a:prstGeom prst="rect">
-            <a:avLst/>
-          </a:prstGeom>
-          <a:noFill/>
-          <a:ln/>
-        </p:spPr>
-        <p:txBody>
-          <a:bodyPr wrap="square" lIns="0" tIns="0" rIns="0" bIns="0" rtlCol="0" anchor="t"/>
-          <a:lstStyle/>
-          <a:p>
-            <a:pPr marL="0" indent="0">
-              <a:buNone/>
-            </a:pPr>
-            <a:r>
-              <a:rPr lang="en-US" sz="1200" dirty="0">
-                <a:solidFill>
-                  <a:srgbClr val="1B1B1B"/>
-                </a:solidFill>
-                <a:latin typeface="Calibri" pitchFamily="34" charset="0"/>
-              </a:rPr>
-              <a:t>L2 engages EGS DBAs offshore. DBAs spend time identifying the issue.</a:t>
-            </a:r>
-          </a:p>
-        </p:txBody>
-      </p:sp>
-      <p:sp>
-        <p:nvSpPr>
-          <p:cNvPr id="29" name="L4Dot"/>
-          <p:cNvSpPr/>
-          <p:nvPr/>
-        </p:nvSpPr>
-        <p:spPr>
-          <a:xfrm>
-            <a:off x="731520" y="4370000"/>
-            <a:ext cx="182880" cy="182880"/>
-          </a:xfrm>
-          <a:prstGeom prst="ellipse">
-            <a:avLst/>
-          </a:prstGeom>
-          <a:solidFill>
-            <a:srgbClr val="D71E28"/>
-          </a:solidFill>
-          <a:ln w="12700">
-            <a:solidFill>
-              <a:srgbClr val="D71E28"/>
-            </a:solidFill>
-            <a:prstDash val="solid"/>
-          </a:ln>
-        </p:spPr>
-      </p:sp>
-      <p:sp>
-        <p:nvSpPr>
-          <p:cNvPr id="30" name="L4Time"/>
-          <p:cNvSpPr/>
-          <p:nvPr/>
-        </p:nvSpPr>
-        <p:spPr>
-          <a:xfrm>
-            <a:off x="1050000" y="4315000"/>
-            <a:ext cx="1100000" cy="260000"/>
-          </a:xfrm>
-          <a:prstGeom prst="rect">
-            <a:avLst/>
-          </a:prstGeom>
-          <a:noFill/>
-          <a:ln/>
-        </p:spPr>
-        <p:txBody>
-          <a:bodyPr wrap="square" lIns="0" tIns="0" rIns="0" bIns="0" rtlCol="0" anchor="ctr"/>
-          <a:lstStyle/>
-          <a:p>
-            <a:pPr marL="0" indent="0">
-              <a:buNone/>
-            </a:pPr>
-            <a:r>
-              <a:rPr lang="en-US" sz="1000" b="1" kern="0" spc="300" dirty="0">
-                <a:solidFill>
-                  <a:srgbClr val="8A8A8A"/>
-                </a:solidFill>
-                <a:latin typeface="Calibri" pitchFamily="34" charset="0"/>
-              </a:rPr>
-              <a:t>3:00 AM ET</a:t>
-            </a:r>
-          </a:p>
-        </p:txBody>
-      </p:sp>
-      <p:sp>
-        <p:nvSpPr>
-          <p:cNvPr id="31" name="L4Text"/>
-          <p:cNvSpPr/>
-          <p:nvPr/>
-        </p:nvSpPr>
-        <p:spPr>
-          <a:xfrm>
-            <a:off x="1050000" y="4555000"/>
-            <a:ext cx="4900000" cy="600000"/>
-          </a:xfrm>
-          <a:prstGeom prst="rect">
-            <a:avLst/>
-          </a:prstGeom>
-          <a:noFill/>
-          <a:ln/>
-        </p:spPr>
-        <p:txBody>
-          <a:bodyPr wrap="square" lIns="0" tIns="0" rIns="0" bIns="0" rtlCol="0" anchor="t"/>
-          <a:lstStyle/>
-          <a:p>
-            <a:pPr marL="0" indent="0">
-              <a:buNone/>
-            </a:pPr>
-            <a:r>
-              <a:rPr lang="en-US" sz="1200" dirty="0">
-                <a:solidFill>
-                  <a:srgbClr val="1B1B1B"/>
-                </a:solidFill>
-                <a:latin typeface="Calibri" pitchFamily="34" charset="0"/>
-              </a:rPr>
-              <a:t>Branch by issue type:  SAR server → page US DBAs (may not answer).  Server / permissions → DBAs resolve.  Otherwise → punt to developers.</a:t>
-            </a:r>
-          </a:p>
-        </p:txBody>
-      </p:sp>
-      <p:sp>
-        <p:nvSpPr>
-          <p:cNvPr id="32" name="L5Dot"/>
-          <p:cNvSpPr/>
-          <p:nvPr/>
-        </p:nvSpPr>
-        <p:spPr>
-          <a:xfrm>
-            <a:off x="731520" y="5180000"/>
-            <a:ext cx="182880" cy="182880"/>
-          </a:xfrm>
-          <a:prstGeom prst="ellipse">
-            <a:avLst/>
-          </a:prstGeom>
-          <a:solidFill>
-            <a:srgbClr val="D71E28"/>
-          </a:solidFill>
-          <a:ln w="12700">
-            <a:solidFill>
-              <a:srgbClr val="D71E28"/>
-            </a:solidFill>
-            <a:prstDash val="solid"/>
-          </a:ln>
-        </p:spPr>
-      </p:sp>
-      <p:sp>
-        <p:nvSpPr>
-          <p:cNvPr id="33" name="L5Time"/>
-          <p:cNvSpPr/>
-          <p:nvPr/>
-        </p:nvSpPr>
-        <p:spPr>
-          <a:xfrm>
-            <a:off x="1050000" y="5125000"/>
-            <a:ext cx="1800000" cy="260000"/>
-          </a:xfrm>
-          <a:prstGeom prst="rect">
-            <a:avLst/>
-          </a:prstGeom>
-          <a:noFill/>
-          <a:ln/>
-        </p:spPr>
-        <p:txBody>
-          <a:bodyPr wrap="square" lIns="0" tIns="0" rIns="0" bIns="0" rtlCol="0" anchor="ctr"/>
-          <a:lstStyle/>
-          <a:p>
-            <a:pPr marL="0" indent="0">
-              <a:buNone/>
-            </a:pPr>
-            <a:r>
-              <a:rPr lang="en-US" sz="1000" b="1" kern="0" spc="300" dirty="0">
-                <a:solidFill>
-                  <a:srgbClr val="8A8A8A"/>
-                </a:solidFill>
-                <a:latin typeface="Calibri" pitchFamily="34" charset="0"/>
-              </a:rPr>
-              <a:t>9:00 - 11:00 AM ET</a:t>
-            </a:r>
-          </a:p>
-        </p:txBody>
-      </p:sp>
-      <p:sp>
-        <p:nvSpPr>
-          <p:cNvPr id="34" name="L5Text"/>
-          <p:cNvSpPr/>
-          <p:nvPr/>
-        </p:nvSpPr>
-        <p:spPr>
-          <a:xfrm>
-            <a:off x="1050000" y="5365000"/>
-            <a:ext cx="4900000" cy="600000"/>
-          </a:xfrm>
-          <a:prstGeom prst="rect">
-            <a:avLst/>
-          </a:prstGeom>
-          <a:noFill/>
-          <a:ln/>
-        </p:spPr>
-        <p:txBody>
-          <a:bodyPr wrap="square" lIns="0" tIns="0" rIns="0" bIns="0" rtlCol="0" anchor="t"/>
-          <a:lstStyle/>
-          <a:p>
-            <a:pPr marL="0" indent="0">
-              <a:buNone/>
-            </a:pPr>
-            <a:r>
-              <a:rPr lang="en-US" sz="1200" dirty="0">
-                <a:solidFill>
-                  <a:srgbClr val="1B1B1B"/>
-                </a:solidFill>
-                <a:latin typeface="Calibri" pitchFamily="34" charset="0"/>
-              </a:rPr>
-              <a:t>US DBAs come online, review jobs and execution reports, then ask app developers to inspect the SSIS packages.</a:t>
-            </a:r>
-          </a:p>
-        </p:txBody>
-      </p:sp>
-      <p:sp>
-        <p:nvSpPr>
-          <p:cNvPr id="35" name="L6Dot"/>
-          <p:cNvSpPr/>
-          <p:nvPr/>
-        </p:nvSpPr>
-        <p:spPr>
-          <a:xfrm>
-            <a:off x="731520" y="5990000"/>
-            <a:ext cx="182880" cy="182880"/>
-          </a:xfrm>
-          <a:prstGeom prst="ellipse">
-            <a:avLst/>
-          </a:prstGeom>
-          <a:solidFill>
-            <a:srgbClr val="D71E28"/>
-          </a:solidFill>
-          <a:ln w="12700">
-            <a:solidFill>
-              <a:srgbClr val="D71E28"/>
-            </a:solidFill>
-            <a:prstDash val="solid"/>
-          </a:ln>
-        </p:spPr>
-      </p:sp>
-      <p:sp>
-        <p:nvSpPr>
-          <p:cNvPr id="36" name="L6Time"/>
-          <p:cNvSpPr/>
-          <p:nvPr/>
-        </p:nvSpPr>
-        <p:spPr>
-          <a:xfrm>
-            <a:off x="1050000" y="5935000"/>
-            <a:ext cx="1300000" cy="260000"/>
-          </a:xfrm>
-          <a:prstGeom prst="rect">
-            <a:avLst/>
-          </a:prstGeom>
-          <a:noFill/>
-          <a:ln/>
-        </p:spPr>
-        <p:txBody>
-          <a:bodyPr wrap="square" lIns="0" tIns="0" rIns="0" bIns="0" rtlCol="0" anchor="ctr"/>
-          <a:lstStyle/>
-          <a:p>
-            <a:pPr marL="0" indent="0">
-              <a:buNone/>
-            </a:pPr>
-            <a:r>
-              <a:rPr lang="en-US" sz="1000" b="1" kern="0" spc="300" dirty="0">
-                <a:solidFill>
-                  <a:srgbClr val="D71E28"/>
-                </a:solidFill>
-                <a:latin typeface="Calibri" pitchFamily="34" charset="0"/>
-              </a:rPr>
-              <a:t>12:00 PM ET</a:t>
-            </a:r>
-          </a:p>
-        </p:txBody>
-      </p:sp>
-      <p:sp>
-        <p:nvSpPr>
-          <p:cNvPr id="37" name="L6Text"/>
-          <p:cNvSpPr/>
-          <p:nvPr/>
-        </p:nvSpPr>
-        <p:spPr>
-          <a:xfrm>
-            <a:off x="1050000" y="6175000"/>
-            <a:ext cx="4900000" cy="280000"/>
-          </a:xfrm>
-          <a:prstGeom prst="rect">
-            <a:avLst/>
-          </a:prstGeom>
-          <a:noFill/>
-          <a:ln/>
-        </p:spPr>
-        <p:txBody>
-          <a:bodyPr wrap="square" lIns="0" tIns="0" rIns="0" bIns="0" rtlCol="0" anchor="t"/>
-          <a:lstStyle/>
-          <a:p>
-            <a:pPr marL="0" indent="0">
-              <a:buNone/>
-            </a:pPr>
-            <a:r>
-              <a:rPr lang="en-US" sz="1200" b="1" dirty="0">
-                <a:solidFill>
-                  <a:srgbClr val="D71E28"/>
-                </a:solidFill>
-                <a:latin typeface="Calibri" pitchFamily="34" charset="0"/>
-              </a:rPr>
-              <a:t>L2 finally updates users  —  10 hours later.</a:t>
-            </a:r>
-          </a:p>
-        </p:txBody>
-      </p:sp>
-      <p:sp>
-        <p:nvSpPr>
-          <p:cNvPr id="40" name="Divider"/>
-          <p:cNvSpPr/>
-          <p:nvPr/>
-        </p:nvSpPr>
-        <p:spPr>
-          <a:xfrm>
-            <a:off x="6096000" y="2050000"/>
-            <a:ext cx="12700" cy="4400000"/>
-          </a:xfrm>
-          <a:prstGeom prst="rect">
-            <a:avLst/>
-          </a:prstGeom>
-          <a:solidFill>
-            <a:srgbClr val="EAEAEA"/>
-          </a:solidFill>
-          <a:ln w="6350">
-            <a:solidFill>
-              <a:srgbClr val="EAEAEA"/>
-            </a:solidFill>
-            <a:prstDash val="solid"/>
-          </a:ln>
-        </p:spPr>
-      </p:sp>
-      <p:sp>
-        <p:nvSpPr>
-          <p:cNvPr id="50" name="RightLabel"/>
-          <p:cNvSpPr/>
-          <p:nvPr/>
-        </p:nvSpPr>
-        <p:spPr>
-          <a:xfrm>
-            <a:off x="6300000" y="1750000"/>
-            <a:ext cx="5440680" cy="280000"/>
-          </a:xfrm>
-          <a:prstGeom prst="rect">
-            <a:avLst/>
-          </a:prstGeom>
-          <a:noFill/>
-          <a:ln/>
-        </p:spPr>
-        <p:txBody>
-          <a:bodyPr wrap="square" lIns="0" tIns="0" rIns="0" bIns="0" rtlCol="0" anchor="ctr"/>
-          <a:lstStyle/>
-          <a:p>
-            <a:pPr marL="0" indent="0">
-              <a:buNone/>
-            </a:pPr>
-            <a:r>
-              <a:rPr lang="en-US" sz="1000" b="1" kern="0" spc="500" dirty="0">
-                <a:solidFill>
-                  <a:srgbClr val="B89000"/>
-                </a:solidFill>
-                <a:latin typeface="Calibri" pitchFamily="34" charset="0"/>
-              </a:rPr>
-              <a:t>WITH AUTOMATION  ·  AI DIAGNOSIS</a:t>
-            </a:r>
-          </a:p>
-        </p:txBody>
-      </p:sp>
-      <p:sp>
-        <p:nvSpPr>
-          <p:cNvPr id="51" name="RightHeading"/>
-          <p:cNvSpPr/>
-          <p:nvPr/>
-        </p:nvSpPr>
-        <p:spPr>
-          <a:xfrm>
-            <a:off x="6300000" y="2050000"/>
-            <a:ext cx="5440680" cy="380000"/>
-          </a:xfrm>
-          <a:prstGeom prst="rect">
-            <a:avLst/>
-          </a:prstGeom>
-          <a:noFill/>
-          <a:ln/>
-        </p:spPr>
-        <p:txBody>
-          <a:bodyPr wrap="square" lIns="0" tIns="0" rIns="0" bIns="0" rtlCol="0" anchor="ctr"/>
-          <a:lstStyle/>
-          <a:p>
-            <a:pPr marL="0" indent="0">
-              <a:buNone/>
-            </a:pPr>
-            <a:r>
-              <a:rPr lang="en-US" sz="1800" b="1" dirty="0">
-                <a:solidFill>
-                  <a:srgbClr val="1B1B1B"/>
-                </a:solidFill>
-                <a:latin typeface="Calibri" pitchFamily="34" charset="0"/>
-              </a:rPr>
-              <a:t>15 minutes, no relay.</a:t>
-            </a:r>
-          </a:p>
-        </p:txBody>
-      </p:sp>
-      <p:sp>
-        <p:nvSpPr>
-          <p:cNvPr id="52" name="RightRail"/>
-          <p:cNvSpPr/>
-          <p:nvPr/>
-        </p:nvSpPr>
-        <p:spPr>
-          <a:xfrm>
-            <a:off x="6539480" y="2570000"/>
-            <a:ext cx="22860" cy="3640000"/>
-          </a:xfrm>
-          <a:prstGeom prst="rect">
-            <a:avLst/>
-          </a:prstGeom>
-          <a:solidFill>
-            <a:srgbClr val="E5E0D5"/>
-          </a:solidFill>
-          <a:ln w="12700">
-            <a:solidFill>
-              <a:srgbClr val="E5E0D5"/>
-            </a:solidFill>
-            <a:prstDash val="solid"/>
-          </a:ln>
-        </p:spPr>
-      </p:sp>
-      <p:sp>
-        <p:nvSpPr>
-          <p:cNvPr id="60" name="R1Dot"/>
-          <p:cNvSpPr/>
-          <p:nvPr/>
-        </p:nvSpPr>
-        <p:spPr>
-          <a:xfrm>
-            <a:off x="6460000" y="2570000"/>
-            <a:ext cx="182880" cy="182880"/>
-          </a:xfrm>
-          <a:prstGeom prst="ellipse">
-            <a:avLst/>
-          </a:prstGeom>
-          <a:solidFill>
-            <a:srgbClr val="FFCD41"/>
-          </a:solidFill>
-          <a:ln w="12700">
-            <a:solidFill>
-              <a:srgbClr val="FFCD41"/>
-            </a:solidFill>
-            <a:prstDash val="solid"/>
-          </a:ln>
-        </p:spPr>
-      </p:sp>
-      <p:sp>
-        <p:nvSpPr>
-          <p:cNvPr id="61" name="R1Time"/>
-          <p:cNvSpPr/>
-          <p:nvPr/>
-        </p:nvSpPr>
-        <p:spPr>
-          <a:xfrm>
-            <a:off x="6780000" y="2515000"/>
-            <a:ext cx="1100000" cy="260000"/>
-          </a:xfrm>
-          <a:prstGeom prst="rect">
-            <a:avLst/>
-          </a:prstGeom>
-          <a:noFill/>
-          <a:ln/>
-        </p:spPr>
-        <p:txBody>
-          <a:bodyPr wrap="square" lIns="0" tIns="0" rIns="0" bIns="0" rtlCol="0" anchor="ctr"/>
-          <a:lstStyle/>
-          <a:p>
-            <a:pPr marL="0" indent="0">
-              <a:buNone/>
-            </a:pPr>
-            <a:r>
-              <a:rPr lang="en-US" sz="1000" b="1" kern="0" spc="300" dirty="0">
-                <a:solidFill>
-                  <a:srgbClr val="8A8A8A"/>
-                </a:solidFill>
-                <a:latin typeface="Calibri" pitchFamily="34" charset="0"/>
-              </a:rPr>
-              <a:t>2:00 AM ET</a:t>
-            </a:r>
-          </a:p>
-        </p:txBody>
-      </p:sp>
-      <p:sp>
-        <p:nvSpPr>
-          <p:cNvPr id="62" name="R1Text"/>
-          <p:cNvSpPr/>
-          <p:nvPr/>
-        </p:nvSpPr>
-        <p:spPr>
-          <a:xfrm>
-            <a:off x="6780000" y="2755000"/>
-            <a:ext cx="4750000" cy="430000"/>
-          </a:xfrm>
-          <a:prstGeom prst="rect">
-            <a:avLst/>
-          </a:prstGeom>
-          <a:noFill/>
-          <a:ln/>
-        </p:spPr>
-        <p:txBody>
-          <a:bodyPr wrap="square" lIns="0" tIns="0" rIns="0" bIns="0" rtlCol="0" anchor="t"/>
-          <a:lstStyle/>
-          <a:p>
-            <a:pPr marL="0" indent="0">
-              <a:buNone/>
-            </a:pPr>
-            <a:r>
-              <a:rPr lang="en-US" sz="1200" dirty="0">
-                <a:solidFill>
-                  <a:srgbClr val="1B1B1B"/>
-                </a:solidFill>
-                <a:latin typeface="Calibri" pitchFamily="34" charset="0"/>
-              </a:rPr>
-              <a:t>Job fails. ServiceNow incident auto-generated.</a:t>
-            </a:r>
-          </a:p>
-        </p:txBody>
-      </p:sp>
-      <p:sp>
-        <p:nvSpPr>
-          <p:cNvPr id="63" name="R2Dot"/>
-          <p:cNvSpPr/>
-          <p:nvPr/>
-        </p:nvSpPr>
-        <p:spPr>
-          <a:xfrm>
-            <a:off x="6460000" y="3170000"/>
-            <a:ext cx="182880" cy="182880"/>
-          </a:xfrm>
-          <a:prstGeom prst="ellipse">
-            <a:avLst/>
-          </a:prstGeom>
-          <a:solidFill>
-            <a:srgbClr val="FFCD41"/>
-          </a:solidFill>
-          <a:ln w="12700">
-            <a:solidFill>
-              <a:srgbClr val="FFCD41"/>
-            </a:solidFill>
-            <a:prstDash val="solid"/>
-          </a:ln>
-        </p:spPr>
-      </p:sp>
-      <p:sp>
-        <p:nvSpPr>
-          <p:cNvPr id="64" name="R2Time"/>
-          <p:cNvSpPr/>
-          <p:nvPr/>
-        </p:nvSpPr>
-        <p:spPr>
-          <a:xfrm>
-            <a:off x="6780000" y="3115000"/>
-            <a:ext cx="1100000" cy="260000"/>
-          </a:xfrm>
-          <a:prstGeom prst="rect">
-            <a:avLst/>
-          </a:prstGeom>
-          <a:noFill/>
-          <a:ln/>
-        </p:spPr>
-        <p:txBody>
-          <a:bodyPr wrap="square" lIns="0" tIns="0" rIns="0" bIns="0" rtlCol="0" anchor="ctr"/>
-          <a:lstStyle/>
-          <a:p>
-            <a:pPr marL="0" indent="0">
-              <a:buNone/>
-            </a:pPr>
-            <a:r>
-              <a:rPr lang="en-US" sz="1000" b="1" kern="0" spc="300" dirty="0">
-                <a:solidFill>
-                  <a:srgbClr val="8A8A8A"/>
-                </a:solidFill>
-                <a:latin typeface="Calibri" pitchFamily="34" charset="0"/>
-              </a:rPr>
-              <a:t>2:00 AM ET</a:t>
-            </a:r>
-          </a:p>
-        </p:txBody>
-      </p:sp>
-      <p:sp>
-        <p:nvSpPr>
-          <p:cNvPr id="65" name="R2Text"/>
-          <p:cNvSpPr/>
-          <p:nvPr/>
-        </p:nvSpPr>
-        <p:spPr>
-          <a:xfrm>
-            <a:off x="6780000" y="3355000"/>
-            <a:ext cx="4750000" cy="430000"/>
-          </a:xfrm>
-          <a:prstGeom prst="rect">
-            <a:avLst/>
-          </a:prstGeom>
-          <a:noFill/>
-          <a:ln/>
-        </p:spPr>
-        <p:txBody>
-          <a:bodyPr wrap="square" lIns="0" tIns="0" rIns="0" bIns="0" rtlCol="0" anchor="t"/>
-          <a:lstStyle/>
-          <a:p>
-            <a:pPr marL="0" indent="0">
-              <a:buNone/>
-            </a:pPr>
-            <a:r>
-              <a:rPr lang="en-US" sz="1200" dirty="0">
-                <a:solidFill>
-                  <a:srgbClr val="1B1B1B"/>
-                </a:solidFill>
-                <a:latin typeface="Calibri" pitchFamily="34" charset="0"/>
-              </a:rPr>
-              <a:t>AI investigation kicks off automatically  —  no human triage needed.</a:t>
-            </a:r>
-          </a:p>
-        </p:txBody>
-      </p:sp>
-      <p:sp>
-        <p:nvSpPr>
-          <p:cNvPr id="66" name="R3Dot"/>
-          <p:cNvSpPr/>
-          <p:nvPr/>
-        </p:nvSpPr>
-        <p:spPr>
-          <a:xfrm>
-            <a:off x="6460000" y="3770000"/>
-            <a:ext cx="182880" cy="182880"/>
-          </a:xfrm>
-          <a:prstGeom prst="ellipse">
-            <a:avLst/>
-          </a:prstGeom>
-          <a:solidFill>
-            <a:srgbClr val="FFCD41"/>
-          </a:solidFill>
-          <a:ln w="12700">
-            <a:solidFill>
-              <a:srgbClr val="FFCD41"/>
-            </a:solidFill>
-            <a:prstDash val="solid"/>
-          </a:ln>
-        </p:spPr>
-      </p:sp>
-      <p:sp>
-        <p:nvSpPr>
-          <p:cNvPr id="67" name="R3Time"/>
-          <p:cNvSpPr/>
-          <p:nvPr/>
-        </p:nvSpPr>
-        <p:spPr>
-          <a:xfrm>
-            <a:off x="6780000" y="3715000"/>
-            <a:ext cx="1800000" cy="260000"/>
-          </a:xfrm>
-          <a:prstGeom prst="rect">
-            <a:avLst/>
-          </a:prstGeom>
-          <a:noFill/>
-          <a:ln/>
-        </p:spPr>
-        <p:txBody>
-          <a:bodyPr wrap="square" lIns="0" tIns="0" rIns="0" bIns="0" rtlCol="0" anchor="ctr"/>
-          <a:lstStyle/>
-          <a:p>
-            <a:pPr marL="0" indent="0">
-              <a:buNone/>
-            </a:pPr>
-            <a:r>
-              <a:rPr lang="en-US" sz="1000" b="1" kern="0" spc="300" dirty="0">
-                <a:solidFill>
-                  <a:srgbClr val="8A8A8A"/>
-                </a:solidFill>
-                <a:latin typeface="Calibri" pitchFamily="34" charset="0"/>
-              </a:rPr>
-              <a:t>2:00 - 2:10 AM ET</a:t>
-            </a:r>
-          </a:p>
-        </p:txBody>
-      </p:sp>
-      <p:sp>
-        <p:nvSpPr>
-          <p:cNvPr id="68" name="R3Text"/>
-          <p:cNvSpPr/>
-          <p:nvPr/>
-        </p:nvSpPr>
-        <p:spPr>
-          <a:xfrm>
-            <a:off x="6780000" y="3955000"/>
-            <a:ext cx="4750000" cy="430000"/>
-          </a:xfrm>
-          <a:prstGeom prst="rect">
-            <a:avLst/>
-          </a:prstGeom>
-          <a:noFill/>
-          <a:ln/>
-        </p:spPr>
-        <p:txBody>
-          <a:bodyPr wrap="square" lIns="0" tIns="0" rIns="0" bIns="0" rtlCol="0" anchor="t"/>
-          <a:lstStyle/>
-          <a:p>
-            <a:pPr marL="0" indent="0">
-              <a:buNone/>
-            </a:pPr>
-            <a:r>
-              <a:rPr lang="en-US" sz="1200" dirty="0">
-                <a:solidFill>
-                  <a:srgbClr val="1B1B1B"/>
-                </a:solidFill>
-                <a:latin typeface="Calibri" pitchFamily="34" charset="0"/>
-              </a:rPr>
-              <a:t>Reads ServiceNow, Autosys, SSISDB and SSIS package source in parallel.</a:t>
-            </a:r>
-          </a:p>
-        </p:txBody>
-      </p:sp>
-      <p:sp>
-        <p:nvSpPr>
-          <p:cNvPr id="69" name="R4Dot"/>
-          <p:cNvSpPr/>
-          <p:nvPr/>
-        </p:nvSpPr>
-        <p:spPr>
-          <a:xfrm>
-            <a:off x="6460000" y="4370000"/>
-            <a:ext cx="182880" cy="182880"/>
-          </a:xfrm>
-          <a:prstGeom prst="ellipse">
-            <a:avLst/>
-          </a:prstGeom>
-          <a:solidFill>
-            <a:srgbClr val="FFCD41"/>
-          </a:solidFill>
-          <a:ln w="12700">
-            <a:solidFill>
-              <a:srgbClr val="FFCD41"/>
-            </a:solidFill>
-            <a:prstDash val="solid"/>
-          </a:ln>
-        </p:spPr>
-      </p:sp>
-      <p:sp>
-        <p:nvSpPr>
-          <p:cNvPr id="70" name="R4Time"/>
-          <p:cNvSpPr/>
-          <p:nvPr/>
-        </p:nvSpPr>
-        <p:spPr>
-          <a:xfrm>
-            <a:off x="6780000" y="4315000"/>
-            <a:ext cx="1100000" cy="260000"/>
-          </a:xfrm>
-          <a:prstGeom prst="rect">
-            <a:avLst/>
-          </a:prstGeom>
-          <a:noFill/>
-          <a:ln/>
-        </p:spPr>
-        <p:txBody>
-          <a:bodyPr wrap="square" lIns="0" tIns="0" rIns="0" bIns="0" rtlCol="0" anchor="ctr"/>
-          <a:lstStyle/>
-          <a:p>
-            <a:pPr marL="0" indent="0">
-              <a:buNone/>
-            </a:pPr>
-            <a:r>
-              <a:rPr lang="en-US" sz="1000" b="1" kern="0" spc="300" dirty="0">
-                <a:solidFill>
-                  <a:srgbClr val="8A8A8A"/>
-                </a:solidFill>
-                <a:latin typeface="Calibri" pitchFamily="34" charset="0"/>
-              </a:rPr>
-              <a:t>2:13 AM ET</a:t>
-            </a:r>
-          </a:p>
-        </p:txBody>
-      </p:sp>
-      <p:sp>
-        <p:nvSpPr>
-          <p:cNvPr id="71" name="R4Text"/>
-          <p:cNvSpPr/>
-          <p:nvPr/>
-        </p:nvSpPr>
-        <p:spPr>
-          <a:xfrm>
-            <a:off x="6780000" y="4555000"/>
-            <a:ext cx="4750000" cy="600000"/>
-          </a:xfrm>
-          <a:prstGeom prst="rect">
-            <a:avLst/>
-          </a:prstGeom>
-          <a:noFill/>
-          <a:ln/>
-        </p:spPr>
-        <p:txBody>
-          <a:bodyPr wrap="square" lIns="0" tIns="0" rIns="0" bIns="0" rtlCol="0" anchor="t"/>
-          <a:lstStyle/>
-          <a:p>
-            <a:pPr marL="0" indent="0">
-              <a:buNone/>
-            </a:pPr>
-            <a:r>
-              <a:rPr lang="en-US" sz="1200" dirty="0">
-                <a:solidFill>
-                  <a:srgbClr val="1B1B1B"/>
-                </a:solidFill>
-                <a:latin typeface="Calibri" pitchFamily="34" charset="0"/>
-              </a:rPr>
-              <a:t>Diagnosis with confidence score emailed to L2, offshore EGS, and US teams simultaneously.</a:t>
-            </a:r>
-          </a:p>
-        </p:txBody>
-      </p:sp>
-      <p:sp>
-        <p:nvSpPr>
-          <p:cNvPr id="72" name="R5Dot"/>
-          <p:cNvSpPr/>
-          <p:nvPr/>
-        </p:nvSpPr>
-        <p:spPr>
-          <a:xfrm>
-            <a:off x="6460000" y="5180000"/>
-            <a:ext cx="182880" cy="182880"/>
-          </a:xfrm>
-          <a:prstGeom prst="ellipse">
-            <a:avLst/>
-          </a:prstGeom>
-          <a:solidFill>
-            <a:srgbClr val="FFCD41"/>
-          </a:solidFill>
-          <a:ln w="12700">
-            <a:solidFill>
-              <a:srgbClr val="FFCD41"/>
-            </a:solidFill>
-            <a:prstDash val="solid"/>
-          </a:ln>
-        </p:spPr>
-      </p:sp>
-      <p:sp>
-        <p:nvSpPr>
-          <p:cNvPr id="73" name="R5Time"/>
-          <p:cNvSpPr/>
-          <p:nvPr/>
-        </p:nvSpPr>
-        <p:spPr>
-          <a:xfrm>
-            <a:off x="6780000" y="5125000"/>
-            <a:ext cx="1100000" cy="260000"/>
-          </a:xfrm>
-          <a:prstGeom prst="rect">
-            <a:avLst/>
-          </a:prstGeom>
-          <a:noFill/>
-          <a:ln/>
-        </p:spPr>
-        <p:txBody>
-          <a:bodyPr wrap="square" lIns="0" tIns="0" rIns="0" bIns="0" rtlCol="0" anchor="ctr"/>
-          <a:lstStyle/>
-          <a:p>
-            <a:pPr marL="0" indent="0">
-              <a:buNone/>
-            </a:pPr>
-            <a:r>
-              <a:rPr lang="en-US" sz="1000" b="1" kern="0" spc="300" dirty="0">
-                <a:solidFill>
-                  <a:srgbClr val="8A8A8A"/>
-                </a:solidFill>
-                <a:latin typeface="Calibri" pitchFamily="34" charset="0"/>
-              </a:rPr>
-              <a:t>2:13 AM ET</a:t>
-            </a:r>
-          </a:p>
-        </p:txBody>
-      </p:sp>
-      <p:sp>
-        <p:nvSpPr>
-          <p:cNvPr id="74" name="R5Text"/>
-          <p:cNvSpPr/>
-          <p:nvPr/>
-        </p:nvSpPr>
-        <p:spPr>
-          <a:xfrm>
-            <a:off x="6780000" y="5365000"/>
-            <a:ext cx="4750000" cy="600000"/>
-          </a:xfrm>
-          <a:prstGeom prst="rect">
-            <a:avLst/>
-          </a:prstGeom>
-          <a:noFill/>
-          <a:ln/>
-        </p:spPr>
-        <p:txBody>
-          <a:bodyPr wrap="square" lIns="0" tIns="0" rIns="0" bIns="0" rtlCol="0" anchor="t"/>
-          <a:lstStyle/>
-          <a:p>
-            <a:pPr marL="0" indent="0">
-              <a:buNone/>
-            </a:pPr>
-            <a:r>
-              <a:rPr lang="en-US" sz="1200" dirty="0">
-                <a:solidFill>
-                  <a:srgbClr val="1B1B1B"/>
-                </a:solidFill>
-                <a:latin typeface="Calibri" pitchFamily="34" charset="0"/>
-              </a:rPr>
-              <a:t>Offshore EGS acts on the diagnosis. Escalates to US DBAs only when SAR access is truly required.</a:t>
-            </a:r>
-          </a:p>
-        </p:txBody>
-      </p:sp>
-      <p:sp>
-        <p:nvSpPr>
-          <p:cNvPr id="75" name="R6Dot"/>
-          <p:cNvSpPr/>
-          <p:nvPr/>
-        </p:nvSpPr>
-        <p:spPr>
-          <a:xfrm>
-            <a:off x="6460000" y="5990000"/>
-            <a:ext cx="182880" cy="182880"/>
-          </a:xfrm>
-          <a:prstGeom prst="ellipse">
-            <a:avLst/>
-          </a:prstGeom>
-          <a:solidFill>
-            <a:srgbClr val="FFCD41"/>
-          </a:solidFill>
-          <a:ln w="12700">
-            <a:solidFill>
-              <a:srgbClr val="FFCD41"/>
-            </a:solidFill>
-            <a:prstDash val="solid"/>
-          </a:ln>
-        </p:spPr>
-      </p:sp>
-      <p:sp>
-        <p:nvSpPr>
-          <p:cNvPr id="76" name="R6Time"/>
-          <p:cNvSpPr/>
-          <p:nvPr/>
-        </p:nvSpPr>
-        <p:spPr>
-          <a:xfrm>
-            <a:off x="6780000" y="5935000"/>
-            <a:ext cx="1300000" cy="260000"/>
-          </a:xfrm>
-          <a:prstGeom prst="rect">
-            <a:avLst/>
-          </a:prstGeom>
-          <a:noFill/>
-          <a:ln/>
-        </p:spPr>
-        <p:txBody>
-          <a:bodyPr wrap="square" lIns="0" tIns="0" rIns="0" bIns="0" rtlCol="0" anchor="ctr"/>
-          <a:lstStyle/>
-          <a:p>
-            <a:pPr marL="0" indent="0">
-              <a:buNone/>
-            </a:pPr>
-            <a:r>
-              <a:rPr lang="en-US" sz="1000" b="1" kern="0" spc="300" dirty="0">
-                <a:solidFill>
-                  <a:srgbClr val="B89000"/>
-                </a:solidFill>
-                <a:latin typeface="Calibri" pitchFamily="34" charset="0"/>
-              </a:rPr>
-              <a:t>2:15 AM ET</a:t>
-            </a:r>
-          </a:p>
-        </p:txBody>
-      </p:sp>
-      <p:sp>
-        <p:nvSpPr>
-          <p:cNvPr id="77" name="R6Text"/>
-          <p:cNvSpPr/>
-          <p:nvPr/>
-        </p:nvSpPr>
-        <p:spPr>
-          <a:xfrm>
-            <a:off x="6780000" y="6175000"/>
-            <a:ext cx="4750000" cy="280000"/>
-          </a:xfrm>
-          <a:prstGeom prst="rect">
-            <a:avLst/>
-          </a:prstGeom>
-          <a:noFill/>
-          <a:ln/>
-        </p:spPr>
-        <p:txBody>
-          <a:bodyPr wrap="square" lIns="0" tIns="0" rIns="0" bIns="0" rtlCol="0" anchor="t"/>
-          <a:lstStyle/>
-          <a:p>
-            <a:pPr marL="0" indent="0">
-              <a:buNone/>
-            </a:pPr>
-            <a:r>
-              <a:rPr lang="en-US" sz="1200" b="1" dirty="0">
-                <a:solidFill>
-                  <a:srgbClr val="1B1B1B"/>
-                </a:solidFill>
-                <a:latin typeface="Calibri" pitchFamily="34" charset="0"/>
-              </a:rPr>
-              <a:t>Users updated within 15 minutes  —  any time, any region.</a:t>
-            </a:r>
           </a:p>
         </p:txBody>
       </p:sp>

--- a/ppt/ETL_Incident_Diagnosis_Deck.pptx
+++ b/ppt/ETL_Incident_Diagnosis_Deck.pptx
@@ -9,13 +9,14 @@
   </p:notesMasterIdLst>
   <p:sldIdLst>
     <p:sldId id="256" r:id="rId2"/>
-    <p:sldId id="265" r:id="rId3"/>
-    <p:sldId id="257" r:id="rId4"/>
-    <p:sldId id="258" r:id="rId5"/>
-    <p:sldId id="259" r:id="rId6"/>
-    <p:sldId id="264" r:id="rId7"/>
-    <p:sldId id="260" r:id="rId8"/>
+    <p:sldId id="265" r:id="rId16"/>
+    <p:sldId id="257" r:id="rId3"/>
+    <p:sldId id="258" r:id="rId4"/>
+    <p:sldId id="259" r:id="rId5"/>
+    <p:sldId id="264" r:id="rId15"/>
+    <p:sldId id="260" r:id="rId6"/>
     <p:sldId id="263" r:id="rId9"/>
+    <p:sldId id="266" r:id="rId17"/>
   </p:sldIdLst>
   <p:sldSz cx="12192000" cy="6858000"/>
   <p:notesSz cx="6858000" cy="12192000"/>
@@ -393,7 +394,7 @@
           <a:p>
             <a:fld id="{F7021451-1387-4CA6-816F-3879F97B5CBC}" type="slidenum">
               <a:rPr lang="en-US"/>
-              <a:t>3</a:t>
+              <a:t>2</a:t>
             </a:fld>
             <a:endParaRPr lang="en-US"/>
           </a:p>
@@ -477,7 +478,7 @@
           <a:p>
             <a:fld id="{F7021451-1387-4CA6-816F-3879F97B5CBC}" type="slidenum">
               <a:rPr lang="en-US"/>
-              <a:t>4</a:t>
+              <a:t>3</a:t>
             </a:fld>
             <a:endParaRPr lang="en-US"/>
           </a:p>
@@ -561,7 +562,7 @@
           <a:p>
             <a:fld id="{F7021451-1387-4CA6-816F-3879F97B5CBC}" type="slidenum">
               <a:rPr lang="en-US"/>
-              <a:t>5</a:t>
+              <a:t>4</a:t>
             </a:fld>
             <a:endParaRPr lang="en-US"/>
           </a:p>
@@ -645,7 +646,7 @@
           <a:p>
             <a:fld id="{F7021451-1387-4CA6-816F-3879F97B5CBC}" type="slidenum">
               <a:rPr lang="en-US"/>
-              <a:t>7</a:t>
+              <a:t>5</a:t>
             </a:fld>
             <a:endParaRPr lang="en-US"/>
           </a:p>
@@ -664,7 +665,7 @@
 </p:notes>
 </file>
 
-<file path=ppt/notesSlides/notesSlide6.xml><?xml version="1.0" encoding="utf-8"?>
+<file path=ppt/notesSlides/notesSlide8.xml><?xml version="1.0" encoding="utf-8"?>
 <p:notes xmlns:a="http://schemas.openxmlformats.org/drawingml/2006/main" xmlns:r="http://schemas.openxmlformats.org/officeDocument/2006/relationships" xmlns:p="http://schemas.openxmlformats.org/presentationml/2006/main">
   <p:cSld>
     <p:spTree>
@@ -1235,6 +1236,1820 @@
 </p:sld>
 </file>
 
+<file path=ppt/slides/slide10.xml><?xml version="1.0" encoding="utf-8"?>
+<p:sld xmlns:a="http://schemas.openxmlformats.org/drawingml/2006/main" xmlns:r="http://schemas.openxmlformats.org/officeDocument/2006/relationships" xmlns:p="http://schemas.openxmlformats.org/presentationml/2006/main">
+  <p:cSld name="Slide 2">
+    <p:bg>
+      <p:bgPr>
+        <a:solidFill>
+          <a:srgbClr val="FFFFFF"/>
+        </a:solidFill>
+        <a:effectLst/>
+      </p:bgPr>
+    </p:bg>
+    <p:spTree>
+      <p:nvGrpSpPr>
+        <p:cNvPr id="1" name=""/>
+        <p:cNvGrpSpPr/>
+        <p:nvPr/>
+      </p:nvGrpSpPr>
+      <p:grpSpPr>
+        <a:xfrm>
+          <a:off x="0" y="0"/>
+          <a:ext cx="0" cy="0"/>
+          <a:chOff x="0" y="0"/>
+          <a:chExt cx="0" cy="0"/>
+        </a:xfrm>
+      </p:grpSpPr>
+      <p:sp>
+        <p:nvSpPr>
+          <p:cNvPr id="2" name="TopBar"/>
+          <p:cNvSpPr/>
+          <p:nvPr/>
+        </p:nvSpPr>
+        <p:spPr>
+          <a:xfrm>
+            <a:off x="0" y="0"/>
+            <a:ext cx="12161520" cy="164592"/>
+          </a:xfrm>
+          <a:prstGeom prst="rect">
+            <a:avLst/>
+          </a:prstGeom>
+          <a:solidFill>
+            <a:srgbClr val="D71E28"/>
+          </a:solidFill>
+          <a:ln w="12700">
+            <a:solidFill>
+              <a:srgbClr val="D71E28"/>
+            </a:solidFill>
+            <a:prstDash val="solid"/>
+          </a:ln>
+        </p:spPr>
+      </p:sp>
+      <p:sp>
+        <p:nvSpPr>
+          <p:cNvPr id="3" name="Eyebrow"/>
+          <p:cNvSpPr/>
+          <p:nvPr/>
+        </p:nvSpPr>
+        <p:spPr>
+          <a:xfrm>
+            <a:off x="731520" y="502920"/>
+            <a:ext cx="10058400" cy="320040"/>
+          </a:xfrm>
+          <a:prstGeom prst="rect">
+            <a:avLst/>
+          </a:prstGeom>
+          <a:noFill/>
+          <a:ln/>
+        </p:spPr>
+        <p:txBody>
+          <a:bodyPr wrap="square" lIns="0" tIns="0" rIns="0" bIns="0" rtlCol="0" anchor="ctr"/>
+          <a:lstStyle/>
+          <a:p>
+            <a:pPr marL="0" indent="0">
+              <a:buNone/>
+            </a:pPr>
+            <a:r>
+              <a:rPr lang="en-US" sz="1100" b="1" kern="0" spc="600" dirty="0">
+                <a:solidFill>
+                  <a:srgbClr val="D71E28"/>
+                </a:solidFill>
+                <a:latin typeface="Calibri" pitchFamily="34" charset="0"/>
+              </a:rPr>
+              <a:t>WHERE THIS FITS</a:t>
+            </a:r>
+          </a:p>
+        </p:txBody>
+      </p:sp>
+      <p:sp>
+        <p:nvSpPr>
+          <p:cNvPr id="4" name="Title"/>
+          <p:cNvSpPr/>
+          <p:nvPr/>
+        </p:nvSpPr>
+        <p:spPr>
+          <a:xfrm>
+            <a:off x="731520" y="900000"/>
+            <a:ext cx="10698480" cy="500000"/>
+          </a:xfrm>
+          <a:prstGeom prst="rect">
+            <a:avLst/>
+          </a:prstGeom>
+          <a:noFill/>
+          <a:ln/>
+        </p:spPr>
+        <p:txBody>
+          <a:bodyPr wrap="square" lIns="0" tIns="0" rIns="0" bIns="0" rtlCol="0" anchor="ctr"/>
+          <a:lstStyle/>
+          <a:p>
+            <a:pPr marL="0" indent="0">
+              <a:buNone/>
+            </a:pPr>
+            <a:r>
+              <a:rPr lang="en-US" sz="3200" b="1" dirty="0">
+                <a:solidFill>
+                  <a:srgbClr val="1B1B1B"/>
+                </a:solidFill>
+                <a:latin typeface="Calibri" pitchFamily="34" charset="0"/>
+              </a:rPr>
+              <a:t>Production Monitoring, made concrete.</a:t>
+            </a:r>
+          </a:p>
+        </p:txBody>
+      </p:sp>
+      <p:sp>
+        <p:nvSpPr>
+          <p:cNvPr id="5" name="Subtitle"/>
+          <p:cNvSpPr/>
+          <p:nvPr/>
+        </p:nvSpPr>
+        <p:spPr>
+          <a:xfrm>
+            <a:off x="731520" y="1450000"/>
+            <a:ext cx="10698480" cy="320000"/>
+          </a:xfrm>
+          <a:prstGeom prst="rect">
+            <a:avLst/>
+          </a:prstGeom>
+          <a:noFill/>
+          <a:ln/>
+        </p:spPr>
+        <p:txBody>
+          <a:bodyPr wrap="square" lIns="0" tIns="0" rIns="0" bIns="0" rtlCol="0" anchor="ctr"/>
+          <a:lstStyle/>
+          <a:p>
+            <a:pPr marL="0" indent="0">
+              <a:buNone/>
+            </a:pPr>
+            <a:r>
+              <a:rPr lang="en-US" sz="1400" dirty="0">
+                <a:solidFill>
+                  <a:srgbClr val="4A4A4A"/>
+                </a:solidFill>
+                <a:latin typeface="Calibri" pitchFamily="34" charset="0"/>
+              </a:rPr>
+              <a:t>Production Monitoring is one of five focus areas in the Engineering Reimagined initiative. This pilot is the concrete starting point.</a:t>
+            </a:r>
+          </a:p>
+        </p:txBody>
+      </p:sp>
+      <p:sp>
+        <p:nvSpPr>
+          <p:cNvPr id="6" name="PageNum"/>
+          <p:cNvSpPr/>
+          <p:nvPr/>
+        </p:nvSpPr>
+        <p:spPr>
+          <a:xfrm>
+            <a:off x="10789920" y="6400800"/>
+            <a:ext cx="822960" cy="274320"/>
+          </a:xfrm>
+          <a:prstGeom prst="rect">
+            <a:avLst/>
+          </a:prstGeom>
+          <a:noFill/>
+          <a:ln/>
+        </p:spPr>
+        <p:txBody>
+          <a:bodyPr wrap="square" lIns="0" tIns="0" rIns="0" bIns="0" rtlCol="0" anchor="ctr"/>
+          <a:lstStyle/>
+          <a:p>
+            <a:pPr marL="0" indent="0" algn="r">
+              <a:buNone/>
+            </a:pPr>
+            <a:r>
+              <a:rPr lang="en-US" sz="900" dirty="0">
+                <a:solidFill>
+                  <a:srgbClr val="8A8A8A"/>
+                </a:solidFill>
+                <a:latin typeface="Calibri" pitchFamily="34" charset="0"/>
+              </a:rPr>
+              <a:t>2 / 9</a:t>
+            </a:r>
+          </a:p>
+        </p:txBody>
+      </p:sp>
+      <p:sp>
+        <p:nvSpPr>
+          <p:cNvPr id="10" name="LeftCard"/>
+          <p:cNvSpPr/>
+          <p:nvPr/>
+        </p:nvSpPr>
+        <p:spPr>
+          <a:xfrm>
+            <a:off x="571500" y="2050000"/>
+            <a:ext cx="5450000" cy="3950000"/>
+          </a:xfrm>
+          <a:prstGeom prst="rect">
+            <a:avLst/>
+          </a:prstGeom>
+          <a:solidFill>
+            <a:srgbClr val="FFFDF7"/>
+          </a:solidFill>
+          <a:ln w="12700">
+            <a:solidFill>
+              <a:srgbClr val="E5E0D5"/>
+            </a:solidFill>
+            <a:prstDash val="solid"/>
+          </a:ln>
+        </p:spPr>
+      </p:sp>
+      <p:sp>
+        <p:nvSpPr>
+          <p:cNvPr id="11" name="LeftStripe"/>
+          <p:cNvSpPr/>
+          <p:nvPr/>
+        </p:nvSpPr>
+        <p:spPr>
+          <a:xfrm>
+            <a:off x="571500" y="2050000"/>
+            <a:ext cx="91440" cy="3950000"/>
+          </a:xfrm>
+          <a:prstGeom prst="rect">
+            <a:avLst/>
+          </a:prstGeom>
+          <a:solidFill>
+            <a:srgbClr val="FFCD41"/>
+          </a:solidFill>
+          <a:ln w="12700">
+            <a:solidFill>
+              <a:srgbClr val="FFCD41"/>
+            </a:solidFill>
+            <a:prstDash val="solid"/>
+          </a:ln>
+        </p:spPr>
+      </p:sp>
+      <p:sp>
+        <p:nvSpPr>
+          <p:cNvPr id="12" name="LeftLabel"/>
+          <p:cNvSpPr/>
+          <p:nvPr/>
+        </p:nvSpPr>
+        <p:spPr>
+          <a:xfrm>
+            <a:off x="845820" y="2200000"/>
+            <a:ext cx="4900000" cy="280000"/>
+          </a:xfrm>
+          <a:prstGeom prst="rect">
+            <a:avLst/>
+          </a:prstGeom>
+          <a:noFill/>
+          <a:ln/>
+        </p:spPr>
+        <p:txBody>
+          <a:bodyPr wrap="square" lIns="0" tIns="0" rIns="0" bIns="0" rtlCol="0" anchor="ctr"/>
+          <a:lstStyle/>
+          <a:p>
+            <a:pPr marL="0" indent="0">
+              <a:buNone/>
+            </a:pPr>
+            <a:r>
+              <a:rPr lang="en-US" sz="1000" b="1" kern="0" spc="500" dirty="0">
+                <a:solidFill>
+                  <a:srgbClr val="D71E28"/>
+                </a:solidFill>
+                <a:latin typeface="Calibri" pitchFamily="34" charset="0"/>
+              </a:rPr>
+              <a:t>FOCUS AREA  ·  PRODUCTION MONITORING</a:t>
+            </a:r>
+          </a:p>
+        </p:txBody>
+      </p:sp>
+      <p:sp>
+        <p:nvSpPr>
+          <p:cNvPr id="13" name="LeftHead"/>
+          <p:cNvSpPr/>
+          <p:nvPr/>
+        </p:nvSpPr>
+        <p:spPr>
+          <a:xfrm>
+            <a:off x="845820" y="2500000"/>
+            <a:ext cx="4900000" cy="380000"/>
+          </a:xfrm>
+          <a:prstGeom prst="rect">
+            <a:avLst/>
+          </a:prstGeom>
+          <a:noFill/>
+          <a:ln/>
+        </p:spPr>
+        <p:txBody>
+          <a:bodyPr wrap="square" lIns="0" tIns="0" rIns="0" bIns="0" rtlCol="0" anchor="ctr"/>
+          <a:lstStyle/>
+          <a:p>
+            <a:pPr marL="0" indent="0">
+              <a:buNone/>
+            </a:pPr>
+            <a:r>
+              <a:rPr lang="en-US" sz="1800" b="1" dirty="0">
+                <a:solidFill>
+                  <a:srgbClr val="1B1B1B"/>
+                </a:solidFill>
+                <a:latin typeface="Calibri" pitchFamily="34" charset="0"/>
+              </a:rPr>
+              <a:t>From reactive alerts to intelligent data reliability.</a:t>
+            </a:r>
+          </a:p>
+        </p:txBody>
+      </p:sp>
+      <p:sp>
+        <p:nvSpPr>
+          <p:cNvPr id="14" name="LeftGapLabel"/>
+          <p:cNvSpPr/>
+          <p:nvPr/>
+        </p:nvSpPr>
+        <p:spPr>
+          <a:xfrm>
+            <a:off x="845820" y="3000000"/>
+            <a:ext cx="4900000" cy="260000"/>
+          </a:xfrm>
+          <a:prstGeom prst="rect">
+            <a:avLst/>
+          </a:prstGeom>
+          <a:noFill/>
+          <a:ln/>
+        </p:spPr>
+        <p:txBody>
+          <a:bodyPr wrap="square" lIns="0" tIns="0" rIns="0" bIns="0" rtlCol="0" anchor="ctr"/>
+          <a:lstStyle/>
+          <a:p>
+            <a:pPr marL="0" indent="0">
+              <a:buNone/>
+            </a:pPr>
+            <a:r>
+              <a:rPr lang="en-US" sz="1100" b="1" dirty="0">
+                <a:solidFill>
+                  <a:srgbClr val="1B1B1B"/>
+                </a:solidFill>
+                <a:latin typeface="Calibri" pitchFamily="34" charset="0"/>
+              </a:rPr>
+              <a:t>The gap, in the program’s words</a:t>
+            </a:r>
+          </a:p>
+        </p:txBody>
+      </p:sp>
+      <p:sp>
+        <p:nvSpPr>
+          <p:cNvPr id="15" name="LeftGapBody"/>
+          <p:cNvSpPr/>
+          <p:nvPr/>
+        </p:nvSpPr>
+        <p:spPr>
+          <a:xfrm>
+            <a:off x="845820" y="3260000"/>
+            <a:ext cx="4900000" cy="500000"/>
+          </a:xfrm>
+          <a:prstGeom prst="rect">
+            <a:avLst/>
+          </a:prstGeom>
+          <a:noFill/>
+          <a:ln/>
+        </p:spPr>
+        <p:txBody>
+          <a:bodyPr wrap="square" lIns="0" tIns="0" rIns="0" bIns="0" rtlCol="0" anchor="t"/>
+          <a:lstStyle/>
+          <a:p>
+            <a:pPr marL="0" indent="0">
+              <a:buNone/>
+            </a:pPr>
+            <a:r>
+              <a:rPr lang="en-US" sz="1200" dirty="0">
+                <a:solidFill>
+                  <a:srgbClr val="4A4A4A"/>
+                </a:solidFill>
+                <a:latin typeface="Calibri" pitchFamily="34" charset="0"/>
+              </a:rPr>
+              <a:t>Production monitoring today is reactive and metric-centric, not data-centric or intent-aware.</a:t>
+            </a:r>
+          </a:p>
+        </p:txBody>
+      </p:sp>
+      <p:sp>
+        <p:nvSpPr>
+          <p:cNvPr id="16" name="LeftNeedsLabel"/>
+          <p:cNvSpPr/>
+          <p:nvPr/>
+        </p:nvSpPr>
+        <p:spPr>
+          <a:xfrm>
+            <a:off x="845820" y="3850000"/>
+            <a:ext cx="4900000" cy="260000"/>
+          </a:xfrm>
+          <a:prstGeom prst="rect">
+            <a:avLst/>
+          </a:prstGeom>
+          <a:noFill/>
+          <a:ln/>
+        </p:spPr>
+        <p:txBody>
+          <a:bodyPr wrap="square" lIns="0" tIns="0" rIns="0" bIns="0" rtlCol="0" anchor="ctr"/>
+          <a:lstStyle/>
+          <a:p>
+            <a:pPr marL="0" indent="0">
+              <a:buNone/>
+            </a:pPr>
+            <a:r>
+              <a:rPr lang="en-US" sz="1100" b="1" dirty="0">
+                <a:solidFill>
+                  <a:srgbClr val="1B1B1B"/>
+                </a:solidFill>
+                <a:latin typeface="Calibri" pitchFamily="34" charset="0"/>
+              </a:rPr>
+              <a:t>Unmet needs called out</a:t>
+            </a:r>
+          </a:p>
+        </p:txBody>
+      </p:sp>
+      <p:sp>
+        <p:nvSpPr>
+          <p:cNvPr id="17" name="LeftNeedsBody"/>
+          <p:cNvSpPr/>
+          <p:nvPr/>
+        </p:nvSpPr>
+        <p:spPr>
+          <a:xfrm>
+            <a:off x="845820" y="4110000"/>
+            <a:ext cx="4900000" cy="1850000"/>
+          </a:xfrm>
+          <a:prstGeom prst="rect">
+            <a:avLst/>
+          </a:prstGeom>
+          <a:noFill/>
+          <a:ln/>
+        </p:spPr>
+        <p:txBody>
+          <a:bodyPr wrap="square" lIns="0" tIns="0" rIns="0" bIns="0" rtlCol="0" anchor="t"/>
+          <a:lstStyle/>
+          <a:p>
+            <a:pPr marL="160020" indent="-160020">
+              <a:buFont typeface="Arial" panose="020B0604020202020204" pitchFamily="34" charset="0"/>
+              <a:buChar char="–"/>
+            </a:pPr>
+            <a:r>
+              <a:rPr lang="en-US" sz="1200" dirty="0">
+                <a:solidFill>
+                  <a:srgbClr val="4A4A4A"/>
+                </a:solidFill>
+                <a:latin typeface="Calibri" pitchFamily="34" charset="0"/>
+              </a:rPr>
+              <a:t>Early detection of data quality drift before downstream impact</a:t>
+            </a:r>
+          </a:p>
+          <a:p>
+            <a:pPr marL="160020" indent="-160020">
+              <a:buFont typeface="Arial" panose="020B0604020202020204" pitchFamily="34" charset="0"/>
+              <a:buChar char="–"/>
+            </a:pPr>
+            <a:r>
+              <a:rPr lang="en-US" sz="1200" dirty="0">
+                <a:solidFill>
+                  <a:srgbClr val="4A4A4A"/>
+                </a:solidFill>
+                <a:latin typeface="Calibri" pitchFamily="34" charset="0"/>
+              </a:rPr>
+              <a:t>Correlation between failures, lineage, and consumers</a:t>
+            </a:r>
+          </a:p>
+          <a:p>
+            <a:pPr marL="160020" indent="-160020">
+              <a:buFont typeface="Arial" panose="020B0604020202020204" pitchFamily="34" charset="0"/>
+              <a:buChar char="–"/>
+            </a:pPr>
+            <a:r>
+              <a:rPr lang="en-US" sz="1200" dirty="0">
+                <a:solidFill>
+                  <a:srgbClr val="4A4A4A"/>
+                </a:solidFill>
+                <a:latin typeface="Calibri" pitchFamily="34" charset="0"/>
+              </a:rPr>
+              <a:t>Monitoring that understands expected behavior, not just thresholds</a:t>
+            </a:r>
+          </a:p>
+          <a:p>
+            <a:pPr marL="160020" indent="-160020">
+              <a:buFont typeface="Arial" panose="020B0604020202020204" pitchFamily="34" charset="0"/>
+              <a:buChar char="–"/>
+            </a:pPr>
+            <a:r>
+              <a:rPr lang="en-US" sz="1200" dirty="0">
+                <a:solidFill>
+                  <a:srgbClr val="4A4A4A"/>
+                </a:solidFill>
+                <a:latin typeface="Calibri" pitchFamily="34" charset="0"/>
+              </a:rPr>
+              <a:t>Automated diagnosis rather than alert flooding</a:t>
+            </a:r>
+          </a:p>
+        </p:txBody>
+      </p:sp>
+      <p:sp>
+        <p:nvSpPr>
+          <p:cNvPr id="20" name="RightCard"/>
+          <p:cNvSpPr/>
+          <p:nvPr/>
+        </p:nvSpPr>
+        <p:spPr>
+          <a:xfrm>
+            <a:off x="6172000" y="2050000"/>
+            <a:ext cx="5450000" cy="3950000"/>
+          </a:xfrm>
+          <a:prstGeom prst="rect">
+            <a:avLst/>
+          </a:prstGeom>
+          <a:solidFill>
+            <a:srgbClr val="FFFFFF"/>
+          </a:solidFill>
+          <a:ln w="12700">
+            <a:solidFill>
+              <a:srgbClr val="E5E0D5"/>
+            </a:solidFill>
+            <a:prstDash val="solid"/>
+          </a:ln>
+          <a:effectLst>
+            <a:outerShdw blurRad="152400" dist="38100" dir="5400000" algn="bl" rotWithShape="0">
+              <a:srgbClr val="000000">
+                <a:alpha val="8000"/>
+              </a:srgbClr>
+            </a:outerShdw>
+          </a:effectLst>
+        </p:spPr>
+      </p:sp>
+      <p:sp>
+        <p:nvSpPr>
+          <p:cNvPr id="21" name="RightStripe"/>
+          <p:cNvSpPr/>
+          <p:nvPr/>
+        </p:nvSpPr>
+        <p:spPr>
+          <a:xfrm>
+            <a:off x="6172000" y="2050000"/>
+            <a:ext cx="91440" cy="3950000"/>
+          </a:xfrm>
+          <a:prstGeom prst="rect">
+            <a:avLst/>
+          </a:prstGeom>
+          <a:solidFill>
+            <a:srgbClr val="D71E28"/>
+          </a:solidFill>
+          <a:ln w="12700">
+            <a:solidFill>
+              <a:srgbClr val="D71E28"/>
+            </a:solidFill>
+            <a:prstDash val="solid"/>
+          </a:ln>
+        </p:spPr>
+      </p:sp>
+      <p:sp>
+        <p:nvSpPr>
+          <p:cNvPr id="22" name="RightLabel"/>
+          <p:cNvSpPr/>
+          <p:nvPr/>
+        </p:nvSpPr>
+        <p:spPr>
+          <a:xfrm>
+            <a:off x="6446320" y="2200000"/>
+            <a:ext cx="4900000" cy="280000"/>
+          </a:xfrm>
+          <a:prstGeom prst="rect">
+            <a:avLst/>
+          </a:prstGeom>
+          <a:noFill/>
+          <a:ln/>
+        </p:spPr>
+        <p:txBody>
+          <a:bodyPr wrap="square" lIns="0" tIns="0" rIns="0" bIns="0" rtlCol="0" anchor="ctr"/>
+          <a:lstStyle/>
+          <a:p>
+            <a:pPr marL="0" indent="0">
+              <a:buNone/>
+            </a:pPr>
+            <a:r>
+              <a:rPr lang="en-US" sz="1000" b="1" kern="0" spc="500" dirty="0">
+                <a:solidFill>
+                  <a:srgbClr val="D71E28"/>
+                </a:solidFill>
+                <a:latin typeface="Calibri" pitchFamily="34" charset="0"/>
+              </a:rPr>
+              <a:t>THIS PILOT  ·  ETL INCIDENT DIAGNOSIS</a:t>
+            </a:r>
+          </a:p>
+        </p:txBody>
+      </p:sp>
+      <p:sp>
+        <p:nvSpPr>
+          <p:cNvPr id="23" name="RightHead"/>
+          <p:cNvSpPr/>
+          <p:nvPr/>
+        </p:nvSpPr>
+        <p:spPr>
+          <a:xfrm>
+            <a:off x="6446320" y="2500000"/>
+            <a:ext cx="4900000" cy="380000"/>
+          </a:xfrm>
+          <a:prstGeom prst="rect">
+            <a:avLst/>
+          </a:prstGeom>
+          <a:noFill/>
+          <a:ln/>
+        </p:spPr>
+        <p:txBody>
+          <a:bodyPr wrap="square" lIns="0" tIns="0" rIns="0" bIns="0" rtlCol="0" anchor="ctr"/>
+          <a:lstStyle/>
+          <a:p>
+            <a:pPr marL="0" indent="0">
+              <a:buNone/>
+            </a:pPr>
+            <a:r>
+              <a:rPr lang="en-US" sz="1800" b="1" dirty="0">
+                <a:solidFill>
+                  <a:srgbClr val="1B1B1B"/>
+                </a:solidFill>
+                <a:latin typeface="Calibri" pitchFamily="34" charset="0"/>
+              </a:rPr>
+              <a:t>A concrete production-monitoring starting point.</a:t>
+            </a:r>
+          </a:p>
+        </p:txBody>
+      </p:sp>
+      <p:sp>
+        <p:nvSpPr>
+          <p:cNvPr id="24" name="RightAddrLabel"/>
+          <p:cNvSpPr/>
+          <p:nvPr/>
+        </p:nvSpPr>
+        <p:spPr>
+          <a:xfrm>
+            <a:off x="6446320" y="3000000"/>
+            <a:ext cx="4900000" cy="260000"/>
+          </a:xfrm>
+          <a:prstGeom prst="rect">
+            <a:avLst/>
+          </a:prstGeom>
+          <a:noFill/>
+          <a:ln/>
+        </p:spPr>
+        <p:txBody>
+          <a:bodyPr wrap="square" lIns="0" tIns="0" rIns="0" bIns="0" rtlCol="0" anchor="ctr"/>
+          <a:lstStyle/>
+          <a:p>
+            <a:pPr marL="0" indent="0">
+              <a:buNone/>
+            </a:pPr>
+            <a:r>
+              <a:rPr lang="en-US" sz="1100" b="1" dirty="0">
+                <a:solidFill>
+                  <a:srgbClr val="1B1B1B"/>
+                </a:solidFill>
+                <a:latin typeface="Calibri" pitchFamily="34" charset="0"/>
+              </a:rPr>
+              <a:t>What this pilot directly addresses</a:t>
+            </a:r>
+          </a:p>
+        </p:txBody>
+      </p:sp>
+      <p:sp>
+        <p:nvSpPr>
+          <p:cNvPr id="25" name="RightAddrBody"/>
+          <p:cNvSpPr/>
+          <p:nvPr/>
+        </p:nvSpPr>
+        <p:spPr>
+          <a:xfrm>
+            <a:off x="6446320" y="3260000"/>
+            <a:ext cx="4900000" cy="1300000"/>
+          </a:xfrm>
+          <a:prstGeom prst="rect">
+            <a:avLst/>
+          </a:prstGeom>
+          <a:noFill/>
+          <a:ln/>
+        </p:spPr>
+        <p:txBody>
+          <a:bodyPr wrap="square" lIns="0" tIns="0" rIns="0" bIns="0" rtlCol="0" anchor="t"/>
+          <a:lstStyle/>
+          <a:p>
+            <a:pPr marL="160020" indent="-160020">
+              <a:buFont typeface="Arial" panose="020B0604020202020204" pitchFamily="34" charset="0"/>
+              <a:buChar char="•"/>
+            </a:pPr>
+            <a:r>
+              <a:rPr lang="en-US" sz="1200" b="1" dirty="0">
+                <a:solidFill>
+                  <a:srgbClr val="1B1B1B"/>
+                </a:solidFill>
+                <a:latin typeface="Calibri" pitchFamily="34" charset="0"/>
+              </a:rPr>
+              <a:t xml:space="preserve">Automated diagnosis </a:t>
+            </a:r>
+            <a:r>
+              <a:rPr lang="en-US" sz="1200" dirty="0">
+                <a:solidFill>
+                  <a:srgbClr val="4A4A4A"/>
+                </a:solidFill>
+                <a:latin typeface="Calibri" pitchFamily="34" charset="0"/>
+              </a:rPr>
+              <a:t>instead of alert flooding for ETL job failures.</a:t>
+            </a:r>
+          </a:p>
+          <a:p>
+            <a:pPr marL="160020" indent="-160020">
+              <a:buFont typeface="Arial" panose="020B0604020202020204" pitchFamily="34" charset="0"/>
+              <a:buChar char="•"/>
+            </a:pPr>
+            <a:r>
+              <a:rPr lang="en-US" sz="1200" b="1" dirty="0">
+                <a:solidFill>
+                  <a:srgbClr val="1B1B1B"/>
+                </a:solidFill>
+                <a:latin typeface="Calibri" pitchFamily="34" charset="0"/>
+              </a:rPr>
+              <a:t xml:space="preserve">Correlation across lineage </a:t>
+            </a:r>
+            <a:r>
+              <a:rPr lang="en-US" sz="1200" dirty="0">
+                <a:solidFill>
+                  <a:srgbClr val="4A4A4A"/>
+                </a:solidFill>
+                <a:latin typeface="Calibri" pitchFamily="34" charset="0"/>
+              </a:rPr>
+              <a:t>by reading ServiceNow, Autosys, SSISDB, and SSIS source together.</a:t>
+            </a:r>
+          </a:p>
+          <a:p>
+            <a:pPr marL="160020" indent="-160020">
+              <a:buFont typeface="Arial" panose="020B0604020202020204" pitchFamily="34" charset="0"/>
+              <a:buChar char="•"/>
+            </a:pPr>
+            <a:r>
+              <a:rPr lang="en-US" sz="1200" b="1" dirty="0">
+                <a:solidFill>
+                  <a:srgbClr val="1B1B1B"/>
+                </a:solidFill>
+                <a:latin typeface="Calibri" pitchFamily="34" charset="0"/>
+              </a:rPr>
+              <a:t xml:space="preserve">Reduced MTTD and MTTR </a:t>
+            </a:r>
+            <a:r>
+              <a:rPr lang="en-US" sz="1200" dirty="0">
+                <a:solidFill>
+                  <a:srgbClr val="4A4A4A"/>
+                </a:solidFill>
+                <a:latin typeface="Calibri" pitchFamily="34" charset="0"/>
+              </a:rPr>
+              <a:t>— from up to 10 hours of cross-region waits to 15 minutes of automated diagnosis.</a:t>
+            </a:r>
+          </a:p>
+        </p:txBody>
+      </p:sp>
+      <p:sp>
+        <p:nvSpPr>
+          <p:cNvPr id="26" name="RightProveLabel"/>
+          <p:cNvSpPr/>
+          <p:nvPr/>
+        </p:nvSpPr>
+        <p:spPr>
+          <a:xfrm>
+            <a:off x="6446320" y="4750000"/>
+            <a:ext cx="4900000" cy="260000"/>
+          </a:xfrm>
+          <a:prstGeom prst="rect">
+            <a:avLst/>
+          </a:prstGeom>
+          <a:noFill/>
+          <a:ln/>
+        </p:spPr>
+        <p:txBody>
+          <a:bodyPr wrap="square" lIns="0" tIns="0" rIns="0" bIns="0" rtlCol="0" anchor="ctr"/>
+          <a:lstStyle/>
+          <a:p>
+            <a:pPr marL="0" indent="0">
+              <a:buNone/>
+            </a:pPr>
+            <a:r>
+              <a:rPr lang="en-US" sz="1100" b="1" dirty="0">
+                <a:solidFill>
+                  <a:srgbClr val="1B1B1B"/>
+                </a:solidFill>
+                <a:latin typeface="Calibri" pitchFamily="34" charset="0"/>
+              </a:rPr>
+              <a:t>Why start here</a:t>
+            </a:r>
+          </a:p>
+        </p:txBody>
+      </p:sp>
+      <p:sp>
+        <p:nvSpPr>
+          <p:cNvPr id="27" name="RightProveBody"/>
+          <p:cNvSpPr/>
+          <p:nvPr/>
+        </p:nvSpPr>
+        <p:spPr>
+          <a:xfrm>
+            <a:off x="6446320" y="5010000"/>
+            <a:ext cx="4900000" cy="900000"/>
+          </a:xfrm>
+          <a:prstGeom prst="rect">
+            <a:avLst/>
+          </a:prstGeom>
+          <a:noFill/>
+          <a:ln/>
+        </p:spPr>
+        <p:txBody>
+          <a:bodyPr wrap="square" lIns="0" tIns="0" rIns="0" bIns="0" rtlCol="0" anchor="t"/>
+          <a:lstStyle/>
+          <a:p>
+            <a:pPr marL="0" indent="0">
+              <a:buNone/>
+            </a:pPr>
+            <a:r>
+              <a:rPr lang="en-US" sz="1200" dirty="0">
+                <a:solidFill>
+                  <a:srgbClr val="4A4A4A"/>
+                </a:solidFill>
+                <a:latin typeface="Calibri" pitchFamily="34" charset="0"/>
+              </a:rPr>
+              <a:t>Nightly ETL failures are a high-frequency, high-pain pattern with clear MTTD/MTTR baselines  —  the ideal proving ground for context-aware, lineage-driven monitoring before expanding scope.</a:t>
+            </a:r>
+          </a:p>
+        </p:txBody>
+      </p:sp>
+    </p:spTree>
+  </p:cSld>
+  <p:clrMapOvr>
+    <a:masterClrMapping/>
+  </p:clrMapOvr>
+</p:sld>
+</file>
+
+<file path=ppt/slides/slide11.xml><?xml version="1.0" encoding="utf-8"?>
+<p:sld xmlns:a="http://schemas.openxmlformats.org/drawingml/2006/main" xmlns:r="http://schemas.openxmlformats.org/officeDocument/2006/relationships" xmlns:p="http://schemas.openxmlformats.org/presentationml/2006/main">
+  <p:cSld name="Slide 9">
+    <p:bg>
+      <p:bgPr>
+        <a:solidFill>
+          <a:srgbClr val="FFFFFF"/>
+        </a:solidFill>
+        <a:effectLst/>
+      </p:bgPr>
+    </p:bg>
+    <p:spTree>
+      <p:nvGrpSpPr>
+        <p:cNvPr id="1" name=""/>
+        <p:cNvGrpSpPr/>
+        <p:nvPr/>
+      </p:nvGrpSpPr>
+      <p:grpSpPr>
+        <a:xfrm>
+          <a:off x="0" y="0"/>
+          <a:ext cx="0" cy="0"/>
+          <a:chOff x="0" y="0"/>
+          <a:chExt cx="0" cy="0"/>
+        </a:xfrm>
+      </p:grpSpPr>
+      <p:sp>
+        <p:nvSpPr>
+          <p:cNvPr id="2" name="TopBar"/>
+          <p:cNvSpPr/>
+          <p:nvPr/>
+        </p:nvSpPr>
+        <p:spPr>
+          <a:xfrm>
+            <a:off x="0" y="0"/>
+            <a:ext cx="12161520" cy="164592"/>
+          </a:xfrm>
+          <a:prstGeom prst="rect">
+            <a:avLst/>
+          </a:prstGeom>
+          <a:solidFill>
+            <a:srgbClr val="D71E28"/>
+          </a:solidFill>
+          <a:ln w="12700">
+            <a:solidFill>
+              <a:srgbClr val="D71E28"/>
+            </a:solidFill>
+            <a:prstDash val="solid"/>
+          </a:ln>
+        </p:spPr>
+      </p:sp>
+      <p:sp>
+        <p:nvSpPr>
+          <p:cNvPr id="3" name="Eyebrow"/>
+          <p:cNvSpPr/>
+          <p:nvPr/>
+        </p:nvSpPr>
+        <p:spPr>
+          <a:xfrm>
+            <a:off x="731520" y="502920"/>
+            <a:ext cx="10058400" cy="320040"/>
+          </a:xfrm>
+          <a:prstGeom prst="rect">
+            <a:avLst/>
+          </a:prstGeom>
+          <a:noFill/>
+          <a:ln/>
+        </p:spPr>
+        <p:txBody>
+          <a:bodyPr wrap="square" lIns="0" tIns="0" rIns="0" bIns="0" rtlCol="0" anchor="ctr"/>
+          <a:lstStyle/>
+          <a:p>
+            <a:pPr marL="0" indent="0">
+              <a:buNone/>
+            </a:pPr>
+            <a:r>
+              <a:rPr lang="en-US" sz="1100" b="1" kern="0" spc="600" dirty="0">
+                <a:solidFill>
+                  <a:srgbClr val="D71E28"/>
+                </a:solidFill>
+                <a:latin typeface="Calibri" pitchFamily="34" charset="0"/>
+              </a:rPr>
+              <a:t>BUILD REQUIREMENTS</a:t>
+            </a:r>
+          </a:p>
+        </p:txBody>
+      </p:sp>
+      <p:sp>
+        <p:nvSpPr>
+          <p:cNvPr id="4" name="Title"/>
+          <p:cNvSpPr/>
+          <p:nvPr/>
+        </p:nvSpPr>
+        <p:spPr>
+          <a:xfrm>
+            <a:off x="731520" y="900000"/>
+            <a:ext cx="10698480" cy="500000"/>
+          </a:xfrm>
+          <a:prstGeom prst="rect">
+            <a:avLst/>
+          </a:prstGeom>
+          <a:noFill/>
+          <a:ln/>
+        </p:spPr>
+        <p:txBody>
+          <a:bodyPr wrap="square" lIns="0" tIns="0" rIns="0" bIns="0" rtlCol="0" anchor="ctr"/>
+          <a:lstStyle/>
+          <a:p>
+            <a:pPr marL="0" indent="0">
+              <a:buNone/>
+            </a:pPr>
+            <a:r>
+              <a:rPr lang="en-US" sz="3200" b="1" dirty="0">
+                <a:solidFill>
+                  <a:srgbClr val="1B1B1B"/>
+                </a:solidFill>
+                <a:latin typeface="Calibri" pitchFamily="34" charset="0"/>
+              </a:rPr>
+              <a:t>Three integrations to make this work.</a:t>
+            </a:r>
+          </a:p>
+        </p:txBody>
+      </p:sp>
+      <p:sp>
+        <p:nvSpPr>
+          <p:cNvPr id="5" name="Subtitle"/>
+          <p:cNvSpPr/>
+          <p:nvPr/>
+        </p:nvSpPr>
+        <p:spPr>
+          <a:xfrm>
+            <a:off x="731520" y="1450000"/>
+            <a:ext cx="10698480" cy="320000"/>
+          </a:xfrm>
+          <a:prstGeom prst="rect">
+            <a:avLst/>
+          </a:prstGeom>
+          <a:noFill/>
+          <a:ln/>
+        </p:spPr>
+        <p:txBody>
+          <a:bodyPr wrap="square" lIns="0" tIns="0" rIns="0" bIns="0" rtlCol="0" anchor="ctr"/>
+          <a:lstStyle/>
+          <a:p>
+            <a:pPr marL="0" indent="0">
+              <a:buNone/>
+            </a:pPr>
+            <a:r>
+              <a:rPr lang="en-US" sz="1400" dirty="0">
+                <a:solidFill>
+                  <a:srgbClr val="4A4A4A"/>
+                </a:solidFill>
+                <a:latin typeface="Calibri" pitchFamily="34" charset="0"/>
+              </a:rPr>
+              <a:t>All read-only. The agent reads the same systems an engineer would — nothing more.</a:t>
+            </a:r>
+          </a:p>
+        </p:txBody>
+      </p:sp>
+      <p:sp>
+        <p:nvSpPr>
+          <p:cNvPr id="6" name="PageNum"/>
+          <p:cNvSpPr/>
+          <p:nvPr/>
+        </p:nvSpPr>
+        <p:spPr>
+          <a:xfrm>
+            <a:off x="10789920" y="6400800"/>
+            <a:ext cx="822960" cy="274320"/>
+          </a:xfrm>
+          <a:prstGeom prst="rect">
+            <a:avLst/>
+          </a:prstGeom>
+          <a:noFill/>
+          <a:ln/>
+        </p:spPr>
+        <p:txBody>
+          <a:bodyPr wrap="square" lIns="0" tIns="0" rIns="0" bIns="0" rtlCol="0" anchor="ctr"/>
+          <a:lstStyle/>
+          <a:p>
+            <a:pPr marL="0" indent="0" algn="r">
+              <a:buNone/>
+            </a:pPr>
+            <a:r>
+              <a:rPr lang="en-US" sz="900" dirty="0">
+                <a:solidFill>
+                  <a:srgbClr val="8A8A8A"/>
+                </a:solidFill>
+                <a:latin typeface="Calibri" pitchFamily="34" charset="0"/>
+              </a:rPr>
+              <a:t>9 / 9</a:t>
+            </a:r>
+          </a:p>
+        </p:txBody>
+      </p:sp>
+      <p:sp>
+        <p:nvSpPr>
+          <p:cNvPr id="10" name="C1Card"/>
+          <p:cNvSpPr/>
+          <p:nvPr/>
+        </p:nvSpPr>
+        <p:spPr>
+          <a:xfrm>
+            <a:off x="571500" y="2000000"/>
+            <a:ext cx="3540000" cy="2800000"/>
+          </a:xfrm>
+          <a:prstGeom prst="rect">
+            <a:avLst/>
+          </a:prstGeom>
+          <a:solidFill>
+            <a:srgbClr val="FFFDF7"/>
+          </a:solidFill>
+          <a:ln w="12700">
+            <a:solidFill>
+              <a:srgbClr val="E5E0D5"/>
+            </a:solidFill>
+            <a:prstDash val="solid"/>
+          </a:ln>
+        </p:spPr>
+      </p:sp>
+      <p:sp>
+        <p:nvSpPr>
+          <p:cNvPr id="11" name="C1Stripe"/>
+          <p:cNvSpPr/>
+          <p:nvPr/>
+        </p:nvSpPr>
+        <p:spPr>
+          <a:xfrm>
+            <a:off x="571500" y="2000000"/>
+            <a:ext cx="91440" cy="2800000"/>
+          </a:xfrm>
+          <a:prstGeom prst="rect">
+            <a:avLst/>
+          </a:prstGeom>
+          <a:solidFill>
+            <a:srgbClr val="FFCD41"/>
+          </a:solidFill>
+          <a:ln w="12700">
+            <a:solidFill>
+              <a:srgbClr val="FFCD41"/>
+            </a:solidFill>
+            <a:prstDash val="solid"/>
+          </a:ln>
+        </p:spPr>
+      </p:sp>
+      <p:sp>
+        <p:nvSpPr>
+          <p:cNvPr id="12" name="C1Label"/>
+          <p:cNvSpPr/>
+          <p:nvPr/>
+        </p:nvSpPr>
+        <p:spPr>
+          <a:xfrm>
+            <a:off x="845820" y="2150000"/>
+            <a:ext cx="3000000" cy="280000"/>
+          </a:xfrm>
+          <a:prstGeom prst="rect">
+            <a:avLst/>
+          </a:prstGeom>
+          <a:noFill/>
+          <a:ln/>
+        </p:spPr>
+        <p:txBody>
+          <a:bodyPr wrap="square" lIns="0" tIns="0" rIns="0" bIns="0" rtlCol="0" anchor="ctr"/>
+          <a:lstStyle/>
+          <a:p>
+            <a:pPr marL="0" indent="0">
+              <a:buNone/>
+            </a:pPr>
+            <a:r>
+              <a:rPr lang="en-US" sz="1000" b="1" kern="0" spc="500" dirty="0">
+                <a:solidFill>
+                  <a:srgbClr val="D71E28"/>
+                </a:solidFill>
+                <a:latin typeface="Calibri" pitchFamily="34" charset="0"/>
+              </a:rPr>
+              <a:t>1  ·  SERVICENOW</a:t>
+            </a:r>
+          </a:p>
+        </p:txBody>
+      </p:sp>
+      <p:sp>
+        <p:nvSpPr>
+          <p:cNvPr id="13" name="C1Head"/>
+          <p:cNvSpPr/>
+          <p:nvPr/>
+        </p:nvSpPr>
+        <p:spPr>
+          <a:xfrm>
+            <a:off x="845820" y="2450000"/>
+            <a:ext cx="3000000" cy="380000"/>
+          </a:xfrm>
+          <a:prstGeom prst="rect">
+            <a:avLst/>
+          </a:prstGeom>
+          <a:noFill/>
+          <a:ln/>
+        </p:spPr>
+        <p:txBody>
+          <a:bodyPr wrap="square" lIns="0" tIns="0" rIns="0" bIns="0" rtlCol="0" anchor="ctr"/>
+          <a:lstStyle/>
+          <a:p>
+            <a:pPr marL="0" indent="0">
+              <a:buNone/>
+            </a:pPr>
+            <a:r>
+              <a:rPr lang="en-US" sz="1800" b="1" dirty="0">
+                <a:solidFill>
+                  <a:srgbClr val="1B1B1B"/>
+                </a:solidFill>
+                <a:latin typeface="Calibri" pitchFamily="34" charset="0"/>
+              </a:rPr>
+              <a:t>Incident data</a:t>
+            </a:r>
+          </a:p>
+        </p:txBody>
+      </p:sp>
+      <p:sp>
+        <p:nvSpPr>
+          <p:cNvPr id="14" name="C1Body"/>
+          <p:cNvSpPr/>
+          <p:nvPr/>
+        </p:nvSpPr>
+        <p:spPr>
+          <a:xfrm>
+            <a:off x="845820" y="2920000"/>
+            <a:ext cx="3000000" cy="1450000"/>
+          </a:xfrm>
+          <a:prstGeom prst="rect">
+            <a:avLst/>
+          </a:prstGeom>
+          <a:noFill/>
+          <a:ln/>
+        </p:spPr>
+        <p:txBody>
+          <a:bodyPr wrap="square" lIns="0" tIns="0" rIns="0" bIns="0" rtlCol="0" anchor="t"/>
+          <a:lstStyle/>
+          <a:p>
+            <a:pPr marL="0" indent="0">
+              <a:buNone/>
+            </a:pPr>
+            <a:r>
+              <a:rPr lang="en-US" sz="1200" dirty="0">
+                <a:solidFill>
+                  <a:srgbClr val="4A4A4A"/>
+                </a:solidFill>
+                <a:latin typeface="Calibri" pitchFamily="34" charset="0"/>
+              </a:rPr>
+              <a:t>Pull the alert payload, affected job and server, and ticket routing the moment a failure fires — this is what triggers the agent.</a:t>
+            </a:r>
+          </a:p>
+        </p:txBody>
+      </p:sp>
+      <p:sp>
+        <p:nvSpPr>
+          <p:cNvPr id="15" name="C1Foot"/>
+          <p:cNvSpPr/>
+          <p:nvPr/>
+        </p:nvSpPr>
+        <p:spPr>
+          <a:xfrm>
+            <a:off x="845820" y="4450000"/>
+            <a:ext cx="3000000" cy="280000"/>
+          </a:xfrm>
+          <a:prstGeom prst="rect">
+            <a:avLst/>
+          </a:prstGeom>
+          <a:noFill/>
+          <a:ln/>
+        </p:spPr>
+        <p:txBody>
+          <a:bodyPr wrap="square" lIns="0" tIns="0" rIns="0" bIns="0" rtlCol="0" anchor="ctr"/>
+          <a:lstStyle/>
+          <a:p>
+            <a:pPr marL="0" indent="0">
+              <a:buNone/>
+            </a:pPr>
+            <a:r>
+              <a:rPr lang="en-US" sz="1000" b="1" kern="0" spc="200" dirty="0">
+                <a:solidFill>
+                  <a:srgbClr val="8A8A8A"/>
+                </a:solidFill>
+                <a:latin typeface="Calibri" pitchFamily="34" charset="0"/>
+              </a:rPr>
+              <a:t xml:space="preserve">HOW   </a:t>
+            </a:r>
+            <a:r>
+              <a:rPr lang="en-US" sz="1100" dirty="0">
+                <a:solidFill>
+                  <a:srgbClr val="1B1B1B"/>
+                </a:solidFill>
+                <a:latin typeface="Calibri" pitchFamily="34" charset="0"/>
+              </a:rPr>
+              <a:t>REST API, read-only</a:t>
+            </a:r>
+          </a:p>
+        </p:txBody>
+      </p:sp>
+      <p:sp>
+        <p:nvSpPr>
+          <p:cNvPr id="20" name="C2Card"/>
+          <p:cNvSpPr/>
+          <p:nvPr/>
+        </p:nvSpPr>
+        <p:spPr>
+          <a:xfrm>
+            <a:off x="4311500" y="2000000"/>
+            <a:ext cx="3540000" cy="2800000"/>
+          </a:xfrm>
+          <a:prstGeom prst="rect">
+            <a:avLst/>
+          </a:prstGeom>
+          <a:solidFill>
+            <a:srgbClr val="FFFDF7"/>
+          </a:solidFill>
+          <a:ln w="12700">
+            <a:solidFill>
+              <a:srgbClr val="E5E0D5"/>
+            </a:solidFill>
+            <a:prstDash val="solid"/>
+          </a:ln>
+        </p:spPr>
+      </p:sp>
+      <p:sp>
+        <p:nvSpPr>
+          <p:cNvPr id="21" name="C2Stripe"/>
+          <p:cNvSpPr/>
+          <p:nvPr/>
+        </p:nvSpPr>
+        <p:spPr>
+          <a:xfrm>
+            <a:off x="4311500" y="2000000"/>
+            <a:ext cx="91440" cy="2800000"/>
+          </a:xfrm>
+          <a:prstGeom prst="rect">
+            <a:avLst/>
+          </a:prstGeom>
+          <a:solidFill>
+            <a:srgbClr val="FFCD41"/>
+          </a:solidFill>
+          <a:ln w="12700">
+            <a:solidFill>
+              <a:srgbClr val="FFCD41"/>
+            </a:solidFill>
+            <a:prstDash val="solid"/>
+          </a:ln>
+        </p:spPr>
+      </p:sp>
+      <p:sp>
+        <p:nvSpPr>
+          <p:cNvPr id="22" name="C2Label"/>
+          <p:cNvSpPr/>
+          <p:nvPr/>
+        </p:nvSpPr>
+        <p:spPr>
+          <a:xfrm>
+            <a:off x="4585820" y="2150000"/>
+            <a:ext cx="3000000" cy="280000"/>
+          </a:xfrm>
+          <a:prstGeom prst="rect">
+            <a:avLst/>
+          </a:prstGeom>
+          <a:noFill/>
+          <a:ln/>
+        </p:spPr>
+        <p:txBody>
+          <a:bodyPr wrap="square" lIns="0" tIns="0" rIns="0" bIns="0" rtlCol="0" anchor="ctr"/>
+          <a:lstStyle/>
+          <a:p>
+            <a:pPr marL="0" indent="0">
+              <a:buNone/>
+            </a:pPr>
+            <a:r>
+              <a:rPr lang="en-US" sz="1000" b="1" kern="0" spc="500" dirty="0">
+                <a:solidFill>
+                  <a:srgbClr val="D71E28"/>
+                </a:solidFill>
+                <a:latin typeface="Calibri" pitchFamily="34" charset="0"/>
+              </a:rPr>
+              <a:t>2  ·  GITHUB</a:t>
+            </a:r>
+          </a:p>
+        </p:txBody>
+      </p:sp>
+      <p:sp>
+        <p:nvSpPr>
+          <p:cNvPr id="23" name="C2Head"/>
+          <p:cNvSpPr/>
+          <p:nvPr/>
+        </p:nvSpPr>
+        <p:spPr>
+          <a:xfrm>
+            <a:off x="4585820" y="2450000"/>
+            <a:ext cx="3000000" cy="380000"/>
+          </a:xfrm>
+          <a:prstGeom prst="rect">
+            <a:avLst/>
+          </a:prstGeom>
+          <a:noFill/>
+          <a:ln/>
+        </p:spPr>
+        <p:txBody>
+          <a:bodyPr wrap="square" lIns="0" tIns="0" rIns="0" bIns="0" rtlCol="0" anchor="ctr"/>
+          <a:lstStyle/>
+          <a:p>
+            <a:pPr marL="0" indent="0">
+              <a:buNone/>
+            </a:pPr>
+            <a:r>
+              <a:rPr lang="en-US" sz="1800" b="1" dirty="0">
+                <a:solidFill>
+                  <a:srgbClr val="1B1B1B"/>
+                </a:solidFill>
+                <a:latin typeface="Calibri" pitchFamily="34" charset="0"/>
+              </a:rPr>
+              <a:t>Code for analysis</a:t>
+            </a:r>
+          </a:p>
+        </p:txBody>
+      </p:sp>
+      <p:sp>
+        <p:nvSpPr>
+          <p:cNvPr id="24" name="C2Body"/>
+          <p:cNvSpPr/>
+          <p:nvPr/>
+        </p:nvSpPr>
+        <p:spPr>
+          <a:xfrm>
+            <a:off x="4585820" y="2920000"/>
+            <a:ext cx="3000000" cy="1450000"/>
+          </a:xfrm>
+          <a:prstGeom prst="rect">
+            <a:avLst/>
+          </a:prstGeom>
+          <a:noFill/>
+          <a:ln/>
+        </p:spPr>
+        <p:txBody>
+          <a:bodyPr wrap="square" lIns="0" tIns="0" rIns="0" bIns="0" rtlCol="0" anchor="t"/>
+          <a:lstStyle/>
+          <a:p>
+            <a:pPr marL="0" indent="0">
+              <a:buNone/>
+            </a:pPr>
+            <a:r>
+              <a:rPr lang="en-US" sz="1200" dirty="0">
+                <a:solidFill>
+                  <a:srgbClr val="4A4A4A"/>
+                </a:solidFill>
+                <a:latin typeface="Calibri" pitchFamily="34" charset="0"/>
+              </a:rPr>
+              <a:t>Repository access to Autosys agent JIL files and SSIS package XML, so the agent can reason about job dependencies, transformations, and connections.</a:t>
+            </a:r>
+          </a:p>
+        </p:txBody>
+      </p:sp>
+      <p:sp>
+        <p:nvSpPr>
+          <p:cNvPr id="25" name="C2Foot"/>
+          <p:cNvSpPr/>
+          <p:nvPr/>
+        </p:nvSpPr>
+        <p:spPr>
+          <a:xfrm>
+            <a:off x="4585820" y="4450000"/>
+            <a:ext cx="3000000" cy="280000"/>
+          </a:xfrm>
+          <a:prstGeom prst="rect">
+            <a:avLst/>
+          </a:prstGeom>
+          <a:noFill/>
+          <a:ln/>
+        </p:spPr>
+        <p:txBody>
+          <a:bodyPr wrap="square" lIns="0" tIns="0" rIns="0" bIns="0" rtlCol="0" anchor="ctr"/>
+          <a:lstStyle/>
+          <a:p>
+            <a:pPr marL="0" indent="0">
+              <a:buNone/>
+            </a:pPr>
+            <a:r>
+              <a:rPr lang="en-US" sz="1000" b="1" kern="0" spc="200" dirty="0">
+                <a:solidFill>
+                  <a:srgbClr val="8A8A8A"/>
+                </a:solidFill>
+                <a:latin typeface="Calibri" pitchFamily="34" charset="0"/>
+              </a:rPr>
+              <a:t xml:space="preserve">HOW   </a:t>
+            </a:r>
+            <a:r>
+              <a:rPr lang="en-US" sz="1100" dirty="0">
+                <a:solidFill>
+                  <a:srgbClr val="1B1B1B"/>
+                </a:solidFill>
+                <a:latin typeface="Calibri" pitchFamily="34" charset="0"/>
+              </a:rPr>
+              <a:t>Repo read access</a:t>
+            </a:r>
+          </a:p>
+        </p:txBody>
+      </p:sp>
+      <p:sp>
+        <p:nvSpPr>
+          <p:cNvPr id="30" name="C3Card"/>
+          <p:cNvSpPr/>
+          <p:nvPr/>
+        </p:nvSpPr>
+        <p:spPr>
+          <a:xfrm>
+            <a:off x="8051500" y="2000000"/>
+            <a:ext cx="3540000" cy="2800000"/>
+          </a:xfrm>
+          <a:prstGeom prst="rect">
+            <a:avLst/>
+          </a:prstGeom>
+          <a:solidFill>
+            <a:srgbClr val="FFFDF7"/>
+          </a:solidFill>
+          <a:ln w="12700">
+            <a:solidFill>
+              <a:srgbClr val="E5E0D5"/>
+            </a:solidFill>
+            <a:prstDash val="solid"/>
+          </a:ln>
+        </p:spPr>
+      </p:sp>
+      <p:sp>
+        <p:nvSpPr>
+          <p:cNvPr id="31" name="C3Stripe"/>
+          <p:cNvSpPr/>
+          <p:nvPr/>
+        </p:nvSpPr>
+        <p:spPr>
+          <a:xfrm>
+            <a:off x="8051500" y="2000000"/>
+            <a:ext cx="91440" cy="2800000"/>
+          </a:xfrm>
+          <a:prstGeom prst="rect">
+            <a:avLst/>
+          </a:prstGeom>
+          <a:solidFill>
+            <a:srgbClr val="FFCD41"/>
+          </a:solidFill>
+          <a:ln w="12700">
+            <a:solidFill>
+              <a:srgbClr val="FFCD41"/>
+            </a:solidFill>
+            <a:prstDash val="solid"/>
+          </a:ln>
+        </p:spPr>
+      </p:sp>
+      <p:sp>
+        <p:nvSpPr>
+          <p:cNvPr id="32" name="C3Label"/>
+          <p:cNvSpPr/>
+          <p:nvPr/>
+        </p:nvSpPr>
+        <p:spPr>
+          <a:xfrm>
+            <a:off x="8325820" y="2150000"/>
+            <a:ext cx="3100000" cy="280000"/>
+          </a:xfrm>
+          <a:prstGeom prst="rect">
+            <a:avLst/>
+          </a:prstGeom>
+          <a:noFill/>
+          <a:ln/>
+        </p:spPr>
+        <p:txBody>
+          <a:bodyPr wrap="square" lIns="0" tIns="0" rIns="0" bIns="0" rtlCol="0" anchor="ctr"/>
+          <a:lstStyle/>
+          <a:p>
+            <a:pPr marL="0" indent="0">
+              <a:buNone/>
+            </a:pPr>
+            <a:r>
+              <a:rPr lang="en-US" sz="1000" b="1" kern="0" spc="500" dirty="0">
+                <a:solidFill>
+                  <a:srgbClr val="D71E28"/>
+                </a:solidFill>
+                <a:latin typeface="Calibri" pitchFamily="34" charset="0"/>
+              </a:rPr>
+              <a:t>3  ·  SSIS &amp; SQL DATABASES</a:t>
+            </a:r>
+          </a:p>
+        </p:txBody>
+      </p:sp>
+      <p:sp>
+        <p:nvSpPr>
+          <p:cNvPr id="33" name="C3Head"/>
+          <p:cNvSpPr/>
+          <p:nvPr/>
+        </p:nvSpPr>
+        <p:spPr>
+          <a:xfrm>
+            <a:off x="8325820" y="2450000"/>
+            <a:ext cx="3100000" cy="380000"/>
+          </a:xfrm>
+          <a:prstGeom prst="rect">
+            <a:avLst/>
+          </a:prstGeom>
+          <a:noFill/>
+          <a:ln/>
+        </p:spPr>
+        <p:txBody>
+          <a:bodyPr wrap="square" lIns="0" tIns="0" rIns="0" bIns="0" rtlCol="0" anchor="ctr"/>
+          <a:lstStyle/>
+          <a:p>
+            <a:pPr marL="0" indent="0">
+              <a:buNone/>
+            </a:pPr>
+            <a:r>
+              <a:rPr lang="en-US" sz="1800" b="1" dirty="0">
+                <a:solidFill>
+                  <a:srgbClr val="1B1B1B"/>
+                </a:solidFill>
+                <a:latin typeface="Calibri" pitchFamily="34" charset="0"/>
+              </a:rPr>
+              <a:t>Runtime state</a:t>
+            </a:r>
+          </a:p>
+        </p:txBody>
+      </p:sp>
+      <p:sp>
+        <p:nvSpPr>
+          <p:cNvPr id="34" name="C3Body"/>
+          <p:cNvSpPr/>
+          <p:nvPr/>
+        </p:nvSpPr>
+        <p:spPr>
+          <a:xfrm>
+            <a:off x="8325820" y="2920000"/>
+            <a:ext cx="3100000" cy="1450000"/>
+          </a:xfrm>
+          <a:prstGeom prst="rect">
+            <a:avLst/>
+          </a:prstGeom>
+          <a:noFill/>
+          <a:ln/>
+        </p:spPr>
+        <p:txBody>
+          <a:bodyPr wrap="square" lIns="0" tIns="0" rIns="0" bIns="0" rtlCol="0" anchor="t"/>
+          <a:lstStyle/>
+          <a:p>
+            <a:pPr marL="0" indent="0">
+              <a:buNone/>
+            </a:pPr>
+            <a:r>
+              <a:rPr lang="en-US" sz="1200" dirty="0">
+                <a:solidFill>
+                  <a:srgbClr val="4A4A4A"/>
+                </a:solidFill>
+                <a:latin typeface="Calibri" pitchFamily="34" charset="0"/>
+              </a:rPr>
+              <a:t>Read SSIS server parameters, execution logs and environment variables, plus the database tables, views, and stored procedures the failing job touches.</a:t>
+            </a:r>
+          </a:p>
+        </p:txBody>
+      </p:sp>
+      <p:sp>
+        <p:nvSpPr>
+          <p:cNvPr id="35" name="C3Foot"/>
+          <p:cNvSpPr/>
+          <p:nvPr/>
+        </p:nvSpPr>
+        <p:spPr>
+          <a:xfrm>
+            <a:off x="8325820" y="4450000"/>
+            <a:ext cx="3100000" cy="280000"/>
+          </a:xfrm>
+          <a:prstGeom prst="rect">
+            <a:avLst/>
+          </a:prstGeom>
+          <a:noFill/>
+          <a:ln/>
+        </p:spPr>
+        <p:txBody>
+          <a:bodyPr wrap="square" lIns="0" tIns="0" rIns="0" bIns="0" rtlCol="0" anchor="ctr"/>
+          <a:lstStyle/>
+          <a:p>
+            <a:pPr marL="0" indent="0">
+              <a:buNone/>
+            </a:pPr>
+            <a:r>
+              <a:rPr lang="en-US" sz="1000" b="1" kern="0" spc="200" dirty="0">
+                <a:solidFill>
+                  <a:srgbClr val="8A8A8A"/>
+                </a:solidFill>
+                <a:latin typeface="Calibri" pitchFamily="34" charset="0"/>
+              </a:rPr>
+              <a:t xml:space="preserve">HOW   </a:t>
+            </a:r>
+            <a:r>
+              <a:rPr lang="en-US" sz="1100" dirty="0">
+                <a:solidFill>
+                  <a:srgbClr val="1B1B1B"/>
+                </a:solidFill>
+                <a:latin typeface="Calibri" pitchFamily="34" charset="0"/>
+              </a:rPr>
+              <a:t>Python executes; LLM passes parameters</a:t>
+            </a:r>
+          </a:p>
+        </p:txBody>
+      </p:sp>
+      <p:sp>
+        <p:nvSpPr>
+          <p:cNvPr id="50" name="NoteCard"/>
+          <p:cNvSpPr/>
+          <p:nvPr/>
+        </p:nvSpPr>
+        <p:spPr>
+          <a:xfrm>
+            <a:off x="571500" y="4980000"/>
+            <a:ext cx="11020000" cy="1280000"/>
+          </a:xfrm>
+          <a:prstGeom prst="rect">
+            <a:avLst/>
+          </a:prstGeom>
+          <a:solidFill>
+            <a:srgbClr val="FFFFFF"/>
+          </a:solidFill>
+          <a:ln w="12700">
+            <a:solidFill>
+              <a:srgbClr val="E5E0D5"/>
+            </a:solidFill>
+            <a:prstDash val="solid"/>
+          </a:ln>
+        </p:spPr>
+      </p:sp>
+      <p:sp>
+        <p:nvSpPr>
+          <p:cNvPr id="51" name="NoteStripe"/>
+          <p:cNvSpPr/>
+          <p:nvPr/>
+        </p:nvSpPr>
+        <p:spPr>
+          <a:xfrm>
+            <a:off x="571500" y="4980000"/>
+            <a:ext cx="91440" cy="1280000"/>
+          </a:xfrm>
+          <a:prstGeom prst="rect">
+            <a:avLst/>
+          </a:prstGeom>
+          <a:solidFill>
+            <a:srgbClr val="D71E28"/>
+          </a:solidFill>
+          <a:ln w="12700">
+            <a:solidFill>
+              <a:srgbClr val="D71E28"/>
+            </a:solidFill>
+            <a:prstDash val="solid"/>
+          </a:ln>
+        </p:spPr>
+      </p:sp>
+      <p:sp>
+        <p:nvSpPr>
+          <p:cNvPr id="52" name="NoteLabel"/>
+          <p:cNvSpPr/>
+          <p:nvPr/>
+        </p:nvSpPr>
+        <p:spPr>
+          <a:xfrm>
+            <a:off x="845820" y="5100000"/>
+            <a:ext cx="6000000" cy="280000"/>
+          </a:xfrm>
+          <a:prstGeom prst="rect">
+            <a:avLst/>
+          </a:prstGeom>
+          <a:noFill/>
+          <a:ln/>
+        </p:spPr>
+        <p:txBody>
+          <a:bodyPr wrap="square" lIns="0" tIns="0" rIns="0" bIns="0" rtlCol="0" anchor="ctr"/>
+          <a:lstStyle/>
+          <a:p>
+            <a:pPr marL="0" indent="0">
+              <a:buNone/>
+            </a:pPr>
+            <a:r>
+              <a:rPr lang="en-US" sz="1000" b="1" kern="0" spc="500" dirty="0">
+                <a:solidFill>
+                  <a:srgbClr val="D71E28"/>
+                </a:solidFill>
+                <a:latin typeface="Calibri" pitchFamily="34" charset="0"/>
+              </a:rPr>
+              <a:t>OPEN QUESTION  ·  TO CONFIRM</a:t>
+            </a:r>
+          </a:p>
+        </p:txBody>
+      </p:sp>
+      <p:sp>
+        <p:nvSpPr>
+          <p:cNvPr id="53" name="NoteHead"/>
+          <p:cNvSpPr/>
+          <p:nvPr/>
+        </p:nvSpPr>
+        <p:spPr>
+          <a:xfrm>
+            <a:off x="845820" y="5400000"/>
+            <a:ext cx="10500000" cy="320000"/>
+          </a:xfrm>
+          <a:prstGeom prst="rect">
+            <a:avLst/>
+          </a:prstGeom>
+          <a:noFill/>
+          <a:ln/>
+        </p:spPr>
+        <p:txBody>
+          <a:bodyPr wrap="square" lIns="0" tIns="0" rIns="0" bIns="0" rtlCol="0" anchor="ctr"/>
+          <a:lstStyle/>
+          <a:p>
+            <a:pPr marL="0" indent="0">
+              <a:buNone/>
+            </a:pPr>
+            <a:r>
+              <a:rPr lang="en-US" sz="1400" b="1" dirty="0">
+                <a:solidFill>
+                  <a:srgbClr val="1B1B1B"/>
+                </a:solidFill>
+                <a:latin typeface="Calibri" pitchFamily="34" charset="0"/>
+              </a:rPr>
+              <a:t>Tachyon does not appear to support direct LLM-to-database connectivity today.</a:t>
+            </a:r>
+          </a:p>
+        </p:txBody>
+      </p:sp>
+      <p:sp>
+        <p:nvSpPr>
+          <p:cNvPr id="54" name="NoteBody"/>
+          <p:cNvSpPr/>
+          <p:nvPr/>
+        </p:nvSpPr>
+        <p:spPr>
+          <a:xfrm>
+            <a:off x="845820" y="5750000"/>
+            <a:ext cx="10500000" cy="500000"/>
+          </a:xfrm>
+          <a:prstGeom prst="rect">
+            <a:avLst/>
+          </a:prstGeom>
+          <a:noFill/>
+          <a:ln/>
+        </p:spPr>
+        <p:txBody>
+          <a:bodyPr wrap="square" lIns="0" tIns="0" rIns="0" bIns="0" rtlCol="0" anchor="t"/>
+          <a:lstStyle/>
+          <a:p>
+            <a:pPr marL="0" indent="0">
+              <a:buNone/>
+            </a:pPr>
+            <a:r>
+              <a:rPr lang="en-US" sz="1200" dirty="0">
+                <a:solidFill>
+                  <a:srgbClr val="4A4A4A"/>
+                </a:solidFill>
+                <a:latin typeface="Calibri" pitchFamily="34" charset="0"/>
+              </a:rPr>
+              <a:t>Workaround: the LLM emits structured query parameters and Python runs the queries  —  keeping all DB I/O in code, not in the model. Lower risk, easier to audit, and unblocks us regardless of how this constraint resolves.</a:t>
+            </a:r>
+          </a:p>
+        </p:txBody>
+      </p:sp>
+    </p:spTree>
+  </p:cSld>
+  <p:clrMapOvr>
+    <a:masterClrMapping/>
+  </p:clrMapOvr>
+</p:sld>
+</file>
+
 <file path=ppt/slides/slide2.xml><?xml version="1.0" encoding="utf-8"?>
 <p:sld xmlns:a="http://schemas.openxmlformats.org/drawingml/2006/main" xmlns:r="http://schemas.openxmlformats.org/officeDocument/2006/relationships" xmlns:p="http://schemas.openxmlformats.org/presentationml/2006/main">
   <p:cSld name="Slide 2">
@@ -1262,7 +3077,7 @@
       </p:grpSpPr>
       <p:sp>
         <p:nvSpPr>
-          <p:cNvPr id="2" name="TopBar"/>
+          <p:cNvPr id="2" name="Shape 0"/>
           <p:cNvSpPr/>
           <p:nvPr/>
         </p:nvSpPr>
@@ -1287,7 +3102,7 @@
       </p:sp>
       <p:sp>
         <p:nvSpPr>
-          <p:cNvPr id="3" name="Eyebrow"/>
+          <p:cNvPr id="3" name="Text 1"/>
           <p:cNvSpPr/>
           <p:nvPr/>
         </p:nvSpPr>
@@ -1315,87 +3130,57 @@
                   <a:srgbClr val="D71E28"/>
                 </a:solidFill>
                 <a:latin typeface="Calibri" pitchFamily="34" charset="0"/>
-              </a:rPr>
-              <a:t>WHERE THIS FITS</a:t>
-            </a:r>
-          </a:p>
-        </p:txBody>
-      </p:sp>
-      <p:sp>
-        <p:nvSpPr>
-          <p:cNvPr id="4" name="Title"/>
-          <p:cNvSpPr/>
-          <p:nvPr/>
-        </p:nvSpPr>
-        <p:spPr>
-          <a:xfrm>
-            <a:off x="731520" y="900000"/>
-            <a:ext cx="10698480" cy="500000"/>
-          </a:xfrm>
-          <a:prstGeom prst="rect">
-            <a:avLst/>
-          </a:prstGeom>
-          <a:noFill/>
-          <a:ln/>
-        </p:spPr>
-        <p:txBody>
-          <a:bodyPr wrap="square" lIns="0" tIns="0" rIns="0" bIns="0" rtlCol="0" anchor="ctr"/>
-          <a:lstStyle/>
-          <a:p>
-            <a:pPr marL="0" indent="0">
-              <a:buNone/>
-            </a:pPr>
-            <a:r>
-              <a:rPr lang="en-US" sz="3200" b="1" dirty="0">
+                <a:ea typeface="Calibri" pitchFamily="34" charset="-122"/>
+                <a:cs typeface="Calibri" pitchFamily="34" charset="-120"/>
+              </a:rPr>
+              <a:t>THE PROBLEM</a:t>
+            </a:r>
+            <a:endParaRPr lang="en-US" sz="1100" dirty="0"/>
+          </a:p>
+        </p:txBody>
+      </p:sp>
+      <p:sp>
+        <p:nvSpPr>
+          <p:cNvPr id="4" name="Text 2"/>
+          <p:cNvSpPr/>
+          <p:nvPr/>
+        </p:nvSpPr>
+        <p:spPr>
+          <a:xfrm>
+            <a:off x="731520" y="914400"/>
+            <a:ext cx="10698480" cy="914400"/>
+          </a:xfrm>
+          <a:prstGeom prst="rect">
+            <a:avLst/>
+          </a:prstGeom>
+          <a:noFill/>
+          <a:ln/>
+        </p:spPr>
+        <p:txBody>
+          <a:bodyPr wrap="square" lIns="0" tIns="0" rIns="0" bIns="0" rtlCol="0" anchor="ctr"/>
+          <a:lstStyle/>
+          <a:p>
+            <a:pPr marL="0" indent="0">
+              <a:buNone/>
+            </a:pPr>
+            <a:r>
+              <a:rPr lang="en-US" sz="3600" b="1" dirty="0">
                 <a:solidFill>
                   <a:srgbClr val="1B1B1B"/>
                 </a:solidFill>
                 <a:latin typeface="Calibri" pitchFamily="34" charset="0"/>
-              </a:rPr>
-              <a:t>Production Monitoring</a:t>
-            </a:r>
-          </a:p>
-        </p:txBody>
-      </p:sp>
-      <p:sp>
-        <p:nvSpPr>
-          <p:cNvPr id="5" name="Subtitle"/>
-          <p:cNvSpPr/>
-          <p:nvPr/>
-        </p:nvSpPr>
-        <p:spPr>
-          <a:xfrm>
-            <a:off x="731520" y="1450000"/>
-            <a:ext cx="10698480" cy="320000"/>
-          </a:xfrm>
-          <a:prstGeom prst="rect">
-            <a:avLst/>
-          </a:prstGeom>
-          <a:noFill/>
-          <a:ln/>
-        </p:spPr>
-        <p:txBody>
-          <a:bodyPr wrap="square" lIns="0" tIns="0" rIns="0" bIns="0" rtlCol="0" anchor="ctr"/>
-          <a:lstStyle/>
-          <a:p>
-            <a:pPr marL="0" indent="0">
-              <a:buNone/>
-            </a:pPr>
-            <a:r>
-              <a:rPr lang="en-US" sz="1400" dirty="0">
-                <a:solidFill>
-                  <a:srgbClr val="4A4A4A"/>
-                </a:solidFill>
-                <a:latin typeface="Calibri" pitchFamily="34" charset="0"/>
-              </a:rPr>
-              <a:t>Production Monitoring is one of five focus areas in the Engineering Reimagined initiative. </a:t>
-            </a:r>
-          </a:p>
-        </p:txBody>
-      </p:sp>
-      <p:sp>
-        <p:nvSpPr>
-          <p:cNvPr id="6" name="PageNum"/>
+                <a:ea typeface="Calibri" pitchFamily="34" charset="-122"/>
+                <a:cs typeface="Calibri" pitchFamily="34" charset="-120"/>
+              </a:rPr>
+              <a:t>Nightly job failures hit hardest at 2 AM.</a:t>
+            </a:r>
+            <a:endParaRPr lang="en-US" sz="3600" dirty="0"/>
+          </a:p>
+        </p:txBody>
+      </p:sp>
+      <p:sp>
+        <p:nvSpPr>
+          <p:cNvPr id="5" name="Text 3"/>
           <p:cNvSpPr/>
           <p:nvPr/>
         </p:nvSpPr>
@@ -1423,56 +3208,347 @@
                   <a:srgbClr val="8A8A8A"/>
                 </a:solidFill>
                 <a:latin typeface="Calibri" pitchFamily="34" charset="0"/>
-              </a:rPr>
-              <a:t>2 / 8</a:t>
-            </a:r>
-          </a:p>
-        </p:txBody>
-      </p:sp>
-      <p:sp>
-        <p:nvSpPr>
-          <p:cNvPr id="10" name="LeftCard"/>
-          <p:cNvSpPr/>
-          <p:nvPr/>
-        </p:nvSpPr>
-        <p:spPr>
-          <a:xfrm>
-            <a:off x="571500" y="2050000"/>
-            <a:ext cx="5450000" cy="3950000"/>
-          </a:xfrm>
-          <a:prstGeom prst="rect">
-            <a:avLst/>
-          </a:prstGeom>
-          <a:solidFill>
-            <a:srgbClr val="FFFDF7"/>
-          </a:solidFill>
-          <a:ln w="12700">
+                <a:ea typeface="Calibri" pitchFamily="34" charset="-122"/>
+                <a:cs typeface="Calibri" pitchFamily="34" charset="-120"/>
+              </a:rPr>
+              <a:t>3 / 9</a:t>
+            </a:r>
+            <a:endParaRPr lang="en-US" sz="900" dirty="0"/>
+          </a:p>
+        </p:txBody>
+      </p:sp>
+      <p:sp>
+        <p:nvSpPr>
+          <p:cNvPr id="6" name="Text 4"/>
+          <p:cNvSpPr/>
+          <p:nvPr/>
+        </p:nvSpPr>
+        <p:spPr>
+          <a:xfrm>
+            <a:off x="731520" y="2011680"/>
+            <a:ext cx="5212080" cy="457200"/>
+          </a:xfrm>
+          <a:prstGeom prst="rect">
+            <a:avLst/>
+          </a:prstGeom>
+          <a:noFill/>
+          <a:ln/>
+        </p:spPr>
+        <p:txBody>
+          <a:bodyPr wrap="square" lIns="0" tIns="0" rIns="0" bIns="0" rtlCol="0" anchor="ctr"/>
+          <a:lstStyle/>
+          <a:p>
+            <a:pPr marL="0" indent="0">
+              <a:buNone/>
+            </a:pPr>
+            <a:r>
+              <a:rPr lang="en-US" sz="1900" b="1" dirty="0">
+                <a:solidFill>
+                  <a:srgbClr val="1B1B1B"/>
+                </a:solidFill>
+                <a:latin typeface="Calibri" pitchFamily="34" charset="0"/>
+                <a:ea typeface="Calibri" pitchFamily="34" charset="-122"/>
+                <a:cs typeface="Calibri" pitchFamily="34" charset="-120"/>
+              </a:rPr>
+              <a:t>Jobs run nightly. They fail nightly.</a:t>
+            </a:r>
+            <a:endParaRPr lang="en-US" sz="1900" dirty="0"/>
+          </a:p>
+        </p:txBody>
+      </p:sp>
+      <p:sp>
+        <p:nvSpPr>
+          <p:cNvPr id="7" name="Text 5"/>
+          <p:cNvSpPr/>
+          <p:nvPr/>
+        </p:nvSpPr>
+        <p:spPr>
+          <a:xfrm>
+            <a:off x="731520" y="2606040"/>
+            <a:ext cx="5212080" cy="2286000"/>
+          </a:xfrm>
+          <a:prstGeom prst="rect">
+            <a:avLst/>
+          </a:prstGeom>
+          <a:noFill/>
+          <a:ln/>
+        </p:spPr>
+        <p:txBody>
+          <a:bodyPr wrap="square" lIns="0" tIns="0" rIns="0" bIns="0" rtlCol="0" anchor="ctr"/>
+          <a:lstStyle/>
+          <a:p>
+            <a:pPr marL="0" indent="0">
+              <a:spcAft>
+                <a:spcPts val="1000"/>
+              </a:spcAft>
+              <a:buNone/>
+            </a:pPr>
+            <a:r>
+              <a:rPr lang="en-US" sz="1400" dirty="0">
+                <a:solidFill>
+                  <a:srgbClr val="4A4A4A"/>
+                </a:solidFill>
+                <a:latin typeface="Calibri" pitchFamily="34" charset="0"/>
+                <a:ea typeface="Calibri" pitchFamily="34" charset="-122"/>
+                <a:cs typeface="Calibri" pitchFamily="34" charset="-120"/>
+              </a:rPr>
+              <a:t>EGS L2 production support teams in India are the first responders.</a:t>
+            </a:r>
+            <a:endParaRPr lang="en-US" sz="1400" dirty="0"/>
+          </a:p>
+          <a:p>
+            <a:pPr marL="0" indent="0">
+              <a:spcAft>
+                <a:spcPts val="1000"/>
+              </a:spcAft>
+              <a:buNone/>
+            </a:pPr>
+            <a:r>
+              <a:rPr lang="en-US" sz="1400" dirty="0">
+                <a:solidFill>
+                  <a:srgbClr val="4A4A4A"/>
+                </a:solidFill>
+                <a:latin typeface="Calibri" pitchFamily="34" charset="0"/>
+                <a:ea typeface="Calibri" pitchFamily="34" charset="-122"/>
+                <a:cs typeface="Calibri" pitchFamily="34" charset="-120"/>
+              </a:rPr>
+              <a:t>Most of our databases reside on SAR-restricted servers  —  accessible only from inside the US.</a:t>
+            </a:r>
+            <a:endParaRPr lang="en-US" sz="1400" dirty="0"/>
+          </a:p>
+          <a:p>
+            <a:pPr marL="0" indent="0">
+              <a:spcAft>
+                <a:spcPts val="1000"/>
+              </a:spcAft>
+              <a:buNone/>
+            </a:pPr>
+            <a:r>
+              <a:rPr lang="en-US" sz="1400" dirty="0">
+                <a:solidFill>
+                  <a:srgbClr val="4A4A4A"/>
+                </a:solidFill>
+                <a:latin typeface="Calibri" pitchFamily="34" charset="0"/>
+                <a:ea typeface="Calibri" pitchFamily="34" charset="-122"/>
+                <a:cs typeface="Calibri" pitchFamily="34" charset="-120"/>
+              </a:rPr>
+              <a:t>Investigation stalls until US teams come online  —  hours later.</a:t>
+            </a:r>
+            <a:endParaRPr lang="en-US" sz="1400" dirty="0"/>
+          </a:p>
+          <a:p>
+            <a:pPr marL="0" indent="0">
+              <a:spcAft>
+                <a:spcPts val="1000"/>
+              </a:spcAft>
+              <a:buNone/>
+            </a:pPr>
+            <a:r>
+              <a:rPr lang="en-US" sz="1400" dirty="0">
+                <a:solidFill>
+                  <a:srgbClr val="4A4A4A"/>
+                </a:solidFill>
+                <a:latin typeface="Calibri" pitchFamily="34" charset="0"/>
+                <a:ea typeface="Calibri" pitchFamily="34" charset="-122"/>
+                <a:cs typeface="Calibri" pitchFamily="34" charset="-120"/>
+              </a:rPr>
+              <a:t>Multiple engineers and various teams get pulled in to coordinate the wait.</a:t>
+            </a:r>
+            <a:endParaRPr lang="en-US" sz="1400" dirty="0"/>
+          </a:p>
+        </p:txBody>
+      </p:sp>
+      <p:sp>
+        <p:nvSpPr>
+          <p:cNvPr id="8" name="Text 6"/>
+          <p:cNvSpPr/>
+          <p:nvPr/>
+        </p:nvSpPr>
+        <p:spPr>
+          <a:xfrm>
+            <a:off x="731520" y="5029200"/>
+            <a:ext cx="5212080" cy="320040"/>
+          </a:xfrm>
+          <a:prstGeom prst="rect">
+            <a:avLst/>
+          </a:prstGeom>
+          <a:noFill/>
+          <a:ln/>
+        </p:spPr>
+        <p:txBody>
+          <a:bodyPr wrap="square" lIns="0" tIns="0" rIns="0" bIns="0" rtlCol="0" anchor="ctr"/>
+          <a:lstStyle/>
+          <a:p>
+            <a:pPr marL="0" indent="0">
+              <a:buNone/>
+            </a:pPr>
+            <a:r>
+              <a:rPr lang="en-US" sz="1400" i="1" dirty="0">
+                <a:solidFill>
+                  <a:srgbClr val="8A8A8A"/>
+                </a:solidFill>
+                <a:latin typeface="Calibri" pitchFamily="34" charset="0"/>
+                <a:ea typeface="Calibri" pitchFamily="34" charset="-122"/>
+                <a:cs typeface="Calibri" pitchFamily="34" charset="-120"/>
+              </a:rPr>
+              <a:t>Up to</a:t>
+            </a:r>
+            <a:endParaRPr lang="en-US" sz="1400" dirty="0"/>
+          </a:p>
+        </p:txBody>
+      </p:sp>
+      <p:sp>
+        <p:nvSpPr>
+          <p:cNvPr id="9" name="Text 7"/>
+          <p:cNvSpPr/>
+          <p:nvPr/>
+        </p:nvSpPr>
+        <p:spPr>
+          <a:xfrm>
+            <a:off x="731520" y="5349240"/>
+            <a:ext cx="5212080" cy="868680"/>
+          </a:xfrm>
+          <a:prstGeom prst="rect">
+            <a:avLst/>
+          </a:prstGeom>
+          <a:noFill/>
+          <a:ln/>
+        </p:spPr>
+        <p:txBody>
+          <a:bodyPr wrap="square" lIns="0" tIns="0" rIns="0" bIns="0" rtlCol="0" anchor="ctr"/>
+          <a:lstStyle/>
+          <a:p>
+            <a:pPr marL="0" indent="0">
+              <a:buNone/>
+            </a:pPr>
+            <a:r>
+              <a:rPr lang="en-US" sz="5600" b="1" dirty="0">
+                <a:solidFill>
+                  <a:srgbClr val="D71E28"/>
+                </a:solidFill>
+                <a:latin typeface="Calibri" pitchFamily="34" charset="0"/>
+                <a:ea typeface="Calibri" pitchFamily="34" charset="-122"/>
+                <a:cs typeface="Calibri" pitchFamily="34" charset="-120"/>
+              </a:rPr>
+              <a:t>10 hours</a:t>
+            </a:r>
+            <a:endParaRPr lang="en-US" sz="5600" dirty="0"/>
+          </a:p>
+        </p:txBody>
+      </p:sp>
+      <p:sp>
+        <p:nvSpPr>
+          <p:cNvPr id="10" name="Text 8"/>
+          <p:cNvSpPr/>
+          <p:nvPr/>
+        </p:nvSpPr>
+        <p:spPr>
+          <a:xfrm>
+            <a:off x="731520" y="6080760"/>
+            <a:ext cx="5212080" cy="320040"/>
+          </a:xfrm>
+          <a:prstGeom prst="rect">
+            <a:avLst/>
+          </a:prstGeom>
+          <a:noFill/>
+          <a:ln/>
+        </p:spPr>
+        <p:txBody>
+          <a:bodyPr wrap="square" lIns="0" tIns="0" rIns="0" bIns="0" rtlCol="0" anchor="ctr"/>
+          <a:lstStyle/>
+          <a:p>
+            <a:pPr marL="0" indent="0">
+              <a:buNone/>
+            </a:pPr>
+            <a:r>
+              <a:rPr lang="en-US" sz="1200" i="1" dirty="0">
+                <a:solidFill>
+                  <a:srgbClr val="1B1B1B"/>
+                </a:solidFill>
+                <a:latin typeface="Calibri" pitchFamily="34" charset="0"/>
+                <a:ea typeface="Calibri" pitchFamily="34" charset="-122"/>
+                <a:cs typeface="Calibri" pitchFamily="34" charset="-120"/>
+              </a:rPr>
+              <a:t>on the worst incidents  —  before real debugging even begins.</a:t>
+            </a:r>
+            <a:endParaRPr lang="en-US" sz="1200" dirty="0"/>
+          </a:p>
+        </p:txBody>
+      </p:sp>
+      <p:sp>
+        <p:nvSpPr>
+          <p:cNvPr id="11" name="Text 9"/>
+          <p:cNvSpPr/>
+          <p:nvPr/>
+        </p:nvSpPr>
+        <p:spPr>
+          <a:xfrm>
+            <a:off x="6675120" y="2011680"/>
+            <a:ext cx="5029200" cy="274320"/>
+          </a:xfrm>
+          <a:prstGeom prst="rect">
+            <a:avLst/>
+          </a:prstGeom>
+          <a:noFill/>
+          <a:ln/>
+        </p:spPr>
+        <p:txBody>
+          <a:bodyPr wrap="square" lIns="0" tIns="0" rIns="0" bIns="0" rtlCol="0" anchor="ctr"/>
+          <a:lstStyle/>
+          <a:p>
+            <a:pPr marL="0" indent="0">
+              <a:buNone/>
+            </a:pPr>
+            <a:r>
+              <a:rPr lang="en-US" sz="1000" b="1" kern="0" spc="500" dirty="0">
+                <a:solidFill>
+                  <a:srgbClr val="8A8A8A"/>
+                </a:solidFill>
+                <a:latin typeface="Calibri" pitchFamily="34" charset="0"/>
+                <a:ea typeface="Calibri" pitchFamily="34" charset="-122"/>
+                <a:cs typeface="Calibri" pitchFamily="34" charset="-120"/>
+              </a:rPr>
+              <a:t>ANATOMY OF A NIGHTLY FAILURE</a:t>
+            </a:r>
+            <a:endParaRPr lang="en-US" sz="1000" dirty="0"/>
+          </a:p>
+        </p:txBody>
+      </p:sp>
+      <p:sp>
+        <p:nvSpPr>
+          <p:cNvPr id="12" name="Shape 10"/>
+          <p:cNvSpPr/>
+          <p:nvPr/>
+        </p:nvSpPr>
+        <p:spPr>
+          <a:xfrm>
+            <a:off x="6812280" y="2606040"/>
+            <a:ext cx="0" cy="3200400"/>
+          </a:xfrm>
+          <a:prstGeom prst="line">
+            <a:avLst/>
+          </a:prstGeom>
+          <a:noFill/>
+          <a:ln w="25400">
             <a:solidFill>
               <a:srgbClr val="E5E0D5"/>
             </a:solidFill>
             <a:prstDash val="solid"/>
           </a:ln>
         </p:spPr>
-        <p:txBody>
-          <a:bodyPr/>
-          <a:lstStyle/>
-          <a:p>
-            <a:endParaRPr lang="en-US" dirty="0"/>
-          </a:p>
-        </p:txBody>
-      </p:sp>
-      <p:sp>
-        <p:nvSpPr>
-          <p:cNvPr id="11" name="LeftStripe"/>
-          <p:cNvSpPr/>
-          <p:nvPr/>
-        </p:nvSpPr>
-        <p:spPr>
-          <a:xfrm>
-            <a:off x="571500" y="2050000"/>
-            <a:ext cx="91440" cy="3950000"/>
-          </a:xfrm>
-          <a:prstGeom prst="rect">
+      </p:sp>
+      <p:sp>
+        <p:nvSpPr>
+          <p:cNvPr id="13" name="Shape 11"/>
+          <p:cNvSpPr/>
+          <p:nvPr/>
+        </p:nvSpPr>
+        <p:spPr>
+          <a:xfrm>
+            <a:off x="6675120" y="2468880"/>
+            <a:ext cx="274320" cy="274320"/>
+          </a:xfrm>
+          <a:prstGeom prst="ellipse">
             <a:avLst/>
           </a:prstGeom>
           <a:solidFill>
@@ -1488,310 +3564,197 @@
       </p:sp>
       <p:sp>
         <p:nvSpPr>
-          <p:cNvPr id="12" name="LeftLabel"/>
-          <p:cNvSpPr/>
-          <p:nvPr/>
-        </p:nvSpPr>
-        <p:spPr>
-          <a:xfrm>
-            <a:off x="845820" y="2200000"/>
-            <a:ext cx="4900000" cy="280000"/>
-          </a:xfrm>
-          <a:prstGeom prst="rect">
-            <a:avLst/>
-          </a:prstGeom>
-          <a:noFill/>
-          <a:ln/>
-        </p:spPr>
-        <p:txBody>
-          <a:bodyPr wrap="square" lIns="0" tIns="0" rIns="0" bIns="0" rtlCol="0" anchor="ctr"/>
-          <a:lstStyle/>
-          <a:p>
-            <a:pPr marL="0" indent="0">
-              <a:buNone/>
-            </a:pPr>
-            <a:r>
-              <a:rPr lang="en-US" sz="1000" b="1" kern="0" spc="500" dirty="0">
-                <a:solidFill>
-                  <a:srgbClr val="D71E28"/>
-                </a:solidFill>
-                <a:latin typeface="Calibri" pitchFamily="34" charset="0"/>
-              </a:rPr>
-              <a:t>FOCUS AREA  ·  PRODUCTION MONITORING</a:t>
-            </a:r>
-          </a:p>
-        </p:txBody>
-      </p:sp>
-      <p:sp>
-        <p:nvSpPr>
-          <p:cNvPr id="13" name="LeftHead"/>
-          <p:cNvSpPr/>
-          <p:nvPr/>
-        </p:nvSpPr>
-        <p:spPr>
-          <a:xfrm>
-            <a:off x="845820" y="2500000"/>
-            <a:ext cx="4900000" cy="380000"/>
-          </a:xfrm>
-          <a:prstGeom prst="rect">
-            <a:avLst/>
-          </a:prstGeom>
-          <a:noFill/>
-          <a:ln/>
-        </p:spPr>
-        <p:txBody>
-          <a:bodyPr wrap="square" lIns="0" tIns="0" rIns="0" bIns="0" rtlCol="0" anchor="ctr"/>
-          <a:lstStyle/>
-          <a:p>
-            <a:pPr marL="0" indent="0">
-              <a:buNone/>
-            </a:pPr>
-            <a:r>
-              <a:rPr lang="en-US" sz="1800" b="1" dirty="0">
+          <p:cNvPr id="14" name="Text 12"/>
+          <p:cNvSpPr/>
+          <p:nvPr/>
+        </p:nvSpPr>
+        <p:spPr>
+          <a:xfrm>
+            <a:off x="7178040" y="2468880"/>
+            <a:ext cx="1371600" cy="274320"/>
+          </a:xfrm>
+          <a:prstGeom prst="rect">
+            <a:avLst/>
+          </a:prstGeom>
+          <a:noFill/>
+          <a:ln/>
+        </p:spPr>
+        <p:txBody>
+          <a:bodyPr wrap="square" lIns="0" tIns="0" rIns="0" bIns="0" rtlCol="0" anchor="ctr"/>
+          <a:lstStyle/>
+          <a:p>
+            <a:pPr marL="0" indent="0">
+              <a:buNone/>
+            </a:pPr>
+            <a:r>
+              <a:rPr lang="en-US" sz="1100" b="1" dirty="0">
+                <a:solidFill>
+                  <a:srgbClr val="8A8A8A"/>
+                </a:solidFill>
+                <a:latin typeface="Calibri" pitchFamily="34" charset="0"/>
+                <a:ea typeface="Calibri" pitchFamily="34" charset="-122"/>
+                <a:cs typeface="Calibri" pitchFamily="34" charset="-120"/>
+              </a:rPr>
+              <a:t>2:00 AM ET</a:t>
+            </a:r>
+            <a:endParaRPr lang="en-US" sz="1100" dirty="0"/>
+          </a:p>
+        </p:txBody>
+      </p:sp>
+      <p:sp>
+        <p:nvSpPr>
+          <p:cNvPr id="15" name="Text 13"/>
+          <p:cNvSpPr/>
+          <p:nvPr/>
+        </p:nvSpPr>
+        <p:spPr>
+          <a:xfrm>
+            <a:off x="8595360" y="2468880"/>
+            <a:ext cx="3474720" cy="274320"/>
+          </a:xfrm>
+          <a:prstGeom prst="rect">
+            <a:avLst/>
+          </a:prstGeom>
+          <a:noFill/>
+          <a:ln/>
+        </p:spPr>
+        <p:txBody>
+          <a:bodyPr wrap="square" lIns="0" tIns="0" rIns="0" bIns="0" rtlCol="0" anchor="ctr"/>
+          <a:lstStyle/>
+          <a:p>
+            <a:pPr marL="0" indent="0">
+              <a:buNone/>
+            </a:pPr>
+            <a:r>
+              <a:rPr lang="en-US" sz="1400" dirty="0">
                 <a:solidFill>
                   <a:srgbClr val="1B1B1B"/>
                 </a:solidFill>
                 <a:latin typeface="Calibri" pitchFamily="34" charset="0"/>
-              </a:rPr>
-              <a:t>From reactive alerts to intelligent data reliability.</a:t>
-            </a:r>
-          </a:p>
-        </p:txBody>
-      </p:sp>
-      <p:sp>
-        <p:nvSpPr>
-          <p:cNvPr id="14" name="LeftGapLabel"/>
-          <p:cNvSpPr/>
-          <p:nvPr/>
-        </p:nvSpPr>
-        <p:spPr>
-          <a:xfrm>
-            <a:off x="845820" y="3000000"/>
-            <a:ext cx="4900000" cy="260000"/>
-          </a:xfrm>
-          <a:prstGeom prst="rect">
-            <a:avLst/>
-          </a:prstGeom>
-          <a:noFill/>
-          <a:ln/>
-        </p:spPr>
-        <p:txBody>
-          <a:bodyPr wrap="square" lIns="0" tIns="0" rIns="0" bIns="0" rtlCol="0" anchor="ctr"/>
-          <a:lstStyle/>
-          <a:p>
-            <a:pPr marL="0" indent="0">
-              <a:buNone/>
-            </a:pPr>
-            <a:r>
-              <a:rPr lang="en-US" sz="1100" b="1" dirty="0">
-                <a:solidFill>
-                  <a:srgbClr val="1B1B1B"/>
-                </a:solidFill>
-                <a:latin typeface="Calibri" pitchFamily="34" charset="0"/>
-              </a:rPr>
-              <a:t>Current Gap</a:t>
-            </a:r>
-          </a:p>
-        </p:txBody>
-      </p:sp>
-      <p:sp>
-        <p:nvSpPr>
-          <p:cNvPr id="15" name="LeftGapBody"/>
-          <p:cNvSpPr/>
-          <p:nvPr/>
-        </p:nvSpPr>
-        <p:spPr>
-          <a:xfrm>
-            <a:off x="845820" y="3260000"/>
-            <a:ext cx="4900000" cy="500000"/>
-          </a:xfrm>
-          <a:prstGeom prst="rect">
-            <a:avLst/>
-          </a:prstGeom>
-          <a:noFill/>
-          <a:ln/>
-        </p:spPr>
-        <p:txBody>
-          <a:bodyPr wrap="square" lIns="0" tIns="0" rIns="0" bIns="0" rtlCol="0" anchor="t"/>
-          <a:lstStyle/>
-          <a:p>
-            <a:pPr marL="0" indent="0">
-              <a:buNone/>
-            </a:pPr>
-            <a:r>
-              <a:rPr lang="en-US" sz="1200" dirty="0">
-                <a:solidFill>
-                  <a:srgbClr val="4A4A4A"/>
-                </a:solidFill>
-                <a:latin typeface="Calibri" pitchFamily="34" charset="0"/>
-              </a:rPr>
-              <a:t>Production monitoring today is reactive and metric-centric, not data-centric or intent-aware.</a:t>
-            </a:r>
-          </a:p>
-        </p:txBody>
-      </p:sp>
-      <p:sp>
-        <p:nvSpPr>
-          <p:cNvPr id="16" name="LeftNeedsLabel"/>
-          <p:cNvSpPr/>
-          <p:nvPr/>
-        </p:nvSpPr>
-        <p:spPr>
-          <a:xfrm>
-            <a:off x="845820" y="3850000"/>
-            <a:ext cx="4900000" cy="260000"/>
-          </a:xfrm>
-          <a:prstGeom prst="rect">
-            <a:avLst/>
-          </a:prstGeom>
-          <a:noFill/>
-          <a:ln/>
-        </p:spPr>
-        <p:txBody>
-          <a:bodyPr wrap="square" lIns="0" tIns="0" rIns="0" bIns="0" rtlCol="0" anchor="ctr"/>
-          <a:lstStyle/>
-          <a:p>
-            <a:pPr marL="0" indent="0">
-              <a:buNone/>
-            </a:pPr>
-            <a:r>
-              <a:rPr lang="en-US" sz="1100" b="1" dirty="0">
-                <a:solidFill>
-                  <a:srgbClr val="1B1B1B"/>
-                </a:solidFill>
-                <a:latin typeface="Calibri" pitchFamily="34" charset="0"/>
-              </a:rPr>
-              <a:t>Unmet needs called out</a:t>
-            </a:r>
-          </a:p>
-        </p:txBody>
-      </p:sp>
-      <p:sp>
-        <p:nvSpPr>
-          <p:cNvPr id="17" name="LeftNeedsBody"/>
-          <p:cNvSpPr/>
-          <p:nvPr/>
-        </p:nvSpPr>
-        <p:spPr>
-          <a:xfrm>
-            <a:off x="845820" y="4110000"/>
-            <a:ext cx="4900000" cy="1850000"/>
-          </a:xfrm>
-          <a:prstGeom prst="rect">
-            <a:avLst/>
-          </a:prstGeom>
-          <a:noFill/>
-          <a:ln/>
-        </p:spPr>
-        <p:txBody>
-          <a:bodyPr wrap="square" lIns="0" tIns="0" rIns="0" bIns="0" rtlCol="0" anchor="t"/>
-          <a:lstStyle/>
-          <a:p>
-            <a:pPr marL="160020" indent="-160020">
-              <a:buFont typeface="Arial" panose="020B0604020202020204" pitchFamily="34" charset="0"/>
-              <a:buChar char="–"/>
-            </a:pPr>
-            <a:r>
-              <a:rPr lang="en-US" sz="1200" dirty="0">
-                <a:solidFill>
-                  <a:srgbClr val="4A4A4A"/>
-                </a:solidFill>
-                <a:latin typeface="Calibri" pitchFamily="34" charset="0"/>
-              </a:rPr>
-              <a:t>Early detection of data quality drift before downstream impact</a:t>
-            </a:r>
-          </a:p>
-          <a:p>
-            <a:pPr marL="160020" indent="-160020">
-              <a:buFont typeface="Arial" panose="020B0604020202020204" pitchFamily="34" charset="0"/>
-              <a:buChar char="–"/>
-            </a:pPr>
-            <a:r>
-              <a:rPr lang="en-US" sz="1200" dirty="0">
-                <a:solidFill>
-                  <a:srgbClr val="4A4A4A"/>
-                </a:solidFill>
-                <a:latin typeface="Calibri" pitchFamily="34" charset="0"/>
-              </a:rPr>
-              <a:t>Correlation between failures, lineage, and consumers</a:t>
-            </a:r>
-          </a:p>
-          <a:p>
-            <a:pPr marL="160020" indent="-160020">
-              <a:buFont typeface="Arial" panose="020B0604020202020204" pitchFamily="34" charset="0"/>
-              <a:buChar char="–"/>
-            </a:pPr>
-            <a:r>
-              <a:rPr lang="en-US" sz="1200" dirty="0">
-                <a:solidFill>
-                  <a:srgbClr val="4A4A4A"/>
-                </a:solidFill>
-                <a:latin typeface="Calibri" pitchFamily="34" charset="0"/>
-              </a:rPr>
-              <a:t>Monitoring that understands expected behavior, not just thresholds</a:t>
-            </a:r>
-          </a:p>
-          <a:p>
-            <a:pPr marL="160020" indent="-160020">
-              <a:buFont typeface="Arial" panose="020B0604020202020204" pitchFamily="34" charset="0"/>
-              <a:buChar char="–"/>
-            </a:pPr>
-            <a:r>
-              <a:rPr lang="en-US" sz="1200" dirty="0">
-                <a:solidFill>
-                  <a:srgbClr val="4A4A4A"/>
-                </a:solidFill>
-                <a:latin typeface="Calibri" pitchFamily="34" charset="0"/>
-              </a:rPr>
-              <a:t>Automated diagnosis rather than alert flooding</a:t>
-            </a:r>
-          </a:p>
-        </p:txBody>
-      </p:sp>
-      <p:sp>
-        <p:nvSpPr>
-          <p:cNvPr id="20" name="RightCard"/>
-          <p:cNvSpPr/>
-          <p:nvPr/>
-        </p:nvSpPr>
-        <p:spPr>
-          <a:xfrm>
-            <a:off x="6172000" y="2050000"/>
-            <a:ext cx="5450000" cy="3950000"/>
-          </a:xfrm>
-          <a:prstGeom prst="rect">
-            <a:avLst/>
-          </a:prstGeom>
-          <a:solidFill>
-            <a:srgbClr val="FFFFFF"/>
+                <a:ea typeface="Calibri" pitchFamily="34" charset="-122"/>
+                <a:cs typeface="Calibri" pitchFamily="34" charset="-120"/>
+              </a:rPr>
+              <a:t>Job fails/ INC Generated</a:t>
+            </a:r>
+            <a:endParaRPr lang="en-US" sz="1400" dirty="0"/>
+          </a:p>
+        </p:txBody>
+      </p:sp>
+      <p:sp>
+        <p:nvSpPr>
+          <p:cNvPr id="16" name="Shape 14"/>
+          <p:cNvSpPr/>
+          <p:nvPr/>
+        </p:nvSpPr>
+        <p:spPr>
+          <a:xfrm>
+            <a:off x="6675120" y="3108960"/>
+            <a:ext cx="274320" cy="274320"/>
+          </a:xfrm>
+          <a:prstGeom prst="ellipse">
+            <a:avLst/>
+          </a:prstGeom>
+          <a:solidFill>
+            <a:srgbClr val="FFCD41"/>
           </a:solidFill>
           <a:ln w="12700">
             <a:solidFill>
-              <a:srgbClr val="E5E0D5"/>
+              <a:srgbClr val="FFCD41"/>
             </a:solidFill>
             <a:prstDash val="solid"/>
           </a:ln>
-          <a:effectLst>
-            <a:outerShdw blurRad="152400" dist="38100" dir="5400000" algn="bl" rotWithShape="0">
-              <a:srgbClr val="000000">
-                <a:alpha val="8000"/>
-              </a:srgbClr>
-            </a:outerShdw>
-          </a:effectLst>
-        </p:spPr>
-      </p:sp>
-      <p:sp>
-        <p:nvSpPr>
-          <p:cNvPr id="21" name="RightStripe"/>
-          <p:cNvSpPr/>
-          <p:nvPr/>
-        </p:nvSpPr>
-        <p:spPr>
-          <a:xfrm>
-            <a:off x="6172000" y="2050000"/>
-            <a:ext cx="91440" cy="3950000"/>
-          </a:xfrm>
-          <a:prstGeom prst="rect">
+        </p:spPr>
+      </p:sp>
+      <p:sp>
+        <p:nvSpPr>
+          <p:cNvPr id="17" name="Text 15"/>
+          <p:cNvSpPr/>
+          <p:nvPr/>
+        </p:nvSpPr>
+        <p:spPr>
+          <a:xfrm>
+            <a:off x="7178040" y="3108960"/>
+            <a:ext cx="1371600" cy="274320"/>
+          </a:xfrm>
+          <a:prstGeom prst="rect">
+            <a:avLst/>
+          </a:prstGeom>
+          <a:noFill/>
+          <a:ln/>
+        </p:spPr>
+        <p:txBody>
+          <a:bodyPr wrap="square" lIns="0" tIns="0" rIns="0" bIns="0" rtlCol="0" anchor="ctr"/>
+          <a:lstStyle/>
+          <a:p>
+            <a:pPr marL="0" indent="0">
+              <a:buNone/>
+            </a:pPr>
+            <a:r>
+              <a:rPr lang="en-US" sz="1100" b="1" dirty="0">
+                <a:solidFill>
+                  <a:srgbClr val="8A8A8A"/>
+                </a:solidFill>
+                <a:latin typeface="Calibri" pitchFamily="34" charset="0"/>
+                <a:ea typeface="Calibri" pitchFamily="34" charset="-122"/>
+                <a:cs typeface="Calibri" pitchFamily="34" charset="-120"/>
+              </a:rPr>
+              <a:t>2:05 AM ET</a:t>
+            </a:r>
+            <a:endParaRPr lang="en-US" sz="1100" dirty="0"/>
+          </a:p>
+        </p:txBody>
+      </p:sp>
+      <p:sp>
+        <p:nvSpPr>
+          <p:cNvPr id="18" name="Text 16"/>
+          <p:cNvSpPr/>
+          <p:nvPr/>
+        </p:nvSpPr>
+        <p:spPr>
+          <a:xfrm>
+            <a:off x="8595360" y="3108960"/>
+            <a:ext cx="3474720" cy="274320"/>
+          </a:xfrm>
+          <a:prstGeom prst="rect">
+            <a:avLst/>
+          </a:prstGeom>
+          <a:noFill/>
+          <a:ln/>
+        </p:spPr>
+        <p:txBody>
+          <a:bodyPr wrap="square" lIns="0" tIns="0" rIns="0" bIns="0" rtlCol="0" anchor="ctr"/>
+          <a:lstStyle/>
+          <a:p>
+            <a:pPr marL="0" indent="0">
+              <a:buNone/>
+            </a:pPr>
+            <a:r>
+              <a:rPr lang="en-US" sz="1400" dirty="0">
+                <a:solidFill>
+                  <a:srgbClr val="1B1B1B"/>
+                </a:solidFill>
+                <a:latin typeface="Calibri" pitchFamily="34" charset="0"/>
+                <a:ea typeface="Calibri" pitchFamily="34" charset="-122"/>
+                <a:cs typeface="Calibri" pitchFamily="34" charset="-120"/>
+              </a:rPr>
+              <a:t>Offshore EGS teams engaged</a:t>
+            </a:r>
+            <a:endParaRPr lang="en-US" sz="1400" dirty="0"/>
+          </a:p>
+        </p:txBody>
+      </p:sp>
+      <p:sp>
+        <p:nvSpPr>
+          <p:cNvPr id="19" name="Shape 17"/>
+          <p:cNvSpPr/>
+          <p:nvPr/>
+        </p:nvSpPr>
+        <p:spPr>
+          <a:xfrm>
+            <a:off x="6675120" y="3749040"/>
+            <a:ext cx="274320" cy="274320"/>
+          </a:xfrm>
+          <a:prstGeom prst="ellipse">
             <a:avLst/>
           </a:prstGeom>
           <a:solidFill>
@@ -1807,86 +3770,323 @@
       </p:sp>
       <p:sp>
         <p:nvSpPr>
-          <p:cNvPr id="22" name="RightLabel"/>
-          <p:cNvSpPr/>
-          <p:nvPr/>
-        </p:nvSpPr>
-        <p:spPr>
-          <a:xfrm>
-            <a:off x="6446320" y="2200000"/>
-            <a:ext cx="4900000" cy="280000"/>
-          </a:xfrm>
-          <a:prstGeom prst="rect">
-            <a:avLst/>
-          </a:prstGeom>
-          <a:noFill/>
-          <a:ln/>
-        </p:spPr>
-        <p:txBody>
-          <a:bodyPr wrap="square" lIns="0" tIns="0" rIns="0" bIns="0" rtlCol="0" anchor="ctr"/>
-          <a:lstStyle/>
-          <a:p>
-            <a:pPr marL="0" indent="0">
-              <a:buNone/>
-            </a:pPr>
-            <a:r>
-              <a:rPr lang="en-US" sz="1000" b="1" kern="0" spc="500" dirty="0">
+          <p:cNvPr id="20" name="Text 18"/>
+          <p:cNvSpPr/>
+          <p:nvPr/>
+        </p:nvSpPr>
+        <p:spPr>
+          <a:xfrm>
+            <a:off x="7178040" y="3749040"/>
+            <a:ext cx="1371600" cy="274320"/>
+          </a:xfrm>
+          <a:prstGeom prst="rect">
+            <a:avLst/>
+          </a:prstGeom>
+          <a:noFill/>
+          <a:ln/>
+        </p:spPr>
+        <p:txBody>
+          <a:bodyPr wrap="square" lIns="0" tIns="0" rIns="0" bIns="0" rtlCol="0" anchor="ctr"/>
+          <a:lstStyle/>
+          <a:p>
+            <a:pPr marL="0" indent="0">
+              <a:buNone/>
+            </a:pPr>
+            <a:r>
+              <a:rPr lang="en-US" sz="1100" b="1" dirty="0">
+                <a:solidFill>
+                  <a:srgbClr val="8A8A8A"/>
+                </a:solidFill>
+                <a:latin typeface="Calibri" pitchFamily="34" charset="0"/>
+                <a:ea typeface="Calibri" pitchFamily="34" charset="-122"/>
+                <a:cs typeface="Calibri" pitchFamily="34" charset="-120"/>
+              </a:rPr>
+              <a:t>2:15 AM ET</a:t>
+            </a:r>
+            <a:endParaRPr lang="en-US" sz="1100" dirty="0"/>
+          </a:p>
+        </p:txBody>
+      </p:sp>
+      <p:sp>
+        <p:nvSpPr>
+          <p:cNvPr id="21" name="Text 19"/>
+          <p:cNvSpPr/>
+          <p:nvPr/>
+        </p:nvSpPr>
+        <p:spPr>
+          <a:xfrm>
+            <a:off x="8595360" y="3749040"/>
+            <a:ext cx="3474720" cy="274320"/>
+          </a:xfrm>
+          <a:prstGeom prst="rect">
+            <a:avLst/>
+          </a:prstGeom>
+          <a:noFill/>
+          <a:ln/>
+        </p:spPr>
+        <p:txBody>
+          <a:bodyPr wrap="square" lIns="0" tIns="0" rIns="0" bIns="0" rtlCol="0" anchor="ctr"/>
+          <a:lstStyle/>
+          <a:p>
+            <a:pPr marL="0" indent="0">
+              <a:buNone/>
+            </a:pPr>
+            <a:r>
+              <a:rPr lang="en-US" sz="1400" b="1" dirty="0">
                 <a:solidFill>
                   <a:srgbClr val="D71E28"/>
                 </a:solidFill>
                 <a:latin typeface="Calibri" pitchFamily="34" charset="0"/>
-              </a:rPr>
-              <a:t>THIS PILOT  ·  ETL INCIDENT DIAGNOSIS</a:t>
-            </a:r>
-          </a:p>
-        </p:txBody>
-      </p:sp>
-      <p:sp>
-        <p:nvSpPr>
-          <p:cNvPr id="23" name="RightHead"/>
-          <p:cNvSpPr/>
-          <p:nvPr/>
-        </p:nvSpPr>
-        <p:spPr>
-          <a:xfrm>
-            <a:off x="6446320" y="2500000"/>
-            <a:ext cx="4900000" cy="380000"/>
-          </a:xfrm>
-          <a:prstGeom prst="rect">
-            <a:avLst/>
-          </a:prstGeom>
-          <a:noFill/>
-          <a:ln/>
-        </p:spPr>
-        <p:txBody>
-          <a:bodyPr wrap="square" lIns="0" tIns="0" rIns="0" bIns="0" rtlCol="0" anchor="ctr"/>
-          <a:lstStyle/>
-          <a:p>
-            <a:pPr marL="0" indent="0">
-              <a:buNone/>
-            </a:pPr>
-            <a:r>
-              <a:rPr lang="en-US" sz="1800" b="1" dirty="0">
+                <a:ea typeface="Calibri" pitchFamily="34" charset="-122"/>
+                <a:cs typeface="Calibri" pitchFamily="34" charset="-120"/>
+              </a:rPr>
+              <a:t>Blocked by SAR access</a:t>
+            </a:r>
+            <a:endParaRPr lang="en-US" sz="1400" dirty="0"/>
+          </a:p>
+        </p:txBody>
+      </p:sp>
+      <p:sp>
+        <p:nvSpPr>
+          <p:cNvPr id="22" name="Shape 20"/>
+          <p:cNvSpPr/>
+          <p:nvPr/>
+        </p:nvSpPr>
+        <p:spPr>
+          <a:xfrm>
+            <a:off x="6675120" y="4389120"/>
+            <a:ext cx="274320" cy="274320"/>
+          </a:xfrm>
+          <a:prstGeom prst="ellipse">
+            <a:avLst/>
+          </a:prstGeom>
+          <a:solidFill>
+            <a:srgbClr val="D71E28"/>
+          </a:solidFill>
+          <a:ln w="12700">
+            <a:solidFill>
+              <a:srgbClr val="D71E28"/>
+            </a:solidFill>
+            <a:prstDash val="solid"/>
+          </a:ln>
+        </p:spPr>
+      </p:sp>
+      <p:sp>
+        <p:nvSpPr>
+          <p:cNvPr id="23" name="Text 21"/>
+          <p:cNvSpPr/>
+          <p:nvPr/>
+        </p:nvSpPr>
+        <p:spPr>
+          <a:xfrm>
+            <a:off x="7178040" y="4389120"/>
+            <a:ext cx="1371600" cy="274320"/>
+          </a:xfrm>
+          <a:prstGeom prst="rect">
+            <a:avLst/>
+          </a:prstGeom>
+          <a:noFill/>
+          <a:ln/>
+        </p:spPr>
+        <p:txBody>
+          <a:bodyPr wrap="square" lIns="0" tIns="0" rIns="0" bIns="0" rtlCol="0" anchor="ctr"/>
+          <a:lstStyle/>
+          <a:p>
+            <a:pPr marL="0" indent="0">
+              <a:buNone/>
+            </a:pPr>
+            <a:r>
+              <a:rPr lang="en-US" sz="1100" b="1" dirty="0">
+                <a:solidFill>
+                  <a:srgbClr val="8A8A8A"/>
+                </a:solidFill>
+                <a:latin typeface="Calibri" pitchFamily="34" charset="0"/>
+                <a:ea typeface="Calibri" pitchFamily="34" charset="-122"/>
+                <a:cs typeface="Calibri" pitchFamily="34" charset="-120"/>
+              </a:rPr>
+              <a:t>9:00 AM ET</a:t>
+            </a:r>
+            <a:endParaRPr lang="en-US" sz="1100" dirty="0"/>
+          </a:p>
+        </p:txBody>
+      </p:sp>
+      <p:sp>
+        <p:nvSpPr>
+          <p:cNvPr id="24" name="Text 22"/>
+          <p:cNvSpPr/>
+          <p:nvPr/>
+        </p:nvSpPr>
+        <p:spPr>
+          <a:xfrm>
+            <a:off x="8595360" y="4389120"/>
+            <a:ext cx="3474720" cy="274320"/>
+          </a:xfrm>
+          <a:prstGeom prst="rect">
+            <a:avLst/>
+          </a:prstGeom>
+          <a:noFill/>
+          <a:ln/>
+        </p:spPr>
+        <p:txBody>
+          <a:bodyPr wrap="square" lIns="0" tIns="0" rIns="0" bIns="0" rtlCol="0" anchor="ctr"/>
+          <a:lstStyle/>
+          <a:p>
+            <a:pPr marL="0" indent="0">
+              <a:buNone/>
+            </a:pPr>
+            <a:r>
+              <a:rPr lang="en-US" sz="1400" b="1" dirty="0">
+                <a:solidFill>
+                  <a:srgbClr val="D71E28"/>
+                </a:solidFill>
+                <a:latin typeface="Calibri" pitchFamily="34" charset="0"/>
+                <a:ea typeface="Calibri" pitchFamily="34" charset="-122"/>
+                <a:cs typeface="Calibri" pitchFamily="34" charset="-120"/>
+              </a:rPr>
+              <a:t>US teams come online</a:t>
+            </a:r>
+            <a:endParaRPr lang="en-US" sz="1400" dirty="0"/>
+          </a:p>
+        </p:txBody>
+      </p:sp>
+      <p:sp>
+        <p:nvSpPr>
+          <p:cNvPr id="25" name="Shape 23"/>
+          <p:cNvSpPr/>
+          <p:nvPr/>
+        </p:nvSpPr>
+        <p:spPr>
+          <a:xfrm>
+            <a:off x="6675120" y="5029200"/>
+            <a:ext cx="274320" cy="274320"/>
+          </a:xfrm>
+          <a:prstGeom prst="ellipse">
+            <a:avLst/>
+          </a:prstGeom>
+          <a:solidFill>
+            <a:srgbClr val="FFCD41"/>
+          </a:solidFill>
+          <a:ln w="12700">
+            <a:solidFill>
+              <a:srgbClr val="FFCD41"/>
+            </a:solidFill>
+            <a:prstDash val="solid"/>
+          </a:ln>
+        </p:spPr>
+      </p:sp>
+      <p:sp>
+        <p:nvSpPr>
+          <p:cNvPr id="26" name="Text 24"/>
+          <p:cNvSpPr/>
+          <p:nvPr/>
+        </p:nvSpPr>
+        <p:spPr>
+          <a:xfrm>
+            <a:off x="7178040" y="5029200"/>
+            <a:ext cx="1371600" cy="274320"/>
+          </a:xfrm>
+          <a:prstGeom prst="rect">
+            <a:avLst/>
+          </a:prstGeom>
+          <a:noFill/>
+          <a:ln/>
+        </p:spPr>
+        <p:txBody>
+          <a:bodyPr wrap="square" lIns="0" tIns="0" rIns="0" bIns="0" rtlCol="0" anchor="ctr"/>
+          <a:lstStyle/>
+          <a:p>
+            <a:pPr marL="0" indent="0">
+              <a:buNone/>
+            </a:pPr>
+            <a:r>
+              <a:rPr lang="en-US" sz="1100" b="1" dirty="0">
+                <a:solidFill>
+                  <a:srgbClr val="8A8A8A"/>
+                </a:solidFill>
+                <a:latin typeface="Calibri" pitchFamily="34" charset="0"/>
+                <a:ea typeface="Calibri" pitchFamily="34" charset="-122"/>
+                <a:cs typeface="Calibri" pitchFamily="34" charset="-120"/>
+              </a:rPr>
+              <a:t>11:00 AM ET</a:t>
+            </a:r>
+            <a:endParaRPr lang="en-US" sz="1100" dirty="0"/>
+          </a:p>
+        </p:txBody>
+      </p:sp>
+      <p:sp>
+        <p:nvSpPr>
+          <p:cNvPr id="27" name="Text 25"/>
+          <p:cNvSpPr/>
+          <p:nvPr/>
+        </p:nvSpPr>
+        <p:spPr>
+          <a:xfrm>
+            <a:off x="8595360" y="5029200"/>
+            <a:ext cx="3474720" cy="274320"/>
+          </a:xfrm>
+          <a:prstGeom prst="rect">
+            <a:avLst/>
+          </a:prstGeom>
+          <a:noFill/>
+          <a:ln/>
+        </p:spPr>
+        <p:txBody>
+          <a:bodyPr wrap="square" lIns="0" tIns="0" rIns="0" bIns="0" rtlCol="0" anchor="ctr"/>
+          <a:lstStyle/>
+          <a:p>
+            <a:pPr marL="0" indent="0">
+              <a:buNone/>
+            </a:pPr>
+            <a:r>
+              <a:rPr lang="en-US" sz="1400" dirty="0">
                 <a:solidFill>
                   <a:srgbClr val="1B1B1B"/>
                 </a:solidFill>
                 <a:latin typeface="Calibri" pitchFamily="34" charset="0"/>
-              </a:rPr>
-              <a:t>A concrete production-monitoring starting point.</a:t>
-            </a:r>
-          </a:p>
-        </p:txBody>
-      </p:sp>
-      <p:sp>
-        <p:nvSpPr>
-          <p:cNvPr id="24" name="RightAddrLabel"/>
-          <p:cNvSpPr/>
-          <p:nvPr/>
-        </p:nvSpPr>
-        <p:spPr>
-          <a:xfrm>
-            <a:off x="6446320" y="3000000"/>
-            <a:ext cx="4900000" cy="260000"/>
+                <a:ea typeface="Calibri" pitchFamily="34" charset="-122"/>
+                <a:cs typeface="Calibri" pitchFamily="34" charset="-120"/>
+              </a:rPr>
+              <a:t>Investigation begins/support teams engaged</a:t>
+            </a:r>
+            <a:endParaRPr lang="en-US" sz="1400" dirty="0"/>
+          </a:p>
+        </p:txBody>
+      </p:sp>
+      <p:sp>
+        <p:nvSpPr>
+          <p:cNvPr id="28" name="Shape 26"/>
+          <p:cNvSpPr/>
+          <p:nvPr/>
+        </p:nvSpPr>
+        <p:spPr>
+          <a:xfrm>
+            <a:off x="6675120" y="5669280"/>
+            <a:ext cx="274320" cy="274320"/>
+          </a:xfrm>
+          <a:prstGeom prst="ellipse">
+            <a:avLst/>
+          </a:prstGeom>
+          <a:solidFill>
+            <a:srgbClr val="FFCD41"/>
+          </a:solidFill>
+          <a:ln w="12700">
+            <a:solidFill>
+              <a:srgbClr val="FFCD41"/>
+            </a:solidFill>
+            <a:prstDash val="solid"/>
+          </a:ln>
+        </p:spPr>
+      </p:sp>
+      <p:sp>
+        <p:nvSpPr>
+          <p:cNvPr id="29" name="Text 27"/>
+          <p:cNvSpPr/>
+          <p:nvPr/>
+        </p:nvSpPr>
+        <p:spPr>
+          <a:xfrm>
+            <a:off x="7178040" y="5669280"/>
+            <a:ext cx="1371600" cy="274320"/>
           </a:xfrm>
           <a:prstGeom prst="rect">
             <a:avLst/>
@@ -1904,178 +4104,54 @@
             <a:r>
               <a:rPr lang="en-US" sz="1100" b="1" dirty="0">
                 <a:solidFill>
+                  <a:srgbClr val="8A8A8A"/>
+                </a:solidFill>
+                <a:latin typeface="Calibri" pitchFamily="34" charset="0"/>
+                <a:ea typeface="Calibri" pitchFamily="34" charset="-122"/>
+                <a:cs typeface="Calibri" pitchFamily="34" charset="-120"/>
+              </a:rPr>
+              <a:t>12:00 PM ET</a:t>
+            </a:r>
+            <a:endParaRPr lang="en-US" sz="1100" dirty="0"/>
+          </a:p>
+        </p:txBody>
+      </p:sp>
+      <p:sp>
+        <p:nvSpPr>
+          <p:cNvPr id="30" name="Text 28"/>
+          <p:cNvSpPr/>
+          <p:nvPr/>
+        </p:nvSpPr>
+        <p:spPr>
+          <a:xfrm>
+            <a:off x="8595360" y="5669280"/>
+            <a:ext cx="3474720" cy="274320"/>
+          </a:xfrm>
+          <a:prstGeom prst="rect">
+            <a:avLst/>
+          </a:prstGeom>
+          <a:noFill/>
+          <a:ln/>
+        </p:spPr>
+        <p:txBody>
+          <a:bodyPr wrap="square" lIns="0" tIns="0" rIns="0" bIns="0" rtlCol="0" anchor="ctr"/>
+          <a:lstStyle/>
+          <a:p>
+            <a:pPr marL="0" indent="0">
+              <a:buNone/>
+            </a:pPr>
+            <a:r>
+              <a:rPr lang="en-US" sz="1400" dirty="0">
+                <a:solidFill>
                   <a:srgbClr val="1B1B1B"/>
                 </a:solidFill>
                 <a:latin typeface="Calibri" pitchFamily="34" charset="0"/>
-              </a:rPr>
-              <a:t>What this pilot directly addresses</a:t>
-            </a:r>
-          </a:p>
-        </p:txBody>
-      </p:sp>
-      <p:sp>
-        <p:nvSpPr>
-          <p:cNvPr id="25" name="RightAddrBody"/>
-          <p:cNvSpPr/>
-          <p:nvPr/>
-        </p:nvSpPr>
-        <p:spPr>
-          <a:xfrm>
-            <a:off x="6446320" y="3260000"/>
-            <a:ext cx="4900000" cy="1300000"/>
-          </a:xfrm>
-          <a:prstGeom prst="rect">
-            <a:avLst/>
-          </a:prstGeom>
-          <a:noFill/>
-          <a:ln/>
-        </p:spPr>
-        <p:txBody>
-          <a:bodyPr wrap="square" lIns="0" tIns="0" rIns="0" bIns="0" rtlCol="0" anchor="t"/>
-          <a:lstStyle/>
-          <a:p>
-            <a:pPr marL="160020" indent="-160020">
-              <a:buFont typeface="Arial" panose="020B0604020202020204" pitchFamily="34" charset="0"/>
-              <a:buChar char="•"/>
-            </a:pPr>
-            <a:r>
-              <a:rPr lang="en-US" sz="1200" b="1" dirty="0">
-                <a:solidFill>
-                  <a:srgbClr val="1B1B1B"/>
-                </a:solidFill>
-                <a:latin typeface="Calibri" pitchFamily="34" charset="0"/>
-              </a:rPr>
-              <a:t>Automated diagnosis </a:t>
-            </a:r>
-            <a:r>
-              <a:rPr lang="en-US" sz="1200" dirty="0">
-                <a:solidFill>
-                  <a:srgbClr val="4A4A4A"/>
-                </a:solidFill>
-                <a:latin typeface="Calibri" pitchFamily="34" charset="0"/>
-              </a:rPr>
-              <a:t>instead of alert flooding for ETL job failures.</a:t>
-            </a:r>
-          </a:p>
-          <a:p>
-            <a:pPr marL="160020" indent="-160020">
-              <a:buFont typeface="Arial" panose="020B0604020202020204" pitchFamily="34" charset="0"/>
-              <a:buChar char="•"/>
-            </a:pPr>
-            <a:r>
-              <a:rPr lang="en-US" sz="1200" b="1" dirty="0">
-                <a:solidFill>
-                  <a:srgbClr val="1B1B1B"/>
-                </a:solidFill>
-                <a:latin typeface="Calibri" pitchFamily="34" charset="0"/>
-              </a:rPr>
-              <a:t>Correlation across lineage </a:t>
-            </a:r>
-            <a:r>
-              <a:rPr lang="en-US" sz="1200" dirty="0">
-                <a:solidFill>
-                  <a:srgbClr val="4A4A4A"/>
-                </a:solidFill>
-                <a:latin typeface="Calibri" pitchFamily="34" charset="0"/>
-              </a:rPr>
-              <a:t>by reading ServiceNow, Autosys, SSISDB, and SSIS source together.</a:t>
-            </a:r>
-          </a:p>
-          <a:p>
-            <a:pPr marL="160020" indent="-160020">
-              <a:buFont typeface="Arial" panose="020B0604020202020204" pitchFamily="34" charset="0"/>
-              <a:buChar char="•"/>
-            </a:pPr>
-            <a:r>
-              <a:rPr lang="en-US" sz="1200" b="1" dirty="0">
-                <a:solidFill>
-                  <a:srgbClr val="1B1B1B"/>
-                </a:solidFill>
-                <a:latin typeface="Calibri" pitchFamily="34" charset="0"/>
-              </a:rPr>
-              <a:t>Reduced MTTD and MTTR </a:t>
-            </a:r>
-            <a:r>
-              <a:rPr lang="en-US" sz="1200" dirty="0">
-                <a:solidFill>
-                  <a:srgbClr val="4A4A4A"/>
-                </a:solidFill>
-                <a:latin typeface="Calibri" pitchFamily="34" charset="0"/>
-              </a:rPr>
-              <a:t>— from up to 10 hours of cross-region waits to 15 minutes of automated diagnosis.</a:t>
-            </a:r>
-          </a:p>
-        </p:txBody>
-      </p:sp>
-      <p:sp>
-        <p:nvSpPr>
-          <p:cNvPr id="26" name="RightProveLabel"/>
-          <p:cNvSpPr/>
-          <p:nvPr/>
-        </p:nvSpPr>
-        <p:spPr>
-          <a:xfrm>
-            <a:off x="6446320" y="4750000"/>
-            <a:ext cx="4900000" cy="260000"/>
-          </a:xfrm>
-          <a:prstGeom prst="rect">
-            <a:avLst/>
-          </a:prstGeom>
-          <a:noFill/>
-          <a:ln/>
-        </p:spPr>
-        <p:txBody>
-          <a:bodyPr wrap="square" lIns="0" tIns="0" rIns="0" bIns="0" rtlCol="0" anchor="ctr"/>
-          <a:lstStyle/>
-          <a:p>
-            <a:pPr marL="0" indent="0">
-              <a:buNone/>
-            </a:pPr>
-            <a:r>
-              <a:rPr lang="en-US" sz="1100" b="1" dirty="0">
-                <a:solidFill>
-                  <a:srgbClr val="1B1B1B"/>
-                </a:solidFill>
-                <a:latin typeface="Calibri" pitchFamily="34" charset="0"/>
-              </a:rPr>
-              <a:t>Why start here</a:t>
-            </a:r>
-          </a:p>
-        </p:txBody>
-      </p:sp>
-      <p:sp>
-        <p:nvSpPr>
-          <p:cNvPr id="27" name="RightProveBody"/>
-          <p:cNvSpPr/>
-          <p:nvPr/>
-        </p:nvSpPr>
-        <p:spPr>
-          <a:xfrm>
-            <a:off x="6446320" y="5010000"/>
-            <a:ext cx="4900000" cy="900000"/>
-          </a:xfrm>
-          <a:prstGeom prst="rect">
-            <a:avLst/>
-          </a:prstGeom>
-          <a:noFill/>
-          <a:ln/>
-        </p:spPr>
-        <p:txBody>
-          <a:bodyPr wrap="square" lIns="0" tIns="0" rIns="0" bIns="0" rtlCol="0" anchor="t"/>
-          <a:lstStyle/>
-          <a:p>
-            <a:pPr marL="0" indent="0">
-              <a:buNone/>
-            </a:pPr>
-            <a:r>
-              <a:rPr lang="en-US" sz="1200" dirty="0">
-                <a:solidFill>
-                  <a:srgbClr val="4A4A4A"/>
-                </a:solidFill>
-                <a:latin typeface="Calibri" pitchFamily="34" charset="0"/>
-              </a:rPr>
-              <a:t>Nightly ETL failures are a high-frequency, high-pain pattern with clear MTTD/MTTR baselines  —  the ideal proving ground for context-aware, lineage-driven monitoring before expanding scope.</a:t>
-            </a:r>
+                <a:ea typeface="Calibri" pitchFamily="34" charset="-122"/>
+                <a:cs typeface="Calibri" pitchFamily="34" charset="-120"/>
+              </a:rPr>
+              <a:t>Diagnosis complete</a:t>
+            </a:r>
+            <a:endParaRPr lang="en-US" sz="1400" dirty="0"/>
           </a:p>
         </p:txBody>
       </p:sp>
@@ -2088,1119 +4164,6 @@
 </file>
 
 <file path=ppt/slides/slide3.xml><?xml version="1.0" encoding="utf-8"?>
-<p:sld xmlns:a="http://schemas.openxmlformats.org/drawingml/2006/main" xmlns:r="http://schemas.openxmlformats.org/officeDocument/2006/relationships" xmlns:p="http://schemas.openxmlformats.org/presentationml/2006/main">
-  <p:cSld name="Slide 2">
-    <p:bg>
-      <p:bgPr>
-        <a:solidFill>
-          <a:srgbClr val="FFFFFF"/>
-        </a:solidFill>
-        <a:effectLst/>
-      </p:bgPr>
-    </p:bg>
-    <p:spTree>
-      <p:nvGrpSpPr>
-        <p:cNvPr id="1" name=""/>
-        <p:cNvGrpSpPr/>
-        <p:nvPr/>
-      </p:nvGrpSpPr>
-      <p:grpSpPr>
-        <a:xfrm>
-          <a:off x="0" y="0"/>
-          <a:ext cx="0" cy="0"/>
-          <a:chOff x="0" y="0"/>
-          <a:chExt cx="0" cy="0"/>
-        </a:xfrm>
-      </p:grpSpPr>
-      <p:sp>
-        <p:nvSpPr>
-          <p:cNvPr id="2" name="Shape 0"/>
-          <p:cNvSpPr/>
-          <p:nvPr/>
-        </p:nvSpPr>
-        <p:spPr>
-          <a:xfrm>
-            <a:off x="0" y="0"/>
-            <a:ext cx="12161520" cy="164592"/>
-          </a:xfrm>
-          <a:prstGeom prst="rect">
-            <a:avLst/>
-          </a:prstGeom>
-          <a:solidFill>
-            <a:srgbClr val="D71E28"/>
-          </a:solidFill>
-          <a:ln w="12700">
-            <a:solidFill>
-              <a:srgbClr val="D71E28"/>
-            </a:solidFill>
-            <a:prstDash val="solid"/>
-          </a:ln>
-        </p:spPr>
-      </p:sp>
-      <p:sp>
-        <p:nvSpPr>
-          <p:cNvPr id="3" name="Text 1"/>
-          <p:cNvSpPr/>
-          <p:nvPr/>
-        </p:nvSpPr>
-        <p:spPr>
-          <a:xfrm>
-            <a:off x="731520" y="502920"/>
-            <a:ext cx="10058400" cy="320040"/>
-          </a:xfrm>
-          <a:prstGeom prst="rect">
-            <a:avLst/>
-          </a:prstGeom>
-          <a:noFill/>
-          <a:ln/>
-        </p:spPr>
-        <p:txBody>
-          <a:bodyPr wrap="square" lIns="0" tIns="0" rIns="0" bIns="0" rtlCol="0" anchor="ctr"/>
-          <a:lstStyle/>
-          <a:p>
-            <a:pPr marL="0" indent="0">
-              <a:buNone/>
-            </a:pPr>
-            <a:r>
-              <a:rPr lang="en-US" sz="1100" b="1" kern="0" spc="600" dirty="0">
-                <a:solidFill>
-                  <a:srgbClr val="D71E28"/>
-                </a:solidFill>
-                <a:latin typeface="Calibri" pitchFamily="34" charset="0"/>
-                <a:ea typeface="Calibri" pitchFamily="34" charset="-122"/>
-                <a:cs typeface="Calibri" pitchFamily="34" charset="-120"/>
-              </a:rPr>
-              <a:t>THE PROBLEM</a:t>
-            </a:r>
-            <a:endParaRPr lang="en-US" sz="1100" dirty="0"/>
-          </a:p>
-        </p:txBody>
-      </p:sp>
-      <p:sp>
-        <p:nvSpPr>
-          <p:cNvPr id="4" name="Text 2"/>
-          <p:cNvSpPr/>
-          <p:nvPr/>
-        </p:nvSpPr>
-        <p:spPr>
-          <a:xfrm>
-            <a:off x="731520" y="914400"/>
-            <a:ext cx="10698480" cy="914400"/>
-          </a:xfrm>
-          <a:prstGeom prst="rect">
-            <a:avLst/>
-          </a:prstGeom>
-          <a:noFill/>
-          <a:ln/>
-        </p:spPr>
-        <p:txBody>
-          <a:bodyPr wrap="square" lIns="0" tIns="0" rIns="0" bIns="0" rtlCol="0" anchor="ctr"/>
-          <a:lstStyle/>
-          <a:p>
-            <a:pPr marL="0" indent="0">
-              <a:buNone/>
-            </a:pPr>
-            <a:r>
-              <a:rPr lang="en-US" sz="3600" b="1" dirty="0">
-                <a:solidFill>
-                  <a:srgbClr val="1B1B1B"/>
-                </a:solidFill>
-                <a:latin typeface="Calibri" pitchFamily="34" charset="0"/>
-                <a:ea typeface="Calibri" pitchFamily="34" charset="-122"/>
-                <a:cs typeface="Calibri" pitchFamily="34" charset="-120"/>
-              </a:rPr>
-              <a:t>Nightly job failures hit hardest at 2 AM.</a:t>
-            </a:r>
-            <a:endParaRPr lang="en-US" sz="3600" dirty="0"/>
-          </a:p>
-        </p:txBody>
-      </p:sp>
-      <p:sp>
-        <p:nvSpPr>
-          <p:cNvPr id="5" name="Text 3"/>
-          <p:cNvSpPr/>
-          <p:nvPr/>
-        </p:nvSpPr>
-        <p:spPr>
-          <a:xfrm>
-            <a:off x="10789920" y="6400800"/>
-            <a:ext cx="822960" cy="274320"/>
-          </a:xfrm>
-          <a:prstGeom prst="rect">
-            <a:avLst/>
-          </a:prstGeom>
-          <a:noFill/>
-          <a:ln/>
-        </p:spPr>
-        <p:txBody>
-          <a:bodyPr wrap="square" lIns="0" tIns="0" rIns="0" bIns="0" rtlCol="0" anchor="ctr"/>
-          <a:lstStyle/>
-          <a:p>
-            <a:pPr marL="0" indent="0" algn="r">
-              <a:buNone/>
-            </a:pPr>
-            <a:r>
-              <a:rPr lang="en-US" sz="900" dirty="0">
-                <a:solidFill>
-                  <a:srgbClr val="8A8A8A"/>
-                </a:solidFill>
-                <a:latin typeface="Calibri" pitchFamily="34" charset="0"/>
-                <a:ea typeface="Calibri" pitchFamily="34" charset="-122"/>
-                <a:cs typeface="Calibri" pitchFamily="34" charset="-120"/>
-              </a:rPr>
-              <a:t>3 / 8</a:t>
-            </a:r>
-            <a:endParaRPr lang="en-US" sz="900" dirty="0"/>
-          </a:p>
-        </p:txBody>
-      </p:sp>
-      <p:sp>
-        <p:nvSpPr>
-          <p:cNvPr id="6" name="Text 4"/>
-          <p:cNvSpPr/>
-          <p:nvPr/>
-        </p:nvSpPr>
-        <p:spPr>
-          <a:xfrm>
-            <a:off x="731520" y="2011680"/>
-            <a:ext cx="5212080" cy="457200"/>
-          </a:xfrm>
-          <a:prstGeom prst="rect">
-            <a:avLst/>
-          </a:prstGeom>
-          <a:noFill/>
-          <a:ln/>
-        </p:spPr>
-        <p:txBody>
-          <a:bodyPr wrap="square" lIns="0" tIns="0" rIns="0" bIns="0" rtlCol="0" anchor="ctr"/>
-          <a:lstStyle/>
-          <a:p>
-            <a:pPr marL="0" indent="0">
-              <a:buNone/>
-            </a:pPr>
-            <a:r>
-              <a:rPr lang="en-US" sz="1900" b="1" dirty="0">
-                <a:solidFill>
-                  <a:srgbClr val="1B1B1B"/>
-                </a:solidFill>
-                <a:latin typeface="Calibri" pitchFamily="34" charset="0"/>
-                <a:ea typeface="Calibri" pitchFamily="34" charset="-122"/>
-                <a:cs typeface="Calibri" pitchFamily="34" charset="-120"/>
-              </a:rPr>
-              <a:t>Jobs run nightly. They fail nightly.</a:t>
-            </a:r>
-            <a:endParaRPr lang="en-US" sz="1900" dirty="0"/>
-          </a:p>
-        </p:txBody>
-      </p:sp>
-      <p:sp>
-        <p:nvSpPr>
-          <p:cNvPr id="7" name="Text 5"/>
-          <p:cNvSpPr/>
-          <p:nvPr/>
-        </p:nvSpPr>
-        <p:spPr>
-          <a:xfrm>
-            <a:off x="731520" y="2606040"/>
-            <a:ext cx="5212080" cy="2286000"/>
-          </a:xfrm>
-          <a:prstGeom prst="rect">
-            <a:avLst/>
-          </a:prstGeom>
-          <a:noFill/>
-          <a:ln/>
-        </p:spPr>
-        <p:txBody>
-          <a:bodyPr wrap="square" lIns="0" tIns="0" rIns="0" bIns="0" rtlCol="0" anchor="ctr"/>
-          <a:lstStyle/>
-          <a:p>
-            <a:pPr marL="0" indent="0">
-              <a:spcAft>
-                <a:spcPts val="1000"/>
-              </a:spcAft>
-              <a:buNone/>
-            </a:pPr>
-            <a:r>
-              <a:rPr lang="en-US" sz="1400" dirty="0">
-                <a:solidFill>
-                  <a:srgbClr val="4A4A4A"/>
-                </a:solidFill>
-                <a:latin typeface="Calibri" pitchFamily="34" charset="0"/>
-                <a:ea typeface="Calibri" pitchFamily="34" charset="-122"/>
-                <a:cs typeface="Calibri" pitchFamily="34" charset="-120"/>
-              </a:rPr>
-              <a:t>EGS L2 production support teams in India are the first responders.</a:t>
-            </a:r>
-            <a:endParaRPr lang="en-US" sz="1400" dirty="0"/>
-          </a:p>
-          <a:p>
-            <a:pPr marL="0" indent="0">
-              <a:spcAft>
-                <a:spcPts val="1000"/>
-              </a:spcAft>
-              <a:buNone/>
-            </a:pPr>
-            <a:r>
-              <a:rPr lang="en-US" sz="1400" dirty="0">
-                <a:solidFill>
-                  <a:srgbClr val="4A4A4A"/>
-                </a:solidFill>
-                <a:latin typeface="Calibri" pitchFamily="34" charset="0"/>
-                <a:ea typeface="Calibri" pitchFamily="34" charset="-122"/>
-                <a:cs typeface="Calibri" pitchFamily="34" charset="-120"/>
-              </a:rPr>
-              <a:t>Most of our databases reside on SAR-restricted servers  —  accessible only from inside the US.</a:t>
-            </a:r>
-            <a:endParaRPr lang="en-US" sz="1400" dirty="0"/>
-          </a:p>
-          <a:p>
-            <a:pPr marL="0" indent="0">
-              <a:spcAft>
-                <a:spcPts val="1000"/>
-              </a:spcAft>
-              <a:buNone/>
-            </a:pPr>
-            <a:r>
-              <a:rPr lang="en-US" sz="1400" dirty="0">
-                <a:solidFill>
-                  <a:srgbClr val="4A4A4A"/>
-                </a:solidFill>
-                <a:latin typeface="Calibri" pitchFamily="34" charset="0"/>
-                <a:ea typeface="Calibri" pitchFamily="34" charset="-122"/>
-                <a:cs typeface="Calibri" pitchFamily="34" charset="-120"/>
-              </a:rPr>
-              <a:t>Investigation stalls until US teams come online  —  hours later.</a:t>
-            </a:r>
-            <a:endParaRPr lang="en-US" sz="1400" dirty="0"/>
-          </a:p>
-          <a:p>
-            <a:pPr marL="0" indent="0">
-              <a:spcAft>
-                <a:spcPts val="1000"/>
-              </a:spcAft>
-              <a:buNone/>
-            </a:pPr>
-            <a:r>
-              <a:rPr lang="en-US" sz="1400" dirty="0">
-                <a:solidFill>
-                  <a:srgbClr val="4A4A4A"/>
-                </a:solidFill>
-                <a:latin typeface="Calibri" pitchFamily="34" charset="0"/>
-                <a:ea typeface="Calibri" pitchFamily="34" charset="-122"/>
-                <a:cs typeface="Calibri" pitchFamily="34" charset="-120"/>
-              </a:rPr>
-              <a:t>Multiple engineers and various teams get pulled in to coordinate the resolution.</a:t>
-            </a:r>
-            <a:endParaRPr lang="en-US" sz="1400" dirty="0"/>
-          </a:p>
-        </p:txBody>
-      </p:sp>
-      <p:sp>
-        <p:nvSpPr>
-          <p:cNvPr id="8" name="Text 6"/>
-          <p:cNvSpPr/>
-          <p:nvPr/>
-        </p:nvSpPr>
-        <p:spPr>
-          <a:xfrm>
-            <a:off x="731520" y="5029200"/>
-            <a:ext cx="5212080" cy="320040"/>
-          </a:xfrm>
-          <a:prstGeom prst="rect">
-            <a:avLst/>
-          </a:prstGeom>
-          <a:noFill/>
-          <a:ln/>
-        </p:spPr>
-        <p:txBody>
-          <a:bodyPr wrap="square" lIns="0" tIns="0" rIns="0" bIns="0" rtlCol="0" anchor="ctr"/>
-          <a:lstStyle/>
-          <a:p>
-            <a:pPr marL="0" indent="0">
-              <a:buNone/>
-            </a:pPr>
-            <a:r>
-              <a:rPr lang="en-US" sz="1400" i="1" dirty="0">
-                <a:solidFill>
-                  <a:srgbClr val="8A8A8A"/>
-                </a:solidFill>
-                <a:latin typeface="Calibri" pitchFamily="34" charset="0"/>
-                <a:ea typeface="Calibri" pitchFamily="34" charset="-122"/>
-                <a:cs typeface="Calibri" pitchFamily="34" charset="-120"/>
-              </a:rPr>
-              <a:t>Up to</a:t>
-            </a:r>
-            <a:endParaRPr lang="en-US" sz="1400" dirty="0"/>
-          </a:p>
-        </p:txBody>
-      </p:sp>
-      <p:sp>
-        <p:nvSpPr>
-          <p:cNvPr id="9" name="Text 7"/>
-          <p:cNvSpPr/>
-          <p:nvPr/>
-        </p:nvSpPr>
-        <p:spPr>
-          <a:xfrm>
-            <a:off x="731520" y="5349240"/>
-            <a:ext cx="5212080" cy="868680"/>
-          </a:xfrm>
-          <a:prstGeom prst="rect">
-            <a:avLst/>
-          </a:prstGeom>
-          <a:noFill/>
-          <a:ln/>
-        </p:spPr>
-        <p:txBody>
-          <a:bodyPr wrap="square" lIns="0" tIns="0" rIns="0" bIns="0" rtlCol="0" anchor="ctr"/>
-          <a:lstStyle/>
-          <a:p>
-            <a:pPr marL="0" indent="0">
-              <a:buNone/>
-            </a:pPr>
-            <a:r>
-              <a:rPr lang="en-US" sz="5600" b="1" dirty="0">
-                <a:solidFill>
-                  <a:srgbClr val="D71E28"/>
-                </a:solidFill>
-                <a:latin typeface="Calibri" pitchFamily="34" charset="0"/>
-                <a:ea typeface="Calibri" pitchFamily="34" charset="-122"/>
-                <a:cs typeface="Calibri" pitchFamily="34" charset="-120"/>
-              </a:rPr>
-              <a:t>10 hours</a:t>
-            </a:r>
-            <a:endParaRPr lang="en-US" sz="5600" dirty="0"/>
-          </a:p>
-        </p:txBody>
-      </p:sp>
-      <p:sp>
-        <p:nvSpPr>
-          <p:cNvPr id="10" name="Text 8"/>
-          <p:cNvSpPr/>
-          <p:nvPr/>
-        </p:nvSpPr>
-        <p:spPr>
-          <a:xfrm>
-            <a:off x="731520" y="6080760"/>
-            <a:ext cx="5212080" cy="320040"/>
-          </a:xfrm>
-          <a:prstGeom prst="rect">
-            <a:avLst/>
-          </a:prstGeom>
-          <a:noFill/>
-          <a:ln/>
-        </p:spPr>
-        <p:txBody>
-          <a:bodyPr wrap="square" lIns="0" tIns="0" rIns="0" bIns="0" rtlCol="0" anchor="ctr"/>
-          <a:lstStyle/>
-          <a:p>
-            <a:pPr marL="0" indent="0">
-              <a:buNone/>
-            </a:pPr>
-            <a:r>
-              <a:rPr lang="en-US" sz="1200" i="1" dirty="0">
-                <a:solidFill>
-                  <a:srgbClr val="1B1B1B"/>
-                </a:solidFill>
-                <a:latin typeface="Calibri" pitchFamily="34" charset="0"/>
-                <a:ea typeface="Calibri" pitchFamily="34" charset="-122"/>
-                <a:cs typeface="Calibri" pitchFamily="34" charset="-120"/>
-              </a:rPr>
-              <a:t>on the worst incidents  —  before real debugging even begins.</a:t>
-            </a:r>
-            <a:endParaRPr lang="en-US" sz="1200" dirty="0"/>
-          </a:p>
-        </p:txBody>
-      </p:sp>
-      <p:sp>
-        <p:nvSpPr>
-          <p:cNvPr id="11" name="Text 9"/>
-          <p:cNvSpPr/>
-          <p:nvPr/>
-        </p:nvSpPr>
-        <p:spPr>
-          <a:xfrm>
-            <a:off x="6675120" y="2011680"/>
-            <a:ext cx="5029200" cy="274320"/>
-          </a:xfrm>
-          <a:prstGeom prst="rect">
-            <a:avLst/>
-          </a:prstGeom>
-          <a:noFill/>
-          <a:ln/>
-        </p:spPr>
-        <p:txBody>
-          <a:bodyPr wrap="square" lIns="0" tIns="0" rIns="0" bIns="0" rtlCol="0" anchor="ctr"/>
-          <a:lstStyle/>
-          <a:p>
-            <a:pPr marL="0" indent="0">
-              <a:buNone/>
-            </a:pPr>
-            <a:r>
-              <a:rPr lang="en-US" sz="1000" b="1" kern="0" spc="500" dirty="0">
-                <a:solidFill>
-                  <a:srgbClr val="8A8A8A"/>
-                </a:solidFill>
-                <a:latin typeface="Calibri" pitchFamily="34" charset="0"/>
-                <a:ea typeface="Calibri" pitchFamily="34" charset="-122"/>
-                <a:cs typeface="Calibri" pitchFamily="34" charset="-120"/>
-              </a:rPr>
-              <a:t>ANATOMY OF A NIGHTLY FAILURE</a:t>
-            </a:r>
-            <a:endParaRPr lang="en-US" sz="1000" dirty="0"/>
-          </a:p>
-        </p:txBody>
-      </p:sp>
-      <p:sp>
-        <p:nvSpPr>
-          <p:cNvPr id="12" name="Shape 10"/>
-          <p:cNvSpPr/>
-          <p:nvPr/>
-        </p:nvSpPr>
-        <p:spPr>
-          <a:xfrm>
-            <a:off x="6812280" y="2606040"/>
-            <a:ext cx="0" cy="3200400"/>
-          </a:xfrm>
-          <a:prstGeom prst="line">
-            <a:avLst/>
-          </a:prstGeom>
-          <a:noFill/>
-          <a:ln w="25400">
-            <a:solidFill>
-              <a:srgbClr val="E5E0D5"/>
-            </a:solidFill>
-            <a:prstDash val="solid"/>
-          </a:ln>
-        </p:spPr>
-      </p:sp>
-      <p:sp>
-        <p:nvSpPr>
-          <p:cNvPr id="13" name="Shape 11"/>
-          <p:cNvSpPr/>
-          <p:nvPr/>
-        </p:nvSpPr>
-        <p:spPr>
-          <a:xfrm>
-            <a:off x="6675120" y="2468880"/>
-            <a:ext cx="274320" cy="274320"/>
-          </a:xfrm>
-          <a:prstGeom prst="ellipse">
-            <a:avLst/>
-          </a:prstGeom>
-          <a:solidFill>
-            <a:srgbClr val="FFCD41"/>
-          </a:solidFill>
-          <a:ln w="12700">
-            <a:solidFill>
-              <a:srgbClr val="FFCD41"/>
-            </a:solidFill>
-            <a:prstDash val="solid"/>
-          </a:ln>
-        </p:spPr>
-      </p:sp>
-      <p:sp>
-        <p:nvSpPr>
-          <p:cNvPr id="14" name="Text 12"/>
-          <p:cNvSpPr/>
-          <p:nvPr/>
-        </p:nvSpPr>
-        <p:spPr>
-          <a:xfrm>
-            <a:off x="7178040" y="2468880"/>
-            <a:ext cx="1371600" cy="274320"/>
-          </a:xfrm>
-          <a:prstGeom prst="rect">
-            <a:avLst/>
-          </a:prstGeom>
-          <a:noFill/>
-          <a:ln/>
-        </p:spPr>
-        <p:txBody>
-          <a:bodyPr wrap="square" lIns="0" tIns="0" rIns="0" bIns="0" rtlCol="0" anchor="ctr"/>
-          <a:lstStyle/>
-          <a:p>
-            <a:pPr marL="0" indent="0">
-              <a:buNone/>
-            </a:pPr>
-            <a:r>
-              <a:rPr lang="en-US" sz="1100" b="1" dirty="0">
-                <a:solidFill>
-                  <a:srgbClr val="8A8A8A"/>
-                </a:solidFill>
-                <a:latin typeface="Calibri" pitchFamily="34" charset="0"/>
-                <a:ea typeface="Calibri" pitchFamily="34" charset="-122"/>
-                <a:cs typeface="Calibri" pitchFamily="34" charset="-120"/>
-              </a:rPr>
-              <a:t>2:00 AM ET</a:t>
-            </a:r>
-            <a:endParaRPr lang="en-US" sz="1100" dirty="0"/>
-          </a:p>
-        </p:txBody>
-      </p:sp>
-      <p:sp>
-        <p:nvSpPr>
-          <p:cNvPr id="15" name="Text 13"/>
-          <p:cNvSpPr/>
-          <p:nvPr/>
-        </p:nvSpPr>
-        <p:spPr>
-          <a:xfrm>
-            <a:off x="8595360" y="2468880"/>
-            <a:ext cx="3474720" cy="274320"/>
-          </a:xfrm>
-          <a:prstGeom prst="rect">
-            <a:avLst/>
-          </a:prstGeom>
-          <a:noFill/>
-          <a:ln/>
-        </p:spPr>
-        <p:txBody>
-          <a:bodyPr wrap="square" lIns="0" tIns="0" rIns="0" bIns="0" rtlCol="0" anchor="ctr"/>
-          <a:lstStyle/>
-          <a:p>
-            <a:pPr marL="0" indent="0">
-              <a:buNone/>
-            </a:pPr>
-            <a:r>
-              <a:rPr lang="en-US" sz="1400" dirty="0">
-                <a:solidFill>
-                  <a:srgbClr val="1B1B1B"/>
-                </a:solidFill>
-                <a:latin typeface="Calibri" pitchFamily="34" charset="0"/>
-                <a:ea typeface="Calibri" pitchFamily="34" charset="-122"/>
-                <a:cs typeface="Calibri" pitchFamily="34" charset="-120"/>
-              </a:rPr>
-              <a:t>Job fails/ INC Generated</a:t>
-            </a:r>
-            <a:endParaRPr lang="en-US" sz="1400" dirty="0"/>
-          </a:p>
-        </p:txBody>
-      </p:sp>
-      <p:sp>
-        <p:nvSpPr>
-          <p:cNvPr id="16" name="Shape 14"/>
-          <p:cNvSpPr/>
-          <p:nvPr/>
-        </p:nvSpPr>
-        <p:spPr>
-          <a:xfrm>
-            <a:off x="6675120" y="3108960"/>
-            <a:ext cx="274320" cy="274320"/>
-          </a:xfrm>
-          <a:prstGeom prst="ellipse">
-            <a:avLst/>
-          </a:prstGeom>
-          <a:solidFill>
-            <a:srgbClr val="FFCD41"/>
-          </a:solidFill>
-          <a:ln w="12700">
-            <a:solidFill>
-              <a:srgbClr val="FFCD41"/>
-            </a:solidFill>
-            <a:prstDash val="solid"/>
-          </a:ln>
-        </p:spPr>
-      </p:sp>
-      <p:sp>
-        <p:nvSpPr>
-          <p:cNvPr id="17" name="Text 15"/>
-          <p:cNvSpPr/>
-          <p:nvPr/>
-        </p:nvSpPr>
-        <p:spPr>
-          <a:xfrm>
-            <a:off x="7178040" y="3108960"/>
-            <a:ext cx="1371600" cy="274320"/>
-          </a:xfrm>
-          <a:prstGeom prst="rect">
-            <a:avLst/>
-          </a:prstGeom>
-          <a:noFill/>
-          <a:ln/>
-        </p:spPr>
-        <p:txBody>
-          <a:bodyPr wrap="square" lIns="0" tIns="0" rIns="0" bIns="0" rtlCol="0" anchor="ctr"/>
-          <a:lstStyle/>
-          <a:p>
-            <a:pPr marL="0" indent="0">
-              <a:buNone/>
-            </a:pPr>
-            <a:r>
-              <a:rPr lang="en-US" sz="1100" b="1" dirty="0">
-                <a:solidFill>
-                  <a:srgbClr val="8A8A8A"/>
-                </a:solidFill>
-                <a:latin typeface="Calibri" pitchFamily="34" charset="0"/>
-                <a:ea typeface="Calibri" pitchFamily="34" charset="-122"/>
-                <a:cs typeface="Calibri" pitchFamily="34" charset="-120"/>
-              </a:rPr>
-              <a:t>2:05 AM ET</a:t>
-            </a:r>
-            <a:endParaRPr lang="en-US" sz="1100" dirty="0"/>
-          </a:p>
-        </p:txBody>
-      </p:sp>
-      <p:sp>
-        <p:nvSpPr>
-          <p:cNvPr id="18" name="Text 16"/>
-          <p:cNvSpPr/>
-          <p:nvPr/>
-        </p:nvSpPr>
-        <p:spPr>
-          <a:xfrm>
-            <a:off x="8595360" y="3108960"/>
-            <a:ext cx="3474720" cy="274320"/>
-          </a:xfrm>
-          <a:prstGeom prst="rect">
-            <a:avLst/>
-          </a:prstGeom>
-          <a:noFill/>
-          <a:ln/>
-        </p:spPr>
-        <p:txBody>
-          <a:bodyPr wrap="square" lIns="0" tIns="0" rIns="0" bIns="0" rtlCol="0" anchor="ctr"/>
-          <a:lstStyle/>
-          <a:p>
-            <a:pPr marL="0" indent="0">
-              <a:buNone/>
-            </a:pPr>
-            <a:r>
-              <a:rPr lang="en-US" sz="1400" dirty="0">
-                <a:solidFill>
-                  <a:srgbClr val="1B1B1B"/>
-                </a:solidFill>
-                <a:latin typeface="Calibri" pitchFamily="34" charset="0"/>
-                <a:ea typeface="Calibri" pitchFamily="34" charset="-122"/>
-                <a:cs typeface="Calibri" pitchFamily="34" charset="-120"/>
-              </a:rPr>
-              <a:t>Offshore EGS teams engaged</a:t>
-            </a:r>
-            <a:endParaRPr lang="en-US" sz="1400" dirty="0"/>
-          </a:p>
-        </p:txBody>
-      </p:sp>
-      <p:sp>
-        <p:nvSpPr>
-          <p:cNvPr id="19" name="Shape 17"/>
-          <p:cNvSpPr/>
-          <p:nvPr/>
-        </p:nvSpPr>
-        <p:spPr>
-          <a:xfrm>
-            <a:off x="6675120" y="3749040"/>
-            <a:ext cx="274320" cy="274320"/>
-          </a:xfrm>
-          <a:prstGeom prst="ellipse">
-            <a:avLst/>
-          </a:prstGeom>
-          <a:solidFill>
-            <a:srgbClr val="D71E28"/>
-          </a:solidFill>
-          <a:ln w="12700">
-            <a:solidFill>
-              <a:srgbClr val="D71E28"/>
-            </a:solidFill>
-            <a:prstDash val="solid"/>
-          </a:ln>
-        </p:spPr>
-      </p:sp>
-      <p:sp>
-        <p:nvSpPr>
-          <p:cNvPr id="20" name="Text 18"/>
-          <p:cNvSpPr/>
-          <p:nvPr/>
-        </p:nvSpPr>
-        <p:spPr>
-          <a:xfrm>
-            <a:off x="7178040" y="3749040"/>
-            <a:ext cx="1371600" cy="274320"/>
-          </a:xfrm>
-          <a:prstGeom prst="rect">
-            <a:avLst/>
-          </a:prstGeom>
-          <a:noFill/>
-          <a:ln/>
-        </p:spPr>
-        <p:txBody>
-          <a:bodyPr wrap="square" lIns="0" tIns="0" rIns="0" bIns="0" rtlCol="0" anchor="ctr"/>
-          <a:lstStyle/>
-          <a:p>
-            <a:pPr marL="0" indent="0">
-              <a:buNone/>
-            </a:pPr>
-            <a:r>
-              <a:rPr lang="en-US" sz="1100" b="1" dirty="0">
-                <a:solidFill>
-                  <a:srgbClr val="8A8A8A"/>
-                </a:solidFill>
-                <a:latin typeface="Calibri" pitchFamily="34" charset="0"/>
-                <a:ea typeface="Calibri" pitchFamily="34" charset="-122"/>
-                <a:cs typeface="Calibri" pitchFamily="34" charset="-120"/>
-              </a:rPr>
-              <a:t>2:15 AM ET</a:t>
-            </a:r>
-            <a:endParaRPr lang="en-US" sz="1100" dirty="0"/>
-          </a:p>
-        </p:txBody>
-      </p:sp>
-      <p:sp>
-        <p:nvSpPr>
-          <p:cNvPr id="21" name="Text 19"/>
-          <p:cNvSpPr/>
-          <p:nvPr/>
-        </p:nvSpPr>
-        <p:spPr>
-          <a:xfrm>
-            <a:off x="8595360" y="3749040"/>
-            <a:ext cx="3474720" cy="274320"/>
-          </a:xfrm>
-          <a:prstGeom prst="rect">
-            <a:avLst/>
-          </a:prstGeom>
-          <a:noFill/>
-          <a:ln/>
-        </p:spPr>
-        <p:txBody>
-          <a:bodyPr wrap="square" lIns="0" tIns="0" rIns="0" bIns="0" rtlCol="0" anchor="ctr"/>
-          <a:lstStyle/>
-          <a:p>
-            <a:pPr marL="0" indent="0">
-              <a:buNone/>
-            </a:pPr>
-            <a:r>
-              <a:rPr lang="en-US" sz="1400" b="1" dirty="0">
-                <a:solidFill>
-                  <a:srgbClr val="D71E28"/>
-                </a:solidFill>
-                <a:latin typeface="Calibri" pitchFamily="34" charset="0"/>
-                <a:ea typeface="Calibri" pitchFamily="34" charset="-122"/>
-                <a:cs typeface="Calibri" pitchFamily="34" charset="-120"/>
-              </a:rPr>
-              <a:t>Blocked by SAR access</a:t>
-            </a:r>
-            <a:endParaRPr lang="en-US" sz="1400" dirty="0"/>
-          </a:p>
-        </p:txBody>
-      </p:sp>
-      <p:sp>
-        <p:nvSpPr>
-          <p:cNvPr id="22" name="Shape 20"/>
-          <p:cNvSpPr/>
-          <p:nvPr/>
-        </p:nvSpPr>
-        <p:spPr>
-          <a:xfrm>
-            <a:off x="6675120" y="4389120"/>
-            <a:ext cx="274320" cy="274320"/>
-          </a:xfrm>
-          <a:prstGeom prst="ellipse">
-            <a:avLst/>
-          </a:prstGeom>
-          <a:solidFill>
-            <a:srgbClr val="D71E28"/>
-          </a:solidFill>
-          <a:ln w="12700">
-            <a:solidFill>
-              <a:srgbClr val="D71E28"/>
-            </a:solidFill>
-            <a:prstDash val="solid"/>
-          </a:ln>
-        </p:spPr>
-      </p:sp>
-      <p:sp>
-        <p:nvSpPr>
-          <p:cNvPr id="23" name="Text 21"/>
-          <p:cNvSpPr/>
-          <p:nvPr/>
-        </p:nvSpPr>
-        <p:spPr>
-          <a:xfrm>
-            <a:off x="7178040" y="4389120"/>
-            <a:ext cx="1371600" cy="274320"/>
-          </a:xfrm>
-          <a:prstGeom prst="rect">
-            <a:avLst/>
-          </a:prstGeom>
-          <a:noFill/>
-          <a:ln/>
-        </p:spPr>
-        <p:txBody>
-          <a:bodyPr wrap="square" lIns="0" tIns="0" rIns="0" bIns="0" rtlCol="0" anchor="ctr"/>
-          <a:lstStyle/>
-          <a:p>
-            <a:pPr marL="0" indent="0">
-              <a:buNone/>
-            </a:pPr>
-            <a:r>
-              <a:rPr lang="en-US" sz="1100" b="1" dirty="0">
-                <a:solidFill>
-                  <a:srgbClr val="8A8A8A"/>
-                </a:solidFill>
-                <a:latin typeface="Calibri" pitchFamily="34" charset="0"/>
-                <a:ea typeface="Calibri" pitchFamily="34" charset="-122"/>
-                <a:cs typeface="Calibri" pitchFamily="34" charset="-120"/>
-              </a:rPr>
-              <a:t>9:00 AM ET</a:t>
-            </a:r>
-            <a:endParaRPr lang="en-US" sz="1100" dirty="0"/>
-          </a:p>
-        </p:txBody>
-      </p:sp>
-      <p:sp>
-        <p:nvSpPr>
-          <p:cNvPr id="24" name="Text 22"/>
-          <p:cNvSpPr/>
-          <p:nvPr/>
-        </p:nvSpPr>
-        <p:spPr>
-          <a:xfrm>
-            <a:off x="8595360" y="4389120"/>
-            <a:ext cx="3474720" cy="274320"/>
-          </a:xfrm>
-          <a:prstGeom prst="rect">
-            <a:avLst/>
-          </a:prstGeom>
-          <a:noFill/>
-          <a:ln/>
-        </p:spPr>
-        <p:txBody>
-          <a:bodyPr wrap="square" lIns="0" tIns="0" rIns="0" bIns="0" rtlCol="0" anchor="ctr"/>
-          <a:lstStyle/>
-          <a:p>
-            <a:pPr marL="0" indent="0">
-              <a:buNone/>
-            </a:pPr>
-            <a:r>
-              <a:rPr lang="en-US" sz="1400" b="1" dirty="0">
-                <a:solidFill>
-                  <a:srgbClr val="D71E28"/>
-                </a:solidFill>
-                <a:latin typeface="Calibri" pitchFamily="34" charset="0"/>
-                <a:ea typeface="Calibri" pitchFamily="34" charset="-122"/>
-                <a:cs typeface="Calibri" pitchFamily="34" charset="-120"/>
-              </a:rPr>
-              <a:t>US teams come online</a:t>
-            </a:r>
-            <a:endParaRPr lang="en-US" sz="1400" dirty="0"/>
-          </a:p>
-        </p:txBody>
-      </p:sp>
-      <p:sp>
-        <p:nvSpPr>
-          <p:cNvPr id="25" name="Shape 23"/>
-          <p:cNvSpPr/>
-          <p:nvPr/>
-        </p:nvSpPr>
-        <p:spPr>
-          <a:xfrm>
-            <a:off x="6675120" y="5029200"/>
-            <a:ext cx="274320" cy="274320"/>
-          </a:xfrm>
-          <a:prstGeom prst="ellipse">
-            <a:avLst/>
-          </a:prstGeom>
-          <a:solidFill>
-            <a:srgbClr val="FFCD41"/>
-          </a:solidFill>
-          <a:ln w="12700">
-            <a:solidFill>
-              <a:srgbClr val="FFCD41"/>
-            </a:solidFill>
-            <a:prstDash val="solid"/>
-          </a:ln>
-        </p:spPr>
-      </p:sp>
-      <p:sp>
-        <p:nvSpPr>
-          <p:cNvPr id="26" name="Text 24"/>
-          <p:cNvSpPr/>
-          <p:nvPr/>
-        </p:nvSpPr>
-        <p:spPr>
-          <a:xfrm>
-            <a:off x="7178040" y="5029200"/>
-            <a:ext cx="1371600" cy="274320"/>
-          </a:xfrm>
-          <a:prstGeom prst="rect">
-            <a:avLst/>
-          </a:prstGeom>
-          <a:noFill/>
-          <a:ln/>
-        </p:spPr>
-        <p:txBody>
-          <a:bodyPr wrap="square" lIns="0" tIns="0" rIns="0" bIns="0" rtlCol="0" anchor="ctr"/>
-          <a:lstStyle/>
-          <a:p>
-            <a:pPr marL="0" indent="0">
-              <a:buNone/>
-            </a:pPr>
-            <a:r>
-              <a:rPr lang="en-US" sz="1100" b="1" dirty="0">
-                <a:solidFill>
-                  <a:srgbClr val="8A8A8A"/>
-                </a:solidFill>
-                <a:latin typeface="Calibri" pitchFamily="34" charset="0"/>
-                <a:ea typeface="Calibri" pitchFamily="34" charset="-122"/>
-                <a:cs typeface="Calibri" pitchFamily="34" charset="-120"/>
-              </a:rPr>
-              <a:t>11:00 AM ET</a:t>
-            </a:r>
-            <a:endParaRPr lang="en-US" sz="1100" dirty="0"/>
-          </a:p>
-        </p:txBody>
-      </p:sp>
-      <p:sp>
-        <p:nvSpPr>
-          <p:cNvPr id="27" name="Text 25"/>
-          <p:cNvSpPr/>
-          <p:nvPr/>
-        </p:nvSpPr>
-        <p:spPr>
-          <a:xfrm>
-            <a:off x="8595360" y="5029200"/>
-            <a:ext cx="3474720" cy="274320"/>
-          </a:xfrm>
-          <a:prstGeom prst="rect">
-            <a:avLst/>
-          </a:prstGeom>
-          <a:noFill/>
-          <a:ln/>
-        </p:spPr>
-        <p:txBody>
-          <a:bodyPr wrap="square" lIns="0" tIns="0" rIns="0" bIns="0" rtlCol="0" anchor="ctr"/>
-          <a:lstStyle/>
-          <a:p>
-            <a:pPr marL="0" indent="0">
-              <a:buNone/>
-            </a:pPr>
-            <a:r>
-              <a:rPr lang="en-US" sz="1400" dirty="0">
-                <a:solidFill>
-                  <a:srgbClr val="1B1B1B"/>
-                </a:solidFill>
-                <a:latin typeface="Calibri" pitchFamily="34" charset="0"/>
-                <a:ea typeface="Calibri" pitchFamily="34" charset="-122"/>
-                <a:cs typeface="Calibri" pitchFamily="34" charset="-120"/>
-              </a:rPr>
-              <a:t>Investigation begins/support teams engaged</a:t>
-            </a:r>
-            <a:endParaRPr lang="en-US" sz="1400" dirty="0"/>
-          </a:p>
-        </p:txBody>
-      </p:sp>
-      <p:sp>
-        <p:nvSpPr>
-          <p:cNvPr id="28" name="Shape 26"/>
-          <p:cNvSpPr/>
-          <p:nvPr/>
-        </p:nvSpPr>
-        <p:spPr>
-          <a:xfrm>
-            <a:off x="6675120" y="5669280"/>
-            <a:ext cx="274320" cy="274320"/>
-          </a:xfrm>
-          <a:prstGeom prst="ellipse">
-            <a:avLst/>
-          </a:prstGeom>
-          <a:solidFill>
-            <a:srgbClr val="FFCD41"/>
-          </a:solidFill>
-          <a:ln w="12700">
-            <a:solidFill>
-              <a:srgbClr val="FFCD41"/>
-            </a:solidFill>
-            <a:prstDash val="solid"/>
-          </a:ln>
-        </p:spPr>
-      </p:sp>
-      <p:sp>
-        <p:nvSpPr>
-          <p:cNvPr id="29" name="Text 27"/>
-          <p:cNvSpPr/>
-          <p:nvPr/>
-        </p:nvSpPr>
-        <p:spPr>
-          <a:xfrm>
-            <a:off x="7178040" y="5669280"/>
-            <a:ext cx="1371600" cy="274320"/>
-          </a:xfrm>
-          <a:prstGeom prst="rect">
-            <a:avLst/>
-          </a:prstGeom>
-          <a:noFill/>
-          <a:ln/>
-        </p:spPr>
-        <p:txBody>
-          <a:bodyPr wrap="square" lIns="0" tIns="0" rIns="0" bIns="0" rtlCol="0" anchor="ctr"/>
-          <a:lstStyle/>
-          <a:p>
-            <a:pPr marL="0" indent="0">
-              <a:buNone/>
-            </a:pPr>
-            <a:r>
-              <a:rPr lang="en-US" sz="1100" b="1" dirty="0">
-                <a:solidFill>
-                  <a:srgbClr val="8A8A8A"/>
-                </a:solidFill>
-                <a:latin typeface="Calibri" pitchFamily="34" charset="0"/>
-                <a:ea typeface="Calibri" pitchFamily="34" charset="-122"/>
-                <a:cs typeface="Calibri" pitchFamily="34" charset="-120"/>
-              </a:rPr>
-              <a:t>12:00 PM ET</a:t>
-            </a:r>
-            <a:endParaRPr lang="en-US" sz="1100" dirty="0"/>
-          </a:p>
-        </p:txBody>
-      </p:sp>
-      <p:sp>
-        <p:nvSpPr>
-          <p:cNvPr id="30" name="Text 28"/>
-          <p:cNvSpPr/>
-          <p:nvPr/>
-        </p:nvSpPr>
-        <p:spPr>
-          <a:xfrm>
-            <a:off x="8595360" y="5669280"/>
-            <a:ext cx="3474720" cy="274320"/>
-          </a:xfrm>
-          <a:prstGeom prst="rect">
-            <a:avLst/>
-          </a:prstGeom>
-          <a:noFill/>
-          <a:ln/>
-        </p:spPr>
-        <p:txBody>
-          <a:bodyPr wrap="square" lIns="0" tIns="0" rIns="0" bIns="0" rtlCol="0" anchor="ctr"/>
-          <a:lstStyle/>
-          <a:p>
-            <a:pPr marL="0" indent="0">
-              <a:buNone/>
-            </a:pPr>
-            <a:r>
-              <a:rPr lang="en-US" sz="1400" dirty="0">
-                <a:solidFill>
-                  <a:srgbClr val="1B1B1B"/>
-                </a:solidFill>
-                <a:latin typeface="Calibri" pitchFamily="34" charset="0"/>
-                <a:ea typeface="Calibri" pitchFamily="34" charset="-122"/>
-                <a:cs typeface="Calibri" pitchFamily="34" charset="-120"/>
-              </a:rPr>
-              <a:t>Diagnosis complete</a:t>
-            </a:r>
-            <a:endParaRPr lang="en-US" sz="1400" dirty="0"/>
-          </a:p>
-        </p:txBody>
-      </p:sp>
-    </p:spTree>
-  </p:cSld>
-  <p:clrMapOvr>
-    <a:masterClrMapping/>
-  </p:clrMapOvr>
-</p:sld>
-</file>
-
-<file path=ppt/slides/slide4.xml><?xml version="1.0" encoding="utf-8"?>
 <p:sld xmlns:a="http://schemas.openxmlformats.org/drawingml/2006/main" xmlns:r="http://schemas.openxmlformats.org/officeDocument/2006/relationships" xmlns:p="http://schemas.openxmlformats.org/presentationml/2006/main">
   <p:cSld name="Slide 3">
     <p:bg>
@@ -3361,7 +4324,7 @@
                 <a:ea typeface="Calibri" pitchFamily="34" charset="-122"/>
                 <a:cs typeface="Calibri" pitchFamily="34" charset="-120"/>
               </a:rPr>
-              <a:t>4 / 8</a:t>
+              <a:t>4 / 9</a:t>
             </a:r>
             <a:endParaRPr lang="en-US" sz="900" dirty="0"/>
           </a:p>
@@ -4577,7 +5540,7 @@
                 <a:ea typeface="Calibri" pitchFamily="34" charset="-122"/>
                 <a:cs typeface="Calibri" pitchFamily="34" charset="-120"/>
               </a:rPr>
-              <a:t>And every step waits for whoever has access  —  often the US DBAs and US Developers, hours away.</a:t>
+              <a:t>And every step waits for whoever has access  —  often the US DBAs, hours away.</a:t>
             </a:r>
             <a:endParaRPr lang="en-US" sz="1300" dirty="0"/>
           </a:p>
@@ -4591,7 +5554,7 @@
 </p:sld>
 </file>
 
-<file path=ppt/slides/slide5.xml><?xml version="1.0" encoding="utf-8"?>
+<file path=ppt/slides/slide4.xml><?xml version="1.0" encoding="utf-8"?>
 <p:sld xmlns:a="http://schemas.openxmlformats.org/drawingml/2006/main" xmlns:r="http://schemas.openxmlformats.org/officeDocument/2006/relationships" xmlns:p="http://schemas.openxmlformats.org/presentationml/2006/main">
   <p:cSld name="Slide 4">
     <p:bg>
@@ -4752,7 +5715,7 @@
                 <a:ea typeface="Calibri" pitchFamily="34" charset="-122"/>
                 <a:cs typeface="Calibri" pitchFamily="34" charset="-120"/>
               </a:rPr>
-              <a:t>5 / 8</a:t>
+              <a:t>5 / 9</a:t>
             </a:r>
             <a:endParaRPr lang="en-US" sz="900" dirty="0"/>
           </a:p>
@@ -5592,7 +6555,7 @@
                 <a:ea typeface="Calibri" pitchFamily="34" charset="-122"/>
                 <a:cs typeface="Calibri" pitchFamily="34" charset="-120"/>
               </a:rPr>
-              <a:t>US DBAs engaged only when SAR-restricted server access is truly needed. US Developers engaged when there is an identified code/package issue.</a:t>
+              <a:t>US DBAs engaged only when SAR-restricted server access is truly needed.</a:t>
             </a:r>
             <a:endParaRPr lang="en-US" sz="1200" dirty="0"/>
           </a:p>
@@ -5734,1556 +6697,7 @@
 </p:sld>
 </file>
 
-<file path=ppt/slides/slide6.xml><?xml version="1.0" encoding="utf-8"?>
-<p:sld xmlns:a="http://schemas.openxmlformats.org/drawingml/2006/main" xmlns:r="http://schemas.openxmlformats.org/officeDocument/2006/relationships" xmlns:p="http://schemas.openxmlformats.org/presentationml/2006/main">
-  <p:cSld name="Slide 5">
-    <p:bg>
-      <p:bgPr>
-        <a:solidFill>
-          <a:srgbClr val="FFFFFF"/>
-        </a:solidFill>
-        <a:effectLst/>
-      </p:bgPr>
-    </p:bg>
-    <p:spTree>
-      <p:nvGrpSpPr>
-        <p:cNvPr id="1" name=""/>
-        <p:cNvGrpSpPr/>
-        <p:nvPr/>
-      </p:nvGrpSpPr>
-      <p:grpSpPr>
-        <a:xfrm>
-          <a:off x="0" y="0"/>
-          <a:ext cx="0" cy="0"/>
-          <a:chOff x="0" y="0"/>
-          <a:chExt cx="0" cy="0"/>
-        </a:xfrm>
-      </p:grpSpPr>
-      <p:sp>
-        <p:nvSpPr>
-          <p:cNvPr id="2" name="TopBar"/>
-          <p:cNvSpPr/>
-          <p:nvPr/>
-        </p:nvSpPr>
-        <p:spPr>
-          <a:xfrm>
-            <a:off x="0" y="0"/>
-            <a:ext cx="12161520" cy="164592"/>
-          </a:xfrm>
-          <a:prstGeom prst="rect">
-            <a:avLst/>
-          </a:prstGeom>
-          <a:solidFill>
-            <a:srgbClr val="D71E28"/>
-          </a:solidFill>
-          <a:ln w="12700">
-            <a:solidFill>
-              <a:srgbClr val="D71E28"/>
-            </a:solidFill>
-            <a:prstDash val="solid"/>
-          </a:ln>
-        </p:spPr>
-      </p:sp>
-      <p:sp>
-        <p:nvSpPr>
-          <p:cNvPr id="3" name="Eyebrow"/>
-          <p:cNvSpPr/>
-          <p:nvPr/>
-        </p:nvSpPr>
-        <p:spPr>
-          <a:xfrm>
-            <a:off x="731520" y="502920"/>
-            <a:ext cx="10058400" cy="320040"/>
-          </a:xfrm>
-          <a:prstGeom prst="rect">
-            <a:avLst/>
-          </a:prstGeom>
-          <a:noFill/>
-          <a:ln/>
-        </p:spPr>
-        <p:txBody>
-          <a:bodyPr wrap="square" lIns="0" tIns="0" rIns="0" bIns="0" rtlCol="0" anchor="ctr"/>
-          <a:lstStyle/>
-          <a:p>
-            <a:pPr marL="0" indent="0">
-              <a:buNone/>
-            </a:pPr>
-            <a:r>
-              <a:rPr lang="en-US" sz="1100" b="1" kern="0" spc="600" dirty="0">
-                <a:solidFill>
-                  <a:srgbClr val="D71E28"/>
-                </a:solidFill>
-                <a:latin typeface="Calibri" pitchFamily="34" charset="0"/>
-              </a:rPr>
-              <a:t>PROCESS COMPARISON</a:t>
-            </a:r>
-          </a:p>
-        </p:txBody>
-      </p:sp>
-      <p:sp>
-        <p:nvSpPr>
-          <p:cNvPr id="4" name="Title"/>
-          <p:cNvSpPr/>
-          <p:nvPr/>
-        </p:nvSpPr>
-        <p:spPr>
-          <a:xfrm>
-            <a:off x="731520" y="900000"/>
-            <a:ext cx="10698480" cy="600000"/>
-          </a:xfrm>
-          <a:prstGeom prst="rect">
-            <a:avLst/>
-          </a:prstGeom>
-          <a:noFill/>
-          <a:ln/>
-        </p:spPr>
-        <p:txBody>
-          <a:bodyPr wrap="square" lIns="0" tIns="0" rIns="0" bIns="0" rtlCol="0" anchor="ctr"/>
-          <a:lstStyle/>
-          <a:p>
-            <a:pPr marL="0" indent="0">
-              <a:buNone/>
-            </a:pPr>
-            <a:r>
-              <a:rPr lang="en-US" sz="3200" b="1" dirty="0">
-                <a:solidFill>
-                  <a:srgbClr val="1B1B1B"/>
-                </a:solidFill>
-                <a:latin typeface="Calibri" pitchFamily="34" charset="0"/>
-              </a:rPr>
-              <a:t>From a multi-team relay to a single automated diagnosis.</a:t>
-            </a:r>
-          </a:p>
-        </p:txBody>
-      </p:sp>
-      <p:sp>
-        <p:nvSpPr>
-          <p:cNvPr id="5" name="PageNum"/>
-          <p:cNvSpPr/>
-          <p:nvPr/>
-        </p:nvSpPr>
-        <p:spPr>
-          <a:xfrm>
-            <a:off x="10789920" y="6400800"/>
-            <a:ext cx="822960" cy="274320"/>
-          </a:xfrm>
-          <a:prstGeom prst="rect">
-            <a:avLst/>
-          </a:prstGeom>
-          <a:noFill/>
-          <a:ln/>
-        </p:spPr>
-        <p:txBody>
-          <a:bodyPr wrap="square" lIns="0" tIns="0" rIns="0" bIns="0" rtlCol="0" anchor="ctr"/>
-          <a:lstStyle/>
-          <a:p>
-            <a:pPr marL="0" indent="0" algn="r">
-              <a:buNone/>
-            </a:pPr>
-            <a:r>
-              <a:rPr lang="en-US" sz="900" dirty="0">
-                <a:solidFill>
-                  <a:srgbClr val="8A8A8A"/>
-                </a:solidFill>
-                <a:latin typeface="Calibri" pitchFamily="34" charset="0"/>
-              </a:rPr>
-              <a:t>6 / 8</a:t>
-            </a:r>
-          </a:p>
-        </p:txBody>
-      </p:sp>
-      <p:sp>
-        <p:nvSpPr>
-          <p:cNvPr id="10" name="LeftLabel"/>
-          <p:cNvSpPr/>
-          <p:nvPr/>
-        </p:nvSpPr>
-        <p:spPr>
-          <a:xfrm>
-            <a:off x="571500" y="1750000"/>
-            <a:ext cx="5440680" cy="280000"/>
-          </a:xfrm>
-          <a:prstGeom prst="rect">
-            <a:avLst/>
-          </a:prstGeom>
-          <a:noFill/>
-          <a:ln/>
-        </p:spPr>
-        <p:txBody>
-          <a:bodyPr wrap="square" lIns="0" tIns="0" rIns="0" bIns="0" rtlCol="0" anchor="ctr"/>
-          <a:lstStyle/>
-          <a:p>
-            <a:pPr marL="0" indent="0">
-              <a:buNone/>
-            </a:pPr>
-            <a:r>
-              <a:rPr lang="en-US" sz="1000" b="1" kern="0" spc="500" dirty="0">
-                <a:solidFill>
-                  <a:srgbClr val="D71E28"/>
-                </a:solidFill>
-                <a:latin typeface="Calibri" pitchFamily="34" charset="0"/>
-              </a:rPr>
-              <a:t>TODAY  ·  MANUAL RELAY</a:t>
-            </a:r>
-          </a:p>
-        </p:txBody>
-      </p:sp>
-      <p:sp>
-        <p:nvSpPr>
-          <p:cNvPr id="11" name="LeftHeading"/>
-          <p:cNvSpPr/>
-          <p:nvPr/>
-        </p:nvSpPr>
-        <p:spPr>
-          <a:xfrm>
-            <a:off x="571500" y="2050000"/>
-            <a:ext cx="5440680" cy="380000"/>
-          </a:xfrm>
-          <a:prstGeom prst="rect">
-            <a:avLst/>
-          </a:prstGeom>
-          <a:noFill/>
-          <a:ln/>
-        </p:spPr>
-        <p:txBody>
-          <a:bodyPr wrap="square" lIns="0" tIns="0" rIns="0" bIns="0" rtlCol="0" anchor="ctr"/>
-          <a:lstStyle/>
-          <a:p>
-            <a:pPr marL="0" indent="0">
-              <a:buNone/>
-            </a:pPr>
-            <a:r>
-              <a:rPr lang="en-US" sz="1800" b="1" dirty="0">
-                <a:solidFill>
-                  <a:srgbClr val="1B1B1B"/>
-                </a:solidFill>
-                <a:latin typeface="Calibri" pitchFamily="34" charset="0"/>
-              </a:rPr>
-              <a:t>Up to 10 hours, six handoffs.</a:t>
-            </a:r>
-          </a:p>
-        </p:txBody>
-      </p:sp>
-      <p:sp>
-        <p:nvSpPr>
-          <p:cNvPr id="12" name="LeftRail"/>
-          <p:cNvSpPr/>
-          <p:nvPr/>
-        </p:nvSpPr>
-        <p:spPr>
-          <a:xfrm>
-            <a:off x="811000" y="2570000"/>
-            <a:ext cx="22860" cy="3640000"/>
-          </a:xfrm>
-          <a:prstGeom prst="rect">
-            <a:avLst/>
-          </a:prstGeom>
-          <a:solidFill>
-            <a:srgbClr val="E5E0D5"/>
-          </a:solidFill>
-          <a:ln w="12700">
-            <a:solidFill>
-              <a:srgbClr val="E5E0D5"/>
-            </a:solidFill>
-            <a:prstDash val="solid"/>
-          </a:ln>
-        </p:spPr>
-      </p:sp>
-      <p:sp>
-        <p:nvSpPr>
-          <p:cNvPr id="20" name="L1Dot"/>
-          <p:cNvSpPr/>
-          <p:nvPr/>
-        </p:nvSpPr>
-        <p:spPr>
-          <a:xfrm>
-            <a:off x="731520" y="2570000"/>
-            <a:ext cx="182880" cy="182880"/>
-          </a:xfrm>
-          <a:prstGeom prst="ellipse">
-            <a:avLst/>
-          </a:prstGeom>
-          <a:solidFill>
-            <a:srgbClr val="D71E28"/>
-          </a:solidFill>
-          <a:ln w="12700">
-            <a:solidFill>
-              <a:srgbClr val="D71E28"/>
-            </a:solidFill>
-            <a:prstDash val="solid"/>
-          </a:ln>
-        </p:spPr>
-      </p:sp>
-      <p:sp>
-        <p:nvSpPr>
-          <p:cNvPr id="21" name="L1Time"/>
-          <p:cNvSpPr/>
-          <p:nvPr/>
-        </p:nvSpPr>
-        <p:spPr>
-          <a:xfrm>
-            <a:off x="1050000" y="2515000"/>
-            <a:ext cx="1100000" cy="260000"/>
-          </a:xfrm>
-          <a:prstGeom prst="rect">
-            <a:avLst/>
-          </a:prstGeom>
-          <a:noFill/>
-          <a:ln/>
-        </p:spPr>
-        <p:txBody>
-          <a:bodyPr wrap="square" lIns="0" tIns="0" rIns="0" bIns="0" rtlCol="0" anchor="ctr"/>
-          <a:lstStyle/>
-          <a:p>
-            <a:pPr marL="0" indent="0">
-              <a:buNone/>
-            </a:pPr>
-            <a:r>
-              <a:rPr lang="en-US" sz="1000" b="1" kern="0" spc="300" dirty="0">
-                <a:solidFill>
-                  <a:srgbClr val="8A8A8A"/>
-                </a:solidFill>
-                <a:latin typeface="Calibri" pitchFamily="34" charset="0"/>
-              </a:rPr>
-              <a:t>2:00 AM ET</a:t>
-            </a:r>
-          </a:p>
-        </p:txBody>
-      </p:sp>
-      <p:sp>
-        <p:nvSpPr>
-          <p:cNvPr id="22" name="L1Text"/>
-          <p:cNvSpPr/>
-          <p:nvPr/>
-        </p:nvSpPr>
-        <p:spPr>
-          <a:xfrm>
-            <a:off x="1050000" y="2755000"/>
-            <a:ext cx="4900000" cy="430000"/>
-          </a:xfrm>
-          <a:prstGeom prst="rect">
-            <a:avLst/>
-          </a:prstGeom>
-          <a:noFill/>
-          <a:ln/>
-        </p:spPr>
-        <p:txBody>
-          <a:bodyPr wrap="square" lIns="0" tIns="0" rIns="0" bIns="0" rtlCol="0" anchor="t"/>
-          <a:lstStyle/>
-          <a:p>
-            <a:pPr marL="0" indent="0">
-              <a:buNone/>
-            </a:pPr>
-            <a:r>
-              <a:rPr lang="en-US" sz="1200" dirty="0">
-                <a:solidFill>
-                  <a:srgbClr val="1B1B1B"/>
-                </a:solidFill>
-                <a:latin typeface="Calibri" pitchFamily="34" charset="0"/>
-              </a:rPr>
-              <a:t>Job fails. ServiceNow incident auto-generated.</a:t>
-            </a:r>
-          </a:p>
-        </p:txBody>
-      </p:sp>
-      <p:sp>
-        <p:nvSpPr>
-          <p:cNvPr id="23" name="L2Dot"/>
-          <p:cNvSpPr/>
-          <p:nvPr/>
-        </p:nvSpPr>
-        <p:spPr>
-          <a:xfrm>
-            <a:off x="731520" y="3170000"/>
-            <a:ext cx="182880" cy="182880"/>
-          </a:xfrm>
-          <a:prstGeom prst="ellipse">
-            <a:avLst/>
-          </a:prstGeom>
-          <a:solidFill>
-            <a:srgbClr val="D71E28"/>
-          </a:solidFill>
-          <a:ln w="12700">
-            <a:solidFill>
-              <a:srgbClr val="D71E28"/>
-            </a:solidFill>
-            <a:prstDash val="solid"/>
-          </a:ln>
-        </p:spPr>
-      </p:sp>
-      <p:sp>
-        <p:nvSpPr>
-          <p:cNvPr id="24" name="L2Time"/>
-          <p:cNvSpPr/>
-          <p:nvPr/>
-        </p:nvSpPr>
-        <p:spPr>
-          <a:xfrm>
-            <a:off x="1050000" y="3115000"/>
-            <a:ext cx="1100000" cy="260000"/>
-          </a:xfrm>
-          <a:prstGeom prst="rect">
-            <a:avLst/>
-          </a:prstGeom>
-          <a:noFill/>
-          <a:ln/>
-        </p:spPr>
-        <p:txBody>
-          <a:bodyPr wrap="square" lIns="0" tIns="0" rIns="0" bIns="0" rtlCol="0" anchor="ctr"/>
-          <a:lstStyle/>
-          <a:p>
-            <a:pPr marL="0" indent="0">
-              <a:buNone/>
-            </a:pPr>
-            <a:r>
-              <a:rPr lang="en-US" sz="1000" b="1" kern="0" spc="300" dirty="0">
-                <a:solidFill>
-                  <a:srgbClr val="8A8A8A"/>
-                </a:solidFill>
-                <a:latin typeface="Calibri" pitchFamily="34" charset="0"/>
-              </a:rPr>
-              <a:t>2:05 AM ET</a:t>
-            </a:r>
-          </a:p>
-        </p:txBody>
-      </p:sp>
-      <p:sp>
-        <p:nvSpPr>
-          <p:cNvPr id="25" name="L2Text"/>
-          <p:cNvSpPr/>
-          <p:nvPr/>
-        </p:nvSpPr>
-        <p:spPr>
-          <a:xfrm>
-            <a:off x="1050000" y="3355000"/>
-            <a:ext cx="4900000" cy="430000"/>
-          </a:xfrm>
-          <a:prstGeom prst="rect">
-            <a:avLst/>
-          </a:prstGeom>
-          <a:noFill/>
-          <a:ln/>
-        </p:spPr>
-        <p:txBody>
-          <a:bodyPr wrap="square" lIns="0" tIns="0" rIns="0" bIns="0" rtlCol="0" anchor="t"/>
-          <a:lstStyle/>
-          <a:p>
-            <a:pPr marL="0" indent="0">
-              <a:buNone/>
-            </a:pPr>
-            <a:r>
-              <a:rPr lang="en-US" sz="1200" dirty="0">
-                <a:solidFill>
-                  <a:srgbClr val="1B1B1B"/>
-                </a:solidFill>
-                <a:latin typeface="Calibri" pitchFamily="34" charset="0"/>
-              </a:rPr>
-              <a:t>Offshore EGS L2 picks up the ticket and starts to investigate.</a:t>
-            </a:r>
-          </a:p>
-        </p:txBody>
-      </p:sp>
-      <p:sp>
-        <p:nvSpPr>
-          <p:cNvPr id="26" name="L3Dot"/>
-          <p:cNvSpPr/>
-          <p:nvPr/>
-        </p:nvSpPr>
-        <p:spPr>
-          <a:xfrm>
-            <a:off x="731520" y="3770000"/>
-            <a:ext cx="182880" cy="182880"/>
-          </a:xfrm>
-          <a:prstGeom prst="ellipse">
-            <a:avLst/>
-          </a:prstGeom>
-          <a:solidFill>
-            <a:srgbClr val="D71E28"/>
-          </a:solidFill>
-          <a:ln w="12700">
-            <a:solidFill>
-              <a:srgbClr val="D71E28"/>
-            </a:solidFill>
-            <a:prstDash val="solid"/>
-          </a:ln>
-        </p:spPr>
-      </p:sp>
-      <p:sp>
-        <p:nvSpPr>
-          <p:cNvPr id="27" name="L3Time"/>
-          <p:cNvSpPr/>
-          <p:nvPr/>
-        </p:nvSpPr>
-        <p:spPr>
-          <a:xfrm>
-            <a:off x="1050000" y="3715000"/>
-            <a:ext cx="1100000" cy="260000"/>
-          </a:xfrm>
-          <a:prstGeom prst="rect">
-            <a:avLst/>
-          </a:prstGeom>
-          <a:noFill/>
-          <a:ln/>
-        </p:spPr>
-        <p:txBody>
-          <a:bodyPr wrap="square" lIns="0" tIns="0" rIns="0" bIns="0" rtlCol="0" anchor="ctr"/>
-          <a:lstStyle/>
-          <a:p>
-            <a:pPr marL="0" indent="0">
-              <a:buNone/>
-            </a:pPr>
-            <a:r>
-              <a:rPr lang="en-US" sz="1000" b="1" kern="0" spc="300" dirty="0">
-                <a:solidFill>
-                  <a:srgbClr val="8A8A8A"/>
-                </a:solidFill>
-                <a:latin typeface="Calibri" pitchFamily="34" charset="0"/>
-              </a:rPr>
-              <a:t>2:30 AM ET</a:t>
-            </a:r>
-          </a:p>
-        </p:txBody>
-      </p:sp>
-      <p:sp>
-        <p:nvSpPr>
-          <p:cNvPr id="28" name="L3Text"/>
-          <p:cNvSpPr/>
-          <p:nvPr/>
-        </p:nvSpPr>
-        <p:spPr>
-          <a:xfrm>
-            <a:off x="1050000" y="3955000"/>
-            <a:ext cx="4900000" cy="430000"/>
-          </a:xfrm>
-          <a:prstGeom prst="rect">
-            <a:avLst/>
-          </a:prstGeom>
-          <a:noFill/>
-          <a:ln/>
-        </p:spPr>
-        <p:txBody>
-          <a:bodyPr wrap="square" lIns="0" tIns="0" rIns="0" bIns="0" rtlCol="0" anchor="t"/>
-          <a:lstStyle/>
-          <a:p>
-            <a:pPr marL="0" indent="0">
-              <a:buNone/>
-            </a:pPr>
-            <a:r>
-              <a:rPr lang="en-US" sz="1200" dirty="0">
-                <a:solidFill>
-                  <a:srgbClr val="1B1B1B"/>
-                </a:solidFill>
-                <a:latin typeface="Calibri" pitchFamily="34" charset="0"/>
-              </a:rPr>
-              <a:t>L2 engages EGS DBAs offshore. DBAs spend time identifying the issue.</a:t>
-            </a:r>
-          </a:p>
-        </p:txBody>
-      </p:sp>
-      <p:sp>
-        <p:nvSpPr>
-          <p:cNvPr id="29" name="L4Dot"/>
-          <p:cNvSpPr/>
-          <p:nvPr/>
-        </p:nvSpPr>
-        <p:spPr>
-          <a:xfrm>
-            <a:off x="731520" y="4370000"/>
-            <a:ext cx="182880" cy="182880"/>
-          </a:xfrm>
-          <a:prstGeom prst="ellipse">
-            <a:avLst/>
-          </a:prstGeom>
-          <a:solidFill>
-            <a:srgbClr val="D71E28"/>
-          </a:solidFill>
-          <a:ln w="12700">
-            <a:solidFill>
-              <a:srgbClr val="D71E28"/>
-            </a:solidFill>
-            <a:prstDash val="solid"/>
-          </a:ln>
-        </p:spPr>
-      </p:sp>
-      <p:sp>
-        <p:nvSpPr>
-          <p:cNvPr id="30" name="L4Time"/>
-          <p:cNvSpPr/>
-          <p:nvPr/>
-        </p:nvSpPr>
-        <p:spPr>
-          <a:xfrm>
-            <a:off x="1050000" y="4315000"/>
-            <a:ext cx="1100000" cy="260000"/>
-          </a:xfrm>
-          <a:prstGeom prst="rect">
-            <a:avLst/>
-          </a:prstGeom>
-          <a:noFill/>
-          <a:ln/>
-        </p:spPr>
-        <p:txBody>
-          <a:bodyPr wrap="square" lIns="0" tIns="0" rIns="0" bIns="0" rtlCol="0" anchor="ctr"/>
-          <a:lstStyle/>
-          <a:p>
-            <a:pPr marL="0" indent="0">
-              <a:buNone/>
-            </a:pPr>
-            <a:r>
-              <a:rPr lang="en-US" sz="1000" b="1" kern="0" spc="300" dirty="0">
-                <a:solidFill>
-                  <a:srgbClr val="8A8A8A"/>
-                </a:solidFill>
-                <a:latin typeface="Calibri" pitchFamily="34" charset="0"/>
-              </a:rPr>
-              <a:t>3:00 AM ET</a:t>
-            </a:r>
-          </a:p>
-        </p:txBody>
-      </p:sp>
-      <p:sp>
-        <p:nvSpPr>
-          <p:cNvPr id="31" name="L4Text"/>
-          <p:cNvSpPr/>
-          <p:nvPr/>
-        </p:nvSpPr>
-        <p:spPr>
-          <a:xfrm>
-            <a:off x="1050000" y="4555000"/>
-            <a:ext cx="4900000" cy="600000"/>
-          </a:xfrm>
-          <a:prstGeom prst="rect">
-            <a:avLst/>
-          </a:prstGeom>
-          <a:noFill/>
-          <a:ln/>
-        </p:spPr>
-        <p:txBody>
-          <a:bodyPr wrap="square" lIns="0" tIns="0" rIns="0" bIns="0" rtlCol="0" anchor="t"/>
-          <a:lstStyle/>
-          <a:p>
-            <a:pPr marL="0" indent="0">
-              <a:buNone/>
-            </a:pPr>
-            <a:r>
-              <a:rPr lang="en-US" sz="1200" dirty="0">
-                <a:solidFill>
-                  <a:srgbClr val="1B1B1B"/>
-                </a:solidFill>
-                <a:latin typeface="Calibri" pitchFamily="34" charset="0"/>
-              </a:rPr>
-              <a:t>Branch by issue type:  SAR server → page US DBAs (may not answer).  Server / permissions → DBAs resolve.  Otherwise → punt to developers.</a:t>
-            </a:r>
-          </a:p>
-        </p:txBody>
-      </p:sp>
-      <p:sp>
-        <p:nvSpPr>
-          <p:cNvPr id="32" name="L5Dot"/>
-          <p:cNvSpPr/>
-          <p:nvPr/>
-        </p:nvSpPr>
-        <p:spPr>
-          <a:xfrm>
-            <a:off x="731520" y="5180000"/>
-            <a:ext cx="182880" cy="182880"/>
-          </a:xfrm>
-          <a:prstGeom prst="ellipse">
-            <a:avLst/>
-          </a:prstGeom>
-          <a:solidFill>
-            <a:srgbClr val="D71E28"/>
-          </a:solidFill>
-          <a:ln w="12700">
-            <a:solidFill>
-              <a:srgbClr val="D71E28"/>
-            </a:solidFill>
-            <a:prstDash val="solid"/>
-          </a:ln>
-        </p:spPr>
-      </p:sp>
-      <p:sp>
-        <p:nvSpPr>
-          <p:cNvPr id="33" name="L5Time"/>
-          <p:cNvSpPr/>
-          <p:nvPr/>
-        </p:nvSpPr>
-        <p:spPr>
-          <a:xfrm>
-            <a:off x="1050000" y="5125000"/>
-            <a:ext cx="1800000" cy="260000"/>
-          </a:xfrm>
-          <a:prstGeom prst="rect">
-            <a:avLst/>
-          </a:prstGeom>
-          <a:noFill/>
-          <a:ln/>
-        </p:spPr>
-        <p:txBody>
-          <a:bodyPr wrap="square" lIns="0" tIns="0" rIns="0" bIns="0" rtlCol="0" anchor="ctr"/>
-          <a:lstStyle/>
-          <a:p>
-            <a:pPr marL="0" indent="0">
-              <a:buNone/>
-            </a:pPr>
-            <a:r>
-              <a:rPr lang="en-US" sz="1000" b="1" kern="0" spc="300" dirty="0">
-                <a:solidFill>
-                  <a:srgbClr val="8A8A8A"/>
-                </a:solidFill>
-                <a:latin typeface="Calibri" pitchFamily="34" charset="0"/>
-              </a:rPr>
-              <a:t>9:00 - 11:00 AM ET</a:t>
-            </a:r>
-          </a:p>
-        </p:txBody>
-      </p:sp>
-      <p:sp>
-        <p:nvSpPr>
-          <p:cNvPr id="34" name="L5Text"/>
-          <p:cNvSpPr/>
-          <p:nvPr/>
-        </p:nvSpPr>
-        <p:spPr>
-          <a:xfrm>
-            <a:off x="1050000" y="5365000"/>
-            <a:ext cx="4900000" cy="600000"/>
-          </a:xfrm>
-          <a:prstGeom prst="rect">
-            <a:avLst/>
-          </a:prstGeom>
-          <a:noFill/>
-          <a:ln/>
-        </p:spPr>
-        <p:txBody>
-          <a:bodyPr wrap="square" lIns="0" tIns="0" rIns="0" bIns="0" rtlCol="0" anchor="t"/>
-          <a:lstStyle/>
-          <a:p>
-            <a:pPr marL="0" indent="0">
-              <a:buNone/>
-            </a:pPr>
-            <a:r>
-              <a:rPr lang="en-US" sz="1200" dirty="0">
-                <a:solidFill>
-                  <a:srgbClr val="1B1B1B"/>
-                </a:solidFill>
-                <a:latin typeface="Calibri" pitchFamily="34" charset="0"/>
-              </a:rPr>
-              <a:t>US DBAs come online, review jobs and execution reports, then ask app developers to inspect the SSIS packages.</a:t>
-            </a:r>
-          </a:p>
-        </p:txBody>
-      </p:sp>
-      <p:sp>
-        <p:nvSpPr>
-          <p:cNvPr id="35" name="L6Dot"/>
-          <p:cNvSpPr/>
-          <p:nvPr/>
-        </p:nvSpPr>
-        <p:spPr>
-          <a:xfrm>
-            <a:off x="731520" y="5990000"/>
-            <a:ext cx="182880" cy="182880"/>
-          </a:xfrm>
-          <a:prstGeom prst="ellipse">
-            <a:avLst/>
-          </a:prstGeom>
-          <a:solidFill>
-            <a:srgbClr val="D71E28"/>
-          </a:solidFill>
-          <a:ln w="12700">
-            <a:solidFill>
-              <a:srgbClr val="D71E28"/>
-            </a:solidFill>
-            <a:prstDash val="solid"/>
-          </a:ln>
-        </p:spPr>
-      </p:sp>
-      <p:sp>
-        <p:nvSpPr>
-          <p:cNvPr id="36" name="L6Time"/>
-          <p:cNvSpPr/>
-          <p:nvPr/>
-        </p:nvSpPr>
-        <p:spPr>
-          <a:xfrm>
-            <a:off x="1050000" y="5935000"/>
-            <a:ext cx="1300000" cy="260000"/>
-          </a:xfrm>
-          <a:prstGeom prst="rect">
-            <a:avLst/>
-          </a:prstGeom>
-          <a:noFill/>
-          <a:ln/>
-        </p:spPr>
-        <p:txBody>
-          <a:bodyPr wrap="square" lIns="0" tIns="0" rIns="0" bIns="0" rtlCol="0" anchor="ctr"/>
-          <a:lstStyle/>
-          <a:p>
-            <a:pPr marL="0" indent="0">
-              <a:buNone/>
-            </a:pPr>
-            <a:r>
-              <a:rPr lang="en-US" sz="1000" b="1" kern="0" spc="300" dirty="0">
-                <a:solidFill>
-                  <a:srgbClr val="D71E28"/>
-                </a:solidFill>
-                <a:latin typeface="Calibri" pitchFamily="34" charset="0"/>
-              </a:rPr>
-              <a:t>12:00 PM ET</a:t>
-            </a:r>
-          </a:p>
-        </p:txBody>
-      </p:sp>
-      <p:sp>
-        <p:nvSpPr>
-          <p:cNvPr id="37" name="L6Text"/>
-          <p:cNvSpPr/>
-          <p:nvPr/>
-        </p:nvSpPr>
-        <p:spPr>
-          <a:xfrm>
-            <a:off x="1050000" y="6175000"/>
-            <a:ext cx="4900000" cy="280000"/>
-          </a:xfrm>
-          <a:prstGeom prst="rect">
-            <a:avLst/>
-          </a:prstGeom>
-          <a:noFill/>
-          <a:ln/>
-        </p:spPr>
-        <p:txBody>
-          <a:bodyPr wrap="square" lIns="0" tIns="0" rIns="0" bIns="0" rtlCol="0" anchor="t"/>
-          <a:lstStyle/>
-          <a:p>
-            <a:pPr marL="0" indent="0">
-              <a:buNone/>
-            </a:pPr>
-            <a:r>
-              <a:rPr lang="en-US" sz="1200" b="1" dirty="0">
-                <a:solidFill>
-                  <a:srgbClr val="D71E28"/>
-                </a:solidFill>
-                <a:latin typeface="Calibri" pitchFamily="34" charset="0"/>
-              </a:rPr>
-              <a:t>L2 finally updates users  —  10 hours later.</a:t>
-            </a:r>
-          </a:p>
-        </p:txBody>
-      </p:sp>
-      <p:sp>
-        <p:nvSpPr>
-          <p:cNvPr id="40" name="Divider"/>
-          <p:cNvSpPr/>
-          <p:nvPr/>
-        </p:nvSpPr>
-        <p:spPr>
-          <a:xfrm>
-            <a:off x="6096000" y="2050000"/>
-            <a:ext cx="12700" cy="4400000"/>
-          </a:xfrm>
-          <a:prstGeom prst="rect">
-            <a:avLst/>
-          </a:prstGeom>
-          <a:solidFill>
-            <a:srgbClr val="EAEAEA"/>
-          </a:solidFill>
-          <a:ln w="6350">
-            <a:solidFill>
-              <a:srgbClr val="EAEAEA"/>
-            </a:solidFill>
-            <a:prstDash val="solid"/>
-          </a:ln>
-        </p:spPr>
-      </p:sp>
-      <p:sp>
-        <p:nvSpPr>
-          <p:cNvPr id="50" name="RightLabel"/>
-          <p:cNvSpPr/>
-          <p:nvPr/>
-        </p:nvSpPr>
-        <p:spPr>
-          <a:xfrm>
-            <a:off x="6300000" y="1750000"/>
-            <a:ext cx="5440680" cy="280000"/>
-          </a:xfrm>
-          <a:prstGeom prst="rect">
-            <a:avLst/>
-          </a:prstGeom>
-          <a:noFill/>
-          <a:ln/>
-        </p:spPr>
-        <p:txBody>
-          <a:bodyPr wrap="square" lIns="0" tIns="0" rIns="0" bIns="0" rtlCol="0" anchor="ctr"/>
-          <a:lstStyle/>
-          <a:p>
-            <a:pPr marL="0" indent="0">
-              <a:buNone/>
-            </a:pPr>
-            <a:r>
-              <a:rPr lang="en-US" sz="1000" b="1" kern="0" spc="500" dirty="0">
-                <a:solidFill>
-                  <a:srgbClr val="B89000"/>
-                </a:solidFill>
-                <a:latin typeface="Calibri" pitchFamily="34" charset="0"/>
-              </a:rPr>
-              <a:t>WITH AUTOMATION  ·  AI DIAGNOSIS</a:t>
-            </a:r>
-          </a:p>
-        </p:txBody>
-      </p:sp>
-      <p:sp>
-        <p:nvSpPr>
-          <p:cNvPr id="51" name="RightHeading"/>
-          <p:cNvSpPr/>
-          <p:nvPr/>
-        </p:nvSpPr>
-        <p:spPr>
-          <a:xfrm>
-            <a:off x="6300000" y="2050000"/>
-            <a:ext cx="5440680" cy="380000"/>
-          </a:xfrm>
-          <a:prstGeom prst="rect">
-            <a:avLst/>
-          </a:prstGeom>
-          <a:noFill/>
-          <a:ln/>
-        </p:spPr>
-        <p:txBody>
-          <a:bodyPr wrap="square" lIns="0" tIns="0" rIns="0" bIns="0" rtlCol="0" anchor="ctr"/>
-          <a:lstStyle/>
-          <a:p>
-            <a:pPr marL="0" indent="0">
-              <a:buNone/>
-            </a:pPr>
-            <a:r>
-              <a:rPr lang="en-US" sz="1800" b="1" dirty="0">
-                <a:solidFill>
-                  <a:srgbClr val="1B1B1B"/>
-                </a:solidFill>
-                <a:latin typeface="Calibri" pitchFamily="34" charset="0"/>
-              </a:rPr>
-              <a:t>15 minutes, no relay.</a:t>
-            </a:r>
-          </a:p>
-        </p:txBody>
-      </p:sp>
-      <p:sp>
-        <p:nvSpPr>
-          <p:cNvPr id="52" name="RightRail"/>
-          <p:cNvSpPr/>
-          <p:nvPr/>
-        </p:nvSpPr>
-        <p:spPr>
-          <a:xfrm>
-            <a:off x="6539480" y="2570000"/>
-            <a:ext cx="22860" cy="3640000"/>
-          </a:xfrm>
-          <a:prstGeom prst="rect">
-            <a:avLst/>
-          </a:prstGeom>
-          <a:solidFill>
-            <a:srgbClr val="E5E0D5"/>
-          </a:solidFill>
-          <a:ln w="12700">
-            <a:solidFill>
-              <a:srgbClr val="E5E0D5"/>
-            </a:solidFill>
-            <a:prstDash val="solid"/>
-          </a:ln>
-        </p:spPr>
-      </p:sp>
-      <p:sp>
-        <p:nvSpPr>
-          <p:cNvPr id="60" name="R1Dot"/>
-          <p:cNvSpPr/>
-          <p:nvPr/>
-        </p:nvSpPr>
-        <p:spPr>
-          <a:xfrm>
-            <a:off x="6460000" y="2570000"/>
-            <a:ext cx="182880" cy="182880"/>
-          </a:xfrm>
-          <a:prstGeom prst="ellipse">
-            <a:avLst/>
-          </a:prstGeom>
-          <a:solidFill>
-            <a:srgbClr val="FFCD41"/>
-          </a:solidFill>
-          <a:ln w="12700">
-            <a:solidFill>
-              <a:srgbClr val="FFCD41"/>
-            </a:solidFill>
-            <a:prstDash val="solid"/>
-          </a:ln>
-        </p:spPr>
-      </p:sp>
-      <p:sp>
-        <p:nvSpPr>
-          <p:cNvPr id="61" name="R1Time"/>
-          <p:cNvSpPr/>
-          <p:nvPr/>
-        </p:nvSpPr>
-        <p:spPr>
-          <a:xfrm>
-            <a:off x="6780000" y="2515000"/>
-            <a:ext cx="1100000" cy="260000"/>
-          </a:xfrm>
-          <a:prstGeom prst="rect">
-            <a:avLst/>
-          </a:prstGeom>
-          <a:noFill/>
-          <a:ln/>
-        </p:spPr>
-        <p:txBody>
-          <a:bodyPr wrap="square" lIns="0" tIns="0" rIns="0" bIns="0" rtlCol="0" anchor="ctr"/>
-          <a:lstStyle/>
-          <a:p>
-            <a:pPr marL="0" indent="0">
-              <a:buNone/>
-            </a:pPr>
-            <a:r>
-              <a:rPr lang="en-US" sz="1000" b="1" kern="0" spc="300" dirty="0">
-                <a:solidFill>
-                  <a:srgbClr val="8A8A8A"/>
-                </a:solidFill>
-                <a:latin typeface="Calibri" pitchFamily="34" charset="0"/>
-              </a:rPr>
-              <a:t>2:00 AM ET</a:t>
-            </a:r>
-          </a:p>
-        </p:txBody>
-      </p:sp>
-      <p:sp>
-        <p:nvSpPr>
-          <p:cNvPr id="62" name="R1Text"/>
-          <p:cNvSpPr/>
-          <p:nvPr/>
-        </p:nvSpPr>
-        <p:spPr>
-          <a:xfrm>
-            <a:off x="6780000" y="2755000"/>
-            <a:ext cx="4750000" cy="430000"/>
-          </a:xfrm>
-          <a:prstGeom prst="rect">
-            <a:avLst/>
-          </a:prstGeom>
-          <a:noFill/>
-          <a:ln/>
-        </p:spPr>
-        <p:txBody>
-          <a:bodyPr wrap="square" lIns="0" tIns="0" rIns="0" bIns="0" rtlCol="0" anchor="t"/>
-          <a:lstStyle/>
-          <a:p>
-            <a:pPr marL="0" indent="0">
-              <a:buNone/>
-            </a:pPr>
-            <a:r>
-              <a:rPr lang="en-US" sz="1200" dirty="0">
-                <a:solidFill>
-                  <a:srgbClr val="1B1B1B"/>
-                </a:solidFill>
-                <a:latin typeface="Calibri" pitchFamily="34" charset="0"/>
-              </a:rPr>
-              <a:t>Job fails. ServiceNow incident auto-generated.</a:t>
-            </a:r>
-          </a:p>
-        </p:txBody>
-      </p:sp>
-      <p:sp>
-        <p:nvSpPr>
-          <p:cNvPr id="63" name="R2Dot"/>
-          <p:cNvSpPr/>
-          <p:nvPr/>
-        </p:nvSpPr>
-        <p:spPr>
-          <a:xfrm>
-            <a:off x="6460000" y="3170000"/>
-            <a:ext cx="182880" cy="182880"/>
-          </a:xfrm>
-          <a:prstGeom prst="ellipse">
-            <a:avLst/>
-          </a:prstGeom>
-          <a:solidFill>
-            <a:srgbClr val="FFCD41"/>
-          </a:solidFill>
-          <a:ln w="12700">
-            <a:solidFill>
-              <a:srgbClr val="FFCD41"/>
-            </a:solidFill>
-            <a:prstDash val="solid"/>
-          </a:ln>
-        </p:spPr>
-      </p:sp>
-      <p:sp>
-        <p:nvSpPr>
-          <p:cNvPr id="64" name="R2Time"/>
-          <p:cNvSpPr/>
-          <p:nvPr/>
-        </p:nvSpPr>
-        <p:spPr>
-          <a:xfrm>
-            <a:off x="6780000" y="3115000"/>
-            <a:ext cx="1100000" cy="260000"/>
-          </a:xfrm>
-          <a:prstGeom prst="rect">
-            <a:avLst/>
-          </a:prstGeom>
-          <a:noFill/>
-          <a:ln/>
-        </p:spPr>
-        <p:txBody>
-          <a:bodyPr wrap="square" lIns="0" tIns="0" rIns="0" bIns="0" rtlCol="0" anchor="ctr"/>
-          <a:lstStyle/>
-          <a:p>
-            <a:pPr marL="0" indent="0">
-              <a:buNone/>
-            </a:pPr>
-            <a:r>
-              <a:rPr lang="en-US" sz="1000" b="1" kern="0" spc="300" dirty="0">
-                <a:solidFill>
-                  <a:srgbClr val="8A8A8A"/>
-                </a:solidFill>
-                <a:latin typeface="Calibri" pitchFamily="34" charset="0"/>
-              </a:rPr>
-              <a:t>2:00 AM ET</a:t>
-            </a:r>
-          </a:p>
-        </p:txBody>
-      </p:sp>
-      <p:sp>
-        <p:nvSpPr>
-          <p:cNvPr id="65" name="R2Text"/>
-          <p:cNvSpPr/>
-          <p:nvPr/>
-        </p:nvSpPr>
-        <p:spPr>
-          <a:xfrm>
-            <a:off x="6780000" y="3355000"/>
-            <a:ext cx="4750000" cy="430000"/>
-          </a:xfrm>
-          <a:prstGeom prst="rect">
-            <a:avLst/>
-          </a:prstGeom>
-          <a:noFill/>
-          <a:ln/>
-        </p:spPr>
-        <p:txBody>
-          <a:bodyPr wrap="square" lIns="0" tIns="0" rIns="0" bIns="0" rtlCol="0" anchor="t"/>
-          <a:lstStyle/>
-          <a:p>
-            <a:pPr marL="0" indent="0">
-              <a:buNone/>
-            </a:pPr>
-            <a:r>
-              <a:rPr lang="en-US" sz="1200" dirty="0">
-                <a:solidFill>
-                  <a:srgbClr val="1B1B1B"/>
-                </a:solidFill>
-                <a:latin typeface="Calibri" pitchFamily="34" charset="0"/>
-              </a:rPr>
-              <a:t>AI investigation kicks off automatically  —  no human triage needed.</a:t>
-            </a:r>
-          </a:p>
-        </p:txBody>
-      </p:sp>
-      <p:sp>
-        <p:nvSpPr>
-          <p:cNvPr id="66" name="R3Dot"/>
-          <p:cNvSpPr/>
-          <p:nvPr/>
-        </p:nvSpPr>
-        <p:spPr>
-          <a:xfrm>
-            <a:off x="6460000" y="3770000"/>
-            <a:ext cx="182880" cy="182880"/>
-          </a:xfrm>
-          <a:prstGeom prst="ellipse">
-            <a:avLst/>
-          </a:prstGeom>
-          <a:solidFill>
-            <a:srgbClr val="FFCD41"/>
-          </a:solidFill>
-          <a:ln w="12700">
-            <a:solidFill>
-              <a:srgbClr val="FFCD41"/>
-            </a:solidFill>
-            <a:prstDash val="solid"/>
-          </a:ln>
-        </p:spPr>
-      </p:sp>
-      <p:sp>
-        <p:nvSpPr>
-          <p:cNvPr id="67" name="R3Time"/>
-          <p:cNvSpPr/>
-          <p:nvPr/>
-        </p:nvSpPr>
-        <p:spPr>
-          <a:xfrm>
-            <a:off x="6780000" y="3715000"/>
-            <a:ext cx="1800000" cy="260000"/>
-          </a:xfrm>
-          <a:prstGeom prst="rect">
-            <a:avLst/>
-          </a:prstGeom>
-          <a:noFill/>
-          <a:ln/>
-        </p:spPr>
-        <p:txBody>
-          <a:bodyPr wrap="square" lIns="0" tIns="0" rIns="0" bIns="0" rtlCol="0" anchor="ctr"/>
-          <a:lstStyle/>
-          <a:p>
-            <a:pPr marL="0" indent="0">
-              <a:buNone/>
-            </a:pPr>
-            <a:r>
-              <a:rPr lang="en-US" sz="1000" b="1" kern="0" spc="300" dirty="0">
-                <a:solidFill>
-                  <a:srgbClr val="8A8A8A"/>
-                </a:solidFill>
-                <a:latin typeface="Calibri" pitchFamily="34" charset="0"/>
-              </a:rPr>
-              <a:t>2:00 - 2:10 AM ET</a:t>
-            </a:r>
-          </a:p>
-        </p:txBody>
-      </p:sp>
-      <p:sp>
-        <p:nvSpPr>
-          <p:cNvPr id="68" name="R3Text"/>
-          <p:cNvSpPr/>
-          <p:nvPr/>
-        </p:nvSpPr>
-        <p:spPr>
-          <a:xfrm>
-            <a:off x="6780000" y="3955000"/>
-            <a:ext cx="4750000" cy="430000"/>
-          </a:xfrm>
-          <a:prstGeom prst="rect">
-            <a:avLst/>
-          </a:prstGeom>
-          <a:noFill/>
-          <a:ln/>
-        </p:spPr>
-        <p:txBody>
-          <a:bodyPr wrap="square" lIns="0" tIns="0" rIns="0" bIns="0" rtlCol="0" anchor="t"/>
-          <a:lstStyle/>
-          <a:p>
-            <a:pPr marL="0" indent="0">
-              <a:buNone/>
-            </a:pPr>
-            <a:r>
-              <a:rPr lang="en-US" sz="1200" dirty="0">
-                <a:solidFill>
-                  <a:srgbClr val="1B1B1B"/>
-                </a:solidFill>
-                <a:latin typeface="Calibri" pitchFamily="34" charset="0"/>
-              </a:rPr>
-              <a:t>Reads ServiceNow, Autosys, SSISDB and SSIS package source in parallel.</a:t>
-            </a:r>
-          </a:p>
-        </p:txBody>
-      </p:sp>
-      <p:sp>
-        <p:nvSpPr>
-          <p:cNvPr id="69" name="R4Dot"/>
-          <p:cNvSpPr/>
-          <p:nvPr/>
-        </p:nvSpPr>
-        <p:spPr>
-          <a:xfrm>
-            <a:off x="6460000" y="4370000"/>
-            <a:ext cx="182880" cy="182880"/>
-          </a:xfrm>
-          <a:prstGeom prst="ellipse">
-            <a:avLst/>
-          </a:prstGeom>
-          <a:solidFill>
-            <a:srgbClr val="FFCD41"/>
-          </a:solidFill>
-          <a:ln w="12700">
-            <a:solidFill>
-              <a:srgbClr val="FFCD41"/>
-            </a:solidFill>
-            <a:prstDash val="solid"/>
-          </a:ln>
-        </p:spPr>
-      </p:sp>
-      <p:sp>
-        <p:nvSpPr>
-          <p:cNvPr id="70" name="R4Time"/>
-          <p:cNvSpPr/>
-          <p:nvPr/>
-        </p:nvSpPr>
-        <p:spPr>
-          <a:xfrm>
-            <a:off x="6780000" y="4315000"/>
-            <a:ext cx="1100000" cy="260000"/>
-          </a:xfrm>
-          <a:prstGeom prst="rect">
-            <a:avLst/>
-          </a:prstGeom>
-          <a:noFill/>
-          <a:ln/>
-        </p:spPr>
-        <p:txBody>
-          <a:bodyPr wrap="square" lIns="0" tIns="0" rIns="0" bIns="0" rtlCol="0" anchor="ctr"/>
-          <a:lstStyle/>
-          <a:p>
-            <a:pPr marL="0" indent="0">
-              <a:buNone/>
-            </a:pPr>
-            <a:r>
-              <a:rPr lang="en-US" sz="1000" b="1" kern="0" spc="300" dirty="0">
-                <a:solidFill>
-                  <a:srgbClr val="8A8A8A"/>
-                </a:solidFill>
-                <a:latin typeface="Calibri" pitchFamily="34" charset="0"/>
-              </a:rPr>
-              <a:t>2:13 AM ET</a:t>
-            </a:r>
-          </a:p>
-        </p:txBody>
-      </p:sp>
-      <p:sp>
-        <p:nvSpPr>
-          <p:cNvPr id="71" name="R4Text"/>
-          <p:cNvSpPr/>
-          <p:nvPr/>
-        </p:nvSpPr>
-        <p:spPr>
-          <a:xfrm>
-            <a:off x="6780000" y="4555000"/>
-            <a:ext cx="4750000" cy="600000"/>
-          </a:xfrm>
-          <a:prstGeom prst="rect">
-            <a:avLst/>
-          </a:prstGeom>
-          <a:noFill/>
-          <a:ln/>
-        </p:spPr>
-        <p:txBody>
-          <a:bodyPr wrap="square" lIns="0" tIns="0" rIns="0" bIns="0" rtlCol="0" anchor="t"/>
-          <a:lstStyle/>
-          <a:p>
-            <a:pPr marL="0" indent="0">
-              <a:buNone/>
-            </a:pPr>
-            <a:r>
-              <a:rPr lang="en-US" sz="1200" dirty="0">
-                <a:solidFill>
-                  <a:srgbClr val="1B1B1B"/>
-                </a:solidFill>
-                <a:latin typeface="Calibri" pitchFamily="34" charset="0"/>
-              </a:rPr>
-              <a:t>Diagnosis with confidence score emailed to L2, offshore EGS, and US teams simultaneously.</a:t>
-            </a:r>
-          </a:p>
-        </p:txBody>
-      </p:sp>
-      <p:sp>
-        <p:nvSpPr>
-          <p:cNvPr id="72" name="R5Dot"/>
-          <p:cNvSpPr/>
-          <p:nvPr/>
-        </p:nvSpPr>
-        <p:spPr>
-          <a:xfrm>
-            <a:off x="6460000" y="5180000"/>
-            <a:ext cx="182880" cy="182880"/>
-          </a:xfrm>
-          <a:prstGeom prst="ellipse">
-            <a:avLst/>
-          </a:prstGeom>
-          <a:solidFill>
-            <a:srgbClr val="FFCD41"/>
-          </a:solidFill>
-          <a:ln w="12700">
-            <a:solidFill>
-              <a:srgbClr val="FFCD41"/>
-            </a:solidFill>
-            <a:prstDash val="solid"/>
-          </a:ln>
-        </p:spPr>
-      </p:sp>
-      <p:sp>
-        <p:nvSpPr>
-          <p:cNvPr id="73" name="R5Time"/>
-          <p:cNvSpPr/>
-          <p:nvPr/>
-        </p:nvSpPr>
-        <p:spPr>
-          <a:xfrm>
-            <a:off x="6780000" y="5125000"/>
-            <a:ext cx="1100000" cy="260000"/>
-          </a:xfrm>
-          <a:prstGeom prst="rect">
-            <a:avLst/>
-          </a:prstGeom>
-          <a:noFill/>
-          <a:ln/>
-        </p:spPr>
-        <p:txBody>
-          <a:bodyPr wrap="square" lIns="0" tIns="0" rIns="0" bIns="0" rtlCol="0" anchor="ctr"/>
-          <a:lstStyle/>
-          <a:p>
-            <a:pPr marL="0" indent="0">
-              <a:buNone/>
-            </a:pPr>
-            <a:r>
-              <a:rPr lang="en-US" sz="1000" b="1" kern="0" spc="300" dirty="0">
-                <a:solidFill>
-                  <a:srgbClr val="8A8A8A"/>
-                </a:solidFill>
-                <a:latin typeface="Calibri" pitchFamily="34" charset="0"/>
-              </a:rPr>
-              <a:t>2:13 AM ET</a:t>
-            </a:r>
-          </a:p>
-        </p:txBody>
-      </p:sp>
-      <p:sp>
-        <p:nvSpPr>
-          <p:cNvPr id="74" name="R5Text"/>
-          <p:cNvSpPr/>
-          <p:nvPr/>
-        </p:nvSpPr>
-        <p:spPr>
-          <a:xfrm>
-            <a:off x="6780000" y="5365000"/>
-            <a:ext cx="4750000" cy="600000"/>
-          </a:xfrm>
-          <a:prstGeom prst="rect">
-            <a:avLst/>
-          </a:prstGeom>
-          <a:noFill/>
-          <a:ln/>
-        </p:spPr>
-        <p:txBody>
-          <a:bodyPr wrap="square" lIns="0" tIns="0" rIns="0" bIns="0" rtlCol="0" anchor="t"/>
-          <a:lstStyle/>
-          <a:p>
-            <a:pPr marL="0" indent="0">
-              <a:buNone/>
-            </a:pPr>
-            <a:r>
-              <a:rPr lang="en-US" sz="1200" dirty="0">
-                <a:solidFill>
-                  <a:srgbClr val="1B1B1B"/>
-                </a:solidFill>
-                <a:latin typeface="Calibri" pitchFamily="34" charset="0"/>
-              </a:rPr>
-              <a:t>Offshore EGS acts on the diagnosis. Escalates to US DBAs only when SAR access is truly required.</a:t>
-            </a:r>
-          </a:p>
-        </p:txBody>
-      </p:sp>
-      <p:sp>
-        <p:nvSpPr>
-          <p:cNvPr id="75" name="R6Dot"/>
-          <p:cNvSpPr/>
-          <p:nvPr/>
-        </p:nvSpPr>
-        <p:spPr>
-          <a:xfrm>
-            <a:off x="6460000" y="5990000"/>
-            <a:ext cx="182880" cy="182880"/>
-          </a:xfrm>
-          <a:prstGeom prst="ellipse">
-            <a:avLst/>
-          </a:prstGeom>
-          <a:solidFill>
-            <a:srgbClr val="FFCD41"/>
-          </a:solidFill>
-          <a:ln w="12700">
-            <a:solidFill>
-              <a:srgbClr val="FFCD41"/>
-            </a:solidFill>
-            <a:prstDash val="solid"/>
-          </a:ln>
-        </p:spPr>
-      </p:sp>
-      <p:sp>
-        <p:nvSpPr>
-          <p:cNvPr id="76" name="R6Time"/>
-          <p:cNvSpPr/>
-          <p:nvPr/>
-        </p:nvSpPr>
-        <p:spPr>
-          <a:xfrm>
-            <a:off x="6780000" y="5935000"/>
-            <a:ext cx="1300000" cy="260000"/>
-          </a:xfrm>
-          <a:prstGeom prst="rect">
-            <a:avLst/>
-          </a:prstGeom>
-          <a:noFill/>
-          <a:ln/>
-        </p:spPr>
-        <p:txBody>
-          <a:bodyPr wrap="square" lIns="0" tIns="0" rIns="0" bIns="0" rtlCol="0" anchor="ctr"/>
-          <a:lstStyle/>
-          <a:p>
-            <a:pPr marL="0" indent="0">
-              <a:buNone/>
-            </a:pPr>
-            <a:r>
-              <a:rPr lang="en-US" sz="1000" b="1" kern="0" spc="300" dirty="0">
-                <a:solidFill>
-                  <a:srgbClr val="B89000"/>
-                </a:solidFill>
-                <a:latin typeface="Calibri" pitchFamily="34" charset="0"/>
-              </a:rPr>
-              <a:t>2:15 AM ET</a:t>
-            </a:r>
-          </a:p>
-        </p:txBody>
-      </p:sp>
-      <p:sp>
-        <p:nvSpPr>
-          <p:cNvPr id="77" name="R6Text"/>
-          <p:cNvSpPr/>
-          <p:nvPr/>
-        </p:nvSpPr>
-        <p:spPr>
-          <a:xfrm>
-            <a:off x="6780000" y="6175000"/>
-            <a:ext cx="4750000" cy="280000"/>
-          </a:xfrm>
-          <a:prstGeom prst="rect">
-            <a:avLst/>
-          </a:prstGeom>
-          <a:noFill/>
-          <a:ln/>
-        </p:spPr>
-        <p:txBody>
-          <a:bodyPr wrap="square" lIns="0" tIns="0" rIns="0" bIns="0" rtlCol="0" anchor="t"/>
-          <a:lstStyle/>
-          <a:p>
-            <a:pPr marL="0" indent="0">
-              <a:buNone/>
-            </a:pPr>
-            <a:r>
-              <a:rPr lang="en-US" sz="1200" b="1" dirty="0">
-                <a:solidFill>
-                  <a:srgbClr val="1B1B1B"/>
-                </a:solidFill>
-                <a:latin typeface="Calibri" pitchFamily="34" charset="0"/>
-              </a:rPr>
-              <a:t>Users updated within 15 minutes  —  any time, any region.</a:t>
-            </a:r>
-          </a:p>
-        </p:txBody>
-      </p:sp>
-    </p:spTree>
-  </p:cSld>
-  <p:clrMapOvr>
-    <a:masterClrMapping/>
-  </p:clrMapOvr>
-</p:sld>
-</file>
-
-<file path=ppt/slides/slide7.xml><?xml version="1.0" encoding="utf-8"?>
+<file path=ppt/slides/slide5.xml><?xml version="1.0" encoding="utf-8"?>
 <p:sld xmlns:a="http://schemas.openxmlformats.org/drawingml/2006/main" xmlns:r="http://schemas.openxmlformats.org/officeDocument/2006/relationships" xmlns:p="http://schemas.openxmlformats.org/presentationml/2006/main">
   <p:cSld name="Slide 6">
     <p:bg>
@@ -7472,7 +6886,7 @@
                 </a:solidFill>
                 <a:latin typeface="Calibri" pitchFamily="34" charset="0"/>
               </a:rPr>
-              <a:t>7 / 8</a:t>
+              <a:t>7 / 9</a:t>
             </a:r>
           </a:p>
         </p:txBody>
@@ -8414,7 +7828,7 @@
                 <a:ea typeface="Calibri" pitchFamily="34" charset="-122"/>
                 <a:cs typeface="Calibri" pitchFamily="34" charset="-120"/>
               </a:rPr>
-              <a:t>8 / 8</a:t>
+              <a:t>8 / 9</a:t>
             </a:r>
             <a:endParaRPr lang="en-US" sz="900" dirty="0"/>
           </a:p>
@@ -8987,6 +8401,1555 @@
               <a:t>Where confidence is high, suggest the actual code change. Engineer still approves and merges.</a:t>
             </a:r>
             <a:endParaRPr lang="en-US" sz="1400" dirty="0"/>
+          </a:p>
+        </p:txBody>
+      </p:sp>
+    </p:spTree>
+  </p:cSld>
+  <p:clrMapOvr>
+    <a:masterClrMapping/>
+  </p:clrMapOvr>
+</p:sld>
+</file>
+
+<file path=ppt/slides/slide9.xml><?xml version="1.0" encoding="utf-8"?>
+<p:sld xmlns:a="http://schemas.openxmlformats.org/drawingml/2006/main" xmlns:r="http://schemas.openxmlformats.org/officeDocument/2006/relationships" xmlns:p="http://schemas.openxmlformats.org/presentationml/2006/main">
+  <p:cSld name="Slide 5">
+    <p:bg>
+      <p:bgPr>
+        <a:solidFill>
+          <a:srgbClr val="FFFFFF"/>
+        </a:solidFill>
+        <a:effectLst/>
+      </p:bgPr>
+    </p:bg>
+    <p:spTree>
+      <p:nvGrpSpPr>
+        <p:cNvPr id="1" name=""/>
+        <p:cNvGrpSpPr/>
+        <p:nvPr/>
+      </p:nvGrpSpPr>
+      <p:grpSpPr>
+        <a:xfrm>
+          <a:off x="0" y="0"/>
+          <a:ext cx="0" cy="0"/>
+          <a:chOff x="0" y="0"/>
+          <a:chExt cx="0" cy="0"/>
+        </a:xfrm>
+      </p:grpSpPr>
+      <p:sp>
+        <p:nvSpPr>
+          <p:cNvPr id="2" name="TopBar"/>
+          <p:cNvSpPr/>
+          <p:nvPr/>
+        </p:nvSpPr>
+        <p:spPr>
+          <a:xfrm>
+            <a:off x="0" y="0"/>
+            <a:ext cx="12161520" cy="164592"/>
+          </a:xfrm>
+          <a:prstGeom prst="rect">
+            <a:avLst/>
+          </a:prstGeom>
+          <a:solidFill>
+            <a:srgbClr val="D71E28"/>
+          </a:solidFill>
+          <a:ln w="12700">
+            <a:solidFill>
+              <a:srgbClr val="D71E28"/>
+            </a:solidFill>
+            <a:prstDash val="solid"/>
+          </a:ln>
+        </p:spPr>
+      </p:sp>
+      <p:sp>
+        <p:nvSpPr>
+          <p:cNvPr id="3" name="Eyebrow"/>
+          <p:cNvSpPr/>
+          <p:nvPr/>
+        </p:nvSpPr>
+        <p:spPr>
+          <a:xfrm>
+            <a:off x="731520" y="502920"/>
+            <a:ext cx="10058400" cy="320040"/>
+          </a:xfrm>
+          <a:prstGeom prst="rect">
+            <a:avLst/>
+          </a:prstGeom>
+          <a:noFill/>
+          <a:ln/>
+        </p:spPr>
+        <p:txBody>
+          <a:bodyPr wrap="square" lIns="0" tIns="0" rIns="0" bIns="0" rtlCol="0" anchor="ctr"/>
+          <a:lstStyle/>
+          <a:p>
+            <a:pPr marL="0" indent="0">
+              <a:buNone/>
+            </a:pPr>
+            <a:r>
+              <a:rPr lang="en-US" sz="1100" b="1" kern="0" spc="600" dirty="0">
+                <a:solidFill>
+                  <a:srgbClr val="D71E28"/>
+                </a:solidFill>
+                <a:latin typeface="Calibri" pitchFamily="34" charset="0"/>
+              </a:rPr>
+              <a:t>PROCESS COMPARISON</a:t>
+            </a:r>
+          </a:p>
+        </p:txBody>
+      </p:sp>
+      <p:sp>
+        <p:nvSpPr>
+          <p:cNvPr id="4" name="Title"/>
+          <p:cNvSpPr/>
+          <p:nvPr/>
+        </p:nvSpPr>
+        <p:spPr>
+          <a:xfrm>
+            <a:off x="731520" y="900000"/>
+            <a:ext cx="10698480" cy="600000"/>
+          </a:xfrm>
+          <a:prstGeom prst="rect">
+            <a:avLst/>
+          </a:prstGeom>
+          <a:noFill/>
+          <a:ln/>
+        </p:spPr>
+        <p:txBody>
+          <a:bodyPr wrap="square" lIns="0" tIns="0" rIns="0" bIns="0" rtlCol="0" anchor="ctr"/>
+          <a:lstStyle/>
+          <a:p>
+            <a:pPr marL="0" indent="0">
+              <a:buNone/>
+            </a:pPr>
+            <a:r>
+              <a:rPr lang="en-US" sz="3200" b="1" dirty="0">
+                <a:solidFill>
+                  <a:srgbClr val="1B1B1B"/>
+                </a:solidFill>
+                <a:latin typeface="Calibri" pitchFamily="34" charset="0"/>
+              </a:rPr>
+              <a:t>From a multi-team relay to a single automated diagnosis.</a:t>
+            </a:r>
+          </a:p>
+        </p:txBody>
+      </p:sp>
+      <p:sp>
+        <p:nvSpPr>
+          <p:cNvPr id="5" name="PageNum"/>
+          <p:cNvSpPr/>
+          <p:nvPr/>
+        </p:nvSpPr>
+        <p:spPr>
+          <a:xfrm>
+            <a:off x="10789920" y="6400800"/>
+            <a:ext cx="822960" cy="274320"/>
+          </a:xfrm>
+          <a:prstGeom prst="rect">
+            <a:avLst/>
+          </a:prstGeom>
+          <a:noFill/>
+          <a:ln/>
+        </p:spPr>
+        <p:txBody>
+          <a:bodyPr wrap="square" lIns="0" tIns="0" rIns="0" bIns="0" rtlCol="0" anchor="ctr"/>
+          <a:lstStyle/>
+          <a:p>
+            <a:pPr marL="0" indent="0" algn="r">
+              <a:buNone/>
+            </a:pPr>
+            <a:r>
+              <a:rPr lang="en-US" sz="900" dirty="0">
+                <a:solidFill>
+                  <a:srgbClr val="8A8A8A"/>
+                </a:solidFill>
+                <a:latin typeface="Calibri" pitchFamily="34" charset="0"/>
+              </a:rPr>
+              <a:t>6 / 9</a:t>
+            </a:r>
+          </a:p>
+        </p:txBody>
+      </p:sp>
+      <p:sp>
+        <p:nvSpPr>
+          <p:cNvPr id="10" name="LeftLabel"/>
+          <p:cNvSpPr/>
+          <p:nvPr/>
+        </p:nvSpPr>
+        <p:spPr>
+          <a:xfrm>
+            <a:off x="571500" y="1750000"/>
+            <a:ext cx="5440680" cy="280000"/>
+          </a:xfrm>
+          <a:prstGeom prst="rect">
+            <a:avLst/>
+          </a:prstGeom>
+          <a:noFill/>
+          <a:ln/>
+        </p:spPr>
+        <p:txBody>
+          <a:bodyPr wrap="square" lIns="0" tIns="0" rIns="0" bIns="0" rtlCol="0" anchor="ctr"/>
+          <a:lstStyle/>
+          <a:p>
+            <a:pPr marL="0" indent="0">
+              <a:buNone/>
+            </a:pPr>
+            <a:r>
+              <a:rPr lang="en-US" sz="1000" b="1" kern="0" spc="500" dirty="0">
+                <a:solidFill>
+                  <a:srgbClr val="D71E28"/>
+                </a:solidFill>
+                <a:latin typeface="Calibri" pitchFamily="34" charset="0"/>
+              </a:rPr>
+              <a:t>TODAY  ·  MANUAL RELAY</a:t>
+            </a:r>
+          </a:p>
+        </p:txBody>
+      </p:sp>
+      <p:sp>
+        <p:nvSpPr>
+          <p:cNvPr id="11" name="LeftHeading"/>
+          <p:cNvSpPr/>
+          <p:nvPr/>
+        </p:nvSpPr>
+        <p:spPr>
+          <a:xfrm>
+            <a:off x="571500" y="2050000"/>
+            <a:ext cx="5440680" cy="380000"/>
+          </a:xfrm>
+          <a:prstGeom prst="rect">
+            <a:avLst/>
+          </a:prstGeom>
+          <a:noFill/>
+          <a:ln/>
+        </p:spPr>
+        <p:txBody>
+          <a:bodyPr wrap="square" lIns="0" tIns="0" rIns="0" bIns="0" rtlCol="0" anchor="ctr"/>
+          <a:lstStyle/>
+          <a:p>
+            <a:pPr marL="0" indent="0">
+              <a:buNone/>
+            </a:pPr>
+            <a:r>
+              <a:rPr lang="en-US" sz="1800" b="1" dirty="0">
+                <a:solidFill>
+                  <a:srgbClr val="1B1B1B"/>
+                </a:solidFill>
+                <a:latin typeface="Calibri" pitchFamily="34" charset="0"/>
+              </a:rPr>
+              <a:t>Up to 10 hours, six handoffs.</a:t>
+            </a:r>
+          </a:p>
+        </p:txBody>
+      </p:sp>
+      <p:sp>
+        <p:nvSpPr>
+          <p:cNvPr id="12" name="LeftRail"/>
+          <p:cNvSpPr/>
+          <p:nvPr/>
+        </p:nvSpPr>
+        <p:spPr>
+          <a:xfrm>
+            <a:off x="811000" y="2570000"/>
+            <a:ext cx="22860" cy="3640000"/>
+          </a:xfrm>
+          <a:prstGeom prst="rect">
+            <a:avLst/>
+          </a:prstGeom>
+          <a:solidFill>
+            <a:srgbClr val="E5E0D5"/>
+          </a:solidFill>
+          <a:ln w="12700">
+            <a:solidFill>
+              <a:srgbClr val="E5E0D5"/>
+            </a:solidFill>
+            <a:prstDash val="solid"/>
+          </a:ln>
+        </p:spPr>
+      </p:sp>
+      <p:sp>
+        <p:nvSpPr>
+          <p:cNvPr id="20" name="L1Dot"/>
+          <p:cNvSpPr/>
+          <p:nvPr/>
+        </p:nvSpPr>
+        <p:spPr>
+          <a:xfrm>
+            <a:off x="731520" y="2570000"/>
+            <a:ext cx="182880" cy="182880"/>
+          </a:xfrm>
+          <a:prstGeom prst="ellipse">
+            <a:avLst/>
+          </a:prstGeom>
+          <a:solidFill>
+            <a:srgbClr val="D71E28"/>
+          </a:solidFill>
+          <a:ln w="12700">
+            <a:solidFill>
+              <a:srgbClr val="D71E28"/>
+            </a:solidFill>
+            <a:prstDash val="solid"/>
+          </a:ln>
+        </p:spPr>
+      </p:sp>
+      <p:sp>
+        <p:nvSpPr>
+          <p:cNvPr id="21" name="L1Time"/>
+          <p:cNvSpPr/>
+          <p:nvPr/>
+        </p:nvSpPr>
+        <p:spPr>
+          <a:xfrm>
+            <a:off x="1050000" y="2515000"/>
+            <a:ext cx="1100000" cy="260000"/>
+          </a:xfrm>
+          <a:prstGeom prst="rect">
+            <a:avLst/>
+          </a:prstGeom>
+          <a:noFill/>
+          <a:ln/>
+        </p:spPr>
+        <p:txBody>
+          <a:bodyPr wrap="square" lIns="0" tIns="0" rIns="0" bIns="0" rtlCol="0" anchor="ctr"/>
+          <a:lstStyle/>
+          <a:p>
+            <a:pPr marL="0" indent="0">
+              <a:buNone/>
+            </a:pPr>
+            <a:r>
+              <a:rPr lang="en-US" sz="1000" b="1" kern="0" spc="300" dirty="0">
+                <a:solidFill>
+                  <a:srgbClr val="8A8A8A"/>
+                </a:solidFill>
+                <a:latin typeface="Calibri" pitchFamily="34" charset="0"/>
+              </a:rPr>
+              <a:t>2:00 AM ET</a:t>
+            </a:r>
+          </a:p>
+        </p:txBody>
+      </p:sp>
+      <p:sp>
+        <p:nvSpPr>
+          <p:cNvPr id="22" name="L1Text"/>
+          <p:cNvSpPr/>
+          <p:nvPr/>
+        </p:nvSpPr>
+        <p:spPr>
+          <a:xfrm>
+            <a:off x="1050000" y="2755000"/>
+            <a:ext cx="4900000" cy="430000"/>
+          </a:xfrm>
+          <a:prstGeom prst="rect">
+            <a:avLst/>
+          </a:prstGeom>
+          <a:noFill/>
+          <a:ln/>
+        </p:spPr>
+        <p:txBody>
+          <a:bodyPr wrap="square" lIns="0" tIns="0" rIns="0" bIns="0" rtlCol="0" anchor="t"/>
+          <a:lstStyle/>
+          <a:p>
+            <a:pPr marL="0" indent="0">
+              <a:buNone/>
+            </a:pPr>
+            <a:r>
+              <a:rPr lang="en-US" sz="1200" dirty="0">
+                <a:solidFill>
+                  <a:srgbClr val="1B1B1B"/>
+                </a:solidFill>
+                <a:latin typeface="Calibri" pitchFamily="34" charset="0"/>
+              </a:rPr>
+              <a:t>Job fails. ServiceNow incident auto-generated.</a:t>
+            </a:r>
+          </a:p>
+        </p:txBody>
+      </p:sp>
+      <p:sp>
+        <p:nvSpPr>
+          <p:cNvPr id="23" name="L2Dot"/>
+          <p:cNvSpPr/>
+          <p:nvPr/>
+        </p:nvSpPr>
+        <p:spPr>
+          <a:xfrm>
+            <a:off x="731520" y="3170000"/>
+            <a:ext cx="182880" cy="182880"/>
+          </a:xfrm>
+          <a:prstGeom prst="ellipse">
+            <a:avLst/>
+          </a:prstGeom>
+          <a:solidFill>
+            <a:srgbClr val="D71E28"/>
+          </a:solidFill>
+          <a:ln w="12700">
+            <a:solidFill>
+              <a:srgbClr val="D71E28"/>
+            </a:solidFill>
+            <a:prstDash val="solid"/>
+          </a:ln>
+        </p:spPr>
+      </p:sp>
+      <p:sp>
+        <p:nvSpPr>
+          <p:cNvPr id="24" name="L2Time"/>
+          <p:cNvSpPr/>
+          <p:nvPr/>
+        </p:nvSpPr>
+        <p:spPr>
+          <a:xfrm>
+            <a:off x="1050000" y="3115000"/>
+            <a:ext cx="1100000" cy="260000"/>
+          </a:xfrm>
+          <a:prstGeom prst="rect">
+            <a:avLst/>
+          </a:prstGeom>
+          <a:noFill/>
+          <a:ln/>
+        </p:spPr>
+        <p:txBody>
+          <a:bodyPr wrap="square" lIns="0" tIns="0" rIns="0" bIns="0" rtlCol="0" anchor="ctr"/>
+          <a:lstStyle/>
+          <a:p>
+            <a:pPr marL="0" indent="0">
+              <a:buNone/>
+            </a:pPr>
+            <a:r>
+              <a:rPr lang="en-US" sz="1000" b="1" kern="0" spc="300" dirty="0">
+                <a:solidFill>
+                  <a:srgbClr val="8A8A8A"/>
+                </a:solidFill>
+                <a:latin typeface="Calibri" pitchFamily="34" charset="0"/>
+              </a:rPr>
+              <a:t>2:05 AM ET</a:t>
+            </a:r>
+          </a:p>
+        </p:txBody>
+      </p:sp>
+      <p:sp>
+        <p:nvSpPr>
+          <p:cNvPr id="25" name="L2Text"/>
+          <p:cNvSpPr/>
+          <p:nvPr/>
+        </p:nvSpPr>
+        <p:spPr>
+          <a:xfrm>
+            <a:off x="1050000" y="3355000"/>
+            <a:ext cx="4900000" cy="430000"/>
+          </a:xfrm>
+          <a:prstGeom prst="rect">
+            <a:avLst/>
+          </a:prstGeom>
+          <a:noFill/>
+          <a:ln/>
+        </p:spPr>
+        <p:txBody>
+          <a:bodyPr wrap="square" lIns="0" tIns="0" rIns="0" bIns="0" rtlCol="0" anchor="t"/>
+          <a:lstStyle/>
+          <a:p>
+            <a:pPr marL="0" indent="0">
+              <a:buNone/>
+            </a:pPr>
+            <a:r>
+              <a:rPr lang="en-US" sz="1200" dirty="0">
+                <a:solidFill>
+                  <a:srgbClr val="1B1B1B"/>
+                </a:solidFill>
+                <a:latin typeface="Calibri" pitchFamily="34" charset="0"/>
+              </a:rPr>
+              <a:t>Offshore EGS L2 picks up the ticket and starts to investigate.</a:t>
+            </a:r>
+          </a:p>
+        </p:txBody>
+      </p:sp>
+      <p:sp>
+        <p:nvSpPr>
+          <p:cNvPr id="26" name="L3Dot"/>
+          <p:cNvSpPr/>
+          <p:nvPr/>
+        </p:nvSpPr>
+        <p:spPr>
+          <a:xfrm>
+            <a:off x="731520" y="3770000"/>
+            <a:ext cx="182880" cy="182880"/>
+          </a:xfrm>
+          <a:prstGeom prst="ellipse">
+            <a:avLst/>
+          </a:prstGeom>
+          <a:solidFill>
+            <a:srgbClr val="D71E28"/>
+          </a:solidFill>
+          <a:ln w="12700">
+            <a:solidFill>
+              <a:srgbClr val="D71E28"/>
+            </a:solidFill>
+            <a:prstDash val="solid"/>
+          </a:ln>
+        </p:spPr>
+      </p:sp>
+      <p:sp>
+        <p:nvSpPr>
+          <p:cNvPr id="27" name="L3Time"/>
+          <p:cNvSpPr/>
+          <p:nvPr/>
+        </p:nvSpPr>
+        <p:spPr>
+          <a:xfrm>
+            <a:off x="1050000" y="3715000"/>
+            <a:ext cx="1100000" cy="260000"/>
+          </a:xfrm>
+          <a:prstGeom prst="rect">
+            <a:avLst/>
+          </a:prstGeom>
+          <a:noFill/>
+          <a:ln/>
+        </p:spPr>
+        <p:txBody>
+          <a:bodyPr wrap="square" lIns="0" tIns="0" rIns="0" bIns="0" rtlCol="0" anchor="ctr"/>
+          <a:lstStyle/>
+          <a:p>
+            <a:pPr marL="0" indent="0">
+              <a:buNone/>
+            </a:pPr>
+            <a:r>
+              <a:rPr lang="en-US" sz="1000" b="1" kern="0" spc="300" dirty="0">
+                <a:solidFill>
+                  <a:srgbClr val="8A8A8A"/>
+                </a:solidFill>
+                <a:latin typeface="Calibri" pitchFamily="34" charset="0"/>
+              </a:rPr>
+              <a:t>2:30 AM ET</a:t>
+            </a:r>
+          </a:p>
+        </p:txBody>
+      </p:sp>
+      <p:sp>
+        <p:nvSpPr>
+          <p:cNvPr id="28" name="L3Text"/>
+          <p:cNvSpPr/>
+          <p:nvPr/>
+        </p:nvSpPr>
+        <p:spPr>
+          <a:xfrm>
+            <a:off x="1050000" y="3955000"/>
+            <a:ext cx="4900000" cy="430000"/>
+          </a:xfrm>
+          <a:prstGeom prst="rect">
+            <a:avLst/>
+          </a:prstGeom>
+          <a:noFill/>
+          <a:ln/>
+        </p:spPr>
+        <p:txBody>
+          <a:bodyPr wrap="square" lIns="0" tIns="0" rIns="0" bIns="0" rtlCol="0" anchor="t"/>
+          <a:lstStyle/>
+          <a:p>
+            <a:pPr marL="0" indent="0">
+              <a:buNone/>
+            </a:pPr>
+            <a:r>
+              <a:rPr lang="en-US" sz="1200" dirty="0">
+                <a:solidFill>
+                  <a:srgbClr val="1B1B1B"/>
+                </a:solidFill>
+                <a:latin typeface="Calibri" pitchFamily="34" charset="0"/>
+              </a:rPr>
+              <a:t>L2 engages EGS DBAs offshore. DBAs spend time identifying the issue.</a:t>
+            </a:r>
+          </a:p>
+        </p:txBody>
+      </p:sp>
+      <p:sp>
+        <p:nvSpPr>
+          <p:cNvPr id="29" name="L4Dot"/>
+          <p:cNvSpPr/>
+          <p:nvPr/>
+        </p:nvSpPr>
+        <p:spPr>
+          <a:xfrm>
+            <a:off x="731520" y="4370000"/>
+            <a:ext cx="182880" cy="182880"/>
+          </a:xfrm>
+          <a:prstGeom prst="ellipse">
+            <a:avLst/>
+          </a:prstGeom>
+          <a:solidFill>
+            <a:srgbClr val="D71E28"/>
+          </a:solidFill>
+          <a:ln w="12700">
+            <a:solidFill>
+              <a:srgbClr val="D71E28"/>
+            </a:solidFill>
+            <a:prstDash val="solid"/>
+          </a:ln>
+        </p:spPr>
+      </p:sp>
+      <p:sp>
+        <p:nvSpPr>
+          <p:cNvPr id="30" name="L4Time"/>
+          <p:cNvSpPr/>
+          <p:nvPr/>
+        </p:nvSpPr>
+        <p:spPr>
+          <a:xfrm>
+            <a:off x="1050000" y="4315000"/>
+            <a:ext cx="1100000" cy="260000"/>
+          </a:xfrm>
+          <a:prstGeom prst="rect">
+            <a:avLst/>
+          </a:prstGeom>
+          <a:noFill/>
+          <a:ln/>
+        </p:spPr>
+        <p:txBody>
+          <a:bodyPr wrap="square" lIns="0" tIns="0" rIns="0" bIns="0" rtlCol="0" anchor="ctr"/>
+          <a:lstStyle/>
+          <a:p>
+            <a:pPr marL="0" indent="0">
+              <a:buNone/>
+            </a:pPr>
+            <a:r>
+              <a:rPr lang="en-US" sz="1000" b="1" kern="0" spc="300" dirty="0">
+                <a:solidFill>
+                  <a:srgbClr val="8A8A8A"/>
+                </a:solidFill>
+                <a:latin typeface="Calibri" pitchFamily="34" charset="0"/>
+              </a:rPr>
+              <a:t>3:00 AM ET</a:t>
+            </a:r>
+          </a:p>
+        </p:txBody>
+      </p:sp>
+      <p:sp>
+        <p:nvSpPr>
+          <p:cNvPr id="31" name="L4Text"/>
+          <p:cNvSpPr/>
+          <p:nvPr/>
+        </p:nvSpPr>
+        <p:spPr>
+          <a:xfrm>
+            <a:off x="1050000" y="4555000"/>
+            <a:ext cx="4900000" cy="600000"/>
+          </a:xfrm>
+          <a:prstGeom prst="rect">
+            <a:avLst/>
+          </a:prstGeom>
+          <a:noFill/>
+          <a:ln/>
+        </p:spPr>
+        <p:txBody>
+          <a:bodyPr wrap="square" lIns="0" tIns="0" rIns="0" bIns="0" rtlCol="0" anchor="t"/>
+          <a:lstStyle/>
+          <a:p>
+            <a:pPr marL="0" indent="0">
+              <a:buNone/>
+            </a:pPr>
+            <a:r>
+              <a:rPr lang="en-US" sz="1200" dirty="0">
+                <a:solidFill>
+                  <a:srgbClr val="1B1B1B"/>
+                </a:solidFill>
+                <a:latin typeface="Calibri" pitchFamily="34" charset="0"/>
+              </a:rPr>
+              <a:t>Branch by issue type:  SAR server → page US DBAs (may not answer).  Server / permissions → DBAs resolve.  Otherwise → punt to developers.</a:t>
+            </a:r>
+          </a:p>
+        </p:txBody>
+      </p:sp>
+      <p:sp>
+        <p:nvSpPr>
+          <p:cNvPr id="32" name="L5Dot"/>
+          <p:cNvSpPr/>
+          <p:nvPr/>
+        </p:nvSpPr>
+        <p:spPr>
+          <a:xfrm>
+            <a:off x="731520" y="5180000"/>
+            <a:ext cx="182880" cy="182880"/>
+          </a:xfrm>
+          <a:prstGeom prst="ellipse">
+            <a:avLst/>
+          </a:prstGeom>
+          <a:solidFill>
+            <a:srgbClr val="D71E28"/>
+          </a:solidFill>
+          <a:ln w="12700">
+            <a:solidFill>
+              <a:srgbClr val="D71E28"/>
+            </a:solidFill>
+            <a:prstDash val="solid"/>
+          </a:ln>
+        </p:spPr>
+      </p:sp>
+      <p:sp>
+        <p:nvSpPr>
+          <p:cNvPr id="33" name="L5Time"/>
+          <p:cNvSpPr/>
+          <p:nvPr/>
+        </p:nvSpPr>
+        <p:spPr>
+          <a:xfrm>
+            <a:off x="1050000" y="5125000"/>
+            <a:ext cx="1800000" cy="260000"/>
+          </a:xfrm>
+          <a:prstGeom prst="rect">
+            <a:avLst/>
+          </a:prstGeom>
+          <a:noFill/>
+          <a:ln/>
+        </p:spPr>
+        <p:txBody>
+          <a:bodyPr wrap="square" lIns="0" tIns="0" rIns="0" bIns="0" rtlCol="0" anchor="ctr"/>
+          <a:lstStyle/>
+          <a:p>
+            <a:pPr marL="0" indent="0">
+              <a:buNone/>
+            </a:pPr>
+            <a:r>
+              <a:rPr lang="en-US" sz="1000" b="1" kern="0" spc="300" dirty="0">
+                <a:solidFill>
+                  <a:srgbClr val="8A8A8A"/>
+                </a:solidFill>
+                <a:latin typeface="Calibri" pitchFamily="34" charset="0"/>
+              </a:rPr>
+              <a:t>9:00 - 11:00 AM ET</a:t>
+            </a:r>
+          </a:p>
+        </p:txBody>
+      </p:sp>
+      <p:sp>
+        <p:nvSpPr>
+          <p:cNvPr id="34" name="L5Text"/>
+          <p:cNvSpPr/>
+          <p:nvPr/>
+        </p:nvSpPr>
+        <p:spPr>
+          <a:xfrm>
+            <a:off x="1050000" y="5365000"/>
+            <a:ext cx="4900000" cy="600000"/>
+          </a:xfrm>
+          <a:prstGeom prst="rect">
+            <a:avLst/>
+          </a:prstGeom>
+          <a:noFill/>
+          <a:ln/>
+        </p:spPr>
+        <p:txBody>
+          <a:bodyPr wrap="square" lIns="0" tIns="0" rIns="0" bIns="0" rtlCol="0" anchor="t"/>
+          <a:lstStyle/>
+          <a:p>
+            <a:pPr marL="0" indent="0">
+              <a:buNone/>
+            </a:pPr>
+            <a:r>
+              <a:rPr lang="en-US" sz="1200" dirty="0">
+                <a:solidFill>
+                  <a:srgbClr val="1B1B1B"/>
+                </a:solidFill>
+                <a:latin typeface="Calibri" pitchFamily="34" charset="0"/>
+              </a:rPr>
+              <a:t>US DBAs come online, review jobs and execution reports, then ask app developers to inspect the SSIS packages.</a:t>
+            </a:r>
+          </a:p>
+        </p:txBody>
+      </p:sp>
+      <p:sp>
+        <p:nvSpPr>
+          <p:cNvPr id="35" name="L6Dot"/>
+          <p:cNvSpPr/>
+          <p:nvPr/>
+        </p:nvSpPr>
+        <p:spPr>
+          <a:xfrm>
+            <a:off x="731520" y="5990000"/>
+            <a:ext cx="182880" cy="182880"/>
+          </a:xfrm>
+          <a:prstGeom prst="ellipse">
+            <a:avLst/>
+          </a:prstGeom>
+          <a:solidFill>
+            <a:srgbClr val="D71E28"/>
+          </a:solidFill>
+          <a:ln w="12700">
+            <a:solidFill>
+              <a:srgbClr val="D71E28"/>
+            </a:solidFill>
+            <a:prstDash val="solid"/>
+          </a:ln>
+        </p:spPr>
+      </p:sp>
+      <p:sp>
+        <p:nvSpPr>
+          <p:cNvPr id="36" name="L6Time"/>
+          <p:cNvSpPr/>
+          <p:nvPr/>
+        </p:nvSpPr>
+        <p:spPr>
+          <a:xfrm>
+            <a:off x="1050000" y="5935000"/>
+            <a:ext cx="1300000" cy="260000"/>
+          </a:xfrm>
+          <a:prstGeom prst="rect">
+            <a:avLst/>
+          </a:prstGeom>
+          <a:noFill/>
+          <a:ln/>
+        </p:spPr>
+        <p:txBody>
+          <a:bodyPr wrap="square" lIns="0" tIns="0" rIns="0" bIns="0" rtlCol="0" anchor="ctr"/>
+          <a:lstStyle/>
+          <a:p>
+            <a:pPr marL="0" indent="0">
+              <a:buNone/>
+            </a:pPr>
+            <a:r>
+              <a:rPr lang="en-US" sz="1000" b="1" kern="0" spc="300" dirty="0">
+                <a:solidFill>
+                  <a:srgbClr val="D71E28"/>
+                </a:solidFill>
+                <a:latin typeface="Calibri" pitchFamily="34" charset="0"/>
+              </a:rPr>
+              <a:t>12:00 PM ET</a:t>
+            </a:r>
+          </a:p>
+        </p:txBody>
+      </p:sp>
+      <p:sp>
+        <p:nvSpPr>
+          <p:cNvPr id="37" name="L6Text"/>
+          <p:cNvSpPr/>
+          <p:nvPr/>
+        </p:nvSpPr>
+        <p:spPr>
+          <a:xfrm>
+            <a:off x="1050000" y="6175000"/>
+            <a:ext cx="4900000" cy="280000"/>
+          </a:xfrm>
+          <a:prstGeom prst="rect">
+            <a:avLst/>
+          </a:prstGeom>
+          <a:noFill/>
+          <a:ln/>
+        </p:spPr>
+        <p:txBody>
+          <a:bodyPr wrap="square" lIns="0" tIns="0" rIns="0" bIns="0" rtlCol="0" anchor="t"/>
+          <a:lstStyle/>
+          <a:p>
+            <a:pPr marL="0" indent="0">
+              <a:buNone/>
+            </a:pPr>
+            <a:r>
+              <a:rPr lang="en-US" sz="1200" b="1" dirty="0">
+                <a:solidFill>
+                  <a:srgbClr val="D71E28"/>
+                </a:solidFill>
+                <a:latin typeface="Calibri" pitchFamily="34" charset="0"/>
+              </a:rPr>
+              <a:t>L2 finally updates users  —  10 hours later.</a:t>
+            </a:r>
+          </a:p>
+        </p:txBody>
+      </p:sp>
+      <p:sp>
+        <p:nvSpPr>
+          <p:cNvPr id="40" name="Divider"/>
+          <p:cNvSpPr/>
+          <p:nvPr/>
+        </p:nvSpPr>
+        <p:spPr>
+          <a:xfrm>
+            <a:off x="6096000" y="2050000"/>
+            <a:ext cx="12700" cy="4400000"/>
+          </a:xfrm>
+          <a:prstGeom prst="rect">
+            <a:avLst/>
+          </a:prstGeom>
+          <a:solidFill>
+            <a:srgbClr val="EAEAEA"/>
+          </a:solidFill>
+          <a:ln w="6350">
+            <a:solidFill>
+              <a:srgbClr val="EAEAEA"/>
+            </a:solidFill>
+            <a:prstDash val="solid"/>
+          </a:ln>
+        </p:spPr>
+      </p:sp>
+      <p:sp>
+        <p:nvSpPr>
+          <p:cNvPr id="50" name="RightLabel"/>
+          <p:cNvSpPr/>
+          <p:nvPr/>
+        </p:nvSpPr>
+        <p:spPr>
+          <a:xfrm>
+            <a:off x="6300000" y="1750000"/>
+            <a:ext cx="5440680" cy="280000"/>
+          </a:xfrm>
+          <a:prstGeom prst="rect">
+            <a:avLst/>
+          </a:prstGeom>
+          <a:noFill/>
+          <a:ln/>
+        </p:spPr>
+        <p:txBody>
+          <a:bodyPr wrap="square" lIns="0" tIns="0" rIns="0" bIns="0" rtlCol="0" anchor="ctr"/>
+          <a:lstStyle/>
+          <a:p>
+            <a:pPr marL="0" indent="0">
+              <a:buNone/>
+            </a:pPr>
+            <a:r>
+              <a:rPr lang="en-US" sz="1000" b="1" kern="0" spc="500" dirty="0">
+                <a:solidFill>
+                  <a:srgbClr val="B89000"/>
+                </a:solidFill>
+                <a:latin typeface="Calibri" pitchFamily="34" charset="0"/>
+              </a:rPr>
+              <a:t>WITH AUTOMATION  ·  AI DIAGNOSIS</a:t>
+            </a:r>
+          </a:p>
+        </p:txBody>
+      </p:sp>
+      <p:sp>
+        <p:nvSpPr>
+          <p:cNvPr id="51" name="RightHeading"/>
+          <p:cNvSpPr/>
+          <p:nvPr/>
+        </p:nvSpPr>
+        <p:spPr>
+          <a:xfrm>
+            <a:off x="6300000" y="2050000"/>
+            <a:ext cx="5440680" cy="380000"/>
+          </a:xfrm>
+          <a:prstGeom prst="rect">
+            <a:avLst/>
+          </a:prstGeom>
+          <a:noFill/>
+          <a:ln/>
+        </p:spPr>
+        <p:txBody>
+          <a:bodyPr wrap="square" lIns="0" tIns="0" rIns="0" bIns="0" rtlCol="0" anchor="ctr"/>
+          <a:lstStyle/>
+          <a:p>
+            <a:pPr marL="0" indent="0">
+              <a:buNone/>
+            </a:pPr>
+            <a:r>
+              <a:rPr lang="en-US" sz="1800" b="1" dirty="0">
+                <a:solidFill>
+                  <a:srgbClr val="1B1B1B"/>
+                </a:solidFill>
+                <a:latin typeface="Calibri" pitchFamily="34" charset="0"/>
+              </a:rPr>
+              <a:t>15 minutes, no relay.</a:t>
+            </a:r>
+          </a:p>
+        </p:txBody>
+      </p:sp>
+      <p:sp>
+        <p:nvSpPr>
+          <p:cNvPr id="52" name="RightRail"/>
+          <p:cNvSpPr/>
+          <p:nvPr/>
+        </p:nvSpPr>
+        <p:spPr>
+          <a:xfrm>
+            <a:off x="6539480" y="2570000"/>
+            <a:ext cx="22860" cy="3640000"/>
+          </a:xfrm>
+          <a:prstGeom prst="rect">
+            <a:avLst/>
+          </a:prstGeom>
+          <a:solidFill>
+            <a:srgbClr val="E5E0D5"/>
+          </a:solidFill>
+          <a:ln w="12700">
+            <a:solidFill>
+              <a:srgbClr val="E5E0D5"/>
+            </a:solidFill>
+            <a:prstDash val="solid"/>
+          </a:ln>
+        </p:spPr>
+      </p:sp>
+      <p:sp>
+        <p:nvSpPr>
+          <p:cNvPr id="60" name="R1Dot"/>
+          <p:cNvSpPr/>
+          <p:nvPr/>
+        </p:nvSpPr>
+        <p:spPr>
+          <a:xfrm>
+            <a:off x="6460000" y="2570000"/>
+            <a:ext cx="182880" cy="182880"/>
+          </a:xfrm>
+          <a:prstGeom prst="ellipse">
+            <a:avLst/>
+          </a:prstGeom>
+          <a:solidFill>
+            <a:srgbClr val="FFCD41"/>
+          </a:solidFill>
+          <a:ln w="12700">
+            <a:solidFill>
+              <a:srgbClr val="FFCD41"/>
+            </a:solidFill>
+            <a:prstDash val="solid"/>
+          </a:ln>
+        </p:spPr>
+      </p:sp>
+      <p:sp>
+        <p:nvSpPr>
+          <p:cNvPr id="61" name="R1Time"/>
+          <p:cNvSpPr/>
+          <p:nvPr/>
+        </p:nvSpPr>
+        <p:spPr>
+          <a:xfrm>
+            <a:off x="6780000" y="2515000"/>
+            <a:ext cx="1100000" cy="260000"/>
+          </a:xfrm>
+          <a:prstGeom prst="rect">
+            <a:avLst/>
+          </a:prstGeom>
+          <a:noFill/>
+          <a:ln/>
+        </p:spPr>
+        <p:txBody>
+          <a:bodyPr wrap="square" lIns="0" tIns="0" rIns="0" bIns="0" rtlCol="0" anchor="ctr"/>
+          <a:lstStyle/>
+          <a:p>
+            <a:pPr marL="0" indent="0">
+              <a:buNone/>
+            </a:pPr>
+            <a:r>
+              <a:rPr lang="en-US" sz="1000" b="1" kern="0" spc="300" dirty="0">
+                <a:solidFill>
+                  <a:srgbClr val="8A8A8A"/>
+                </a:solidFill>
+                <a:latin typeface="Calibri" pitchFamily="34" charset="0"/>
+              </a:rPr>
+              <a:t>2:00 AM ET</a:t>
+            </a:r>
+          </a:p>
+        </p:txBody>
+      </p:sp>
+      <p:sp>
+        <p:nvSpPr>
+          <p:cNvPr id="62" name="R1Text"/>
+          <p:cNvSpPr/>
+          <p:nvPr/>
+        </p:nvSpPr>
+        <p:spPr>
+          <a:xfrm>
+            <a:off x="6780000" y="2755000"/>
+            <a:ext cx="4750000" cy="430000"/>
+          </a:xfrm>
+          <a:prstGeom prst="rect">
+            <a:avLst/>
+          </a:prstGeom>
+          <a:noFill/>
+          <a:ln/>
+        </p:spPr>
+        <p:txBody>
+          <a:bodyPr wrap="square" lIns="0" tIns="0" rIns="0" bIns="0" rtlCol="0" anchor="t"/>
+          <a:lstStyle/>
+          <a:p>
+            <a:pPr marL="0" indent="0">
+              <a:buNone/>
+            </a:pPr>
+            <a:r>
+              <a:rPr lang="en-US" sz="1200" dirty="0">
+                <a:solidFill>
+                  <a:srgbClr val="1B1B1B"/>
+                </a:solidFill>
+                <a:latin typeface="Calibri" pitchFamily="34" charset="0"/>
+              </a:rPr>
+              <a:t>Job fails. ServiceNow incident auto-generated.</a:t>
+            </a:r>
+          </a:p>
+        </p:txBody>
+      </p:sp>
+      <p:sp>
+        <p:nvSpPr>
+          <p:cNvPr id="63" name="R2Dot"/>
+          <p:cNvSpPr/>
+          <p:nvPr/>
+        </p:nvSpPr>
+        <p:spPr>
+          <a:xfrm>
+            <a:off x="6460000" y="3170000"/>
+            <a:ext cx="182880" cy="182880"/>
+          </a:xfrm>
+          <a:prstGeom prst="ellipse">
+            <a:avLst/>
+          </a:prstGeom>
+          <a:solidFill>
+            <a:srgbClr val="FFCD41"/>
+          </a:solidFill>
+          <a:ln w="12700">
+            <a:solidFill>
+              <a:srgbClr val="FFCD41"/>
+            </a:solidFill>
+            <a:prstDash val="solid"/>
+          </a:ln>
+        </p:spPr>
+      </p:sp>
+      <p:sp>
+        <p:nvSpPr>
+          <p:cNvPr id="64" name="R2Time"/>
+          <p:cNvSpPr/>
+          <p:nvPr/>
+        </p:nvSpPr>
+        <p:spPr>
+          <a:xfrm>
+            <a:off x="6780000" y="3115000"/>
+            <a:ext cx="1100000" cy="260000"/>
+          </a:xfrm>
+          <a:prstGeom prst="rect">
+            <a:avLst/>
+          </a:prstGeom>
+          <a:noFill/>
+          <a:ln/>
+        </p:spPr>
+        <p:txBody>
+          <a:bodyPr wrap="square" lIns="0" tIns="0" rIns="0" bIns="0" rtlCol="0" anchor="ctr"/>
+          <a:lstStyle/>
+          <a:p>
+            <a:pPr marL="0" indent="0">
+              <a:buNone/>
+            </a:pPr>
+            <a:r>
+              <a:rPr lang="en-US" sz="1000" b="1" kern="0" spc="300" dirty="0">
+                <a:solidFill>
+                  <a:srgbClr val="8A8A8A"/>
+                </a:solidFill>
+                <a:latin typeface="Calibri" pitchFamily="34" charset="0"/>
+              </a:rPr>
+              <a:t>2:00 AM ET</a:t>
+            </a:r>
+          </a:p>
+        </p:txBody>
+      </p:sp>
+      <p:sp>
+        <p:nvSpPr>
+          <p:cNvPr id="65" name="R2Text"/>
+          <p:cNvSpPr/>
+          <p:nvPr/>
+        </p:nvSpPr>
+        <p:spPr>
+          <a:xfrm>
+            <a:off x="6780000" y="3355000"/>
+            <a:ext cx="4750000" cy="430000"/>
+          </a:xfrm>
+          <a:prstGeom prst="rect">
+            <a:avLst/>
+          </a:prstGeom>
+          <a:noFill/>
+          <a:ln/>
+        </p:spPr>
+        <p:txBody>
+          <a:bodyPr wrap="square" lIns="0" tIns="0" rIns="0" bIns="0" rtlCol="0" anchor="t"/>
+          <a:lstStyle/>
+          <a:p>
+            <a:pPr marL="0" indent="0">
+              <a:buNone/>
+            </a:pPr>
+            <a:r>
+              <a:rPr lang="en-US" sz="1200" dirty="0">
+                <a:solidFill>
+                  <a:srgbClr val="1B1B1B"/>
+                </a:solidFill>
+                <a:latin typeface="Calibri" pitchFamily="34" charset="0"/>
+              </a:rPr>
+              <a:t>AI investigation kicks off automatically  —  no human triage needed.</a:t>
+            </a:r>
+          </a:p>
+        </p:txBody>
+      </p:sp>
+      <p:sp>
+        <p:nvSpPr>
+          <p:cNvPr id="66" name="R3Dot"/>
+          <p:cNvSpPr/>
+          <p:nvPr/>
+        </p:nvSpPr>
+        <p:spPr>
+          <a:xfrm>
+            <a:off x="6460000" y="3770000"/>
+            <a:ext cx="182880" cy="182880"/>
+          </a:xfrm>
+          <a:prstGeom prst="ellipse">
+            <a:avLst/>
+          </a:prstGeom>
+          <a:solidFill>
+            <a:srgbClr val="FFCD41"/>
+          </a:solidFill>
+          <a:ln w="12700">
+            <a:solidFill>
+              <a:srgbClr val="FFCD41"/>
+            </a:solidFill>
+            <a:prstDash val="solid"/>
+          </a:ln>
+        </p:spPr>
+      </p:sp>
+      <p:sp>
+        <p:nvSpPr>
+          <p:cNvPr id="67" name="R3Time"/>
+          <p:cNvSpPr/>
+          <p:nvPr/>
+        </p:nvSpPr>
+        <p:spPr>
+          <a:xfrm>
+            <a:off x="6780000" y="3715000"/>
+            <a:ext cx="1800000" cy="260000"/>
+          </a:xfrm>
+          <a:prstGeom prst="rect">
+            <a:avLst/>
+          </a:prstGeom>
+          <a:noFill/>
+          <a:ln/>
+        </p:spPr>
+        <p:txBody>
+          <a:bodyPr wrap="square" lIns="0" tIns="0" rIns="0" bIns="0" rtlCol="0" anchor="ctr"/>
+          <a:lstStyle/>
+          <a:p>
+            <a:pPr marL="0" indent="0">
+              <a:buNone/>
+            </a:pPr>
+            <a:r>
+              <a:rPr lang="en-US" sz="1000" b="1" kern="0" spc="300" dirty="0">
+                <a:solidFill>
+                  <a:srgbClr val="8A8A8A"/>
+                </a:solidFill>
+                <a:latin typeface="Calibri" pitchFamily="34" charset="0"/>
+              </a:rPr>
+              <a:t>2:00 - 2:10 AM ET</a:t>
+            </a:r>
+          </a:p>
+        </p:txBody>
+      </p:sp>
+      <p:sp>
+        <p:nvSpPr>
+          <p:cNvPr id="68" name="R3Text"/>
+          <p:cNvSpPr/>
+          <p:nvPr/>
+        </p:nvSpPr>
+        <p:spPr>
+          <a:xfrm>
+            <a:off x="6780000" y="3955000"/>
+            <a:ext cx="4750000" cy="430000"/>
+          </a:xfrm>
+          <a:prstGeom prst="rect">
+            <a:avLst/>
+          </a:prstGeom>
+          <a:noFill/>
+          <a:ln/>
+        </p:spPr>
+        <p:txBody>
+          <a:bodyPr wrap="square" lIns="0" tIns="0" rIns="0" bIns="0" rtlCol="0" anchor="t"/>
+          <a:lstStyle/>
+          <a:p>
+            <a:pPr marL="0" indent="0">
+              <a:buNone/>
+            </a:pPr>
+            <a:r>
+              <a:rPr lang="en-US" sz="1200" dirty="0">
+                <a:solidFill>
+                  <a:srgbClr val="1B1B1B"/>
+                </a:solidFill>
+                <a:latin typeface="Calibri" pitchFamily="34" charset="0"/>
+              </a:rPr>
+              <a:t>Reads ServiceNow, Autosys, SSISDB and SSIS package source in parallel.</a:t>
+            </a:r>
+          </a:p>
+        </p:txBody>
+      </p:sp>
+      <p:sp>
+        <p:nvSpPr>
+          <p:cNvPr id="69" name="R4Dot"/>
+          <p:cNvSpPr/>
+          <p:nvPr/>
+        </p:nvSpPr>
+        <p:spPr>
+          <a:xfrm>
+            <a:off x="6460000" y="4370000"/>
+            <a:ext cx="182880" cy="182880"/>
+          </a:xfrm>
+          <a:prstGeom prst="ellipse">
+            <a:avLst/>
+          </a:prstGeom>
+          <a:solidFill>
+            <a:srgbClr val="FFCD41"/>
+          </a:solidFill>
+          <a:ln w="12700">
+            <a:solidFill>
+              <a:srgbClr val="FFCD41"/>
+            </a:solidFill>
+            <a:prstDash val="solid"/>
+          </a:ln>
+        </p:spPr>
+      </p:sp>
+      <p:sp>
+        <p:nvSpPr>
+          <p:cNvPr id="70" name="R4Time"/>
+          <p:cNvSpPr/>
+          <p:nvPr/>
+        </p:nvSpPr>
+        <p:spPr>
+          <a:xfrm>
+            <a:off x="6780000" y="4315000"/>
+            <a:ext cx="1100000" cy="260000"/>
+          </a:xfrm>
+          <a:prstGeom prst="rect">
+            <a:avLst/>
+          </a:prstGeom>
+          <a:noFill/>
+          <a:ln/>
+        </p:spPr>
+        <p:txBody>
+          <a:bodyPr wrap="square" lIns="0" tIns="0" rIns="0" bIns="0" rtlCol="0" anchor="ctr"/>
+          <a:lstStyle/>
+          <a:p>
+            <a:pPr marL="0" indent="0">
+              <a:buNone/>
+            </a:pPr>
+            <a:r>
+              <a:rPr lang="en-US" sz="1000" b="1" kern="0" spc="300" dirty="0">
+                <a:solidFill>
+                  <a:srgbClr val="8A8A8A"/>
+                </a:solidFill>
+                <a:latin typeface="Calibri" pitchFamily="34" charset="0"/>
+              </a:rPr>
+              <a:t>2:13 AM ET</a:t>
+            </a:r>
+          </a:p>
+        </p:txBody>
+      </p:sp>
+      <p:sp>
+        <p:nvSpPr>
+          <p:cNvPr id="71" name="R4Text"/>
+          <p:cNvSpPr/>
+          <p:nvPr/>
+        </p:nvSpPr>
+        <p:spPr>
+          <a:xfrm>
+            <a:off x="6780000" y="4555000"/>
+            <a:ext cx="4750000" cy="600000"/>
+          </a:xfrm>
+          <a:prstGeom prst="rect">
+            <a:avLst/>
+          </a:prstGeom>
+          <a:noFill/>
+          <a:ln/>
+        </p:spPr>
+        <p:txBody>
+          <a:bodyPr wrap="square" lIns="0" tIns="0" rIns="0" bIns="0" rtlCol="0" anchor="t"/>
+          <a:lstStyle/>
+          <a:p>
+            <a:pPr marL="0" indent="0">
+              <a:buNone/>
+            </a:pPr>
+            <a:r>
+              <a:rPr lang="en-US" sz="1200" dirty="0">
+                <a:solidFill>
+                  <a:srgbClr val="1B1B1B"/>
+                </a:solidFill>
+                <a:latin typeface="Calibri" pitchFamily="34" charset="0"/>
+              </a:rPr>
+              <a:t>Diagnosis with confidence score emailed to L2, offshore EGS, and US teams simultaneously.</a:t>
+            </a:r>
+          </a:p>
+        </p:txBody>
+      </p:sp>
+      <p:sp>
+        <p:nvSpPr>
+          <p:cNvPr id="72" name="R5Dot"/>
+          <p:cNvSpPr/>
+          <p:nvPr/>
+        </p:nvSpPr>
+        <p:spPr>
+          <a:xfrm>
+            <a:off x="6460000" y="5180000"/>
+            <a:ext cx="182880" cy="182880"/>
+          </a:xfrm>
+          <a:prstGeom prst="ellipse">
+            <a:avLst/>
+          </a:prstGeom>
+          <a:solidFill>
+            <a:srgbClr val="FFCD41"/>
+          </a:solidFill>
+          <a:ln w="12700">
+            <a:solidFill>
+              <a:srgbClr val="FFCD41"/>
+            </a:solidFill>
+            <a:prstDash val="solid"/>
+          </a:ln>
+        </p:spPr>
+      </p:sp>
+      <p:sp>
+        <p:nvSpPr>
+          <p:cNvPr id="73" name="R5Time"/>
+          <p:cNvSpPr/>
+          <p:nvPr/>
+        </p:nvSpPr>
+        <p:spPr>
+          <a:xfrm>
+            <a:off x="6780000" y="5125000"/>
+            <a:ext cx="1100000" cy="260000"/>
+          </a:xfrm>
+          <a:prstGeom prst="rect">
+            <a:avLst/>
+          </a:prstGeom>
+          <a:noFill/>
+          <a:ln/>
+        </p:spPr>
+        <p:txBody>
+          <a:bodyPr wrap="square" lIns="0" tIns="0" rIns="0" bIns="0" rtlCol="0" anchor="ctr"/>
+          <a:lstStyle/>
+          <a:p>
+            <a:pPr marL="0" indent="0">
+              <a:buNone/>
+            </a:pPr>
+            <a:r>
+              <a:rPr lang="en-US" sz="1000" b="1" kern="0" spc="300" dirty="0">
+                <a:solidFill>
+                  <a:srgbClr val="8A8A8A"/>
+                </a:solidFill>
+                <a:latin typeface="Calibri" pitchFamily="34" charset="0"/>
+              </a:rPr>
+              <a:t>2:13 AM ET</a:t>
+            </a:r>
+          </a:p>
+        </p:txBody>
+      </p:sp>
+      <p:sp>
+        <p:nvSpPr>
+          <p:cNvPr id="74" name="R5Text"/>
+          <p:cNvSpPr/>
+          <p:nvPr/>
+        </p:nvSpPr>
+        <p:spPr>
+          <a:xfrm>
+            <a:off x="6780000" y="5365000"/>
+            <a:ext cx="4750000" cy="600000"/>
+          </a:xfrm>
+          <a:prstGeom prst="rect">
+            <a:avLst/>
+          </a:prstGeom>
+          <a:noFill/>
+          <a:ln/>
+        </p:spPr>
+        <p:txBody>
+          <a:bodyPr wrap="square" lIns="0" tIns="0" rIns="0" bIns="0" rtlCol="0" anchor="t"/>
+          <a:lstStyle/>
+          <a:p>
+            <a:pPr marL="0" indent="0">
+              <a:buNone/>
+            </a:pPr>
+            <a:r>
+              <a:rPr lang="en-US" sz="1200" dirty="0">
+                <a:solidFill>
+                  <a:srgbClr val="1B1B1B"/>
+                </a:solidFill>
+                <a:latin typeface="Calibri" pitchFamily="34" charset="0"/>
+              </a:rPr>
+              <a:t>Offshore EGS acts on the diagnosis. Escalates to US DBAs only when SAR access is truly required.</a:t>
+            </a:r>
+          </a:p>
+        </p:txBody>
+      </p:sp>
+      <p:sp>
+        <p:nvSpPr>
+          <p:cNvPr id="75" name="R6Dot"/>
+          <p:cNvSpPr/>
+          <p:nvPr/>
+        </p:nvSpPr>
+        <p:spPr>
+          <a:xfrm>
+            <a:off x="6460000" y="5990000"/>
+            <a:ext cx="182880" cy="182880"/>
+          </a:xfrm>
+          <a:prstGeom prst="ellipse">
+            <a:avLst/>
+          </a:prstGeom>
+          <a:solidFill>
+            <a:srgbClr val="FFCD41"/>
+          </a:solidFill>
+          <a:ln w="12700">
+            <a:solidFill>
+              <a:srgbClr val="FFCD41"/>
+            </a:solidFill>
+            <a:prstDash val="solid"/>
+          </a:ln>
+        </p:spPr>
+      </p:sp>
+      <p:sp>
+        <p:nvSpPr>
+          <p:cNvPr id="76" name="R6Time"/>
+          <p:cNvSpPr/>
+          <p:nvPr/>
+        </p:nvSpPr>
+        <p:spPr>
+          <a:xfrm>
+            <a:off x="6780000" y="5935000"/>
+            <a:ext cx="1300000" cy="260000"/>
+          </a:xfrm>
+          <a:prstGeom prst="rect">
+            <a:avLst/>
+          </a:prstGeom>
+          <a:noFill/>
+          <a:ln/>
+        </p:spPr>
+        <p:txBody>
+          <a:bodyPr wrap="square" lIns="0" tIns="0" rIns="0" bIns="0" rtlCol="0" anchor="ctr"/>
+          <a:lstStyle/>
+          <a:p>
+            <a:pPr marL="0" indent="0">
+              <a:buNone/>
+            </a:pPr>
+            <a:r>
+              <a:rPr lang="en-US" sz="1000" b="1" kern="0" spc="300" dirty="0">
+                <a:solidFill>
+                  <a:srgbClr val="B89000"/>
+                </a:solidFill>
+                <a:latin typeface="Calibri" pitchFamily="34" charset="0"/>
+              </a:rPr>
+              <a:t>2:15 AM ET</a:t>
+            </a:r>
+          </a:p>
+        </p:txBody>
+      </p:sp>
+      <p:sp>
+        <p:nvSpPr>
+          <p:cNvPr id="77" name="R6Text"/>
+          <p:cNvSpPr/>
+          <p:nvPr/>
+        </p:nvSpPr>
+        <p:spPr>
+          <a:xfrm>
+            <a:off x="6780000" y="6175000"/>
+            <a:ext cx="4750000" cy="280000"/>
+          </a:xfrm>
+          <a:prstGeom prst="rect">
+            <a:avLst/>
+          </a:prstGeom>
+          <a:noFill/>
+          <a:ln/>
+        </p:spPr>
+        <p:txBody>
+          <a:bodyPr wrap="square" lIns="0" tIns="0" rIns="0" bIns="0" rtlCol="0" anchor="t"/>
+          <a:lstStyle/>
+          <a:p>
+            <a:pPr marL="0" indent="0">
+              <a:buNone/>
+            </a:pPr>
+            <a:r>
+              <a:rPr lang="en-US" sz="1200" b="1" dirty="0">
+                <a:solidFill>
+                  <a:srgbClr val="1B1B1B"/>
+                </a:solidFill>
+                <a:latin typeface="Calibri" pitchFamily="34" charset="0"/>
+              </a:rPr>
+              <a:t>Users updated within 15 minutes  —  any time, any region.</a:t>
+            </a:r>
           </a:p>
         </p:txBody>
       </p:sp>
